--- a/outputs/AI-Transforming-Hospital-Operations-SRS-2026.pptx
+++ b/outputs/AI-Transforming-Hospital-Operations-SRS-2026.pptx
@@ -2,28 +2,28 @@
 <file path=ppt/presentation.xml><?xml version="1.0" encoding="utf-8"?>
 <p:presentation xmlns:p="http://schemas.openxmlformats.org/presentationml/2006/main">
   <p:sldMasterIdLst>
-    <p:sldMasterId xmlns:r="http://schemas.openxmlformats.org/officeDocument/2006/relationships" id="2147483648" r:id="Rddd8694df5454cfa"/>
+    <p:sldMasterId xmlns:r="http://schemas.openxmlformats.org/officeDocument/2006/relationships" id="2147483648" r:id="R464a1ecc4a814994"/>
   </p:sldMasterIdLst>
   <p:notesMasterIdLst>
-    <p:notesMasterId xmlns:r="http://schemas.openxmlformats.org/officeDocument/2006/relationships" r:id="Rf57fd3cf80a54206"/>
+    <p:notesMasterId xmlns:r="http://schemas.openxmlformats.org/officeDocument/2006/relationships" r:id="R083272e6615d4e67"/>
   </p:notesMasterIdLst>
   <p:sldIdLst>
-    <p:sldId xmlns:r="http://schemas.openxmlformats.org/officeDocument/2006/relationships" id="256" r:id="Rbed8d5e6ca1b4d82"/>
-    <p:sldId xmlns:r="http://schemas.openxmlformats.org/officeDocument/2006/relationships" id="257" r:id="Rac7ef8d069b941f8"/>
-    <p:sldId xmlns:r="http://schemas.openxmlformats.org/officeDocument/2006/relationships" id="258" r:id="R6c5679285ac041fb"/>
-    <p:sldId xmlns:r="http://schemas.openxmlformats.org/officeDocument/2006/relationships" id="259" r:id="R3ef7a4a205e840d7"/>
-    <p:sldId xmlns:r="http://schemas.openxmlformats.org/officeDocument/2006/relationships" id="260" r:id="R934e00ba61184813"/>
-    <p:sldId xmlns:r="http://schemas.openxmlformats.org/officeDocument/2006/relationships" id="261" r:id="R8a4d19e946f64d15"/>
-    <p:sldId xmlns:r="http://schemas.openxmlformats.org/officeDocument/2006/relationships" id="262" r:id="R4efa15d5630842c8"/>
-    <p:sldId xmlns:r="http://schemas.openxmlformats.org/officeDocument/2006/relationships" id="263" r:id="R4c17eeeef4fa4595"/>
-    <p:sldId xmlns:r="http://schemas.openxmlformats.org/officeDocument/2006/relationships" id="264" r:id="Ref64111dffcb4d4f"/>
-    <p:sldId xmlns:r="http://schemas.openxmlformats.org/officeDocument/2006/relationships" id="265" r:id="R9f7351b106644bba"/>
-    <p:sldId xmlns:r="http://schemas.openxmlformats.org/officeDocument/2006/relationships" id="266" r:id="R861960757ac847ce"/>
-    <p:sldId xmlns:r="http://schemas.openxmlformats.org/officeDocument/2006/relationships" id="267" r:id="Rc22ec239a1744856"/>
-    <p:sldId xmlns:r="http://schemas.openxmlformats.org/officeDocument/2006/relationships" id="268" r:id="R05a7e99c1dce48a5"/>
-    <p:sldId xmlns:r="http://schemas.openxmlformats.org/officeDocument/2006/relationships" id="269" r:id="R5611130479ad4274"/>
-    <p:sldId xmlns:r="http://schemas.openxmlformats.org/officeDocument/2006/relationships" id="270" r:id="R8ea756fb12264011"/>
-    <p:sldId xmlns:r="http://schemas.openxmlformats.org/officeDocument/2006/relationships" id="271" r:id="Rc0e2fd511e784038"/>
+    <p:sldId xmlns:r="http://schemas.openxmlformats.org/officeDocument/2006/relationships" id="256" r:id="R353481b06b084180"/>
+    <p:sldId xmlns:r="http://schemas.openxmlformats.org/officeDocument/2006/relationships" id="257" r:id="R4004f2552f94452d"/>
+    <p:sldId xmlns:r="http://schemas.openxmlformats.org/officeDocument/2006/relationships" id="258" r:id="Rafd0cec0724241f2"/>
+    <p:sldId xmlns:r="http://schemas.openxmlformats.org/officeDocument/2006/relationships" id="259" r:id="R6551f2d3fca94408"/>
+    <p:sldId xmlns:r="http://schemas.openxmlformats.org/officeDocument/2006/relationships" id="260" r:id="Rd2598feb5f354124"/>
+    <p:sldId xmlns:r="http://schemas.openxmlformats.org/officeDocument/2006/relationships" id="261" r:id="R78d17f9905834f87"/>
+    <p:sldId xmlns:r="http://schemas.openxmlformats.org/officeDocument/2006/relationships" id="262" r:id="Rd589c00e73d944ce"/>
+    <p:sldId xmlns:r="http://schemas.openxmlformats.org/officeDocument/2006/relationships" id="263" r:id="R541899248ff84407"/>
+    <p:sldId xmlns:r="http://schemas.openxmlformats.org/officeDocument/2006/relationships" id="264" r:id="R20c36a9976fe4881"/>
+    <p:sldId xmlns:r="http://schemas.openxmlformats.org/officeDocument/2006/relationships" id="265" r:id="R0210fd83ea594c92"/>
+    <p:sldId xmlns:r="http://schemas.openxmlformats.org/officeDocument/2006/relationships" id="266" r:id="R42a99fe409184011"/>
+    <p:sldId xmlns:r="http://schemas.openxmlformats.org/officeDocument/2006/relationships" id="267" r:id="R8c2f68d0b3cc4d1e"/>
+    <p:sldId xmlns:r="http://schemas.openxmlformats.org/officeDocument/2006/relationships" id="268" r:id="R5623bf48132849a2"/>
+    <p:sldId xmlns:r="http://schemas.openxmlformats.org/officeDocument/2006/relationships" id="269" r:id="R1e5fb8492eef44d7"/>
+    <p:sldId xmlns:r="http://schemas.openxmlformats.org/officeDocument/2006/relationships" id="270" r:id="R819e6c251f2b4d4c"/>
+    <p:sldId xmlns:r="http://schemas.openxmlformats.org/officeDocument/2006/relationships" id="271" r:id="R4b7da2f81e4249cf"/>
   </p:sldIdLst>
   <p:sldSz cx="12192000" cy="6858000"/>
   <p:notesSz cx="6858000" cy="9144000"/>
@@ -1552,7 +1552,17 @@
           <a:lstStyle xmlns:a="http://schemas.openxmlformats.org/drawingml/2006/main"/>
           <a:p xmlns:a="http://schemas.openxmlformats.org/drawingml/2006/main">
             <a:r>
-              <a:t>Transition into the web app. Say: watch four operational workstreams—access, readiness, capacity, and flow—coordinate one synthetic robotic case. The relevant strategic levers are the Digital Front Door, Robotics, Longitudinal Care, and Task Automation.</a:t>
+              <a:t>Transition into the Hospital Lab. Say: same 600 synthetic episodes, same 30-day demand trace, same clinical priority—different operating rules. Reset the twin, run the guided sequence, and ask the audience to watch the constraint move.</a:t>
+            </a:r>
+          </a:p>
+          <a:p xmlns:a="http://schemas.openxmlformats.org/drawingml/2006/main">
+            <a:r>
+              <a:t/>
+            </a:r>
+          </a:p>
+          <a:p xmlns:a="http://schemas.openxmlformats.org/drawingml/2006/main">
+            <a:r>
+              <a:t>Credibility moments: Precision Medicine adds selective upstream work; Robotics releases local capacity without immediately moving enterprise throughput; the connected system ultimately exposes staffed recovery capacity as the next investment decision. All coefficients are illustrative assumptions, not observed AdventHealth performance.</a:t>
             </a:r>
           </a:p>
         </p:txBody>
@@ -1690,7 +1700,7 @@
   </p:cSld>
   <p:clrMap bg1="lt1" tx1="dk1" bg2="lt2" tx2="dk2" accent1="accent1" accent2="accent2" accent3="accent3" accent4="accent4" accent5="accent5" accent6="accent6" hlink="hlink" folHlink="folHlink"/>
   <p:sldLayoutIdLst>
-    <p:sldLayoutId xmlns:r="http://schemas.openxmlformats.org/officeDocument/2006/relationships" id="2147483649" r:id="R1eefb44ad6aa4c60"/>
+    <p:sldLayoutId xmlns:r="http://schemas.openxmlformats.org/officeDocument/2006/relationships" id="2147483649" r:id="Ra1062157300c464b"/>
   </p:sldLayoutIdLst>
   <p:txStyles>
     <p:titleStyle>
@@ -2241,7 +2251,7 @@
           <p:cNvPr id="1" name="">
             <a:extLst xmlns:a="http://schemas.openxmlformats.org/drawingml/2006/main">
               <a:ext uri="{FF2B5EF4-FFF2-40B4-BE49-F238E27FC236}">
-                <a16:creationId xmlns:a16="http://schemas.microsoft.com/office/drawing/2014/main" id="{B1546F70-4C58-40F7-AC8D-0C52AB90FD4B}"/>
+                <a16:creationId xmlns:a16="http://schemas.microsoft.com/office/drawing/2014/main" id="{0B708058-5F6F-4500-B7C7-FB21A0B6B5DE}"/>
               </a:ext>
             </a:extLst>
           </p:cNvPr>
@@ -2272,7 +2282,7 @@
           <p:cNvPr id="2" name="">
             <a:extLst xmlns:a="http://schemas.openxmlformats.org/drawingml/2006/main">
               <a:ext uri="{FF2B5EF4-FFF2-40B4-BE49-F238E27FC236}">
-                <a16:creationId xmlns:a16="http://schemas.microsoft.com/office/drawing/2014/main" id="{33CE38E9-3C94-49D9-9EE6-1D88514765FC}"/>
+                <a16:creationId xmlns:a16="http://schemas.microsoft.com/office/drawing/2014/main" id="{CC2255ED-7D4A-43C9-8D7B-FE2B44F2F8DB}"/>
               </a:ext>
             </a:extLst>
           </p:cNvPr>
@@ -2303,7 +2313,7 @@
           <p:cNvPr id="3" name="">
             <a:extLst xmlns:a="http://schemas.openxmlformats.org/drawingml/2006/main">
               <a:ext uri="{FF2B5EF4-FFF2-40B4-BE49-F238E27FC236}">
-                <a16:creationId xmlns:a16="http://schemas.microsoft.com/office/drawing/2014/main" id="{501D5A1D-0DF2-4630-9227-33A83F433626}"/>
+                <a16:creationId xmlns:a16="http://schemas.microsoft.com/office/drawing/2014/main" id="{71D1F309-F29B-4CFE-972C-82E8B169CF25}"/>
               </a:ext>
             </a:extLst>
           </p:cNvPr>
@@ -2334,7 +2344,7 @@
           <p:cNvPr id="4" name="">
             <a:extLst xmlns:a="http://schemas.openxmlformats.org/drawingml/2006/main">
               <a:ext uri="{FF2B5EF4-FFF2-40B4-BE49-F238E27FC236}">
-                <a16:creationId xmlns:a16="http://schemas.microsoft.com/office/drawing/2014/main" id="{1E212263-65C6-48C3-90B1-EBD4FC3543E0}"/>
+                <a16:creationId xmlns:a16="http://schemas.microsoft.com/office/drawing/2014/main" id="{A233B0BC-C486-4413-BA4E-E1531C11E5D4}"/>
               </a:ext>
             </a:extLst>
           </p:cNvPr>
@@ -2365,7 +2375,7 @@
           <p:cNvPr id="5" name="">
             <a:extLst xmlns:a="http://schemas.openxmlformats.org/drawingml/2006/main">
               <a:ext uri="{FF2B5EF4-FFF2-40B4-BE49-F238E27FC236}">
-                <a16:creationId xmlns:a16="http://schemas.microsoft.com/office/drawing/2014/main" id="{269FED05-632E-4C56-9453-1BF87B9D6BFA}"/>
+                <a16:creationId xmlns:a16="http://schemas.microsoft.com/office/drawing/2014/main" id="{3C9EF9F5-5FEF-4F42-9177-2B2DA7134C1F}"/>
               </a:ext>
             </a:extLst>
           </p:cNvPr>
@@ -2396,7 +2406,7 @@
           <p:cNvPr id="6" name="">
             <a:extLst xmlns:a="http://schemas.openxmlformats.org/drawingml/2006/main">
               <a:ext uri="{FF2B5EF4-FFF2-40B4-BE49-F238E27FC236}">
-                <a16:creationId xmlns:a16="http://schemas.microsoft.com/office/drawing/2014/main" id="{D3A2D33F-A25D-46D3-9F60-4B9DA45307E6}"/>
+                <a16:creationId xmlns:a16="http://schemas.microsoft.com/office/drawing/2014/main" id="{B5E67FB0-F969-4763-AC6F-6A3A54CB317D}"/>
               </a:ext>
             </a:extLst>
           </p:cNvPr>
@@ -2427,7 +2437,7 @@
           <p:cNvPr id="7" name="">
             <a:extLst xmlns:a="http://schemas.openxmlformats.org/drawingml/2006/main">
               <a:ext uri="{FF2B5EF4-FFF2-40B4-BE49-F238E27FC236}">
-                <a16:creationId xmlns:a16="http://schemas.microsoft.com/office/drawing/2014/main" id="{858E4498-47BB-4ADC-9E76-7F9FD42B8135}"/>
+                <a16:creationId xmlns:a16="http://schemas.microsoft.com/office/drawing/2014/main" id="{8759E0B8-2F5C-4AD1-AD44-5EB45FB8A465}"/>
               </a:ext>
             </a:extLst>
           </p:cNvPr>
@@ -2458,7 +2468,7 @@
           <p:cNvPr id="8" name="">
             <a:extLst xmlns:a="http://schemas.openxmlformats.org/drawingml/2006/main">
               <a:ext uri="{FF2B5EF4-FFF2-40B4-BE49-F238E27FC236}">
-                <a16:creationId xmlns:a16="http://schemas.microsoft.com/office/drawing/2014/main" id="{7077F916-491B-48AE-99DA-DEB51DFF1142}"/>
+                <a16:creationId xmlns:a16="http://schemas.microsoft.com/office/drawing/2014/main" id="{7D715476-5F90-4D08-855C-47E2F01C7997}"/>
               </a:ext>
             </a:extLst>
           </p:cNvPr>
@@ -2489,7 +2499,7 @@
           <p:cNvPr id="9" name="">
             <a:extLst xmlns:a="http://schemas.openxmlformats.org/drawingml/2006/main">
               <a:ext uri="{FF2B5EF4-FFF2-40B4-BE49-F238E27FC236}">
-                <a16:creationId xmlns:a16="http://schemas.microsoft.com/office/drawing/2014/main" id="{9E03AF6F-E86D-4F45-BD98-C308CB5C1CC6}"/>
+                <a16:creationId xmlns:a16="http://schemas.microsoft.com/office/drawing/2014/main" id="{7A616909-0C6A-45F9-B911-3083606DDD43}"/>
               </a:ext>
             </a:extLst>
           </p:cNvPr>
@@ -2520,7 +2530,7 @@
           <p:cNvPr id="10" name="">
             <a:extLst xmlns:a="http://schemas.openxmlformats.org/drawingml/2006/main">
               <a:ext uri="{FF2B5EF4-FFF2-40B4-BE49-F238E27FC236}">
-                <a16:creationId xmlns:a16="http://schemas.microsoft.com/office/drawing/2014/main" id="{52195915-5E43-4282-8C0E-60B081E1D39F}"/>
+                <a16:creationId xmlns:a16="http://schemas.microsoft.com/office/drawing/2014/main" id="{FEAA2257-A67C-45FC-A37A-51071C4A141B}"/>
               </a:ext>
             </a:extLst>
           </p:cNvPr>
@@ -2551,7 +2561,7 @@
           <p:cNvPr id="11" name="">
             <a:extLst xmlns:a="http://schemas.openxmlformats.org/drawingml/2006/main">
               <a:ext uri="{FF2B5EF4-FFF2-40B4-BE49-F238E27FC236}">
-                <a16:creationId xmlns:a16="http://schemas.microsoft.com/office/drawing/2014/main" id="{B44500B3-4B52-44EA-B55E-2F72C6343667}"/>
+                <a16:creationId xmlns:a16="http://schemas.microsoft.com/office/drawing/2014/main" id="{3397292B-45EF-4FCB-ABC7-B4AF8AE476FD}"/>
               </a:ext>
             </a:extLst>
           </p:cNvPr>
@@ -2582,7 +2592,7 @@
           <p:cNvPr id="12" name="">
             <a:extLst xmlns:a="http://schemas.openxmlformats.org/drawingml/2006/main">
               <a:ext uri="{FF2B5EF4-FFF2-40B4-BE49-F238E27FC236}">
-                <a16:creationId xmlns:a16="http://schemas.microsoft.com/office/drawing/2014/main" id="{C5CBA4F8-D8CA-417B-88FA-665158D8FAFC}"/>
+                <a16:creationId xmlns:a16="http://schemas.microsoft.com/office/drawing/2014/main" id="{0F997F9C-C5DD-4B4D-A150-15395586F2AF}"/>
               </a:ext>
             </a:extLst>
           </p:cNvPr>
@@ -2613,7 +2623,7 @@
           <p:cNvPr id="13" name="">
             <a:extLst xmlns:a="http://schemas.openxmlformats.org/drawingml/2006/main">
               <a:ext uri="{FF2B5EF4-FFF2-40B4-BE49-F238E27FC236}">
-                <a16:creationId xmlns:a16="http://schemas.microsoft.com/office/drawing/2014/main" id="{786AAC29-E092-4E1B-9A15-4D3EA33A84B5}"/>
+                <a16:creationId xmlns:a16="http://schemas.microsoft.com/office/drawing/2014/main" id="{B4145A39-AACB-4208-B7DF-185617623347}"/>
               </a:ext>
             </a:extLst>
           </p:cNvPr>
@@ -2644,7 +2654,7 @@
           <p:cNvPr id="14" name="">
             <a:extLst xmlns:a="http://schemas.openxmlformats.org/drawingml/2006/main">
               <a:ext uri="{FF2B5EF4-FFF2-40B4-BE49-F238E27FC236}">
-                <a16:creationId xmlns:a16="http://schemas.microsoft.com/office/drawing/2014/main" id="{60F5CDCF-C66A-4C14-9DE7-51DB505A399E}"/>
+                <a16:creationId xmlns:a16="http://schemas.microsoft.com/office/drawing/2014/main" id="{17C6DA2B-018C-43BE-9209-C5CF4375A585}"/>
               </a:ext>
             </a:extLst>
           </p:cNvPr>
@@ -2675,7 +2685,7 @@
           <p:cNvPr id="15" name="">
             <a:extLst xmlns:a="http://schemas.openxmlformats.org/drawingml/2006/main">
               <a:ext uri="{FF2B5EF4-FFF2-40B4-BE49-F238E27FC236}">
-                <a16:creationId xmlns:a16="http://schemas.microsoft.com/office/drawing/2014/main" id="{946DBCEF-06F5-43B6-85F8-0E06B864DCD2}"/>
+                <a16:creationId xmlns:a16="http://schemas.microsoft.com/office/drawing/2014/main" id="{6A304AFF-8762-4A06-9867-C83812BB3CDC}"/>
               </a:ext>
             </a:extLst>
           </p:cNvPr>
@@ -2706,7 +2716,7 @@
           <p:cNvPr id="16" name="">
             <a:extLst xmlns:a="http://schemas.openxmlformats.org/drawingml/2006/main">
               <a:ext uri="{FF2B5EF4-FFF2-40B4-BE49-F238E27FC236}">
-                <a16:creationId xmlns:a16="http://schemas.microsoft.com/office/drawing/2014/main" id="{4740CB36-D293-47EE-800E-9ED8F6318010}"/>
+                <a16:creationId xmlns:a16="http://schemas.microsoft.com/office/drawing/2014/main" id="{BD677C29-AD8C-47E4-96A2-F35D8E4B4E2E}"/>
               </a:ext>
             </a:extLst>
           </p:cNvPr>
@@ -2737,7 +2747,7 @@
           <p:cNvPr id="17" name="">
             <a:extLst xmlns:a="http://schemas.openxmlformats.org/drawingml/2006/main">
               <a:ext uri="{FF2B5EF4-FFF2-40B4-BE49-F238E27FC236}">
-                <a16:creationId xmlns:a16="http://schemas.microsoft.com/office/drawing/2014/main" id="{F205F433-B9A4-4AA7-A012-A0F1F51A863E}"/>
+                <a16:creationId xmlns:a16="http://schemas.microsoft.com/office/drawing/2014/main" id="{54F55FDD-FE16-429E-B7C6-35D39995DA23}"/>
               </a:ext>
             </a:extLst>
           </p:cNvPr>
@@ -2768,7 +2778,7 @@
           <p:cNvPr id="18" name="">
             <a:extLst xmlns:a="http://schemas.openxmlformats.org/drawingml/2006/main">
               <a:ext uri="{FF2B5EF4-FFF2-40B4-BE49-F238E27FC236}">
-                <a16:creationId xmlns:a16="http://schemas.microsoft.com/office/drawing/2014/main" id="{25955278-0541-4F59-A554-012412F9C1FD}"/>
+                <a16:creationId xmlns:a16="http://schemas.microsoft.com/office/drawing/2014/main" id="{DEB1147B-83B7-492A-84E0-ACE20A32B2A1}"/>
               </a:ext>
             </a:extLst>
           </p:cNvPr>
@@ -2799,7 +2809,7 @@
           <p:cNvPr id="19" name="">
             <a:extLst xmlns:a="http://schemas.openxmlformats.org/drawingml/2006/main">
               <a:ext uri="{FF2B5EF4-FFF2-40B4-BE49-F238E27FC236}">
-                <a16:creationId xmlns:a16="http://schemas.microsoft.com/office/drawing/2014/main" id="{45D9A0E1-8F5A-4529-A9EF-8E16156B780B}"/>
+                <a16:creationId xmlns:a16="http://schemas.microsoft.com/office/drawing/2014/main" id="{49A346C3-CC14-4570-A67D-0FDCB040E845}"/>
               </a:ext>
             </a:extLst>
           </p:cNvPr>
@@ -2830,7 +2840,7 @@
           <p:cNvPr id="20" name="">
             <a:extLst xmlns:a="http://schemas.openxmlformats.org/drawingml/2006/main">
               <a:ext uri="{FF2B5EF4-FFF2-40B4-BE49-F238E27FC236}">
-                <a16:creationId xmlns:a16="http://schemas.microsoft.com/office/drawing/2014/main" id="{D26967B4-8C99-40E8-96F3-DFECB91BDAAB}"/>
+                <a16:creationId xmlns:a16="http://schemas.microsoft.com/office/drawing/2014/main" id="{2DB64C96-908A-4D02-8974-17EFF7C9B4A5}"/>
               </a:ext>
             </a:extLst>
           </p:cNvPr>
@@ -2861,7 +2871,7 @@
           <p:cNvPr id="21" name="">
             <a:extLst xmlns:a="http://schemas.openxmlformats.org/drawingml/2006/main">
               <a:ext uri="{FF2B5EF4-FFF2-40B4-BE49-F238E27FC236}">
-                <a16:creationId xmlns:a16="http://schemas.microsoft.com/office/drawing/2014/main" id="{1F479302-5C0F-44DD-92C3-B1D33CBEF5AA}"/>
+                <a16:creationId xmlns:a16="http://schemas.microsoft.com/office/drawing/2014/main" id="{787F48E9-E0E3-4B29-8E4D-B905DCAE0B97}"/>
               </a:ext>
             </a:extLst>
           </p:cNvPr>
@@ -2892,7 +2902,7 @@
           <p:cNvPr id="22" name="">
             <a:extLst xmlns:a="http://schemas.openxmlformats.org/drawingml/2006/main">
               <a:ext uri="{FF2B5EF4-FFF2-40B4-BE49-F238E27FC236}">
-                <a16:creationId xmlns:a16="http://schemas.microsoft.com/office/drawing/2014/main" id="{F7596277-0E8D-43A3-8216-6ED67E2F3C3A}"/>
+                <a16:creationId xmlns:a16="http://schemas.microsoft.com/office/drawing/2014/main" id="{BA338D3D-758F-44CC-8A6E-2D73A2584520}"/>
               </a:ext>
             </a:extLst>
           </p:cNvPr>
@@ -2923,7 +2933,7 @@
           <p:cNvPr id="23" name="">
             <a:extLst xmlns:a="http://schemas.openxmlformats.org/drawingml/2006/main">
               <a:ext uri="{FF2B5EF4-FFF2-40B4-BE49-F238E27FC236}">
-                <a16:creationId xmlns:a16="http://schemas.microsoft.com/office/drawing/2014/main" id="{E19EE019-27B8-4E94-9D20-8B318018028F}"/>
+                <a16:creationId xmlns:a16="http://schemas.microsoft.com/office/drawing/2014/main" id="{B2A7F0B1-A71B-4883-BDCE-7D953C2920AD}"/>
               </a:ext>
             </a:extLst>
           </p:cNvPr>
@@ -2954,7 +2964,7 @@
           <p:cNvPr id="24" name="">
             <a:extLst xmlns:a="http://schemas.openxmlformats.org/drawingml/2006/main">
               <a:ext uri="{FF2B5EF4-FFF2-40B4-BE49-F238E27FC236}">
-                <a16:creationId xmlns:a16="http://schemas.microsoft.com/office/drawing/2014/main" id="{BE7472D5-B1C6-4736-996A-AF74CF2D2318}"/>
+                <a16:creationId xmlns:a16="http://schemas.microsoft.com/office/drawing/2014/main" id="{EADB30C8-C5B5-4738-9E97-FC46D57120E5}"/>
               </a:ext>
             </a:extLst>
           </p:cNvPr>
@@ -2985,7 +2995,7 @@
           <p:cNvPr id="25" name="">
             <a:extLst xmlns:a="http://schemas.openxmlformats.org/drawingml/2006/main">
               <a:ext uri="{FF2B5EF4-FFF2-40B4-BE49-F238E27FC236}">
-                <a16:creationId xmlns:a16="http://schemas.microsoft.com/office/drawing/2014/main" id="{2DF790CF-1F3E-434C-B8FE-17838046D66D}"/>
+                <a16:creationId xmlns:a16="http://schemas.microsoft.com/office/drawing/2014/main" id="{08BFEFDD-1FCE-4ADF-9FA1-E2B9D6934812}"/>
               </a:ext>
             </a:extLst>
           </p:cNvPr>
@@ -3016,7 +3026,7 @@
           <p:cNvPr id="26" name="">
             <a:extLst xmlns:a="http://schemas.openxmlformats.org/drawingml/2006/main">
               <a:ext uri="{FF2B5EF4-FFF2-40B4-BE49-F238E27FC236}">
-                <a16:creationId xmlns:a16="http://schemas.microsoft.com/office/drawing/2014/main" id="{E66C0EAA-B460-4484-A257-0F7469C6DCEB}"/>
+                <a16:creationId xmlns:a16="http://schemas.microsoft.com/office/drawing/2014/main" id="{E174EB19-1631-4F1E-BB8E-FF381B37D814}"/>
               </a:ext>
             </a:extLst>
           </p:cNvPr>
@@ -3047,7 +3057,7 @@
           <p:cNvPr id="27" name="">
             <a:extLst xmlns:a="http://schemas.openxmlformats.org/drawingml/2006/main">
               <a:ext uri="{FF2B5EF4-FFF2-40B4-BE49-F238E27FC236}">
-                <a16:creationId xmlns:a16="http://schemas.microsoft.com/office/drawing/2014/main" id="{6951A48D-1E62-4412-B6D6-114E71B2C223}"/>
+                <a16:creationId xmlns:a16="http://schemas.microsoft.com/office/drawing/2014/main" id="{949A979D-293A-4A2C-8B6D-95C1EDF786C5}"/>
               </a:ext>
             </a:extLst>
           </p:cNvPr>
@@ -3078,7 +3088,7 @@
           <p:cNvPr id="28" name="">
             <a:extLst xmlns:a="http://schemas.openxmlformats.org/drawingml/2006/main">
               <a:ext uri="{FF2B5EF4-FFF2-40B4-BE49-F238E27FC236}">
-                <a16:creationId xmlns:a16="http://schemas.microsoft.com/office/drawing/2014/main" id="{B9B95514-83D6-4F5D-906A-991F4E4DF4FA}"/>
+                <a16:creationId xmlns:a16="http://schemas.microsoft.com/office/drawing/2014/main" id="{991809F1-F119-4050-A591-48558662D79C}"/>
               </a:ext>
             </a:extLst>
           </p:cNvPr>
@@ -3109,7 +3119,7 @@
           <p:cNvPr id="29" name="">
             <a:extLst xmlns:a="http://schemas.openxmlformats.org/drawingml/2006/main">
               <a:ext uri="{FF2B5EF4-FFF2-40B4-BE49-F238E27FC236}">
-                <a16:creationId xmlns:a16="http://schemas.microsoft.com/office/drawing/2014/main" id="{5D2980EB-D018-4610-A3F8-C133CE57A25D}"/>
+                <a16:creationId xmlns:a16="http://schemas.microsoft.com/office/drawing/2014/main" id="{DEE9581F-39D2-49D1-A904-73709F7FC882}"/>
               </a:ext>
             </a:extLst>
           </p:cNvPr>
@@ -3140,7 +3150,7 @@
           <p:cNvPr id="30" name="">
             <a:extLst xmlns:a="http://schemas.openxmlformats.org/drawingml/2006/main">
               <a:ext uri="{FF2B5EF4-FFF2-40B4-BE49-F238E27FC236}">
-                <a16:creationId xmlns:a16="http://schemas.microsoft.com/office/drawing/2014/main" id="{AECC25E4-AFA7-42BA-898D-AAF74739EF00}"/>
+                <a16:creationId xmlns:a16="http://schemas.microsoft.com/office/drawing/2014/main" id="{7F4A300E-7B39-427F-8823-012A336BD5D3}"/>
               </a:ext>
             </a:extLst>
           </p:cNvPr>
@@ -3171,7 +3181,7 @@
           <p:cNvPr id="31" name="">
             <a:extLst xmlns:a="http://schemas.openxmlformats.org/drawingml/2006/main">
               <a:ext uri="{FF2B5EF4-FFF2-40B4-BE49-F238E27FC236}">
-                <a16:creationId xmlns:a16="http://schemas.microsoft.com/office/drawing/2014/main" id="{1D2270DE-5BA3-4957-91FF-93DF5205C109}"/>
+                <a16:creationId xmlns:a16="http://schemas.microsoft.com/office/drawing/2014/main" id="{8CD912D9-60A6-4ABB-A102-4BEEB64FDC01}"/>
               </a:ext>
             </a:extLst>
           </p:cNvPr>
@@ -3202,7 +3212,7 @@
           <p:cNvPr id="32" name="">
             <a:extLst xmlns:a="http://schemas.openxmlformats.org/drawingml/2006/main">
               <a:ext uri="{FF2B5EF4-FFF2-40B4-BE49-F238E27FC236}">
-                <a16:creationId xmlns:a16="http://schemas.microsoft.com/office/drawing/2014/main" id="{FF502E29-BE9E-4004-9BCF-1DAA8842FC7E}"/>
+                <a16:creationId xmlns:a16="http://schemas.microsoft.com/office/drawing/2014/main" id="{94440590-7C85-4E91-BCF6-1AD1EE69A86F}"/>
               </a:ext>
             </a:extLst>
           </p:cNvPr>
@@ -3258,7 +3268,7 @@
           <p:cNvPr id="33" name="">
             <a:extLst xmlns:a="http://schemas.openxmlformats.org/drawingml/2006/main">
               <a:ext uri="{FF2B5EF4-FFF2-40B4-BE49-F238E27FC236}">
-                <a16:creationId xmlns:a16="http://schemas.microsoft.com/office/drawing/2014/main" id="{85128A00-6ECC-4995-B9BB-3AD343DD49EE}"/>
+                <a16:creationId xmlns:a16="http://schemas.microsoft.com/office/drawing/2014/main" id="{94F5040C-C40A-41E7-993E-4C0E29B374C5}"/>
               </a:ext>
             </a:extLst>
           </p:cNvPr>
@@ -3337,7 +3347,7 @@
           <p:cNvPr id="34" name="">
             <a:extLst xmlns:a="http://schemas.openxmlformats.org/drawingml/2006/main">
               <a:ext uri="{FF2B5EF4-FFF2-40B4-BE49-F238E27FC236}">
-                <a16:creationId xmlns:a16="http://schemas.microsoft.com/office/drawing/2014/main" id="{C229B580-96E1-4259-AE32-6F1019D7B80F}"/>
+                <a16:creationId xmlns:a16="http://schemas.microsoft.com/office/drawing/2014/main" id="{92EF708A-2E63-483E-81E4-0960662AE8EF}"/>
               </a:ext>
             </a:extLst>
           </p:cNvPr>
@@ -3416,7 +3426,7 @@
           <p:cNvPr id="35" name="">
             <a:extLst xmlns:a="http://schemas.openxmlformats.org/drawingml/2006/main">
               <a:ext uri="{FF2B5EF4-FFF2-40B4-BE49-F238E27FC236}">
-                <a16:creationId xmlns:a16="http://schemas.microsoft.com/office/drawing/2014/main" id="{C7AFE075-FA4A-4009-92EF-17DE35FBCC5D}"/>
+                <a16:creationId xmlns:a16="http://schemas.microsoft.com/office/drawing/2014/main" id="{64A019CD-CA00-44C8-8813-30EF7B4DCD38}"/>
               </a:ext>
             </a:extLst>
           </p:cNvPr>
@@ -3451,7 +3461,7 @@
           <p:cNvPr id="36" name="">
             <a:extLst xmlns:a="http://schemas.openxmlformats.org/drawingml/2006/main">
               <a:ext uri="{FF2B5EF4-FFF2-40B4-BE49-F238E27FC236}">
-                <a16:creationId xmlns:a16="http://schemas.microsoft.com/office/drawing/2014/main" id="{4781B9EB-6408-48CC-9D2A-2E205FD80FBA}"/>
+                <a16:creationId xmlns:a16="http://schemas.microsoft.com/office/drawing/2014/main" id="{49C6CC6E-35E0-4292-852C-8870D2F378CF}"/>
               </a:ext>
             </a:extLst>
           </p:cNvPr>
@@ -3507,7 +3517,7 @@
           <p:cNvPr id="37" name="">
             <a:extLst xmlns:a="http://schemas.openxmlformats.org/drawingml/2006/main">
               <a:ext uri="{FF2B5EF4-FFF2-40B4-BE49-F238E27FC236}">
-                <a16:creationId xmlns:a16="http://schemas.microsoft.com/office/drawing/2014/main" id="{AE298F64-E2AE-43BC-9928-56CB41C4C294}"/>
+                <a16:creationId xmlns:a16="http://schemas.microsoft.com/office/drawing/2014/main" id="{AEAFB0C1-5B12-4028-9C1C-F53BB4DCDCAF}"/>
               </a:ext>
             </a:extLst>
           </p:cNvPr>
@@ -3563,7 +3573,7 @@
           <p:cNvPr id="38" name="">
             <a:extLst xmlns:a="http://schemas.openxmlformats.org/drawingml/2006/main">
               <a:ext uri="{FF2B5EF4-FFF2-40B4-BE49-F238E27FC236}">
-                <a16:creationId xmlns:a16="http://schemas.microsoft.com/office/drawing/2014/main" id="{9D64220B-61E5-4924-BC56-1B914B797FCD}"/>
+                <a16:creationId xmlns:a16="http://schemas.microsoft.com/office/drawing/2014/main" id="{F5273F34-A176-41BC-BD66-B93D3BFC326C}"/>
               </a:ext>
             </a:extLst>
           </p:cNvPr>
@@ -3619,7 +3629,7 @@
           <p:cNvPr id="39" name="">
             <a:extLst xmlns:a="http://schemas.openxmlformats.org/drawingml/2006/main">
               <a:ext uri="{FF2B5EF4-FFF2-40B4-BE49-F238E27FC236}">
-                <a16:creationId xmlns:a16="http://schemas.microsoft.com/office/drawing/2014/main" id="{DD4B573C-E460-40E7-9460-06996799282E}"/>
+                <a16:creationId xmlns:a16="http://schemas.microsoft.com/office/drawing/2014/main" id="{69D8117E-4D92-4FF1-AB82-7B9E8399E08D}"/>
               </a:ext>
             </a:extLst>
           </p:cNvPr>
@@ -3650,7 +3660,7 @@
           <p:cNvPr id="40" name="">
             <a:extLst xmlns:a="http://schemas.openxmlformats.org/drawingml/2006/main">
               <a:ext uri="{FF2B5EF4-FFF2-40B4-BE49-F238E27FC236}">
-                <a16:creationId xmlns:a16="http://schemas.microsoft.com/office/drawing/2014/main" id="{50AE4D44-6480-47D6-A0D8-76622A19013D}"/>
+                <a16:creationId xmlns:a16="http://schemas.microsoft.com/office/drawing/2014/main" id="{DF5AD4CA-97A2-47A8-A621-2C8FB87C282C}"/>
               </a:ext>
             </a:extLst>
           </p:cNvPr>
@@ -3706,7 +3716,7 @@
           <p:cNvPr id="41" name="">
             <a:extLst xmlns:a="http://schemas.openxmlformats.org/drawingml/2006/main">
               <a:ext uri="{FF2B5EF4-FFF2-40B4-BE49-F238E27FC236}">
-                <a16:creationId xmlns:a16="http://schemas.microsoft.com/office/drawing/2014/main" id="{73FD3FA4-B60A-467B-8818-00E83E7EF882}"/>
+                <a16:creationId xmlns:a16="http://schemas.microsoft.com/office/drawing/2014/main" id="{8FBD4CAE-5AF9-42F2-9544-67557491B3E9}"/>
               </a:ext>
             </a:extLst>
           </p:cNvPr>
@@ -3762,7 +3772,7 @@
           <p:cNvPr id="42" name="">
             <a:extLst xmlns:a="http://schemas.openxmlformats.org/drawingml/2006/main">
               <a:ext uri="{FF2B5EF4-FFF2-40B4-BE49-F238E27FC236}">
-                <a16:creationId xmlns:a16="http://schemas.microsoft.com/office/drawing/2014/main" id="{FEF88293-D716-4530-A95E-F2E1C59BB4CA}"/>
+                <a16:creationId xmlns:a16="http://schemas.microsoft.com/office/drawing/2014/main" id="{0BE0611E-74E9-4AAC-886A-9BC9547EF53E}"/>
               </a:ext>
             </a:extLst>
           </p:cNvPr>
@@ -3793,7 +3803,7 @@
           <p:cNvPr id="43" name="">
             <a:extLst xmlns:a="http://schemas.openxmlformats.org/drawingml/2006/main">
               <a:ext uri="{FF2B5EF4-FFF2-40B4-BE49-F238E27FC236}">
-                <a16:creationId xmlns:a16="http://schemas.microsoft.com/office/drawing/2014/main" id="{8BFF6B66-A73F-4B5D-BFD1-6F7384746DE1}"/>
+                <a16:creationId xmlns:a16="http://schemas.microsoft.com/office/drawing/2014/main" id="{D97A0705-FD83-43A3-B889-120BC82D3E31}"/>
               </a:ext>
             </a:extLst>
           </p:cNvPr>
@@ -3849,7 +3859,7 @@
           <p:cNvPr id="44" name="">
             <a:extLst xmlns:a="http://schemas.openxmlformats.org/drawingml/2006/main">
               <a:ext uri="{FF2B5EF4-FFF2-40B4-BE49-F238E27FC236}">
-                <a16:creationId xmlns:a16="http://schemas.microsoft.com/office/drawing/2014/main" id="{ACC65207-77A9-4A60-A3D7-840291BCAA41}"/>
+                <a16:creationId xmlns:a16="http://schemas.microsoft.com/office/drawing/2014/main" id="{F1D80941-407A-4EB4-87D2-C1F52773CA93}"/>
               </a:ext>
             </a:extLst>
           </p:cNvPr>
@@ -3905,7 +3915,7 @@
           <p:cNvPr id="45" name="">
             <a:extLst xmlns:a="http://schemas.openxmlformats.org/drawingml/2006/main">
               <a:ext uri="{FF2B5EF4-FFF2-40B4-BE49-F238E27FC236}">
-                <a16:creationId xmlns:a16="http://schemas.microsoft.com/office/drawing/2014/main" id="{54C2B24E-0116-46D1-B5F2-87112FA3E1A3}"/>
+                <a16:creationId xmlns:a16="http://schemas.microsoft.com/office/drawing/2014/main" id="{45696067-766A-45BB-AA2B-B826903E986C}"/>
               </a:ext>
             </a:extLst>
           </p:cNvPr>
@@ -3936,7 +3946,7 @@
           <p:cNvPr id="46" name="">
             <a:extLst xmlns:a="http://schemas.openxmlformats.org/drawingml/2006/main">
               <a:ext uri="{FF2B5EF4-FFF2-40B4-BE49-F238E27FC236}">
-                <a16:creationId xmlns:a16="http://schemas.microsoft.com/office/drawing/2014/main" id="{BB19D8C5-3936-4560-822C-51224E532822}"/>
+                <a16:creationId xmlns:a16="http://schemas.microsoft.com/office/drawing/2014/main" id="{82148DBA-4598-49FE-BDE2-912E9709FE05}"/>
               </a:ext>
             </a:extLst>
           </p:cNvPr>
@@ -3992,7 +4002,7 @@
           <p:cNvPr id="47" name="">
             <a:extLst xmlns:a="http://schemas.openxmlformats.org/drawingml/2006/main">
               <a:ext uri="{FF2B5EF4-FFF2-40B4-BE49-F238E27FC236}">
-                <a16:creationId xmlns:a16="http://schemas.microsoft.com/office/drawing/2014/main" id="{C11F8953-85D6-49C3-BB13-68B314FF4124}"/>
+                <a16:creationId xmlns:a16="http://schemas.microsoft.com/office/drawing/2014/main" id="{F556CE14-2B3B-447A-85A8-D2083AEBDF26}"/>
               </a:ext>
             </a:extLst>
           </p:cNvPr>
@@ -4048,7 +4058,7 @@
           <p:cNvPr id="48" name="">
             <a:extLst xmlns:a="http://schemas.openxmlformats.org/drawingml/2006/main">
               <a:ext uri="{FF2B5EF4-FFF2-40B4-BE49-F238E27FC236}">
-                <a16:creationId xmlns:a16="http://schemas.microsoft.com/office/drawing/2014/main" id="{E2430B1D-1915-4B12-A8B3-2FAFBB6C13A1}"/>
+                <a16:creationId xmlns:a16="http://schemas.microsoft.com/office/drawing/2014/main" id="{2601DB4E-7D8C-4FC9-B9E5-DA302506964F}"/>
               </a:ext>
             </a:extLst>
           </p:cNvPr>
@@ -4079,7 +4089,7 @@
           <p:cNvPr id="49" name="">
             <a:extLst xmlns:a="http://schemas.openxmlformats.org/drawingml/2006/main">
               <a:ext uri="{FF2B5EF4-FFF2-40B4-BE49-F238E27FC236}">
-                <a16:creationId xmlns:a16="http://schemas.microsoft.com/office/drawing/2014/main" id="{507426E2-C90E-4F11-8C95-6CC28085742A}"/>
+                <a16:creationId xmlns:a16="http://schemas.microsoft.com/office/drawing/2014/main" id="{E18DBF0D-E3FA-4793-B98E-F2E868DAA4F2}"/>
               </a:ext>
             </a:extLst>
           </p:cNvPr>
@@ -4135,7 +4145,7 @@
           <p:cNvPr id="50" name="">
             <a:extLst xmlns:a="http://schemas.openxmlformats.org/drawingml/2006/main">
               <a:ext uri="{FF2B5EF4-FFF2-40B4-BE49-F238E27FC236}">
-                <a16:creationId xmlns:a16="http://schemas.microsoft.com/office/drawing/2014/main" id="{F3C9B278-96C8-47B6-B8A2-8DC5CF84A820}"/>
+                <a16:creationId xmlns:a16="http://schemas.microsoft.com/office/drawing/2014/main" id="{74C85A93-ED1F-4DFE-BDFA-1BF34BDBA87E}"/>
               </a:ext>
             </a:extLst>
           </p:cNvPr>
@@ -4191,7 +4201,7 @@
           <p:cNvPr id="51" name="">
             <a:extLst xmlns:a="http://schemas.openxmlformats.org/drawingml/2006/main">
               <a:ext uri="{FF2B5EF4-FFF2-40B4-BE49-F238E27FC236}">
-                <a16:creationId xmlns:a16="http://schemas.microsoft.com/office/drawing/2014/main" id="{264BFBA2-62F1-462A-85A6-FCB8BD24F9C8}"/>
+                <a16:creationId xmlns:a16="http://schemas.microsoft.com/office/drawing/2014/main" id="{F653E1E3-5CD3-454B-9057-4706FB34A34F}"/>
               </a:ext>
             </a:extLst>
           </p:cNvPr>
@@ -4247,7 +4257,7 @@
           <p:cNvPr id="52" name="">
             <a:extLst xmlns:a="http://schemas.openxmlformats.org/drawingml/2006/main">
               <a:ext uri="{FF2B5EF4-FFF2-40B4-BE49-F238E27FC236}">
-                <a16:creationId xmlns:a16="http://schemas.microsoft.com/office/drawing/2014/main" id="{5FB0A5C4-CF64-4836-ABE3-4A80BAE5B74A}"/>
+                <a16:creationId xmlns:a16="http://schemas.microsoft.com/office/drawing/2014/main" id="{BF2DD9C4-0C2B-4719-9BF8-9C1E9DC8A8EE}"/>
               </a:ext>
             </a:extLst>
           </p:cNvPr>
@@ -4303,7 +4313,7 @@
           <p:cNvPr id="53" name="">
             <a:extLst xmlns:a="http://schemas.openxmlformats.org/drawingml/2006/main">
               <a:ext uri="{FF2B5EF4-FFF2-40B4-BE49-F238E27FC236}">
-                <a16:creationId xmlns:a16="http://schemas.microsoft.com/office/drawing/2014/main" id="{8D76A209-2E58-438D-8F72-0C64283584E9}"/>
+                <a16:creationId xmlns:a16="http://schemas.microsoft.com/office/drawing/2014/main" id="{C6BE609D-0E4B-4D83-ADC1-DF6DD3F34C4E}"/>
               </a:ext>
             </a:extLst>
           </p:cNvPr>
@@ -4357,7 +4367,7 @@
     </p:spTree>
     <p:extLst>
       <p:ext uri="{BB962C8B-B14F-4D97-AF65-F5344CB8AC3E}">
-        <p14:creationId xmlns:p14="http://schemas.microsoft.com/office/powerpoint/2010/main" val="571026555"/>
+        <p14:creationId xmlns:p14="http://schemas.microsoft.com/office/powerpoint/2010/main" val="649209323"/>
       </p:ext>
     </p:extLst>
   </p:cSld>
@@ -4388,7 +4398,7 @@
           <p:cNvPr id="1" name="">
             <a:extLst xmlns:a="http://schemas.openxmlformats.org/drawingml/2006/main">
               <a:ext uri="{FF2B5EF4-FFF2-40B4-BE49-F238E27FC236}">
-                <a16:creationId xmlns:a16="http://schemas.microsoft.com/office/drawing/2014/main" id="{EB7A1293-4180-40B0-8F6C-0546ECE09A12}"/>
+                <a16:creationId xmlns:a16="http://schemas.microsoft.com/office/drawing/2014/main" id="{2D02E910-461E-4B63-BF59-A063A0C6F170}"/>
               </a:ext>
             </a:extLst>
           </p:cNvPr>
@@ -4419,7 +4429,7 @@
           <p:cNvPr id="2" name="">
             <a:extLst xmlns:a="http://schemas.openxmlformats.org/drawingml/2006/main">
               <a:ext uri="{FF2B5EF4-FFF2-40B4-BE49-F238E27FC236}">
-                <a16:creationId xmlns:a16="http://schemas.microsoft.com/office/drawing/2014/main" id="{3A8DE8EE-F69E-4CFB-8824-70141D005BCC}"/>
+                <a16:creationId xmlns:a16="http://schemas.microsoft.com/office/drawing/2014/main" id="{80B34A05-5010-4972-8998-A1F79BADFB48}"/>
               </a:ext>
             </a:extLst>
           </p:cNvPr>
@@ -4475,7 +4485,7 @@
           <p:cNvPr id="3" name="">
             <a:extLst xmlns:a="http://schemas.openxmlformats.org/drawingml/2006/main">
               <a:ext uri="{FF2B5EF4-FFF2-40B4-BE49-F238E27FC236}">
-                <a16:creationId xmlns:a16="http://schemas.microsoft.com/office/drawing/2014/main" id="{F4604695-2BD9-4947-842B-7BA85DEED9C2}"/>
+                <a16:creationId xmlns:a16="http://schemas.microsoft.com/office/drawing/2014/main" id="{21608908-FD57-4CC7-B551-5906CF0D8D8C}"/>
               </a:ext>
             </a:extLst>
           </p:cNvPr>
@@ -4531,7 +4541,7 @@
           <p:cNvPr id="4" name="">
             <a:extLst xmlns:a="http://schemas.openxmlformats.org/drawingml/2006/main">
               <a:ext uri="{FF2B5EF4-FFF2-40B4-BE49-F238E27FC236}">
-                <a16:creationId xmlns:a16="http://schemas.microsoft.com/office/drawing/2014/main" id="{CC368DA2-B4A5-43C3-9CD2-E2523373B716}"/>
+                <a16:creationId xmlns:a16="http://schemas.microsoft.com/office/drawing/2014/main" id="{D2199EBF-1194-4D0A-A5B2-52CF43C3AA94}"/>
               </a:ext>
             </a:extLst>
           </p:cNvPr>
@@ -4587,7 +4597,7 @@
           <p:cNvPr id="5" name="">
             <a:extLst xmlns:a="http://schemas.openxmlformats.org/drawingml/2006/main">
               <a:ext uri="{FF2B5EF4-FFF2-40B4-BE49-F238E27FC236}">
-                <a16:creationId xmlns:a16="http://schemas.microsoft.com/office/drawing/2014/main" id="{C36C7226-3798-4BD4-8CEC-93F925799891}"/>
+                <a16:creationId xmlns:a16="http://schemas.microsoft.com/office/drawing/2014/main" id="{1B5E076E-A860-4B84-87EC-9A794C5BEC56}"/>
               </a:ext>
             </a:extLst>
           </p:cNvPr>
@@ -4622,7 +4632,7 @@
           <p:cNvPr id="6" name="">
             <a:extLst xmlns:a="http://schemas.openxmlformats.org/drawingml/2006/main">
               <a:ext uri="{FF2B5EF4-FFF2-40B4-BE49-F238E27FC236}">
-                <a16:creationId xmlns:a16="http://schemas.microsoft.com/office/drawing/2014/main" id="{08A807EA-BDAB-4FE5-BCDB-CE0DB112BDE5}"/>
+                <a16:creationId xmlns:a16="http://schemas.microsoft.com/office/drawing/2014/main" id="{216AA482-8767-4815-A89C-BB9A971C3014}"/>
               </a:ext>
             </a:extLst>
           </p:cNvPr>
@@ -4678,7 +4688,7 @@
           <p:cNvPr id="7" name="">
             <a:extLst xmlns:a="http://schemas.openxmlformats.org/drawingml/2006/main">
               <a:ext uri="{FF2B5EF4-FFF2-40B4-BE49-F238E27FC236}">
-                <a16:creationId xmlns:a16="http://schemas.microsoft.com/office/drawing/2014/main" id="{CAABAA49-710A-42BC-B58E-3A5092D9AC2F}"/>
+                <a16:creationId xmlns:a16="http://schemas.microsoft.com/office/drawing/2014/main" id="{E62C256F-5F11-4374-B5A5-0D7735AB678D}"/>
               </a:ext>
             </a:extLst>
           </p:cNvPr>
@@ -4734,7 +4744,7 @@
           <p:cNvPr id="8" name="">
             <a:extLst xmlns:a="http://schemas.openxmlformats.org/drawingml/2006/main">
               <a:ext uri="{FF2B5EF4-FFF2-40B4-BE49-F238E27FC236}">
-                <a16:creationId xmlns:a16="http://schemas.microsoft.com/office/drawing/2014/main" id="{97D596B5-DF75-4373-BB76-E3390F64D1CE}"/>
+                <a16:creationId xmlns:a16="http://schemas.microsoft.com/office/drawing/2014/main" id="{3122C91E-AE19-4617-80E3-D8F6090363D8}"/>
               </a:ext>
             </a:extLst>
           </p:cNvPr>
@@ -4790,7 +4800,7 @@
           <p:cNvPr id="9" name="">
             <a:extLst xmlns:a="http://schemas.openxmlformats.org/drawingml/2006/main">
               <a:ext uri="{FF2B5EF4-FFF2-40B4-BE49-F238E27FC236}">
-                <a16:creationId xmlns:a16="http://schemas.microsoft.com/office/drawing/2014/main" id="{CE8E0849-1CF8-4923-B34B-D82C0CD1EA5C}"/>
+                <a16:creationId xmlns:a16="http://schemas.microsoft.com/office/drawing/2014/main" id="{69220218-3CBF-453D-9F05-2524AF9A608B}"/>
               </a:ext>
             </a:extLst>
           </p:cNvPr>
@@ -4825,7 +4835,7 @@
           <p:cNvPr id="10" name="">
             <a:extLst xmlns:a="http://schemas.openxmlformats.org/drawingml/2006/main">
               <a:ext uri="{FF2B5EF4-FFF2-40B4-BE49-F238E27FC236}">
-                <a16:creationId xmlns:a16="http://schemas.microsoft.com/office/drawing/2014/main" id="{47D648AA-8AF8-435C-8084-60890264B72F}"/>
+                <a16:creationId xmlns:a16="http://schemas.microsoft.com/office/drawing/2014/main" id="{2075A98E-F2B0-478F-BC4C-D13D140881E1}"/>
               </a:ext>
             </a:extLst>
           </p:cNvPr>
@@ -4881,7 +4891,7 @@
           <p:cNvPr id="11" name="">
             <a:extLst xmlns:a="http://schemas.openxmlformats.org/drawingml/2006/main">
               <a:ext uri="{FF2B5EF4-FFF2-40B4-BE49-F238E27FC236}">
-                <a16:creationId xmlns:a16="http://schemas.microsoft.com/office/drawing/2014/main" id="{E5BF8665-96A3-4E6E-899A-358218FD1BF7}"/>
+                <a16:creationId xmlns:a16="http://schemas.microsoft.com/office/drawing/2014/main" id="{60451DAF-6587-4AF1-9926-DF9157CFD393}"/>
               </a:ext>
             </a:extLst>
           </p:cNvPr>
@@ -4937,7 +4947,7 @@
           <p:cNvPr id="12" name="">
             <a:extLst xmlns:a="http://schemas.openxmlformats.org/drawingml/2006/main">
               <a:ext uri="{FF2B5EF4-FFF2-40B4-BE49-F238E27FC236}">
-                <a16:creationId xmlns:a16="http://schemas.microsoft.com/office/drawing/2014/main" id="{FB7951E5-D2A4-4541-9D92-05E34EB01CAC}"/>
+                <a16:creationId xmlns:a16="http://schemas.microsoft.com/office/drawing/2014/main" id="{D1375652-550E-41FF-8CD9-3577F6B0FCE7}"/>
               </a:ext>
             </a:extLst>
           </p:cNvPr>
@@ -4993,7 +5003,7 @@
           <p:cNvPr id="13" name="">
             <a:extLst xmlns:a="http://schemas.openxmlformats.org/drawingml/2006/main">
               <a:ext uri="{FF2B5EF4-FFF2-40B4-BE49-F238E27FC236}">
-                <a16:creationId xmlns:a16="http://schemas.microsoft.com/office/drawing/2014/main" id="{BBB1C968-1F92-4F29-A03A-E4621824F4F1}"/>
+                <a16:creationId xmlns:a16="http://schemas.microsoft.com/office/drawing/2014/main" id="{8856E13A-49A6-43C9-B213-050076936B64}"/>
               </a:ext>
             </a:extLst>
           </p:cNvPr>
@@ -5028,7 +5038,7 @@
           <p:cNvPr id="14" name="">
             <a:extLst xmlns:a="http://schemas.openxmlformats.org/drawingml/2006/main">
               <a:ext uri="{FF2B5EF4-FFF2-40B4-BE49-F238E27FC236}">
-                <a16:creationId xmlns:a16="http://schemas.microsoft.com/office/drawing/2014/main" id="{9A681D70-73F0-4C82-A317-30D164841333}"/>
+                <a16:creationId xmlns:a16="http://schemas.microsoft.com/office/drawing/2014/main" id="{96C7E117-9C95-415B-8ED9-EC426EE1E7EB}"/>
               </a:ext>
             </a:extLst>
           </p:cNvPr>
@@ -5084,7 +5094,7 @@
           <p:cNvPr id="15" name="">
             <a:extLst xmlns:a="http://schemas.openxmlformats.org/drawingml/2006/main">
               <a:ext uri="{FF2B5EF4-FFF2-40B4-BE49-F238E27FC236}">
-                <a16:creationId xmlns:a16="http://schemas.microsoft.com/office/drawing/2014/main" id="{D99D855C-2E9F-4D8B-9A3F-312B377FB6B2}"/>
+                <a16:creationId xmlns:a16="http://schemas.microsoft.com/office/drawing/2014/main" id="{6A397B71-2196-4E7B-9E88-E7CEA05FD9E3}"/>
               </a:ext>
             </a:extLst>
           </p:cNvPr>
@@ -5140,7 +5150,7 @@
           <p:cNvPr id="16" name="">
             <a:extLst xmlns:a="http://schemas.openxmlformats.org/drawingml/2006/main">
               <a:ext uri="{FF2B5EF4-FFF2-40B4-BE49-F238E27FC236}">
-                <a16:creationId xmlns:a16="http://schemas.microsoft.com/office/drawing/2014/main" id="{71592EFE-AE0A-4B2A-B9D3-7EF875714983}"/>
+                <a16:creationId xmlns:a16="http://schemas.microsoft.com/office/drawing/2014/main" id="{FBE863D4-A10E-4713-8D1A-3B9F2A2323CD}"/>
               </a:ext>
             </a:extLst>
           </p:cNvPr>
@@ -5196,7 +5206,7 @@
           <p:cNvPr id="17" name="">
             <a:extLst xmlns:a="http://schemas.openxmlformats.org/drawingml/2006/main">
               <a:ext uri="{FF2B5EF4-FFF2-40B4-BE49-F238E27FC236}">
-                <a16:creationId xmlns:a16="http://schemas.microsoft.com/office/drawing/2014/main" id="{9937EFD8-E765-46E6-AEA7-7140C5FF406B}"/>
+                <a16:creationId xmlns:a16="http://schemas.microsoft.com/office/drawing/2014/main" id="{213213D9-B214-4D17-9BF2-76632E01060D}"/>
               </a:ext>
             </a:extLst>
           </p:cNvPr>
@@ -5231,7 +5241,7 @@
           <p:cNvPr id="18" name="">
             <a:extLst xmlns:a="http://schemas.openxmlformats.org/drawingml/2006/main">
               <a:ext uri="{FF2B5EF4-FFF2-40B4-BE49-F238E27FC236}">
-                <a16:creationId xmlns:a16="http://schemas.microsoft.com/office/drawing/2014/main" id="{DCDAD322-C8AF-4BF0-8AC4-01F6B8265FA7}"/>
+                <a16:creationId xmlns:a16="http://schemas.microsoft.com/office/drawing/2014/main" id="{2DCE259D-C08C-4D3F-811D-ED96DF468FC9}"/>
               </a:ext>
             </a:extLst>
           </p:cNvPr>
@@ -5287,7 +5297,7 @@
           <p:cNvPr id="19" name="">
             <a:extLst xmlns:a="http://schemas.openxmlformats.org/drawingml/2006/main">
               <a:ext uri="{FF2B5EF4-FFF2-40B4-BE49-F238E27FC236}">
-                <a16:creationId xmlns:a16="http://schemas.microsoft.com/office/drawing/2014/main" id="{6AF20BEA-DC4F-4891-969F-AFA41B863460}"/>
+                <a16:creationId xmlns:a16="http://schemas.microsoft.com/office/drawing/2014/main" id="{1B3F2D21-3ECC-4432-8A2F-1306AED094B2}"/>
               </a:ext>
             </a:extLst>
           </p:cNvPr>
@@ -5343,7 +5353,7 @@
           <p:cNvPr id="20" name="">
             <a:extLst xmlns:a="http://schemas.openxmlformats.org/drawingml/2006/main">
               <a:ext uri="{FF2B5EF4-FFF2-40B4-BE49-F238E27FC236}">
-                <a16:creationId xmlns:a16="http://schemas.microsoft.com/office/drawing/2014/main" id="{C7AA1BDB-DA6E-4616-B4E7-B7F57534EE5B}"/>
+                <a16:creationId xmlns:a16="http://schemas.microsoft.com/office/drawing/2014/main" id="{84BDA68E-C0AE-42A2-9DDF-858E4609197C}"/>
               </a:ext>
             </a:extLst>
           </p:cNvPr>
@@ -5399,7 +5409,7 @@
           <p:cNvPr id="21" name="">
             <a:extLst xmlns:a="http://schemas.openxmlformats.org/drawingml/2006/main">
               <a:ext uri="{FF2B5EF4-FFF2-40B4-BE49-F238E27FC236}">
-                <a16:creationId xmlns:a16="http://schemas.microsoft.com/office/drawing/2014/main" id="{FA4541E6-FDC1-46A5-A7F4-25B25E55FA6A}"/>
+                <a16:creationId xmlns:a16="http://schemas.microsoft.com/office/drawing/2014/main" id="{1B1B2FB6-0598-473D-AAAF-2FC8A4239569}"/>
               </a:ext>
             </a:extLst>
           </p:cNvPr>
@@ -5455,7 +5465,7 @@
           <p:cNvPr id="22" name="">
             <a:extLst xmlns:a="http://schemas.openxmlformats.org/drawingml/2006/main">
               <a:ext uri="{FF2B5EF4-FFF2-40B4-BE49-F238E27FC236}">
-                <a16:creationId xmlns:a16="http://schemas.microsoft.com/office/drawing/2014/main" id="{F5BC8367-1A80-4D36-8279-2A1F6C3C8143}"/>
+                <a16:creationId xmlns:a16="http://schemas.microsoft.com/office/drawing/2014/main" id="{4CB093D8-26A3-431A-A52E-934FBF12E22D}"/>
               </a:ext>
             </a:extLst>
           </p:cNvPr>
@@ -5490,7 +5500,7 @@
           <p:cNvPr id="23" name="">
             <a:extLst xmlns:a="http://schemas.openxmlformats.org/drawingml/2006/main">
               <a:ext uri="{FF2B5EF4-FFF2-40B4-BE49-F238E27FC236}">
-                <a16:creationId xmlns:a16="http://schemas.microsoft.com/office/drawing/2014/main" id="{C3A150ED-2DC6-4136-8FD4-EBD920E37B83}"/>
+                <a16:creationId xmlns:a16="http://schemas.microsoft.com/office/drawing/2014/main" id="{6E298AEF-72E4-45D6-A2F9-E5AEAD041017}"/>
               </a:ext>
             </a:extLst>
           </p:cNvPr>
@@ -5546,7 +5556,7 @@
           <p:cNvPr id="24" name="">
             <a:extLst xmlns:a="http://schemas.openxmlformats.org/drawingml/2006/main">
               <a:ext uri="{FF2B5EF4-FFF2-40B4-BE49-F238E27FC236}">
-                <a16:creationId xmlns:a16="http://schemas.microsoft.com/office/drawing/2014/main" id="{2E4B76B1-4C16-4179-ABB6-69248732F01E}"/>
+                <a16:creationId xmlns:a16="http://schemas.microsoft.com/office/drawing/2014/main" id="{61E4FE94-1D8B-4AE0-A347-58DFECA11576}"/>
               </a:ext>
             </a:extLst>
           </p:cNvPr>
@@ -5625,7 +5635,7 @@
           <p:cNvPr id="25" name="">
             <a:extLst xmlns:a="http://schemas.openxmlformats.org/drawingml/2006/main">
               <a:ext uri="{FF2B5EF4-FFF2-40B4-BE49-F238E27FC236}">
-                <a16:creationId xmlns:a16="http://schemas.microsoft.com/office/drawing/2014/main" id="{1A31EB74-7B0D-44E9-AF8D-DEE561BF5BA9}"/>
+                <a16:creationId xmlns:a16="http://schemas.microsoft.com/office/drawing/2014/main" id="{5445D8F8-30F8-43F9-8227-DFAF35BAE189}"/>
               </a:ext>
             </a:extLst>
           </p:cNvPr>
@@ -5681,7 +5691,7 @@
           <p:cNvPr id="26" name="">
             <a:extLst xmlns:a="http://schemas.openxmlformats.org/drawingml/2006/main">
               <a:ext uri="{FF2B5EF4-FFF2-40B4-BE49-F238E27FC236}">
-                <a16:creationId xmlns:a16="http://schemas.microsoft.com/office/drawing/2014/main" id="{51AEBD09-7D55-4906-825C-D20269C9BCAC}"/>
+                <a16:creationId xmlns:a16="http://schemas.microsoft.com/office/drawing/2014/main" id="{697B57D2-BB36-42CD-AAAE-4BE840002D58}"/>
               </a:ext>
             </a:extLst>
           </p:cNvPr>
@@ -5737,7 +5747,7 @@
           <p:cNvPr id="27" name="">
             <a:extLst xmlns:a="http://schemas.openxmlformats.org/drawingml/2006/main">
               <a:ext uri="{FF2B5EF4-FFF2-40B4-BE49-F238E27FC236}">
-                <a16:creationId xmlns:a16="http://schemas.microsoft.com/office/drawing/2014/main" id="{7A9270A2-C1BA-49AB-BD7A-C68388D4697B}"/>
+                <a16:creationId xmlns:a16="http://schemas.microsoft.com/office/drawing/2014/main" id="{0B83F396-B5B2-4794-B84B-CA7D33904C82}"/>
               </a:ext>
             </a:extLst>
           </p:cNvPr>
@@ -5768,7 +5778,7 @@
           <p:cNvPr id="28" name="">
             <a:extLst xmlns:a="http://schemas.openxmlformats.org/drawingml/2006/main">
               <a:ext uri="{FF2B5EF4-FFF2-40B4-BE49-F238E27FC236}">
-                <a16:creationId xmlns:a16="http://schemas.microsoft.com/office/drawing/2014/main" id="{F1D4972A-BD07-4D5B-A613-523CA8C31BAF}"/>
+                <a16:creationId xmlns:a16="http://schemas.microsoft.com/office/drawing/2014/main" id="{18E3EABF-7AEC-499B-87FC-DFE8E1A5F2AE}"/>
               </a:ext>
             </a:extLst>
           </p:cNvPr>
@@ -5824,7 +5834,7 @@
           <p:cNvPr id="29" name="">
             <a:extLst xmlns:a="http://schemas.openxmlformats.org/drawingml/2006/main">
               <a:ext uri="{FF2B5EF4-FFF2-40B4-BE49-F238E27FC236}">
-                <a16:creationId xmlns:a16="http://schemas.microsoft.com/office/drawing/2014/main" id="{9C5C1ABD-8F9C-4D33-9978-B42F5FE498AC}"/>
+                <a16:creationId xmlns:a16="http://schemas.microsoft.com/office/drawing/2014/main" id="{8E2FEB8B-A3DC-40FF-94C1-3421A5C0D260}"/>
               </a:ext>
             </a:extLst>
           </p:cNvPr>
@@ -5880,7 +5890,7 @@
           <p:cNvPr id="30" name="">
             <a:extLst xmlns:a="http://schemas.openxmlformats.org/drawingml/2006/main">
               <a:ext uri="{FF2B5EF4-FFF2-40B4-BE49-F238E27FC236}">
-                <a16:creationId xmlns:a16="http://schemas.microsoft.com/office/drawing/2014/main" id="{93A3A663-B1E5-448B-9402-1C2DDCD06CC1}"/>
+                <a16:creationId xmlns:a16="http://schemas.microsoft.com/office/drawing/2014/main" id="{CF3D1AD8-028B-4865-B820-A42BF50B8104}"/>
               </a:ext>
             </a:extLst>
           </p:cNvPr>
@@ -5911,7 +5921,7 @@
           <p:cNvPr id="31" name="">
             <a:extLst xmlns:a="http://schemas.openxmlformats.org/drawingml/2006/main">
               <a:ext uri="{FF2B5EF4-FFF2-40B4-BE49-F238E27FC236}">
-                <a16:creationId xmlns:a16="http://schemas.microsoft.com/office/drawing/2014/main" id="{08D7803A-BD25-4899-B419-91A21A360990}"/>
+                <a16:creationId xmlns:a16="http://schemas.microsoft.com/office/drawing/2014/main" id="{9F28EF29-2742-4E0C-B6D6-997DF0C7DBBC}"/>
               </a:ext>
             </a:extLst>
           </p:cNvPr>
@@ -5967,7 +5977,7 @@
           <p:cNvPr id="32" name="">
             <a:extLst xmlns:a="http://schemas.openxmlformats.org/drawingml/2006/main">
               <a:ext uri="{FF2B5EF4-FFF2-40B4-BE49-F238E27FC236}">
-                <a16:creationId xmlns:a16="http://schemas.microsoft.com/office/drawing/2014/main" id="{F8AAAD7C-27E3-4B55-BBD2-FB7680D2DE74}"/>
+                <a16:creationId xmlns:a16="http://schemas.microsoft.com/office/drawing/2014/main" id="{54A314F2-17C1-4649-B371-2C2328C69BA5}"/>
               </a:ext>
             </a:extLst>
           </p:cNvPr>
@@ -6023,7 +6033,7 @@
           <p:cNvPr id="33" name="">
             <a:extLst xmlns:a="http://schemas.openxmlformats.org/drawingml/2006/main">
               <a:ext uri="{FF2B5EF4-FFF2-40B4-BE49-F238E27FC236}">
-                <a16:creationId xmlns:a16="http://schemas.microsoft.com/office/drawing/2014/main" id="{D18B9352-19A0-4FE5-89EC-2ACD59EE2C38}"/>
+                <a16:creationId xmlns:a16="http://schemas.microsoft.com/office/drawing/2014/main" id="{66BAC103-ED50-4E45-A89C-D36A656A1DA7}"/>
               </a:ext>
             </a:extLst>
           </p:cNvPr>
@@ -6054,7 +6064,7 @@
           <p:cNvPr id="34" name="">
             <a:extLst xmlns:a="http://schemas.openxmlformats.org/drawingml/2006/main">
               <a:ext uri="{FF2B5EF4-FFF2-40B4-BE49-F238E27FC236}">
-                <a16:creationId xmlns:a16="http://schemas.microsoft.com/office/drawing/2014/main" id="{D5BFA496-6FE3-41D7-A1B7-9C9E9539FDE2}"/>
+                <a16:creationId xmlns:a16="http://schemas.microsoft.com/office/drawing/2014/main" id="{DA4A93A6-7F28-49DA-9E26-0E4842CB539B}"/>
               </a:ext>
             </a:extLst>
           </p:cNvPr>
@@ -6110,7 +6120,7 @@
           <p:cNvPr id="35" name="">
             <a:extLst xmlns:a="http://schemas.openxmlformats.org/drawingml/2006/main">
               <a:ext uri="{FF2B5EF4-FFF2-40B4-BE49-F238E27FC236}">
-                <a16:creationId xmlns:a16="http://schemas.microsoft.com/office/drawing/2014/main" id="{A2857981-E46A-4E11-B2FE-5BD11E8A85EB}"/>
+                <a16:creationId xmlns:a16="http://schemas.microsoft.com/office/drawing/2014/main" id="{15F249A3-E7C0-44F7-8859-0DB35ABF233C}"/>
               </a:ext>
             </a:extLst>
           </p:cNvPr>
@@ -6166,7 +6176,7 @@
           <p:cNvPr id="36" name="">
             <a:extLst xmlns:a="http://schemas.openxmlformats.org/drawingml/2006/main">
               <a:ext uri="{FF2B5EF4-FFF2-40B4-BE49-F238E27FC236}">
-                <a16:creationId xmlns:a16="http://schemas.microsoft.com/office/drawing/2014/main" id="{A27DB7BF-5D4C-4B48-932C-AC164E840D24}"/>
+                <a16:creationId xmlns:a16="http://schemas.microsoft.com/office/drawing/2014/main" id="{EF786C39-165B-4E45-9082-C7DC575BDD5B}"/>
               </a:ext>
             </a:extLst>
           </p:cNvPr>
@@ -6197,7 +6207,7 @@
           <p:cNvPr id="37" name="">
             <a:extLst xmlns:a="http://schemas.openxmlformats.org/drawingml/2006/main">
               <a:ext uri="{FF2B5EF4-FFF2-40B4-BE49-F238E27FC236}">
-                <a16:creationId xmlns:a16="http://schemas.microsoft.com/office/drawing/2014/main" id="{1BD63AB8-1B1A-46FD-8B0E-A9D3D9EE0249}"/>
+                <a16:creationId xmlns:a16="http://schemas.microsoft.com/office/drawing/2014/main" id="{30021E87-F773-4F6C-ABC1-30C21EAA0191}"/>
               </a:ext>
             </a:extLst>
           </p:cNvPr>
@@ -6253,7 +6263,7 @@
           <p:cNvPr id="38" name="">
             <a:extLst xmlns:a="http://schemas.openxmlformats.org/drawingml/2006/main">
               <a:ext uri="{FF2B5EF4-FFF2-40B4-BE49-F238E27FC236}">
-                <a16:creationId xmlns:a16="http://schemas.microsoft.com/office/drawing/2014/main" id="{3D92B45E-632E-4091-81E9-6A5B93FF653A}"/>
+                <a16:creationId xmlns:a16="http://schemas.microsoft.com/office/drawing/2014/main" id="{E5502AAC-0A0B-44A6-9518-77199C1FFD31}"/>
               </a:ext>
             </a:extLst>
           </p:cNvPr>
@@ -6309,7 +6319,7 @@
           <p:cNvPr id="39" name="">
             <a:extLst xmlns:a="http://schemas.openxmlformats.org/drawingml/2006/main">
               <a:ext uri="{FF2B5EF4-FFF2-40B4-BE49-F238E27FC236}">
-                <a16:creationId xmlns:a16="http://schemas.microsoft.com/office/drawing/2014/main" id="{2B5CF36A-BBAC-4C25-9B91-63BCB9F658C0}"/>
+                <a16:creationId xmlns:a16="http://schemas.microsoft.com/office/drawing/2014/main" id="{CE2B97D9-337D-45B3-9F6A-EEC67AD204DE}"/>
               </a:ext>
             </a:extLst>
           </p:cNvPr>
@@ -6344,7 +6354,7 @@
           <p:cNvPr id="40" name="">
             <a:extLst xmlns:a="http://schemas.openxmlformats.org/drawingml/2006/main">
               <a:ext uri="{FF2B5EF4-FFF2-40B4-BE49-F238E27FC236}">
-                <a16:creationId xmlns:a16="http://schemas.microsoft.com/office/drawing/2014/main" id="{ADDA698B-4552-46B2-B7D9-671530D4A4CB}"/>
+                <a16:creationId xmlns:a16="http://schemas.microsoft.com/office/drawing/2014/main" id="{05CD8765-6507-49EB-AB07-13C97816D120}"/>
               </a:ext>
             </a:extLst>
           </p:cNvPr>
@@ -6400,7 +6410,7 @@
           <p:cNvPr id="41" name="">
             <a:extLst xmlns:a="http://schemas.openxmlformats.org/drawingml/2006/main">
               <a:ext uri="{FF2B5EF4-FFF2-40B4-BE49-F238E27FC236}">
-                <a16:creationId xmlns:a16="http://schemas.microsoft.com/office/drawing/2014/main" id="{4E791A37-94F9-4357-BE2F-BA78C49BE6A8}"/>
+                <a16:creationId xmlns:a16="http://schemas.microsoft.com/office/drawing/2014/main" id="{B07E4830-E5D0-491F-BF04-C438CAC6E6B8}"/>
               </a:ext>
             </a:extLst>
           </p:cNvPr>
@@ -6454,7 +6464,7 @@
     </p:spTree>
     <p:extLst>
       <p:ext uri="{BB962C8B-B14F-4D97-AF65-F5344CB8AC3E}">
-        <p14:creationId xmlns:p14="http://schemas.microsoft.com/office/powerpoint/2010/main" val="1799310488"/>
+        <p14:creationId xmlns:p14="http://schemas.microsoft.com/office/powerpoint/2010/main" val="1805751409"/>
       </p:ext>
     </p:extLst>
   </p:cSld>
@@ -6485,7 +6495,7 @@
           <p:cNvPr id="1" name="">
             <a:extLst xmlns:a="http://schemas.openxmlformats.org/drawingml/2006/main">
               <a:ext uri="{FF2B5EF4-FFF2-40B4-BE49-F238E27FC236}">
-                <a16:creationId xmlns:a16="http://schemas.microsoft.com/office/drawing/2014/main" id="{862C42CE-DA88-43BE-BBB0-505E4F549366}"/>
+                <a16:creationId xmlns:a16="http://schemas.microsoft.com/office/drawing/2014/main" id="{FDA1C33D-3365-43C0-84B1-CA2F98DE38CC}"/>
               </a:ext>
             </a:extLst>
           </p:cNvPr>
@@ -6516,7 +6526,7 @@
           <p:cNvPr id="2" name="">
             <a:extLst xmlns:a="http://schemas.openxmlformats.org/drawingml/2006/main">
               <a:ext uri="{FF2B5EF4-FFF2-40B4-BE49-F238E27FC236}">
-                <a16:creationId xmlns:a16="http://schemas.microsoft.com/office/drawing/2014/main" id="{3A7D6863-73C7-473A-B890-C30D4C59295A}"/>
+                <a16:creationId xmlns:a16="http://schemas.microsoft.com/office/drawing/2014/main" id="{A63DC95B-4F9F-4BC0-AE66-4A225C28C595}"/>
               </a:ext>
             </a:extLst>
           </p:cNvPr>
@@ -6572,7 +6582,7 @@
           <p:cNvPr id="3" name="">
             <a:extLst xmlns:a="http://schemas.openxmlformats.org/drawingml/2006/main">
               <a:ext uri="{FF2B5EF4-FFF2-40B4-BE49-F238E27FC236}">
-                <a16:creationId xmlns:a16="http://schemas.microsoft.com/office/drawing/2014/main" id="{B1E5D87A-C5F5-4420-86CB-340D88843E57}"/>
+                <a16:creationId xmlns:a16="http://schemas.microsoft.com/office/drawing/2014/main" id="{11FE0C60-2B2F-4810-985F-C17E303ED907}"/>
               </a:ext>
             </a:extLst>
           </p:cNvPr>
@@ -6628,7 +6638,7 @@
           <p:cNvPr id="4" name="">
             <a:extLst xmlns:a="http://schemas.openxmlformats.org/drawingml/2006/main">
               <a:ext uri="{FF2B5EF4-FFF2-40B4-BE49-F238E27FC236}">
-                <a16:creationId xmlns:a16="http://schemas.microsoft.com/office/drawing/2014/main" id="{3E5F060C-0847-47E5-B17F-43A80432C8F4}"/>
+                <a16:creationId xmlns:a16="http://schemas.microsoft.com/office/drawing/2014/main" id="{DF6E3946-EC12-4E46-92F4-878284518240}"/>
               </a:ext>
             </a:extLst>
           </p:cNvPr>
@@ -6684,7 +6694,7 @@
           <p:cNvPr id="5" name="">
             <a:extLst xmlns:a="http://schemas.openxmlformats.org/drawingml/2006/main">
               <a:ext uri="{FF2B5EF4-FFF2-40B4-BE49-F238E27FC236}">
-                <a16:creationId xmlns:a16="http://schemas.microsoft.com/office/drawing/2014/main" id="{E10CA71C-6055-4A77-B6FD-114CE6367CCD}"/>
+                <a16:creationId xmlns:a16="http://schemas.microsoft.com/office/drawing/2014/main" id="{79B86505-574D-4A92-869E-C8E0688BE26A}"/>
               </a:ext>
             </a:extLst>
           </p:cNvPr>
@@ -6740,7 +6750,7 @@
           <p:cNvPr id="6" name="">
             <a:extLst xmlns:a="http://schemas.openxmlformats.org/drawingml/2006/main">
               <a:ext uri="{FF2B5EF4-FFF2-40B4-BE49-F238E27FC236}">
-                <a16:creationId xmlns:a16="http://schemas.microsoft.com/office/drawing/2014/main" id="{7B8ADBD4-FE22-458D-98E2-95746A35DFF3}"/>
+                <a16:creationId xmlns:a16="http://schemas.microsoft.com/office/drawing/2014/main" id="{BC310A9F-6C48-430F-BC50-9BF789D2A2F4}"/>
               </a:ext>
             </a:extLst>
           </p:cNvPr>
@@ -6796,7 +6806,7 @@
           <p:cNvPr id="7" name="">
             <a:extLst xmlns:a="http://schemas.openxmlformats.org/drawingml/2006/main">
               <a:ext uri="{FF2B5EF4-FFF2-40B4-BE49-F238E27FC236}">
-                <a16:creationId xmlns:a16="http://schemas.microsoft.com/office/drawing/2014/main" id="{8BF4A051-B39B-406E-96CA-9AC526F7D8FE}"/>
+                <a16:creationId xmlns:a16="http://schemas.microsoft.com/office/drawing/2014/main" id="{F98330AB-FF25-4054-BBF3-091B155264A5}"/>
               </a:ext>
             </a:extLst>
           </p:cNvPr>
@@ -6852,7 +6862,7 @@
           <p:cNvPr id="8" name="">
             <a:extLst xmlns:a="http://schemas.openxmlformats.org/drawingml/2006/main">
               <a:ext uri="{FF2B5EF4-FFF2-40B4-BE49-F238E27FC236}">
-                <a16:creationId xmlns:a16="http://schemas.microsoft.com/office/drawing/2014/main" id="{222DDC49-4CF0-47D1-B502-65F0670DC337}"/>
+                <a16:creationId xmlns:a16="http://schemas.microsoft.com/office/drawing/2014/main" id="{0CED8924-8DEB-49A7-82A1-E0AC422911E4}"/>
               </a:ext>
             </a:extLst>
           </p:cNvPr>
@@ -6908,7 +6918,7 @@
           <p:cNvPr id="9" name="">
             <a:extLst xmlns:a="http://schemas.openxmlformats.org/drawingml/2006/main">
               <a:ext uri="{FF2B5EF4-FFF2-40B4-BE49-F238E27FC236}">
-                <a16:creationId xmlns:a16="http://schemas.microsoft.com/office/drawing/2014/main" id="{BAE2FC4D-6832-4678-9FF0-7EC4D521A45E}"/>
+                <a16:creationId xmlns:a16="http://schemas.microsoft.com/office/drawing/2014/main" id="{48600BC6-10A2-4179-89FC-6265CB9A1BB2}"/>
               </a:ext>
             </a:extLst>
           </p:cNvPr>
@@ -6964,7 +6974,7 @@
           <p:cNvPr id="10" name="">
             <a:extLst xmlns:a="http://schemas.openxmlformats.org/drawingml/2006/main">
               <a:ext uri="{FF2B5EF4-FFF2-40B4-BE49-F238E27FC236}">
-                <a16:creationId xmlns:a16="http://schemas.microsoft.com/office/drawing/2014/main" id="{0383D53F-39F4-4E4A-98C3-4101C1CB89BE}"/>
+                <a16:creationId xmlns:a16="http://schemas.microsoft.com/office/drawing/2014/main" id="{EF96773D-DF49-4829-8FBA-A6EF63D3033E}"/>
               </a:ext>
             </a:extLst>
           </p:cNvPr>
@@ -7020,7 +7030,7 @@
           <p:cNvPr id="11" name="">
             <a:extLst xmlns:a="http://schemas.openxmlformats.org/drawingml/2006/main">
               <a:ext uri="{FF2B5EF4-FFF2-40B4-BE49-F238E27FC236}">
-                <a16:creationId xmlns:a16="http://schemas.microsoft.com/office/drawing/2014/main" id="{35D987C1-B296-4FB4-9C0E-4B79E97E16BB}"/>
+                <a16:creationId xmlns:a16="http://schemas.microsoft.com/office/drawing/2014/main" id="{091C0EB6-9FDC-41E6-9CFD-ED150E50383B}"/>
               </a:ext>
             </a:extLst>
           </p:cNvPr>
@@ -7076,7 +7086,7 @@
           <p:cNvPr id="12" name="">
             <a:extLst xmlns:a="http://schemas.openxmlformats.org/drawingml/2006/main">
               <a:ext uri="{FF2B5EF4-FFF2-40B4-BE49-F238E27FC236}">
-                <a16:creationId xmlns:a16="http://schemas.microsoft.com/office/drawing/2014/main" id="{E5198346-8F14-4082-B089-1DF7F8D5658A}"/>
+                <a16:creationId xmlns:a16="http://schemas.microsoft.com/office/drawing/2014/main" id="{81C190EF-403A-4442-BB06-5B3D20F5ECF4}"/>
               </a:ext>
             </a:extLst>
           </p:cNvPr>
@@ -7132,7 +7142,7 @@
           <p:cNvPr id="13" name="">
             <a:extLst xmlns:a="http://schemas.openxmlformats.org/drawingml/2006/main">
               <a:ext uri="{FF2B5EF4-FFF2-40B4-BE49-F238E27FC236}">
-                <a16:creationId xmlns:a16="http://schemas.microsoft.com/office/drawing/2014/main" id="{36B3F581-08CE-405F-9A72-447777DCBAAC}"/>
+                <a16:creationId xmlns:a16="http://schemas.microsoft.com/office/drawing/2014/main" id="{05B33207-BDB2-43DE-8F34-EBA9DC03F73E}"/>
               </a:ext>
             </a:extLst>
           </p:cNvPr>
@@ -7167,7 +7177,7 @@
           <p:cNvPr id="14" name="">
             <a:extLst xmlns:a="http://schemas.openxmlformats.org/drawingml/2006/main">
               <a:ext uri="{FF2B5EF4-FFF2-40B4-BE49-F238E27FC236}">
-                <a16:creationId xmlns:a16="http://schemas.microsoft.com/office/drawing/2014/main" id="{BD60A1C1-FD5C-4D17-9E49-CEF0148E2440}"/>
+                <a16:creationId xmlns:a16="http://schemas.microsoft.com/office/drawing/2014/main" id="{89C0890E-53D6-4C54-B127-181F88B4B9DA}"/>
               </a:ext>
             </a:extLst>
           </p:cNvPr>
@@ -7223,7 +7233,7 @@
           <p:cNvPr id="15" name="">
             <a:extLst xmlns:a="http://schemas.openxmlformats.org/drawingml/2006/main">
               <a:ext uri="{FF2B5EF4-FFF2-40B4-BE49-F238E27FC236}">
-                <a16:creationId xmlns:a16="http://schemas.microsoft.com/office/drawing/2014/main" id="{E65191F3-B6D4-4DD2-873B-06A0597B220F}"/>
+                <a16:creationId xmlns:a16="http://schemas.microsoft.com/office/drawing/2014/main" id="{49E7C868-538F-423F-A064-7C244EA5ED85}"/>
               </a:ext>
             </a:extLst>
           </p:cNvPr>
@@ -7279,7 +7289,7 @@
           <p:cNvPr id="16" name="">
             <a:extLst xmlns:a="http://schemas.openxmlformats.org/drawingml/2006/main">
               <a:ext uri="{FF2B5EF4-FFF2-40B4-BE49-F238E27FC236}">
-                <a16:creationId xmlns:a16="http://schemas.microsoft.com/office/drawing/2014/main" id="{87CC41E5-5B37-462E-BF80-6CFA6A9A3AF4}"/>
+                <a16:creationId xmlns:a16="http://schemas.microsoft.com/office/drawing/2014/main" id="{5EC5E62E-8EA0-4BF9-BC00-DFCD35154882}"/>
               </a:ext>
             </a:extLst>
           </p:cNvPr>
@@ -7339,7 +7349,7 @@
           <p:nvPr/>
         </p:nvPicPr>
         <p:blipFill>
-          <a:blip xmlns:r="http://schemas.openxmlformats.org/officeDocument/2006/relationships" xmlns:a="http://schemas.openxmlformats.org/drawingml/2006/main" r:embed="R3d4c68461ef34625"/>
+          <a:blip xmlns:r="http://schemas.openxmlformats.org/officeDocument/2006/relationships" xmlns:a="http://schemas.openxmlformats.org/drawingml/2006/main" r:embed="R8363554d41a440dc"/>
           <a:srcRect xmlns:a="http://schemas.openxmlformats.org/drawingml/2006/main" l="19" t="0" r="19" b="0"/>
           <a:stretch xmlns:a="http://schemas.openxmlformats.org/drawingml/2006/main">
             <a:fillRect l="0" t="0" r="0" b="0"/>
@@ -7360,7 +7370,7 @@
     </p:spTree>
     <p:extLst>
       <p:ext uri="{BB962C8B-B14F-4D97-AF65-F5344CB8AC3E}">
-        <p14:creationId xmlns:p14="http://schemas.microsoft.com/office/powerpoint/2010/main" val="2089842682"/>
+        <p14:creationId xmlns:p14="http://schemas.microsoft.com/office/powerpoint/2010/main" val="105376756"/>
       </p:ext>
     </p:extLst>
   </p:cSld>
@@ -7391,7 +7401,7 @@
           <p:cNvPr id="1" name="">
             <a:extLst xmlns:a="http://schemas.openxmlformats.org/drawingml/2006/main">
               <a:ext uri="{FF2B5EF4-FFF2-40B4-BE49-F238E27FC236}">
-                <a16:creationId xmlns:a16="http://schemas.microsoft.com/office/drawing/2014/main" id="{552A7E73-037A-4B1F-BB3B-49A55B62B349}"/>
+                <a16:creationId xmlns:a16="http://schemas.microsoft.com/office/drawing/2014/main" id="{F0F9D432-DD66-439C-989A-AE031EFDE309}"/>
               </a:ext>
             </a:extLst>
           </p:cNvPr>
@@ -7422,7 +7432,7 @@
           <p:cNvPr id="2" name="">
             <a:extLst xmlns:a="http://schemas.openxmlformats.org/drawingml/2006/main">
               <a:ext uri="{FF2B5EF4-FFF2-40B4-BE49-F238E27FC236}">
-                <a16:creationId xmlns:a16="http://schemas.microsoft.com/office/drawing/2014/main" id="{56257C93-992C-4FD2-BE84-BA2ACA479461}"/>
+                <a16:creationId xmlns:a16="http://schemas.microsoft.com/office/drawing/2014/main" id="{542308C7-F351-4D03-8DD3-6D71A49D99FF}"/>
               </a:ext>
             </a:extLst>
           </p:cNvPr>
@@ -7478,7 +7488,7 @@
           <p:cNvPr id="3" name="">
             <a:extLst xmlns:a="http://schemas.openxmlformats.org/drawingml/2006/main">
               <a:ext uri="{FF2B5EF4-FFF2-40B4-BE49-F238E27FC236}">
-                <a16:creationId xmlns:a16="http://schemas.microsoft.com/office/drawing/2014/main" id="{47F8E307-C637-4430-950C-1FAC6C6CBA9A}"/>
+                <a16:creationId xmlns:a16="http://schemas.microsoft.com/office/drawing/2014/main" id="{78D6089A-D4CF-4B4A-87B9-9936985E3138}"/>
               </a:ext>
             </a:extLst>
           </p:cNvPr>
@@ -7534,7 +7544,7 @@
           <p:cNvPr id="4" name="">
             <a:extLst xmlns:a="http://schemas.openxmlformats.org/drawingml/2006/main">
               <a:ext uri="{FF2B5EF4-FFF2-40B4-BE49-F238E27FC236}">
-                <a16:creationId xmlns:a16="http://schemas.microsoft.com/office/drawing/2014/main" id="{85E18DED-3909-4BF6-95BA-8D5E6068CFE6}"/>
+                <a16:creationId xmlns:a16="http://schemas.microsoft.com/office/drawing/2014/main" id="{282EDF2C-4253-4133-8270-B201B39C9B42}"/>
               </a:ext>
             </a:extLst>
           </p:cNvPr>
@@ -7590,7 +7600,7 @@
           <p:cNvPr id="5" name="">
             <a:extLst xmlns:a="http://schemas.openxmlformats.org/drawingml/2006/main">
               <a:ext uri="{FF2B5EF4-FFF2-40B4-BE49-F238E27FC236}">
-                <a16:creationId xmlns:a16="http://schemas.microsoft.com/office/drawing/2014/main" id="{503B168E-6865-4D7E-B696-46A3D615347C}"/>
+                <a16:creationId xmlns:a16="http://schemas.microsoft.com/office/drawing/2014/main" id="{CC9D74C5-A360-411F-8767-8B25C9BD122B}"/>
               </a:ext>
             </a:extLst>
           </p:cNvPr>
@@ -7621,7 +7631,7 @@
           <p:cNvPr id="6" name="">
             <a:extLst xmlns:a="http://schemas.openxmlformats.org/drawingml/2006/main">
               <a:ext uri="{FF2B5EF4-FFF2-40B4-BE49-F238E27FC236}">
-                <a16:creationId xmlns:a16="http://schemas.microsoft.com/office/drawing/2014/main" id="{AE35F7E9-93E0-419D-984E-CAC335C7E285}"/>
+                <a16:creationId xmlns:a16="http://schemas.microsoft.com/office/drawing/2014/main" id="{AD8F4E53-DB88-4473-970E-A0281ADD516E}"/>
               </a:ext>
             </a:extLst>
           </p:cNvPr>
@@ -7677,7 +7687,7 @@
           <p:cNvPr id="7" name="">
             <a:extLst xmlns:a="http://schemas.openxmlformats.org/drawingml/2006/main">
               <a:ext uri="{FF2B5EF4-FFF2-40B4-BE49-F238E27FC236}">
-                <a16:creationId xmlns:a16="http://schemas.microsoft.com/office/drawing/2014/main" id="{B1C30068-BD79-40C4-ABDF-C65862FE0DC7}"/>
+                <a16:creationId xmlns:a16="http://schemas.microsoft.com/office/drawing/2014/main" id="{9D7810BE-74A2-4A2F-86F9-81D3A1E34A6C}"/>
               </a:ext>
             </a:extLst>
           </p:cNvPr>
@@ -7733,7 +7743,7 @@
           <p:cNvPr id="8" name="">
             <a:extLst xmlns:a="http://schemas.openxmlformats.org/drawingml/2006/main">
               <a:ext uri="{FF2B5EF4-FFF2-40B4-BE49-F238E27FC236}">
-                <a16:creationId xmlns:a16="http://schemas.microsoft.com/office/drawing/2014/main" id="{D24F6EDF-316C-4E12-ADF7-B63B996586DD}"/>
+                <a16:creationId xmlns:a16="http://schemas.microsoft.com/office/drawing/2014/main" id="{D9332AC0-DC70-4D6D-A20E-1DB7E3613CEF}"/>
               </a:ext>
             </a:extLst>
           </p:cNvPr>
@@ -7789,7 +7799,7 @@
           <p:cNvPr id="9" name="">
             <a:extLst xmlns:a="http://schemas.openxmlformats.org/drawingml/2006/main">
               <a:ext uri="{FF2B5EF4-FFF2-40B4-BE49-F238E27FC236}">
-                <a16:creationId xmlns:a16="http://schemas.microsoft.com/office/drawing/2014/main" id="{B4D258A4-1DE2-4691-97CB-0B8626DE1C52}"/>
+                <a16:creationId xmlns:a16="http://schemas.microsoft.com/office/drawing/2014/main" id="{86DC44C4-CA6B-4393-B422-6644D8D354AA}"/>
               </a:ext>
             </a:extLst>
           </p:cNvPr>
@@ -7845,7 +7855,7 @@
           <p:cNvPr id="10" name="">
             <a:extLst xmlns:a="http://schemas.openxmlformats.org/drawingml/2006/main">
               <a:ext uri="{FF2B5EF4-FFF2-40B4-BE49-F238E27FC236}">
-                <a16:creationId xmlns:a16="http://schemas.microsoft.com/office/drawing/2014/main" id="{52D1D1CC-A7DC-4531-9D0B-427C391F377B}"/>
+                <a16:creationId xmlns:a16="http://schemas.microsoft.com/office/drawing/2014/main" id="{E758A415-F0F4-4AD4-80E6-DA22E403A153}"/>
               </a:ext>
             </a:extLst>
           </p:cNvPr>
@@ -7880,7 +7890,7 @@
           <p:cNvPr id="11" name="">
             <a:extLst xmlns:a="http://schemas.openxmlformats.org/drawingml/2006/main">
               <a:ext uri="{FF2B5EF4-FFF2-40B4-BE49-F238E27FC236}">
-                <a16:creationId xmlns:a16="http://schemas.microsoft.com/office/drawing/2014/main" id="{F7F84CA7-6248-4B80-8B41-913454B17385}"/>
+                <a16:creationId xmlns:a16="http://schemas.microsoft.com/office/drawing/2014/main" id="{7944CCD8-9EB0-4094-B350-912539BD37A6}"/>
               </a:ext>
             </a:extLst>
           </p:cNvPr>
@@ -7936,7 +7946,7 @@
           <p:cNvPr id="12" name="">
             <a:extLst xmlns:a="http://schemas.openxmlformats.org/drawingml/2006/main">
               <a:ext uri="{FF2B5EF4-FFF2-40B4-BE49-F238E27FC236}">
-                <a16:creationId xmlns:a16="http://schemas.microsoft.com/office/drawing/2014/main" id="{C788575E-13DB-4E14-9140-2C979DA28B1C}"/>
+                <a16:creationId xmlns:a16="http://schemas.microsoft.com/office/drawing/2014/main" id="{5414028A-7CCB-418C-9138-7A8FDEF95AD1}"/>
               </a:ext>
             </a:extLst>
           </p:cNvPr>
@@ -7992,7 +8002,7 @@
           <p:cNvPr id="13" name="">
             <a:extLst xmlns:a="http://schemas.openxmlformats.org/drawingml/2006/main">
               <a:ext uri="{FF2B5EF4-FFF2-40B4-BE49-F238E27FC236}">
-                <a16:creationId xmlns:a16="http://schemas.microsoft.com/office/drawing/2014/main" id="{4EDBA8DC-4930-411C-B527-648C36AEC45B}"/>
+                <a16:creationId xmlns:a16="http://schemas.microsoft.com/office/drawing/2014/main" id="{20639B4C-B8BC-4133-A45F-D22707D92D2E}"/>
               </a:ext>
             </a:extLst>
           </p:cNvPr>
@@ -8048,7 +8058,7 @@
           <p:cNvPr id="14" name="">
             <a:extLst xmlns:a="http://schemas.openxmlformats.org/drawingml/2006/main">
               <a:ext uri="{FF2B5EF4-FFF2-40B4-BE49-F238E27FC236}">
-                <a16:creationId xmlns:a16="http://schemas.microsoft.com/office/drawing/2014/main" id="{4357B181-9CEC-4ED2-99FA-9DB7D6F45EE3}"/>
+                <a16:creationId xmlns:a16="http://schemas.microsoft.com/office/drawing/2014/main" id="{97CEAE67-672C-4AD8-91A7-C2F356D2F142}"/>
               </a:ext>
             </a:extLst>
           </p:cNvPr>
@@ -8104,7 +8114,7 @@
           <p:cNvPr id="15" name="">
             <a:extLst xmlns:a="http://schemas.openxmlformats.org/drawingml/2006/main">
               <a:ext uri="{FF2B5EF4-FFF2-40B4-BE49-F238E27FC236}">
-                <a16:creationId xmlns:a16="http://schemas.microsoft.com/office/drawing/2014/main" id="{8D6B8E09-ED87-43E8-BF9F-9E3412B9716F}"/>
+                <a16:creationId xmlns:a16="http://schemas.microsoft.com/office/drawing/2014/main" id="{1F9BEE17-047A-4623-897F-1D26FB0E0B1F}"/>
               </a:ext>
             </a:extLst>
           </p:cNvPr>
@@ -8160,7 +8170,7 @@
           <p:cNvPr id="16" name="">
             <a:extLst xmlns:a="http://schemas.openxmlformats.org/drawingml/2006/main">
               <a:ext uri="{FF2B5EF4-FFF2-40B4-BE49-F238E27FC236}">
-                <a16:creationId xmlns:a16="http://schemas.microsoft.com/office/drawing/2014/main" id="{53790688-AD85-4B90-B39D-96E033EA8463}"/>
+                <a16:creationId xmlns:a16="http://schemas.microsoft.com/office/drawing/2014/main" id="{6F033EB0-A35A-4595-9211-E38D0DF1D499}"/>
               </a:ext>
             </a:extLst>
           </p:cNvPr>
@@ -8195,7 +8205,7 @@
           <p:cNvPr id="17" name="">
             <a:extLst xmlns:a="http://schemas.openxmlformats.org/drawingml/2006/main">
               <a:ext uri="{FF2B5EF4-FFF2-40B4-BE49-F238E27FC236}">
-                <a16:creationId xmlns:a16="http://schemas.microsoft.com/office/drawing/2014/main" id="{7A0A1A96-CF52-4F38-B50C-C429471A4810}"/>
+                <a16:creationId xmlns:a16="http://schemas.microsoft.com/office/drawing/2014/main" id="{A2CC9F64-3CC0-44F2-B32E-76AE28A68723}"/>
               </a:ext>
             </a:extLst>
           </p:cNvPr>
@@ -8251,7 +8261,7 @@
           <p:cNvPr id="18" name="">
             <a:extLst xmlns:a="http://schemas.openxmlformats.org/drawingml/2006/main">
               <a:ext uri="{FF2B5EF4-FFF2-40B4-BE49-F238E27FC236}">
-                <a16:creationId xmlns:a16="http://schemas.microsoft.com/office/drawing/2014/main" id="{BAEF7092-9A81-473B-BEC1-00264E9E6204}"/>
+                <a16:creationId xmlns:a16="http://schemas.microsoft.com/office/drawing/2014/main" id="{D97C654F-61D4-4A67-9A96-B3C7885E6B32}"/>
               </a:ext>
             </a:extLst>
           </p:cNvPr>
@@ -8286,7 +8296,7 @@
           <p:cNvPr id="19" name="">
             <a:extLst xmlns:a="http://schemas.openxmlformats.org/drawingml/2006/main">
               <a:ext uri="{FF2B5EF4-FFF2-40B4-BE49-F238E27FC236}">
-                <a16:creationId xmlns:a16="http://schemas.microsoft.com/office/drawing/2014/main" id="{75AAFD68-04E8-49A2-B888-C20A6EC99E7D}"/>
+                <a16:creationId xmlns:a16="http://schemas.microsoft.com/office/drawing/2014/main" id="{BCBA578F-0DFE-48CE-B82E-30E36D50BC75}"/>
               </a:ext>
             </a:extLst>
           </p:cNvPr>
@@ -8342,7 +8352,7 @@
           <p:cNvPr id="20" name="">
             <a:extLst xmlns:a="http://schemas.openxmlformats.org/drawingml/2006/main">
               <a:ext uri="{FF2B5EF4-FFF2-40B4-BE49-F238E27FC236}">
-                <a16:creationId xmlns:a16="http://schemas.microsoft.com/office/drawing/2014/main" id="{751D780C-DA30-45CD-8633-38B87AEF0AD2}"/>
+                <a16:creationId xmlns:a16="http://schemas.microsoft.com/office/drawing/2014/main" id="{F2C33EB2-FCC7-4FE4-A81B-0FFB7614AB73}"/>
               </a:ext>
             </a:extLst>
           </p:cNvPr>
@@ -8398,7 +8408,7 @@
           <p:cNvPr id="21" name="">
             <a:extLst xmlns:a="http://schemas.openxmlformats.org/drawingml/2006/main">
               <a:ext uri="{FF2B5EF4-FFF2-40B4-BE49-F238E27FC236}">
-                <a16:creationId xmlns:a16="http://schemas.microsoft.com/office/drawing/2014/main" id="{5FF82FA0-BBA4-4E2C-B67B-D075ADA9EB7F}"/>
+                <a16:creationId xmlns:a16="http://schemas.microsoft.com/office/drawing/2014/main" id="{7A650828-D205-4893-A866-B100ADC17CBC}"/>
               </a:ext>
             </a:extLst>
           </p:cNvPr>
@@ -8452,7 +8462,7 @@
     </p:spTree>
     <p:extLst>
       <p:ext uri="{BB962C8B-B14F-4D97-AF65-F5344CB8AC3E}">
-        <p14:creationId xmlns:p14="http://schemas.microsoft.com/office/powerpoint/2010/main" val="2092207573"/>
+        <p14:creationId xmlns:p14="http://schemas.microsoft.com/office/powerpoint/2010/main" val="1691569425"/>
       </p:ext>
     </p:extLst>
   </p:cSld>
@@ -8483,7 +8493,7 @@
           <p:cNvPr id="1" name="">
             <a:extLst xmlns:a="http://schemas.openxmlformats.org/drawingml/2006/main">
               <a:ext uri="{FF2B5EF4-FFF2-40B4-BE49-F238E27FC236}">
-                <a16:creationId xmlns:a16="http://schemas.microsoft.com/office/drawing/2014/main" id="{8356E50F-BD05-4A4E-9FC1-FF772E1A1DBF}"/>
+                <a16:creationId xmlns:a16="http://schemas.microsoft.com/office/drawing/2014/main" id="{4CBF306F-2A1D-4726-81CB-3089803FFCEC}"/>
               </a:ext>
             </a:extLst>
           </p:cNvPr>
@@ -8514,7 +8524,7 @@
           <p:cNvPr id="2" name="">
             <a:extLst xmlns:a="http://schemas.openxmlformats.org/drawingml/2006/main">
               <a:ext uri="{FF2B5EF4-FFF2-40B4-BE49-F238E27FC236}">
-                <a16:creationId xmlns:a16="http://schemas.microsoft.com/office/drawing/2014/main" id="{4920A693-DB8F-4C23-A949-FA6F3C03FC83}"/>
+                <a16:creationId xmlns:a16="http://schemas.microsoft.com/office/drawing/2014/main" id="{D89CDBF7-A43F-4EAD-907A-0CD164E11486}"/>
               </a:ext>
             </a:extLst>
           </p:cNvPr>
@@ -8545,7 +8555,7 @@
           <p:cNvPr id="3" name="">
             <a:extLst xmlns:a="http://schemas.openxmlformats.org/drawingml/2006/main">
               <a:ext uri="{FF2B5EF4-FFF2-40B4-BE49-F238E27FC236}">
-                <a16:creationId xmlns:a16="http://schemas.microsoft.com/office/drawing/2014/main" id="{AA387289-199F-4BFF-9460-4910BD082CBA}"/>
+                <a16:creationId xmlns:a16="http://schemas.microsoft.com/office/drawing/2014/main" id="{BDBE9BEF-14A5-44C6-98CC-B55D8C847184}"/>
               </a:ext>
             </a:extLst>
           </p:cNvPr>
@@ -8576,7 +8586,7 @@
           <p:cNvPr id="4" name="">
             <a:extLst xmlns:a="http://schemas.openxmlformats.org/drawingml/2006/main">
               <a:ext uri="{FF2B5EF4-FFF2-40B4-BE49-F238E27FC236}">
-                <a16:creationId xmlns:a16="http://schemas.microsoft.com/office/drawing/2014/main" id="{9236DABB-37B8-497F-BD11-113DAC5BB1C4}"/>
+                <a16:creationId xmlns:a16="http://schemas.microsoft.com/office/drawing/2014/main" id="{A63B7BC7-329D-4A0E-8DDA-45EDB2ACA268}"/>
               </a:ext>
             </a:extLst>
           </p:cNvPr>
@@ -8607,7 +8617,7 @@
           <p:cNvPr id="5" name="">
             <a:extLst xmlns:a="http://schemas.openxmlformats.org/drawingml/2006/main">
               <a:ext uri="{FF2B5EF4-FFF2-40B4-BE49-F238E27FC236}">
-                <a16:creationId xmlns:a16="http://schemas.microsoft.com/office/drawing/2014/main" id="{93AE8273-8B3D-4B98-AFBB-FF69D6314951}"/>
+                <a16:creationId xmlns:a16="http://schemas.microsoft.com/office/drawing/2014/main" id="{BC715445-6C85-45CB-99A7-7713328A5A90}"/>
               </a:ext>
             </a:extLst>
           </p:cNvPr>
@@ -8638,7 +8648,7 @@
           <p:cNvPr id="6" name="">
             <a:extLst xmlns:a="http://schemas.openxmlformats.org/drawingml/2006/main">
               <a:ext uri="{FF2B5EF4-FFF2-40B4-BE49-F238E27FC236}">
-                <a16:creationId xmlns:a16="http://schemas.microsoft.com/office/drawing/2014/main" id="{D9114398-0749-44F6-B7D0-842847FC5255}"/>
+                <a16:creationId xmlns:a16="http://schemas.microsoft.com/office/drawing/2014/main" id="{374B3D97-D42D-4D8F-9C2F-458A157E3011}"/>
               </a:ext>
             </a:extLst>
           </p:cNvPr>
@@ -8669,7 +8679,7 @@
           <p:cNvPr id="7" name="">
             <a:extLst xmlns:a="http://schemas.openxmlformats.org/drawingml/2006/main">
               <a:ext uri="{FF2B5EF4-FFF2-40B4-BE49-F238E27FC236}">
-                <a16:creationId xmlns:a16="http://schemas.microsoft.com/office/drawing/2014/main" id="{774A7CD9-BD2F-47C6-A69F-72F1826BE5FC}"/>
+                <a16:creationId xmlns:a16="http://schemas.microsoft.com/office/drawing/2014/main" id="{DDCFF145-1D0F-4A41-88AA-BDCB2E8BFACB}"/>
               </a:ext>
             </a:extLst>
           </p:cNvPr>
@@ -8700,7 +8710,7 @@
           <p:cNvPr id="8" name="">
             <a:extLst xmlns:a="http://schemas.openxmlformats.org/drawingml/2006/main">
               <a:ext uri="{FF2B5EF4-FFF2-40B4-BE49-F238E27FC236}">
-                <a16:creationId xmlns:a16="http://schemas.microsoft.com/office/drawing/2014/main" id="{4B6BE2E0-9A07-4244-8B9F-BE2AD8089DDB}"/>
+                <a16:creationId xmlns:a16="http://schemas.microsoft.com/office/drawing/2014/main" id="{DAD48340-0361-40A3-8D06-3C4BC395B52F}"/>
               </a:ext>
             </a:extLst>
           </p:cNvPr>
@@ -8731,7 +8741,7 @@
           <p:cNvPr id="9" name="">
             <a:extLst xmlns:a="http://schemas.openxmlformats.org/drawingml/2006/main">
               <a:ext uri="{FF2B5EF4-FFF2-40B4-BE49-F238E27FC236}">
-                <a16:creationId xmlns:a16="http://schemas.microsoft.com/office/drawing/2014/main" id="{E83D4BF0-DC46-4DA7-A14C-FC3C70B05633}"/>
+                <a16:creationId xmlns:a16="http://schemas.microsoft.com/office/drawing/2014/main" id="{55AB169A-0F87-48CC-8115-7621BD321F7B}"/>
               </a:ext>
             </a:extLst>
           </p:cNvPr>
@@ -8762,7 +8772,7 @@
           <p:cNvPr id="10" name="">
             <a:extLst xmlns:a="http://schemas.openxmlformats.org/drawingml/2006/main">
               <a:ext uri="{FF2B5EF4-FFF2-40B4-BE49-F238E27FC236}">
-                <a16:creationId xmlns:a16="http://schemas.microsoft.com/office/drawing/2014/main" id="{6B95ED9C-47E3-4788-8409-714FAD56E5EC}"/>
+                <a16:creationId xmlns:a16="http://schemas.microsoft.com/office/drawing/2014/main" id="{A27E7F10-0B3C-4FC5-9021-C53FFBCD606C}"/>
               </a:ext>
             </a:extLst>
           </p:cNvPr>
@@ -8793,7 +8803,7 @@
           <p:cNvPr id="11" name="">
             <a:extLst xmlns:a="http://schemas.openxmlformats.org/drawingml/2006/main">
               <a:ext uri="{FF2B5EF4-FFF2-40B4-BE49-F238E27FC236}">
-                <a16:creationId xmlns:a16="http://schemas.microsoft.com/office/drawing/2014/main" id="{58924547-60A9-43D6-983A-B6F573C1CB73}"/>
+                <a16:creationId xmlns:a16="http://schemas.microsoft.com/office/drawing/2014/main" id="{1376533F-2C87-420F-9703-7D76E1C55075}"/>
               </a:ext>
             </a:extLst>
           </p:cNvPr>
@@ -8824,7 +8834,7 @@
           <p:cNvPr id="12" name="">
             <a:extLst xmlns:a="http://schemas.openxmlformats.org/drawingml/2006/main">
               <a:ext uri="{FF2B5EF4-FFF2-40B4-BE49-F238E27FC236}">
-                <a16:creationId xmlns:a16="http://schemas.microsoft.com/office/drawing/2014/main" id="{51C59F4B-BAE5-4870-BFA6-1771F8D7235A}"/>
+                <a16:creationId xmlns:a16="http://schemas.microsoft.com/office/drawing/2014/main" id="{19F9804D-9660-42CC-9072-C669BFFF391D}"/>
               </a:ext>
             </a:extLst>
           </p:cNvPr>
@@ -8855,7 +8865,7 @@
           <p:cNvPr id="13" name="">
             <a:extLst xmlns:a="http://schemas.openxmlformats.org/drawingml/2006/main">
               <a:ext uri="{FF2B5EF4-FFF2-40B4-BE49-F238E27FC236}">
-                <a16:creationId xmlns:a16="http://schemas.microsoft.com/office/drawing/2014/main" id="{84F73D8B-BA4E-4903-87C1-285952576622}"/>
+                <a16:creationId xmlns:a16="http://schemas.microsoft.com/office/drawing/2014/main" id="{BD1BEEAC-F636-44E2-AB83-004068EC989B}"/>
               </a:ext>
             </a:extLst>
           </p:cNvPr>
@@ -8886,7 +8896,7 @@
           <p:cNvPr id="14" name="">
             <a:extLst xmlns:a="http://schemas.openxmlformats.org/drawingml/2006/main">
               <a:ext uri="{FF2B5EF4-FFF2-40B4-BE49-F238E27FC236}">
-                <a16:creationId xmlns:a16="http://schemas.microsoft.com/office/drawing/2014/main" id="{4E52A0F4-81B6-419C-BD3D-D5DE9EE9A85E}"/>
+                <a16:creationId xmlns:a16="http://schemas.microsoft.com/office/drawing/2014/main" id="{6F5B564F-F83D-4298-97A8-FE71A33499FC}"/>
               </a:ext>
             </a:extLst>
           </p:cNvPr>
@@ -8917,7 +8927,7 @@
           <p:cNvPr id="15" name="">
             <a:extLst xmlns:a="http://schemas.openxmlformats.org/drawingml/2006/main">
               <a:ext uri="{FF2B5EF4-FFF2-40B4-BE49-F238E27FC236}">
-                <a16:creationId xmlns:a16="http://schemas.microsoft.com/office/drawing/2014/main" id="{CA3F689B-1AE9-48D7-908E-A32BB70E550E}"/>
+                <a16:creationId xmlns:a16="http://schemas.microsoft.com/office/drawing/2014/main" id="{ADADFF80-FFE0-44BD-8AE3-DB962DAFDDD1}"/>
               </a:ext>
             </a:extLst>
           </p:cNvPr>
@@ -8948,7 +8958,7 @@
           <p:cNvPr id="16" name="">
             <a:extLst xmlns:a="http://schemas.openxmlformats.org/drawingml/2006/main">
               <a:ext uri="{FF2B5EF4-FFF2-40B4-BE49-F238E27FC236}">
-                <a16:creationId xmlns:a16="http://schemas.microsoft.com/office/drawing/2014/main" id="{FA845772-F0FE-4978-BB95-B8691F4BEAF4}"/>
+                <a16:creationId xmlns:a16="http://schemas.microsoft.com/office/drawing/2014/main" id="{A539DD72-E31A-477D-B9B1-2C51E94E6938}"/>
               </a:ext>
             </a:extLst>
           </p:cNvPr>
@@ -8979,7 +8989,7 @@
           <p:cNvPr id="17" name="">
             <a:extLst xmlns:a="http://schemas.openxmlformats.org/drawingml/2006/main">
               <a:ext uri="{FF2B5EF4-FFF2-40B4-BE49-F238E27FC236}">
-                <a16:creationId xmlns:a16="http://schemas.microsoft.com/office/drawing/2014/main" id="{80D039C4-213C-449B-941B-FE3DAADFF41E}"/>
+                <a16:creationId xmlns:a16="http://schemas.microsoft.com/office/drawing/2014/main" id="{1F4B5361-7B6F-4171-9144-5CF538989F40}"/>
               </a:ext>
             </a:extLst>
           </p:cNvPr>
@@ -9010,7 +9020,7 @@
           <p:cNvPr id="18" name="">
             <a:extLst xmlns:a="http://schemas.openxmlformats.org/drawingml/2006/main">
               <a:ext uri="{FF2B5EF4-FFF2-40B4-BE49-F238E27FC236}">
-                <a16:creationId xmlns:a16="http://schemas.microsoft.com/office/drawing/2014/main" id="{21B236AF-A6FB-4222-8053-B374E97E2D4C}"/>
+                <a16:creationId xmlns:a16="http://schemas.microsoft.com/office/drawing/2014/main" id="{A483F5DA-F67E-43C6-BEDF-A1F205C65935}"/>
               </a:ext>
             </a:extLst>
           </p:cNvPr>
@@ -9041,7 +9051,7 @@
           <p:cNvPr id="19" name="">
             <a:extLst xmlns:a="http://schemas.openxmlformats.org/drawingml/2006/main">
               <a:ext uri="{FF2B5EF4-FFF2-40B4-BE49-F238E27FC236}">
-                <a16:creationId xmlns:a16="http://schemas.microsoft.com/office/drawing/2014/main" id="{4D2397C6-58A1-4496-A168-76511D81CDEA}"/>
+                <a16:creationId xmlns:a16="http://schemas.microsoft.com/office/drawing/2014/main" id="{AF20797A-2DA0-4AEA-9D3B-0FAB9758AD6E}"/>
               </a:ext>
             </a:extLst>
           </p:cNvPr>
@@ -9072,7 +9082,7 @@
           <p:cNvPr id="20" name="">
             <a:extLst xmlns:a="http://schemas.openxmlformats.org/drawingml/2006/main">
               <a:ext uri="{FF2B5EF4-FFF2-40B4-BE49-F238E27FC236}">
-                <a16:creationId xmlns:a16="http://schemas.microsoft.com/office/drawing/2014/main" id="{D188D5B1-6026-4732-BFFB-E390EF4E8B09}"/>
+                <a16:creationId xmlns:a16="http://schemas.microsoft.com/office/drawing/2014/main" id="{34909A5D-4D5F-4F4B-A26B-7756020C4B1E}"/>
               </a:ext>
             </a:extLst>
           </p:cNvPr>
@@ -9103,7 +9113,7 @@
           <p:cNvPr id="21" name="">
             <a:extLst xmlns:a="http://schemas.openxmlformats.org/drawingml/2006/main">
               <a:ext uri="{FF2B5EF4-FFF2-40B4-BE49-F238E27FC236}">
-                <a16:creationId xmlns:a16="http://schemas.microsoft.com/office/drawing/2014/main" id="{90E2E582-02F5-4DB4-8D20-3389E0FEF960}"/>
+                <a16:creationId xmlns:a16="http://schemas.microsoft.com/office/drawing/2014/main" id="{9D1493CE-7CD0-4CDE-B389-24DCCC27A457}"/>
               </a:ext>
             </a:extLst>
           </p:cNvPr>
@@ -9134,7 +9144,7 @@
           <p:cNvPr id="22" name="">
             <a:extLst xmlns:a="http://schemas.openxmlformats.org/drawingml/2006/main">
               <a:ext uri="{FF2B5EF4-FFF2-40B4-BE49-F238E27FC236}">
-                <a16:creationId xmlns:a16="http://schemas.microsoft.com/office/drawing/2014/main" id="{CD4CD699-169D-494D-8953-0551B84B2F89}"/>
+                <a16:creationId xmlns:a16="http://schemas.microsoft.com/office/drawing/2014/main" id="{B07D2156-B9EB-4A4C-8ABA-C93E8926C4B1}"/>
               </a:ext>
             </a:extLst>
           </p:cNvPr>
@@ -9165,7 +9175,7 @@
           <p:cNvPr id="23" name="">
             <a:extLst xmlns:a="http://schemas.openxmlformats.org/drawingml/2006/main">
               <a:ext uri="{FF2B5EF4-FFF2-40B4-BE49-F238E27FC236}">
-                <a16:creationId xmlns:a16="http://schemas.microsoft.com/office/drawing/2014/main" id="{C158F3AD-2457-452C-83D4-67F5A8D77FF3}"/>
+                <a16:creationId xmlns:a16="http://schemas.microsoft.com/office/drawing/2014/main" id="{06490057-B16B-4AE3-ADAE-4AE17BBABA2C}"/>
               </a:ext>
             </a:extLst>
           </p:cNvPr>
@@ -9196,7 +9206,7 @@
           <p:cNvPr id="24" name="">
             <a:extLst xmlns:a="http://schemas.openxmlformats.org/drawingml/2006/main">
               <a:ext uri="{FF2B5EF4-FFF2-40B4-BE49-F238E27FC236}">
-                <a16:creationId xmlns:a16="http://schemas.microsoft.com/office/drawing/2014/main" id="{EF1BB77D-CA89-4CC5-A3E8-9951E6D9A1DA}"/>
+                <a16:creationId xmlns:a16="http://schemas.microsoft.com/office/drawing/2014/main" id="{0675EB89-C225-4EA7-8DE8-0E81C90CBD59}"/>
               </a:ext>
             </a:extLst>
           </p:cNvPr>
@@ -9227,7 +9237,7 @@
           <p:cNvPr id="25" name="">
             <a:extLst xmlns:a="http://schemas.openxmlformats.org/drawingml/2006/main">
               <a:ext uri="{FF2B5EF4-FFF2-40B4-BE49-F238E27FC236}">
-                <a16:creationId xmlns:a16="http://schemas.microsoft.com/office/drawing/2014/main" id="{D37F17B9-9FB8-4BE2-A862-F677F913C059}"/>
+                <a16:creationId xmlns:a16="http://schemas.microsoft.com/office/drawing/2014/main" id="{3F0ED037-9D44-44CD-8D87-81A6ACFC2DE4}"/>
               </a:ext>
             </a:extLst>
           </p:cNvPr>
@@ -9258,7 +9268,7 @@
           <p:cNvPr id="26" name="">
             <a:extLst xmlns:a="http://schemas.openxmlformats.org/drawingml/2006/main">
               <a:ext uri="{FF2B5EF4-FFF2-40B4-BE49-F238E27FC236}">
-                <a16:creationId xmlns:a16="http://schemas.microsoft.com/office/drawing/2014/main" id="{6278E2D7-8447-456B-8122-68C8E3861E23}"/>
+                <a16:creationId xmlns:a16="http://schemas.microsoft.com/office/drawing/2014/main" id="{84E8C1FA-A114-4A0D-B40F-7A5336D7EA3D}"/>
               </a:ext>
             </a:extLst>
           </p:cNvPr>
@@ -9289,7 +9299,7 @@
           <p:cNvPr id="27" name="">
             <a:extLst xmlns:a="http://schemas.openxmlformats.org/drawingml/2006/main">
               <a:ext uri="{FF2B5EF4-FFF2-40B4-BE49-F238E27FC236}">
-                <a16:creationId xmlns:a16="http://schemas.microsoft.com/office/drawing/2014/main" id="{B76C497A-2575-4637-BAA7-804B56737A63}"/>
+                <a16:creationId xmlns:a16="http://schemas.microsoft.com/office/drawing/2014/main" id="{E5D5BA4D-B571-41E8-86CC-5174C1721D9B}"/>
               </a:ext>
             </a:extLst>
           </p:cNvPr>
@@ -9320,7 +9330,7 @@
           <p:cNvPr id="28" name="">
             <a:extLst xmlns:a="http://schemas.openxmlformats.org/drawingml/2006/main">
               <a:ext uri="{FF2B5EF4-FFF2-40B4-BE49-F238E27FC236}">
-                <a16:creationId xmlns:a16="http://schemas.microsoft.com/office/drawing/2014/main" id="{961678BB-886C-4C53-87F5-7A9E1BBAC16E}"/>
+                <a16:creationId xmlns:a16="http://schemas.microsoft.com/office/drawing/2014/main" id="{7B41A0EB-E6A3-4E18-B531-42412DECBB81}"/>
               </a:ext>
             </a:extLst>
           </p:cNvPr>
@@ -9351,7 +9361,7 @@
           <p:cNvPr id="29" name="">
             <a:extLst xmlns:a="http://schemas.openxmlformats.org/drawingml/2006/main">
               <a:ext uri="{FF2B5EF4-FFF2-40B4-BE49-F238E27FC236}">
-                <a16:creationId xmlns:a16="http://schemas.microsoft.com/office/drawing/2014/main" id="{A17C63DD-BB6C-46C0-9138-F9667907BFB2}"/>
+                <a16:creationId xmlns:a16="http://schemas.microsoft.com/office/drawing/2014/main" id="{587E21DA-DAC3-4670-BCF1-EB4EAFAEBB2D}"/>
               </a:ext>
             </a:extLst>
           </p:cNvPr>
@@ -9382,7 +9392,7 @@
           <p:cNvPr id="30" name="">
             <a:extLst xmlns:a="http://schemas.openxmlformats.org/drawingml/2006/main">
               <a:ext uri="{FF2B5EF4-FFF2-40B4-BE49-F238E27FC236}">
-                <a16:creationId xmlns:a16="http://schemas.microsoft.com/office/drawing/2014/main" id="{A317F13B-66CC-4CE4-BC18-0300BD8A5951}"/>
+                <a16:creationId xmlns:a16="http://schemas.microsoft.com/office/drawing/2014/main" id="{BA2B0D14-BA93-4164-A818-D640A7B84E53}"/>
               </a:ext>
             </a:extLst>
           </p:cNvPr>
@@ -9413,7 +9423,7 @@
           <p:cNvPr id="31" name="">
             <a:extLst xmlns:a="http://schemas.openxmlformats.org/drawingml/2006/main">
               <a:ext uri="{FF2B5EF4-FFF2-40B4-BE49-F238E27FC236}">
-                <a16:creationId xmlns:a16="http://schemas.microsoft.com/office/drawing/2014/main" id="{8B106AF8-B426-455D-BAF0-39CF5B072E0A}"/>
+                <a16:creationId xmlns:a16="http://schemas.microsoft.com/office/drawing/2014/main" id="{32B6EFAB-FC44-40AC-9A06-7089AB75CB94}"/>
               </a:ext>
             </a:extLst>
           </p:cNvPr>
@@ -9444,7 +9454,7 @@
           <p:cNvPr id="32" name="">
             <a:extLst xmlns:a="http://schemas.openxmlformats.org/drawingml/2006/main">
               <a:ext uri="{FF2B5EF4-FFF2-40B4-BE49-F238E27FC236}">
-                <a16:creationId xmlns:a16="http://schemas.microsoft.com/office/drawing/2014/main" id="{C49B614D-BF1B-4E23-9E3B-388599A07668}"/>
+                <a16:creationId xmlns:a16="http://schemas.microsoft.com/office/drawing/2014/main" id="{D92AC8BB-B3E9-4571-B317-50A944DE1FA1}"/>
               </a:ext>
             </a:extLst>
           </p:cNvPr>
@@ -9500,7 +9510,7 @@
           <p:cNvPr id="33" name="">
             <a:extLst xmlns:a="http://schemas.openxmlformats.org/drawingml/2006/main">
               <a:ext uri="{FF2B5EF4-FFF2-40B4-BE49-F238E27FC236}">
-                <a16:creationId xmlns:a16="http://schemas.microsoft.com/office/drawing/2014/main" id="{D804C0FA-2001-412B-AA7A-4F1CAE58E5BE}"/>
+                <a16:creationId xmlns:a16="http://schemas.microsoft.com/office/drawing/2014/main" id="{78C3B7D2-25E6-4980-A67E-68BC86FE6E86}"/>
               </a:ext>
             </a:extLst>
           </p:cNvPr>
@@ -9556,7 +9566,7 @@
           <p:cNvPr id="34" name="">
             <a:extLst xmlns:a="http://schemas.openxmlformats.org/drawingml/2006/main">
               <a:ext uri="{FF2B5EF4-FFF2-40B4-BE49-F238E27FC236}">
-                <a16:creationId xmlns:a16="http://schemas.microsoft.com/office/drawing/2014/main" id="{7D3AC566-FC17-4849-ACF7-23A2A086E69E}"/>
+                <a16:creationId xmlns:a16="http://schemas.microsoft.com/office/drawing/2014/main" id="{7BFB9906-0C93-48C0-AEEB-D952A542FFDD}"/>
               </a:ext>
             </a:extLst>
           </p:cNvPr>
@@ -9612,7 +9622,7 @@
           <p:cNvPr id="35" name="">
             <a:extLst xmlns:a="http://schemas.openxmlformats.org/drawingml/2006/main">
               <a:ext uri="{FF2B5EF4-FFF2-40B4-BE49-F238E27FC236}">
-                <a16:creationId xmlns:a16="http://schemas.microsoft.com/office/drawing/2014/main" id="{B9B943B8-ED9B-42B0-B56B-2A742C98B201}"/>
+                <a16:creationId xmlns:a16="http://schemas.microsoft.com/office/drawing/2014/main" id="{A4583417-1697-45F5-8111-CCF814F56696}"/>
               </a:ext>
             </a:extLst>
           </p:cNvPr>
@@ -9647,7 +9657,7 @@
           <p:cNvPr id="36" name="">
             <a:extLst xmlns:a="http://schemas.openxmlformats.org/drawingml/2006/main">
               <a:ext uri="{FF2B5EF4-FFF2-40B4-BE49-F238E27FC236}">
-                <a16:creationId xmlns:a16="http://schemas.microsoft.com/office/drawing/2014/main" id="{8C06602F-E90F-4B55-85F6-0453679953D9}"/>
+                <a16:creationId xmlns:a16="http://schemas.microsoft.com/office/drawing/2014/main" id="{E1736777-C434-47F7-B086-BA9A5C95C61E}"/>
               </a:ext>
             </a:extLst>
           </p:cNvPr>
@@ -9678,7 +9688,7 @@
           <p:cNvPr id="37" name="">
             <a:extLst xmlns:a="http://schemas.openxmlformats.org/drawingml/2006/main">
               <a:ext uri="{FF2B5EF4-FFF2-40B4-BE49-F238E27FC236}">
-                <a16:creationId xmlns:a16="http://schemas.microsoft.com/office/drawing/2014/main" id="{B95B2F6B-BAE7-409E-AD4F-BBB9664148F5}"/>
+                <a16:creationId xmlns:a16="http://schemas.microsoft.com/office/drawing/2014/main" id="{7A0331ED-3364-4AF7-92BF-46EF42B557DB}"/>
               </a:ext>
             </a:extLst>
           </p:cNvPr>
@@ -9713,7 +9723,7 @@
           <p:cNvPr id="38" name="">
             <a:extLst xmlns:a="http://schemas.openxmlformats.org/drawingml/2006/main">
               <a:ext uri="{FF2B5EF4-FFF2-40B4-BE49-F238E27FC236}">
-                <a16:creationId xmlns:a16="http://schemas.microsoft.com/office/drawing/2014/main" id="{E72FEEBA-FC38-400C-8A5E-DC2A26518DFC}"/>
+                <a16:creationId xmlns:a16="http://schemas.microsoft.com/office/drawing/2014/main" id="{3D91A499-23BF-4093-AF27-C1D9644F8F9C}"/>
               </a:ext>
             </a:extLst>
           </p:cNvPr>
@@ -9744,7 +9754,7 @@
           <p:cNvPr id="39" name="">
             <a:extLst xmlns:a="http://schemas.openxmlformats.org/drawingml/2006/main">
               <a:ext uri="{FF2B5EF4-FFF2-40B4-BE49-F238E27FC236}">
-                <a16:creationId xmlns:a16="http://schemas.microsoft.com/office/drawing/2014/main" id="{208D0D04-3986-4EBC-BF94-C11D461452E8}"/>
+                <a16:creationId xmlns:a16="http://schemas.microsoft.com/office/drawing/2014/main" id="{D419E220-C8EA-4D1B-A224-54D186DB9095}"/>
               </a:ext>
             </a:extLst>
           </p:cNvPr>
@@ -9779,7 +9789,7 @@
           <p:cNvPr id="40" name="">
             <a:extLst xmlns:a="http://schemas.openxmlformats.org/drawingml/2006/main">
               <a:ext uri="{FF2B5EF4-FFF2-40B4-BE49-F238E27FC236}">
-                <a16:creationId xmlns:a16="http://schemas.microsoft.com/office/drawing/2014/main" id="{439AF4DE-552C-4123-AA74-147A02B44092}"/>
+                <a16:creationId xmlns:a16="http://schemas.microsoft.com/office/drawing/2014/main" id="{178D512D-8B81-463D-8669-88DC781F54D6}"/>
               </a:ext>
             </a:extLst>
           </p:cNvPr>
@@ -9810,7 +9820,7 @@
           <p:cNvPr id="41" name="">
             <a:extLst xmlns:a="http://schemas.openxmlformats.org/drawingml/2006/main">
               <a:ext uri="{FF2B5EF4-FFF2-40B4-BE49-F238E27FC236}">
-                <a16:creationId xmlns:a16="http://schemas.microsoft.com/office/drawing/2014/main" id="{2EBBA186-CF78-4CC5-B15E-B47CA39A9EB0}"/>
+                <a16:creationId xmlns:a16="http://schemas.microsoft.com/office/drawing/2014/main" id="{31FC8FA5-1393-4ADF-B620-1653A0A1DCFC}"/>
               </a:ext>
             </a:extLst>
           </p:cNvPr>
@@ -9845,7 +9855,7 @@
           <p:cNvPr id="42" name="">
             <a:extLst xmlns:a="http://schemas.openxmlformats.org/drawingml/2006/main">
               <a:ext uri="{FF2B5EF4-FFF2-40B4-BE49-F238E27FC236}">
-                <a16:creationId xmlns:a16="http://schemas.microsoft.com/office/drawing/2014/main" id="{BCC36A57-E20C-4CD4-AAB8-F7D85010F71D}"/>
+                <a16:creationId xmlns:a16="http://schemas.microsoft.com/office/drawing/2014/main" id="{7848808E-4680-4CA5-A261-4E46F3839443}"/>
               </a:ext>
             </a:extLst>
           </p:cNvPr>
@@ -9876,7 +9886,7 @@
           <p:cNvPr id="43" name="">
             <a:extLst xmlns:a="http://schemas.openxmlformats.org/drawingml/2006/main">
               <a:ext uri="{FF2B5EF4-FFF2-40B4-BE49-F238E27FC236}">
-                <a16:creationId xmlns:a16="http://schemas.microsoft.com/office/drawing/2014/main" id="{DCE94DE0-204F-4704-9DED-7ACBD17F5580}"/>
+                <a16:creationId xmlns:a16="http://schemas.microsoft.com/office/drawing/2014/main" id="{C72B0427-070B-440A-A732-12DFD595E516}"/>
               </a:ext>
             </a:extLst>
           </p:cNvPr>
@@ -9911,7 +9921,7 @@
           <p:cNvPr id="44" name="">
             <a:extLst xmlns:a="http://schemas.openxmlformats.org/drawingml/2006/main">
               <a:ext uri="{FF2B5EF4-FFF2-40B4-BE49-F238E27FC236}">
-                <a16:creationId xmlns:a16="http://schemas.microsoft.com/office/drawing/2014/main" id="{A80EB6D5-720C-42D1-B94D-76C3DD934577}"/>
+                <a16:creationId xmlns:a16="http://schemas.microsoft.com/office/drawing/2014/main" id="{F6348F2A-134E-4965-856F-6349A9D25B67}"/>
               </a:ext>
             </a:extLst>
           </p:cNvPr>
@@ -9942,7 +9952,7 @@
           <p:cNvPr id="45" name="">
             <a:extLst xmlns:a="http://schemas.openxmlformats.org/drawingml/2006/main">
               <a:ext uri="{FF2B5EF4-FFF2-40B4-BE49-F238E27FC236}">
-                <a16:creationId xmlns:a16="http://schemas.microsoft.com/office/drawing/2014/main" id="{F157FF82-7424-493F-9098-3A3D7B1A2396}"/>
+                <a16:creationId xmlns:a16="http://schemas.microsoft.com/office/drawing/2014/main" id="{4B6A623F-55F8-47FD-9A8D-88370209D6BB}"/>
               </a:ext>
             </a:extLst>
           </p:cNvPr>
@@ -9977,7 +9987,7 @@
           <p:cNvPr id="46" name="">
             <a:extLst xmlns:a="http://schemas.openxmlformats.org/drawingml/2006/main">
               <a:ext uri="{FF2B5EF4-FFF2-40B4-BE49-F238E27FC236}">
-                <a16:creationId xmlns:a16="http://schemas.microsoft.com/office/drawing/2014/main" id="{7834E501-46BC-4E71-9B2B-B191C817522D}"/>
+                <a16:creationId xmlns:a16="http://schemas.microsoft.com/office/drawing/2014/main" id="{7DD4F051-6FFA-4009-AB6E-309B50160E31}"/>
               </a:ext>
             </a:extLst>
           </p:cNvPr>
@@ -10008,7 +10018,7 @@
           <p:cNvPr id="47" name="">
             <a:extLst xmlns:a="http://schemas.openxmlformats.org/drawingml/2006/main">
               <a:ext uri="{FF2B5EF4-FFF2-40B4-BE49-F238E27FC236}">
-                <a16:creationId xmlns:a16="http://schemas.microsoft.com/office/drawing/2014/main" id="{2727A613-8E99-471E-B7CC-D0FF74065957}"/>
+                <a16:creationId xmlns:a16="http://schemas.microsoft.com/office/drawing/2014/main" id="{BBF01F77-3B1F-40AD-B7C6-BB22424F648B}"/>
               </a:ext>
             </a:extLst>
           </p:cNvPr>
@@ -10043,7 +10053,7 @@
           <p:cNvPr id="48" name="">
             <a:extLst xmlns:a="http://schemas.openxmlformats.org/drawingml/2006/main">
               <a:ext uri="{FF2B5EF4-FFF2-40B4-BE49-F238E27FC236}">
-                <a16:creationId xmlns:a16="http://schemas.microsoft.com/office/drawing/2014/main" id="{33CDFECD-C57E-492D-85CC-619894F137A4}"/>
+                <a16:creationId xmlns:a16="http://schemas.microsoft.com/office/drawing/2014/main" id="{D6949FE7-C8E6-4CDA-83D2-CBD322B31B98}"/>
               </a:ext>
             </a:extLst>
           </p:cNvPr>
@@ -10074,7 +10084,7 @@
           <p:cNvPr id="49" name="">
             <a:extLst xmlns:a="http://schemas.openxmlformats.org/drawingml/2006/main">
               <a:ext uri="{FF2B5EF4-FFF2-40B4-BE49-F238E27FC236}">
-                <a16:creationId xmlns:a16="http://schemas.microsoft.com/office/drawing/2014/main" id="{8189704A-D887-4520-B0C6-2DB6C49A79BE}"/>
+                <a16:creationId xmlns:a16="http://schemas.microsoft.com/office/drawing/2014/main" id="{D0377D56-59E1-4CDA-8362-68B00FDAC8D1}"/>
               </a:ext>
             </a:extLst>
           </p:cNvPr>
@@ -10109,7 +10119,7 @@
           <p:cNvPr id="50" name="">
             <a:extLst xmlns:a="http://schemas.openxmlformats.org/drawingml/2006/main">
               <a:ext uri="{FF2B5EF4-FFF2-40B4-BE49-F238E27FC236}">
-                <a16:creationId xmlns:a16="http://schemas.microsoft.com/office/drawing/2014/main" id="{25BDBF11-6FB5-45DB-9F52-927A4A7C08CB}"/>
+                <a16:creationId xmlns:a16="http://schemas.microsoft.com/office/drawing/2014/main" id="{A9B40BCA-FE39-4973-98DE-C40DA5817A9A}"/>
               </a:ext>
             </a:extLst>
           </p:cNvPr>
@@ -10140,7 +10150,7 @@
           <p:cNvPr id="51" name="">
             <a:extLst xmlns:a="http://schemas.openxmlformats.org/drawingml/2006/main">
               <a:ext uri="{FF2B5EF4-FFF2-40B4-BE49-F238E27FC236}">
-                <a16:creationId xmlns:a16="http://schemas.microsoft.com/office/drawing/2014/main" id="{8978973C-65C9-4822-97CE-12347F51EB59}"/>
+                <a16:creationId xmlns:a16="http://schemas.microsoft.com/office/drawing/2014/main" id="{34BE27F4-8995-4353-A012-90AD3A01A922}"/>
               </a:ext>
             </a:extLst>
           </p:cNvPr>
@@ -10175,7 +10185,7 @@
           <p:cNvPr id="52" name="">
             <a:extLst xmlns:a="http://schemas.openxmlformats.org/drawingml/2006/main">
               <a:ext uri="{FF2B5EF4-FFF2-40B4-BE49-F238E27FC236}">
-                <a16:creationId xmlns:a16="http://schemas.microsoft.com/office/drawing/2014/main" id="{6A7E730D-7A7A-4263-AFFC-297892035313}"/>
+                <a16:creationId xmlns:a16="http://schemas.microsoft.com/office/drawing/2014/main" id="{ADAD9469-E883-4691-B288-09E922855444}"/>
               </a:ext>
             </a:extLst>
           </p:cNvPr>
@@ -10206,7 +10216,7 @@
           <p:cNvPr id="53" name="">
             <a:extLst xmlns:a="http://schemas.openxmlformats.org/drawingml/2006/main">
               <a:ext uri="{FF2B5EF4-FFF2-40B4-BE49-F238E27FC236}">
-                <a16:creationId xmlns:a16="http://schemas.microsoft.com/office/drawing/2014/main" id="{7AB8278B-731F-4247-872A-7D08097E634D}"/>
+                <a16:creationId xmlns:a16="http://schemas.microsoft.com/office/drawing/2014/main" id="{9F006751-2BAF-42B2-9385-92A93013DE4D}"/>
               </a:ext>
             </a:extLst>
           </p:cNvPr>
@@ -10262,7 +10272,7 @@
           <p:cNvPr id="54" name="">
             <a:extLst xmlns:a="http://schemas.openxmlformats.org/drawingml/2006/main">
               <a:ext uri="{FF2B5EF4-FFF2-40B4-BE49-F238E27FC236}">
-                <a16:creationId xmlns:a16="http://schemas.microsoft.com/office/drawing/2014/main" id="{CBA6917C-23D9-460C-8DD2-12393265562E}"/>
+                <a16:creationId xmlns:a16="http://schemas.microsoft.com/office/drawing/2014/main" id="{E8779FBD-FE1C-4D3F-9C51-82CD1DF763B3}"/>
               </a:ext>
             </a:extLst>
           </p:cNvPr>
@@ -10318,7 +10328,7 @@
           <p:cNvPr id="55" name="">
             <a:extLst xmlns:a="http://schemas.openxmlformats.org/drawingml/2006/main">
               <a:ext uri="{FF2B5EF4-FFF2-40B4-BE49-F238E27FC236}">
-                <a16:creationId xmlns:a16="http://schemas.microsoft.com/office/drawing/2014/main" id="{6E814EAB-3F92-4E73-98F5-45A6B2C1C2D0}"/>
+                <a16:creationId xmlns:a16="http://schemas.microsoft.com/office/drawing/2014/main" id="{422467F7-9EF6-43F2-9429-7914437B7E91}"/>
               </a:ext>
             </a:extLst>
           </p:cNvPr>
@@ -10353,7 +10363,7 @@
           <p:cNvPr id="56" name="">
             <a:extLst xmlns:a="http://schemas.openxmlformats.org/drawingml/2006/main">
               <a:ext uri="{FF2B5EF4-FFF2-40B4-BE49-F238E27FC236}">
-                <a16:creationId xmlns:a16="http://schemas.microsoft.com/office/drawing/2014/main" id="{5CA56A07-B641-46E9-A9B0-F79CE1627E52}"/>
+                <a16:creationId xmlns:a16="http://schemas.microsoft.com/office/drawing/2014/main" id="{41697985-B46C-4A78-BCEA-9F81B4DA923B}"/>
               </a:ext>
             </a:extLst>
           </p:cNvPr>
@@ -10409,7 +10419,7 @@
           <p:cNvPr id="57" name="">
             <a:extLst xmlns:a="http://schemas.openxmlformats.org/drawingml/2006/main">
               <a:ext uri="{FF2B5EF4-FFF2-40B4-BE49-F238E27FC236}">
-                <a16:creationId xmlns:a16="http://schemas.microsoft.com/office/drawing/2014/main" id="{122CF255-559B-4FCD-8034-AC069310E124}"/>
+                <a16:creationId xmlns:a16="http://schemas.microsoft.com/office/drawing/2014/main" id="{4ACC57FC-91AD-47A3-8242-998C5EBEFBA9}"/>
               </a:ext>
             </a:extLst>
           </p:cNvPr>
@@ -10440,7 +10450,7 @@
           <p:cNvPr id="58" name="">
             <a:extLst xmlns:a="http://schemas.openxmlformats.org/drawingml/2006/main">
               <a:ext uri="{FF2B5EF4-FFF2-40B4-BE49-F238E27FC236}">
-                <a16:creationId xmlns:a16="http://schemas.microsoft.com/office/drawing/2014/main" id="{F766052E-DE52-4FDC-A58C-D7C896657583}"/>
+                <a16:creationId xmlns:a16="http://schemas.microsoft.com/office/drawing/2014/main" id="{040B7A8D-AF1F-400F-886E-C7EFB4C805AD}"/>
               </a:ext>
             </a:extLst>
           </p:cNvPr>
@@ -10496,7 +10506,7 @@
           <p:cNvPr id="59" name="">
             <a:extLst xmlns:a="http://schemas.openxmlformats.org/drawingml/2006/main">
               <a:ext uri="{FF2B5EF4-FFF2-40B4-BE49-F238E27FC236}">
-                <a16:creationId xmlns:a16="http://schemas.microsoft.com/office/drawing/2014/main" id="{BA757DC3-CD6A-4E27-B4E9-FB8406660E0E}"/>
+                <a16:creationId xmlns:a16="http://schemas.microsoft.com/office/drawing/2014/main" id="{6E2047D0-44FB-4D30-AF39-4733690D5BE6}"/>
               </a:ext>
             </a:extLst>
           </p:cNvPr>
@@ -10552,7 +10562,7 @@
           <p:cNvPr id="60" name="">
             <a:extLst xmlns:a="http://schemas.openxmlformats.org/drawingml/2006/main">
               <a:ext uri="{FF2B5EF4-FFF2-40B4-BE49-F238E27FC236}">
-                <a16:creationId xmlns:a16="http://schemas.microsoft.com/office/drawing/2014/main" id="{CC85BD49-BBDF-48FA-94CD-38BD228DDF1D}"/>
+                <a16:creationId xmlns:a16="http://schemas.microsoft.com/office/drawing/2014/main" id="{69BF6423-B23F-4A69-BD5E-71B57BA86D5C}"/>
               </a:ext>
             </a:extLst>
           </p:cNvPr>
@@ -10608,7 +10618,7 @@
           <p:cNvPr id="61" name="">
             <a:extLst xmlns:a="http://schemas.openxmlformats.org/drawingml/2006/main">
               <a:ext uri="{FF2B5EF4-FFF2-40B4-BE49-F238E27FC236}">
-                <a16:creationId xmlns:a16="http://schemas.microsoft.com/office/drawing/2014/main" id="{B4FC9F89-B9AF-42F9-885C-F445CB7FE312}"/>
+                <a16:creationId xmlns:a16="http://schemas.microsoft.com/office/drawing/2014/main" id="{AEEB39D1-844B-454E-A0A1-F11F00B3E608}"/>
               </a:ext>
             </a:extLst>
           </p:cNvPr>
@@ -10662,7 +10672,7 @@
     </p:spTree>
     <p:extLst>
       <p:ext uri="{BB962C8B-B14F-4D97-AF65-F5344CB8AC3E}">
-        <p14:creationId xmlns:p14="http://schemas.microsoft.com/office/powerpoint/2010/main" val="1730690253"/>
+        <p14:creationId xmlns:p14="http://schemas.microsoft.com/office/powerpoint/2010/main" val="1147820621"/>
       </p:ext>
     </p:extLst>
   </p:cSld>
@@ -10693,7 +10703,7 @@
           <p:cNvPr id="1" name="">
             <a:extLst xmlns:a="http://schemas.openxmlformats.org/drawingml/2006/main">
               <a:ext uri="{FF2B5EF4-FFF2-40B4-BE49-F238E27FC236}">
-                <a16:creationId xmlns:a16="http://schemas.microsoft.com/office/drawing/2014/main" id="{1D4A8F3F-C18C-4319-B27F-5FB75E6D56B3}"/>
+                <a16:creationId xmlns:a16="http://schemas.microsoft.com/office/drawing/2014/main" id="{620B079D-56C4-4F88-8084-432A001EAC89}"/>
               </a:ext>
             </a:extLst>
           </p:cNvPr>
@@ -10724,7 +10734,7 @@
           <p:cNvPr id="2" name="">
             <a:extLst xmlns:a="http://schemas.openxmlformats.org/drawingml/2006/main">
               <a:ext uri="{FF2B5EF4-FFF2-40B4-BE49-F238E27FC236}">
-                <a16:creationId xmlns:a16="http://schemas.microsoft.com/office/drawing/2014/main" id="{E45115A3-9C92-43F2-A844-B1848890AA43}"/>
+                <a16:creationId xmlns:a16="http://schemas.microsoft.com/office/drawing/2014/main" id="{EA7B7EB8-70AE-422D-9D91-C5C2A0980402}"/>
               </a:ext>
             </a:extLst>
           </p:cNvPr>
@@ -10780,7 +10790,7 @@
           <p:cNvPr id="3" name="">
             <a:extLst xmlns:a="http://schemas.openxmlformats.org/drawingml/2006/main">
               <a:ext uri="{FF2B5EF4-FFF2-40B4-BE49-F238E27FC236}">
-                <a16:creationId xmlns:a16="http://schemas.microsoft.com/office/drawing/2014/main" id="{967FA912-0454-42A5-A3D6-27FE9C009DC0}"/>
+                <a16:creationId xmlns:a16="http://schemas.microsoft.com/office/drawing/2014/main" id="{FFDF4EDE-03D2-48FA-B666-2C1FC1C05700}"/>
               </a:ext>
             </a:extLst>
           </p:cNvPr>
@@ -10836,7 +10846,7 @@
           <p:cNvPr id="4" name="">
             <a:extLst xmlns:a="http://schemas.openxmlformats.org/drawingml/2006/main">
               <a:ext uri="{FF2B5EF4-FFF2-40B4-BE49-F238E27FC236}">
-                <a16:creationId xmlns:a16="http://schemas.microsoft.com/office/drawing/2014/main" id="{991990C6-3628-48D4-A36D-C9011B722CEA}"/>
+                <a16:creationId xmlns:a16="http://schemas.microsoft.com/office/drawing/2014/main" id="{06F05B30-49C8-4C22-BDD7-2DA730B1B22F}"/>
               </a:ext>
             </a:extLst>
           </p:cNvPr>
@@ -10892,7 +10902,7 @@
           <p:cNvPr id="5" name="">
             <a:extLst xmlns:a="http://schemas.openxmlformats.org/drawingml/2006/main">
               <a:ext uri="{FF2B5EF4-FFF2-40B4-BE49-F238E27FC236}">
-                <a16:creationId xmlns:a16="http://schemas.microsoft.com/office/drawing/2014/main" id="{483CDE82-0F26-4096-96A1-23BB93236D96}"/>
+                <a16:creationId xmlns:a16="http://schemas.microsoft.com/office/drawing/2014/main" id="{7CA9036A-76CB-4D59-912D-5C074E0C107E}"/>
               </a:ext>
             </a:extLst>
           </p:cNvPr>
@@ -10948,7 +10958,7 @@
           <p:cNvPr id="6" name="">
             <a:extLst xmlns:a="http://schemas.openxmlformats.org/drawingml/2006/main">
               <a:ext uri="{FF2B5EF4-FFF2-40B4-BE49-F238E27FC236}">
-                <a16:creationId xmlns:a16="http://schemas.microsoft.com/office/drawing/2014/main" id="{74998FA4-020D-4BA5-AC96-8864DFF904AB}"/>
+                <a16:creationId xmlns:a16="http://schemas.microsoft.com/office/drawing/2014/main" id="{10A6090E-B31E-4391-AE5E-D66AEA7A2372}"/>
               </a:ext>
             </a:extLst>
           </p:cNvPr>
@@ -10983,7 +10993,7 @@
           <p:cNvPr id="7" name="">
             <a:extLst xmlns:a="http://schemas.openxmlformats.org/drawingml/2006/main">
               <a:ext uri="{FF2B5EF4-FFF2-40B4-BE49-F238E27FC236}">
-                <a16:creationId xmlns:a16="http://schemas.microsoft.com/office/drawing/2014/main" id="{B02E0C42-675E-4415-B502-5DCC884447D8}"/>
+                <a16:creationId xmlns:a16="http://schemas.microsoft.com/office/drawing/2014/main" id="{8B654614-A288-4AD9-801E-491232C89C34}"/>
               </a:ext>
             </a:extLst>
           </p:cNvPr>
@@ -11039,7 +11049,7 @@
           <p:cNvPr id="8" name="">
             <a:extLst xmlns:a="http://schemas.openxmlformats.org/drawingml/2006/main">
               <a:ext uri="{FF2B5EF4-FFF2-40B4-BE49-F238E27FC236}">
-                <a16:creationId xmlns:a16="http://schemas.microsoft.com/office/drawing/2014/main" id="{01195B9E-4A68-4E8D-B88D-8773E3C3794D}"/>
+                <a16:creationId xmlns:a16="http://schemas.microsoft.com/office/drawing/2014/main" id="{5ABB55EA-FA33-4D94-8694-5681CD606494}"/>
               </a:ext>
             </a:extLst>
           </p:cNvPr>
@@ -11095,7 +11105,7 @@
           <p:cNvPr id="9" name="">
             <a:extLst xmlns:a="http://schemas.openxmlformats.org/drawingml/2006/main">
               <a:ext uri="{FF2B5EF4-FFF2-40B4-BE49-F238E27FC236}">
-                <a16:creationId xmlns:a16="http://schemas.microsoft.com/office/drawing/2014/main" id="{C360617A-4204-4218-A39E-E3F7AB238A69}"/>
+                <a16:creationId xmlns:a16="http://schemas.microsoft.com/office/drawing/2014/main" id="{D8B3B87D-42F0-41F1-8343-F746FBEEDDF5}"/>
               </a:ext>
             </a:extLst>
           </p:cNvPr>
@@ -11151,7 +11161,7 @@
           <p:cNvPr id="10" name="">
             <a:extLst xmlns:a="http://schemas.openxmlformats.org/drawingml/2006/main">
               <a:ext uri="{FF2B5EF4-FFF2-40B4-BE49-F238E27FC236}">
-                <a16:creationId xmlns:a16="http://schemas.microsoft.com/office/drawing/2014/main" id="{D0DF98B8-CE1B-41D4-9290-BFF939718EF7}"/>
+                <a16:creationId xmlns:a16="http://schemas.microsoft.com/office/drawing/2014/main" id="{C61A397D-D3B5-4A1F-A67A-5ED741A923FE}"/>
               </a:ext>
             </a:extLst>
           </p:cNvPr>
@@ -11186,7 +11196,7 @@
           <p:cNvPr id="11" name="">
             <a:extLst xmlns:a="http://schemas.openxmlformats.org/drawingml/2006/main">
               <a:ext uri="{FF2B5EF4-FFF2-40B4-BE49-F238E27FC236}">
-                <a16:creationId xmlns:a16="http://schemas.microsoft.com/office/drawing/2014/main" id="{25354979-D24C-4AF0-AF1C-55611E590191}"/>
+                <a16:creationId xmlns:a16="http://schemas.microsoft.com/office/drawing/2014/main" id="{D080FE5E-5899-4329-BB83-70B7749D946A}"/>
               </a:ext>
             </a:extLst>
           </p:cNvPr>
@@ -11242,7 +11252,7 @@
           <p:cNvPr id="12" name="">
             <a:extLst xmlns:a="http://schemas.openxmlformats.org/drawingml/2006/main">
               <a:ext uri="{FF2B5EF4-FFF2-40B4-BE49-F238E27FC236}">
-                <a16:creationId xmlns:a16="http://schemas.microsoft.com/office/drawing/2014/main" id="{038F3E16-E931-4E8C-BC93-BDC4E77640F4}"/>
+                <a16:creationId xmlns:a16="http://schemas.microsoft.com/office/drawing/2014/main" id="{7C78E271-F41E-4D97-81BE-B2D3759AB10E}"/>
               </a:ext>
             </a:extLst>
           </p:cNvPr>
@@ -11298,7 +11308,7 @@
           <p:cNvPr id="13" name="">
             <a:extLst xmlns:a="http://schemas.openxmlformats.org/drawingml/2006/main">
               <a:ext uri="{FF2B5EF4-FFF2-40B4-BE49-F238E27FC236}">
-                <a16:creationId xmlns:a16="http://schemas.microsoft.com/office/drawing/2014/main" id="{F48AF587-6464-477A-8216-90749872A28C}"/>
+                <a16:creationId xmlns:a16="http://schemas.microsoft.com/office/drawing/2014/main" id="{01038EED-AB4E-4E0D-8278-C7001A33350F}"/>
               </a:ext>
             </a:extLst>
           </p:cNvPr>
@@ -11354,7 +11364,7 @@
           <p:cNvPr id="14" name="">
             <a:extLst xmlns:a="http://schemas.openxmlformats.org/drawingml/2006/main">
               <a:ext uri="{FF2B5EF4-FFF2-40B4-BE49-F238E27FC236}">
-                <a16:creationId xmlns:a16="http://schemas.microsoft.com/office/drawing/2014/main" id="{7D1184C0-23D6-426F-9DC6-F6EA488435FB}"/>
+                <a16:creationId xmlns:a16="http://schemas.microsoft.com/office/drawing/2014/main" id="{B91A7041-AAA8-400A-BC41-C960D96A74C9}"/>
               </a:ext>
             </a:extLst>
           </p:cNvPr>
@@ -11389,7 +11399,7 @@
           <p:cNvPr id="15" name="">
             <a:extLst xmlns:a="http://schemas.openxmlformats.org/drawingml/2006/main">
               <a:ext uri="{FF2B5EF4-FFF2-40B4-BE49-F238E27FC236}">
-                <a16:creationId xmlns:a16="http://schemas.microsoft.com/office/drawing/2014/main" id="{7E34A602-A8F7-4498-8B19-C5E0C850BEE6}"/>
+                <a16:creationId xmlns:a16="http://schemas.microsoft.com/office/drawing/2014/main" id="{0E3C3F9F-A33E-4C03-B084-23D2E116D744}"/>
               </a:ext>
             </a:extLst>
           </p:cNvPr>
@@ -11445,7 +11455,7 @@
           <p:cNvPr id="16" name="">
             <a:extLst xmlns:a="http://schemas.openxmlformats.org/drawingml/2006/main">
               <a:ext uri="{FF2B5EF4-FFF2-40B4-BE49-F238E27FC236}">
-                <a16:creationId xmlns:a16="http://schemas.microsoft.com/office/drawing/2014/main" id="{F9CA05CC-D3BF-45A4-98A7-876F1DFBE468}"/>
+                <a16:creationId xmlns:a16="http://schemas.microsoft.com/office/drawing/2014/main" id="{730349C2-8001-44F8-BDFD-9F583E6E3C7B}"/>
               </a:ext>
             </a:extLst>
           </p:cNvPr>
@@ -11501,7 +11511,7 @@
           <p:cNvPr id="17" name="">
             <a:extLst xmlns:a="http://schemas.openxmlformats.org/drawingml/2006/main">
               <a:ext uri="{FF2B5EF4-FFF2-40B4-BE49-F238E27FC236}">
-                <a16:creationId xmlns:a16="http://schemas.microsoft.com/office/drawing/2014/main" id="{12626931-DE3B-49E8-8DBF-152DD96E72DD}"/>
+                <a16:creationId xmlns:a16="http://schemas.microsoft.com/office/drawing/2014/main" id="{94E99987-D57D-4021-ABCC-A0FC3B4011AF}"/>
               </a:ext>
             </a:extLst>
           </p:cNvPr>
@@ -11557,7 +11567,7 @@
           <p:cNvPr id="18" name="">
             <a:extLst xmlns:a="http://schemas.openxmlformats.org/drawingml/2006/main">
               <a:ext uri="{FF2B5EF4-FFF2-40B4-BE49-F238E27FC236}">
-                <a16:creationId xmlns:a16="http://schemas.microsoft.com/office/drawing/2014/main" id="{0BA1BB04-93FE-4DB1-BE6A-FEC1930320ED}"/>
+                <a16:creationId xmlns:a16="http://schemas.microsoft.com/office/drawing/2014/main" id="{987B4542-12F0-404A-BF68-19A0B87D80BD}"/>
               </a:ext>
             </a:extLst>
           </p:cNvPr>
@@ -11592,7 +11602,7 @@
           <p:cNvPr id="19" name="">
             <a:extLst xmlns:a="http://schemas.openxmlformats.org/drawingml/2006/main">
               <a:ext uri="{FF2B5EF4-FFF2-40B4-BE49-F238E27FC236}">
-                <a16:creationId xmlns:a16="http://schemas.microsoft.com/office/drawing/2014/main" id="{9FCDDFDF-32C0-4A37-9DF8-22730BE90132}"/>
+                <a16:creationId xmlns:a16="http://schemas.microsoft.com/office/drawing/2014/main" id="{974A6F9D-A0AE-4631-8EF9-8B43A7581B95}"/>
               </a:ext>
             </a:extLst>
           </p:cNvPr>
@@ -11648,7 +11658,7 @@
           <p:cNvPr id="20" name="">
             <a:extLst xmlns:a="http://schemas.openxmlformats.org/drawingml/2006/main">
               <a:ext uri="{FF2B5EF4-FFF2-40B4-BE49-F238E27FC236}">
-                <a16:creationId xmlns:a16="http://schemas.microsoft.com/office/drawing/2014/main" id="{3B7B4873-B1CA-4455-AD1A-052BB6597FA6}"/>
+                <a16:creationId xmlns:a16="http://schemas.microsoft.com/office/drawing/2014/main" id="{C7A267FB-F0C1-4E47-BA30-DB0E0CA32E14}"/>
               </a:ext>
             </a:extLst>
           </p:cNvPr>
@@ -11704,7 +11714,7 @@
           <p:cNvPr id="21" name="">
             <a:extLst xmlns:a="http://schemas.openxmlformats.org/drawingml/2006/main">
               <a:ext uri="{FF2B5EF4-FFF2-40B4-BE49-F238E27FC236}">
-                <a16:creationId xmlns:a16="http://schemas.microsoft.com/office/drawing/2014/main" id="{F855E559-946B-4FEB-AD3F-FFEFBDC562D1}"/>
+                <a16:creationId xmlns:a16="http://schemas.microsoft.com/office/drawing/2014/main" id="{B6DFCEC8-5A72-4CD4-8381-4E60529825D4}"/>
               </a:ext>
             </a:extLst>
           </p:cNvPr>
@@ -11760,7 +11770,7 @@
           <p:cNvPr id="22" name="">
             <a:extLst xmlns:a="http://schemas.openxmlformats.org/drawingml/2006/main">
               <a:ext uri="{FF2B5EF4-FFF2-40B4-BE49-F238E27FC236}">
-                <a16:creationId xmlns:a16="http://schemas.microsoft.com/office/drawing/2014/main" id="{E64EC0E5-2061-48B5-B7E0-B45AC54DB44C}"/>
+                <a16:creationId xmlns:a16="http://schemas.microsoft.com/office/drawing/2014/main" id="{46AB698D-8904-408D-A1DA-F7F87562902C}"/>
               </a:ext>
             </a:extLst>
           </p:cNvPr>
@@ -11795,7 +11805,7 @@
           <p:cNvPr id="23" name="">
             <a:extLst xmlns:a="http://schemas.openxmlformats.org/drawingml/2006/main">
               <a:ext uri="{FF2B5EF4-FFF2-40B4-BE49-F238E27FC236}">
-                <a16:creationId xmlns:a16="http://schemas.microsoft.com/office/drawing/2014/main" id="{9748689D-D48B-4C5C-8CEC-CAB6E1A9294B}"/>
+                <a16:creationId xmlns:a16="http://schemas.microsoft.com/office/drawing/2014/main" id="{164436EB-D711-4D96-942A-EBF91E276C54}"/>
               </a:ext>
             </a:extLst>
           </p:cNvPr>
@@ -11851,7 +11861,7 @@
           <p:cNvPr id="24" name="">
             <a:extLst xmlns:a="http://schemas.openxmlformats.org/drawingml/2006/main">
               <a:ext uri="{FF2B5EF4-FFF2-40B4-BE49-F238E27FC236}">
-                <a16:creationId xmlns:a16="http://schemas.microsoft.com/office/drawing/2014/main" id="{E417ECE7-0FC6-42DC-888E-690994CBF00F}"/>
+                <a16:creationId xmlns:a16="http://schemas.microsoft.com/office/drawing/2014/main" id="{F5935810-981F-4473-9F01-184346A65735}"/>
               </a:ext>
             </a:extLst>
           </p:cNvPr>
@@ -11907,7 +11917,7 @@
           <p:cNvPr id="25" name="">
             <a:extLst xmlns:a="http://schemas.openxmlformats.org/drawingml/2006/main">
               <a:ext uri="{FF2B5EF4-FFF2-40B4-BE49-F238E27FC236}">
-                <a16:creationId xmlns:a16="http://schemas.microsoft.com/office/drawing/2014/main" id="{4C45ADDE-30DD-4960-9552-B1E2DD02118B}"/>
+                <a16:creationId xmlns:a16="http://schemas.microsoft.com/office/drawing/2014/main" id="{76424F35-4A3E-451B-9CFE-A794D25AD1B3}"/>
               </a:ext>
             </a:extLst>
           </p:cNvPr>
@@ -11963,7 +11973,7 @@
           <p:cNvPr id="26" name="">
             <a:extLst xmlns:a="http://schemas.openxmlformats.org/drawingml/2006/main">
               <a:ext uri="{FF2B5EF4-FFF2-40B4-BE49-F238E27FC236}">
-                <a16:creationId xmlns:a16="http://schemas.microsoft.com/office/drawing/2014/main" id="{0D6F1533-0EDB-482A-9422-048C997B1E18}"/>
+                <a16:creationId xmlns:a16="http://schemas.microsoft.com/office/drawing/2014/main" id="{D1284731-6B48-485F-8AE7-7110FB8C0988}"/>
               </a:ext>
             </a:extLst>
           </p:cNvPr>
@@ -11994,7 +12004,7 @@
           <p:cNvPr id="27" name="">
             <a:extLst xmlns:a="http://schemas.openxmlformats.org/drawingml/2006/main">
               <a:ext uri="{FF2B5EF4-FFF2-40B4-BE49-F238E27FC236}">
-                <a16:creationId xmlns:a16="http://schemas.microsoft.com/office/drawing/2014/main" id="{BFC2325B-FD00-4820-A83A-AEEA50BDBCE8}"/>
+                <a16:creationId xmlns:a16="http://schemas.microsoft.com/office/drawing/2014/main" id="{02E39877-BB5B-413F-A99B-F7B3A10A819D}"/>
               </a:ext>
             </a:extLst>
           </p:cNvPr>
@@ -12050,7 +12060,7 @@
           <p:cNvPr id="28" name="">
             <a:extLst xmlns:a="http://schemas.openxmlformats.org/drawingml/2006/main">
               <a:ext uri="{FF2B5EF4-FFF2-40B4-BE49-F238E27FC236}">
-                <a16:creationId xmlns:a16="http://schemas.microsoft.com/office/drawing/2014/main" id="{75916F3D-9CC2-42B9-B1BD-E46A24420600}"/>
+                <a16:creationId xmlns:a16="http://schemas.microsoft.com/office/drawing/2014/main" id="{342669DE-0F27-4B1B-A000-C63806A85302}"/>
               </a:ext>
             </a:extLst>
           </p:cNvPr>
@@ -12085,7 +12095,7 @@
           <p:cNvPr id="29" name="">
             <a:extLst xmlns:a="http://schemas.openxmlformats.org/drawingml/2006/main">
               <a:ext uri="{FF2B5EF4-FFF2-40B4-BE49-F238E27FC236}">
-                <a16:creationId xmlns:a16="http://schemas.microsoft.com/office/drawing/2014/main" id="{C4459785-3FD5-4889-ADE0-04970545A8EC}"/>
+                <a16:creationId xmlns:a16="http://schemas.microsoft.com/office/drawing/2014/main" id="{97CF3416-7B1F-436D-9EC5-5A9C6E74C9E8}"/>
               </a:ext>
             </a:extLst>
           </p:cNvPr>
@@ -12141,7 +12151,7 @@
           <p:cNvPr id="30" name="">
             <a:extLst xmlns:a="http://schemas.openxmlformats.org/drawingml/2006/main">
               <a:ext uri="{FF2B5EF4-FFF2-40B4-BE49-F238E27FC236}">
-                <a16:creationId xmlns:a16="http://schemas.microsoft.com/office/drawing/2014/main" id="{3C06F2F0-233D-4009-823D-8728A01D25EF}"/>
+                <a16:creationId xmlns:a16="http://schemas.microsoft.com/office/drawing/2014/main" id="{A9609241-0966-4A92-A6BF-7FB2DF871B20}"/>
               </a:ext>
             </a:extLst>
           </p:cNvPr>
@@ -12195,7 +12205,7 @@
     </p:spTree>
     <p:extLst>
       <p:ext uri="{BB962C8B-B14F-4D97-AF65-F5344CB8AC3E}">
-        <p14:creationId xmlns:p14="http://schemas.microsoft.com/office/powerpoint/2010/main" val="243643178"/>
+        <p14:creationId xmlns:p14="http://schemas.microsoft.com/office/powerpoint/2010/main" val="65175878"/>
       </p:ext>
     </p:extLst>
   </p:cSld>
@@ -12226,7 +12236,7 @@
           <p:cNvPr id="1" name="">
             <a:extLst xmlns:a="http://schemas.openxmlformats.org/drawingml/2006/main">
               <a:ext uri="{FF2B5EF4-FFF2-40B4-BE49-F238E27FC236}">
-                <a16:creationId xmlns:a16="http://schemas.microsoft.com/office/drawing/2014/main" id="{434A89C1-506D-49CC-ACB2-98C71943A69A}"/>
+                <a16:creationId xmlns:a16="http://schemas.microsoft.com/office/drawing/2014/main" id="{7F88962D-EAAC-4084-B1A9-2C5FB2EB28F8}"/>
               </a:ext>
             </a:extLst>
           </p:cNvPr>
@@ -12257,7 +12267,7 @@
           <p:cNvPr id="2" name="">
             <a:extLst xmlns:a="http://schemas.openxmlformats.org/drawingml/2006/main">
               <a:ext uri="{FF2B5EF4-FFF2-40B4-BE49-F238E27FC236}">
-                <a16:creationId xmlns:a16="http://schemas.microsoft.com/office/drawing/2014/main" id="{1BD32DD5-B321-42D3-B2BC-F5DC0188CDD4}"/>
+                <a16:creationId xmlns:a16="http://schemas.microsoft.com/office/drawing/2014/main" id="{0AB0FFEB-1990-4D03-8CB6-500CFE49BD01}"/>
               </a:ext>
             </a:extLst>
           </p:cNvPr>
@@ -12288,7 +12298,7 @@
           <p:cNvPr id="3" name="">
             <a:extLst xmlns:a="http://schemas.openxmlformats.org/drawingml/2006/main">
               <a:ext uri="{FF2B5EF4-FFF2-40B4-BE49-F238E27FC236}">
-                <a16:creationId xmlns:a16="http://schemas.microsoft.com/office/drawing/2014/main" id="{6ACAD715-FAC2-4F26-AE9C-8AE9CAEBBE47}"/>
+                <a16:creationId xmlns:a16="http://schemas.microsoft.com/office/drawing/2014/main" id="{A7336956-A346-4A5E-A7F7-5CEFD7B06743}"/>
               </a:ext>
             </a:extLst>
           </p:cNvPr>
@@ -12319,7 +12329,7 @@
           <p:cNvPr id="4" name="">
             <a:extLst xmlns:a="http://schemas.openxmlformats.org/drawingml/2006/main">
               <a:ext uri="{FF2B5EF4-FFF2-40B4-BE49-F238E27FC236}">
-                <a16:creationId xmlns:a16="http://schemas.microsoft.com/office/drawing/2014/main" id="{7E625BEC-EF88-44ED-91EC-03B2D280BA97}"/>
+                <a16:creationId xmlns:a16="http://schemas.microsoft.com/office/drawing/2014/main" id="{D7CDDEF6-F703-4CD0-B599-45CBBF72287E}"/>
               </a:ext>
             </a:extLst>
           </p:cNvPr>
@@ -12350,7 +12360,7 @@
           <p:cNvPr id="5" name="">
             <a:extLst xmlns:a="http://schemas.openxmlformats.org/drawingml/2006/main">
               <a:ext uri="{FF2B5EF4-FFF2-40B4-BE49-F238E27FC236}">
-                <a16:creationId xmlns:a16="http://schemas.microsoft.com/office/drawing/2014/main" id="{F28B27F6-4950-440E-8711-F252BE007DC1}"/>
+                <a16:creationId xmlns:a16="http://schemas.microsoft.com/office/drawing/2014/main" id="{BDF9AE5A-97F2-422E-8370-B73FD872047A}"/>
               </a:ext>
             </a:extLst>
           </p:cNvPr>
@@ -12381,7 +12391,7 @@
           <p:cNvPr id="6" name="">
             <a:extLst xmlns:a="http://schemas.openxmlformats.org/drawingml/2006/main">
               <a:ext uri="{FF2B5EF4-FFF2-40B4-BE49-F238E27FC236}">
-                <a16:creationId xmlns:a16="http://schemas.microsoft.com/office/drawing/2014/main" id="{2AD9B872-6A77-4FDB-8E59-FBAE1512641A}"/>
+                <a16:creationId xmlns:a16="http://schemas.microsoft.com/office/drawing/2014/main" id="{FC971599-CFCF-46F4-A079-4237044BEA79}"/>
               </a:ext>
             </a:extLst>
           </p:cNvPr>
@@ -12412,7 +12422,7 @@
           <p:cNvPr id="7" name="">
             <a:extLst xmlns:a="http://schemas.openxmlformats.org/drawingml/2006/main">
               <a:ext uri="{FF2B5EF4-FFF2-40B4-BE49-F238E27FC236}">
-                <a16:creationId xmlns:a16="http://schemas.microsoft.com/office/drawing/2014/main" id="{A5E6DDEA-F906-44D4-AA6C-2EB5D59A5005}"/>
+                <a16:creationId xmlns:a16="http://schemas.microsoft.com/office/drawing/2014/main" id="{CB0455A2-A242-49FB-AA50-41D622BAB447}"/>
               </a:ext>
             </a:extLst>
           </p:cNvPr>
@@ -12443,7 +12453,7 @@
           <p:cNvPr id="8" name="">
             <a:extLst xmlns:a="http://schemas.openxmlformats.org/drawingml/2006/main">
               <a:ext uri="{FF2B5EF4-FFF2-40B4-BE49-F238E27FC236}">
-                <a16:creationId xmlns:a16="http://schemas.microsoft.com/office/drawing/2014/main" id="{AD7126A1-8988-4F3E-BBDF-F368052EE586}"/>
+                <a16:creationId xmlns:a16="http://schemas.microsoft.com/office/drawing/2014/main" id="{64F70860-CA03-4DBB-89D5-C126CDC5F90F}"/>
               </a:ext>
             </a:extLst>
           </p:cNvPr>
@@ -12474,7 +12484,7 @@
           <p:cNvPr id="9" name="">
             <a:extLst xmlns:a="http://schemas.openxmlformats.org/drawingml/2006/main">
               <a:ext uri="{FF2B5EF4-FFF2-40B4-BE49-F238E27FC236}">
-                <a16:creationId xmlns:a16="http://schemas.microsoft.com/office/drawing/2014/main" id="{4B1B7754-6E72-4751-BE6C-5C292D04229F}"/>
+                <a16:creationId xmlns:a16="http://schemas.microsoft.com/office/drawing/2014/main" id="{EDBAAC39-2DD0-4A4C-9FDE-CCECBFAC2053}"/>
               </a:ext>
             </a:extLst>
           </p:cNvPr>
@@ -12505,7 +12515,7 @@
           <p:cNvPr id="10" name="">
             <a:extLst xmlns:a="http://schemas.openxmlformats.org/drawingml/2006/main">
               <a:ext uri="{FF2B5EF4-FFF2-40B4-BE49-F238E27FC236}">
-                <a16:creationId xmlns:a16="http://schemas.microsoft.com/office/drawing/2014/main" id="{B6E496EB-37E6-4658-ACB8-EEA34ECDF9A6}"/>
+                <a16:creationId xmlns:a16="http://schemas.microsoft.com/office/drawing/2014/main" id="{A0652297-39C1-4822-84B9-A89FE31C9144}"/>
               </a:ext>
             </a:extLst>
           </p:cNvPr>
@@ -12536,7 +12546,7 @@
           <p:cNvPr id="11" name="">
             <a:extLst xmlns:a="http://schemas.openxmlformats.org/drawingml/2006/main">
               <a:ext uri="{FF2B5EF4-FFF2-40B4-BE49-F238E27FC236}">
-                <a16:creationId xmlns:a16="http://schemas.microsoft.com/office/drawing/2014/main" id="{B9C4EA67-6A5E-45AD-8CB1-B50510EA77D7}"/>
+                <a16:creationId xmlns:a16="http://schemas.microsoft.com/office/drawing/2014/main" id="{0419ACC9-5548-4230-8AB7-74025EB77210}"/>
               </a:ext>
             </a:extLst>
           </p:cNvPr>
@@ -12567,7 +12577,7 @@
           <p:cNvPr id="12" name="">
             <a:extLst xmlns:a="http://schemas.openxmlformats.org/drawingml/2006/main">
               <a:ext uri="{FF2B5EF4-FFF2-40B4-BE49-F238E27FC236}">
-                <a16:creationId xmlns:a16="http://schemas.microsoft.com/office/drawing/2014/main" id="{83053151-0EA4-4533-8E65-6E9D5CFDC667}"/>
+                <a16:creationId xmlns:a16="http://schemas.microsoft.com/office/drawing/2014/main" id="{F15278FD-242A-4D22-9F01-A860F113271E}"/>
               </a:ext>
             </a:extLst>
           </p:cNvPr>
@@ -12598,7 +12608,7 @@
           <p:cNvPr id="13" name="">
             <a:extLst xmlns:a="http://schemas.openxmlformats.org/drawingml/2006/main">
               <a:ext uri="{FF2B5EF4-FFF2-40B4-BE49-F238E27FC236}">
-                <a16:creationId xmlns:a16="http://schemas.microsoft.com/office/drawing/2014/main" id="{AAA3A8DE-4301-4A8C-A483-ACDAEC79A599}"/>
+                <a16:creationId xmlns:a16="http://schemas.microsoft.com/office/drawing/2014/main" id="{35333FF3-D9F7-4266-87C6-E2F9FF202EFB}"/>
               </a:ext>
             </a:extLst>
           </p:cNvPr>
@@ -12629,7 +12639,7 @@
           <p:cNvPr id="14" name="">
             <a:extLst xmlns:a="http://schemas.openxmlformats.org/drawingml/2006/main">
               <a:ext uri="{FF2B5EF4-FFF2-40B4-BE49-F238E27FC236}">
-                <a16:creationId xmlns:a16="http://schemas.microsoft.com/office/drawing/2014/main" id="{38B0FAE4-1DD1-4334-A63A-6F9C809FEC3D}"/>
+                <a16:creationId xmlns:a16="http://schemas.microsoft.com/office/drawing/2014/main" id="{CAA6E013-A970-4478-848A-3219DE5BADC6}"/>
               </a:ext>
             </a:extLst>
           </p:cNvPr>
@@ -12660,7 +12670,7 @@
           <p:cNvPr id="15" name="">
             <a:extLst xmlns:a="http://schemas.openxmlformats.org/drawingml/2006/main">
               <a:ext uri="{FF2B5EF4-FFF2-40B4-BE49-F238E27FC236}">
-                <a16:creationId xmlns:a16="http://schemas.microsoft.com/office/drawing/2014/main" id="{2C8A41E6-0046-45FC-A0C4-D7540D72CBB6}"/>
+                <a16:creationId xmlns:a16="http://schemas.microsoft.com/office/drawing/2014/main" id="{439761CC-41BB-403F-967F-6D4F03EEF691}"/>
               </a:ext>
             </a:extLst>
           </p:cNvPr>
@@ -12691,7 +12701,7 @@
           <p:cNvPr id="16" name="">
             <a:extLst xmlns:a="http://schemas.openxmlformats.org/drawingml/2006/main">
               <a:ext uri="{FF2B5EF4-FFF2-40B4-BE49-F238E27FC236}">
-                <a16:creationId xmlns:a16="http://schemas.microsoft.com/office/drawing/2014/main" id="{31C4028C-0730-47A4-A58A-6811647908A7}"/>
+                <a16:creationId xmlns:a16="http://schemas.microsoft.com/office/drawing/2014/main" id="{56CEBF4E-8141-44DC-B847-51C44C27E4CF}"/>
               </a:ext>
             </a:extLst>
           </p:cNvPr>
@@ -12722,7 +12732,7 @@
           <p:cNvPr id="17" name="">
             <a:extLst xmlns:a="http://schemas.openxmlformats.org/drawingml/2006/main">
               <a:ext uri="{FF2B5EF4-FFF2-40B4-BE49-F238E27FC236}">
-                <a16:creationId xmlns:a16="http://schemas.microsoft.com/office/drawing/2014/main" id="{C4077D87-B825-4B65-8181-F5EA0C01CC53}"/>
+                <a16:creationId xmlns:a16="http://schemas.microsoft.com/office/drawing/2014/main" id="{1E027626-F602-4DA2-B744-A1967E85C8F2}"/>
               </a:ext>
             </a:extLst>
           </p:cNvPr>
@@ -12753,7 +12763,7 @@
           <p:cNvPr id="18" name="">
             <a:extLst xmlns:a="http://schemas.openxmlformats.org/drawingml/2006/main">
               <a:ext uri="{FF2B5EF4-FFF2-40B4-BE49-F238E27FC236}">
-                <a16:creationId xmlns:a16="http://schemas.microsoft.com/office/drawing/2014/main" id="{22164F9C-CBF3-4194-B5AC-0EB461A7C174}"/>
+                <a16:creationId xmlns:a16="http://schemas.microsoft.com/office/drawing/2014/main" id="{B5CCAA59-08C7-4379-92BD-259846F98E1B}"/>
               </a:ext>
             </a:extLst>
           </p:cNvPr>
@@ -12784,7 +12794,7 @@
           <p:cNvPr id="19" name="">
             <a:extLst xmlns:a="http://schemas.openxmlformats.org/drawingml/2006/main">
               <a:ext uri="{FF2B5EF4-FFF2-40B4-BE49-F238E27FC236}">
-                <a16:creationId xmlns:a16="http://schemas.microsoft.com/office/drawing/2014/main" id="{6B327F0A-C3C8-4F15-8999-CB28A959D4C0}"/>
+                <a16:creationId xmlns:a16="http://schemas.microsoft.com/office/drawing/2014/main" id="{E862409E-5E7C-4AE6-BA8D-0C412329A72E}"/>
               </a:ext>
             </a:extLst>
           </p:cNvPr>
@@ -12815,7 +12825,7 @@
           <p:cNvPr id="20" name="">
             <a:extLst xmlns:a="http://schemas.openxmlformats.org/drawingml/2006/main">
               <a:ext uri="{FF2B5EF4-FFF2-40B4-BE49-F238E27FC236}">
-                <a16:creationId xmlns:a16="http://schemas.microsoft.com/office/drawing/2014/main" id="{5058AF92-B8E3-4E40-85B0-D8FF9E553E41}"/>
+                <a16:creationId xmlns:a16="http://schemas.microsoft.com/office/drawing/2014/main" id="{5717A525-9A0A-4D56-9C6A-CFF81DB21A5E}"/>
               </a:ext>
             </a:extLst>
           </p:cNvPr>
@@ -12846,7 +12856,7 @@
           <p:cNvPr id="21" name="">
             <a:extLst xmlns:a="http://schemas.openxmlformats.org/drawingml/2006/main">
               <a:ext uri="{FF2B5EF4-FFF2-40B4-BE49-F238E27FC236}">
-                <a16:creationId xmlns:a16="http://schemas.microsoft.com/office/drawing/2014/main" id="{94FBB4AC-6218-4A0E-997B-EAC69DB88B86}"/>
+                <a16:creationId xmlns:a16="http://schemas.microsoft.com/office/drawing/2014/main" id="{9E2D0AC3-DAF1-4C88-9BD0-B135F4FF087C}"/>
               </a:ext>
             </a:extLst>
           </p:cNvPr>
@@ -12877,7 +12887,7 @@
           <p:cNvPr id="22" name="">
             <a:extLst xmlns:a="http://schemas.openxmlformats.org/drawingml/2006/main">
               <a:ext uri="{FF2B5EF4-FFF2-40B4-BE49-F238E27FC236}">
-                <a16:creationId xmlns:a16="http://schemas.microsoft.com/office/drawing/2014/main" id="{5A7347CA-85E9-4E9C-A92A-3F4738679BF5}"/>
+                <a16:creationId xmlns:a16="http://schemas.microsoft.com/office/drawing/2014/main" id="{85BB83B0-FF10-4922-B4B5-4AC483F958DE}"/>
               </a:ext>
             </a:extLst>
           </p:cNvPr>
@@ -12908,7 +12918,7 @@
           <p:cNvPr id="23" name="">
             <a:extLst xmlns:a="http://schemas.openxmlformats.org/drawingml/2006/main">
               <a:ext uri="{FF2B5EF4-FFF2-40B4-BE49-F238E27FC236}">
-                <a16:creationId xmlns:a16="http://schemas.microsoft.com/office/drawing/2014/main" id="{7F3DCCB7-43A3-4ACA-9230-73AD64FC191B}"/>
+                <a16:creationId xmlns:a16="http://schemas.microsoft.com/office/drawing/2014/main" id="{11D68B40-6A08-44B4-A1D5-7997F331358E}"/>
               </a:ext>
             </a:extLst>
           </p:cNvPr>
@@ -12939,7 +12949,7 @@
           <p:cNvPr id="24" name="">
             <a:extLst xmlns:a="http://schemas.openxmlformats.org/drawingml/2006/main">
               <a:ext uri="{FF2B5EF4-FFF2-40B4-BE49-F238E27FC236}">
-                <a16:creationId xmlns:a16="http://schemas.microsoft.com/office/drawing/2014/main" id="{46B40FE5-69F1-4E0D-9A9E-328DE9743160}"/>
+                <a16:creationId xmlns:a16="http://schemas.microsoft.com/office/drawing/2014/main" id="{DA5A5ADF-BDA6-4D40-95D7-3EE3E2ED8332}"/>
               </a:ext>
             </a:extLst>
           </p:cNvPr>
@@ -12970,7 +12980,7 @@
           <p:cNvPr id="25" name="">
             <a:extLst xmlns:a="http://schemas.openxmlformats.org/drawingml/2006/main">
               <a:ext uri="{FF2B5EF4-FFF2-40B4-BE49-F238E27FC236}">
-                <a16:creationId xmlns:a16="http://schemas.microsoft.com/office/drawing/2014/main" id="{45DB9B93-B909-47DF-BA10-A2692AB9F877}"/>
+                <a16:creationId xmlns:a16="http://schemas.microsoft.com/office/drawing/2014/main" id="{1577F49F-74B0-4B45-A4B3-D79B62BFBF3F}"/>
               </a:ext>
             </a:extLst>
           </p:cNvPr>
@@ -13001,7 +13011,7 @@
           <p:cNvPr id="26" name="">
             <a:extLst xmlns:a="http://schemas.openxmlformats.org/drawingml/2006/main">
               <a:ext uri="{FF2B5EF4-FFF2-40B4-BE49-F238E27FC236}">
-                <a16:creationId xmlns:a16="http://schemas.microsoft.com/office/drawing/2014/main" id="{EA835062-B2A3-4847-9475-C2F59960A2AD}"/>
+                <a16:creationId xmlns:a16="http://schemas.microsoft.com/office/drawing/2014/main" id="{5FEB5D81-E10B-4F41-BD4D-616A6B5CDE72}"/>
               </a:ext>
             </a:extLst>
           </p:cNvPr>
@@ -13032,7 +13042,7 @@
           <p:cNvPr id="27" name="">
             <a:extLst xmlns:a="http://schemas.openxmlformats.org/drawingml/2006/main">
               <a:ext uri="{FF2B5EF4-FFF2-40B4-BE49-F238E27FC236}">
-                <a16:creationId xmlns:a16="http://schemas.microsoft.com/office/drawing/2014/main" id="{249AC4AB-0979-4C1F-85B1-AB2AF24AC15A}"/>
+                <a16:creationId xmlns:a16="http://schemas.microsoft.com/office/drawing/2014/main" id="{DE828B97-2A07-4B1A-812B-38B2CA32B6E1}"/>
               </a:ext>
             </a:extLst>
           </p:cNvPr>
@@ -13063,7 +13073,7 @@
           <p:cNvPr id="28" name="">
             <a:extLst xmlns:a="http://schemas.openxmlformats.org/drawingml/2006/main">
               <a:ext uri="{FF2B5EF4-FFF2-40B4-BE49-F238E27FC236}">
-                <a16:creationId xmlns:a16="http://schemas.microsoft.com/office/drawing/2014/main" id="{31706D84-0ABA-48B2-9906-0F590A89F550}"/>
+                <a16:creationId xmlns:a16="http://schemas.microsoft.com/office/drawing/2014/main" id="{FB284FFB-FA0D-44C0-A82C-3C0C8EFC7E30}"/>
               </a:ext>
             </a:extLst>
           </p:cNvPr>
@@ -13094,7 +13104,7 @@
           <p:cNvPr id="29" name="">
             <a:extLst xmlns:a="http://schemas.openxmlformats.org/drawingml/2006/main">
               <a:ext uri="{FF2B5EF4-FFF2-40B4-BE49-F238E27FC236}">
-                <a16:creationId xmlns:a16="http://schemas.microsoft.com/office/drawing/2014/main" id="{85556B7B-152C-4ED9-969E-F2F769050A80}"/>
+                <a16:creationId xmlns:a16="http://schemas.microsoft.com/office/drawing/2014/main" id="{813B9C13-6618-47C1-B2FB-38CDCDF2C7AE}"/>
               </a:ext>
             </a:extLst>
           </p:cNvPr>
@@ -13125,7 +13135,7 @@
           <p:cNvPr id="30" name="">
             <a:extLst xmlns:a="http://schemas.openxmlformats.org/drawingml/2006/main">
               <a:ext uri="{FF2B5EF4-FFF2-40B4-BE49-F238E27FC236}">
-                <a16:creationId xmlns:a16="http://schemas.microsoft.com/office/drawing/2014/main" id="{6E4C23AA-BCED-431B-A191-0EE5AA2FA640}"/>
+                <a16:creationId xmlns:a16="http://schemas.microsoft.com/office/drawing/2014/main" id="{28B8F77E-2C10-4F37-BFA4-BDECDA6C5F5F}"/>
               </a:ext>
             </a:extLst>
           </p:cNvPr>
@@ -13156,7 +13166,7 @@
           <p:cNvPr id="31" name="">
             <a:extLst xmlns:a="http://schemas.openxmlformats.org/drawingml/2006/main">
               <a:ext uri="{FF2B5EF4-FFF2-40B4-BE49-F238E27FC236}">
-                <a16:creationId xmlns:a16="http://schemas.microsoft.com/office/drawing/2014/main" id="{9E88BD01-DF10-49CC-BD74-7EA0998CAB35}"/>
+                <a16:creationId xmlns:a16="http://schemas.microsoft.com/office/drawing/2014/main" id="{D07DDF21-E8EE-4C15-BA50-7E13BF406769}"/>
               </a:ext>
             </a:extLst>
           </p:cNvPr>
@@ -13187,7 +13197,7 @@
           <p:cNvPr id="32" name="">
             <a:extLst xmlns:a="http://schemas.openxmlformats.org/drawingml/2006/main">
               <a:ext uri="{FF2B5EF4-FFF2-40B4-BE49-F238E27FC236}">
-                <a16:creationId xmlns:a16="http://schemas.microsoft.com/office/drawing/2014/main" id="{0AD8A9B0-5D0E-4FFF-BF83-25B35C88E575}"/>
+                <a16:creationId xmlns:a16="http://schemas.microsoft.com/office/drawing/2014/main" id="{ECF3B341-78E7-47BA-B115-7CEA2324F6EF}"/>
               </a:ext>
             </a:extLst>
           </p:cNvPr>
@@ -13243,7 +13253,7 @@
           <p:cNvPr id="33" name="">
             <a:extLst xmlns:a="http://schemas.openxmlformats.org/drawingml/2006/main">
               <a:ext uri="{FF2B5EF4-FFF2-40B4-BE49-F238E27FC236}">
-                <a16:creationId xmlns:a16="http://schemas.microsoft.com/office/drawing/2014/main" id="{352C926B-4EDA-4EFF-8A72-FCAA72D38A48}"/>
+                <a16:creationId xmlns:a16="http://schemas.microsoft.com/office/drawing/2014/main" id="{C864B365-24CC-45D4-89A0-6B6F5FD411C5}"/>
               </a:ext>
             </a:extLst>
           </p:cNvPr>
@@ -13299,7 +13309,7 @@
           <p:cNvPr id="34" name="">
             <a:extLst xmlns:a="http://schemas.openxmlformats.org/drawingml/2006/main">
               <a:ext uri="{FF2B5EF4-FFF2-40B4-BE49-F238E27FC236}">
-                <a16:creationId xmlns:a16="http://schemas.microsoft.com/office/drawing/2014/main" id="{040F5FBB-CE2E-4230-8F3D-8951AAF886D2}"/>
+                <a16:creationId xmlns:a16="http://schemas.microsoft.com/office/drawing/2014/main" id="{9A9A5E8D-41AA-4070-940C-BF92C1F4DECB}"/>
               </a:ext>
             </a:extLst>
           </p:cNvPr>
@@ -13355,7 +13365,7 @@
           <p:cNvPr id="35" name="">
             <a:extLst xmlns:a="http://schemas.openxmlformats.org/drawingml/2006/main">
               <a:ext uri="{FF2B5EF4-FFF2-40B4-BE49-F238E27FC236}">
-                <a16:creationId xmlns:a16="http://schemas.microsoft.com/office/drawing/2014/main" id="{7789D1DC-CDBF-4AA6-A529-B6D51E2BDB49}"/>
+                <a16:creationId xmlns:a16="http://schemas.microsoft.com/office/drawing/2014/main" id="{7BB438A2-8631-49C7-8B5F-828F65F70C96}"/>
               </a:ext>
             </a:extLst>
           </p:cNvPr>
@@ -13411,7 +13421,7 @@
           <p:cNvPr id="36" name="">
             <a:extLst xmlns:a="http://schemas.openxmlformats.org/drawingml/2006/main">
               <a:ext uri="{FF2B5EF4-FFF2-40B4-BE49-F238E27FC236}">
-                <a16:creationId xmlns:a16="http://schemas.microsoft.com/office/drawing/2014/main" id="{8CDF5422-AA3C-4365-8B4D-AE9E7FF2B988}"/>
+                <a16:creationId xmlns:a16="http://schemas.microsoft.com/office/drawing/2014/main" id="{21B89A72-97ED-4ED6-A060-A64E425A615C}"/>
               </a:ext>
             </a:extLst>
           </p:cNvPr>
@@ -13467,7 +13477,7 @@
           <p:cNvPr id="37" name="">
             <a:extLst xmlns:a="http://schemas.openxmlformats.org/drawingml/2006/main">
               <a:ext uri="{FF2B5EF4-FFF2-40B4-BE49-F238E27FC236}">
-                <a16:creationId xmlns:a16="http://schemas.microsoft.com/office/drawing/2014/main" id="{D4357317-E55F-4B27-BE5E-BE75B55C5FE5}"/>
+                <a16:creationId xmlns:a16="http://schemas.microsoft.com/office/drawing/2014/main" id="{92C9DF27-D286-4B65-9C02-AC7B2DF7D54C}"/>
               </a:ext>
             </a:extLst>
           </p:cNvPr>
@@ -13498,7 +13508,7 @@
           <p:cNvPr id="38" name="">
             <a:extLst xmlns:a="http://schemas.openxmlformats.org/drawingml/2006/main">
               <a:ext uri="{FF2B5EF4-FFF2-40B4-BE49-F238E27FC236}">
-                <a16:creationId xmlns:a16="http://schemas.microsoft.com/office/drawing/2014/main" id="{77E66B5A-3227-4DA0-A0D6-92D9BDC401E3}"/>
+                <a16:creationId xmlns:a16="http://schemas.microsoft.com/office/drawing/2014/main" id="{514DB823-DB2C-4008-B9C4-82EEA0673B7D}"/>
               </a:ext>
             </a:extLst>
           </p:cNvPr>
@@ -13600,7 +13610,7 @@
           <p:cNvPr id="39" name="">
             <a:extLst xmlns:a="http://schemas.openxmlformats.org/drawingml/2006/main">
               <a:ext uri="{FF2B5EF4-FFF2-40B4-BE49-F238E27FC236}">
-                <a16:creationId xmlns:a16="http://schemas.microsoft.com/office/drawing/2014/main" id="{BE3AB204-63D9-437B-816B-AF4064170F52}"/>
+                <a16:creationId xmlns:a16="http://schemas.microsoft.com/office/drawing/2014/main" id="{EC6ADB86-4817-4FCC-9984-9EC58AE4E3AD}"/>
               </a:ext>
             </a:extLst>
           </p:cNvPr>
@@ -13656,7 +13666,7 @@
           <p:cNvPr id="40" name="">
             <a:extLst xmlns:a="http://schemas.openxmlformats.org/drawingml/2006/main">
               <a:ext uri="{FF2B5EF4-FFF2-40B4-BE49-F238E27FC236}">
-                <a16:creationId xmlns:a16="http://schemas.microsoft.com/office/drawing/2014/main" id="{9D5A81F1-0B8C-40FE-9C5A-A0B9B4AC6D9A}"/>
+                <a16:creationId xmlns:a16="http://schemas.microsoft.com/office/drawing/2014/main" id="{2B1D7624-3D1A-40C9-A7EA-DAFB73C97CE7}"/>
               </a:ext>
             </a:extLst>
           </p:cNvPr>
@@ -13712,7 +13722,7 @@
           <p:cNvPr id="41" name="">
             <a:extLst xmlns:a="http://schemas.openxmlformats.org/drawingml/2006/main">
               <a:ext uri="{FF2B5EF4-FFF2-40B4-BE49-F238E27FC236}">
-                <a16:creationId xmlns:a16="http://schemas.microsoft.com/office/drawing/2014/main" id="{25C331BF-858C-4D2E-8C70-7DA5913ACEC3}"/>
+                <a16:creationId xmlns:a16="http://schemas.microsoft.com/office/drawing/2014/main" id="{3CB59C94-A76B-4FF6-BA15-41342EB2FC8F}"/>
               </a:ext>
             </a:extLst>
           </p:cNvPr>
@@ -13768,7 +13778,7 @@
           <p:cNvPr id="42" name="">
             <a:extLst xmlns:a="http://schemas.openxmlformats.org/drawingml/2006/main">
               <a:ext uri="{FF2B5EF4-FFF2-40B4-BE49-F238E27FC236}">
-                <a16:creationId xmlns:a16="http://schemas.microsoft.com/office/drawing/2014/main" id="{CE312318-992E-4203-AE60-7BC1204B2544}"/>
+                <a16:creationId xmlns:a16="http://schemas.microsoft.com/office/drawing/2014/main" id="{4005F26D-8A0B-45D0-978C-E61115FF415A}"/>
               </a:ext>
             </a:extLst>
           </p:cNvPr>
@@ -13799,7 +13809,7 @@
           <p:cNvPr id="43" name="">
             <a:extLst xmlns:a="http://schemas.openxmlformats.org/drawingml/2006/main">
               <a:ext uri="{FF2B5EF4-FFF2-40B4-BE49-F238E27FC236}">
-                <a16:creationId xmlns:a16="http://schemas.microsoft.com/office/drawing/2014/main" id="{C9EA7879-2F7C-4B35-AC1A-623C14694DEA}"/>
+                <a16:creationId xmlns:a16="http://schemas.microsoft.com/office/drawing/2014/main" id="{239AACB1-E569-47B2-8C49-0EB4986A58B8}"/>
               </a:ext>
             </a:extLst>
           </p:cNvPr>
@@ -13901,7 +13911,7 @@
           <p:cNvPr id="44" name="">
             <a:extLst xmlns:a="http://schemas.openxmlformats.org/drawingml/2006/main">
               <a:ext uri="{FF2B5EF4-FFF2-40B4-BE49-F238E27FC236}">
-                <a16:creationId xmlns:a16="http://schemas.microsoft.com/office/drawing/2014/main" id="{31181FE8-6970-4C0C-8BCB-8ACAC2F7225A}"/>
+                <a16:creationId xmlns:a16="http://schemas.microsoft.com/office/drawing/2014/main" id="{EFACF92C-9C6F-4433-A177-1CDDAF86706D}"/>
               </a:ext>
             </a:extLst>
           </p:cNvPr>
@@ -13957,7 +13967,7 @@
           <p:cNvPr id="45" name="">
             <a:extLst xmlns:a="http://schemas.openxmlformats.org/drawingml/2006/main">
               <a:ext uri="{FF2B5EF4-FFF2-40B4-BE49-F238E27FC236}">
-                <a16:creationId xmlns:a16="http://schemas.microsoft.com/office/drawing/2014/main" id="{EB1F9369-8C25-4561-BFFD-2E66AA348144}"/>
+                <a16:creationId xmlns:a16="http://schemas.microsoft.com/office/drawing/2014/main" id="{8858F787-81DF-4E2A-97B2-DFA311E90F46}"/>
               </a:ext>
             </a:extLst>
           </p:cNvPr>
@@ -14013,7 +14023,7 @@
           <p:cNvPr id="46" name="">
             <a:extLst xmlns:a="http://schemas.openxmlformats.org/drawingml/2006/main">
               <a:ext uri="{FF2B5EF4-FFF2-40B4-BE49-F238E27FC236}">
-                <a16:creationId xmlns:a16="http://schemas.microsoft.com/office/drawing/2014/main" id="{84150689-7441-46DF-A9D9-0853BBE16CB6}"/>
+                <a16:creationId xmlns:a16="http://schemas.microsoft.com/office/drawing/2014/main" id="{9961617F-76F9-42BC-AC7A-36E8C3B97CF5}"/>
               </a:ext>
             </a:extLst>
           </p:cNvPr>
@@ -14069,7 +14079,7 @@
           <p:cNvPr id="47" name="">
             <a:extLst xmlns:a="http://schemas.openxmlformats.org/drawingml/2006/main">
               <a:ext uri="{FF2B5EF4-FFF2-40B4-BE49-F238E27FC236}">
-                <a16:creationId xmlns:a16="http://schemas.microsoft.com/office/drawing/2014/main" id="{AD4CE6D0-453D-440B-8A30-5194CCED3650}"/>
+                <a16:creationId xmlns:a16="http://schemas.microsoft.com/office/drawing/2014/main" id="{C6CA9091-89AD-42D6-B1D0-2977A4A6187F}"/>
               </a:ext>
             </a:extLst>
           </p:cNvPr>
@@ -14100,7 +14110,7 @@
           <p:cNvPr id="48" name="">
             <a:extLst xmlns:a="http://schemas.openxmlformats.org/drawingml/2006/main">
               <a:ext uri="{FF2B5EF4-FFF2-40B4-BE49-F238E27FC236}">
-                <a16:creationId xmlns:a16="http://schemas.microsoft.com/office/drawing/2014/main" id="{5BAB9277-32B3-455C-81EE-3C7550A501DB}"/>
+                <a16:creationId xmlns:a16="http://schemas.microsoft.com/office/drawing/2014/main" id="{C1930646-F5F1-46AE-A34D-7204733A79D7}"/>
               </a:ext>
             </a:extLst>
           </p:cNvPr>
@@ -14202,7 +14212,7 @@
           <p:cNvPr id="49" name="">
             <a:extLst xmlns:a="http://schemas.openxmlformats.org/drawingml/2006/main">
               <a:ext uri="{FF2B5EF4-FFF2-40B4-BE49-F238E27FC236}">
-                <a16:creationId xmlns:a16="http://schemas.microsoft.com/office/drawing/2014/main" id="{F4EA7312-34E9-4B27-91C2-591E60077F5C}"/>
+                <a16:creationId xmlns:a16="http://schemas.microsoft.com/office/drawing/2014/main" id="{47605E1D-BC0E-464A-825A-58FBC5CE30FD}"/>
               </a:ext>
             </a:extLst>
           </p:cNvPr>
@@ -14258,7 +14268,7 @@
           <p:cNvPr id="50" name="">
             <a:extLst xmlns:a="http://schemas.openxmlformats.org/drawingml/2006/main">
               <a:ext uri="{FF2B5EF4-FFF2-40B4-BE49-F238E27FC236}">
-                <a16:creationId xmlns:a16="http://schemas.microsoft.com/office/drawing/2014/main" id="{ABD00201-E891-4CFA-960D-C2E0331DE7B4}"/>
+                <a16:creationId xmlns:a16="http://schemas.microsoft.com/office/drawing/2014/main" id="{64D16580-DAD6-4EF4-8F8E-2CF336997549}"/>
               </a:ext>
             </a:extLst>
           </p:cNvPr>
@@ -14293,7 +14303,7 @@
           <p:cNvPr id="51" name="">
             <a:extLst xmlns:a="http://schemas.openxmlformats.org/drawingml/2006/main">
               <a:ext uri="{FF2B5EF4-FFF2-40B4-BE49-F238E27FC236}">
-                <a16:creationId xmlns:a16="http://schemas.microsoft.com/office/drawing/2014/main" id="{F4AB5E20-1670-4547-9618-F538199EBA7F}"/>
+                <a16:creationId xmlns:a16="http://schemas.microsoft.com/office/drawing/2014/main" id="{FA8D81D2-F2C5-4226-859A-C39FA57B67C5}"/>
               </a:ext>
             </a:extLst>
           </p:cNvPr>
@@ -14349,7 +14359,7 @@
           <p:cNvPr id="52" name="">
             <a:extLst xmlns:a="http://schemas.openxmlformats.org/drawingml/2006/main">
               <a:ext uri="{FF2B5EF4-FFF2-40B4-BE49-F238E27FC236}">
-                <a16:creationId xmlns:a16="http://schemas.microsoft.com/office/drawing/2014/main" id="{44F01D8D-7117-4719-8B14-11251C64BEFF}"/>
+                <a16:creationId xmlns:a16="http://schemas.microsoft.com/office/drawing/2014/main" id="{599DF052-AAF1-4E1B-8602-48AFBE5DF8E2}"/>
               </a:ext>
             </a:extLst>
           </p:cNvPr>
@@ -14384,7 +14394,7 @@
           <p:cNvPr id="53" name="">
             <a:extLst xmlns:a="http://schemas.openxmlformats.org/drawingml/2006/main">
               <a:ext uri="{FF2B5EF4-FFF2-40B4-BE49-F238E27FC236}">
-                <a16:creationId xmlns:a16="http://schemas.microsoft.com/office/drawing/2014/main" id="{C9FC8694-0F14-492F-AF23-26FD9003EC4A}"/>
+                <a16:creationId xmlns:a16="http://schemas.microsoft.com/office/drawing/2014/main" id="{2DC59F1F-11E2-4973-A9D8-FC2C2DEB0084}"/>
               </a:ext>
             </a:extLst>
           </p:cNvPr>
@@ -14440,7 +14450,7 @@
           <p:cNvPr id="54" name="">
             <a:extLst xmlns:a="http://schemas.openxmlformats.org/drawingml/2006/main">
               <a:ext uri="{FF2B5EF4-FFF2-40B4-BE49-F238E27FC236}">
-                <a16:creationId xmlns:a16="http://schemas.microsoft.com/office/drawing/2014/main" id="{284230B3-3ADE-4213-986F-2AF8C324D808}"/>
+                <a16:creationId xmlns:a16="http://schemas.microsoft.com/office/drawing/2014/main" id="{22FAE25A-D41A-41C7-8A5E-ED12E0CE72F9}"/>
               </a:ext>
             </a:extLst>
           </p:cNvPr>
@@ -14475,7 +14485,7 @@
           <p:cNvPr id="55" name="">
             <a:extLst xmlns:a="http://schemas.openxmlformats.org/drawingml/2006/main">
               <a:ext uri="{FF2B5EF4-FFF2-40B4-BE49-F238E27FC236}">
-                <a16:creationId xmlns:a16="http://schemas.microsoft.com/office/drawing/2014/main" id="{B36DC020-BDFF-4AD4-966C-40D0928645E1}"/>
+                <a16:creationId xmlns:a16="http://schemas.microsoft.com/office/drawing/2014/main" id="{BA2E7DC2-E073-415C-A93D-7E6F2F9D0803}"/>
               </a:ext>
             </a:extLst>
           </p:cNvPr>
@@ -14531,7 +14541,7 @@
           <p:cNvPr id="56" name="">
             <a:extLst xmlns:a="http://schemas.openxmlformats.org/drawingml/2006/main">
               <a:ext uri="{FF2B5EF4-FFF2-40B4-BE49-F238E27FC236}">
-                <a16:creationId xmlns:a16="http://schemas.microsoft.com/office/drawing/2014/main" id="{943E273D-7F82-4ED6-9F22-AA23ADCBC978}"/>
+                <a16:creationId xmlns:a16="http://schemas.microsoft.com/office/drawing/2014/main" id="{4F9E28FD-AA76-4807-9270-2BF6D443BEFB}"/>
               </a:ext>
             </a:extLst>
           </p:cNvPr>
@@ -14566,7 +14576,7 @@
           <p:cNvPr id="57" name="">
             <a:extLst xmlns:a="http://schemas.openxmlformats.org/drawingml/2006/main">
               <a:ext uri="{FF2B5EF4-FFF2-40B4-BE49-F238E27FC236}">
-                <a16:creationId xmlns:a16="http://schemas.microsoft.com/office/drawing/2014/main" id="{FE2C90D8-E742-441B-AEAA-E2E12F5CE7E3}"/>
+                <a16:creationId xmlns:a16="http://schemas.microsoft.com/office/drawing/2014/main" id="{0A82ED12-9330-4733-AB14-F016B395D69D}"/>
               </a:ext>
             </a:extLst>
           </p:cNvPr>
@@ -14622,7 +14632,7 @@
           <p:cNvPr id="58" name="">
             <a:extLst xmlns:a="http://schemas.openxmlformats.org/drawingml/2006/main">
               <a:ext uri="{FF2B5EF4-FFF2-40B4-BE49-F238E27FC236}">
-                <a16:creationId xmlns:a16="http://schemas.microsoft.com/office/drawing/2014/main" id="{C5ABE524-9231-4F33-9024-35A0DB5AD1E2}"/>
+                <a16:creationId xmlns:a16="http://schemas.microsoft.com/office/drawing/2014/main" id="{DEF8C867-1C4A-4C2F-8409-6A4673C58A7F}"/>
               </a:ext>
             </a:extLst>
           </p:cNvPr>
@@ -14657,7 +14667,7 @@
           <p:cNvPr id="59" name="">
             <a:extLst xmlns:a="http://schemas.openxmlformats.org/drawingml/2006/main">
               <a:ext uri="{FF2B5EF4-FFF2-40B4-BE49-F238E27FC236}">
-                <a16:creationId xmlns:a16="http://schemas.microsoft.com/office/drawing/2014/main" id="{0B2E0EDD-AEEC-4460-9E14-8A3F631867DD}"/>
+                <a16:creationId xmlns:a16="http://schemas.microsoft.com/office/drawing/2014/main" id="{BA9BB814-296F-4E19-B328-41A16C5A0323}"/>
               </a:ext>
             </a:extLst>
           </p:cNvPr>
@@ -14713,7 +14723,7 @@
           <p:cNvPr id="60" name="">
             <a:extLst xmlns:a="http://schemas.openxmlformats.org/drawingml/2006/main">
               <a:ext uri="{FF2B5EF4-FFF2-40B4-BE49-F238E27FC236}">
-                <a16:creationId xmlns:a16="http://schemas.microsoft.com/office/drawing/2014/main" id="{32417967-97FE-4562-91F4-F47F4A50EAAC}"/>
+                <a16:creationId xmlns:a16="http://schemas.microsoft.com/office/drawing/2014/main" id="{4C5D710F-B7E9-4A4C-B658-B490381C482F}"/>
               </a:ext>
             </a:extLst>
           </p:cNvPr>
@@ -14748,7 +14758,7 @@
           <p:cNvPr id="61" name="">
             <a:extLst xmlns:a="http://schemas.openxmlformats.org/drawingml/2006/main">
               <a:ext uri="{FF2B5EF4-FFF2-40B4-BE49-F238E27FC236}">
-                <a16:creationId xmlns:a16="http://schemas.microsoft.com/office/drawing/2014/main" id="{1315B1E8-9F94-45EE-89DB-6506405E86CB}"/>
+                <a16:creationId xmlns:a16="http://schemas.microsoft.com/office/drawing/2014/main" id="{BF661F62-681A-4D89-9B25-0C626C97E116}"/>
               </a:ext>
             </a:extLst>
           </p:cNvPr>
@@ -14804,7 +14814,7 @@
           <p:cNvPr id="62" name="">
             <a:extLst xmlns:a="http://schemas.openxmlformats.org/drawingml/2006/main">
               <a:ext uri="{FF2B5EF4-FFF2-40B4-BE49-F238E27FC236}">
-                <a16:creationId xmlns:a16="http://schemas.microsoft.com/office/drawing/2014/main" id="{1C2DD78E-C345-48D4-A834-87F7FF3FB400}"/>
+                <a16:creationId xmlns:a16="http://schemas.microsoft.com/office/drawing/2014/main" id="{51788EDD-1C72-4BE2-A239-476201555746}"/>
               </a:ext>
             </a:extLst>
           </p:cNvPr>
@@ -14858,7 +14868,7 @@
     </p:spTree>
     <p:extLst>
       <p:ext uri="{BB962C8B-B14F-4D97-AF65-F5344CB8AC3E}">
-        <p14:creationId xmlns:p14="http://schemas.microsoft.com/office/powerpoint/2010/main" val="1826809865"/>
+        <p14:creationId xmlns:p14="http://schemas.microsoft.com/office/powerpoint/2010/main" val="463450295"/>
       </p:ext>
     </p:extLst>
   </p:cSld>
@@ -14889,7 +14899,7 @@
           <p:cNvPr id="1" name="">
             <a:extLst xmlns:a="http://schemas.openxmlformats.org/drawingml/2006/main">
               <a:ext uri="{FF2B5EF4-FFF2-40B4-BE49-F238E27FC236}">
-                <a16:creationId xmlns:a16="http://schemas.microsoft.com/office/drawing/2014/main" id="{8477E037-872A-4BC4-B3F3-B47D14CF4D13}"/>
+                <a16:creationId xmlns:a16="http://schemas.microsoft.com/office/drawing/2014/main" id="{FB6CC782-E76B-4507-9E57-CDC29F8C3877}"/>
               </a:ext>
             </a:extLst>
           </p:cNvPr>
@@ -14920,7 +14930,7 @@
           <p:cNvPr id="2" name="">
             <a:extLst xmlns:a="http://schemas.openxmlformats.org/drawingml/2006/main">
               <a:ext uri="{FF2B5EF4-FFF2-40B4-BE49-F238E27FC236}">
-                <a16:creationId xmlns:a16="http://schemas.microsoft.com/office/drawing/2014/main" id="{A8844A87-90CB-47E5-8E5E-A944DC58E7E2}"/>
+                <a16:creationId xmlns:a16="http://schemas.microsoft.com/office/drawing/2014/main" id="{C377A597-688E-4EEC-8B48-030C2138D1D3}"/>
               </a:ext>
             </a:extLst>
           </p:cNvPr>
@@ -14951,7 +14961,7 @@
           <p:cNvPr id="3" name="">
             <a:extLst xmlns:a="http://schemas.openxmlformats.org/drawingml/2006/main">
               <a:ext uri="{FF2B5EF4-FFF2-40B4-BE49-F238E27FC236}">
-                <a16:creationId xmlns:a16="http://schemas.microsoft.com/office/drawing/2014/main" id="{BFF4E3A9-8720-4EBD-8D7A-CB33A5C68BC7}"/>
+                <a16:creationId xmlns:a16="http://schemas.microsoft.com/office/drawing/2014/main" id="{75E06E8D-39E2-48C5-8A30-DED1042BFFE8}"/>
               </a:ext>
             </a:extLst>
           </p:cNvPr>
@@ -14982,7 +14992,7 @@
           <p:cNvPr id="4" name="">
             <a:extLst xmlns:a="http://schemas.openxmlformats.org/drawingml/2006/main">
               <a:ext uri="{FF2B5EF4-FFF2-40B4-BE49-F238E27FC236}">
-                <a16:creationId xmlns:a16="http://schemas.microsoft.com/office/drawing/2014/main" id="{D77D1AE7-6BF9-4ED7-8A2A-2F721480D333}"/>
+                <a16:creationId xmlns:a16="http://schemas.microsoft.com/office/drawing/2014/main" id="{9BE98DC0-0EF5-4192-A9A2-BAB3CDACBFC6}"/>
               </a:ext>
             </a:extLst>
           </p:cNvPr>
@@ -15013,7 +15023,7 @@
           <p:cNvPr id="5" name="">
             <a:extLst xmlns:a="http://schemas.openxmlformats.org/drawingml/2006/main">
               <a:ext uri="{FF2B5EF4-FFF2-40B4-BE49-F238E27FC236}">
-                <a16:creationId xmlns:a16="http://schemas.microsoft.com/office/drawing/2014/main" id="{BCFFC0BB-2F72-4B45-91CA-3CAA17136DDD}"/>
+                <a16:creationId xmlns:a16="http://schemas.microsoft.com/office/drawing/2014/main" id="{B29374BC-CF6B-4DBB-8283-6695E5CD673F}"/>
               </a:ext>
             </a:extLst>
           </p:cNvPr>
@@ -15044,7 +15054,7 @@
           <p:cNvPr id="6" name="">
             <a:extLst xmlns:a="http://schemas.openxmlformats.org/drawingml/2006/main">
               <a:ext uri="{FF2B5EF4-FFF2-40B4-BE49-F238E27FC236}">
-                <a16:creationId xmlns:a16="http://schemas.microsoft.com/office/drawing/2014/main" id="{686629D9-B5ED-46AD-ABF9-E0A35BA75CD5}"/>
+                <a16:creationId xmlns:a16="http://schemas.microsoft.com/office/drawing/2014/main" id="{C9DA1228-4F48-4DC7-9FAF-76FE92630E87}"/>
               </a:ext>
             </a:extLst>
           </p:cNvPr>
@@ -15075,7 +15085,7 @@
           <p:cNvPr id="7" name="">
             <a:extLst xmlns:a="http://schemas.openxmlformats.org/drawingml/2006/main">
               <a:ext uri="{FF2B5EF4-FFF2-40B4-BE49-F238E27FC236}">
-                <a16:creationId xmlns:a16="http://schemas.microsoft.com/office/drawing/2014/main" id="{B022359C-1088-433A-A63F-495A09C4D4C8}"/>
+                <a16:creationId xmlns:a16="http://schemas.microsoft.com/office/drawing/2014/main" id="{05E2988A-AFCB-4DD6-AFA6-E5569DB7779E}"/>
               </a:ext>
             </a:extLst>
           </p:cNvPr>
@@ -15106,7 +15116,7 @@
           <p:cNvPr id="8" name="">
             <a:extLst xmlns:a="http://schemas.openxmlformats.org/drawingml/2006/main">
               <a:ext uri="{FF2B5EF4-FFF2-40B4-BE49-F238E27FC236}">
-                <a16:creationId xmlns:a16="http://schemas.microsoft.com/office/drawing/2014/main" id="{1BB78327-2A13-47F9-9EE8-47D0A9617A7C}"/>
+                <a16:creationId xmlns:a16="http://schemas.microsoft.com/office/drawing/2014/main" id="{4C1E1E41-14E8-4C64-AB0D-EF8C4C879111}"/>
               </a:ext>
             </a:extLst>
           </p:cNvPr>
@@ -15137,7 +15147,7 @@
           <p:cNvPr id="9" name="">
             <a:extLst xmlns:a="http://schemas.openxmlformats.org/drawingml/2006/main">
               <a:ext uri="{FF2B5EF4-FFF2-40B4-BE49-F238E27FC236}">
-                <a16:creationId xmlns:a16="http://schemas.microsoft.com/office/drawing/2014/main" id="{69576984-25E9-4C98-BEEE-D45EA805C9C7}"/>
+                <a16:creationId xmlns:a16="http://schemas.microsoft.com/office/drawing/2014/main" id="{AA7C140E-3D14-43A8-9610-32EDD2620339}"/>
               </a:ext>
             </a:extLst>
           </p:cNvPr>
@@ -15168,7 +15178,7 @@
           <p:cNvPr id="10" name="">
             <a:extLst xmlns:a="http://schemas.openxmlformats.org/drawingml/2006/main">
               <a:ext uri="{FF2B5EF4-FFF2-40B4-BE49-F238E27FC236}">
-                <a16:creationId xmlns:a16="http://schemas.microsoft.com/office/drawing/2014/main" id="{3915ED25-8C8C-4FDB-9F42-9E8E8EFB0A63}"/>
+                <a16:creationId xmlns:a16="http://schemas.microsoft.com/office/drawing/2014/main" id="{7B218E25-F790-4666-8EEA-154EBB6A757C}"/>
               </a:ext>
             </a:extLst>
           </p:cNvPr>
@@ -15199,7 +15209,7 @@
           <p:cNvPr id="11" name="">
             <a:extLst xmlns:a="http://schemas.openxmlformats.org/drawingml/2006/main">
               <a:ext uri="{FF2B5EF4-FFF2-40B4-BE49-F238E27FC236}">
-                <a16:creationId xmlns:a16="http://schemas.microsoft.com/office/drawing/2014/main" id="{AA9C1A0D-8CAF-4AE1-9CC1-8C9091AA586A}"/>
+                <a16:creationId xmlns:a16="http://schemas.microsoft.com/office/drawing/2014/main" id="{5124B5DD-6C10-437E-AE3A-8F98E622CAA5}"/>
               </a:ext>
             </a:extLst>
           </p:cNvPr>
@@ -15230,7 +15240,7 @@
           <p:cNvPr id="12" name="">
             <a:extLst xmlns:a="http://schemas.openxmlformats.org/drawingml/2006/main">
               <a:ext uri="{FF2B5EF4-FFF2-40B4-BE49-F238E27FC236}">
-                <a16:creationId xmlns:a16="http://schemas.microsoft.com/office/drawing/2014/main" id="{80A95EEF-9572-46A5-8CC8-901F9E0AF035}"/>
+                <a16:creationId xmlns:a16="http://schemas.microsoft.com/office/drawing/2014/main" id="{EB8F28D9-4BE7-4A59-AA09-9B5F18C91865}"/>
               </a:ext>
             </a:extLst>
           </p:cNvPr>
@@ -15261,7 +15271,7 @@
           <p:cNvPr id="13" name="">
             <a:extLst xmlns:a="http://schemas.openxmlformats.org/drawingml/2006/main">
               <a:ext uri="{FF2B5EF4-FFF2-40B4-BE49-F238E27FC236}">
-                <a16:creationId xmlns:a16="http://schemas.microsoft.com/office/drawing/2014/main" id="{E1DAF529-647A-4FCF-ABBD-F398E3B9CC52}"/>
+                <a16:creationId xmlns:a16="http://schemas.microsoft.com/office/drawing/2014/main" id="{14A8D4E6-4469-4942-B41D-23C6AB3C8BF5}"/>
               </a:ext>
             </a:extLst>
           </p:cNvPr>
@@ -15292,7 +15302,7 @@
           <p:cNvPr id="14" name="">
             <a:extLst xmlns:a="http://schemas.openxmlformats.org/drawingml/2006/main">
               <a:ext uri="{FF2B5EF4-FFF2-40B4-BE49-F238E27FC236}">
-                <a16:creationId xmlns:a16="http://schemas.microsoft.com/office/drawing/2014/main" id="{467CB2E5-3F43-4A8E-973B-A521C1FEE73B}"/>
+                <a16:creationId xmlns:a16="http://schemas.microsoft.com/office/drawing/2014/main" id="{0DF1AAB9-6846-4317-9B9F-5DA569BD921F}"/>
               </a:ext>
             </a:extLst>
           </p:cNvPr>
@@ -15323,7 +15333,7 @@
           <p:cNvPr id="15" name="">
             <a:extLst xmlns:a="http://schemas.openxmlformats.org/drawingml/2006/main">
               <a:ext uri="{FF2B5EF4-FFF2-40B4-BE49-F238E27FC236}">
-                <a16:creationId xmlns:a16="http://schemas.microsoft.com/office/drawing/2014/main" id="{0CEA0333-0FB7-4CA5-9E40-21C801E10A3F}"/>
+                <a16:creationId xmlns:a16="http://schemas.microsoft.com/office/drawing/2014/main" id="{5F99B025-5D71-4303-92A8-05696D6EA0D2}"/>
               </a:ext>
             </a:extLst>
           </p:cNvPr>
@@ -15354,7 +15364,7 @@
           <p:cNvPr id="16" name="">
             <a:extLst xmlns:a="http://schemas.openxmlformats.org/drawingml/2006/main">
               <a:ext uri="{FF2B5EF4-FFF2-40B4-BE49-F238E27FC236}">
-                <a16:creationId xmlns:a16="http://schemas.microsoft.com/office/drawing/2014/main" id="{290741BC-7098-453C-A555-9C33A7383D74}"/>
+                <a16:creationId xmlns:a16="http://schemas.microsoft.com/office/drawing/2014/main" id="{03F8DE95-A3F4-4136-A85D-66F9E853B507}"/>
               </a:ext>
             </a:extLst>
           </p:cNvPr>
@@ -15385,7 +15395,7 @@
           <p:cNvPr id="17" name="">
             <a:extLst xmlns:a="http://schemas.openxmlformats.org/drawingml/2006/main">
               <a:ext uri="{FF2B5EF4-FFF2-40B4-BE49-F238E27FC236}">
-                <a16:creationId xmlns:a16="http://schemas.microsoft.com/office/drawing/2014/main" id="{B9B30FC4-2C27-4668-82A3-988830BE2AE6}"/>
+                <a16:creationId xmlns:a16="http://schemas.microsoft.com/office/drawing/2014/main" id="{805FA73E-5C47-4681-B3F5-FA6F35FC0ADF}"/>
               </a:ext>
             </a:extLst>
           </p:cNvPr>
@@ -15416,7 +15426,7 @@
           <p:cNvPr id="18" name="">
             <a:extLst xmlns:a="http://schemas.openxmlformats.org/drawingml/2006/main">
               <a:ext uri="{FF2B5EF4-FFF2-40B4-BE49-F238E27FC236}">
-                <a16:creationId xmlns:a16="http://schemas.microsoft.com/office/drawing/2014/main" id="{87A052D9-AC48-44FB-BB5F-C4D24B33530F}"/>
+                <a16:creationId xmlns:a16="http://schemas.microsoft.com/office/drawing/2014/main" id="{3D624829-AEC6-4340-B77E-A9C3C16313CE}"/>
               </a:ext>
             </a:extLst>
           </p:cNvPr>
@@ -15447,7 +15457,7 @@
           <p:cNvPr id="19" name="">
             <a:extLst xmlns:a="http://schemas.openxmlformats.org/drawingml/2006/main">
               <a:ext uri="{FF2B5EF4-FFF2-40B4-BE49-F238E27FC236}">
-                <a16:creationId xmlns:a16="http://schemas.microsoft.com/office/drawing/2014/main" id="{B0BD5B47-CFE2-4D6C-8A04-6A4FA297E269}"/>
+                <a16:creationId xmlns:a16="http://schemas.microsoft.com/office/drawing/2014/main" id="{3F62E8AB-CAAE-4671-9449-95920DADAB8D}"/>
               </a:ext>
             </a:extLst>
           </p:cNvPr>
@@ -15478,7 +15488,7 @@
           <p:cNvPr id="20" name="">
             <a:extLst xmlns:a="http://schemas.openxmlformats.org/drawingml/2006/main">
               <a:ext uri="{FF2B5EF4-FFF2-40B4-BE49-F238E27FC236}">
-                <a16:creationId xmlns:a16="http://schemas.microsoft.com/office/drawing/2014/main" id="{C74CAD56-A818-4650-9862-D76395DC1FFC}"/>
+                <a16:creationId xmlns:a16="http://schemas.microsoft.com/office/drawing/2014/main" id="{853223FD-AEE7-4CAA-8E3B-94F78206082E}"/>
               </a:ext>
             </a:extLst>
           </p:cNvPr>
@@ -15509,7 +15519,7 @@
           <p:cNvPr id="21" name="">
             <a:extLst xmlns:a="http://schemas.openxmlformats.org/drawingml/2006/main">
               <a:ext uri="{FF2B5EF4-FFF2-40B4-BE49-F238E27FC236}">
-                <a16:creationId xmlns:a16="http://schemas.microsoft.com/office/drawing/2014/main" id="{12006F52-EA71-407D-B0D9-8FDAC2655A2B}"/>
+                <a16:creationId xmlns:a16="http://schemas.microsoft.com/office/drawing/2014/main" id="{8732D8AB-F663-4CBF-8D47-516B3201722F}"/>
               </a:ext>
             </a:extLst>
           </p:cNvPr>
@@ -15540,7 +15550,7 @@
           <p:cNvPr id="22" name="">
             <a:extLst xmlns:a="http://schemas.openxmlformats.org/drawingml/2006/main">
               <a:ext uri="{FF2B5EF4-FFF2-40B4-BE49-F238E27FC236}">
-                <a16:creationId xmlns:a16="http://schemas.microsoft.com/office/drawing/2014/main" id="{9ACB00B6-8728-49E8-AF32-B45B698FB28D}"/>
+                <a16:creationId xmlns:a16="http://schemas.microsoft.com/office/drawing/2014/main" id="{6C681634-DD6C-4E24-97D5-ADFD1E62E8FC}"/>
               </a:ext>
             </a:extLst>
           </p:cNvPr>
@@ -15571,7 +15581,7 @@
           <p:cNvPr id="23" name="">
             <a:extLst xmlns:a="http://schemas.openxmlformats.org/drawingml/2006/main">
               <a:ext uri="{FF2B5EF4-FFF2-40B4-BE49-F238E27FC236}">
-                <a16:creationId xmlns:a16="http://schemas.microsoft.com/office/drawing/2014/main" id="{7420FB52-300B-4E98-BEBF-07BF1E18B2F5}"/>
+                <a16:creationId xmlns:a16="http://schemas.microsoft.com/office/drawing/2014/main" id="{5D297BF0-FFC5-4084-B624-7D1EDCD968FA}"/>
               </a:ext>
             </a:extLst>
           </p:cNvPr>
@@ -15602,7 +15612,7 @@
           <p:cNvPr id="24" name="">
             <a:extLst xmlns:a="http://schemas.openxmlformats.org/drawingml/2006/main">
               <a:ext uri="{FF2B5EF4-FFF2-40B4-BE49-F238E27FC236}">
-                <a16:creationId xmlns:a16="http://schemas.microsoft.com/office/drawing/2014/main" id="{E972629E-4649-4549-9B35-E815FD0DF93A}"/>
+                <a16:creationId xmlns:a16="http://schemas.microsoft.com/office/drawing/2014/main" id="{56656EC1-C237-4049-B159-FC93843C718A}"/>
               </a:ext>
             </a:extLst>
           </p:cNvPr>
@@ -15633,7 +15643,7 @@
           <p:cNvPr id="25" name="">
             <a:extLst xmlns:a="http://schemas.openxmlformats.org/drawingml/2006/main">
               <a:ext uri="{FF2B5EF4-FFF2-40B4-BE49-F238E27FC236}">
-                <a16:creationId xmlns:a16="http://schemas.microsoft.com/office/drawing/2014/main" id="{1690F055-F7AA-4B98-92C3-F42B8EEDE118}"/>
+                <a16:creationId xmlns:a16="http://schemas.microsoft.com/office/drawing/2014/main" id="{8BC53967-0C10-4111-A692-164A4F8CE04C}"/>
               </a:ext>
             </a:extLst>
           </p:cNvPr>
@@ -15664,7 +15674,7 @@
           <p:cNvPr id="26" name="">
             <a:extLst xmlns:a="http://schemas.openxmlformats.org/drawingml/2006/main">
               <a:ext uri="{FF2B5EF4-FFF2-40B4-BE49-F238E27FC236}">
-                <a16:creationId xmlns:a16="http://schemas.microsoft.com/office/drawing/2014/main" id="{A9F25781-4E96-4571-9DAC-150D4ADCAE2A}"/>
+                <a16:creationId xmlns:a16="http://schemas.microsoft.com/office/drawing/2014/main" id="{248112EB-F520-47B7-BED8-675191B94BBA}"/>
               </a:ext>
             </a:extLst>
           </p:cNvPr>
@@ -15695,7 +15705,7 @@
           <p:cNvPr id="27" name="">
             <a:extLst xmlns:a="http://schemas.openxmlformats.org/drawingml/2006/main">
               <a:ext uri="{FF2B5EF4-FFF2-40B4-BE49-F238E27FC236}">
-                <a16:creationId xmlns:a16="http://schemas.microsoft.com/office/drawing/2014/main" id="{4EC8590F-E956-45F5-8899-415F4ADA2806}"/>
+                <a16:creationId xmlns:a16="http://schemas.microsoft.com/office/drawing/2014/main" id="{0966BDF0-E98F-46F2-AAE2-530460A822EF}"/>
               </a:ext>
             </a:extLst>
           </p:cNvPr>
@@ -15726,7 +15736,7 @@
           <p:cNvPr id="28" name="">
             <a:extLst xmlns:a="http://schemas.openxmlformats.org/drawingml/2006/main">
               <a:ext uri="{FF2B5EF4-FFF2-40B4-BE49-F238E27FC236}">
-                <a16:creationId xmlns:a16="http://schemas.microsoft.com/office/drawing/2014/main" id="{98D9D48A-6282-491B-A4B7-5ECAF7A86AF4}"/>
+                <a16:creationId xmlns:a16="http://schemas.microsoft.com/office/drawing/2014/main" id="{D3D9D203-152F-4453-8165-1E20012683C6}"/>
               </a:ext>
             </a:extLst>
           </p:cNvPr>
@@ -15757,7 +15767,7 @@
           <p:cNvPr id="29" name="">
             <a:extLst xmlns:a="http://schemas.openxmlformats.org/drawingml/2006/main">
               <a:ext uri="{FF2B5EF4-FFF2-40B4-BE49-F238E27FC236}">
-                <a16:creationId xmlns:a16="http://schemas.microsoft.com/office/drawing/2014/main" id="{0C0B87FD-8BD7-49A1-9A24-78F4438EB725}"/>
+                <a16:creationId xmlns:a16="http://schemas.microsoft.com/office/drawing/2014/main" id="{3594E7E7-DEFE-40D7-9AB7-021A50109B40}"/>
               </a:ext>
             </a:extLst>
           </p:cNvPr>
@@ -15788,7 +15798,7 @@
           <p:cNvPr id="30" name="">
             <a:extLst xmlns:a="http://schemas.openxmlformats.org/drawingml/2006/main">
               <a:ext uri="{FF2B5EF4-FFF2-40B4-BE49-F238E27FC236}">
-                <a16:creationId xmlns:a16="http://schemas.microsoft.com/office/drawing/2014/main" id="{A9E15C52-464A-42E0-A1AE-A5F6F5196B0A}"/>
+                <a16:creationId xmlns:a16="http://schemas.microsoft.com/office/drawing/2014/main" id="{ED9D839B-E7CB-4135-B91C-8BF600E60B70}"/>
               </a:ext>
             </a:extLst>
           </p:cNvPr>
@@ -15819,7 +15829,7 @@
           <p:cNvPr id="31" name="">
             <a:extLst xmlns:a="http://schemas.openxmlformats.org/drawingml/2006/main">
               <a:ext uri="{FF2B5EF4-FFF2-40B4-BE49-F238E27FC236}">
-                <a16:creationId xmlns:a16="http://schemas.microsoft.com/office/drawing/2014/main" id="{2C8FC028-ACBC-47E1-94E4-A9A1DA4D4D3B}"/>
+                <a16:creationId xmlns:a16="http://schemas.microsoft.com/office/drawing/2014/main" id="{FF68CEC3-5E62-4C2F-A7F3-5FFB1401DE25}"/>
               </a:ext>
             </a:extLst>
           </p:cNvPr>
@@ -15850,7 +15860,7 @@
           <p:cNvPr id="32" name="">
             <a:extLst xmlns:a="http://schemas.openxmlformats.org/drawingml/2006/main">
               <a:ext uri="{FF2B5EF4-FFF2-40B4-BE49-F238E27FC236}">
-                <a16:creationId xmlns:a16="http://schemas.microsoft.com/office/drawing/2014/main" id="{5C125B2F-562C-4605-8D9D-B57642B73AAE}"/>
+                <a16:creationId xmlns:a16="http://schemas.microsoft.com/office/drawing/2014/main" id="{33F29D8D-D23C-4DFA-8F52-5DD1D91C3183}"/>
               </a:ext>
             </a:extLst>
           </p:cNvPr>
@@ -15906,7 +15916,7 @@
           <p:cNvPr id="33" name="">
             <a:extLst xmlns:a="http://schemas.openxmlformats.org/drawingml/2006/main">
               <a:ext uri="{FF2B5EF4-FFF2-40B4-BE49-F238E27FC236}">
-                <a16:creationId xmlns:a16="http://schemas.microsoft.com/office/drawing/2014/main" id="{3F5673FF-B10A-48E0-B9DA-6434F6517CCA}"/>
+                <a16:creationId xmlns:a16="http://schemas.microsoft.com/office/drawing/2014/main" id="{F1777B8C-8FA4-4BCF-87B8-C411EB347F7D}"/>
               </a:ext>
             </a:extLst>
           </p:cNvPr>
@@ -15985,7 +15995,7 @@
           <p:cNvPr id="34" name="">
             <a:extLst xmlns:a="http://schemas.openxmlformats.org/drawingml/2006/main">
               <a:ext uri="{FF2B5EF4-FFF2-40B4-BE49-F238E27FC236}">
-                <a16:creationId xmlns:a16="http://schemas.microsoft.com/office/drawing/2014/main" id="{0D991180-2861-4CB9-8EA7-E3C3A4D71E2B}"/>
+                <a16:creationId xmlns:a16="http://schemas.microsoft.com/office/drawing/2014/main" id="{1123564B-B853-4554-9B59-A72B4154AE3A}"/>
               </a:ext>
             </a:extLst>
           </p:cNvPr>
@@ -16064,7 +16074,7 @@
           <p:cNvPr id="35" name="">
             <a:extLst xmlns:a="http://schemas.openxmlformats.org/drawingml/2006/main">
               <a:ext uri="{FF2B5EF4-FFF2-40B4-BE49-F238E27FC236}">
-                <a16:creationId xmlns:a16="http://schemas.microsoft.com/office/drawing/2014/main" id="{888FC6DD-5521-47C3-859B-B9659D2B1DD5}"/>
+                <a16:creationId xmlns:a16="http://schemas.microsoft.com/office/drawing/2014/main" id="{55D8DA07-BA35-44CC-97D3-FFD18371D790}"/>
               </a:ext>
             </a:extLst>
           </p:cNvPr>
@@ -16095,7 +16105,7 @@
           <p:cNvPr id="36" name="">
             <a:extLst xmlns:a="http://schemas.openxmlformats.org/drawingml/2006/main">
               <a:ext uri="{FF2B5EF4-FFF2-40B4-BE49-F238E27FC236}">
-                <a16:creationId xmlns:a16="http://schemas.microsoft.com/office/drawing/2014/main" id="{9CB81F1A-BC92-4145-A64D-F0A3677751C0}"/>
+                <a16:creationId xmlns:a16="http://schemas.microsoft.com/office/drawing/2014/main" id="{CF95AD4A-F7AB-4302-AF37-2538A0102D40}"/>
               </a:ext>
             </a:extLst>
           </p:cNvPr>
@@ -16151,7 +16161,7 @@
           <p:cNvPr id="37" name="">
             <a:extLst xmlns:a="http://schemas.openxmlformats.org/drawingml/2006/main">
               <a:ext uri="{FF2B5EF4-FFF2-40B4-BE49-F238E27FC236}">
-                <a16:creationId xmlns:a16="http://schemas.microsoft.com/office/drawing/2014/main" id="{5610CBD9-19C6-416C-B25F-5658C3CFCA97}"/>
+                <a16:creationId xmlns:a16="http://schemas.microsoft.com/office/drawing/2014/main" id="{8F744EF8-EE71-4CEF-98BA-25D05FB1FAE4}"/>
               </a:ext>
             </a:extLst>
           </p:cNvPr>
@@ -16207,7 +16217,7 @@
           <p:cNvPr id="38" name="">
             <a:extLst xmlns:a="http://schemas.openxmlformats.org/drawingml/2006/main">
               <a:ext uri="{FF2B5EF4-FFF2-40B4-BE49-F238E27FC236}">
-                <a16:creationId xmlns:a16="http://schemas.microsoft.com/office/drawing/2014/main" id="{CF0DB4BB-05E5-4742-9A54-8617E53B6817}"/>
+                <a16:creationId xmlns:a16="http://schemas.microsoft.com/office/drawing/2014/main" id="{27B41D5E-2515-496A-9776-4647AE833B76}"/>
               </a:ext>
             </a:extLst>
           </p:cNvPr>
@@ -16263,7 +16273,7 @@
           <p:cNvPr id="39" name="">
             <a:extLst xmlns:a="http://schemas.openxmlformats.org/drawingml/2006/main">
               <a:ext uri="{FF2B5EF4-FFF2-40B4-BE49-F238E27FC236}">
-                <a16:creationId xmlns:a16="http://schemas.microsoft.com/office/drawing/2014/main" id="{90CEC332-21B4-4F6D-BEDC-98F7405C11E9}"/>
+                <a16:creationId xmlns:a16="http://schemas.microsoft.com/office/drawing/2014/main" id="{88D14149-1457-4C3D-82BD-E22C299380CB}"/>
               </a:ext>
             </a:extLst>
           </p:cNvPr>
@@ -16319,7 +16329,7 @@
           <p:cNvPr id="40" name="">
             <a:extLst xmlns:a="http://schemas.openxmlformats.org/drawingml/2006/main">
               <a:ext uri="{FF2B5EF4-FFF2-40B4-BE49-F238E27FC236}">
-                <a16:creationId xmlns:a16="http://schemas.microsoft.com/office/drawing/2014/main" id="{2A7BE440-3432-4CAA-95BB-CA864E9A0DA4}"/>
+                <a16:creationId xmlns:a16="http://schemas.microsoft.com/office/drawing/2014/main" id="{DDDA19BB-85C9-4934-9AE8-BC9C7DBF5DB1}"/>
               </a:ext>
             </a:extLst>
           </p:cNvPr>
@@ -16375,7 +16385,7 @@
           <p:cNvPr id="41" name="">
             <a:extLst xmlns:a="http://schemas.openxmlformats.org/drawingml/2006/main">
               <a:ext uri="{FF2B5EF4-FFF2-40B4-BE49-F238E27FC236}">
-                <a16:creationId xmlns:a16="http://schemas.microsoft.com/office/drawing/2014/main" id="{27A6477A-B9BA-4E6A-A1FC-0D72F67D96EC}"/>
+                <a16:creationId xmlns:a16="http://schemas.microsoft.com/office/drawing/2014/main" id="{8AF5DED4-6F9C-4071-9AAF-6A3476CD8FFF}"/>
               </a:ext>
             </a:extLst>
           </p:cNvPr>
@@ -16431,7 +16441,7 @@
           <p:cNvPr id="42" name="">
             <a:extLst xmlns:a="http://schemas.openxmlformats.org/drawingml/2006/main">
               <a:ext uri="{FF2B5EF4-FFF2-40B4-BE49-F238E27FC236}">
-                <a16:creationId xmlns:a16="http://schemas.microsoft.com/office/drawing/2014/main" id="{D207EEAF-7EE9-4584-9D25-86743644648A}"/>
+                <a16:creationId xmlns:a16="http://schemas.microsoft.com/office/drawing/2014/main" id="{8F68B1A3-8CA2-4240-AA3C-2ED13BA73711}"/>
               </a:ext>
             </a:extLst>
           </p:cNvPr>
@@ -16487,7 +16497,7 @@
           <p:cNvPr id="43" name="">
             <a:extLst xmlns:a="http://schemas.openxmlformats.org/drawingml/2006/main">
               <a:ext uri="{FF2B5EF4-FFF2-40B4-BE49-F238E27FC236}">
-                <a16:creationId xmlns:a16="http://schemas.microsoft.com/office/drawing/2014/main" id="{339C3172-3251-444C-985E-1F0A9F71F7AD}"/>
+                <a16:creationId xmlns:a16="http://schemas.microsoft.com/office/drawing/2014/main" id="{A6B24F27-5862-4378-84FA-BC0651308047}"/>
               </a:ext>
             </a:extLst>
           </p:cNvPr>
@@ -16543,7 +16553,7 @@
           <p:cNvPr id="44" name="">
             <a:extLst xmlns:a="http://schemas.openxmlformats.org/drawingml/2006/main">
               <a:ext uri="{FF2B5EF4-FFF2-40B4-BE49-F238E27FC236}">
-                <a16:creationId xmlns:a16="http://schemas.microsoft.com/office/drawing/2014/main" id="{67BDC6C2-960D-4FED-8366-CF4631039413}"/>
+                <a16:creationId xmlns:a16="http://schemas.microsoft.com/office/drawing/2014/main" id="{4232AE7D-B626-4709-968C-A2E8106E0ECF}"/>
               </a:ext>
             </a:extLst>
           </p:cNvPr>
@@ -16578,7 +16588,7 @@
           <p:cNvPr id="45" name="">
             <a:extLst xmlns:a="http://schemas.openxmlformats.org/drawingml/2006/main">
               <a:ext uri="{FF2B5EF4-FFF2-40B4-BE49-F238E27FC236}">
-                <a16:creationId xmlns:a16="http://schemas.microsoft.com/office/drawing/2014/main" id="{FA8059C7-A90E-49AA-AE8C-FDBD63F64948}"/>
+                <a16:creationId xmlns:a16="http://schemas.microsoft.com/office/drawing/2014/main" id="{75B1CD76-7FB0-48B5-83DD-259C89B62899}"/>
               </a:ext>
             </a:extLst>
           </p:cNvPr>
@@ -16624,7 +16634,7 @@
                 <a:ea typeface="Avenir Next"/>
                 <a:cs typeface="Avenir Next"/>
               </a:rPr>
-              <a:t>RUN THE CASE  →</a:t>
+              <a:t>RUN THE TWIN  →</a:t>
             </a:r>
           </a:p>
         </p:txBody>
@@ -16634,7 +16644,7 @@
           <p:cNvPr id="46" name="">
             <a:extLst xmlns:a="http://schemas.openxmlformats.org/drawingml/2006/main">
               <a:ext uri="{FF2B5EF4-FFF2-40B4-BE49-F238E27FC236}">
-                <a16:creationId xmlns:a16="http://schemas.microsoft.com/office/drawing/2014/main" id="{D4C11710-DBAF-4109-A535-1371467A13EE}"/>
+                <a16:creationId xmlns:a16="http://schemas.microsoft.com/office/drawing/2014/main" id="{D4084D58-94D2-4BF4-937D-EB7DF0B8CA06}"/>
               </a:ext>
             </a:extLst>
           </p:cNvPr>
@@ -16688,7 +16698,7 @@
     </p:spTree>
     <p:extLst>
       <p:ext uri="{BB962C8B-B14F-4D97-AF65-F5344CB8AC3E}">
-        <p14:creationId xmlns:p14="http://schemas.microsoft.com/office/powerpoint/2010/main" val="1257307494"/>
+        <p14:creationId xmlns:p14="http://schemas.microsoft.com/office/powerpoint/2010/main" val="2066834448"/>
       </p:ext>
     </p:extLst>
   </p:cSld>
@@ -16719,7 +16729,7 @@
           <p:cNvPr id="1" name="">
             <a:extLst xmlns:a="http://schemas.openxmlformats.org/drawingml/2006/main">
               <a:ext uri="{FF2B5EF4-FFF2-40B4-BE49-F238E27FC236}">
-                <a16:creationId xmlns:a16="http://schemas.microsoft.com/office/drawing/2014/main" id="{F650AF8C-FFE4-490D-A999-16B40EB9C437}"/>
+                <a16:creationId xmlns:a16="http://schemas.microsoft.com/office/drawing/2014/main" id="{E39D2DA2-0641-4D9E-934F-AE0577D09385}"/>
               </a:ext>
             </a:extLst>
           </p:cNvPr>
@@ -16750,7 +16760,7 @@
           <p:cNvPr id="2" name="">
             <a:extLst xmlns:a="http://schemas.openxmlformats.org/drawingml/2006/main">
               <a:ext uri="{FF2B5EF4-FFF2-40B4-BE49-F238E27FC236}">
-                <a16:creationId xmlns:a16="http://schemas.microsoft.com/office/drawing/2014/main" id="{0E144661-BC86-4B13-B167-A70035D07953}"/>
+                <a16:creationId xmlns:a16="http://schemas.microsoft.com/office/drawing/2014/main" id="{BA8A4F90-582D-43D9-844A-A92CCA2C4642}"/>
               </a:ext>
             </a:extLst>
           </p:cNvPr>
@@ -16806,7 +16816,7 @@
           <p:cNvPr id="3" name="">
             <a:extLst xmlns:a="http://schemas.openxmlformats.org/drawingml/2006/main">
               <a:ext uri="{FF2B5EF4-FFF2-40B4-BE49-F238E27FC236}">
-                <a16:creationId xmlns:a16="http://schemas.microsoft.com/office/drawing/2014/main" id="{56F45499-EC76-4304-B603-180BCD05F564}"/>
+                <a16:creationId xmlns:a16="http://schemas.microsoft.com/office/drawing/2014/main" id="{16FC16FF-A8FA-4CC2-8398-42C1D24F2090}"/>
               </a:ext>
             </a:extLst>
           </p:cNvPr>
@@ -16862,7 +16872,7 @@
           <p:cNvPr id="4" name="">
             <a:extLst xmlns:a="http://schemas.openxmlformats.org/drawingml/2006/main">
               <a:ext uri="{FF2B5EF4-FFF2-40B4-BE49-F238E27FC236}">
-                <a16:creationId xmlns:a16="http://schemas.microsoft.com/office/drawing/2014/main" id="{9612317E-6F63-4552-8F99-432AD9D5881B}"/>
+                <a16:creationId xmlns:a16="http://schemas.microsoft.com/office/drawing/2014/main" id="{BECF3AC8-00AC-42BC-A92C-6F5573C64ED9}"/>
               </a:ext>
             </a:extLst>
           </p:cNvPr>
@@ -16918,7 +16928,7 @@
           <p:cNvPr id="5" name="">
             <a:extLst xmlns:a="http://schemas.openxmlformats.org/drawingml/2006/main">
               <a:ext uri="{FF2B5EF4-FFF2-40B4-BE49-F238E27FC236}">
-                <a16:creationId xmlns:a16="http://schemas.microsoft.com/office/drawing/2014/main" id="{FD0A4269-8932-4BE7-AA8D-3F8EAB49012F}"/>
+                <a16:creationId xmlns:a16="http://schemas.microsoft.com/office/drawing/2014/main" id="{013AC8E7-74FE-424B-AD64-C3A30BC372F0}"/>
               </a:ext>
             </a:extLst>
           </p:cNvPr>
@@ -16974,7 +16984,7 @@
           <p:cNvPr id="6" name="">
             <a:extLst xmlns:a="http://schemas.openxmlformats.org/drawingml/2006/main">
               <a:ext uri="{FF2B5EF4-FFF2-40B4-BE49-F238E27FC236}">
-                <a16:creationId xmlns:a16="http://schemas.microsoft.com/office/drawing/2014/main" id="{120DF5FD-2B43-4C77-9059-6A3CEFD6075A}"/>
+                <a16:creationId xmlns:a16="http://schemas.microsoft.com/office/drawing/2014/main" id="{C89510F7-8DB0-4E19-A842-30B2932EE923}"/>
               </a:ext>
             </a:extLst>
           </p:cNvPr>
@@ -17030,7 +17040,7 @@
           <p:cNvPr id="7" name="">
             <a:extLst xmlns:a="http://schemas.openxmlformats.org/drawingml/2006/main">
               <a:ext uri="{FF2B5EF4-FFF2-40B4-BE49-F238E27FC236}">
-                <a16:creationId xmlns:a16="http://schemas.microsoft.com/office/drawing/2014/main" id="{15D3ECC2-B616-4358-BA0C-5C680B47B438}"/>
+                <a16:creationId xmlns:a16="http://schemas.microsoft.com/office/drawing/2014/main" id="{E70DE23F-C198-4BA9-93AD-B1B270F284DE}"/>
               </a:ext>
             </a:extLst>
           </p:cNvPr>
@@ -17061,7 +17071,7 @@
           <p:cNvPr id="8" name="">
             <a:extLst xmlns:a="http://schemas.openxmlformats.org/drawingml/2006/main">
               <a:ext uri="{FF2B5EF4-FFF2-40B4-BE49-F238E27FC236}">
-                <a16:creationId xmlns:a16="http://schemas.microsoft.com/office/drawing/2014/main" id="{0DB622D7-10DB-4ACE-B696-EE1378B5761E}"/>
+                <a16:creationId xmlns:a16="http://schemas.microsoft.com/office/drawing/2014/main" id="{F2BDBC0A-7BA6-4050-BF61-520DE5656B36}"/>
               </a:ext>
             </a:extLst>
           </p:cNvPr>
@@ -17117,7 +17127,7 @@
           <p:cNvPr id="9" name="">
             <a:extLst xmlns:a="http://schemas.openxmlformats.org/drawingml/2006/main">
               <a:ext uri="{FF2B5EF4-FFF2-40B4-BE49-F238E27FC236}">
-                <a16:creationId xmlns:a16="http://schemas.microsoft.com/office/drawing/2014/main" id="{E6D0CBE2-3E20-4412-A426-5061DE7ACF94}"/>
+                <a16:creationId xmlns:a16="http://schemas.microsoft.com/office/drawing/2014/main" id="{2DE3DCC8-3760-4278-914C-AD015A37C173}"/>
               </a:ext>
             </a:extLst>
           </p:cNvPr>
@@ -17173,7 +17183,7 @@
           <p:cNvPr id="10" name="">
             <a:extLst xmlns:a="http://schemas.openxmlformats.org/drawingml/2006/main">
               <a:ext uri="{FF2B5EF4-FFF2-40B4-BE49-F238E27FC236}">
-                <a16:creationId xmlns:a16="http://schemas.microsoft.com/office/drawing/2014/main" id="{BD9D4D9B-6E06-430E-B999-946DA6037D92}"/>
+                <a16:creationId xmlns:a16="http://schemas.microsoft.com/office/drawing/2014/main" id="{B791B1DF-23E8-426C-AA1A-928667722676}"/>
               </a:ext>
             </a:extLst>
           </p:cNvPr>
@@ -17229,7 +17239,7 @@
           <p:cNvPr id="11" name="">
             <a:extLst xmlns:a="http://schemas.openxmlformats.org/drawingml/2006/main">
               <a:ext uri="{FF2B5EF4-FFF2-40B4-BE49-F238E27FC236}">
-                <a16:creationId xmlns:a16="http://schemas.microsoft.com/office/drawing/2014/main" id="{C91A2FFF-F4EF-4075-9070-F657F492BF35}"/>
+                <a16:creationId xmlns:a16="http://schemas.microsoft.com/office/drawing/2014/main" id="{EE66FCFF-0861-40C5-A94B-96E7915EE355}"/>
               </a:ext>
             </a:extLst>
           </p:cNvPr>
@@ -17260,7 +17270,7 @@
           <p:cNvPr id="12" name="">
             <a:extLst xmlns:a="http://schemas.openxmlformats.org/drawingml/2006/main">
               <a:ext uri="{FF2B5EF4-FFF2-40B4-BE49-F238E27FC236}">
-                <a16:creationId xmlns:a16="http://schemas.microsoft.com/office/drawing/2014/main" id="{1F5E0571-729F-4EBF-97BE-BEACF2FCC587}"/>
+                <a16:creationId xmlns:a16="http://schemas.microsoft.com/office/drawing/2014/main" id="{1245E5EE-54F6-423E-9961-40974A2E4102}"/>
               </a:ext>
             </a:extLst>
           </p:cNvPr>
@@ -17316,7 +17326,7 @@
           <p:cNvPr id="13" name="">
             <a:extLst xmlns:a="http://schemas.openxmlformats.org/drawingml/2006/main">
               <a:ext uri="{FF2B5EF4-FFF2-40B4-BE49-F238E27FC236}">
-                <a16:creationId xmlns:a16="http://schemas.microsoft.com/office/drawing/2014/main" id="{1FDA7A9B-5E2B-420F-B0FC-7B0C9CE8FE75}"/>
+                <a16:creationId xmlns:a16="http://schemas.microsoft.com/office/drawing/2014/main" id="{7BD5DA66-23CE-43F8-8752-4F8E420E5488}"/>
               </a:ext>
             </a:extLst>
           </p:cNvPr>
@@ -17372,7 +17382,7 @@
           <p:cNvPr id="14" name="">
             <a:extLst xmlns:a="http://schemas.openxmlformats.org/drawingml/2006/main">
               <a:ext uri="{FF2B5EF4-FFF2-40B4-BE49-F238E27FC236}">
-                <a16:creationId xmlns:a16="http://schemas.microsoft.com/office/drawing/2014/main" id="{A4C09E9E-93F0-4B13-9B6F-5AA2D75D29EB}"/>
+                <a16:creationId xmlns:a16="http://schemas.microsoft.com/office/drawing/2014/main" id="{0EAE599A-065F-4E6A-A2AF-706D5AF3C603}"/>
               </a:ext>
             </a:extLst>
           </p:cNvPr>
@@ -17428,7 +17438,7 @@
           <p:cNvPr id="15" name="">
             <a:extLst xmlns:a="http://schemas.openxmlformats.org/drawingml/2006/main">
               <a:ext uri="{FF2B5EF4-FFF2-40B4-BE49-F238E27FC236}">
-                <a16:creationId xmlns:a16="http://schemas.microsoft.com/office/drawing/2014/main" id="{C28FE8EB-7895-4AB2-B276-C426D605565F}"/>
+                <a16:creationId xmlns:a16="http://schemas.microsoft.com/office/drawing/2014/main" id="{0C46E04D-743C-4FB6-9749-93031B429869}"/>
               </a:ext>
             </a:extLst>
           </p:cNvPr>
@@ -17463,7 +17473,7 @@
           <p:cNvPr id="16" name="">
             <a:extLst xmlns:a="http://schemas.openxmlformats.org/drawingml/2006/main">
               <a:ext uri="{FF2B5EF4-FFF2-40B4-BE49-F238E27FC236}">
-                <a16:creationId xmlns:a16="http://schemas.microsoft.com/office/drawing/2014/main" id="{E977F550-F5B9-4FCA-8813-994E5ECEE071}"/>
+                <a16:creationId xmlns:a16="http://schemas.microsoft.com/office/drawing/2014/main" id="{E3FA660E-00A7-444E-A3FE-FB3CBADFA0E0}"/>
               </a:ext>
             </a:extLst>
           </p:cNvPr>
@@ -17519,7 +17529,7 @@
           <p:cNvPr id="17" name="">
             <a:extLst xmlns:a="http://schemas.openxmlformats.org/drawingml/2006/main">
               <a:ext uri="{FF2B5EF4-FFF2-40B4-BE49-F238E27FC236}">
-                <a16:creationId xmlns:a16="http://schemas.microsoft.com/office/drawing/2014/main" id="{012120CB-7714-4967-81C8-85B170A37E15}"/>
+                <a16:creationId xmlns:a16="http://schemas.microsoft.com/office/drawing/2014/main" id="{E8B5530C-06CB-4C0A-B466-414C6C8C8BEB}"/>
               </a:ext>
             </a:extLst>
           </p:cNvPr>
@@ -17575,7 +17585,7 @@
           <p:cNvPr id="18" name="">
             <a:extLst xmlns:a="http://schemas.openxmlformats.org/drawingml/2006/main">
               <a:ext uri="{FF2B5EF4-FFF2-40B4-BE49-F238E27FC236}">
-                <a16:creationId xmlns:a16="http://schemas.microsoft.com/office/drawing/2014/main" id="{85B3EFDB-B7BE-4039-93F5-823626461F2A}"/>
+                <a16:creationId xmlns:a16="http://schemas.microsoft.com/office/drawing/2014/main" id="{4672682E-4151-4E8D-A0F9-865C4E4E7850}"/>
               </a:ext>
             </a:extLst>
           </p:cNvPr>
@@ -17629,7 +17639,7 @@
     </p:spTree>
     <p:extLst>
       <p:ext uri="{BB962C8B-B14F-4D97-AF65-F5344CB8AC3E}">
-        <p14:creationId xmlns:p14="http://schemas.microsoft.com/office/powerpoint/2010/main" val="400779737"/>
+        <p14:creationId xmlns:p14="http://schemas.microsoft.com/office/powerpoint/2010/main" val="1864953077"/>
       </p:ext>
     </p:extLst>
   </p:cSld>
@@ -17660,7 +17670,7 @@
           <p:cNvPr id="1" name="">
             <a:extLst xmlns:a="http://schemas.openxmlformats.org/drawingml/2006/main">
               <a:ext uri="{FF2B5EF4-FFF2-40B4-BE49-F238E27FC236}">
-                <a16:creationId xmlns:a16="http://schemas.microsoft.com/office/drawing/2014/main" id="{B654D6E7-7D56-4A5C-9338-2C2D98208CC0}"/>
+                <a16:creationId xmlns:a16="http://schemas.microsoft.com/office/drawing/2014/main" id="{4A0EAB90-EEBE-4C7C-BBBE-242C1C2EF4AC}"/>
               </a:ext>
             </a:extLst>
           </p:cNvPr>
@@ -17691,7 +17701,7 @@
           <p:cNvPr id="2" name="">
             <a:extLst xmlns:a="http://schemas.openxmlformats.org/drawingml/2006/main">
               <a:ext uri="{FF2B5EF4-FFF2-40B4-BE49-F238E27FC236}">
-                <a16:creationId xmlns:a16="http://schemas.microsoft.com/office/drawing/2014/main" id="{13414B5A-6878-4924-B3CB-E3EA9D0B00C7}"/>
+                <a16:creationId xmlns:a16="http://schemas.microsoft.com/office/drawing/2014/main" id="{3BE7FE7B-E415-419A-B073-CF3CCE9A8AE7}"/>
               </a:ext>
             </a:extLst>
           </p:cNvPr>
@@ -17722,7 +17732,7 @@
           <p:cNvPr id="3" name="">
             <a:extLst xmlns:a="http://schemas.openxmlformats.org/drawingml/2006/main">
               <a:ext uri="{FF2B5EF4-FFF2-40B4-BE49-F238E27FC236}">
-                <a16:creationId xmlns:a16="http://schemas.microsoft.com/office/drawing/2014/main" id="{0DE22EF9-F808-43DE-8C46-8600A3DA73D9}"/>
+                <a16:creationId xmlns:a16="http://schemas.microsoft.com/office/drawing/2014/main" id="{2AB1B76C-4F00-47AC-9C5C-5C72BE702AA0}"/>
               </a:ext>
             </a:extLst>
           </p:cNvPr>
@@ -17753,7 +17763,7 @@
           <p:cNvPr id="4" name="">
             <a:extLst xmlns:a="http://schemas.openxmlformats.org/drawingml/2006/main">
               <a:ext uri="{FF2B5EF4-FFF2-40B4-BE49-F238E27FC236}">
-                <a16:creationId xmlns:a16="http://schemas.microsoft.com/office/drawing/2014/main" id="{4B574A89-38AA-43C5-8EFD-2888DE78F6AF}"/>
+                <a16:creationId xmlns:a16="http://schemas.microsoft.com/office/drawing/2014/main" id="{354597E7-9D13-426E-912A-E3639FE8C579}"/>
               </a:ext>
             </a:extLst>
           </p:cNvPr>
@@ -17784,7 +17794,7 @@
           <p:cNvPr id="5" name="">
             <a:extLst xmlns:a="http://schemas.openxmlformats.org/drawingml/2006/main">
               <a:ext uri="{FF2B5EF4-FFF2-40B4-BE49-F238E27FC236}">
-                <a16:creationId xmlns:a16="http://schemas.microsoft.com/office/drawing/2014/main" id="{56EAE06E-1BBC-4F05-81CC-BF7FCDA30BE4}"/>
+                <a16:creationId xmlns:a16="http://schemas.microsoft.com/office/drawing/2014/main" id="{39C99D16-A7BF-4B6B-B389-F121C20EED50}"/>
               </a:ext>
             </a:extLst>
           </p:cNvPr>
@@ -17815,7 +17825,7 @@
           <p:cNvPr id="6" name="">
             <a:extLst xmlns:a="http://schemas.openxmlformats.org/drawingml/2006/main">
               <a:ext uri="{FF2B5EF4-FFF2-40B4-BE49-F238E27FC236}">
-                <a16:creationId xmlns:a16="http://schemas.microsoft.com/office/drawing/2014/main" id="{62A9CE10-7765-48A2-ACE3-13485D52CF8B}"/>
+                <a16:creationId xmlns:a16="http://schemas.microsoft.com/office/drawing/2014/main" id="{E14DEB92-3C9E-4A21-BED6-B3ADE646FD09}"/>
               </a:ext>
             </a:extLst>
           </p:cNvPr>
@@ -17846,7 +17856,7 @@
           <p:cNvPr id="7" name="">
             <a:extLst xmlns:a="http://schemas.openxmlformats.org/drawingml/2006/main">
               <a:ext uri="{FF2B5EF4-FFF2-40B4-BE49-F238E27FC236}">
-                <a16:creationId xmlns:a16="http://schemas.microsoft.com/office/drawing/2014/main" id="{9951AB03-85AC-4601-872C-B57ABB6F62CB}"/>
+                <a16:creationId xmlns:a16="http://schemas.microsoft.com/office/drawing/2014/main" id="{EE2FF0D5-9C06-4E15-BB3F-7FC3C0667926}"/>
               </a:ext>
             </a:extLst>
           </p:cNvPr>
@@ -17877,7 +17887,7 @@
           <p:cNvPr id="8" name="">
             <a:extLst xmlns:a="http://schemas.openxmlformats.org/drawingml/2006/main">
               <a:ext uri="{FF2B5EF4-FFF2-40B4-BE49-F238E27FC236}">
-                <a16:creationId xmlns:a16="http://schemas.microsoft.com/office/drawing/2014/main" id="{75DE9807-0ECC-48A3-86DC-CDEBEF23B616}"/>
+                <a16:creationId xmlns:a16="http://schemas.microsoft.com/office/drawing/2014/main" id="{8BEA2272-4D93-491E-8152-780845B2A1D2}"/>
               </a:ext>
             </a:extLst>
           </p:cNvPr>
@@ -17908,7 +17918,7 @@
           <p:cNvPr id="9" name="">
             <a:extLst xmlns:a="http://schemas.openxmlformats.org/drawingml/2006/main">
               <a:ext uri="{FF2B5EF4-FFF2-40B4-BE49-F238E27FC236}">
-                <a16:creationId xmlns:a16="http://schemas.microsoft.com/office/drawing/2014/main" id="{5E9975E7-B992-43B1-BC6E-84E655AD11E7}"/>
+                <a16:creationId xmlns:a16="http://schemas.microsoft.com/office/drawing/2014/main" id="{5339B755-3F87-400A-AF46-3AA17B389194}"/>
               </a:ext>
             </a:extLst>
           </p:cNvPr>
@@ -17939,7 +17949,7 @@
           <p:cNvPr id="10" name="">
             <a:extLst xmlns:a="http://schemas.openxmlformats.org/drawingml/2006/main">
               <a:ext uri="{FF2B5EF4-FFF2-40B4-BE49-F238E27FC236}">
-                <a16:creationId xmlns:a16="http://schemas.microsoft.com/office/drawing/2014/main" id="{1B219181-F1D8-4B91-93B0-93AA16604313}"/>
+                <a16:creationId xmlns:a16="http://schemas.microsoft.com/office/drawing/2014/main" id="{A5C2634C-3258-4C2C-A706-2EBD09A14411}"/>
               </a:ext>
             </a:extLst>
           </p:cNvPr>
@@ -17970,7 +17980,7 @@
           <p:cNvPr id="11" name="">
             <a:extLst xmlns:a="http://schemas.openxmlformats.org/drawingml/2006/main">
               <a:ext uri="{FF2B5EF4-FFF2-40B4-BE49-F238E27FC236}">
-                <a16:creationId xmlns:a16="http://schemas.microsoft.com/office/drawing/2014/main" id="{8F931877-3CB0-4298-8526-A6F28F830C28}"/>
+                <a16:creationId xmlns:a16="http://schemas.microsoft.com/office/drawing/2014/main" id="{8D8440C7-40E1-4928-9806-928972A3B6E2}"/>
               </a:ext>
             </a:extLst>
           </p:cNvPr>
@@ -18001,7 +18011,7 @@
           <p:cNvPr id="12" name="">
             <a:extLst xmlns:a="http://schemas.openxmlformats.org/drawingml/2006/main">
               <a:ext uri="{FF2B5EF4-FFF2-40B4-BE49-F238E27FC236}">
-                <a16:creationId xmlns:a16="http://schemas.microsoft.com/office/drawing/2014/main" id="{224734C4-28EA-4DA6-8D9A-870398F6B933}"/>
+                <a16:creationId xmlns:a16="http://schemas.microsoft.com/office/drawing/2014/main" id="{65D289DC-EEE7-4C6B-A322-77BEC7484D13}"/>
               </a:ext>
             </a:extLst>
           </p:cNvPr>
@@ -18032,7 +18042,7 @@
           <p:cNvPr id="13" name="">
             <a:extLst xmlns:a="http://schemas.openxmlformats.org/drawingml/2006/main">
               <a:ext uri="{FF2B5EF4-FFF2-40B4-BE49-F238E27FC236}">
-                <a16:creationId xmlns:a16="http://schemas.microsoft.com/office/drawing/2014/main" id="{5FAE64F0-9505-42D2-BE8D-F36DA194A7FA}"/>
+                <a16:creationId xmlns:a16="http://schemas.microsoft.com/office/drawing/2014/main" id="{3A31107C-4C72-4FC1-B3BC-CA08610A1DD0}"/>
               </a:ext>
             </a:extLst>
           </p:cNvPr>
@@ -18063,7 +18073,7 @@
           <p:cNvPr id="14" name="">
             <a:extLst xmlns:a="http://schemas.openxmlformats.org/drawingml/2006/main">
               <a:ext uri="{FF2B5EF4-FFF2-40B4-BE49-F238E27FC236}">
-                <a16:creationId xmlns:a16="http://schemas.microsoft.com/office/drawing/2014/main" id="{628F1EC1-FD9E-4B1A-A64E-C031D932F9E2}"/>
+                <a16:creationId xmlns:a16="http://schemas.microsoft.com/office/drawing/2014/main" id="{F1B0B9F7-D985-4F48-B3BC-6D152A394A5A}"/>
               </a:ext>
             </a:extLst>
           </p:cNvPr>
@@ -18094,7 +18104,7 @@
           <p:cNvPr id="15" name="">
             <a:extLst xmlns:a="http://schemas.openxmlformats.org/drawingml/2006/main">
               <a:ext uri="{FF2B5EF4-FFF2-40B4-BE49-F238E27FC236}">
-                <a16:creationId xmlns:a16="http://schemas.microsoft.com/office/drawing/2014/main" id="{666A062E-253B-44B1-A26D-A14640769BB4}"/>
+                <a16:creationId xmlns:a16="http://schemas.microsoft.com/office/drawing/2014/main" id="{B5E07970-608C-48C1-84E6-B73AD95C75E6}"/>
               </a:ext>
             </a:extLst>
           </p:cNvPr>
@@ -18125,7 +18135,7 @@
           <p:cNvPr id="16" name="">
             <a:extLst xmlns:a="http://schemas.openxmlformats.org/drawingml/2006/main">
               <a:ext uri="{FF2B5EF4-FFF2-40B4-BE49-F238E27FC236}">
-                <a16:creationId xmlns:a16="http://schemas.microsoft.com/office/drawing/2014/main" id="{D73DF104-1FAF-4AC3-9BE6-8E9733C0FA7B}"/>
+                <a16:creationId xmlns:a16="http://schemas.microsoft.com/office/drawing/2014/main" id="{C6499159-43AD-4568-A07D-1E9582B46A08}"/>
               </a:ext>
             </a:extLst>
           </p:cNvPr>
@@ -18156,7 +18166,7 @@
           <p:cNvPr id="17" name="">
             <a:extLst xmlns:a="http://schemas.openxmlformats.org/drawingml/2006/main">
               <a:ext uri="{FF2B5EF4-FFF2-40B4-BE49-F238E27FC236}">
-                <a16:creationId xmlns:a16="http://schemas.microsoft.com/office/drawing/2014/main" id="{0933CBC0-7C18-4D39-94AC-25267F31CA1B}"/>
+                <a16:creationId xmlns:a16="http://schemas.microsoft.com/office/drawing/2014/main" id="{8F8CC169-D4B8-4BF5-8FA3-FD264A1CF33E}"/>
               </a:ext>
             </a:extLst>
           </p:cNvPr>
@@ -18187,7 +18197,7 @@
           <p:cNvPr id="18" name="">
             <a:extLst xmlns:a="http://schemas.openxmlformats.org/drawingml/2006/main">
               <a:ext uri="{FF2B5EF4-FFF2-40B4-BE49-F238E27FC236}">
-                <a16:creationId xmlns:a16="http://schemas.microsoft.com/office/drawing/2014/main" id="{9FD21ED4-A184-4D9C-AC10-D6DBAE995FEC}"/>
+                <a16:creationId xmlns:a16="http://schemas.microsoft.com/office/drawing/2014/main" id="{8177645B-F528-41C6-8978-775C57350987}"/>
               </a:ext>
             </a:extLst>
           </p:cNvPr>
@@ -18218,7 +18228,7 @@
           <p:cNvPr id="19" name="">
             <a:extLst xmlns:a="http://schemas.openxmlformats.org/drawingml/2006/main">
               <a:ext uri="{FF2B5EF4-FFF2-40B4-BE49-F238E27FC236}">
-                <a16:creationId xmlns:a16="http://schemas.microsoft.com/office/drawing/2014/main" id="{AED3497F-189C-4942-A2CB-1AAFDFA526E0}"/>
+                <a16:creationId xmlns:a16="http://schemas.microsoft.com/office/drawing/2014/main" id="{7285E24C-8F94-4EFD-944A-2A38B6308A94}"/>
               </a:ext>
             </a:extLst>
           </p:cNvPr>
@@ -18249,7 +18259,7 @@
           <p:cNvPr id="20" name="">
             <a:extLst xmlns:a="http://schemas.openxmlformats.org/drawingml/2006/main">
               <a:ext uri="{FF2B5EF4-FFF2-40B4-BE49-F238E27FC236}">
-                <a16:creationId xmlns:a16="http://schemas.microsoft.com/office/drawing/2014/main" id="{69733FF2-F4DA-40BE-A5FC-40E87C6E64C4}"/>
+                <a16:creationId xmlns:a16="http://schemas.microsoft.com/office/drawing/2014/main" id="{63584380-1C98-46B7-AA26-BD70E0989D7B}"/>
               </a:ext>
             </a:extLst>
           </p:cNvPr>
@@ -18280,7 +18290,7 @@
           <p:cNvPr id="21" name="">
             <a:extLst xmlns:a="http://schemas.openxmlformats.org/drawingml/2006/main">
               <a:ext uri="{FF2B5EF4-FFF2-40B4-BE49-F238E27FC236}">
-                <a16:creationId xmlns:a16="http://schemas.microsoft.com/office/drawing/2014/main" id="{14628A8A-BAA0-4F36-B3B5-352FF214AB1A}"/>
+                <a16:creationId xmlns:a16="http://schemas.microsoft.com/office/drawing/2014/main" id="{094F04E9-66CB-4884-9FA2-D24EC3268B25}"/>
               </a:ext>
             </a:extLst>
           </p:cNvPr>
@@ -18311,7 +18321,7 @@
           <p:cNvPr id="22" name="">
             <a:extLst xmlns:a="http://schemas.openxmlformats.org/drawingml/2006/main">
               <a:ext uri="{FF2B5EF4-FFF2-40B4-BE49-F238E27FC236}">
-                <a16:creationId xmlns:a16="http://schemas.microsoft.com/office/drawing/2014/main" id="{F3086AD7-FD2C-4C5A-BD65-D34C58ABDFD9}"/>
+                <a16:creationId xmlns:a16="http://schemas.microsoft.com/office/drawing/2014/main" id="{0EEFDD14-6630-4273-83EA-ECF557C748EC}"/>
               </a:ext>
             </a:extLst>
           </p:cNvPr>
@@ -18342,7 +18352,7 @@
           <p:cNvPr id="23" name="">
             <a:extLst xmlns:a="http://schemas.openxmlformats.org/drawingml/2006/main">
               <a:ext uri="{FF2B5EF4-FFF2-40B4-BE49-F238E27FC236}">
-                <a16:creationId xmlns:a16="http://schemas.microsoft.com/office/drawing/2014/main" id="{07B0FBB4-5CB0-4A0D-9238-6E39CC21951F}"/>
+                <a16:creationId xmlns:a16="http://schemas.microsoft.com/office/drawing/2014/main" id="{404FD973-1890-4007-A2FD-5078BA78B1C6}"/>
               </a:ext>
             </a:extLst>
           </p:cNvPr>
@@ -18373,7 +18383,7 @@
           <p:cNvPr id="24" name="">
             <a:extLst xmlns:a="http://schemas.openxmlformats.org/drawingml/2006/main">
               <a:ext uri="{FF2B5EF4-FFF2-40B4-BE49-F238E27FC236}">
-                <a16:creationId xmlns:a16="http://schemas.microsoft.com/office/drawing/2014/main" id="{F5E8D640-758A-4301-9839-75B81CFF1AA5}"/>
+                <a16:creationId xmlns:a16="http://schemas.microsoft.com/office/drawing/2014/main" id="{21EF0B9E-3AC3-499E-B7B6-7A48951EC2FB}"/>
               </a:ext>
             </a:extLst>
           </p:cNvPr>
@@ -18404,7 +18414,7 @@
           <p:cNvPr id="25" name="">
             <a:extLst xmlns:a="http://schemas.openxmlformats.org/drawingml/2006/main">
               <a:ext uri="{FF2B5EF4-FFF2-40B4-BE49-F238E27FC236}">
-                <a16:creationId xmlns:a16="http://schemas.microsoft.com/office/drawing/2014/main" id="{D676E97F-8426-406C-B9C3-761CBF97345C}"/>
+                <a16:creationId xmlns:a16="http://schemas.microsoft.com/office/drawing/2014/main" id="{589186C7-7243-43B2-A530-7061F1058A36}"/>
               </a:ext>
             </a:extLst>
           </p:cNvPr>
@@ -18435,7 +18445,7 @@
           <p:cNvPr id="26" name="">
             <a:extLst xmlns:a="http://schemas.openxmlformats.org/drawingml/2006/main">
               <a:ext uri="{FF2B5EF4-FFF2-40B4-BE49-F238E27FC236}">
-                <a16:creationId xmlns:a16="http://schemas.microsoft.com/office/drawing/2014/main" id="{AEA343BE-F092-4475-BD96-166D0C0935AC}"/>
+                <a16:creationId xmlns:a16="http://schemas.microsoft.com/office/drawing/2014/main" id="{ED6DB74F-405A-4F29-805C-E350B89D03B4}"/>
               </a:ext>
             </a:extLst>
           </p:cNvPr>
@@ -18466,7 +18476,7 @@
           <p:cNvPr id="27" name="">
             <a:extLst xmlns:a="http://schemas.openxmlformats.org/drawingml/2006/main">
               <a:ext uri="{FF2B5EF4-FFF2-40B4-BE49-F238E27FC236}">
-                <a16:creationId xmlns:a16="http://schemas.microsoft.com/office/drawing/2014/main" id="{BFF3A2D6-E739-4FC0-8EA8-2E36C3E867D0}"/>
+                <a16:creationId xmlns:a16="http://schemas.microsoft.com/office/drawing/2014/main" id="{4E356327-552A-4776-80EA-9F16CFE76B48}"/>
               </a:ext>
             </a:extLst>
           </p:cNvPr>
@@ -18497,7 +18507,7 @@
           <p:cNvPr id="28" name="">
             <a:extLst xmlns:a="http://schemas.openxmlformats.org/drawingml/2006/main">
               <a:ext uri="{FF2B5EF4-FFF2-40B4-BE49-F238E27FC236}">
-                <a16:creationId xmlns:a16="http://schemas.microsoft.com/office/drawing/2014/main" id="{C5295FEC-F113-48CB-8095-109115D51868}"/>
+                <a16:creationId xmlns:a16="http://schemas.microsoft.com/office/drawing/2014/main" id="{7A81AA02-3F38-47A1-8650-41C5A49DA9C5}"/>
               </a:ext>
             </a:extLst>
           </p:cNvPr>
@@ -18528,7 +18538,7 @@
           <p:cNvPr id="29" name="">
             <a:extLst xmlns:a="http://schemas.openxmlformats.org/drawingml/2006/main">
               <a:ext uri="{FF2B5EF4-FFF2-40B4-BE49-F238E27FC236}">
-                <a16:creationId xmlns:a16="http://schemas.microsoft.com/office/drawing/2014/main" id="{D1379B06-1980-4A4E-904B-AD4C0C5C9193}"/>
+                <a16:creationId xmlns:a16="http://schemas.microsoft.com/office/drawing/2014/main" id="{9736F0CE-61DA-4EB6-8844-07F457FE75BB}"/>
               </a:ext>
             </a:extLst>
           </p:cNvPr>
@@ -18559,7 +18569,7 @@
           <p:cNvPr id="30" name="">
             <a:extLst xmlns:a="http://schemas.openxmlformats.org/drawingml/2006/main">
               <a:ext uri="{FF2B5EF4-FFF2-40B4-BE49-F238E27FC236}">
-                <a16:creationId xmlns:a16="http://schemas.microsoft.com/office/drawing/2014/main" id="{E1B75D2F-F9FF-4D1C-A703-5FEC14E8F09E}"/>
+                <a16:creationId xmlns:a16="http://schemas.microsoft.com/office/drawing/2014/main" id="{FF58E506-C72E-4196-B620-919AEA7BF82A}"/>
               </a:ext>
             </a:extLst>
           </p:cNvPr>
@@ -18590,7 +18600,7 @@
           <p:cNvPr id="31" name="">
             <a:extLst xmlns:a="http://schemas.openxmlformats.org/drawingml/2006/main">
               <a:ext uri="{FF2B5EF4-FFF2-40B4-BE49-F238E27FC236}">
-                <a16:creationId xmlns:a16="http://schemas.microsoft.com/office/drawing/2014/main" id="{A1D1F2BE-7C69-4EEB-A1D1-C5F142F66227}"/>
+                <a16:creationId xmlns:a16="http://schemas.microsoft.com/office/drawing/2014/main" id="{75B20D04-C7F4-41CB-B3B5-2758AE439B79}"/>
               </a:ext>
             </a:extLst>
           </p:cNvPr>
@@ -18621,7 +18631,7 @@
           <p:cNvPr id="32" name="">
             <a:extLst xmlns:a="http://schemas.openxmlformats.org/drawingml/2006/main">
               <a:ext uri="{FF2B5EF4-FFF2-40B4-BE49-F238E27FC236}">
-                <a16:creationId xmlns:a16="http://schemas.microsoft.com/office/drawing/2014/main" id="{CEF55A6A-079D-4391-8433-AFA17160F60A}"/>
+                <a16:creationId xmlns:a16="http://schemas.microsoft.com/office/drawing/2014/main" id="{2AA07553-D255-44AB-80B5-8301400A134A}"/>
               </a:ext>
             </a:extLst>
           </p:cNvPr>
@@ -18677,7 +18687,7 @@
           <p:cNvPr id="33" name="">
             <a:extLst xmlns:a="http://schemas.openxmlformats.org/drawingml/2006/main">
               <a:ext uri="{FF2B5EF4-FFF2-40B4-BE49-F238E27FC236}">
-                <a16:creationId xmlns:a16="http://schemas.microsoft.com/office/drawing/2014/main" id="{D9423AF8-B93A-4C34-A445-B34868E2963F}"/>
+                <a16:creationId xmlns:a16="http://schemas.microsoft.com/office/drawing/2014/main" id="{35BD50D6-1086-4FA4-8222-D516082E9CD5}"/>
               </a:ext>
             </a:extLst>
           </p:cNvPr>
@@ -18733,7 +18743,7 @@
           <p:cNvPr id="34" name="">
             <a:extLst xmlns:a="http://schemas.openxmlformats.org/drawingml/2006/main">
               <a:ext uri="{FF2B5EF4-FFF2-40B4-BE49-F238E27FC236}">
-                <a16:creationId xmlns:a16="http://schemas.microsoft.com/office/drawing/2014/main" id="{38D83500-7544-4B8C-836D-8E788577871C}"/>
+                <a16:creationId xmlns:a16="http://schemas.microsoft.com/office/drawing/2014/main" id="{9B4D52D6-EFF3-4BDB-9EA8-829E5A5E01A9}"/>
               </a:ext>
             </a:extLst>
           </p:cNvPr>
@@ -18789,7 +18799,7 @@
           <p:cNvPr id="35" name="">
             <a:extLst xmlns:a="http://schemas.openxmlformats.org/drawingml/2006/main">
               <a:ext uri="{FF2B5EF4-FFF2-40B4-BE49-F238E27FC236}">
-                <a16:creationId xmlns:a16="http://schemas.microsoft.com/office/drawing/2014/main" id="{242E3BBF-19D3-4600-B53F-ABB9B3BA0EF8}"/>
+                <a16:creationId xmlns:a16="http://schemas.microsoft.com/office/drawing/2014/main" id="{83470174-D27D-45A9-A807-88EAEC8ADF21}"/>
               </a:ext>
             </a:extLst>
           </p:cNvPr>
@@ -18824,7 +18834,7 @@
           <p:cNvPr id="36" name="">
             <a:extLst xmlns:a="http://schemas.openxmlformats.org/drawingml/2006/main">
               <a:ext uri="{FF2B5EF4-FFF2-40B4-BE49-F238E27FC236}">
-                <a16:creationId xmlns:a16="http://schemas.microsoft.com/office/drawing/2014/main" id="{87CE9313-10CC-4795-ADC9-1492817AA044}"/>
+                <a16:creationId xmlns:a16="http://schemas.microsoft.com/office/drawing/2014/main" id="{1B7CF611-8C52-4684-A5BC-866496FB27C3}"/>
               </a:ext>
             </a:extLst>
           </p:cNvPr>
@@ -18880,7 +18890,7 @@
           <p:cNvPr id="37" name="">
             <a:extLst xmlns:a="http://schemas.openxmlformats.org/drawingml/2006/main">
               <a:ext uri="{FF2B5EF4-FFF2-40B4-BE49-F238E27FC236}">
-                <a16:creationId xmlns:a16="http://schemas.microsoft.com/office/drawing/2014/main" id="{D4582C1A-9D24-489E-8865-73BC2417FEAE}"/>
+                <a16:creationId xmlns:a16="http://schemas.microsoft.com/office/drawing/2014/main" id="{6D018255-1B05-458F-A3B9-24B8EC3B0963}"/>
               </a:ext>
             </a:extLst>
           </p:cNvPr>
@@ -18936,7 +18946,7 @@
           <p:cNvPr id="38" name="">
             <a:extLst xmlns:a="http://schemas.openxmlformats.org/drawingml/2006/main">
               <a:ext uri="{FF2B5EF4-FFF2-40B4-BE49-F238E27FC236}">
-                <a16:creationId xmlns:a16="http://schemas.microsoft.com/office/drawing/2014/main" id="{F960D4B4-22DF-424F-8FE6-68A819EB721A}"/>
+                <a16:creationId xmlns:a16="http://schemas.microsoft.com/office/drawing/2014/main" id="{790D5964-EF54-4182-AEE1-D40885C68C35}"/>
               </a:ext>
             </a:extLst>
           </p:cNvPr>
@@ -18992,7 +19002,7 @@
           <p:cNvPr id="39" name="">
             <a:extLst xmlns:a="http://schemas.openxmlformats.org/drawingml/2006/main">
               <a:ext uri="{FF2B5EF4-FFF2-40B4-BE49-F238E27FC236}">
-                <a16:creationId xmlns:a16="http://schemas.microsoft.com/office/drawing/2014/main" id="{CA80E8D6-18D0-4692-BDC2-1341D88A5313}"/>
+                <a16:creationId xmlns:a16="http://schemas.microsoft.com/office/drawing/2014/main" id="{BD7E8704-46FA-40C5-8DE2-4ABD1477EF82}"/>
               </a:ext>
             </a:extLst>
           </p:cNvPr>
@@ -19023,7 +19033,7 @@
           <p:cNvPr id="40" name="">
             <a:extLst xmlns:a="http://schemas.openxmlformats.org/drawingml/2006/main">
               <a:ext uri="{FF2B5EF4-FFF2-40B4-BE49-F238E27FC236}">
-                <a16:creationId xmlns:a16="http://schemas.microsoft.com/office/drawing/2014/main" id="{983421C4-3055-412A-BCE5-D7B6C86CAE1D}"/>
+                <a16:creationId xmlns:a16="http://schemas.microsoft.com/office/drawing/2014/main" id="{EE0A7967-56EF-434A-87A9-0B41F9D99306}"/>
               </a:ext>
             </a:extLst>
           </p:cNvPr>
@@ -19056,7 +19066,7 @@
           <p:cNvPr id="41" name="">
             <a:extLst xmlns:a="http://schemas.openxmlformats.org/drawingml/2006/main">
               <a:ext uri="{FF2B5EF4-FFF2-40B4-BE49-F238E27FC236}">
-                <a16:creationId xmlns:a16="http://schemas.microsoft.com/office/drawing/2014/main" id="{F582980D-6FCE-4A49-904A-586EE8B9D8EE}"/>
+                <a16:creationId xmlns:a16="http://schemas.microsoft.com/office/drawing/2014/main" id="{6FBA5A4C-DB03-4EF5-93EC-ED005565F9C8}"/>
               </a:ext>
             </a:extLst>
           </p:cNvPr>
@@ -19091,7 +19101,7 @@
           <p:cNvPr id="42" name="">
             <a:extLst xmlns:a="http://schemas.openxmlformats.org/drawingml/2006/main">
               <a:ext uri="{FF2B5EF4-FFF2-40B4-BE49-F238E27FC236}">
-                <a16:creationId xmlns:a16="http://schemas.microsoft.com/office/drawing/2014/main" id="{A629E4BB-4916-400A-8322-C6D3A9D8288D}"/>
+                <a16:creationId xmlns:a16="http://schemas.microsoft.com/office/drawing/2014/main" id="{F6FBDF69-C810-42D8-AECA-E15EA434354C}"/>
               </a:ext>
             </a:extLst>
           </p:cNvPr>
@@ -19147,7 +19157,7 @@
           <p:cNvPr id="43" name="">
             <a:extLst xmlns:a="http://schemas.openxmlformats.org/drawingml/2006/main">
               <a:ext uri="{FF2B5EF4-FFF2-40B4-BE49-F238E27FC236}">
-                <a16:creationId xmlns:a16="http://schemas.microsoft.com/office/drawing/2014/main" id="{A40DC4CD-2883-41E1-A505-53394CF20220}"/>
+                <a16:creationId xmlns:a16="http://schemas.microsoft.com/office/drawing/2014/main" id="{6B6CF76B-E6A6-4852-B8E6-E74F4B79F557}"/>
               </a:ext>
             </a:extLst>
           </p:cNvPr>
@@ -19203,7 +19213,7 @@
           <p:cNvPr id="44" name="">
             <a:extLst xmlns:a="http://schemas.openxmlformats.org/drawingml/2006/main">
               <a:ext uri="{FF2B5EF4-FFF2-40B4-BE49-F238E27FC236}">
-                <a16:creationId xmlns:a16="http://schemas.microsoft.com/office/drawing/2014/main" id="{987AC000-A2CA-4129-8343-F171A210F040}"/>
+                <a16:creationId xmlns:a16="http://schemas.microsoft.com/office/drawing/2014/main" id="{3B093218-46CB-45F6-A5B0-C2A7E011B124}"/>
               </a:ext>
             </a:extLst>
           </p:cNvPr>
@@ -19259,7 +19269,7 @@
           <p:cNvPr id="45" name="">
             <a:extLst xmlns:a="http://schemas.openxmlformats.org/drawingml/2006/main">
               <a:ext uri="{FF2B5EF4-FFF2-40B4-BE49-F238E27FC236}">
-                <a16:creationId xmlns:a16="http://schemas.microsoft.com/office/drawing/2014/main" id="{BD98760E-F30A-4CD4-9A81-C54B0F9AE116}"/>
+                <a16:creationId xmlns:a16="http://schemas.microsoft.com/office/drawing/2014/main" id="{B486DA6E-566C-481A-AB60-C7E041941795}"/>
               </a:ext>
             </a:extLst>
           </p:cNvPr>
@@ -19290,7 +19300,7 @@
           <p:cNvPr id="46" name="">
             <a:extLst xmlns:a="http://schemas.openxmlformats.org/drawingml/2006/main">
               <a:ext uri="{FF2B5EF4-FFF2-40B4-BE49-F238E27FC236}">
-                <a16:creationId xmlns:a16="http://schemas.microsoft.com/office/drawing/2014/main" id="{5F07CFEE-F4C2-4052-BE56-820D4AEC7AD5}"/>
+                <a16:creationId xmlns:a16="http://schemas.microsoft.com/office/drawing/2014/main" id="{2948C6B7-72DE-4FB1-BC97-28059B360C61}"/>
               </a:ext>
             </a:extLst>
           </p:cNvPr>
@@ -19323,7 +19333,7 @@
           <p:cNvPr id="47" name="">
             <a:extLst xmlns:a="http://schemas.openxmlformats.org/drawingml/2006/main">
               <a:ext uri="{FF2B5EF4-FFF2-40B4-BE49-F238E27FC236}">
-                <a16:creationId xmlns:a16="http://schemas.microsoft.com/office/drawing/2014/main" id="{10A99EAB-34C6-4796-A89C-3ACC2C152AB1}"/>
+                <a16:creationId xmlns:a16="http://schemas.microsoft.com/office/drawing/2014/main" id="{E7E43A6E-336C-4837-A3F2-0106CB5FA44C}"/>
               </a:ext>
             </a:extLst>
           </p:cNvPr>
@@ -19358,7 +19368,7 @@
           <p:cNvPr id="48" name="">
             <a:extLst xmlns:a="http://schemas.openxmlformats.org/drawingml/2006/main">
               <a:ext uri="{FF2B5EF4-FFF2-40B4-BE49-F238E27FC236}">
-                <a16:creationId xmlns:a16="http://schemas.microsoft.com/office/drawing/2014/main" id="{FC5DF074-3CA9-4B0B-AF9D-8B4EE5A7BC83}"/>
+                <a16:creationId xmlns:a16="http://schemas.microsoft.com/office/drawing/2014/main" id="{D78D726E-47F2-49EF-967E-4A893574FA43}"/>
               </a:ext>
             </a:extLst>
           </p:cNvPr>
@@ -19414,7 +19424,7 @@
           <p:cNvPr id="49" name="">
             <a:extLst xmlns:a="http://schemas.openxmlformats.org/drawingml/2006/main">
               <a:ext uri="{FF2B5EF4-FFF2-40B4-BE49-F238E27FC236}">
-                <a16:creationId xmlns:a16="http://schemas.microsoft.com/office/drawing/2014/main" id="{1D1C0A17-8BBC-4294-8150-051CA1C53D51}"/>
+                <a16:creationId xmlns:a16="http://schemas.microsoft.com/office/drawing/2014/main" id="{83CC9141-9C9C-44C2-90BF-B8811B26C9E1}"/>
               </a:ext>
             </a:extLst>
           </p:cNvPr>
@@ -19493,7 +19503,7 @@
           <p:cNvPr id="50" name="">
             <a:extLst xmlns:a="http://schemas.openxmlformats.org/drawingml/2006/main">
               <a:ext uri="{FF2B5EF4-FFF2-40B4-BE49-F238E27FC236}">
-                <a16:creationId xmlns:a16="http://schemas.microsoft.com/office/drawing/2014/main" id="{EC606A18-446F-49A6-AFAE-CAE1A5402683}"/>
+                <a16:creationId xmlns:a16="http://schemas.microsoft.com/office/drawing/2014/main" id="{4D500D3B-B269-4159-97DA-6082134BFE24}"/>
               </a:ext>
             </a:extLst>
           </p:cNvPr>
@@ -19549,7 +19559,7 @@
           <p:cNvPr id="51" name="">
             <a:extLst xmlns:a="http://schemas.openxmlformats.org/drawingml/2006/main">
               <a:ext uri="{FF2B5EF4-FFF2-40B4-BE49-F238E27FC236}">
-                <a16:creationId xmlns:a16="http://schemas.microsoft.com/office/drawing/2014/main" id="{1BCD9511-4A53-4BFA-BE34-31F9319CB99E}"/>
+                <a16:creationId xmlns:a16="http://schemas.microsoft.com/office/drawing/2014/main" id="{35A68A59-41B0-4835-A81C-791F12E792F8}"/>
               </a:ext>
             </a:extLst>
           </p:cNvPr>
@@ -19580,7 +19590,7 @@
           <p:cNvPr id="52" name="">
             <a:extLst xmlns:a="http://schemas.openxmlformats.org/drawingml/2006/main">
               <a:ext uri="{FF2B5EF4-FFF2-40B4-BE49-F238E27FC236}">
-                <a16:creationId xmlns:a16="http://schemas.microsoft.com/office/drawing/2014/main" id="{CF084C77-C545-4752-A5C0-F30FDAB49163}"/>
+                <a16:creationId xmlns:a16="http://schemas.microsoft.com/office/drawing/2014/main" id="{0B2F45B1-2CC8-4072-884D-A0559451E251}"/>
               </a:ext>
             </a:extLst>
           </p:cNvPr>
@@ -19613,7 +19623,7 @@
           <p:cNvPr id="53" name="">
             <a:extLst xmlns:a="http://schemas.openxmlformats.org/drawingml/2006/main">
               <a:ext uri="{FF2B5EF4-FFF2-40B4-BE49-F238E27FC236}">
-                <a16:creationId xmlns:a16="http://schemas.microsoft.com/office/drawing/2014/main" id="{D9C9CF92-81A7-4D0F-BDDE-58B34213A452}"/>
+                <a16:creationId xmlns:a16="http://schemas.microsoft.com/office/drawing/2014/main" id="{0430036E-5D56-437E-B5FF-94B3C4619A6B}"/>
               </a:ext>
             </a:extLst>
           </p:cNvPr>
@@ -19648,7 +19658,7 @@
           <p:cNvPr id="54" name="">
             <a:extLst xmlns:a="http://schemas.openxmlformats.org/drawingml/2006/main">
               <a:ext uri="{FF2B5EF4-FFF2-40B4-BE49-F238E27FC236}">
-                <a16:creationId xmlns:a16="http://schemas.microsoft.com/office/drawing/2014/main" id="{EF4B83A7-9370-4BD1-B3C9-5AACBD77B1C7}"/>
+                <a16:creationId xmlns:a16="http://schemas.microsoft.com/office/drawing/2014/main" id="{85429F88-D5C7-4651-A1FE-AB8551F157C6}"/>
               </a:ext>
             </a:extLst>
           </p:cNvPr>
@@ -19704,7 +19714,7 @@
           <p:cNvPr id="55" name="">
             <a:extLst xmlns:a="http://schemas.openxmlformats.org/drawingml/2006/main">
               <a:ext uri="{FF2B5EF4-FFF2-40B4-BE49-F238E27FC236}">
-                <a16:creationId xmlns:a16="http://schemas.microsoft.com/office/drawing/2014/main" id="{B341633D-A7B9-4350-A7B4-A00E6644104D}"/>
+                <a16:creationId xmlns:a16="http://schemas.microsoft.com/office/drawing/2014/main" id="{950FCBFD-FCE6-4A5A-8FC7-A07EB0665480}"/>
               </a:ext>
             </a:extLst>
           </p:cNvPr>
@@ -19760,7 +19770,7 @@
           <p:cNvPr id="56" name="">
             <a:extLst xmlns:a="http://schemas.openxmlformats.org/drawingml/2006/main">
               <a:ext uri="{FF2B5EF4-FFF2-40B4-BE49-F238E27FC236}">
-                <a16:creationId xmlns:a16="http://schemas.microsoft.com/office/drawing/2014/main" id="{5043B5F1-8EEA-40A7-9B1C-5CBD0A300671}"/>
+                <a16:creationId xmlns:a16="http://schemas.microsoft.com/office/drawing/2014/main" id="{B2B8F92C-8561-42EA-8E2A-0D0C14E0AF94}"/>
               </a:ext>
             </a:extLst>
           </p:cNvPr>
@@ -19816,7 +19826,7 @@
           <p:cNvPr id="57" name="">
             <a:extLst xmlns:a="http://schemas.openxmlformats.org/drawingml/2006/main">
               <a:ext uri="{FF2B5EF4-FFF2-40B4-BE49-F238E27FC236}">
-                <a16:creationId xmlns:a16="http://schemas.microsoft.com/office/drawing/2014/main" id="{AB44CE65-F7F8-49E0-B766-6A43FED3F1B6}"/>
+                <a16:creationId xmlns:a16="http://schemas.microsoft.com/office/drawing/2014/main" id="{29D0A65F-A823-4AB1-9E3E-5DFA6BD046BD}"/>
               </a:ext>
             </a:extLst>
           </p:cNvPr>
@@ -19847,7 +19857,7 @@
           <p:cNvPr id="58" name="">
             <a:extLst xmlns:a="http://schemas.openxmlformats.org/drawingml/2006/main">
               <a:ext uri="{FF2B5EF4-FFF2-40B4-BE49-F238E27FC236}">
-                <a16:creationId xmlns:a16="http://schemas.microsoft.com/office/drawing/2014/main" id="{FA3B4A4E-024B-4B04-BE21-FC10A5DAED5E}"/>
+                <a16:creationId xmlns:a16="http://schemas.microsoft.com/office/drawing/2014/main" id="{4DFE82CE-687B-4B1A-8998-C22E136476B7}"/>
               </a:ext>
             </a:extLst>
           </p:cNvPr>
@@ -19880,7 +19890,7 @@
           <p:cNvPr id="59" name="">
             <a:extLst xmlns:a="http://schemas.openxmlformats.org/drawingml/2006/main">
               <a:ext uri="{FF2B5EF4-FFF2-40B4-BE49-F238E27FC236}">
-                <a16:creationId xmlns:a16="http://schemas.microsoft.com/office/drawing/2014/main" id="{2016EF7C-11D5-423F-9782-EF698F3F707C}"/>
+                <a16:creationId xmlns:a16="http://schemas.microsoft.com/office/drawing/2014/main" id="{AEA56520-4343-4503-B9ED-7962F2AA91E6}"/>
               </a:ext>
             </a:extLst>
           </p:cNvPr>
@@ -19915,7 +19925,7 @@
           <p:cNvPr id="60" name="">
             <a:extLst xmlns:a="http://schemas.openxmlformats.org/drawingml/2006/main">
               <a:ext uri="{FF2B5EF4-FFF2-40B4-BE49-F238E27FC236}">
-                <a16:creationId xmlns:a16="http://schemas.microsoft.com/office/drawing/2014/main" id="{A66D480D-932B-40BE-90A3-65DB4B7C1352}"/>
+                <a16:creationId xmlns:a16="http://schemas.microsoft.com/office/drawing/2014/main" id="{881610CB-E826-4578-BEBC-ABCABAE4644A}"/>
               </a:ext>
             </a:extLst>
           </p:cNvPr>
@@ -19971,7 +19981,7 @@
           <p:cNvPr id="61" name="">
             <a:extLst xmlns:a="http://schemas.openxmlformats.org/drawingml/2006/main">
               <a:ext uri="{FF2B5EF4-FFF2-40B4-BE49-F238E27FC236}">
-                <a16:creationId xmlns:a16="http://schemas.microsoft.com/office/drawing/2014/main" id="{09B5D6CD-E42C-459B-A1A6-C3DD77888853}"/>
+                <a16:creationId xmlns:a16="http://schemas.microsoft.com/office/drawing/2014/main" id="{7A0032ED-6501-4946-B906-9FFC3FEF7C50}"/>
               </a:ext>
             </a:extLst>
           </p:cNvPr>
@@ -20027,7 +20037,7 @@
           <p:cNvPr id="62" name="">
             <a:extLst xmlns:a="http://schemas.openxmlformats.org/drawingml/2006/main">
               <a:ext uri="{FF2B5EF4-FFF2-40B4-BE49-F238E27FC236}">
-                <a16:creationId xmlns:a16="http://schemas.microsoft.com/office/drawing/2014/main" id="{14BF32F7-21B6-4021-8CA9-600A2AEB64DE}"/>
+                <a16:creationId xmlns:a16="http://schemas.microsoft.com/office/drawing/2014/main" id="{D771307E-7AC8-45CD-B1C7-8A00F464318C}"/>
               </a:ext>
             </a:extLst>
           </p:cNvPr>
@@ -20083,7 +20093,7 @@
           <p:cNvPr id="63" name="">
             <a:extLst xmlns:a="http://schemas.openxmlformats.org/drawingml/2006/main">
               <a:ext uri="{FF2B5EF4-FFF2-40B4-BE49-F238E27FC236}">
-                <a16:creationId xmlns:a16="http://schemas.microsoft.com/office/drawing/2014/main" id="{9B2FF30E-9B6B-4291-9473-821676E169FB}"/>
+                <a16:creationId xmlns:a16="http://schemas.microsoft.com/office/drawing/2014/main" id="{4F81953C-3D13-44D0-BC4B-C5184C0BC21A}"/>
               </a:ext>
             </a:extLst>
           </p:cNvPr>
@@ -20139,7 +20149,7 @@
           <p:cNvPr id="64" name="">
             <a:extLst xmlns:a="http://schemas.openxmlformats.org/drawingml/2006/main">
               <a:ext uri="{FF2B5EF4-FFF2-40B4-BE49-F238E27FC236}">
-                <a16:creationId xmlns:a16="http://schemas.microsoft.com/office/drawing/2014/main" id="{EB0BA0D2-AA4B-4859-A4FB-6E761C81E170}"/>
+                <a16:creationId xmlns:a16="http://schemas.microsoft.com/office/drawing/2014/main" id="{FDF82001-4DEA-4108-AA77-B3029BABBFBD}"/>
               </a:ext>
             </a:extLst>
           </p:cNvPr>
@@ -20195,7 +20205,7 @@
           <p:cNvPr id="65" name="">
             <a:extLst xmlns:a="http://schemas.openxmlformats.org/drawingml/2006/main">
               <a:ext uri="{FF2B5EF4-FFF2-40B4-BE49-F238E27FC236}">
-                <a16:creationId xmlns:a16="http://schemas.microsoft.com/office/drawing/2014/main" id="{CCC33B52-3F5E-4591-9C77-0F9097334C5D}"/>
+                <a16:creationId xmlns:a16="http://schemas.microsoft.com/office/drawing/2014/main" id="{344BEBDC-D32E-44F2-99F9-B8B671943A59}"/>
               </a:ext>
             </a:extLst>
           </p:cNvPr>
@@ -20249,7 +20259,7 @@
     </p:spTree>
     <p:extLst>
       <p:ext uri="{BB962C8B-B14F-4D97-AF65-F5344CB8AC3E}">
-        <p14:creationId xmlns:p14="http://schemas.microsoft.com/office/powerpoint/2010/main" val="983598622"/>
+        <p14:creationId xmlns:p14="http://schemas.microsoft.com/office/powerpoint/2010/main" val="1264511236"/>
       </p:ext>
     </p:extLst>
   </p:cSld>
@@ -20280,7 +20290,7 @@
           <p:cNvPr id="1" name="">
             <a:extLst xmlns:a="http://schemas.openxmlformats.org/drawingml/2006/main">
               <a:ext uri="{FF2B5EF4-FFF2-40B4-BE49-F238E27FC236}">
-                <a16:creationId xmlns:a16="http://schemas.microsoft.com/office/drawing/2014/main" id="{81B7E471-2956-4688-8D18-EFF68287B295}"/>
+                <a16:creationId xmlns:a16="http://schemas.microsoft.com/office/drawing/2014/main" id="{93B1ADF6-24F8-4398-9324-DADB98EAC3E8}"/>
               </a:ext>
             </a:extLst>
           </p:cNvPr>
@@ -20311,7 +20321,7 @@
           <p:cNvPr id="2" name="">
             <a:extLst xmlns:a="http://schemas.openxmlformats.org/drawingml/2006/main">
               <a:ext uri="{FF2B5EF4-FFF2-40B4-BE49-F238E27FC236}">
-                <a16:creationId xmlns:a16="http://schemas.microsoft.com/office/drawing/2014/main" id="{09CE559C-8A84-4124-A40C-161794619DD1}"/>
+                <a16:creationId xmlns:a16="http://schemas.microsoft.com/office/drawing/2014/main" id="{95AF1616-EE6A-41DD-9477-8AEB7D9D0171}"/>
               </a:ext>
             </a:extLst>
           </p:cNvPr>
@@ -20367,7 +20377,7 @@
           <p:cNvPr id="3" name="">
             <a:extLst xmlns:a="http://schemas.openxmlformats.org/drawingml/2006/main">
               <a:ext uri="{FF2B5EF4-FFF2-40B4-BE49-F238E27FC236}">
-                <a16:creationId xmlns:a16="http://schemas.microsoft.com/office/drawing/2014/main" id="{284E9CC9-D648-4420-9B3C-62BF2805F843}"/>
+                <a16:creationId xmlns:a16="http://schemas.microsoft.com/office/drawing/2014/main" id="{502FF78B-E082-4E5C-BC4B-51C3C33C6013}"/>
               </a:ext>
             </a:extLst>
           </p:cNvPr>
@@ -20423,7 +20433,7 @@
           <p:cNvPr id="4" name="">
             <a:extLst xmlns:a="http://schemas.openxmlformats.org/drawingml/2006/main">
               <a:ext uri="{FF2B5EF4-FFF2-40B4-BE49-F238E27FC236}">
-                <a16:creationId xmlns:a16="http://schemas.microsoft.com/office/drawing/2014/main" id="{CB8F4B10-F3A7-4477-A7E5-6BD8973514AF}"/>
+                <a16:creationId xmlns:a16="http://schemas.microsoft.com/office/drawing/2014/main" id="{5B1F626A-FAF3-4782-91CB-7E80FEBD6E2C}"/>
               </a:ext>
             </a:extLst>
           </p:cNvPr>
@@ -20479,7 +20489,7 @@
           <p:cNvPr id="5" name="">
             <a:extLst xmlns:a="http://schemas.openxmlformats.org/drawingml/2006/main">
               <a:ext uri="{FF2B5EF4-FFF2-40B4-BE49-F238E27FC236}">
-                <a16:creationId xmlns:a16="http://schemas.microsoft.com/office/drawing/2014/main" id="{947202FB-2802-495E-A848-739EF2D0FFD2}"/>
+                <a16:creationId xmlns:a16="http://schemas.microsoft.com/office/drawing/2014/main" id="{000CBE1D-1CC4-4F4D-AB4B-196C38ED43B5}"/>
               </a:ext>
             </a:extLst>
           </p:cNvPr>
@@ -20514,7 +20524,7 @@
           <p:cNvPr id="6" name="">
             <a:extLst xmlns:a="http://schemas.openxmlformats.org/drawingml/2006/main">
               <a:ext uri="{FF2B5EF4-FFF2-40B4-BE49-F238E27FC236}">
-                <a16:creationId xmlns:a16="http://schemas.microsoft.com/office/drawing/2014/main" id="{6F23C06A-E5AA-4C0F-86F1-528091862746}"/>
+                <a16:creationId xmlns:a16="http://schemas.microsoft.com/office/drawing/2014/main" id="{796A0C2F-D4CD-4392-9EB3-0F44EAF0C3AE}"/>
               </a:ext>
             </a:extLst>
           </p:cNvPr>
@@ -20570,7 +20580,7 @@
           <p:cNvPr id="7" name="">
             <a:extLst xmlns:a="http://schemas.openxmlformats.org/drawingml/2006/main">
               <a:ext uri="{FF2B5EF4-FFF2-40B4-BE49-F238E27FC236}">
-                <a16:creationId xmlns:a16="http://schemas.microsoft.com/office/drawing/2014/main" id="{585EF2B1-BF95-4381-A654-FF6F791A32D2}"/>
+                <a16:creationId xmlns:a16="http://schemas.microsoft.com/office/drawing/2014/main" id="{403E631C-2E20-4ADA-A971-C81325F1E3DB}"/>
               </a:ext>
             </a:extLst>
           </p:cNvPr>
@@ -20626,7 +20636,7 @@
           <p:cNvPr id="8" name="">
             <a:extLst xmlns:a="http://schemas.openxmlformats.org/drawingml/2006/main">
               <a:ext uri="{FF2B5EF4-FFF2-40B4-BE49-F238E27FC236}">
-                <a16:creationId xmlns:a16="http://schemas.microsoft.com/office/drawing/2014/main" id="{FC703A3A-FA67-44E6-94EC-73F670C8AC6F}"/>
+                <a16:creationId xmlns:a16="http://schemas.microsoft.com/office/drawing/2014/main" id="{CC611CCC-766F-4CBA-993D-9C75DBE90DD3}"/>
               </a:ext>
             </a:extLst>
           </p:cNvPr>
@@ -20682,7 +20692,7 @@
           <p:cNvPr id="9" name="">
             <a:extLst xmlns:a="http://schemas.openxmlformats.org/drawingml/2006/main">
               <a:ext uri="{FF2B5EF4-FFF2-40B4-BE49-F238E27FC236}">
-                <a16:creationId xmlns:a16="http://schemas.microsoft.com/office/drawing/2014/main" id="{5C07516E-2CB0-4CD4-B826-224EF780D32F}"/>
+                <a16:creationId xmlns:a16="http://schemas.microsoft.com/office/drawing/2014/main" id="{E329F34B-EC1B-4DBE-9A4C-4994547B0DFD}"/>
               </a:ext>
             </a:extLst>
           </p:cNvPr>
@@ -20738,7 +20748,7 @@
           <p:cNvPr id="10" name="">
             <a:extLst xmlns:a="http://schemas.openxmlformats.org/drawingml/2006/main">
               <a:ext uri="{FF2B5EF4-FFF2-40B4-BE49-F238E27FC236}">
-                <a16:creationId xmlns:a16="http://schemas.microsoft.com/office/drawing/2014/main" id="{9B0B7D90-F5DD-400B-B691-532D74C3A728}"/>
+                <a16:creationId xmlns:a16="http://schemas.microsoft.com/office/drawing/2014/main" id="{37A05267-68F2-4560-AB75-5960479AB80A}"/>
               </a:ext>
             </a:extLst>
           </p:cNvPr>
@@ -20773,7 +20783,7 @@
           <p:cNvPr id="11" name="">
             <a:extLst xmlns:a="http://schemas.openxmlformats.org/drawingml/2006/main">
               <a:ext uri="{FF2B5EF4-FFF2-40B4-BE49-F238E27FC236}">
-                <a16:creationId xmlns:a16="http://schemas.microsoft.com/office/drawing/2014/main" id="{6F4BA583-4C4D-44AA-AD8E-562D9BB6DBB6}"/>
+                <a16:creationId xmlns:a16="http://schemas.microsoft.com/office/drawing/2014/main" id="{C03210A4-E4DB-4D56-A687-1FCE42699DB7}"/>
               </a:ext>
             </a:extLst>
           </p:cNvPr>
@@ -20829,7 +20839,7 @@
           <p:cNvPr id="12" name="">
             <a:extLst xmlns:a="http://schemas.openxmlformats.org/drawingml/2006/main">
               <a:ext uri="{FF2B5EF4-FFF2-40B4-BE49-F238E27FC236}">
-                <a16:creationId xmlns:a16="http://schemas.microsoft.com/office/drawing/2014/main" id="{295B8370-DE22-47AC-9495-10269AB3FA9E}"/>
+                <a16:creationId xmlns:a16="http://schemas.microsoft.com/office/drawing/2014/main" id="{3977E036-DA82-4BF5-A2AF-3D5CA7EF568D}"/>
               </a:ext>
             </a:extLst>
           </p:cNvPr>
@@ -20885,7 +20895,7 @@
           <p:cNvPr id="13" name="">
             <a:extLst xmlns:a="http://schemas.openxmlformats.org/drawingml/2006/main">
               <a:ext uri="{FF2B5EF4-FFF2-40B4-BE49-F238E27FC236}">
-                <a16:creationId xmlns:a16="http://schemas.microsoft.com/office/drawing/2014/main" id="{308BC909-64D1-48A8-B4FF-77D8A8EDFA06}"/>
+                <a16:creationId xmlns:a16="http://schemas.microsoft.com/office/drawing/2014/main" id="{E7773450-C837-4708-AE2C-C6E302E290AF}"/>
               </a:ext>
             </a:extLst>
           </p:cNvPr>
@@ -20941,7 +20951,7 @@
           <p:cNvPr id="14" name="">
             <a:extLst xmlns:a="http://schemas.openxmlformats.org/drawingml/2006/main">
               <a:ext uri="{FF2B5EF4-FFF2-40B4-BE49-F238E27FC236}">
-                <a16:creationId xmlns:a16="http://schemas.microsoft.com/office/drawing/2014/main" id="{E703C64D-7315-4ACE-8D78-550842A7B3EF}"/>
+                <a16:creationId xmlns:a16="http://schemas.microsoft.com/office/drawing/2014/main" id="{BF990C66-22B0-4139-A12F-EB1BE45CF240}"/>
               </a:ext>
             </a:extLst>
           </p:cNvPr>
@@ -20997,7 +21007,7 @@
           <p:cNvPr id="15" name="">
             <a:extLst xmlns:a="http://schemas.openxmlformats.org/drawingml/2006/main">
               <a:ext uri="{FF2B5EF4-FFF2-40B4-BE49-F238E27FC236}">
-                <a16:creationId xmlns:a16="http://schemas.microsoft.com/office/drawing/2014/main" id="{2C87A294-6BBF-4FB2-89DE-99351C7D58F6}"/>
+                <a16:creationId xmlns:a16="http://schemas.microsoft.com/office/drawing/2014/main" id="{3C141144-4D59-45A3-8B03-A4073138ADD4}"/>
               </a:ext>
             </a:extLst>
           </p:cNvPr>
@@ -21032,7 +21042,7 @@
           <p:cNvPr id="16" name="">
             <a:extLst xmlns:a="http://schemas.openxmlformats.org/drawingml/2006/main">
               <a:ext uri="{FF2B5EF4-FFF2-40B4-BE49-F238E27FC236}">
-                <a16:creationId xmlns:a16="http://schemas.microsoft.com/office/drawing/2014/main" id="{64848274-7364-4964-89BE-B6BA0876FFF9}"/>
+                <a16:creationId xmlns:a16="http://schemas.microsoft.com/office/drawing/2014/main" id="{7B29CEFC-4876-49AB-AE63-86C1FE4F65D2}"/>
               </a:ext>
             </a:extLst>
           </p:cNvPr>
@@ -21088,7 +21098,7 @@
           <p:cNvPr id="17" name="">
             <a:extLst xmlns:a="http://schemas.openxmlformats.org/drawingml/2006/main">
               <a:ext uri="{FF2B5EF4-FFF2-40B4-BE49-F238E27FC236}">
-                <a16:creationId xmlns:a16="http://schemas.microsoft.com/office/drawing/2014/main" id="{3D829122-F393-449A-AFAE-BC6774AB44E8}"/>
+                <a16:creationId xmlns:a16="http://schemas.microsoft.com/office/drawing/2014/main" id="{DF846B00-0C5C-451A-9063-1F0F73308AB3}"/>
               </a:ext>
             </a:extLst>
           </p:cNvPr>
@@ -21144,7 +21154,7 @@
           <p:cNvPr id="18" name="">
             <a:extLst xmlns:a="http://schemas.openxmlformats.org/drawingml/2006/main">
               <a:ext uri="{FF2B5EF4-FFF2-40B4-BE49-F238E27FC236}">
-                <a16:creationId xmlns:a16="http://schemas.microsoft.com/office/drawing/2014/main" id="{35033FAA-9B3F-499E-9AF3-588BE67231FE}"/>
+                <a16:creationId xmlns:a16="http://schemas.microsoft.com/office/drawing/2014/main" id="{89B0C6D2-3BDC-4B83-96BB-513BC00BF6E6}"/>
               </a:ext>
             </a:extLst>
           </p:cNvPr>
@@ -21200,7 +21210,7 @@
           <p:cNvPr id="19" name="">
             <a:extLst xmlns:a="http://schemas.openxmlformats.org/drawingml/2006/main">
               <a:ext uri="{FF2B5EF4-FFF2-40B4-BE49-F238E27FC236}">
-                <a16:creationId xmlns:a16="http://schemas.microsoft.com/office/drawing/2014/main" id="{1D5FEFB0-BB26-4CCB-A1B0-36C8502592B2}"/>
+                <a16:creationId xmlns:a16="http://schemas.microsoft.com/office/drawing/2014/main" id="{C6A7B3B6-F7A8-43EA-BF18-AD65FB8A2977}"/>
               </a:ext>
             </a:extLst>
           </p:cNvPr>
@@ -21256,7 +21266,7 @@
           <p:cNvPr id="20" name="">
             <a:extLst xmlns:a="http://schemas.openxmlformats.org/drawingml/2006/main">
               <a:ext uri="{FF2B5EF4-FFF2-40B4-BE49-F238E27FC236}">
-                <a16:creationId xmlns:a16="http://schemas.microsoft.com/office/drawing/2014/main" id="{13276E81-E656-4C22-A42F-548FF5623241}"/>
+                <a16:creationId xmlns:a16="http://schemas.microsoft.com/office/drawing/2014/main" id="{16F3EFCE-C2D0-4DBC-8833-EE5F7E806627}"/>
               </a:ext>
             </a:extLst>
           </p:cNvPr>
@@ -21291,7 +21301,7 @@
           <p:cNvPr id="21" name="">
             <a:extLst xmlns:a="http://schemas.openxmlformats.org/drawingml/2006/main">
               <a:ext uri="{FF2B5EF4-FFF2-40B4-BE49-F238E27FC236}">
-                <a16:creationId xmlns:a16="http://schemas.microsoft.com/office/drawing/2014/main" id="{0E28E45C-249C-49A1-8622-D787949C70A9}"/>
+                <a16:creationId xmlns:a16="http://schemas.microsoft.com/office/drawing/2014/main" id="{61274FF8-6721-42A8-8875-6FC6220F2A91}"/>
               </a:ext>
             </a:extLst>
           </p:cNvPr>
@@ -21347,7 +21357,7 @@
           <p:cNvPr id="22" name="">
             <a:extLst xmlns:a="http://schemas.openxmlformats.org/drawingml/2006/main">
               <a:ext uri="{FF2B5EF4-FFF2-40B4-BE49-F238E27FC236}">
-                <a16:creationId xmlns:a16="http://schemas.microsoft.com/office/drawing/2014/main" id="{CDC19842-F28C-41AB-85C6-898F42DBF2DC}"/>
+                <a16:creationId xmlns:a16="http://schemas.microsoft.com/office/drawing/2014/main" id="{FB728243-2E9A-4D24-99C7-C7520A424E28}"/>
               </a:ext>
             </a:extLst>
           </p:cNvPr>
@@ -21403,7 +21413,7 @@
           <p:cNvPr id="23" name="">
             <a:extLst xmlns:a="http://schemas.openxmlformats.org/drawingml/2006/main">
               <a:ext uri="{FF2B5EF4-FFF2-40B4-BE49-F238E27FC236}">
-                <a16:creationId xmlns:a16="http://schemas.microsoft.com/office/drawing/2014/main" id="{331360B8-BFA8-4080-824C-3E959834E43E}"/>
+                <a16:creationId xmlns:a16="http://schemas.microsoft.com/office/drawing/2014/main" id="{F8BC7358-B4F7-4C28-84F1-A203F167334C}"/>
               </a:ext>
             </a:extLst>
           </p:cNvPr>
@@ -21459,7 +21469,7 @@
           <p:cNvPr id="24" name="">
             <a:extLst xmlns:a="http://schemas.openxmlformats.org/drawingml/2006/main">
               <a:ext uri="{FF2B5EF4-FFF2-40B4-BE49-F238E27FC236}">
-                <a16:creationId xmlns:a16="http://schemas.microsoft.com/office/drawing/2014/main" id="{0CFCC179-D7F2-48B7-B486-386F33BF71ED}"/>
+                <a16:creationId xmlns:a16="http://schemas.microsoft.com/office/drawing/2014/main" id="{CD984CF1-0884-4A8D-8FED-D91F2EE96529}"/>
               </a:ext>
             </a:extLst>
           </p:cNvPr>
@@ -21515,7 +21525,7 @@
           <p:cNvPr id="25" name="">
             <a:extLst xmlns:a="http://schemas.openxmlformats.org/drawingml/2006/main">
               <a:ext uri="{FF2B5EF4-FFF2-40B4-BE49-F238E27FC236}">
-                <a16:creationId xmlns:a16="http://schemas.microsoft.com/office/drawing/2014/main" id="{4D9A0D0F-2E65-40DF-8BBE-6DCB39559064}"/>
+                <a16:creationId xmlns:a16="http://schemas.microsoft.com/office/drawing/2014/main" id="{E3A44957-C846-4CEB-B20A-48C1F9158A38}"/>
               </a:ext>
             </a:extLst>
           </p:cNvPr>
@@ -21571,7 +21581,7 @@
           <p:cNvPr id="26" name="">
             <a:extLst xmlns:a="http://schemas.openxmlformats.org/drawingml/2006/main">
               <a:ext uri="{FF2B5EF4-FFF2-40B4-BE49-F238E27FC236}">
-                <a16:creationId xmlns:a16="http://schemas.microsoft.com/office/drawing/2014/main" id="{A6ED74F2-47D9-45AB-9F1A-B88A1DC380BF}"/>
+                <a16:creationId xmlns:a16="http://schemas.microsoft.com/office/drawing/2014/main" id="{DF6FD6EA-F8C7-4742-8FD4-4C02641AAB75}"/>
               </a:ext>
             </a:extLst>
           </p:cNvPr>
@@ -21627,7 +21637,7 @@
           <p:cNvPr id="27" name="">
             <a:extLst xmlns:a="http://schemas.openxmlformats.org/drawingml/2006/main">
               <a:ext uri="{FF2B5EF4-FFF2-40B4-BE49-F238E27FC236}">
-                <a16:creationId xmlns:a16="http://schemas.microsoft.com/office/drawing/2014/main" id="{0B12AC89-D329-4019-9169-133B7D3F3ABB}"/>
+                <a16:creationId xmlns:a16="http://schemas.microsoft.com/office/drawing/2014/main" id="{93D37DD9-3187-4F29-BE53-E278DCF65201}"/>
               </a:ext>
             </a:extLst>
           </p:cNvPr>
@@ -21683,7 +21693,7 @@
           <p:cNvPr id="28" name="">
             <a:extLst xmlns:a="http://schemas.openxmlformats.org/drawingml/2006/main">
               <a:ext uri="{FF2B5EF4-FFF2-40B4-BE49-F238E27FC236}">
-                <a16:creationId xmlns:a16="http://schemas.microsoft.com/office/drawing/2014/main" id="{8D93AC46-C24B-4109-9C8D-840CCB08A06E}"/>
+                <a16:creationId xmlns:a16="http://schemas.microsoft.com/office/drawing/2014/main" id="{88656EC8-BEFE-4ADA-B268-E4508592A546}"/>
               </a:ext>
             </a:extLst>
           </p:cNvPr>
@@ -21714,7 +21724,7 @@
           <p:cNvPr id="29" name="">
             <a:extLst xmlns:a="http://schemas.openxmlformats.org/drawingml/2006/main">
               <a:ext uri="{FF2B5EF4-FFF2-40B4-BE49-F238E27FC236}">
-                <a16:creationId xmlns:a16="http://schemas.microsoft.com/office/drawing/2014/main" id="{DB80467D-3B89-449F-99C4-C7CE567362B8}"/>
+                <a16:creationId xmlns:a16="http://schemas.microsoft.com/office/drawing/2014/main" id="{EDEB6B58-7C3A-4E53-8C5A-FCBB90466A9B}"/>
               </a:ext>
             </a:extLst>
           </p:cNvPr>
@@ -21768,7 +21778,7 @@
     </p:spTree>
     <p:extLst>
       <p:ext uri="{BB962C8B-B14F-4D97-AF65-F5344CB8AC3E}">
-        <p14:creationId xmlns:p14="http://schemas.microsoft.com/office/powerpoint/2010/main" val="819175482"/>
+        <p14:creationId xmlns:p14="http://schemas.microsoft.com/office/powerpoint/2010/main" val="1330404821"/>
       </p:ext>
     </p:extLst>
   </p:cSld>
@@ -21799,7 +21809,7 @@
           <p:cNvPr id="1" name="">
             <a:extLst xmlns:a="http://schemas.openxmlformats.org/drawingml/2006/main">
               <a:ext uri="{FF2B5EF4-FFF2-40B4-BE49-F238E27FC236}">
-                <a16:creationId xmlns:a16="http://schemas.microsoft.com/office/drawing/2014/main" id="{21A1C83A-7C4F-4E34-ACE2-EABCAC290D87}"/>
+                <a16:creationId xmlns:a16="http://schemas.microsoft.com/office/drawing/2014/main" id="{563798AA-928E-4319-A31B-18EBD4A52AD0}"/>
               </a:ext>
             </a:extLst>
           </p:cNvPr>
@@ -21830,7 +21840,7 @@
           <p:cNvPr id="2" name="">
             <a:extLst xmlns:a="http://schemas.openxmlformats.org/drawingml/2006/main">
               <a:ext uri="{FF2B5EF4-FFF2-40B4-BE49-F238E27FC236}">
-                <a16:creationId xmlns:a16="http://schemas.microsoft.com/office/drawing/2014/main" id="{9B554298-1103-4883-91AE-8DF26DAD0704}"/>
+                <a16:creationId xmlns:a16="http://schemas.microsoft.com/office/drawing/2014/main" id="{19E424AC-AB16-4C76-A16A-DAC09BF9456B}"/>
               </a:ext>
             </a:extLst>
           </p:cNvPr>
@@ -21861,7 +21871,7 @@
           <p:cNvPr id="3" name="">
             <a:extLst xmlns:a="http://schemas.openxmlformats.org/drawingml/2006/main">
               <a:ext uri="{FF2B5EF4-FFF2-40B4-BE49-F238E27FC236}">
-                <a16:creationId xmlns:a16="http://schemas.microsoft.com/office/drawing/2014/main" id="{A7709713-B56A-42EC-BC90-5718DFDFBA8C}"/>
+                <a16:creationId xmlns:a16="http://schemas.microsoft.com/office/drawing/2014/main" id="{CC397147-9077-4CD6-A84C-63FD2A4CFA39}"/>
               </a:ext>
             </a:extLst>
           </p:cNvPr>
@@ -21892,7 +21902,7 @@
           <p:cNvPr id="4" name="">
             <a:extLst xmlns:a="http://schemas.openxmlformats.org/drawingml/2006/main">
               <a:ext uri="{FF2B5EF4-FFF2-40B4-BE49-F238E27FC236}">
-                <a16:creationId xmlns:a16="http://schemas.microsoft.com/office/drawing/2014/main" id="{BADE142A-39D1-4254-8E62-36571DCDD1FB}"/>
+                <a16:creationId xmlns:a16="http://schemas.microsoft.com/office/drawing/2014/main" id="{C98BDBC1-8567-4632-A969-09BA47A06981}"/>
               </a:ext>
             </a:extLst>
           </p:cNvPr>
@@ -21923,7 +21933,7 @@
           <p:cNvPr id="5" name="">
             <a:extLst xmlns:a="http://schemas.openxmlformats.org/drawingml/2006/main">
               <a:ext uri="{FF2B5EF4-FFF2-40B4-BE49-F238E27FC236}">
-                <a16:creationId xmlns:a16="http://schemas.microsoft.com/office/drawing/2014/main" id="{F8696A02-B797-4DBF-A8F2-D400A23A4674}"/>
+                <a16:creationId xmlns:a16="http://schemas.microsoft.com/office/drawing/2014/main" id="{2AB54714-6F93-4400-BE40-CB82F36AEED0}"/>
               </a:ext>
             </a:extLst>
           </p:cNvPr>
@@ -21954,7 +21964,7 @@
           <p:cNvPr id="6" name="">
             <a:extLst xmlns:a="http://schemas.openxmlformats.org/drawingml/2006/main">
               <a:ext uri="{FF2B5EF4-FFF2-40B4-BE49-F238E27FC236}">
-                <a16:creationId xmlns:a16="http://schemas.microsoft.com/office/drawing/2014/main" id="{177BAB2A-40B2-43BB-9153-781E57F66961}"/>
+                <a16:creationId xmlns:a16="http://schemas.microsoft.com/office/drawing/2014/main" id="{3839B164-DCCE-408D-AE11-91BD6B348A49}"/>
               </a:ext>
             </a:extLst>
           </p:cNvPr>
@@ -21985,7 +21995,7 @@
           <p:cNvPr id="7" name="">
             <a:extLst xmlns:a="http://schemas.openxmlformats.org/drawingml/2006/main">
               <a:ext uri="{FF2B5EF4-FFF2-40B4-BE49-F238E27FC236}">
-                <a16:creationId xmlns:a16="http://schemas.microsoft.com/office/drawing/2014/main" id="{4D1A4FC7-F8DF-421D-87CB-A9DA84A03C04}"/>
+                <a16:creationId xmlns:a16="http://schemas.microsoft.com/office/drawing/2014/main" id="{02B80FCC-B67C-4594-9499-639EE5B51A85}"/>
               </a:ext>
             </a:extLst>
           </p:cNvPr>
@@ -22016,7 +22026,7 @@
           <p:cNvPr id="8" name="">
             <a:extLst xmlns:a="http://schemas.openxmlformats.org/drawingml/2006/main">
               <a:ext uri="{FF2B5EF4-FFF2-40B4-BE49-F238E27FC236}">
-                <a16:creationId xmlns:a16="http://schemas.microsoft.com/office/drawing/2014/main" id="{DCEAFE17-AFFD-48C3-B6E5-A2D12D036132}"/>
+                <a16:creationId xmlns:a16="http://schemas.microsoft.com/office/drawing/2014/main" id="{9E255D1A-3E99-4763-9423-4F89B6592C3A}"/>
               </a:ext>
             </a:extLst>
           </p:cNvPr>
@@ -22047,7 +22057,7 @@
           <p:cNvPr id="9" name="">
             <a:extLst xmlns:a="http://schemas.openxmlformats.org/drawingml/2006/main">
               <a:ext uri="{FF2B5EF4-FFF2-40B4-BE49-F238E27FC236}">
-                <a16:creationId xmlns:a16="http://schemas.microsoft.com/office/drawing/2014/main" id="{79D4C9A6-74D5-4E6A-939D-634B6C29342C}"/>
+                <a16:creationId xmlns:a16="http://schemas.microsoft.com/office/drawing/2014/main" id="{3478E2CB-3B1E-412B-820D-23BD3A5EEB37}"/>
               </a:ext>
             </a:extLst>
           </p:cNvPr>
@@ -22078,7 +22088,7 @@
           <p:cNvPr id="10" name="">
             <a:extLst xmlns:a="http://schemas.openxmlformats.org/drawingml/2006/main">
               <a:ext uri="{FF2B5EF4-FFF2-40B4-BE49-F238E27FC236}">
-                <a16:creationId xmlns:a16="http://schemas.microsoft.com/office/drawing/2014/main" id="{C42C29CD-5F0D-41E2-B39C-EBDA1845B339}"/>
+                <a16:creationId xmlns:a16="http://schemas.microsoft.com/office/drawing/2014/main" id="{D6E2C75E-D7CC-49AD-A71A-CF0EDF860965}"/>
               </a:ext>
             </a:extLst>
           </p:cNvPr>
@@ -22109,7 +22119,7 @@
           <p:cNvPr id="11" name="">
             <a:extLst xmlns:a="http://schemas.openxmlformats.org/drawingml/2006/main">
               <a:ext uri="{FF2B5EF4-FFF2-40B4-BE49-F238E27FC236}">
-                <a16:creationId xmlns:a16="http://schemas.microsoft.com/office/drawing/2014/main" id="{7656BC29-AF33-4F11-BC7D-B02ACB5EB2F2}"/>
+                <a16:creationId xmlns:a16="http://schemas.microsoft.com/office/drawing/2014/main" id="{FD08ED2F-C487-4AA4-88EE-84789B5728E2}"/>
               </a:ext>
             </a:extLst>
           </p:cNvPr>
@@ -22140,7 +22150,7 @@
           <p:cNvPr id="12" name="">
             <a:extLst xmlns:a="http://schemas.openxmlformats.org/drawingml/2006/main">
               <a:ext uri="{FF2B5EF4-FFF2-40B4-BE49-F238E27FC236}">
-                <a16:creationId xmlns:a16="http://schemas.microsoft.com/office/drawing/2014/main" id="{9F0B6783-8AC1-4378-BD7A-7B8960B4FE98}"/>
+                <a16:creationId xmlns:a16="http://schemas.microsoft.com/office/drawing/2014/main" id="{D8DFA520-A7B9-46AC-9781-67F542277A97}"/>
               </a:ext>
             </a:extLst>
           </p:cNvPr>
@@ -22171,7 +22181,7 @@
           <p:cNvPr id="13" name="">
             <a:extLst xmlns:a="http://schemas.openxmlformats.org/drawingml/2006/main">
               <a:ext uri="{FF2B5EF4-FFF2-40B4-BE49-F238E27FC236}">
-                <a16:creationId xmlns:a16="http://schemas.microsoft.com/office/drawing/2014/main" id="{A7E32A5C-DDF9-4BE5-A601-64DF4F7D21EE}"/>
+                <a16:creationId xmlns:a16="http://schemas.microsoft.com/office/drawing/2014/main" id="{4992C687-F2FD-491C-9D95-C4E8FDF724CD}"/>
               </a:ext>
             </a:extLst>
           </p:cNvPr>
@@ -22202,7 +22212,7 @@
           <p:cNvPr id="14" name="">
             <a:extLst xmlns:a="http://schemas.openxmlformats.org/drawingml/2006/main">
               <a:ext uri="{FF2B5EF4-FFF2-40B4-BE49-F238E27FC236}">
-                <a16:creationId xmlns:a16="http://schemas.microsoft.com/office/drawing/2014/main" id="{0ADBEB15-99C8-4F10-8FA8-BE5B8F1600D6}"/>
+                <a16:creationId xmlns:a16="http://schemas.microsoft.com/office/drawing/2014/main" id="{F54CCE25-C252-4CEB-B330-CBF93A01CCC8}"/>
               </a:ext>
             </a:extLst>
           </p:cNvPr>
@@ -22233,7 +22243,7 @@
           <p:cNvPr id="15" name="">
             <a:extLst xmlns:a="http://schemas.openxmlformats.org/drawingml/2006/main">
               <a:ext uri="{FF2B5EF4-FFF2-40B4-BE49-F238E27FC236}">
-                <a16:creationId xmlns:a16="http://schemas.microsoft.com/office/drawing/2014/main" id="{59269586-9EA4-4AA1-A6B1-8F9DEC550998}"/>
+                <a16:creationId xmlns:a16="http://schemas.microsoft.com/office/drawing/2014/main" id="{B8F5EF54-3A19-45E0-9460-A825A5B31AE5}"/>
               </a:ext>
             </a:extLst>
           </p:cNvPr>
@@ -22264,7 +22274,7 @@
           <p:cNvPr id="16" name="">
             <a:extLst xmlns:a="http://schemas.openxmlformats.org/drawingml/2006/main">
               <a:ext uri="{FF2B5EF4-FFF2-40B4-BE49-F238E27FC236}">
-                <a16:creationId xmlns:a16="http://schemas.microsoft.com/office/drawing/2014/main" id="{82EC5A80-521B-45AD-AE20-E071DE405739}"/>
+                <a16:creationId xmlns:a16="http://schemas.microsoft.com/office/drawing/2014/main" id="{993BBFA1-CF34-4FB0-9BC2-3BB7072DF3F5}"/>
               </a:ext>
             </a:extLst>
           </p:cNvPr>
@@ -22295,7 +22305,7 @@
           <p:cNvPr id="17" name="">
             <a:extLst xmlns:a="http://schemas.openxmlformats.org/drawingml/2006/main">
               <a:ext uri="{FF2B5EF4-FFF2-40B4-BE49-F238E27FC236}">
-                <a16:creationId xmlns:a16="http://schemas.microsoft.com/office/drawing/2014/main" id="{924F3A13-720A-4322-B4B8-2D854BE8C2F1}"/>
+                <a16:creationId xmlns:a16="http://schemas.microsoft.com/office/drawing/2014/main" id="{251818E1-C0CF-4C68-9382-CE0120223F99}"/>
               </a:ext>
             </a:extLst>
           </p:cNvPr>
@@ -22326,7 +22336,7 @@
           <p:cNvPr id="18" name="">
             <a:extLst xmlns:a="http://schemas.openxmlformats.org/drawingml/2006/main">
               <a:ext uri="{FF2B5EF4-FFF2-40B4-BE49-F238E27FC236}">
-                <a16:creationId xmlns:a16="http://schemas.microsoft.com/office/drawing/2014/main" id="{E1FB9F93-5C02-422D-A81C-9253B5010A99}"/>
+                <a16:creationId xmlns:a16="http://schemas.microsoft.com/office/drawing/2014/main" id="{7E9D1919-7DFB-40A9-A4DC-3C31B8F4D6FC}"/>
               </a:ext>
             </a:extLst>
           </p:cNvPr>
@@ -22357,7 +22367,7 @@
           <p:cNvPr id="19" name="">
             <a:extLst xmlns:a="http://schemas.openxmlformats.org/drawingml/2006/main">
               <a:ext uri="{FF2B5EF4-FFF2-40B4-BE49-F238E27FC236}">
-                <a16:creationId xmlns:a16="http://schemas.microsoft.com/office/drawing/2014/main" id="{544E937F-F98F-40B0-AF2A-B48EB4AA38D5}"/>
+                <a16:creationId xmlns:a16="http://schemas.microsoft.com/office/drawing/2014/main" id="{A2250ADE-97A9-4AE6-9A8F-F3A6BBCCBD35}"/>
               </a:ext>
             </a:extLst>
           </p:cNvPr>
@@ -22388,7 +22398,7 @@
           <p:cNvPr id="20" name="">
             <a:extLst xmlns:a="http://schemas.openxmlformats.org/drawingml/2006/main">
               <a:ext uri="{FF2B5EF4-FFF2-40B4-BE49-F238E27FC236}">
-                <a16:creationId xmlns:a16="http://schemas.microsoft.com/office/drawing/2014/main" id="{05F9268B-0D63-4461-B64F-D52778781207}"/>
+                <a16:creationId xmlns:a16="http://schemas.microsoft.com/office/drawing/2014/main" id="{BAB62E61-0063-42F0-B377-82347B0E3BD7}"/>
               </a:ext>
             </a:extLst>
           </p:cNvPr>
@@ -22419,7 +22429,7 @@
           <p:cNvPr id="21" name="">
             <a:extLst xmlns:a="http://schemas.openxmlformats.org/drawingml/2006/main">
               <a:ext uri="{FF2B5EF4-FFF2-40B4-BE49-F238E27FC236}">
-                <a16:creationId xmlns:a16="http://schemas.microsoft.com/office/drawing/2014/main" id="{E11C81AE-3CA5-459E-83DA-E8974CB5C557}"/>
+                <a16:creationId xmlns:a16="http://schemas.microsoft.com/office/drawing/2014/main" id="{06740107-28C6-48BB-AF8F-1D411192E96D}"/>
               </a:ext>
             </a:extLst>
           </p:cNvPr>
@@ -22450,7 +22460,7 @@
           <p:cNvPr id="22" name="">
             <a:extLst xmlns:a="http://schemas.openxmlformats.org/drawingml/2006/main">
               <a:ext uri="{FF2B5EF4-FFF2-40B4-BE49-F238E27FC236}">
-                <a16:creationId xmlns:a16="http://schemas.microsoft.com/office/drawing/2014/main" id="{970EFA01-23FB-4196-A059-E2B52C06DF59}"/>
+                <a16:creationId xmlns:a16="http://schemas.microsoft.com/office/drawing/2014/main" id="{8B8BA326-3E3C-40F3-9B32-17D6E411A2C8}"/>
               </a:ext>
             </a:extLst>
           </p:cNvPr>
@@ -22481,7 +22491,7 @@
           <p:cNvPr id="23" name="">
             <a:extLst xmlns:a="http://schemas.openxmlformats.org/drawingml/2006/main">
               <a:ext uri="{FF2B5EF4-FFF2-40B4-BE49-F238E27FC236}">
-                <a16:creationId xmlns:a16="http://schemas.microsoft.com/office/drawing/2014/main" id="{BD9277E9-6EEE-43E9-9DDC-ED876119752B}"/>
+                <a16:creationId xmlns:a16="http://schemas.microsoft.com/office/drawing/2014/main" id="{71997005-A4EF-46FC-9147-78C7B2D99AAD}"/>
               </a:ext>
             </a:extLst>
           </p:cNvPr>
@@ -22512,7 +22522,7 @@
           <p:cNvPr id="24" name="">
             <a:extLst xmlns:a="http://schemas.openxmlformats.org/drawingml/2006/main">
               <a:ext uri="{FF2B5EF4-FFF2-40B4-BE49-F238E27FC236}">
-                <a16:creationId xmlns:a16="http://schemas.microsoft.com/office/drawing/2014/main" id="{D0AC3FE7-86F4-4520-8D98-A4126CDF92F2}"/>
+                <a16:creationId xmlns:a16="http://schemas.microsoft.com/office/drawing/2014/main" id="{E13F8BA9-9E30-4F45-93DF-68DDCB78E54A}"/>
               </a:ext>
             </a:extLst>
           </p:cNvPr>
@@ -22543,7 +22553,7 @@
           <p:cNvPr id="25" name="">
             <a:extLst xmlns:a="http://schemas.openxmlformats.org/drawingml/2006/main">
               <a:ext uri="{FF2B5EF4-FFF2-40B4-BE49-F238E27FC236}">
-                <a16:creationId xmlns:a16="http://schemas.microsoft.com/office/drawing/2014/main" id="{6CAAAAA9-BB8D-4961-B5E3-8798A370EE1A}"/>
+                <a16:creationId xmlns:a16="http://schemas.microsoft.com/office/drawing/2014/main" id="{4977698F-4D16-4492-A602-08879D7E027F}"/>
               </a:ext>
             </a:extLst>
           </p:cNvPr>
@@ -22574,7 +22584,7 @@
           <p:cNvPr id="26" name="">
             <a:extLst xmlns:a="http://schemas.openxmlformats.org/drawingml/2006/main">
               <a:ext uri="{FF2B5EF4-FFF2-40B4-BE49-F238E27FC236}">
-                <a16:creationId xmlns:a16="http://schemas.microsoft.com/office/drawing/2014/main" id="{5C6895A5-1A1D-4A11-9732-1433DF99BD7A}"/>
+                <a16:creationId xmlns:a16="http://schemas.microsoft.com/office/drawing/2014/main" id="{7504E1CE-B4AE-4805-936D-4D1A8597684B}"/>
               </a:ext>
             </a:extLst>
           </p:cNvPr>
@@ -22605,7 +22615,7 @@
           <p:cNvPr id="27" name="">
             <a:extLst xmlns:a="http://schemas.openxmlformats.org/drawingml/2006/main">
               <a:ext uri="{FF2B5EF4-FFF2-40B4-BE49-F238E27FC236}">
-                <a16:creationId xmlns:a16="http://schemas.microsoft.com/office/drawing/2014/main" id="{A4B41D08-B686-471E-8A59-E7C6848B944D}"/>
+                <a16:creationId xmlns:a16="http://schemas.microsoft.com/office/drawing/2014/main" id="{FFF260C7-AE01-4FA5-9CB6-70871A544EFE}"/>
               </a:ext>
             </a:extLst>
           </p:cNvPr>
@@ -22636,7 +22646,7 @@
           <p:cNvPr id="28" name="">
             <a:extLst xmlns:a="http://schemas.openxmlformats.org/drawingml/2006/main">
               <a:ext uri="{FF2B5EF4-FFF2-40B4-BE49-F238E27FC236}">
-                <a16:creationId xmlns:a16="http://schemas.microsoft.com/office/drawing/2014/main" id="{E274DBF9-D55E-43EB-9991-6FACD89CA86E}"/>
+                <a16:creationId xmlns:a16="http://schemas.microsoft.com/office/drawing/2014/main" id="{26A80460-AC90-44F3-8D95-B614E0ACE9AD}"/>
               </a:ext>
             </a:extLst>
           </p:cNvPr>
@@ -22667,7 +22677,7 @@
           <p:cNvPr id="29" name="">
             <a:extLst xmlns:a="http://schemas.openxmlformats.org/drawingml/2006/main">
               <a:ext uri="{FF2B5EF4-FFF2-40B4-BE49-F238E27FC236}">
-                <a16:creationId xmlns:a16="http://schemas.microsoft.com/office/drawing/2014/main" id="{323AD758-7A40-48C5-9C6E-29C828A3DAC8}"/>
+                <a16:creationId xmlns:a16="http://schemas.microsoft.com/office/drawing/2014/main" id="{41951A84-8C5B-46A6-9021-D600B79DF74F}"/>
               </a:ext>
             </a:extLst>
           </p:cNvPr>
@@ -22698,7 +22708,7 @@
           <p:cNvPr id="30" name="">
             <a:extLst xmlns:a="http://schemas.openxmlformats.org/drawingml/2006/main">
               <a:ext uri="{FF2B5EF4-FFF2-40B4-BE49-F238E27FC236}">
-                <a16:creationId xmlns:a16="http://schemas.microsoft.com/office/drawing/2014/main" id="{4CA869D2-5651-48B9-BF77-671253AC9DFB}"/>
+                <a16:creationId xmlns:a16="http://schemas.microsoft.com/office/drawing/2014/main" id="{97AAEA70-94E5-455D-897F-A245F99B8E3E}"/>
               </a:ext>
             </a:extLst>
           </p:cNvPr>
@@ -22729,7 +22739,7 @@
           <p:cNvPr id="31" name="">
             <a:extLst xmlns:a="http://schemas.openxmlformats.org/drawingml/2006/main">
               <a:ext uri="{FF2B5EF4-FFF2-40B4-BE49-F238E27FC236}">
-                <a16:creationId xmlns:a16="http://schemas.microsoft.com/office/drawing/2014/main" id="{C8B4ED9B-AF30-4AF4-BB81-D36BBE7D2D54}"/>
+                <a16:creationId xmlns:a16="http://schemas.microsoft.com/office/drawing/2014/main" id="{332D936D-8D17-45CA-BF38-F1F26DC934B5}"/>
               </a:ext>
             </a:extLst>
           </p:cNvPr>
@@ -22760,7 +22770,7 @@
           <p:cNvPr id="32" name="">
             <a:extLst xmlns:a="http://schemas.openxmlformats.org/drawingml/2006/main">
               <a:ext uri="{FF2B5EF4-FFF2-40B4-BE49-F238E27FC236}">
-                <a16:creationId xmlns:a16="http://schemas.microsoft.com/office/drawing/2014/main" id="{A615E2A3-F347-40E2-9BD3-CAC78C34B617}"/>
+                <a16:creationId xmlns:a16="http://schemas.microsoft.com/office/drawing/2014/main" id="{FEF804BE-0F8D-4AC8-8ED9-97ED20357E06}"/>
               </a:ext>
             </a:extLst>
           </p:cNvPr>
@@ -22816,7 +22826,7 @@
           <p:cNvPr id="33" name="">
             <a:extLst xmlns:a="http://schemas.openxmlformats.org/drawingml/2006/main">
               <a:ext uri="{FF2B5EF4-FFF2-40B4-BE49-F238E27FC236}">
-                <a16:creationId xmlns:a16="http://schemas.microsoft.com/office/drawing/2014/main" id="{7CECCB97-F27F-4CFA-97F5-90DB45F41899}"/>
+                <a16:creationId xmlns:a16="http://schemas.microsoft.com/office/drawing/2014/main" id="{012D2D25-EA71-4717-9CAF-C877F515BBDB}"/>
               </a:ext>
             </a:extLst>
           </p:cNvPr>
@@ -22872,7 +22882,7 @@
           <p:cNvPr id="34" name="">
             <a:extLst xmlns:a="http://schemas.openxmlformats.org/drawingml/2006/main">
               <a:ext uri="{FF2B5EF4-FFF2-40B4-BE49-F238E27FC236}">
-                <a16:creationId xmlns:a16="http://schemas.microsoft.com/office/drawing/2014/main" id="{7153A5E9-9E1E-437B-8E2E-40338015289D}"/>
+                <a16:creationId xmlns:a16="http://schemas.microsoft.com/office/drawing/2014/main" id="{60937624-AFA6-49C6-BCA6-E60679339F7C}"/>
               </a:ext>
             </a:extLst>
           </p:cNvPr>
@@ -22928,7 +22938,7 @@
           <p:cNvPr id="35" name="">
             <a:extLst xmlns:a="http://schemas.openxmlformats.org/drawingml/2006/main">
               <a:ext uri="{FF2B5EF4-FFF2-40B4-BE49-F238E27FC236}">
-                <a16:creationId xmlns:a16="http://schemas.microsoft.com/office/drawing/2014/main" id="{5A986501-B268-4829-BFD8-91D2EE3EA33D}"/>
+                <a16:creationId xmlns:a16="http://schemas.microsoft.com/office/drawing/2014/main" id="{5D360EF3-8A38-46D4-A071-C2D1FFC58968}"/>
               </a:ext>
             </a:extLst>
           </p:cNvPr>
@@ -22963,7 +22973,7 @@
           <p:cNvPr id="36" name="">
             <a:extLst xmlns:a="http://schemas.openxmlformats.org/drawingml/2006/main">
               <a:ext uri="{FF2B5EF4-FFF2-40B4-BE49-F238E27FC236}">
-                <a16:creationId xmlns:a16="http://schemas.microsoft.com/office/drawing/2014/main" id="{2446B972-044C-45D1-9A12-FCF1543DE954}"/>
+                <a16:creationId xmlns:a16="http://schemas.microsoft.com/office/drawing/2014/main" id="{7650E100-64A4-4544-8657-7EAD05035DED}"/>
               </a:ext>
             </a:extLst>
           </p:cNvPr>
@@ -23019,7 +23029,7 @@
           <p:cNvPr id="37" name="">
             <a:extLst xmlns:a="http://schemas.openxmlformats.org/drawingml/2006/main">
               <a:ext uri="{FF2B5EF4-FFF2-40B4-BE49-F238E27FC236}">
-                <a16:creationId xmlns:a16="http://schemas.microsoft.com/office/drawing/2014/main" id="{90D3153B-5F06-4F73-A697-F42AD4A8FA04}"/>
+                <a16:creationId xmlns:a16="http://schemas.microsoft.com/office/drawing/2014/main" id="{53915C75-D89C-401A-AD72-CDF09A293CE2}"/>
               </a:ext>
             </a:extLst>
           </p:cNvPr>
@@ -23098,7 +23108,7 @@
           <p:cNvPr id="38" name="">
             <a:extLst xmlns:a="http://schemas.openxmlformats.org/drawingml/2006/main">
               <a:ext uri="{FF2B5EF4-FFF2-40B4-BE49-F238E27FC236}">
-                <a16:creationId xmlns:a16="http://schemas.microsoft.com/office/drawing/2014/main" id="{507C4603-7930-4370-BFCA-970B764096E9}"/>
+                <a16:creationId xmlns:a16="http://schemas.microsoft.com/office/drawing/2014/main" id="{E62D62F7-F13C-4D78-AFEA-71D374B00520}"/>
               </a:ext>
             </a:extLst>
           </p:cNvPr>
@@ -23129,7 +23139,7 @@
           <p:cNvPr id="39" name="">
             <a:extLst xmlns:a="http://schemas.openxmlformats.org/drawingml/2006/main">
               <a:ext uri="{FF2B5EF4-FFF2-40B4-BE49-F238E27FC236}">
-                <a16:creationId xmlns:a16="http://schemas.microsoft.com/office/drawing/2014/main" id="{910CC04F-6834-4EB1-B17D-629B602BF160}"/>
+                <a16:creationId xmlns:a16="http://schemas.microsoft.com/office/drawing/2014/main" id="{DFD18502-7D6C-4CE9-8077-280C5AB45734}"/>
               </a:ext>
             </a:extLst>
           </p:cNvPr>
@@ -23164,7 +23174,7 @@
           <p:cNvPr id="40" name="">
             <a:extLst xmlns:a="http://schemas.openxmlformats.org/drawingml/2006/main">
               <a:ext uri="{FF2B5EF4-FFF2-40B4-BE49-F238E27FC236}">
-                <a16:creationId xmlns:a16="http://schemas.microsoft.com/office/drawing/2014/main" id="{463FB7C4-CEA7-481A-A12B-96F6F7D76712}"/>
+                <a16:creationId xmlns:a16="http://schemas.microsoft.com/office/drawing/2014/main" id="{C9493FB7-E326-447F-A649-3499A3408CFC}"/>
               </a:ext>
             </a:extLst>
           </p:cNvPr>
@@ -23220,7 +23230,7 @@
           <p:cNvPr id="41" name="">
             <a:extLst xmlns:a="http://schemas.openxmlformats.org/drawingml/2006/main">
               <a:ext uri="{FF2B5EF4-FFF2-40B4-BE49-F238E27FC236}">
-                <a16:creationId xmlns:a16="http://schemas.microsoft.com/office/drawing/2014/main" id="{7B781ABC-C991-435C-8947-E0507005449D}"/>
+                <a16:creationId xmlns:a16="http://schemas.microsoft.com/office/drawing/2014/main" id="{A8E91675-A408-4023-9A55-F3E33BEFA7A0}"/>
               </a:ext>
             </a:extLst>
           </p:cNvPr>
@@ -23299,7 +23309,7 @@
           <p:cNvPr id="42" name="">
             <a:extLst xmlns:a="http://schemas.openxmlformats.org/drawingml/2006/main">
               <a:ext uri="{FF2B5EF4-FFF2-40B4-BE49-F238E27FC236}">
-                <a16:creationId xmlns:a16="http://schemas.microsoft.com/office/drawing/2014/main" id="{48D6D8C3-9050-42D7-A0F1-00D5A8AAD19E}"/>
+                <a16:creationId xmlns:a16="http://schemas.microsoft.com/office/drawing/2014/main" id="{40004D48-D9E7-4129-B944-EFD6022964FF}"/>
               </a:ext>
             </a:extLst>
           </p:cNvPr>
@@ -23330,7 +23340,7 @@
           <p:cNvPr id="43" name="">
             <a:extLst xmlns:a="http://schemas.openxmlformats.org/drawingml/2006/main">
               <a:ext uri="{FF2B5EF4-FFF2-40B4-BE49-F238E27FC236}">
-                <a16:creationId xmlns:a16="http://schemas.microsoft.com/office/drawing/2014/main" id="{46BDB48A-AD82-49F7-9719-2E60476123A0}"/>
+                <a16:creationId xmlns:a16="http://schemas.microsoft.com/office/drawing/2014/main" id="{D9EFEB50-DA22-4F95-BD55-40FFDA28ECBB}"/>
               </a:ext>
             </a:extLst>
           </p:cNvPr>
@@ -23365,7 +23375,7 @@
           <p:cNvPr id="44" name="">
             <a:extLst xmlns:a="http://schemas.openxmlformats.org/drawingml/2006/main">
               <a:ext uri="{FF2B5EF4-FFF2-40B4-BE49-F238E27FC236}">
-                <a16:creationId xmlns:a16="http://schemas.microsoft.com/office/drawing/2014/main" id="{0EC81F94-3FDB-4FBB-87D5-AACD5AD48748}"/>
+                <a16:creationId xmlns:a16="http://schemas.microsoft.com/office/drawing/2014/main" id="{BCE5C454-F25D-4500-BC45-C16F4DCDD824}"/>
               </a:ext>
             </a:extLst>
           </p:cNvPr>
@@ -23421,7 +23431,7 @@
           <p:cNvPr id="45" name="">
             <a:extLst xmlns:a="http://schemas.openxmlformats.org/drawingml/2006/main">
               <a:ext uri="{FF2B5EF4-FFF2-40B4-BE49-F238E27FC236}">
-                <a16:creationId xmlns:a16="http://schemas.microsoft.com/office/drawing/2014/main" id="{7175496B-3946-4824-BAA4-B7CB8B9C9226}"/>
+                <a16:creationId xmlns:a16="http://schemas.microsoft.com/office/drawing/2014/main" id="{430D8539-0ECE-451C-8808-E74853D54795}"/>
               </a:ext>
             </a:extLst>
           </p:cNvPr>
@@ -23477,7 +23487,7 @@
           <p:cNvPr id="46" name="">
             <a:extLst xmlns:a="http://schemas.openxmlformats.org/drawingml/2006/main">
               <a:ext uri="{FF2B5EF4-FFF2-40B4-BE49-F238E27FC236}">
-                <a16:creationId xmlns:a16="http://schemas.microsoft.com/office/drawing/2014/main" id="{71E67C5D-EC83-49D8-93ED-C31EDBB37440}"/>
+                <a16:creationId xmlns:a16="http://schemas.microsoft.com/office/drawing/2014/main" id="{18FFCFD7-55DB-4D8E-87EB-CE8B6998561E}"/>
               </a:ext>
             </a:extLst>
           </p:cNvPr>
@@ -23508,7 +23518,7 @@
           <p:cNvPr id="47" name="">
             <a:extLst xmlns:a="http://schemas.openxmlformats.org/drawingml/2006/main">
               <a:ext uri="{FF2B5EF4-FFF2-40B4-BE49-F238E27FC236}">
-                <a16:creationId xmlns:a16="http://schemas.microsoft.com/office/drawing/2014/main" id="{5EE9EBA1-42B8-478C-BDF1-43CC329ACEC9}"/>
+                <a16:creationId xmlns:a16="http://schemas.microsoft.com/office/drawing/2014/main" id="{328321A2-5E1E-4B79-A1BE-C4E3D4BB71AD}"/>
               </a:ext>
             </a:extLst>
           </p:cNvPr>
@@ -23543,7 +23553,7 @@
           <p:cNvPr id="48" name="">
             <a:extLst xmlns:a="http://schemas.openxmlformats.org/drawingml/2006/main">
               <a:ext uri="{FF2B5EF4-FFF2-40B4-BE49-F238E27FC236}">
-                <a16:creationId xmlns:a16="http://schemas.microsoft.com/office/drawing/2014/main" id="{6D12F137-3792-402E-8132-011604DD3922}"/>
+                <a16:creationId xmlns:a16="http://schemas.microsoft.com/office/drawing/2014/main" id="{7FB989CD-2852-4610-89BB-D41463199C72}"/>
               </a:ext>
             </a:extLst>
           </p:cNvPr>
@@ -23599,7 +23609,7 @@
           <p:cNvPr id="49" name="">
             <a:extLst xmlns:a="http://schemas.openxmlformats.org/drawingml/2006/main">
               <a:ext uri="{FF2B5EF4-FFF2-40B4-BE49-F238E27FC236}">
-                <a16:creationId xmlns:a16="http://schemas.microsoft.com/office/drawing/2014/main" id="{E45B38E2-F87D-4B91-B91F-A6FB78F90612}"/>
+                <a16:creationId xmlns:a16="http://schemas.microsoft.com/office/drawing/2014/main" id="{E1455A63-8867-47DC-8772-441B63D043A1}"/>
               </a:ext>
             </a:extLst>
           </p:cNvPr>
@@ -23678,7 +23688,7 @@
           <p:cNvPr id="50" name="">
             <a:extLst xmlns:a="http://schemas.openxmlformats.org/drawingml/2006/main">
               <a:ext uri="{FF2B5EF4-FFF2-40B4-BE49-F238E27FC236}">
-                <a16:creationId xmlns:a16="http://schemas.microsoft.com/office/drawing/2014/main" id="{F48BBB8D-6554-4CAC-88F5-715561F663F4}"/>
+                <a16:creationId xmlns:a16="http://schemas.microsoft.com/office/drawing/2014/main" id="{7AA40187-570D-4853-8EEF-A79BEA68BD51}"/>
               </a:ext>
             </a:extLst>
           </p:cNvPr>
@@ -23709,7 +23719,7 @@
           <p:cNvPr id="51" name="">
             <a:extLst xmlns:a="http://schemas.openxmlformats.org/drawingml/2006/main">
               <a:ext uri="{FF2B5EF4-FFF2-40B4-BE49-F238E27FC236}">
-                <a16:creationId xmlns:a16="http://schemas.microsoft.com/office/drawing/2014/main" id="{782ECD26-CA17-4FF8-BA7D-053C5DE2B7DA}"/>
+                <a16:creationId xmlns:a16="http://schemas.microsoft.com/office/drawing/2014/main" id="{3919AD4F-CB63-49A9-AE3A-2BFE5B3AA729}"/>
               </a:ext>
             </a:extLst>
           </p:cNvPr>
@@ -23744,7 +23754,7 @@
           <p:cNvPr id="52" name="">
             <a:extLst xmlns:a="http://schemas.openxmlformats.org/drawingml/2006/main">
               <a:ext uri="{FF2B5EF4-FFF2-40B4-BE49-F238E27FC236}">
-                <a16:creationId xmlns:a16="http://schemas.microsoft.com/office/drawing/2014/main" id="{9CB6E169-B552-497E-93D3-80D3473D524C}"/>
+                <a16:creationId xmlns:a16="http://schemas.microsoft.com/office/drawing/2014/main" id="{BC8E812B-09E2-4355-AB47-AB7B506A5EF5}"/>
               </a:ext>
             </a:extLst>
           </p:cNvPr>
@@ -23800,7 +23810,7 @@
           <p:cNvPr id="53" name="">
             <a:extLst xmlns:a="http://schemas.openxmlformats.org/drawingml/2006/main">
               <a:ext uri="{FF2B5EF4-FFF2-40B4-BE49-F238E27FC236}">
-                <a16:creationId xmlns:a16="http://schemas.microsoft.com/office/drawing/2014/main" id="{7A51A06C-8545-41A4-B32F-6268FB82FCBF}"/>
+                <a16:creationId xmlns:a16="http://schemas.microsoft.com/office/drawing/2014/main" id="{8AD5C282-B967-477D-AFA4-92A0674A0CB4}"/>
               </a:ext>
             </a:extLst>
           </p:cNvPr>
@@ -23879,7 +23889,7 @@
           <p:cNvPr id="54" name="">
             <a:extLst xmlns:a="http://schemas.openxmlformats.org/drawingml/2006/main">
               <a:ext uri="{FF2B5EF4-FFF2-40B4-BE49-F238E27FC236}">
-                <a16:creationId xmlns:a16="http://schemas.microsoft.com/office/drawing/2014/main" id="{5CD9CE9E-E560-433D-92A0-144E5AA513DB}"/>
+                <a16:creationId xmlns:a16="http://schemas.microsoft.com/office/drawing/2014/main" id="{695515C7-BE4B-43FA-8507-E8771E6FF5D9}"/>
               </a:ext>
             </a:extLst>
           </p:cNvPr>
@@ -23910,7 +23920,7 @@
           <p:cNvPr id="55" name="">
             <a:extLst xmlns:a="http://schemas.openxmlformats.org/drawingml/2006/main">
               <a:ext uri="{FF2B5EF4-FFF2-40B4-BE49-F238E27FC236}">
-                <a16:creationId xmlns:a16="http://schemas.microsoft.com/office/drawing/2014/main" id="{97332F62-F487-4B89-A7AA-CF8BF9EA5359}"/>
+                <a16:creationId xmlns:a16="http://schemas.microsoft.com/office/drawing/2014/main" id="{72CA6EFF-A236-4099-85D4-3C6C20DFFA2A}"/>
               </a:ext>
             </a:extLst>
           </p:cNvPr>
@@ -23945,7 +23955,7 @@
           <p:cNvPr id="56" name="">
             <a:extLst xmlns:a="http://schemas.openxmlformats.org/drawingml/2006/main">
               <a:ext uri="{FF2B5EF4-FFF2-40B4-BE49-F238E27FC236}">
-                <a16:creationId xmlns:a16="http://schemas.microsoft.com/office/drawing/2014/main" id="{328AD065-383C-4D8C-A639-F2D880F463A9}"/>
+                <a16:creationId xmlns:a16="http://schemas.microsoft.com/office/drawing/2014/main" id="{4159AA32-3281-449E-A474-278C32E9C68A}"/>
               </a:ext>
             </a:extLst>
           </p:cNvPr>
@@ -24001,7 +24011,7 @@
           <p:cNvPr id="57" name="">
             <a:extLst xmlns:a="http://schemas.openxmlformats.org/drawingml/2006/main">
               <a:ext uri="{FF2B5EF4-FFF2-40B4-BE49-F238E27FC236}">
-                <a16:creationId xmlns:a16="http://schemas.microsoft.com/office/drawing/2014/main" id="{CD614224-CB0C-4877-AF2B-C51B6770B5B1}"/>
+                <a16:creationId xmlns:a16="http://schemas.microsoft.com/office/drawing/2014/main" id="{85B59143-0821-4DAC-B305-144E54A1A69A}"/>
               </a:ext>
             </a:extLst>
           </p:cNvPr>
@@ -24080,7 +24090,7 @@
           <p:cNvPr id="58" name="">
             <a:extLst xmlns:a="http://schemas.openxmlformats.org/drawingml/2006/main">
               <a:ext uri="{FF2B5EF4-FFF2-40B4-BE49-F238E27FC236}">
-                <a16:creationId xmlns:a16="http://schemas.microsoft.com/office/drawing/2014/main" id="{8669E485-E8FD-4167-A707-5EC50D33B1E7}"/>
+                <a16:creationId xmlns:a16="http://schemas.microsoft.com/office/drawing/2014/main" id="{8E89EAE7-78F1-4FE0-B88A-C4DF34D0CBDB}"/>
               </a:ext>
             </a:extLst>
           </p:cNvPr>
@@ -24111,7 +24121,7 @@
           <p:cNvPr id="59" name="">
             <a:extLst xmlns:a="http://schemas.openxmlformats.org/drawingml/2006/main">
               <a:ext uri="{FF2B5EF4-FFF2-40B4-BE49-F238E27FC236}">
-                <a16:creationId xmlns:a16="http://schemas.microsoft.com/office/drawing/2014/main" id="{073E0000-FC4F-4A69-80BF-176BBFB0682A}"/>
+                <a16:creationId xmlns:a16="http://schemas.microsoft.com/office/drawing/2014/main" id="{9266AB43-71E7-4C3F-B2A3-87E9BDB1DBEA}"/>
               </a:ext>
             </a:extLst>
           </p:cNvPr>
@@ -24146,7 +24156,7 @@
           <p:cNvPr id="60" name="">
             <a:extLst xmlns:a="http://schemas.openxmlformats.org/drawingml/2006/main">
               <a:ext uri="{FF2B5EF4-FFF2-40B4-BE49-F238E27FC236}">
-                <a16:creationId xmlns:a16="http://schemas.microsoft.com/office/drawing/2014/main" id="{A705D9BB-FDF5-4AFA-8DC4-798BC750B969}"/>
+                <a16:creationId xmlns:a16="http://schemas.microsoft.com/office/drawing/2014/main" id="{70DD58C0-F0B3-4B29-91F5-A9581D1FC56A}"/>
               </a:ext>
             </a:extLst>
           </p:cNvPr>
@@ -24202,7 +24212,7 @@
           <p:cNvPr id="61" name="">
             <a:extLst xmlns:a="http://schemas.openxmlformats.org/drawingml/2006/main">
               <a:ext uri="{FF2B5EF4-FFF2-40B4-BE49-F238E27FC236}">
-                <a16:creationId xmlns:a16="http://schemas.microsoft.com/office/drawing/2014/main" id="{1B3B89B4-5629-4FE3-B8EB-44E0CC07D4E6}"/>
+                <a16:creationId xmlns:a16="http://schemas.microsoft.com/office/drawing/2014/main" id="{570E90D1-86C6-4E2F-9FA4-6476C9AC5F21}"/>
               </a:ext>
             </a:extLst>
           </p:cNvPr>
@@ -24258,7 +24268,7 @@
           <p:cNvPr id="62" name="">
             <a:extLst xmlns:a="http://schemas.openxmlformats.org/drawingml/2006/main">
               <a:ext uri="{FF2B5EF4-FFF2-40B4-BE49-F238E27FC236}">
-                <a16:creationId xmlns:a16="http://schemas.microsoft.com/office/drawing/2014/main" id="{A067DDB2-B917-4EEA-B0F8-233C5825D8BB}"/>
+                <a16:creationId xmlns:a16="http://schemas.microsoft.com/office/drawing/2014/main" id="{19E23878-8B87-4DA6-B229-920D4957BF7B}"/>
               </a:ext>
             </a:extLst>
           </p:cNvPr>
@@ -24293,7 +24303,7 @@
           <p:cNvPr id="63" name="">
             <a:extLst xmlns:a="http://schemas.openxmlformats.org/drawingml/2006/main">
               <a:ext uri="{FF2B5EF4-FFF2-40B4-BE49-F238E27FC236}">
-                <a16:creationId xmlns:a16="http://schemas.microsoft.com/office/drawing/2014/main" id="{70451985-A73E-4EB7-8FEC-222625275DE9}"/>
+                <a16:creationId xmlns:a16="http://schemas.microsoft.com/office/drawing/2014/main" id="{897CE0F9-EE2A-4276-B96A-8A3E8367D14F}"/>
               </a:ext>
             </a:extLst>
           </p:cNvPr>
@@ -24349,7 +24359,7 @@
           <p:cNvPr id="64" name="">
             <a:extLst xmlns:a="http://schemas.openxmlformats.org/drawingml/2006/main">
               <a:ext uri="{FF2B5EF4-FFF2-40B4-BE49-F238E27FC236}">
-                <a16:creationId xmlns:a16="http://schemas.microsoft.com/office/drawing/2014/main" id="{22313428-9988-4AA8-B9F5-DC2B6D9E1A9E}"/>
+                <a16:creationId xmlns:a16="http://schemas.microsoft.com/office/drawing/2014/main" id="{267342B7-BBE9-488C-AD19-C9DBDF14B7AF}"/>
               </a:ext>
             </a:extLst>
           </p:cNvPr>
@@ -24405,7 +24415,7 @@
           <p:cNvPr id="65" name="">
             <a:extLst xmlns:a="http://schemas.openxmlformats.org/drawingml/2006/main">
               <a:ext uri="{FF2B5EF4-FFF2-40B4-BE49-F238E27FC236}">
-                <a16:creationId xmlns:a16="http://schemas.microsoft.com/office/drawing/2014/main" id="{1324EEDE-B4EB-4687-8A4A-3A29F0B35ED3}"/>
+                <a16:creationId xmlns:a16="http://schemas.microsoft.com/office/drawing/2014/main" id="{ED39F787-D02F-4C35-A2A8-61E21C8A3984}"/>
               </a:ext>
             </a:extLst>
           </p:cNvPr>
@@ -24440,7 +24450,7 @@
           <p:cNvPr id="66" name="">
             <a:extLst xmlns:a="http://schemas.openxmlformats.org/drawingml/2006/main">
               <a:ext uri="{FF2B5EF4-FFF2-40B4-BE49-F238E27FC236}">
-                <a16:creationId xmlns:a16="http://schemas.microsoft.com/office/drawing/2014/main" id="{67D4AA53-81B9-4758-B714-17B158930F36}"/>
+                <a16:creationId xmlns:a16="http://schemas.microsoft.com/office/drawing/2014/main" id="{DB3D27C0-93BF-48DD-9751-A082EDF8E371}"/>
               </a:ext>
             </a:extLst>
           </p:cNvPr>
@@ -24496,7 +24506,7 @@
           <p:cNvPr id="67" name="">
             <a:extLst xmlns:a="http://schemas.openxmlformats.org/drawingml/2006/main">
               <a:ext uri="{FF2B5EF4-FFF2-40B4-BE49-F238E27FC236}">
-                <a16:creationId xmlns:a16="http://schemas.microsoft.com/office/drawing/2014/main" id="{6E42D7D5-3D0C-49DB-9236-88A6B95E3423}"/>
+                <a16:creationId xmlns:a16="http://schemas.microsoft.com/office/drawing/2014/main" id="{1C103CC0-4D08-4233-95EE-BBA81821EBD0}"/>
               </a:ext>
             </a:extLst>
           </p:cNvPr>
@@ -24552,7 +24562,7 @@
           <p:cNvPr id="68" name="">
             <a:extLst xmlns:a="http://schemas.openxmlformats.org/drawingml/2006/main">
               <a:ext uri="{FF2B5EF4-FFF2-40B4-BE49-F238E27FC236}">
-                <a16:creationId xmlns:a16="http://schemas.microsoft.com/office/drawing/2014/main" id="{404D5B5F-5086-4267-B639-4BEA94795D0C}"/>
+                <a16:creationId xmlns:a16="http://schemas.microsoft.com/office/drawing/2014/main" id="{FBD6A104-ADF5-4C99-A876-F6799D24C707}"/>
               </a:ext>
             </a:extLst>
           </p:cNvPr>
@@ -24608,7 +24618,7 @@
           <p:cNvPr id="69" name="">
             <a:extLst xmlns:a="http://schemas.openxmlformats.org/drawingml/2006/main">
               <a:ext uri="{FF2B5EF4-FFF2-40B4-BE49-F238E27FC236}">
-                <a16:creationId xmlns:a16="http://schemas.microsoft.com/office/drawing/2014/main" id="{040D82A5-B8EC-4311-9838-46467DE3D71B}"/>
+                <a16:creationId xmlns:a16="http://schemas.microsoft.com/office/drawing/2014/main" id="{3AA7855E-A546-4038-994A-89DBD751D480}"/>
               </a:ext>
             </a:extLst>
           </p:cNvPr>
@@ -24662,7 +24672,7 @@
     </p:spTree>
     <p:extLst>
       <p:ext uri="{BB962C8B-B14F-4D97-AF65-F5344CB8AC3E}">
-        <p14:creationId xmlns:p14="http://schemas.microsoft.com/office/powerpoint/2010/main" val="209646348"/>
+        <p14:creationId xmlns:p14="http://schemas.microsoft.com/office/powerpoint/2010/main" val="1909809642"/>
       </p:ext>
     </p:extLst>
   </p:cSld>
@@ -24693,7 +24703,7 @@
           <p:cNvPr id="1" name="">
             <a:extLst xmlns:a="http://schemas.openxmlformats.org/drawingml/2006/main">
               <a:ext uri="{FF2B5EF4-FFF2-40B4-BE49-F238E27FC236}">
-                <a16:creationId xmlns:a16="http://schemas.microsoft.com/office/drawing/2014/main" id="{1807302A-20F0-4E93-8B1E-8E19B67F16AF}"/>
+                <a16:creationId xmlns:a16="http://schemas.microsoft.com/office/drawing/2014/main" id="{E0F7F2EE-04BE-4C34-8CA1-63EA03C8019B}"/>
               </a:ext>
             </a:extLst>
           </p:cNvPr>
@@ -24724,7 +24734,7 @@
           <p:cNvPr id="2" name="">
             <a:extLst xmlns:a="http://schemas.openxmlformats.org/drawingml/2006/main">
               <a:ext uri="{FF2B5EF4-FFF2-40B4-BE49-F238E27FC236}">
-                <a16:creationId xmlns:a16="http://schemas.microsoft.com/office/drawing/2014/main" id="{90CA9C3C-3A3B-4109-BB39-A05F815909AC}"/>
+                <a16:creationId xmlns:a16="http://schemas.microsoft.com/office/drawing/2014/main" id="{65DD3893-9D30-40CB-98E5-E77D0DE79D57}"/>
               </a:ext>
             </a:extLst>
           </p:cNvPr>
@@ -24780,7 +24790,7 @@
           <p:cNvPr id="3" name="">
             <a:extLst xmlns:a="http://schemas.openxmlformats.org/drawingml/2006/main">
               <a:ext uri="{FF2B5EF4-FFF2-40B4-BE49-F238E27FC236}">
-                <a16:creationId xmlns:a16="http://schemas.microsoft.com/office/drawing/2014/main" id="{E8C1DBF7-55C7-4509-B444-913F6925E2D1}"/>
+                <a16:creationId xmlns:a16="http://schemas.microsoft.com/office/drawing/2014/main" id="{FD5F128B-B96C-4D26-8846-DE2C671278C0}"/>
               </a:ext>
             </a:extLst>
           </p:cNvPr>
@@ -24836,7 +24846,7 @@
           <p:cNvPr id="4" name="">
             <a:extLst xmlns:a="http://schemas.openxmlformats.org/drawingml/2006/main">
               <a:ext uri="{FF2B5EF4-FFF2-40B4-BE49-F238E27FC236}">
-                <a16:creationId xmlns:a16="http://schemas.microsoft.com/office/drawing/2014/main" id="{3FB35C60-E69C-4484-953F-A3595C8700E8}"/>
+                <a16:creationId xmlns:a16="http://schemas.microsoft.com/office/drawing/2014/main" id="{98BA7160-A1A1-4389-91B5-8307E72D96E4}"/>
               </a:ext>
             </a:extLst>
           </p:cNvPr>
@@ -24871,7 +24881,7 @@
           <p:cNvPr id="5" name="">
             <a:extLst xmlns:a="http://schemas.openxmlformats.org/drawingml/2006/main">
               <a:ext uri="{FF2B5EF4-FFF2-40B4-BE49-F238E27FC236}">
-                <a16:creationId xmlns:a16="http://schemas.microsoft.com/office/drawing/2014/main" id="{137E472D-A00F-4A1C-AC3F-11DE420CF7C4}"/>
+                <a16:creationId xmlns:a16="http://schemas.microsoft.com/office/drawing/2014/main" id="{D24A2CED-32DE-496C-A0DB-A2CE36E8E608}"/>
               </a:ext>
             </a:extLst>
           </p:cNvPr>
@@ -24927,7 +24937,7 @@
           <p:cNvPr id="6" name="">
             <a:extLst xmlns:a="http://schemas.openxmlformats.org/drawingml/2006/main">
               <a:ext uri="{FF2B5EF4-FFF2-40B4-BE49-F238E27FC236}">
-                <a16:creationId xmlns:a16="http://schemas.microsoft.com/office/drawing/2014/main" id="{3A415378-2579-4A8D-B9CB-9F0E74E7E9EF}"/>
+                <a16:creationId xmlns:a16="http://schemas.microsoft.com/office/drawing/2014/main" id="{CC4F6126-8CAC-4DB8-85C4-14C004261A74}"/>
               </a:ext>
             </a:extLst>
           </p:cNvPr>
@@ -24983,7 +24993,7 @@
           <p:cNvPr id="7" name="">
             <a:extLst xmlns:a="http://schemas.openxmlformats.org/drawingml/2006/main">
               <a:ext uri="{FF2B5EF4-FFF2-40B4-BE49-F238E27FC236}">
-                <a16:creationId xmlns:a16="http://schemas.microsoft.com/office/drawing/2014/main" id="{78704AE3-32F3-4CD2-9AC2-065FD3BAAA66}"/>
+                <a16:creationId xmlns:a16="http://schemas.microsoft.com/office/drawing/2014/main" id="{851F7818-5851-49B6-B5C9-7F6AAEC521E2}"/>
               </a:ext>
             </a:extLst>
           </p:cNvPr>
@@ -25039,7 +25049,7 @@
           <p:cNvPr id="8" name="">
             <a:extLst xmlns:a="http://schemas.openxmlformats.org/drawingml/2006/main">
               <a:ext uri="{FF2B5EF4-FFF2-40B4-BE49-F238E27FC236}">
-                <a16:creationId xmlns:a16="http://schemas.microsoft.com/office/drawing/2014/main" id="{52BFC044-84C5-483F-968D-56540375D65C}"/>
+                <a16:creationId xmlns:a16="http://schemas.microsoft.com/office/drawing/2014/main" id="{D5739D00-23DB-4378-909B-A09DCD662002}"/>
               </a:ext>
             </a:extLst>
           </p:cNvPr>
@@ -25070,7 +25080,7 @@
           <p:cNvPr id="9" name="">
             <a:extLst xmlns:a="http://schemas.openxmlformats.org/drawingml/2006/main">
               <a:ext uri="{FF2B5EF4-FFF2-40B4-BE49-F238E27FC236}">
-                <a16:creationId xmlns:a16="http://schemas.microsoft.com/office/drawing/2014/main" id="{4EF37713-0228-4A99-92A3-BC495B48ED8D}"/>
+                <a16:creationId xmlns:a16="http://schemas.microsoft.com/office/drawing/2014/main" id="{C0633663-19F7-4296-B58A-F8D7D44CB669}"/>
               </a:ext>
             </a:extLst>
           </p:cNvPr>
@@ -25101,7 +25111,7 @@
           <p:cNvPr id="10" name="">
             <a:extLst xmlns:a="http://schemas.openxmlformats.org/drawingml/2006/main">
               <a:ext uri="{FF2B5EF4-FFF2-40B4-BE49-F238E27FC236}">
-                <a16:creationId xmlns:a16="http://schemas.microsoft.com/office/drawing/2014/main" id="{20092838-5D5F-4442-8430-6276716DB242}"/>
+                <a16:creationId xmlns:a16="http://schemas.microsoft.com/office/drawing/2014/main" id="{F9B594AF-8813-440A-856C-CF80E595D6AC}"/>
               </a:ext>
             </a:extLst>
           </p:cNvPr>
@@ -25136,7 +25146,7 @@
           <p:cNvPr id="11" name="">
             <a:extLst xmlns:a="http://schemas.openxmlformats.org/drawingml/2006/main">
               <a:ext uri="{FF2B5EF4-FFF2-40B4-BE49-F238E27FC236}">
-                <a16:creationId xmlns:a16="http://schemas.microsoft.com/office/drawing/2014/main" id="{830FF306-51B6-4B07-957D-95B0D54693C0}"/>
+                <a16:creationId xmlns:a16="http://schemas.microsoft.com/office/drawing/2014/main" id="{5ECAE6B0-7F72-4208-B826-AE3E024D22C0}"/>
               </a:ext>
             </a:extLst>
           </p:cNvPr>
@@ -25192,7 +25202,7 @@
           <p:cNvPr id="12" name="">
             <a:extLst xmlns:a="http://schemas.openxmlformats.org/drawingml/2006/main">
               <a:ext uri="{FF2B5EF4-FFF2-40B4-BE49-F238E27FC236}">
-                <a16:creationId xmlns:a16="http://schemas.microsoft.com/office/drawing/2014/main" id="{66037BE0-7C8A-4288-9FDD-BE028F553C7D}"/>
+                <a16:creationId xmlns:a16="http://schemas.microsoft.com/office/drawing/2014/main" id="{AA449577-F239-4B2B-A888-2DC3A01ED963}"/>
               </a:ext>
             </a:extLst>
           </p:cNvPr>
@@ -25248,7 +25258,7 @@
           <p:cNvPr id="13" name="">
             <a:extLst xmlns:a="http://schemas.openxmlformats.org/drawingml/2006/main">
               <a:ext uri="{FF2B5EF4-FFF2-40B4-BE49-F238E27FC236}">
-                <a16:creationId xmlns:a16="http://schemas.microsoft.com/office/drawing/2014/main" id="{84C8430F-8D92-466F-8862-A4988095AA85}"/>
+                <a16:creationId xmlns:a16="http://schemas.microsoft.com/office/drawing/2014/main" id="{91D9CFC2-D014-4BDB-861C-1E08D4A76C64}"/>
               </a:ext>
             </a:extLst>
           </p:cNvPr>
@@ -25304,7 +25314,7 @@
           <p:cNvPr id="14" name="">
             <a:extLst xmlns:a="http://schemas.openxmlformats.org/drawingml/2006/main">
               <a:ext uri="{FF2B5EF4-FFF2-40B4-BE49-F238E27FC236}">
-                <a16:creationId xmlns:a16="http://schemas.microsoft.com/office/drawing/2014/main" id="{93B48F2B-F727-4366-9556-F500614ED0DB}"/>
+                <a16:creationId xmlns:a16="http://schemas.microsoft.com/office/drawing/2014/main" id="{58AF058E-9819-40B5-87B8-94C91DD3D708}"/>
               </a:ext>
             </a:extLst>
           </p:cNvPr>
@@ -25335,7 +25345,7 @@
           <p:cNvPr id="15" name="">
             <a:extLst xmlns:a="http://schemas.openxmlformats.org/drawingml/2006/main">
               <a:ext uri="{FF2B5EF4-FFF2-40B4-BE49-F238E27FC236}">
-                <a16:creationId xmlns:a16="http://schemas.microsoft.com/office/drawing/2014/main" id="{C92206E4-4F66-48A9-9F33-154119F6C0B6}"/>
+                <a16:creationId xmlns:a16="http://schemas.microsoft.com/office/drawing/2014/main" id="{9181E673-9AC7-45DF-9241-E165EA594B60}"/>
               </a:ext>
             </a:extLst>
           </p:cNvPr>
@@ -25366,7 +25376,7 @@
           <p:cNvPr id="16" name="">
             <a:extLst xmlns:a="http://schemas.openxmlformats.org/drawingml/2006/main">
               <a:ext uri="{FF2B5EF4-FFF2-40B4-BE49-F238E27FC236}">
-                <a16:creationId xmlns:a16="http://schemas.microsoft.com/office/drawing/2014/main" id="{A8AE2F47-6C2B-4537-8B77-2423F0FE9EEC}"/>
+                <a16:creationId xmlns:a16="http://schemas.microsoft.com/office/drawing/2014/main" id="{CE258BA9-1DE8-4729-86B0-85F38F317E9F}"/>
               </a:ext>
             </a:extLst>
           </p:cNvPr>
@@ -25401,7 +25411,7 @@
           <p:cNvPr id="17" name="">
             <a:extLst xmlns:a="http://schemas.openxmlformats.org/drawingml/2006/main">
               <a:ext uri="{FF2B5EF4-FFF2-40B4-BE49-F238E27FC236}">
-                <a16:creationId xmlns:a16="http://schemas.microsoft.com/office/drawing/2014/main" id="{715C95B4-BFBB-457B-A08E-924724E91D9B}"/>
+                <a16:creationId xmlns:a16="http://schemas.microsoft.com/office/drawing/2014/main" id="{18551E6D-9289-4C98-BC99-0E3C0A54BE35}"/>
               </a:ext>
             </a:extLst>
           </p:cNvPr>
@@ -25457,7 +25467,7 @@
           <p:cNvPr id="18" name="">
             <a:extLst xmlns:a="http://schemas.openxmlformats.org/drawingml/2006/main">
               <a:ext uri="{FF2B5EF4-FFF2-40B4-BE49-F238E27FC236}">
-                <a16:creationId xmlns:a16="http://schemas.microsoft.com/office/drawing/2014/main" id="{3B7C4197-EDD0-4421-A31C-24B44C2CDCEC}"/>
+                <a16:creationId xmlns:a16="http://schemas.microsoft.com/office/drawing/2014/main" id="{B3836C96-9168-4A02-BDE7-42C6BD070CE6}"/>
               </a:ext>
             </a:extLst>
           </p:cNvPr>
@@ -25513,7 +25523,7 @@
           <p:cNvPr id="19" name="">
             <a:extLst xmlns:a="http://schemas.openxmlformats.org/drawingml/2006/main">
               <a:ext uri="{FF2B5EF4-FFF2-40B4-BE49-F238E27FC236}">
-                <a16:creationId xmlns:a16="http://schemas.microsoft.com/office/drawing/2014/main" id="{F48AD965-F37C-43C5-995F-6C85D885E324}"/>
+                <a16:creationId xmlns:a16="http://schemas.microsoft.com/office/drawing/2014/main" id="{2C0ACFC7-ADEA-46B6-AAB3-1033E2BA7701}"/>
               </a:ext>
             </a:extLst>
           </p:cNvPr>
@@ -25569,7 +25579,7 @@
           <p:cNvPr id="20" name="">
             <a:extLst xmlns:a="http://schemas.openxmlformats.org/drawingml/2006/main">
               <a:ext uri="{FF2B5EF4-FFF2-40B4-BE49-F238E27FC236}">
-                <a16:creationId xmlns:a16="http://schemas.microsoft.com/office/drawing/2014/main" id="{6B055E00-CD04-47B7-B058-FBDBFE8E85EE}"/>
+                <a16:creationId xmlns:a16="http://schemas.microsoft.com/office/drawing/2014/main" id="{F876BC4D-BE6D-45EB-A5A9-0AE3E9DF8AC2}"/>
               </a:ext>
             </a:extLst>
           </p:cNvPr>
@@ -25600,7 +25610,7 @@
           <p:cNvPr id="21" name="">
             <a:extLst xmlns:a="http://schemas.openxmlformats.org/drawingml/2006/main">
               <a:ext uri="{FF2B5EF4-FFF2-40B4-BE49-F238E27FC236}">
-                <a16:creationId xmlns:a16="http://schemas.microsoft.com/office/drawing/2014/main" id="{E9C7DD16-D7A3-42FD-A759-750136CF9EA3}"/>
+                <a16:creationId xmlns:a16="http://schemas.microsoft.com/office/drawing/2014/main" id="{A17B7286-8652-438F-ABE8-76F6ABD792CC}"/>
               </a:ext>
             </a:extLst>
           </p:cNvPr>
@@ -25635,7 +25645,7 @@
           <p:cNvPr id="22" name="">
             <a:extLst xmlns:a="http://schemas.openxmlformats.org/drawingml/2006/main">
               <a:ext uri="{FF2B5EF4-FFF2-40B4-BE49-F238E27FC236}">
-                <a16:creationId xmlns:a16="http://schemas.microsoft.com/office/drawing/2014/main" id="{290D23E8-A5F0-4581-812C-0AA434873269}"/>
+                <a16:creationId xmlns:a16="http://schemas.microsoft.com/office/drawing/2014/main" id="{81B5DFE9-1BEF-473B-93FF-651109A0CA3A}"/>
               </a:ext>
             </a:extLst>
           </p:cNvPr>
@@ -25691,7 +25701,7 @@
           <p:cNvPr id="23" name="">
             <a:extLst xmlns:a="http://schemas.openxmlformats.org/drawingml/2006/main">
               <a:ext uri="{FF2B5EF4-FFF2-40B4-BE49-F238E27FC236}">
-                <a16:creationId xmlns:a16="http://schemas.microsoft.com/office/drawing/2014/main" id="{62526A4F-4950-4309-AF3B-B5422A1653AB}"/>
+                <a16:creationId xmlns:a16="http://schemas.microsoft.com/office/drawing/2014/main" id="{98AC9ABB-0AB6-4851-89CB-8FE89E520EBE}"/>
               </a:ext>
             </a:extLst>
           </p:cNvPr>
@@ -25747,7 +25757,7 @@
           <p:cNvPr id="24" name="">
             <a:extLst xmlns:a="http://schemas.openxmlformats.org/drawingml/2006/main">
               <a:ext uri="{FF2B5EF4-FFF2-40B4-BE49-F238E27FC236}">
-                <a16:creationId xmlns:a16="http://schemas.microsoft.com/office/drawing/2014/main" id="{2BF5D3DB-55B8-473F-8D49-08D837D2F756}"/>
+                <a16:creationId xmlns:a16="http://schemas.microsoft.com/office/drawing/2014/main" id="{846DA620-727B-49E4-A395-DE1C1FBD2D3A}"/>
               </a:ext>
             </a:extLst>
           </p:cNvPr>
@@ -25803,7 +25813,7 @@
           <p:cNvPr id="25" name="">
             <a:extLst xmlns:a="http://schemas.openxmlformats.org/drawingml/2006/main">
               <a:ext uri="{FF2B5EF4-FFF2-40B4-BE49-F238E27FC236}">
-                <a16:creationId xmlns:a16="http://schemas.microsoft.com/office/drawing/2014/main" id="{7348BCE3-F5EC-4442-8DF4-C800162C3268}"/>
+                <a16:creationId xmlns:a16="http://schemas.microsoft.com/office/drawing/2014/main" id="{CF9689F4-39A6-4D5E-8F20-61D65A6FF152}"/>
               </a:ext>
             </a:extLst>
           </p:cNvPr>
@@ -25834,7 +25844,7 @@
           <p:cNvPr id="26" name="">
             <a:extLst xmlns:a="http://schemas.openxmlformats.org/drawingml/2006/main">
               <a:ext uri="{FF2B5EF4-FFF2-40B4-BE49-F238E27FC236}">
-                <a16:creationId xmlns:a16="http://schemas.microsoft.com/office/drawing/2014/main" id="{F49F09C1-F5B7-4875-AF43-8136F0A23839}"/>
+                <a16:creationId xmlns:a16="http://schemas.microsoft.com/office/drawing/2014/main" id="{1AB62203-11C2-41D0-BD41-486BEBAACE61}"/>
               </a:ext>
             </a:extLst>
           </p:cNvPr>
@@ -25865,7 +25875,7 @@
           <p:cNvPr id="27" name="">
             <a:extLst xmlns:a="http://schemas.openxmlformats.org/drawingml/2006/main">
               <a:ext uri="{FF2B5EF4-FFF2-40B4-BE49-F238E27FC236}">
-                <a16:creationId xmlns:a16="http://schemas.microsoft.com/office/drawing/2014/main" id="{DE325D27-2E73-4094-8FAC-C7580F162506}"/>
+                <a16:creationId xmlns:a16="http://schemas.microsoft.com/office/drawing/2014/main" id="{740527D7-997E-44AE-BF71-6C542F1E2200}"/>
               </a:ext>
             </a:extLst>
           </p:cNvPr>
@@ -25900,7 +25910,7 @@
           <p:cNvPr id="28" name="">
             <a:extLst xmlns:a="http://schemas.openxmlformats.org/drawingml/2006/main">
               <a:ext uri="{FF2B5EF4-FFF2-40B4-BE49-F238E27FC236}">
-                <a16:creationId xmlns:a16="http://schemas.microsoft.com/office/drawing/2014/main" id="{89257149-456B-4D6C-BB3C-E88FDBB29D3B}"/>
+                <a16:creationId xmlns:a16="http://schemas.microsoft.com/office/drawing/2014/main" id="{1DEEF148-D802-423A-84FE-3C97E29A9E2D}"/>
               </a:ext>
             </a:extLst>
           </p:cNvPr>
@@ -25956,7 +25966,7 @@
           <p:cNvPr id="29" name="">
             <a:extLst xmlns:a="http://schemas.openxmlformats.org/drawingml/2006/main">
               <a:ext uri="{FF2B5EF4-FFF2-40B4-BE49-F238E27FC236}">
-                <a16:creationId xmlns:a16="http://schemas.microsoft.com/office/drawing/2014/main" id="{EF105E4A-18D0-4B8B-9207-689C9A6C69FD}"/>
+                <a16:creationId xmlns:a16="http://schemas.microsoft.com/office/drawing/2014/main" id="{4249D039-9223-4EF9-AD71-ED08EF3B6BF9}"/>
               </a:ext>
             </a:extLst>
           </p:cNvPr>
@@ -26012,7 +26022,7 @@
           <p:cNvPr id="30" name="">
             <a:extLst xmlns:a="http://schemas.openxmlformats.org/drawingml/2006/main">
               <a:ext uri="{FF2B5EF4-FFF2-40B4-BE49-F238E27FC236}">
-                <a16:creationId xmlns:a16="http://schemas.microsoft.com/office/drawing/2014/main" id="{CFDBFD0B-04D6-4C53-B295-EFEABAEC2C24}"/>
+                <a16:creationId xmlns:a16="http://schemas.microsoft.com/office/drawing/2014/main" id="{FB4F8363-E092-419A-8608-D17FD2FDA2A3}"/>
               </a:ext>
             </a:extLst>
           </p:cNvPr>
@@ -26068,7 +26078,7 @@
           <p:cNvPr id="31" name="">
             <a:extLst xmlns:a="http://schemas.openxmlformats.org/drawingml/2006/main">
               <a:ext uri="{FF2B5EF4-FFF2-40B4-BE49-F238E27FC236}">
-                <a16:creationId xmlns:a16="http://schemas.microsoft.com/office/drawing/2014/main" id="{A4990F8A-23B5-4AFA-B9F7-71B11CED7C53}"/>
+                <a16:creationId xmlns:a16="http://schemas.microsoft.com/office/drawing/2014/main" id="{FB973F87-47CE-4A67-9688-57BAB178C414}"/>
               </a:ext>
             </a:extLst>
           </p:cNvPr>
@@ -26099,7 +26109,7 @@
           <p:cNvPr id="32" name="">
             <a:extLst xmlns:a="http://schemas.openxmlformats.org/drawingml/2006/main">
               <a:ext uri="{FF2B5EF4-FFF2-40B4-BE49-F238E27FC236}">
-                <a16:creationId xmlns:a16="http://schemas.microsoft.com/office/drawing/2014/main" id="{40A4AB2F-7607-4AFE-B995-1AA773C03E2C}"/>
+                <a16:creationId xmlns:a16="http://schemas.microsoft.com/office/drawing/2014/main" id="{9BABDAE2-88B8-4E62-BB5D-2252978F9970}"/>
               </a:ext>
             </a:extLst>
           </p:cNvPr>
@@ -26130,7 +26140,7 @@
           <p:cNvPr id="33" name="">
             <a:extLst xmlns:a="http://schemas.openxmlformats.org/drawingml/2006/main">
               <a:ext uri="{FF2B5EF4-FFF2-40B4-BE49-F238E27FC236}">
-                <a16:creationId xmlns:a16="http://schemas.microsoft.com/office/drawing/2014/main" id="{4C354E63-33A8-4D1B-A8FE-CF81F921886F}"/>
+                <a16:creationId xmlns:a16="http://schemas.microsoft.com/office/drawing/2014/main" id="{213E92FE-F740-4377-9FD4-60D0E68205B5}"/>
               </a:ext>
             </a:extLst>
           </p:cNvPr>
@@ -26165,7 +26175,7 @@
           <p:cNvPr id="34" name="">
             <a:extLst xmlns:a="http://schemas.openxmlformats.org/drawingml/2006/main">
               <a:ext uri="{FF2B5EF4-FFF2-40B4-BE49-F238E27FC236}">
-                <a16:creationId xmlns:a16="http://schemas.microsoft.com/office/drawing/2014/main" id="{507EAC2A-CD2F-47F1-9AC3-642D57664889}"/>
+                <a16:creationId xmlns:a16="http://schemas.microsoft.com/office/drawing/2014/main" id="{E8DAC80D-03A4-40A3-94F0-244ADC37E886}"/>
               </a:ext>
             </a:extLst>
           </p:cNvPr>
@@ -26221,7 +26231,7 @@
           <p:cNvPr id="35" name="">
             <a:extLst xmlns:a="http://schemas.openxmlformats.org/drawingml/2006/main">
               <a:ext uri="{FF2B5EF4-FFF2-40B4-BE49-F238E27FC236}">
-                <a16:creationId xmlns:a16="http://schemas.microsoft.com/office/drawing/2014/main" id="{540765B6-CCE1-4A48-A664-AC85F8379FDE}"/>
+                <a16:creationId xmlns:a16="http://schemas.microsoft.com/office/drawing/2014/main" id="{F70487E4-6163-4EA0-9FEE-2761517D0355}"/>
               </a:ext>
             </a:extLst>
           </p:cNvPr>
@@ -26277,7 +26287,7 @@
           <p:cNvPr id="36" name="">
             <a:extLst xmlns:a="http://schemas.openxmlformats.org/drawingml/2006/main">
               <a:ext uri="{FF2B5EF4-FFF2-40B4-BE49-F238E27FC236}">
-                <a16:creationId xmlns:a16="http://schemas.microsoft.com/office/drawing/2014/main" id="{4F0D449C-8C51-4D38-BCE3-6FDC18D63B5C}"/>
+                <a16:creationId xmlns:a16="http://schemas.microsoft.com/office/drawing/2014/main" id="{8DE69600-2933-4003-9B75-D1FF7A6944B7}"/>
               </a:ext>
             </a:extLst>
           </p:cNvPr>
@@ -26333,7 +26343,7 @@
           <p:cNvPr id="37" name="">
             <a:extLst xmlns:a="http://schemas.openxmlformats.org/drawingml/2006/main">
               <a:ext uri="{FF2B5EF4-FFF2-40B4-BE49-F238E27FC236}">
-                <a16:creationId xmlns:a16="http://schemas.microsoft.com/office/drawing/2014/main" id="{25F498DE-0F95-44F6-AFBE-3EEAAFF0E1DA}"/>
+                <a16:creationId xmlns:a16="http://schemas.microsoft.com/office/drawing/2014/main" id="{FEB09DF1-6D58-4E6F-94B9-8812EEEDED4D}"/>
               </a:ext>
             </a:extLst>
           </p:cNvPr>
@@ -26364,7 +26374,7 @@
           <p:cNvPr id="38" name="">
             <a:extLst xmlns:a="http://schemas.openxmlformats.org/drawingml/2006/main">
               <a:ext uri="{FF2B5EF4-FFF2-40B4-BE49-F238E27FC236}">
-                <a16:creationId xmlns:a16="http://schemas.microsoft.com/office/drawing/2014/main" id="{7795DDAF-FC41-40FB-8432-6DACD01EE55E}"/>
+                <a16:creationId xmlns:a16="http://schemas.microsoft.com/office/drawing/2014/main" id="{CAD3CBAE-6530-48F6-B3E7-D3056C9B8404}"/>
               </a:ext>
             </a:extLst>
           </p:cNvPr>
@@ -26418,7 +26428,7 @@
     </p:spTree>
     <p:extLst>
       <p:ext uri="{BB962C8B-B14F-4D97-AF65-F5344CB8AC3E}">
-        <p14:creationId xmlns:p14="http://schemas.microsoft.com/office/powerpoint/2010/main" val="1253638891"/>
+        <p14:creationId xmlns:p14="http://schemas.microsoft.com/office/powerpoint/2010/main" val="573311289"/>
       </p:ext>
     </p:extLst>
   </p:cSld>
@@ -26449,7 +26459,7 @@
           <p:cNvPr id="1" name="">
             <a:extLst xmlns:a="http://schemas.openxmlformats.org/drawingml/2006/main">
               <a:ext uri="{FF2B5EF4-FFF2-40B4-BE49-F238E27FC236}">
-                <a16:creationId xmlns:a16="http://schemas.microsoft.com/office/drawing/2014/main" id="{FCE22B93-9BF7-426A-B5C2-7F27A48DE154}"/>
+                <a16:creationId xmlns:a16="http://schemas.microsoft.com/office/drawing/2014/main" id="{BAD8E3D0-3276-438A-BB66-8AC864402AAE}"/>
               </a:ext>
             </a:extLst>
           </p:cNvPr>
@@ -26480,7 +26490,7 @@
           <p:cNvPr id="2" name="">
             <a:extLst xmlns:a="http://schemas.openxmlformats.org/drawingml/2006/main">
               <a:ext uri="{FF2B5EF4-FFF2-40B4-BE49-F238E27FC236}">
-                <a16:creationId xmlns:a16="http://schemas.microsoft.com/office/drawing/2014/main" id="{157EB055-CF17-4125-8FEF-D7DC1B496DBA}"/>
+                <a16:creationId xmlns:a16="http://schemas.microsoft.com/office/drawing/2014/main" id="{202C37E7-CE4A-4135-8FD6-3AFD768399C7}"/>
               </a:ext>
             </a:extLst>
           </p:cNvPr>
@@ -26511,7 +26521,7 @@
           <p:cNvPr id="3" name="">
             <a:extLst xmlns:a="http://schemas.openxmlformats.org/drawingml/2006/main">
               <a:ext uri="{FF2B5EF4-FFF2-40B4-BE49-F238E27FC236}">
-                <a16:creationId xmlns:a16="http://schemas.microsoft.com/office/drawing/2014/main" id="{75F2E118-015A-4C0C-822C-26BB37B04FEB}"/>
+                <a16:creationId xmlns:a16="http://schemas.microsoft.com/office/drawing/2014/main" id="{E4208433-98AA-4052-BE27-B0FB1D4C50DF}"/>
               </a:ext>
             </a:extLst>
           </p:cNvPr>
@@ -26542,7 +26552,7 @@
           <p:cNvPr id="4" name="">
             <a:extLst xmlns:a="http://schemas.openxmlformats.org/drawingml/2006/main">
               <a:ext uri="{FF2B5EF4-FFF2-40B4-BE49-F238E27FC236}">
-                <a16:creationId xmlns:a16="http://schemas.microsoft.com/office/drawing/2014/main" id="{2FD0E35E-9E67-4FFD-9950-64B0F810C1AB}"/>
+                <a16:creationId xmlns:a16="http://schemas.microsoft.com/office/drawing/2014/main" id="{EF11B8FB-6688-4FD9-8C39-77702EE042B3}"/>
               </a:ext>
             </a:extLst>
           </p:cNvPr>
@@ -26573,7 +26583,7 @@
           <p:cNvPr id="5" name="">
             <a:extLst xmlns:a="http://schemas.openxmlformats.org/drawingml/2006/main">
               <a:ext uri="{FF2B5EF4-FFF2-40B4-BE49-F238E27FC236}">
-                <a16:creationId xmlns:a16="http://schemas.microsoft.com/office/drawing/2014/main" id="{3B3AB68C-FCFF-4731-AF3B-3A877596B2A0}"/>
+                <a16:creationId xmlns:a16="http://schemas.microsoft.com/office/drawing/2014/main" id="{CF85661D-2E42-4088-A821-EA4AC889F1A0}"/>
               </a:ext>
             </a:extLst>
           </p:cNvPr>
@@ -26604,7 +26614,7 @@
           <p:cNvPr id="6" name="">
             <a:extLst xmlns:a="http://schemas.openxmlformats.org/drawingml/2006/main">
               <a:ext uri="{FF2B5EF4-FFF2-40B4-BE49-F238E27FC236}">
-                <a16:creationId xmlns:a16="http://schemas.microsoft.com/office/drawing/2014/main" id="{C703E392-71A2-4E15-AA02-C5E6090E623E}"/>
+                <a16:creationId xmlns:a16="http://schemas.microsoft.com/office/drawing/2014/main" id="{BD71A30C-0C96-4196-A04A-547BE42D36C5}"/>
               </a:ext>
             </a:extLst>
           </p:cNvPr>
@@ -26635,7 +26645,7 @@
           <p:cNvPr id="7" name="">
             <a:extLst xmlns:a="http://schemas.openxmlformats.org/drawingml/2006/main">
               <a:ext uri="{FF2B5EF4-FFF2-40B4-BE49-F238E27FC236}">
-                <a16:creationId xmlns:a16="http://schemas.microsoft.com/office/drawing/2014/main" id="{863C10FC-860A-428E-868A-1F7C15F63943}"/>
+                <a16:creationId xmlns:a16="http://schemas.microsoft.com/office/drawing/2014/main" id="{74913E99-8179-4340-83BF-BCA0FC3E722F}"/>
               </a:ext>
             </a:extLst>
           </p:cNvPr>
@@ -26666,7 +26676,7 @@
           <p:cNvPr id="8" name="">
             <a:extLst xmlns:a="http://schemas.openxmlformats.org/drawingml/2006/main">
               <a:ext uri="{FF2B5EF4-FFF2-40B4-BE49-F238E27FC236}">
-                <a16:creationId xmlns:a16="http://schemas.microsoft.com/office/drawing/2014/main" id="{629249CF-A056-46F8-AC42-D1CE4BB1E0DD}"/>
+                <a16:creationId xmlns:a16="http://schemas.microsoft.com/office/drawing/2014/main" id="{71A35180-B95D-46A6-89A5-DD6A26D32A91}"/>
               </a:ext>
             </a:extLst>
           </p:cNvPr>
@@ -26697,7 +26707,7 @@
           <p:cNvPr id="9" name="">
             <a:extLst xmlns:a="http://schemas.openxmlformats.org/drawingml/2006/main">
               <a:ext uri="{FF2B5EF4-FFF2-40B4-BE49-F238E27FC236}">
-                <a16:creationId xmlns:a16="http://schemas.microsoft.com/office/drawing/2014/main" id="{91B10F6B-DBE9-4CCA-8698-17E6E577BFCA}"/>
+                <a16:creationId xmlns:a16="http://schemas.microsoft.com/office/drawing/2014/main" id="{68538013-C58C-4C8E-85D8-D08E8BCABA48}"/>
               </a:ext>
             </a:extLst>
           </p:cNvPr>
@@ -26728,7 +26738,7 @@
           <p:cNvPr id="10" name="">
             <a:extLst xmlns:a="http://schemas.openxmlformats.org/drawingml/2006/main">
               <a:ext uri="{FF2B5EF4-FFF2-40B4-BE49-F238E27FC236}">
-                <a16:creationId xmlns:a16="http://schemas.microsoft.com/office/drawing/2014/main" id="{27DA4573-6B68-4F28-BA52-5F6F880C8805}"/>
+                <a16:creationId xmlns:a16="http://schemas.microsoft.com/office/drawing/2014/main" id="{2EC01BC8-01A9-40FA-8384-2BAE4C533E6B}"/>
               </a:ext>
             </a:extLst>
           </p:cNvPr>
@@ -26759,7 +26769,7 @@
           <p:cNvPr id="11" name="">
             <a:extLst xmlns:a="http://schemas.openxmlformats.org/drawingml/2006/main">
               <a:ext uri="{FF2B5EF4-FFF2-40B4-BE49-F238E27FC236}">
-                <a16:creationId xmlns:a16="http://schemas.microsoft.com/office/drawing/2014/main" id="{8CE00CAD-E433-44A2-B65C-14B5F74A4E47}"/>
+                <a16:creationId xmlns:a16="http://schemas.microsoft.com/office/drawing/2014/main" id="{BCE89D84-9B76-4786-8F2D-A430B4BBCF08}"/>
               </a:ext>
             </a:extLst>
           </p:cNvPr>
@@ -26790,7 +26800,7 @@
           <p:cNvPr id="12" name="">
             <a:extLst xmlns:a="http://schemas.openxmlformats.org/drawingml/2006/main">
               <a:ext uri="{FF2B5EF4-FFF2-40B4-BE49-F238E27FC236}">
-                <a16:creationId xmlns:a16="http://schemas.microsoft.com/office/drawing/2014/main" id="{4B0E58FD-0E3A-4DF6-AD66-9DB2FCB050DC}"/>
+                <a16:creationId xmlns:a16="http://schemas.microsoft.com/office/drawing/2014/main" id="{9FA2A703-3D53-42DD-BDB0-78A8ED3CA772}"/>
               </a:ext>
             </a:extLst>
           </p:cNvPr>
@@ -26821,7 +26831,7 @@
           <p:cNvPr id="13" name="">
             <a:extLst xmlns:a="http://schemas.openxmlformats.org/drawingml/2006/main">
               <a:ext uri="{FF2B5EF4-FFF2-40B4-BE49-F238E27FC236}">
-                <a16:creationId xmlns:a16="http://schemas.microsoft.com/office/drawing/2014/main" id="{BAB65A96-7DAE-4EF6-93D2-1774016D3618}"/>
+                <a16:creationId xmlns:a16="http://schemas.microsoft.com/office/drawing/2014/main" id="{CFE5EBBA-639A-4C04-9311-70E47F03802B}"/>
               </a:ext>
             </a:extLst>
           </p:cNvPr>
@@ -26852,7 +26862,7 @@
           <p:cNvPr id="14" name="">
             <a:extLst xmlns:a="http://schemas.openxmlformats.org/drawingml/2006/main">
               <a:ext uri="{FF2B5EF4-FFF2-40B4-BE49-F238E27FC236}">
-                <a16:creationId xmlns:a16="http://schemas.microsoft.com/office/drawing/2014/main" id="{513DEC42-EA1F-43FE-B2E1-E461706029B0}"/>
+                <a16:creationId xmlns:a16="http://schemas.microsoft.com/office/drawing/2014/main" id="{416B6D31-3A34-4DAA-B962-F38459231D63}"/>
               </a:ext>
             </a:extLst>
           </p:cNvPr>
@@ -26883,7 +26893,7 @@
           <p:cNvPr id="15" name="">
             <a:extLst xmlns:a="http://schemas.openxmlformats.org/drawingml/2006/main">
               <a:ext uri="{FF2B5EF4-FFF2-40B4-BE49-F238E27FC236}">
-                <a16:creationId xmlns:a16="http://schemas.microsoft.com/office/drawing/2014/main" id="{BF0B7737-CC17-46C5-B7F9-599E05E6EC00}"/>
+                <a16:creationId xmlns:a16="http://schemas.microsoft.com/office/drawing/2014/main" id="{9EFBD735-6B6E-4E7B-A5D1-ABDEDF14C9A3}"/>
               </a:ext>
             </a:extLst>
           </p:cNvPr>
@@ -26914,7 +26924,7 @@
           <p:cNvPr id="16" name="">
             <a:extLst xmlns:a="http://schemas.openxmlformats.org/drawingml/2006/main">
               <a:ext uri="{FF2B5EF4-FFF2-40B4-BE49-F238E27FC236}">
-                <a16:creationId xmlns:a16="http://schemas.microsoft.com/office/drawing/2014/main" id="{B5D29F6F-C79E-49A7-B984-F16ACC49ACFA}"/>
+                <a16:creationId xmlns:a16="http://schemas.microsoft.com/office/drawing/2014/main" id="{4F7BCF49-BBF2-4027-B944-E9E87B91C7AC}"/>
               </a:ext>
             </a:extLst>
           </p:cNvPr>
@@ -26945,7 +26955,7 @@
           <p:cNvPr id="17" name="">
             <a:extLst xmlns:a="http://schemas.openxmlformats.org/drawingml/2006/main">
               <a:ext uri="{FF2B5EF4-FFF2-40B4-BE49-F238E27FC236}">
-                <a16:creationId xmlns:a16="http://schemas.microsoft.com/office/drawing/2014/main" id="{530A02B4-55AB-426E-BD51-0B0295BD1C04}"/>
+                <a16:creationId xmlns:a16="http://schemas.microsoft.com/office/drawing/2014/main" id="{124D3810-3AC1-499C-8305-A7F7317E72C6}"/>
               </a:ext>
             </a:extLst>
           </p:cNvPr>
@@ -26976,7 +26986,7 @@
           <p:cNvPr id="18" name="">
             <a:extLst xmlns:a="http://schemas.openxmlformats.org/drawingml/2006/main">
               <a:ext uri="{FF2B5EF4-FFF2-40B4-BE49-F238E27FC236}">
-                <a16:creationId xmlns:a16="http://schemas.microsoft.com/office/drawing/2014/main" id="{D369E1BE-0355-4CB0-B64F-3375C41C65FB}"/>
+                <a16:creationId xmlns:a16="http://schemas.microsoft.com/office/drawing/2014/main" id="{9F65271C-A7EB-4B0D-8161-D0774BF7596C}"/>
               </a:ext>
             </a:extLst>
           </p:cNvPr>
@@ -27007,7 +27017,7 @@
           <p:cNvPr id="19" name="">
             <a:extLst xmlns:a="http://schemas.openxmlformats.org/drawingml/2006/main">
               <a:ext uri="{FF2B5EF4-FFF2-40B4-BE49-F238E27FC236}">
-                <a16:creationId xmlns:a16="http://schemas.microsoft.com/office/drawing/2014/main" id="{EFC6C21F-A88C-4E76-9300-5B289FAC0B4E}"/>
+                <a16:creationId xmlns:a16="http://schemas.microsoft.com/office/drawing/2014/main" id="{F6181E0A-4095-484C-BF2A-CCA0317BBA02}"/>
               </a:ext>
             </a:extLst>
           </p:cNvPr>
@@ -27038,7 +27048,7 @@
           <p:cNvPr id="20" name="">
             <a:extLst xmlns:a="http://schemas.openxmlformats.org/drawingml/2006/main">
               <a:ext uri="{FF2B5EF4-FFF2-40B4-BE49-F238E27FC236}">
-                <a16:creationId xmlns:a16="http://schemas.microsoft.com/office/drawing/2014/main" id="{65EFE072-2512-4E18-9A4E-C85D9B8D6A26}"/>
+                <a16:creationId xmlns:a16="http://schemas.microsoft.com/office/drawing/2014/main" id="{A894F73D-AB5D-474B-B776-D123FA55A580}"/>
               </a:ext>
             </a:extLst>
           </p:cNvPr>
@@ -27069,7 +27079,7 @@
           <p:cNvPr id="21" name="">
             <a:extLst xmlns:a="http://schemas.openxmlformats.org/drawingml/2006/main">
               <a:ext uri="{FF2B5EF4-FFF2-40B4-BE49-F238E27FC236}">
-                <a16:creationId xmlns:a16="http://schemas.microsoft.com/office/drawing/2014/main" id="{38C04EFF-847A-4198-ABEB-B775257BC749}"/>
+                <a16:creationId xmlns:a16="http://schemas.microsoft.com/office/drawing/2014/main" id="{3026D037-E5A7-4454-9339-F0796CF23E67}"/>
               </a:ext>
             </a:extLst>
           </p:cNvPr>
@@ -27100,7 +27110,7 @@
           <p:cNvPr id="22" name="">
             <a:extLst xmlns:a="http://schemas.openxmlformats.org/drawingml/2006/main">
               <a:ext uri="{FF2B5EF4-FFF2-40B4-BE49-F238E27FC236}">
-                <a16:creationId xmlns:a16="http://schemas.microsoft.com/office/drawing/2014/main" id="{079AACFE-95CF-41EA-9448-5EA686D49C3F}"/>
+                <a16:creationId xmlns:a16="http://schemas.microsoft.com/office/drawing/2014/main" id="{3C97675C-4DEE-4EA7-B095-6865BB929668}"/>
               </a:ext>
             </a:extLst>
           </p:cNvPr>
@@ -27131,7 +27141,7 @@
           <p:cNvPr id="23" name="">
             <a:extLst xmlns:a="http://schemas.openxmlformats.org/drawingml/2006/main">
               <a:ext uri="{FF2B5EF4-FFF2-40B4-BE49-F238E27FC236}">
-                <a16:creationId xmlns:a16="http://schemas.microsoft.com/office/drawing/2014/main" id="{3552A417-ADAC-4974-9589-5168A2930516}"/>
+                <a16:creationId xmlns:a16="http://schemas.microsoft.com/office/drawing/2014/main" id="{40210C55-908D-4A20-8AC6-EC0CC6548488}"/>
               </a:ext>
             </a:extLst>
           </p:cNvPr>
@@ -27162,7 +27172,7 @@
           <p:cNvPr id="24" name="">
             <a:extLst xmlns:a="http://schemas.openxmlformats.org/drawingml/2006/main">
               <a:ext uri="{FF2B5EF4-FFF2-40B4-BE49-F238E27FC236}">
-                <a16:creationId xmlns:a16="http://schemas.microsoft.com/office/drawing/2014/main" id="{CAFD9A77-1C6B-46FC-A31C-E6AF0FEEE4E7}"/>
+                <a16:creationId xmlns:a16="http://schemas.microsoft.com/office/drawing/2014/main" id="{D8E2396D-88F8-4DC6-A238-422ABF37CD2F}"/>
               </a:ext>
             </a:extLst>
           </p:cNvPr>
@@ -27193,7 +27203,7 @@
           <p:cNvPr id="25" name="">
             <a:extLst xmlns:a="http://schemas.openxmlformats.org/drawingml/2006/main">
               <a:ext uri="{FF2B5EF4-FFF2-40B4-BE49-F238E27FC236}">
-                <a16:creationId xmlns:a16="http://schemas.microsoft.com/office/drawing/2014/main" id="{5E2622E0-32BB-485B-84F0-B48D6B552051}"/>
+                <a16:creationId xmlns:a16="http://schemas.microsoft.com/office/drawing/2014/main" id="{4A2214BE-BA5F-47CC-8F82-1518446D043F}"/>
               </a:ext>
             </a:extLst>
           </p:cNvPr>
@@ -27224,7 +27234,7 @@
           <p:cNvPr id="26" name="">
             <a:extLst xmlns:a="http://schemas.openxmlformats.org/drawingml/2006/main">
               <a:ext uri="{FF2B5EF4-FFF2-40B4-BE49-F238E27FC236}">
-                <a16:creationId xmlns:a16="http://schemas.microsoft.com/office/drawing/2014/main" id="{3D7FCD3C-3D37-437A-8AF5-D1E213BC684E}"/>
+                <a16:creationId xmlns:a16="http://schemas.microsoft.com/office/drawing/2014/main" id="{ADCD83CF-E7EE-4918-92D6-B316940B4A55}"/>
               </a:ext>
             </a:extLst>
           </p:cNvPr>
@@ -27255,7 +27265,7 @@
           <p:cNvPr id="27" name="">
             <a:extLst xmlns:a="http://schemas.openxmlformats.org/drawingml/2006/main">
               <a:ext uri="{FF2B5EF4-FFF2-40B4-BE49-F238E27FC236}">
-                <a16:creationId xmlns:a16="http://schemas.microsoft.com/office/drawing/2014/main" id="{20CB149C-55C7-45E3-A2E9-DEDC045B0CFF}"/>
+                <a16:creationId xmlns:a16="http://schemas.microsoft.com/office/drawing/2014/main" id="{4B813656-5EC4-46C2-B030-74588CB0F933}"/>
               </a:ext>
             </a:extLst>
           </p:cNvPr>
@@ -27286,7 +27296,7 @@
           <p:cNvPr id="28" name="">
             <a:extLst xmlns:a="http://schemas.openxmlformats.org/drawingml/2006/main">
               <a:ext uri="{FF2B5EF4-FFF2-40B4-BE49-F238E27FC236}">
-                <a16:creationId xmlns:a16="http://schemas.microsoft.com/office/drawing/2014/main" id="{9115BB97-64F7-4C29-8509-8978F1E40118}"/>
+                <a16:creationId xmlns:a16="http://schemas.microsoft.com/office/drawing/2014/main" id="{D89987B8-A7F0-48B3-8992-F2123D9FBAD2}"/>
               </a:ext>
             </a:extLst>
           </p:cNvPr>
@@ -27317,7 +27327,7 @@
           <p:cNvPr id="29" name="">
             <a:extLst xmlns:a="http://schemas.openxmlformats.org/drawingml/2006/main">
               <a:ext uri="{FF2B5EF4-FFF2-40B4-BE49-F238E27FC236}">
-                <a16:creationId xmlns:a16="http://schemas.microsoft.com/office/drawing/2014/main" id="{43E51BB3-3037-4994-8667-71FEC0145751}"/>
+                <a16:creationId xmlns:a16="http://schemas.microsoft.com/office/drawing/2014/main" id="{469525AD-0A75-4016-9C13-CABB259A0820}"/>
               </a:ext>
             </a:extLst>
           </p:cNvPr>
@@ -27348,7 +27358,7 @@
           <p:cNvPr id="30" name="">
             <a:extLst xmlns:a="http://schemas.openxmlformats.org/drawingml/2006/main">
               <a:ext uri="{FF2B5EF4-FFF2-40B4-BE49-F238E27FC236}">
-                <a16:creationId xmlns:a16="http://schemas.microsoft.com/office/drawing/2014/main" id="{6F096887-61EF-4E8E-A2DA-689F3F70A715}"/>
+                <a16:creationId xmlns:a16="http://schemas.microsoft.com/office/drawing/2014/main" id="{27EC1F18-57E8-43B9-9253-AB555FAB557B}"/>
               </a:ext>
             </a:extLst>
           </p:cNvPr>
@@ -27379,7 +27389,7 @@
           <p:cNvPr id="31" name="">
             <a:extLst xmlns:a="http://schemas.openxmlformats.org/drawingml/2006/main">
               <a:ext uri="{FF2B5EF4-FFF2-40B4-BE49-F238E27FC236}">
-                <a16:creationId xmlns:a16="http://schemas.microsoft.com/office/drawing/2014/main" id="{BE9148B3-18CE-439E-8215-BC232D853E26}"/>
+                <a16:creationId xmlns:a16="http://schemas.microsoft.com/office/drawing/2014/main" id="{8B6CDAF8-16F1-443E-816F-8339E5972AD3}"/>
               </a:ext>
             </a:extLst>
           </p:cNvPr>
@@ -27410,7 +27420,7 @@
           <p:cNvPr id="32" name="">
             <a:extLst xmlns:a="http://schemas.openxmlformats.org/drawingml/2006/main">
               <a:ext uri="{FF2B5EF4-FFF2-40B4-BE49-F238E27FC236}">
-                <a16:creationId xmlns:a16="http://schemas.microsoft.com/office/drawing/2014/main" id="{5253E6A6-50D3-489F-BCF3-62E8E1418F04}"/>
+                <a16:creationId xmlns:a16="http://schemas.microsoft.com/office/drawing/2014/main" id="{AA1660B6-CAB9-4D75-B9A5-40586A50A26A}"/>
               </a:ext>
             </a:extLst>
           </p:cNvPr>
@@ -27466,7 +27476,7 @@
           <p:cNvPr id="33" name="">
             <a:extLst xmlns:a="http://schemas.openxmlformats.org/drawingml/2006/main">
               <a:ext uri="{FF2B5EF4-FFF2-40B4-BE49-F238E27FC236}">
-                <a16:creationId xmlns:a16="http://schemas.microsoft.com/office/drawing/2014/main" id="{D8E07A18-E932-414B-B327-05D2DB2BF013}"/>
+                <a16:creationId xmlns:a16="http://schemas.microsoft.com/office/drawing/2014/main" id="{C58572C8-4E0D-4376-A0DD-6E4111F78088}"/>
               </a:ext>
             </a:extLst>
           </p:cNvPr>
@@ -27522,7 +27532,7 @@
           <p:cNvPr id="34" name="">
             <a:extLst xmlns:a="http://schemas.openxmlformats.org/drawingml/2006/main">
               <a:ext uri="{FF2B5EF4-FFF2-40B4-BE49-F238E27FC236}">
-                <a16:creationId xmlns:a16="http://schemas.microsoft.com/office/drawing/2014/main" id="{22AEF08A-D57A-4D59-A51D-32CF64AB0CE2}"/>
+                <a16:creationId xmlns:a16="http://schemas.microsoft.com/office/drawing/2014/main" id="{19DC2248-94EB-402F-A0F0-BA573DAC8E24}"/>
               </a:ext>
             </a:extLst>
           </p:cNvPr>
@@ -27557,7 +27567,7 @@
           <p:cNvPr id="35" name="">
             <a:extLst xmlns:a="http://schemas.openxmlformats.org/drawingml/2006/main">
               <a:ext uri="{FF2B5EF4-FFF2-40B4-BE49-F238E27FC236}">
-                <a16:creationId xmlns:a16="http://schemas.microsoft.com/office/drawing/2014/main" id="{CF91426D-D010-4C9C-81FC-09E6CDADCA70}"/>
+                <a16:creationId xmlns:a16="http://schemas.microsoft.com/office/drawing/2014/main" id="{96BCC887-D8E3-446D-8AD8-38E0247AA153}"/>
               </a:ext>
             </a:extLst>
           </p:cNvPr>
@@ -27613,7 +27623,7 @@
           <p:cNvPr id="36" name="">
             <a:extLst xmlns:a="http://schemas.openxmlformats.org/drawingml/2006/main">
               <a:ext uri="{FF2B5EF4-FFF2-40B4-BE49-F238E27FC236}">
-                <a16:creationId xmlns:a16="http://schemas.microsoft.com/office/drawing/2014/main" id="{9FBD411E-F412-4D9B-B346-31490407BEA3}"/>
+                <a16:creationId xmlns:a16="http://schemas.microsoft.com/office/drawing/2014/main" id="{574D6EAA-3A7C-4586-AF25-5A25989FE5D3}"/>
               </a:ext>
             </a:extLst>
           </p:cNvPr>
@@ -27669,7 +27679,7 @@
           <p:cNvPr id="37" name="">
             <a:extLst xmlns:a="http://schemas.openxmlformats.org/drawingml/2006/main">
               <a:ext uri="{FF2B5EF4-FFF2-40B4-BE49-F238E27FC236}">
-                <a16:creationId xmlns:a16="http://schemas.microsoft.com/office/drawing/2014/main" id="{01490726-36DA-462C-A833-D7D399430B65}"/>
+                <a16:creationId xmlns:a16="http://schemas.microsoft.com/office/drawing/2014/main" id="{E8D31693-6951-434E-9E4A-E438E702F62F}"/>
               </a:ext>
             </a:extLst>
           </p:cNvPr>
@@ -27725,7 +27735,7 @@
           <p:cNvPr id="38" name="">
             <a:extLst xmlns:a="http://schemas.openxmlformats.org/drawingml/2006/main">
               <a:ext uri="{FF2B5EF4-FFF2-40B4-BE49-F238E27FC236}">
-                <a16:creationId xmlns:a16="http://schemas.microsoft.com/office/drawing/2014/main" id="{5AC3010E-DA9B-4743-8200-A6D5071524DA}"/>
+                <a16:creationId xmlns:a16="http://schemas.microsoft.com/office/drawing/2014/main" id="{2F4A5860-7F1C-4FF4-9BDF-B9C51A49C2D6}"/>
               </a:ext>
             </a:extLst>
           </p:cNvPr>
@@ -27781,7 +27791,7 @@
           <p:cNvPr id="39" name="">
             <a:extLst xmlns:a="http://schemas.openxmlformats.org/drawingml/2006/main">
               <a:ext uri="{FF2B5EF4-FFF2-40B4-BE49-F238E27FC236}">
-                <a16:creationId xmlns:a16="http://schemas.microsoft.com/office/drawing/2014/main" id="{23C0AFF8-9419-4C96-ABFA-3429C8333EB1}"/>
+                <a16:creationId xmlns:a16="http://schemas.microsoft.com/office/drawing/2014/main" id="{2F336DD7-ACA6-4D84-864A-E41EA87EBF2C}"/>
               </a:ext>
             </a:extLst>
           </p:cNvPr>
@@ -27816,7 +27826,7 @@
           <p:cNvPr id="40" name="">
             <a:extLst xmlns:a="http://schemas.openxmlformats.org/drawingml/2006/main">
               <a:ext uri="{FF2B5EF4-FFF2-40B4-BE49-F238E27FC236}">
-                <a16:creationId xmlns:a16="http://schemas.microsoft.com/office/drawing/2014/main" id="{21FFDE40-3EB6-459C-B138-0794C89A34E6}"/>
+                <a16:creationId xmlns:a16="http://schemas.microsoft.com/office/drawing/2014/main" id="{EF988A92-0C2B-45E6-95C7-E5752697CB7F}"/>
               </a:ext>
             </a:extLst>
           </p:cNvPr>
@@ -27872,7 +27882,7 @@
           <p:cNvPr id="41" name="">
             <a:extLst xmlns:a="http://schemas.openxmlformats.org/drawingml/2006/main">
               <a:ext uri="{FF2B5EF4-FFF2-40B4-BE49-F238E27FC236}">
-                <a16:creationId xmlns:a16="http://schemas.microsoft.com/office/drawing/2014/main" id="{6664EBA7-BE52-4F5A-9BEE-ECBA8CE011D6}"/>
+                <a16:creationId xmlns:a16="http://schemas.microsoft.com/office/drawing/2014/main" id="{2AFA0BF8-23FA-4FBD-95FF-FFFA3BFC7858}"/>
               </a:ext>
             </a:extLst>
           </p:cNvPr>
@@ -27928,7 +27938,7 @@
           <p:cNvPr id="42" name="">
             <a:extLst xmlns:a="http://schemas.openxmlformats.org/drawingml/2006/main">
               <a:ext uri="{FF2B5EF4-FFF2-40B4-BE49-F238E27FC236}">
-                <a16:creationId xmlns:a16="http://schemas.microsoft.com/office/drawing/2014/main" id="{26D38061-3A06-4DBB-A96C-09A7624E7A08}"/>
+                <a16:creationId xmlns:a16="http://schemas.microsoft.com/office/drawing/2014/main" id="{C13BF15B-F714-45D5-8BDD-C1217993E497}"/>
               </a:ext>
             </a:extLst>
           </p:cNvPr>
@@ -27984,7 +27994,7 @@
           <p:cNvPr id="43" name="">
             <a:extLst xmlns:a="http://schemas.openxmlformats.org/drawingml/2006/main">
               <a:ext uri="{FF2B5EF4-FFF2-40B4-BE49-F238E27FC236}">
-                <a16:creationId xmlns:a16="http://schemas.microsoft.com/office/drawing/2014/main" id="{B1C2E983-9F93-4301-846D-BDA77DFCAE49}"/>
+                <a16:creationId xmlns:a16="http://schemas.microsoft.com/office/drawing/2014/main" id="{DC1FEE96-3646-40E8-BCCA-17EB048289C6}"/>
               </a:ext>
             </a:extLst>
           </p:cNvPr>
@@ -28040,7 +28050,7 @@
           <p:cNvPr id="44" name="">
             <a:extLst xmlns:a="http://schemas.openxmlformats.org/drawingml/2006/main">
               <a:ext uri="{FF2B5EF4-FFF2-40B4-BE49-F238E27FC236}">
-                <a16:creationId xmlns:a16="http://schemas.microsoft.com/office/drawing/2014/main" id="{F36B1F53-F48D-47FB-AE8B-8A7C6C76DF2E}"/>
+                <a16:creationId xmlns:a16="http://schemas.microsoft.com/office/drawing/2014/main" id="{E304B3F9-24CF-493B-8FDF-200181E993D9}"/>
               </a:ext>
             </a:extLst>
           </p:cNvPr>
@@ -28075,7 +28085,7 @@
           <p:cNvPr id="45" name="">
             <a:extLst xmlns:a="http://schemas.openxmlformats.org/drawingml/2006/main">
               <a:ext uri="{FF2B5EF4-FFF2-40B4-BE49-F238E27FC236}">
-                <a16:creationId xmlns:a16="http://schemas.microsoft.com/office/drawing/2014/main" id="{5D5A61E1-23DF-449E-9058-6C0A13D40557}"/>
+                <a16:creationId xmlns:a16="http://schemas.microsoft.com/office/drawing/2014/main" id="{5B424EE1-A16D-423D-A039-5BBFE13FCBC7}"/>
               </a:ext>
             </a:extLst>
           </p:cNvPr>
@@ -28131,7 +28141,7 @@
           <p:cNvPr id="46" name="">
             <a:extLst xmlns:a="http://schemas.openxmlformats.org/drawingml/2006/main">
               <a:ext uri="{FF2B5EF4-FFF2-40B4-BE49-F238E27FC236}">
-                <a16:creationId xmlns:a16="http://schemas.microsoft.com/office/drawing/2014/main" id="{BD4B9559-6BD9-4E94-935A-2D23E9945FB3}"/>
+                <a16:creationId xmlns:a16="http://schemas.microsoft.com/office/drawing/2014/main" id="{5A4B3E77-964F-4ECC-93FB-6EF5D16670C6}"/>
               </a:ext>
             </a:extLst>
           </p:cNvPr>
@@ -28187,7 +28197,7 @@
           <p:cNvPr id="47" name="">
             <a:extLst xmlns:a="http://schemas.openxmlformats.org/drawingml/2006/main">
               <a:ext uri="{FF2B5EF4-FFF2-40B4-BE49-F238E27FC236}">
-                <a16:creationId xmlns:a16="http://schemas.microsoft.com/office/drawing/2014/main" id="{D6AA4358-22DD-4DC5-B9F7-AC51AC0CED51}"/>
+                <a16:creationId xmlns:a16="http://schemas.microsoft.com/office/drawing/2014/main" id="{0A7E1A5D-F0AC-4788-A40B-5F9C06BE3B57}"/>
               </a:ext>
             </a:extLst>
           </p:cNvPr>
@@ -28243,7 +28253,7 @@
           <p:cNvPr id="48" name="">
             <a:extLst xmlns:a="http://schemas.openxmlformats.org/drawingml/2006/main">
               <a:ext uri="{FF2B5EF4-FFF2-40B4-BE49-F238E27FC236}">
-                <a16:creationId xmlns:a16="http://schemas.microsoft.com/office/drawing/2014/main" id="{E0989748-B725-4C7C-8CD7-48ED6E76518A}"/>
+                <a16:creationId xmlns:a16="http://schemas.microsoft.com/office/drawing/2014/main" id="{EE05C3FA-FED0-42BC-9FBD-748EBE17C626}"/>
               </a:ext>
             </a:extLst>
           </p:cNvPr>
@@ -28299,7 +28309,7 @@
           <p:cNvPr id="49" name="">
             <a:extLst xmlns:a="http://schemas.openxmlformats.org/drawingml/2006/main">
               <a:ext uri="{FF2B5EF4-FFF2-40B4-BE49-F238E27FC236}">
-                <a16:creationId xmlns:a16="http://schemas.microsoft.com/office/drawing/2014/main" id="{52A9EDAD-E826-449D-8D86-CE2E6C6BF8B2}"/>
+                <a16:creationId xmlns:a16="http://schemas.microsoft.com/office/drawing/2014/main" id="{22B661B8-90B0-4794-9D54-DD2E40B4CE78}"/>
               </a:ext>
             </a:extLst>
           </p:cNvPr>
@@ -28334,7 +28344,7 @@
           <p:cNvPr id="50" name="">
             <a:extLst xmlns:a="http://schemas.openxmlformats.org/drawingml/2006/main">
               <a:ext uri="{FF2B5EF4-FFF2-40B4-BE49-F238E27FC236}">
-                <a16:creationId xmlns:a16="http://schemas.microsoft.com/office/drawing/2014/main" id="{5F8CCCBE-928C-4069-AD2B-2D3B292B706A}"/>
+                <a16:creationId xmlns:a16="http://schemas.microsoft.com/office/drawing/2014/main" id="{06DD2DC5-4BA4-4236-80CF-8FC24833F8E3}"/>
               </a:ext>
             </a:extLst>
           </p:cNvPr>
@@ -28390,7 +28400,7 @@
           <p:cNvPr id="51" name="">
             <a:extLst xmlns:a="http://schemas.openxmlformats.org/drawingml/2006/main">
               <a:ext uri="{FF2B5EF4-FFF2-40B4-BE49-F238E27FC236}">
-                <a16:creationId xmlns:a16="http://schemas.microsoft.com/office/drawing/2014/main" id="{29631DDB-F250-4E04-93C7-0CCDAA2AABDA}"/>
+                <a16:creationId xmlns:a16="http://schemas.microsoft.com/office/drawing/2014/main" id="{F26E6F0C-0935-47BB-B7EC-EF9E42E7FF19}"/>
               </a:ext>
             </a:extLst>
           </p:cNvPr>
@@ -28446,7 +28456,7 @@
           <p:cNvPr id="52" name="">
             <a:extLst xmlns:a="http://schemas.openxmlformats.org/drawingml/2006/main">
               <a:ext uri="{FF2B5EF4-FFF2-40B4-BE49-F238E27FC236}">
-                <a16:creationId xmlns:a16="http://schemas.microsoft.com/office/drawing/2014/main" id="{C840882C-37FF-40A8-8971-495E82BC7739}"/>
+                <a16:creationId xmlns:a16="http://schemas.microsoft.com/office/drawing/2014/main" id="{32BB1A64-93A8-4788-B4B3-0BF05A04BB73}"/>
               </a:ext>
             </a:extLst>
           </p:cNvPr>
@@ -28502,7 +28512,7 @@
           <p:cNvPr id="53" name="">
             <a:extLst xmlns:a="http://schemas.openxmlformats.org/drawingml/2006/main">
               <a:ext uri="{FF2B5EF4-FFF2-40B4-BE49-F238E27FC236}">
-                <a16:creationId xmlns:a16="http://schemas.microsoft.com/office/drawing/2014/main" id="{0962B216-3725-44C7-900A-41488F0482B9}"/>
+                <a16:creationId xmlns:a16="http://schemas.microsoft.com/office/drawing/2014/main" id="{E729676E-66B0-4ECD-BA3B-F5D66AF93555}"/>
               </a:ext>
             </a:extLst>
           </p:cNvPr>
@@ -28558,7 +28568,7 @@
           <p:cNvPr id="54" name="">
             <a:extLst xmlns:a="http://schemas.openxmlformats.org/drawingml/2006/main">
               <a:ext uri="{FF2B5EF4-FFF2-40B4-BE49-F238E27FC236}">
-                <a16:creationId xmlns:a16="http://schemas.microsoft.com/office/drawing/2014/main" id="{1E623F06-F440-42C3-B745-3DD33B71222C}"/>
+                <a16:creationId xmlns:a16="http://schemas.microsoft.com/office/drawing/2014/main" id="{28D071B5-CFEA-4F60-B944-F3F6859EFE5C}"/>
               </a:ext>
             </a:extLst>
           </p:cNvPr>
@@ -28614,7 +28624,7 @@
           <p:cNvPr id="55" name="">
             <a:extLst xmlns:a="http://schemas.openxmlformats.org/drawingml/2006/main">
               <a:ext uri="{FF2B5EF4-FFF2-40B4-BE49-F238E27FC236}">
-                <a16:creationId xmlns:a16="http://schemas.microsoft.com/office/drawing/2014/main" id="{04484C10-A990-4E34-B36C-63353AC6B869}"/>
+                <a16:creationId xmlns:a16="http://schemas.microsoft.com/office/drawing/2014/main" id="{7B568E45-AB0A-43F3-A117-7AFBA07F1273}"/>
               </a:ext>
             </a:extLst>
           </p:cNvPr>
@@ -28649,7 +28659,7 @@
           <p:cNvPr id="56" name="">
             <a:extLst xmlns:a="http://schemas.openxmlformats.org/drawingml/2006/main">
               <a:ext uri="{FF2B5EF4-FFF2-40B4-BE49-F238E27FC236}">
-                <a16:creationId xmlns:a16="http://schemas.microsoft.com/office/drawing/2014/main" id="{B5CA4BDB-3980-4EE9-AAB8-D4C46088F22B}"/>
+                <a16:creationId xmlns:a16="http://schemas.microsoft.com/office/drawing/2014/main" id="{3596F262-B983-497A-B3C4-D835A56F396C}"/>
               </a:ext>
             </a:extLst>
           </p:cNvPr>
@@ -28705,7 +28715,7 @@
           <p:cNvPr id="57" name="">
             <a:extLst xmlns:a="http://schemas.openxmlformats.org/drawingml/2006/main">
               <a:ext uri="{FF2B5EF4-FFF2-40B4-BE49-F238E27FC236}">
-                <a16:creationId xmlns:a16="http://schemas.microsoft.com/office/drawing/2014/main" id="{B41A0943-163F-4625-913F-9310EA15853A}"/>
+                <a16:creationId xmlns:a16="http://schemas.microsoft.com/office/drawing/2014/main" id="{3EF9B7C4-CBCE-41B3-9BFF-AA4304E00200}"/>
               </a:ext>
             </a:extLst>
           </p:cNvPr>
@@ -28740,7 +28750,7 @@
           <p:cNvPr id="58" name="">
             <a:extLst xmlns:a="http://schemas.openxmlformats.org/drawingml/2006/main">
               <a:ext uri="{FF2B5EF4-FFF2-40B4-BE49-F238E27FC236}">
-                <a16:creationId xmlns:a16="http://schemas.microsoft.com/office/drawing/2014/main" id="{FB5879E7-2297-4219-80D4-D924DC6B7B38}"/>
+                <a16:creationId xmlns:a16="http://schemas.microsoft.com/office/drawing/2014/main" id="{DB00B0DE-526C-4670-A187-B471DB117C2A}"/>
               </a:ext>
             </a:extLst>
           </p:cNvPr>
@@ -28796,7 +28806,7 @@
           <p:cNvPr id="59" name="">
             <a:extLst xmlns:a="http://schemas.openxmlformats.org/drawingml/2006/main">
               <a:ext uri="{FF2B5EF4-FFF2-40B4-BE49-F238E27FC236}">
-                <a16:creationId xmlns:a16="http://schemas.microsoft.com/office/drawing/2014/main" id="{42633118-9F0B-43A2-8605-6E7AB8E64144}"/>
+                <a16:creationId xmlns:a16="http://schemas.microsoft.com/office/drawing/2014/main" id="{E4BAE5B9-A3C7-4F15-BD08-0C9BDB8CCBE5}"/>
               </a:ext>
             </a:extLst>
           </p:cNvPr>
@@ -28831,7 +28841,7 @@
           <p:cNvPr id="60" name="">
             <a:extLst xmlns:a="http://schemas.openxmlformats.org/drawingml/2006/main">
               <a:ext uri="{FF2B5EF4-FFF2-40B4-BE49-F238E27FC236}">
-                <a16:creationId xmlns:a16="http://schemas.microsoft.com/office/drawing/2014/main" id="{C78D2CFF-CBCA-46F8-BD0C-464728CCDE39}"/>
+                <a16:creationId xmlns:a16="http://schemas.microsoft.com/office/drawing/2014/main" id="{14727FDE-9E45-4D57-A1C3-E80DFBBE058D}"/>
               </a:ext>
             </a:extLst>
           </p:cNvPr>
@@ -28887,7 +28897,7 @@
           <p:cNvPr id="61" name="">
             <a:extLst xmlns:a="http://schemas.openxmlformats.org/drawingml/2006/main">
               <a:ext uri="{FF2B5EF4-FFF2-40B4-BE49-F238E27FC236}">
-                <a16:creationId xmlns:a16="http://schemas.microsoft.com/office/drawing/2014/main" id="{D0B00050-5FAE-42F7-8CF0-8D05655CD8D8}"/>
+                <a16:creationId xmlns:a16="http://schemas.microsoft.com/office/drawing/2014/main" id="{85DB0BAA-B842-48BE-A023-F53B401D5DDD}"/>
               </a:ext>
             </a:extLst>
           </p:cNvPr>
@@ -28922,7 +28932,7 @@
           <p:cNvPr id="62" name="">
             <a:extLst xmlns:a="http://schemas.openxmlformats.org/drawingml/2006/main">
               <a:ext uri="{FF2B5EF4-FFF2-40B4-BE49-F238E27FC236}">
-                <a16:creationId xmlns:a16="http://schemas.microsoft.com/office/drawing/2014/main" id="{2C72981C-0A8D-45F5-97B1-FFE702919218}"/>
+                <a16:creationId xmlns:a16="http://schemas.microsoft.com/office/drawing/2014/main" id="{66C898F5-648D-4A80-BCEB-43C870C30E33}"/>
               </a:ext>
             </a:extLst>
           </p:cNvPr>
@@ -28978,7 +28988,7 @@
           <p:cNvPr id="63" name="">
             <a:extLst xmlns:a="http://schemas.openxmlformats.org/drawingml/2006/main">
               <a:ext uri="{FF2B5EF4-FFF2-40B4-BE49-F238E27FC236}">
-                <a16:creationId xmlns:a16="http://schemas.microsoft.com/office/drawing/2014/main" id="{64C56E3E-FA5E-4AFA-9C20-1F620FECF7E3}"/>
+                <a16:creationId xmlns:a16="http://schemas.microsoft.com/office/drawing/2014/main" id="{671CECE0-AD90-43A9-9B78-8272939BB2F0}"/>
               </a:ext>
             </a:extLst>
           </p:cNvPr>
@@ -29013,7 +29023,7 @@
           <p:cNvPr id="64" name="">
             <a:extLst xmlns:a="http://schemas.openxmlformats.org/drawingml/2006/main">
               <a:ext uri="{FF2B5EF4-FFF2-40B4-BE49-F238E27FC236}">
-                <a16:creationId xmlns:a16="http://schemas.microsoft.com/office/drawing/2014/main" id="{0E3414F5-7D57-453C-BA00-5FEBF4D0EB5F}"/>
+                <a16:creationId xmlns:a16="http://schemas.microsoft.com/office/drawing/2014/main" id="{DC0050A7-E7EF-4748-9D5D-EC4476978D71}"/>
               </a:ext>
             </a:extLst>
           </p:cNvPr>
@@ -29069,7 +29079,7 @@
           <p:cNvPr id="65" name="">
             <a:extLst xmlns:a="http://schemas.openxmlformats.org/drawingml/2006/main">
               <a:ext uri="{FF2B5EF4-FFF2-40B4-BE49-F238E27FC236}">
-                <a16:creationId xmlns:a16="http://schemas.microsoft.com/office/drawing/2014/main" id="{B73E29C5-9887-474F-9088-6B0DF51F9E35}"/>
+                <a16:creationId xmlns:a16="http://schemas.microsoft.com/office/drawing/2014/main" id="{1B5D78DD-C216-4C1F-A8C0-6E5AD81F3209}"/>
               </a:ext>
             </a:extLst>
           </p:cNvPr>
@@ -29104,7 +29114,7 @@
           <p:cNvPr id="66" name="">
             <a:extLst xmlns:a="http://schemas.openxmlformats.org/drawingml/2006/main">
               <a:ext uri="{FF2B5EF4-FFF2-40B4-BE49-F238E27FC236}">
-                <a16:creationId xmlns:a16="http://schemas.microsoft.com/office/drawing/2014/main" id="{DC86781C-ADC4-45AF-A715-B11DDC5AE267}"/>
+                <a16:creationId xmlns:a16="http://schemas.microsoft.com/office/drawing/2014/main" id="{29958A81-CD34-4249-98D2-21E78B24F2BE}"/>
               </a:ext>
             </a:extLst>
           </p:cNvPr>
@@ -29160,7 +29170,7 @@
           <p:cNvPr id="67" name="">
             <a:extLst xmlns:a="http://schemas.openxmlformats.org/drawingml/2006/main">
               <a:ext uri="{FF2B5EF4-FFF2-40B4-BE49-F238E27FC236}">
-                <a16:creationId xmlns:a16="http://schemas.microsoft.com/office/drawing/2014/main" id="{AB1DF8F3-205F-4BE7-9A44-50359C390D33}"/>
+                <a16:creationId xmlns:a16="http://schemas.microsoft.com/office/drawing/2014/main" id="{F8CADC27-37AA-47DD-8613-A0DAD818B06B}"/>
               </a:ext>
             </a:extLst>
           </p:cNvPr>
@@ -29214,7 +29224,7 @@
     </p:spTree>
     <p:extLst>
       <p:ext uri="{BB962C8B-B14F-4D97-AF65-F5344CB8AC3E}">
-        <p14:creationId xmlns:p14="http://schemas.microsoft.com/office/powerpoint/2010/main" val="1198065922"/>
+        <p14:creationId xmlns:p14="http://schemas.microsoft.com/office/powerpoint/2010/main" val="830657732"/>
       </p:ext>
     </p:extLst>
   </p:cSld>
@@ -29240,905 +29250,91 @@
       <p:grpSpPr>
         <a:xfrm xmlns:a="http://schemas.openxmlformats.org/drawingml/2006/main"/>
       </p:grpSpPr>
-      <p:sp>
-        <p:nvSpPr>
-          <p:cNvPr id="1" name="">
-            <a:extLst xmlns:a="http://schemas.openxmlformats.org/drawingml/2006/main">
-              <a:ext uri="{FF2B5EF4-FFF2-40B4-BE49-F238E27FC236}">
-                <a16:creationId xmlns:a16="http://schemas.microsoft.com/office/drawing/2014/main" id="{ABA21437-CA7B-4275-9629-EE21D6486D18}"/>
-              </a:ext>
-            </a:extLst>
-          </p:cNvPr>
-          <p:cNvSpPr>
-            <a:spLocks xmlns:a="http://schemas.openxmlformats.org/drawingml/2006/main" noGrp="1"/>
-          </p:cNvSpPr>
-          <p:nvPr/>
-        </p:nvSpPr>
-        <p:spPr>
-          <a:xfrm xmlns:a="http://schemas.openxmlformats.org/drawingml/2006/main">
-            <a:off x="609600" y="438150"/>
-            <a:ext cx="76200" cy="76200"/>
-          </a:xfrm>
-          <a:prstGeom xmlns:a="http://schemas.openxmlformats.org/drawingml/2006/main" prst="ellipse">
-            <a:avLst/>
-          </a:prstGeom>
-          <a:solidFill xmlns:a="http://schemas.openxmlformats.org/drawingml/2006/main">
-            <a:srgbClr val="83F3C9"/>
-          </a:solidFill>
-          <a:ln xmlns:a="http://schemas.openxmlformats.org/drawingml/2006/main" w="0">
-            <a:noFill/>
-            <a:prstDash val="solid"/>
-          </a:ln>
-        </p:spPr>
-      </p:sp>
-      <p:sp>
-        <p:nvSpPr>
-          <p:cNvPr id="2" name="">
-            <a:extLst xmlns:a="http://schemas.openxmlformats.org/drawingml/2006/main">
-              <a:ext uri="{FF2B5EF4-FFF2-40B4-BE49-F238E27FC236}">
-                <a16:creationId xmlns:a16="http://schemas.microsoft.com/office/drawing/2014/main" id="{46853595-7EB9-4DA1-9AFD-910949D485C2}"/>
-              </a:ext>
-            </a:extLst>
-          </p:cNvPr>
-          <p:cNvSpPr>
-            <a:spLocks xmlns:a="http://schemas.openxmlformats.org/drawingml/2006/main" noGrp="1"/>
-          </p:cNvSpPr>
-          <p:nvPr/>
-        </p:nvSpPr>
-        <p:spPr>
-          <a:xfrm xmlns:a="http://schemas.openxmlformats.org/drawingml/2006/main">
-            <a:off x="800100" y="361950"/>
-            <a:ext cx="4572000" cy="266700"/>
-          </a:xfrm>
-          <a:prstGeom xmlns:a="http://schemas.openxmlformats.org/drawingml/2006/main" prst="rect">
-            <a:avLst/>
-          </a:prstGeom>
-          <a:noFill xmlns:a="http://schemas.openxmlformats.org/drawingml/2006/main"/>
-          <a:ln xmlns:a="http://schemas.openxmlformats.org/drawingml/2006/main" w="0">
-            <a:noFill/>
-            <a:prstDash val="solid"/>
-          </a:ln>
-        </p:spPr>
-        <p:txBody>
-          <a:bodyPr xmlns:a="http://schemas.openxmlformats.org/drawingml/2006/main" lIns="0" tIns="0" rIns="0" bIns="0" anchor="ctr"/>
-          <a:lstStyle xmlns:a="http://schemas.openxmlformats.org/drawingml/2006/main"/>
-          <a:p xmlns:a="http://schemas.openxmlformats.org/drawingml/2006/main">
-            <a:pPr algn="l">
-              <a:defRPr sz="900" b="1">
-                <a:solidFill>
-                  <a:srgbClr val="83F3C9"/>
-                </a:solidFill>
-                <a:latin typeface="Avenir Next"/>
-                <a:ea typeface="Avenir Next"/>
-                <a:cs typeface="Avenir Next"/>
-              </a:defRPr>
-            </a:pPr>
-            <a:r>
-              <a:rPr sz="900" b="1">
-                <a:solidFill>
-                  <a:srgbClr val="83F3C9"/>
-                </a:solidFill>
-                <a:latin typeface="Avenir Next"/>
-                <a:ea typeface="Avenir Next"/>
-                <a:cs typeface="Avenir Next"/>
-              </a:rPr>
-              <a:t>LIVE DEMONSTRATION · SYNTHETIC CASE</a:t>
-            </a:r>
-          </a:p>
-        </p:txBody>
-      </p:sp>
-      <p:sp>
-        <p:nvSpPr>
-          <p:cNvPr id="3" name="">
-            <a:extLst xmlns:a="http://schemas.openxmlformats.org/drawingml/2006/main">
-              <a:ext uri="{FF2B5EF4-FFF2-40B4-BE49-F238E27FC236}">
-                <a16:creationId xmlns:a16="http://schemas.microsoft.com/office/drawing/2014/main" id="{7FAEFA7D-7802-4E38-9CC3-7933665AE366}"/>
-              </a:ext>
-            </a:extLst>
-          </p:cNvPr>
-          <p:cNvSpPr>
-            <a:spLocks xmlns:a="http://schemas.openxmlformats.org/drawingml/2006/main" noGrp="1"/>
-          </p:cNvSpPr>
-          <p:nvPr/>
-        </p:nvSpPr>
-        <p:spPr>
-          <a:xfrm xmlns:a="http://schemas.openxmlformats.org/drawingml/2006/main">
-            <a:off x="609600" y="1066800"/>
-            <a:ext cx="4171950" cy="1771650"/>
-          </a:xfrm>
-          <a:prstGeom xmlns:a="http://schemas.openxmlformats.org/drawingml/2006/main" prst="rect">
-            <a:avLst/>
-          </a:prstGeom>
-          <a:noFill xmlns:a="http://schemas.openxmlformats.org/drawingml/2006/main"/>
-          <a:ln xmlns:a="http://schemas.openxmlformats.org/drawingml/2006/main" w="0">
-            <a:noFill/>
-            <a:prstDash val="solid"/>
-          </a:ln>
-        </p:spPr>
-        <p:txBody>
-          <a:bodyPr xmlns:a="http://schemas.openxmlformats.org/drawingml/2006/main" lIns="0" tIns="0" rIns="0" bIns="0" anchor="t"/>
-          <a:lstStyle xmlns:a="http://schemas.openxmlformats.org/drawingml/2006/main"/>
-          <a:p xmlns:a="http://schemas.openxmlformats.org/drawingml/2006/main">
-            <a:pPr algn="l">
-              <a:defRPr sz="2925" b="1">
-                <a:solidFill>
-                  <a:srgbClr val="F7F8F5"/>
-                </a:solidFill>
-                <a:latin typeface="Avenir Next"/>
-                <a:ea typeface="Avenir Next"/>
-                <a:cs typeface="Avenir Next"/>
-              </a:defRPr>
-            </a:pPr>
-            <a:r>
-              <a:rPr sz="2925" b="1">
-                <a:solidFill>
-                  <a:srgbClr val="F7F8F5"/>
-                </a:solidFill>
-                <a:latin typeface="Avenir Next"/>
-                <a:ea typeface="Avenir Next"/>
-                <a:cs typeface="Avenir Next"/>
-              </a:rPr>
-              <a:t>The highest-value AI</a:t>
-            </a:r>
-          </a:p>
-          <a:p xmlns:a="http://schemas.openxmlformats.org/drawingml/2006/main">
-            <a:pPr algn="l">
-              <a:defRPr sz="2925" b="1">
-                <a:solidFill>
-                  <a:srgbClr val="F7F8F5"/>
-                </a:solidFill>
-                <a:latin typeface="Avenir Next"/>
-                <a:ea typeface="Avenir Next"/>
-                <a:cs typeface="Avenir Next"/>
-              </a:defRPr>
-            </a:pPr>
-            <a:r>
-              <a:rPr sz="2925" b="1">
-                <a:solidFill>
-                  <a:srgbClr val="F7F8F5"/>
-                </a:solidFill>
-                <a:latin typeface="Avenir Next"/>
-                <a:ea typeface="Avenir Next"/>
-                <a:cs typeface="Avenir Next"/>
-              </a:rPr>
-              <a:t>may never touch</a:t>
-            </a:r>
-          </a:p>
-          <a:p xmlns:a="http://schemas.openxmlformats.org/drawingml/2006/main">
-            <a:pPr algn="l">
-              <a:defRPr sz="2925" b="1">
-                <a:solidFill>
-                  <a:srgbClr val="F7F8F5"/>
-                </a:solidFill>
-                <a:latin typeface="Avenir Next"/>
-                <a:ea typeface="Avenir Next"/>
-                <a:cs typeface="Avenir Next"/>
-              </a:defRPr>
-            </a:pPr>
-            <a:r>
-              <a:rPr sz="2925" b="1">
-                <a:solidFill>
-                  <a:srgbClr val="F7F8F5"/>
-                </a:solidFill>
-                <a:latin typeface="Avenir Next"/>
-                <a:ea typeface="Avenir Next"/>
-                <a:cs typeface="Avenir Next"/>
-              </a:rPr>
-              <a:t>the patient.</a:t>
-            </a:r>
-          </a:p>
-        </p:txBody>
-      </p:sp>
-      <p:sp>
-        <p:nvSpPr>
-          <p:cNvPr id="4" name="">
-            <a:extLst xmlns:a="http://schemas.openxmlformats.org/drawingml/2006/main">
-              <a:ext uri="{FF2B5EF4-FFF2-40B4-BE49-F238E27FC236}">
-                <a16:creationId xmlns:a16="http://schemas.microsoft.com/office/drawing/2014/main" id="{976D1390-27F0-47E1-8D11-E3DBB90F7FB0}"/>
-              </a:ext>
-            </a:extLst>
-          </p:cNvPr>
-          <p:cNvSpPr>
-            <a:spLocks xmlns:a="http://schemas.openxmlformats.org/drawingml/2006/main" noGrp="1"/>
-          </p:cNvSpPr>
-          <p:nvPr/>
-        </p:nvSpPr>
-        <p:spPr>
-          <a:xfrm xmlns:a="http://schemas.openxmlformats.org/drawingml/2006/main">
-            <a:off x="628650" y="3200400"/>
-            <a:ext cx="3733800" cy="819150"/>
-          </a:xfrm>
-          <a:prstGeom xmlns:a="http://schemas.openxmlformats.org/drawingml/2006/main" prst="rect">
-            <a:avLst/>
-          </a:prstGeom>
-          <a:noFill xmlns:a="http://schemas.openxmlformats.org/drawingml/2006/main"/>
-          <a:ln xmlns:a="http://schemas.openxmlformats.org/drawingml/2006/main" w="0">
-            <a:noFill/>
-            <a:prstDash val="solid"/>
-          </a:ln>
-        </p:spPr>
-        <p:txBody>
-          <a:bodyPr xmlns:a="http://schemas.openxmlformats.org/drawingml/2006/main" lIns="0" tIns="0" rIns="0" bIns="0" anchor="t"/>
-          <a:lstStyle xmlns:a="http://schemas.openxmlformats.org/drawingml/2006/main"/>
-          <a:p xmlns:a="http://schemas.openxmlformats.org/drawingml/2006/main">
-            <a:pPr algn="l">
-              <a:defRPr sz="1500" b="0">
-                <a:solidFill>
-                  <a:srgbClr val="9AA8AE"/>
-                </a:solidFill>
-                <a:latin typeface="Avenir Next"/>
-                <a:ea typeface="Avenir Next"/>
-                <a:cs typeface="Avenir Next"/>
-              </a:defRPr>
-            </a:pPr>
-            <a:r>
-              <a:rPr sz="1500" b="0">
-                <a:solidFill>
-                  <a:srgbClr val="9AA8AE"/>
-                </a:solidFill>
-                <a:latin typeface="Avenir Next"/>
-                <a:ea typeface="Avenir Next"/>
-                <a:cs typeface="Avenir Next"/>
-              </a:rPr>
-              <a:t>Four operational workstreams converge around one robotic case—without delegating clinical judgment.</a:t>
-            </a:r>
-          </a:p>
-        </p:txBody>
-      </p:sp>
-      <p:sp>
-        <p:nvSpPr>
-          <p:cNvPr id="5" name="">
-            <a:extLst xmlns:a="http://schemas.openxmlformats.org/drawingml/2006/main">
-              <a:ext uri="{FF2B5EF4-FFF2-40B4-BE49-F238E27FC236}">
-                <a16:creationId xmlns:a16="http://schemas.microsoft.com/office/drawing/2014/main" id="{7F37F6E9-7689-493F-BF1B-1D6059C1F008}"/>
-              </a:ext>
-            </a:extLst>
-          </p:cNvPr>
-          <p:cNvSpPr>
-            <a:spLocks xmlns:a="http://schemas.openxmlformats.org/drawingml/2006/main" noGrp="1"/>
-          </p:cNvSpPr>
-          <p:nvPr/>
-        </p:nvSpPr>
-        <p:spPr>
-          <a:xfrm xmlns:a="http://schemas.openxmlformats.org/drawingml/2006/main">
-            <a:off x="628650" y="4400550"/>
-            <a:ext cx="552450" cy="285750"/>
-          </a:xfrm>
-          <a:prstGeom xmlns:a="http://schemas.openxmlformats.org/drawingml/2006/main" prst="roundRect">
-            <a:avLst>
-              <a:gd name="adj" fmla="val 50000"/>
-            </a:avLst>
-          </a:prstGeom>
-          <a:solidFill xmlns:a="http://schemas.openxmlformats.org/drawingml/2006/main">
-            <a:srgbClr val="0E222C"/>
-          </a:solidFill>
-          <a:ln xmlns:a="http://schemas.openxmlformats.org/drawingml/2006/main" w="9525">
-            <a:solidFill>
-              <a:srgbClr val="51DFE3"/>
-            </a:solidFill>
-            <a:prstDash val="solid"/>
-          </a:ln>
-        </p:spPr>
-      </p:sp>
-      <p:sp>
-        <p:nvSpPr>
-          <p:cNvPr id="6" name="">
-            <a:extLst xmlns:a="http://schemas.openxmlformats.org/drawingml/2006/main">
-              <a:ext uri="{FF2B5EF4-FFF2-40B4-BE49-F238E27FC236}">
-                <a16:creationId xmlns:a16="http://schemas.microsoft.com/office/drawing/2014/main" id="{71AA141B-1F70-46B3-86FC-00019871BB99}"/>
-              </a:ext>
-            </a:extLst>
-          </p:cNvPr>
-          <p:cNvSpPr>
-            <a:spLocks xmlns:a="http://schemas.openxmlformats.org/drawingml/2006/main" noGrp="1"/>
-          </p:cNvSpPr>
-          <p:nvPr/>
-        </p:nvSpPr>
-        <p:spPr>
-          <a:xfrm xmlns:a="http://schemas.openxmlformats.org/drawingml/2006/main">
-            <a:off x="628650" y="4400550"/>
-            <a:ext cx="552450" cy="285750"/>
-          </a:xfrm>
-          <a:prstGeom xmlns:a="http://schemas.openxmlformats.org/drawingml/2006/main" prst="rect">
-            <a:avLst/>
-          </a:prstGeom>
-          <a:noFill xmlns:a="http://schemas.openxmlformats.org/drawingml/2006/main"/>
-          <a:ln xmlns:a="http://schemas.openxmlformats.org/drawingml/2006/main" w="0">
-            <a:noFill/>
-            <a:prstDash val="solid"/>
-          </a:ln>
-        </p:spPr>
-        <p:txBody>
-          <a:bodyPr xmlns:a="http://schemas.openxmlformats.org/drawingml/2006/main" lIns="0" tIns="0" rIns="0" bIns="0" anchor="ctr"/>
-          <a:lstStyle xmlns:a="http://schemas.openxmlformats.org/drawingml/2006/main"/>
-          <a:p xmlns:a="http://schemas.openxmlformats.org/drawingml/2006/main">
-            <a:pPr algn="ctr">
-              <a:defRPr sz="750" b="1">
-                <a:solidFill>
-                  <a:srgbClr val="51DFE3"/>
-                </a:solidFill>
-                <a:latin typeface="Avenir Next"/>
-                <a:ea typeface="Avenir Next"/>
-                <a:cs typeface="Avenir Next"/>
-              </a:defRPr>
-            </a:pPr>
-            <a:r>
-              <a:rPr sz="750" b="1">
-                <a:solidFill>
-                  <a:srgbClr val="51DFE3"/>
-                </a:solidFill>
-                <a:latin typeface="Avenir Next"/>
-                <a:ea typeface="Avenir Next"/>
-                <a:cs typeface="Avenir Next"/>
-              </a:rPr>
-              <a:t>FD</a:t>
-            </a:r>
-          </a:p>
-        </p:txBody>
-      </p:sp>
-      <p:sp>
-        <p:nvSpPr>
-          <p:cNvPr id="7" name="">
-            <a:extLst xmlns:a="http://schemas.openxmlformats.org/drawingml/2006/main">
-              <a:ext uri="{FF2B5EF4-FFF2-40B4-BE49-F238E27FC236}">
-                <a16:creationId xmlns:a16="http://schemas.microsoft.com/office/drawing/2014/main" id="{C89DE794-A464-4621-8827-9B7CC01127A3}"/>
-              </a:ext>
-            </a:extLst>
-          </p:cNvPr>
-          <p:cNvSpPr>
-            <a:spLocks xmlns:a="http://schemas.openxmlformats.org/drawingml/2006/main" noGrp="1"/>
-          </p:cNvSpPr>
-          <p:nvPr/>
-        </p:nvSpPr>
-        <p:spPr>
-          <a:xfrm xmlns:a="http://schemas.openxmlformats.org/drawingml/2006/main">
-            <a:off x="1333500" y="4400550"/>
-            <a:ext cx="552450" cy="285750"/>
-          </a:xfrm>
-          <a:prstGeom xmlns:a="http://schemas.openxmlformats.org/drawingml/2006/main" prst="roundRect">
-            <a:avLst>
-              <a:gd name="adj" fmla="val 50000"/>
-            </a:avLst>
-          </a:prstGeom>
-          <a:solidFill xmlns:a="http://schemas.openxmlformats.org/drawingml/2006/main">
-            <a:srgbClr val="0E222C"/>
-          </a:solidFill>
-          <a:ln xmlns:a="http://schemas.openxmlformats.org/drawingml/2006/main" w="9525">
-            <a:solidFill>
-              <a:srgbClr val="F3C668"/>
-            </a:solidFill>
-            <a:prstDash val="solid"/>
-          </a:ln>
-        </p:spPr>
-      </p:sp>
-      <p:sp>
-        <p:nvSpPr>
-          <p:cNvPr id="8" name="">
-            <a:extLst xmlns:a="http://schemas.openxmlformats.org/drawingml/2006/main">
-              <a:ext uri="{FF2B5EF4-FFF2-40B4-BE49-F238E27FC236}">
-                <a16:creationId xmlns:a16="http://schemas.microsoft.com/office/drawing/2014/main" id="{133D0E36-8296-40FF-A947-20D7A4037CF5}"/>
-              </a:ext>
-            </a:extLst>
-          </p:cNvPr>
-          <p:cNvSpPr>
-            <a:spLocks xmlns:a="http://schemas.openxmlformats.org/drawingml/2006/main" noGrp="1"/>
-          </p:cNvSpPr>
-          <p:nvPr/>
-        </p:nvSpPr>
-        <p:spPr>
-          <a:xfrm xmlns:a="http://schemas.openxmlformats.org/drawingml/2006/main">
-            <a:off x="1333500" y="4400550"/>
-            <a:ext cx="552450" cy="285750"/>
-          </a:xfrm>
-          <a:prstGeom xmlns:a="http://schemas.openxmlformats.org/drawingml/2006/main" prst="rect">
-            <a:avLst/>
-          </a:prstGeom>
-          <a:noFill xmlns:a="http://schemas.openxmlformats.org/drawingml/2006/main"/>
-          <a:ln xmlns:a="http://schemas.openxmlformats.org/drawingml/2006/main" w="0">
-            <a:noFill/>
-            <a:prstDash val="solid"/>
-          </a:ln>
-        </p:spPr>
-        <p:txBody>
-          <a:bodyPr xmlns:a="http://schemas.openxmlformats.org/drawingml/2006/main" lIns="0" tIns="0" rIns="0" bIns="0" anchor="ctr"/>
-          <a:lstStyle xmlns:a="http://schemas.openxmlformats.org/drawingml/2006/main"/>
-          <a:p xmlns:a="http://schemas.openxmlformats.org/drawingml/2006/main">
-            <a:pPr algn="ctr">
-              <a:defRPr sz="750" b="1">
-                <a:solidFill>
-                  <a:srgbClr val="F3C668"/>
-                </a:solidFill>
-                <a:latin typeface="Avenir Next"/>
-                <a:ea typeface="Avenir Next"/>
-                <a:cs typeface="Avenir Next"/>
-              </a:defRPr>
-            </a:pPr>
-            <a:r>
-              <a:rPr sz="750" b="1">
-                <a:solidFill>
-                  <a:srgbClr val="F3C668"/>
-                </a:solidFill>
-                <a:latin typeface="Avenir Next"/>
-                <a:ea typeface="Avenir Next"/>
-                <a:cs typeface="Avenir Next"/>
-              </a:rPr>
-              <a:t>RX</a:t>
-            </a:r>
-          </a:p>
-        </p:txBody>
-      </p:sp>
-      <p:sp>
-        <p:nvSpPr>
-          <p:cNvPr id="9" name="">
-            <a:extLst xmlns:a="http://schemas.openxmlformats.org/drawingml/2006/main">
-              <a:ext uri="{FF2B5EF4-FFF2-40B4-BE49-F238E27FC236}">
-                <a16:creationId xmlns:a16="http://schemas.microsoft.com/office/drawing/2014/main" id="{EE019E3A-8A2B-4454-AAFE-8E6EE36EEDF6}"/>
-              </a:ext>
-            </a:extLst>
-          </p:cNvPr>
-          <p:cNvSpPr>
-            <a:spLocks xmlns:a="http://schemas.openxmlformats.org/drawingml/2006/main" noGrp="1"/>
-          </p:cNvSpPr>
-          <p:nvPr/>
-        </p:nvSpPr>
-        <p:spPr>
-          <a:xfrm xmlns:a="http://schemas.openxmlformats.org/drawingml/2006/main">
-            <a:off x="2038350" y="4400550"/>
-            <a:ext cx="552450" cy="285750"/>
-          </a:xfrm>
-          <a:prstGeom xmlns:a="http://schemas.openxmlformats.org/drawingml/2006/main" prst="roundRect">
-            <a:avLst>
-              <a:gd name="adj" fmla="val 50000"/>
-            </a:avLst>
-          </a:prstGeom>
-          <a:solidFill xmlns:a="http://schemas.openxmlformats.org/drawingml/2006/main">
-            <a:srgbClr val="0E222C"/>
-          </a:solidFill>
-          <a:ln xmlns:a="http://schemas.openxmlformats.org/drawingml/2006/main" w="9525">
-            <a:solidFill>
-              <a:srgbClr val="60D799"/>
-            </a:solidFill>
-            <a:prstDash val="solid"/>
-          </a:ln>
-        </p:spPr>
-      </p:sp>
-      <p:sp>
-        <p:nvSpPr>
-          <p:cNvPr id="10" name="">
-            <a:extLst xmlns:a="http://schemas.openxmlformats.org/drawingml/2006/main">
-              <a:ext uri="{FF2B5EF4-FFF2-40B4-BE49-F238E27FC236}">
-                <a16:creationId xmlns:a16="http://schemas.microsoft.com/office/drawing/2014/main" id="{59754B0D-F34D-42A1-9456-974C7219C68C}"/>
-              </a:ext>
-            </a:extLst>
-          </p:cNvPr>
-          <p:cNvSpPr>
-            <a:spLocks xmlns:a="http://schemas.openxmlformats.org/drawingml/2006/main" noGrp="1"/>
-          </p:cNvSpPr>
-          <p:nvPr/>
-        </p:nvSpPr>
-        <p:spPr>
-          <a:xfrm xmlns:a="http://schemas.openxmlformats.org/drawingml/2006/main">
-            <a:off x="2038350" y="4400550"/>
-            <a:ext cx="552450" cy="285750"/>
-          </a:xfrm>
-          <a:prstGeom xmlns:a="http://schemas.openxmlformats.org/drawingml/2006/main" prst="rect">
-            <a:avLst/>
-          </a:prstGeom>
-          <a:noFill xmlns:a="http://schemas.openxmlformats.org/drawingml/2006/main"/>
-          <a:ln xmlns:a="http://schemas.openxmlformats.org/drawingml/2006/main" w="0">
-            <a:noFill/>
-            <a:prstDash val="solid"/>
-          </a:ln>
-        </p:spPr>
-        <p:txBody>
-          <a:bodyPr xmlns:a="http://schemas.openxmlformats.org/drawingml/2006/main" lIns="0" tIns="0" rIns="0" bIns="0" anchor="ctr"/>
-          <a:lstStyle xmlns:a="http://schemas.openxmlformats.org/drawingml/2006/main"/>
-          <a:p xmlns:a="http://schemas.openxmlformats.org/drawingml/2006/main">
-            <a:pPr algn="ctr">
-              <a:defRPr sz="750" b="1">
-                <a:solidFill>
-                  <a:srgbClr val="60D799"/>
-                </a:solidFill>
-                <a:latin typeface="Avenir Next"/>
-                <a:ea typeface="Avenir Next"/>
-                <a:cs typeface="Avenir Next"/>
-              </a:defRPr>
-            </a:pPr>
-            <a:r>
-              <a:rPr sz="750" b="1">
-                <a:solidFill>
-                  <a:srgbClr val="60D799"/>
-                </a:solidFill>
-                <a:latin typeface="Avenir Next"/>
-                <a:ea typeface="Avenir Next"/>
-                <a:cs typeface="Avenir Next"/>
-              </a:rPr>
-              <a:t>LC</a:t>
-            </a:r>
-          </a:p>
-        </p:txBody>
-      </p:sp>
-      <p:sp>
-        <p:nvSpPr>
-          <p:cNvPr id="11" name="">
-            <a:extLst xmlns:a="http://schemas.openxmlformats.org/drawingml/2006/main">
-              <a:ext uri="{FF2B5EF4-FFF2-40B4-BE49-F238E27FC236}">
-                <a16:creationId xmlns:a16="http://schemas.microsoft.com/office/drawing/2014/main" id="{AB4BC2DD-CABB-4763-8993-CD7D2C9123F3}"/>
-              </a:ext>
-            </a:extLst>
-          </p:cNvPr>
-          <p:cNvSpPr>
-            <a:spLocks xmlns:a="http://schemas.openxmlformats.org/drawingml/2006/main" noGrp="1"/>
-          </p:cNvSpPr>
-          <p:nvPr/>
-        </p:nvSpPr>
-        <p:spPr>
-          <a:xfrm xmlns:a="http://schemas.openxmlformats.org/drawingml/2006/main">
-            <a:off x="2743200" y="4400550"/>
-            <a:ext cx="552450" cy="285750"/>
-          </a:xfrm>
-          <a:prstGeom xmlns:a="http://schemas.openxmlformats.org/drawingml/2006/main" prst="roundRect">
-            <a:avLst>
-              <a:gd name="adj" fmla="val 50000"/>
-            </a:avLst>
-          </a:prstGeom>
-          <a:solidFill xmlns:a="http://schemas.openxmlformats.org/drawingml/2006/main">
-            <a:srgbClr val="0E222C"/>
-          </a:solidFill>
-          <a:ln xmlns:a="http://schemas.openxmlformats.org/drawingml/2006/main" w="9525">
-            <a:solidFill>
-              <a:srgbClr val="AA91FF"/>
-            </a:solidFill>
-            <a:prstDash val="solid"/>
-          </a:ln>
-        </p:spPr>
-      </p:sp>
-      <p:sp>
-        <p:nvSpPr>
-          <p:cNvPr id="12" name="">
-            <a:extLst xmlns:a="http://schemas.openxmlformats.org/drawingml/2006/main">
-              <a:ext uri="{FF2B5EF4-FFF2-40B4-BE49-F238E27FC236}">
-                <a16:creationId xmlns:a16="http://schemas.microsoft.com/office/drawing/2014/main" id="{47EAE26B-B3EC-41B8-845B-176700D061E0}"/>
-              </a:ext>
-            </a:extLst>
-          </p:cNvPr>
-          <p:cNvSpPr>
-            <a:spLocks xmlns:a="http://schemas.openxmlformats.org/drawingml/2006/main" noGrp="1"/>
-          </p:cNvSpPr>
-          <p:nvPr/>
-        </p:nvSpPr>
-        <p:spPr>
-          <a:xfrm xmlns:a="http://schemas.openxmlformats.org/drawingml/2006/main">
-            <a:off x="2743200" y="4400550"/>
-            <a:ext cx="552450" cy="285750"/>
-          </a:xfrm>
-          <a:prstGeom xmlns:a="http://schemas.openxmlformats.org/drawingml/2006/main" prst="rect">
-            <a:avLst/>
-          </a:prstGeom>
-          <a:noFill xmlns:a="http://schemas.openxmlformats.org/drawingml/2006/main"/>
-          <a:ln xmlns:a="http://schemas.openxmlformats.org/drawingml/2006/main" w="0">
-            <a:noFill/>
-            <a:prstDash val="solid"/>
-          </a:ln>
-        </p:spPr>
-        <p:txBody>
-          <a:bodyPr xmlns:a="http://schemas.openxmlformats.org/drawingml/2006/main" lIns="0" tIns="0" rIns="0" bIns="0" anchor="ctr"/>
-          <a:lstStyle xmlns:a="http://schemas.openxmlformats.org/drawingml/2006/main"/>
-          <a:p xmlns:a="http://schemas.openxmlformats.org/drawingml/2006/main">
-            <a:pPr algn="ctr">
-              <a:defRPr sz="750" b="1">
-                <a:solidFill>
-                  <a:srgbClr val="AA91FF"/>
-                </a:solidFill>
-                <a:latin typeface="Avenir Next"/>
-                <a:ea typeface="Avenir Next"/>
-                <a:cs typeface="Avenir Next"/>
-              </a:defRPr>
-            </a:pPr>
-            <a:r>
-              <a:rPr sz="750" b="1">
-                <a:solidFill>
-                  <a:srgbClr val="AA91FF"/>
-                </a:solidFill>
-                <a:latin typeface="Avenir Next"/>
-                <a:ea typeface="Avenir Next"/>
-                <a:cs typeface="Avenir Next"/>
-              </a:rPr>
-              <a:t>TA</a:t>
-            </a:r>
-          </a:p>
-        </p:txBody>
-      </p:sp>
-      <p:sp>
-        <p:nvSpPr>
-          <p:cNvPr id="13" name="">
-            <a:extLst xmlns:a="http://schemas.openxmlformats.org/drawingml/2006/main">
-              <a:ext uri="{FF2B5EF4-FFF2-40B4-BE49-F238E27FC236}">
-                <a16:creationId xmlns:a16="http://schemas.microsoft.com/office/drawing/2014/main" id="{22F69140-E91A-4FBE-AFD5-B0D8F7590BA1}"/>
-              </a:ext>
-            </a:extLst>
-          </p:cNvPr>
-          <p:cNvSpPr>
-            <a:spLocks xmlns:a="http://schemas.openxmlformats.org/drawingml/2006/main" noGrp="1"/>
-          </p:cNvSpPr>
-          <p:nvPr/>
-        </p:nvSpPr>
-        <p:spPr>
-          <a:xfrm xmlns:a="http://schemas.openxmlformats.org/drawingml/2006/main">
-            <a:off x="628650" y="4895850"/>
-            <a:ext cx="3333750" cy="304800"/>
-          </a:xfrm>
-          <a:prstGeom xmlns:a="http://schemas.openxmlformats.org/drawingml/2006/main" prst="rect">
-            <a:avLst/>
-          </a:prstGeom>
-          <a:noFill xmlns:a="http://schemas.openxmlformats.org/drawingml/2006/main"/>
-          <a:ln xmlns:a="http://schemas.openxmlformats.org/drawingml/2006/main" w="0">
-            <a:noFill/>
-            <a:prstDash val="solid"/>
-          </a:ln>
-        </p:spPr>
-        <p:txBody>
-          <a:bodyPr xmlns:a="http://schemas.openxmlformats.org/drawingml/2006/main" lIns="0" tIns="0" rIns="0" bIns="0" anchor="t"/>
-          <a:lstStyle xmlns:a="http://schemas.openxmlformats.org/drawingml/2006/main"/>
-          <a:p xmlns:a="http://schemas.openxmlformats.org/drawingml/2006/main">
-            <a:pPr algn="l">
-              <a:defRPr sz="975" b="1">
-                <a:solidFill>
-                  <a:srgbClr val="83F3C9"/>
-                </a:solidFill>
-                <a:latin typeface="Avenir Next"/>
-                <a:ea typeface="Avenir Next"/>
-                <a:cs typeface="Avenir Next"/>
-              </a:defRPr>
-            </a:pPr>
-            <a:r>
-              <a:rPr sz="975" b="1">
-                <a:solidFill>
-                  <a:srgbClr val="83F3C9"/>
-                </a:solidFill>
-                <a:latin typeface="Avenir Next"/>
-                <a:ea typeface="Avenir Next"/>
-                <a:cs typeface="Avenir Next"/>
-              </a:rPr>
-              <a:t>Access · readiness · capacity · flow</a:t>
-            </a:r>
-          </a:p>
-        </p:txBody>
-      </p:sp>
-      <p:sp>
-        <p:nvSpPr>
-          <p:cNvPr id="14" name="">
-            <a:extLst xmlns:a="http://schemas.openxmlformats.org/drawingml/2006/main">
-              <a:ext uri="{FF2B5EF4-FFF2-40B4-BE49-F238E27FC236}">
-                <a16:creationId xmlns:a16="http://schemas.microsoft.com/office/drawing/2014/main" id="{1A815670-93A5-4ADF-B935-3D414FE65093}"/>
-              </a:ext>
-            </a:extLst>
-          </p:cNvPr>
-          <p:cNvSpPr>
-            <a:spLocks xmlns:a="http://schemas.openxmlformats.org/drawingml/2006/main" noGrp="1"/>
-          </p:cNvSpPr>
-          <p:nvPr/>
-        </p:nvSpPr>
-        <p:spPr>
-          <a:xfrm xmlns:a="http://schemas.openxmlformats.org/drawingml/2006/main">
-            <a:off x="4648200" y="5200650"/>
-            <a:ext cx="6934200" cy="704850"/>
-          </a:xfrm>
-          <a:prstGeom xmlns:a="http://schemas.openxmlformats.org/drawingml/2006/main" prst="roundRect">
-            <a:avLst>
-              <a:gd name="adj" fmla="val 24324"/>
-            </a:avLst>
-          </a:prstGeom>
-          <a:solidFill xmlns:a="http://schemas.openxmlformats.org/drawingml/2006/main">
-            <a:srgbClr val="83F3C9"/>
-          </a:solidFill>
-          <a:ln xmlns:a="http://schemas.openxmlformats.org/drawingml/2006/main" w="0">
-            <a:solidFill>
-              <a:srgbClr val="83F3C9"/>
-            </a:solidFill>
-            <a:prstDash val="solid"/>
-          </a:ln>
-        </p:spPr>
-      </p:sp>
-      <p:sp>
-        <p:nvSpPr>
-          <p:cNvPr id="15" name="">
-            <a:extLst xmlns:a="http://schemas.openxmlformats.org/drawingml/2006/main">
-              <a:ext uri="{FF2B5EF4-FFF2-40B4-BE49-F238E27FC236}">
-                <a16:creationId xmlns:a16="http://schemas.microsoft.com/office/drawing/2014/main" id="{23B8318F-5494-48DE-A81D-5754E5F03A13}"/>
-              </a:ext>
-            </a:extLst>
-          </p:cNvPr>
-          <p:cNvSpPr>
-            <a:spLocks xmlns:a="http://schemas.openxmlformats.org/drawingml/2006/main" noGrp="1"/>
-          </p:cNvSpPr>
-          <p:nvPr/>
-        </p:nvSpPr>
-        <p:spPr>
-          <a:xfrm xmlns:a="http://schemas.openxmlformats.org/drawingml/2006/main">
-            <a:off x="4648200" y="5200650"/>
-            <a:ext cx="6934200" cy="704850"/>
-          </a:xfrm>
-          <a:prstGeom xmlns:a="http://schemas.openxmlformats.org/drawingml/2006/main" prst="rect">
-            <a:avLst/>
-          </a:prstGeom>
-          <a:noFill xmlns:a="http://schemas.openxmlformats.org/drawingml/2006/main"/>
-          <a:ln xmlns:a="http://schemas.openxmlformats.org/drawingml/2006/main" w="0">
-            <a:noFill/>
-            <a:prstDash val="solid"/>
-          </a:ln>
-        </p:spPr>
-        <p:txBody>
-          <a:bodyPr xmlns:a="http://schemas.openxmlformats.org/drawingml/2006/main" lIns="0" tIns="0" rIns="0" bIns="0" anchor="ctr"/>
-          <a:lstStyle xmlns:a="http://schemas.openxmlformats.org/drawingml/2006/main"/>
-          <a:p xmlns:a="http://schemas.openxmlformats.org/drawingml/2006/main">
-            <a:pPr algn="ctr">
-              <a:defRPr sz="1275" b="1">
-                <a:solidFill>
-                  <a:srgbClr val="0B1720"/>
-                </a:solidFill>
-                <a:latin typeface="Avenir Next"/>
-                <a:ea typeface="Avenir Next"/>
-                <a:cs typeface="Avenir Next"/>
-              </a:defRPr>
-            </a:pPr>
-            <a:r>
-              <a:rPr sz="1275" b="1">
-                <a:solidFill>
-                  <a:srgbClr val="0B1720"/>
-                </a:solidFill>
-                <a:latin typeface="Avenir Next"/>
-                <a:ea typeface="Avenir Next"/>
-                <a:cs typeface="Avenir Next"/>
-              </a:rPr>
-              <a:t>OPEN THE APP  →  RUN THE CASE</a:t>
-            </a:r>
-          </a:p>
-        </p:txBody>
-      </p:sp>
-      <p:sp>
-        <p:nvSpPr>
-          <p:cNvPr id="16" name="">
-            <a:extLst xmlns:a="http://schemas.openxmlformats.org/drawingml/2006/main">
-              <a:ext uri="{FF2B5EF4-FFF2-40B4-BE49-F238E27FC236}">
-                <a16:creationId xmlns:a16="http://schemas.microsoft.com/office/drawing/2014/main" id="{0183388A-B030-44CB-8CD1-7F82D2EF9768}"/>
-              </a:ext>
-            </a:extLst>
-          </p:cNvPr>
-          <p:cNvSpPr>
-            <a:spLocks xmlns:a="http://schemas.openxmlformats.org/drawingml/2006/main" noGrp="1"/>
-          </p:cNvSpPr>
-          <p:nvPr/>
-        </p:nvSpPr>
-        <p:spPr>
-          <a:xfrm xmlns:a="http://schemas.openxmlformats.org/drawingml/2006/main">
-            <a:off x="609600" y="6457950"/>
-            <a:ext cx="10287000" cy="209550"/>
-          </a:xfrm>
-          <a:prstGeom xmlns:a="http://schemas.openxmlformats.org/drawingml/2006/main" prst="rect">
-            <a:avLst/>
-          </a:prstGeom>
-          <a:noFill xmlns:a="http://schemas.openxmlformats.org/drawingml/2006/main"/>
-          <a:ln xmlns:a="http://schemas.openxmlformats.org/drawingml/2006/main" w="0">
-            <a:noFill/>
-            <a:prstDash val="solid"/>
-          </a:ln>
-        </p:spPr>
-        <p:txBody>
-          <a:bodyPr xmlns:a="http://schemas.openxmlformats.org/drawingml/2006/main" lIns="0" tIns="0" rIns="0" bIns="0" anchor="ctr"/>
-          <a:lstStyle xmlns:a="http://schemas.openxmlformats.org/drawingml/2006/main"/>
-          <a:p xmlns:a="http://schemas.openxmlformats.org/drawingml/2006/main">
-            <a:pPr algn="l">
-              <a:defRPr sz="675" b="0">
-                <a:solidFill>
-                  <a:srgbClr val="5F7078"/>
-                </a:solidFill>
-                <a:latin typeface="Avenir Next"/>
-                <a:ea typeface="Avenir Next"/>
-                <a:cs typeface="Avenir Next"/>
-              </a:defRPr>
-            </a:pPr>
-            <a:r>
-              <a:rPr sz="675" b="0">
-                <a:solidFill>
-                  <a:srgbClr val="5F7078"/>
-                </a:solidFill>
-                <a:latin typeface="Avenir Next"/>
-                <a:ea typeface="Avenir Next"/>
-                <a:cs typeface="Avenir Next"/>
-              </a:rPr>
-              <a:t>Demo scenario is synthetic and contains no patient data.</a:t>
-            </a:r>
-          </a:p>
-        </p:txBody>
-      </p:sp>
-      <p:sp>
-        <p:nvSpPr>
-          <p:cNvPr id="17" name="">
-            <a:extLst xmlns:a="http://schemas.openxmlformats.org/drawingml/2006/main">
-              <a:ext uri="{FF2B5EF4-FFF2-40B4-BE49-F238E27FC236}">
-                <a16:creationId xmlns:a16="http://schemas.microsoft.com/office/drawing/2014/main" id="{A871762B-B43D-4432-B6C3-5D7F4DD49A5C}"/>
-              </a:ext>
-            </a:extLst>
-          </p:cNvPr>
-          <p:cNvSpPr>
-            <a:spLocks xmlns:a="http://schemas.openxmlformats.org/drawingml/2006/main" noGrp="1"/>
-          </p:cNvSpPr>
-          <p:nvPr/>
-        </p:nvSpPr>
-        <p:spPr>
-          <a:xfrm xmlns:a="http://schemas.openxmlformats.org/drawingml/2006/main">
-            <a:off x="11258550" y="6438900"/>
-            <a:ext cx="323850" cy="209550"/>
-          </a:xfrm>
-          <a:prstGeom xmlns:a="http://schemas.openxmlformats.org/drawingml/2006/main" prst="rect">
-            <a:avLst/>
-          </a:prstGeom>
-          <a:noFill xmlns:a="http://schemas.openxmlformats.org/drawingml/2006/main"/>
-          <a:ln xmlns:a="http://schemas.openxmlformats.org/drawingml/2006/main" w="0">
-            <a:noFill/>
-            <a:prstDash val="solid"/>
-          </a:ln>
-        </p:spPr>
-        <p:txBody>
-          <a:bodyPr xmlns:a="http://schemas.openxmlformats.org/drawingml/2006/main" lIns="0" tIns="0" rIns="0" bIns="0" anchor="ctr"/>
-          <a:lstStyle xmlns:a="http://schemas.openxmlformats.org/drawingml/2006/main"/>
-          <a:p xmlns:a="http://schemas.openxmlformats.org/drawingml/2006/main">
-            <a:pPr algn="r">
-              <a:defRPr sz="825" b="1">
-                <a:solidFill>
-                  <a:srgbClr val="5F7078"/>
-                </a:solidFill>
-                <a:latin typeface="Avenir Next"/>
-                <a:ea typeface="Avenir Next"/>
-                <a:cs typeface="Avenir Next"/>
-              </a:defRPr>
-            </a:pPr>
-            <a:r>
-              <a:rPr sz="825" b="1">
-                <a:solidFill>
-                  <a:srgbClr val="5F7078"/>
-                </a:solidFill>
-                <a:latin typeface="Avenir Next"/>
-                <a:ea typeface="Avenir Next"/>
-                <a:cs typeface="Avenir Next"/>
-              </a:rPr>
-              <a:t>08</a:t>
-            </a:r>
-          </a:p>
-        </p:txBody>
-      </p:sp>
       <p:pic>
         <p:nvPicPr>
-          <p:cNvPr id="36" name=""/>
+          <p:cNvPr id="3" name=""/>
           <p:cNvPicPr>
             <a:picLocks xmlns:a="http://schemas.openxmlformats.org/drawingml/2006/main" noChangeAspect="1"/>
           </p:cNvPicPr>
           <p:nvPr/>
         </p:nvPicPr>
         <p:blipFill>
-          <a:blip xmlns:r="http://schemas.openxmlformats.org/officeDocument/2006/relationships" xmlns:a="http://schemas.openxmlformats.org/drawingml/2006/main" r:embed="R5ec5e826eb094c89"/>
-          <a:srcRect xmlns:a="http://schemas.openxmlformats.org/drawingml/2006/main" l="61" t="0" r="61" b="0"/>
+          <a:blip xmlns:r="http://schemas.openxmlformats.org/officeDocument/2006/relationships" xmlns:a="http://schemas.openxmlformats.org/drawingml/2006/main" r:embed="R94b9276825084ed0"/>
+          <a:srcRect xmlns:a="http://schemas.openxmlformats.org/drawingml/2006/main" l="0" t="0" r="0" b="0"/>
           <a:stretch xmlns:a="http://schemas.openxmlformats.org/drawingml/2006/main">
             <a:fillRect l="0" t="0" r="0" b="0"/>
           </a:stretch>
         </p:blipFill>
         <p:spPr>
           <a:xfrm xmlns:a="http://schemas.openxmlformats.org/drawingml/2006/main">
-            <a:off x="4648200" y="1066800"/>
-            <a:ext cx="6934200" cy="3905250"/>
-          </a:xfrm>
-          <a:prstGeom xmlns:a="http://schemas.openxmlformats.org/drawingml/2006/main" prst="roundRect">
-            <a:avLst>
-              <a:gd name="adj" fmla="val 5366"/>
-            </a:avLst>
+            <a:off x="0" y="0"/>
+            <a:ext cx="12192000" cy="6858000"/>
+          </a:xfrm>
+          <a:prstGeom xmlns:a="http://schemas.openxmlformats.org/drawingml/2006/main" prst="rect">
+            <a:avLst/>
           </a:prstGeom>
         </p:spPr>
       </p:pic>
+      <p:sp>
+        <p:nvSpPr>
+          <p:cNvPr id="2" name="">
+            <a:extLst xmlns:a="http://schemas.openxmlformats.org/drawingml/2006/main">
+              <a:ext uri="{FF2B5EF4-FFF2-40B4-BE49-F238E27FC236}">
+                <a16:creationId xmlns:a16="http://schemas.microsoft.com/office/drawing/2014/main" id="{669EA1F7-CFCC-48A0-A1B6-70466F76C4C6}"/>
+              </a:ext>
+            </a:extLst>
+          </p:cNvPr>
+          <p:cNvSpPr>
+            <a:spLocks xmlns:a="http://schemas.openxmlformats.org/drawingml/2006/main" noGrp="1"/>
+          </p:cNvSpPr>
+          <p:nvPr/>
+        </p:nvSpPr>
+        <p:spPr>
+          <a:xfrm xmlns:a="http://schemas.openxmlformats.org/drawingml/2006/main">
+            <a:off x="11258550" y="6515100"/>
+            <a:ext cx="323850" cy="190500"/>
+          </a:xfrm>
+          <a:prstGeom xmlns:a="http://schemas.openxmlformats.org/drawingml/2006/main" prst="rect">
+            <a:avLst/>
+          </a:prstGeom>
+          <a:noFill xmlns:a="http://schemas.openxmlformats.org/drawingml/2006/main"/>
+          <a:ln xmlns:a="http://schemas.openxmlformats.org/drawingml/2006/main" w="0">
+            <a:noFill/>
+            <a:prstDash val="solid"/>
+          </a:ln>
+        </p:spPr>
+        <p:txBody>
+          <a:bodyPr xmlns:a="http://schemas.openxmlformats.org/drawingml/2006/main" lIns="0" tIns="0" rIns="0" bIns="0" anchor="ctr"/>
+          <a:lstStyle xmlns:a="http://schemas.openxmlformats.org/drawingml/2006/main"/>
+          <a:p xmlns:a="http://schemas.openxmlformats.org/drawingml/2006/main">
+            <a:pPr algn="r">
+              <a:defRPr sz="750" b="1">
+                <a:solidFill>
+                  <a:srgbClr val="6F858D"/>
+                </a:solidFill>
+                <a:latin typeface="Avenir Next"/>
+                <a:ea typeface="Avenir Next"/>
+                <a:cs typeface="Avenir Next"/>
+              </a:defRPr>
+            </a:pPr>
+            <a:r>
+              <a:rPr sz="750" b="1">
+                <a:solidFill>
+                  <a:srgbClr val="6F858D"/>
+                </a:solidFill>
+                <a:latin typeface="Avenir Next"/>
+                <a:ea typeface="Avenir Next"/>
+                <a:cs typeface="Avenir Next"/>
+              </a:rPr>
+              <a:t>08</a:t>
+            </a:r>
+          </a:p>
+        </p:txBody>
+      </p:sp>
     </p:spTree>
     <p:extLst>
       <p:ext uri="{BB962C8B-B14F-4D97-AF65-F5344CB8AC3E}">
-        <p14:creationId xmlns:p14="http://schemas.microsoft.com/office/powerpoint/2010/main" val="1305255295"/>
+        <p14:creationId xmlns:p14="http://schemas.microsoft.com/office/powerpoint/2010/main" val="1165433005"/>
       </p:ext>
     </p:extLst>
   </p:cSld>
@@ -30169,7 +29365,7 @@
           <p:cNvPr id="1" name="">
             <a:extLst xmlns:a="http://schemas.openxmlformats.org/drawingml/2006/main">
               <a:ext uri="{FF2B5EF4-FFF2-40B4-BE49-F238E27FC236}">
-                <a16:creationId xmlns:a16="http://schemas.microsoft.com/office/drawing/2014/main" id="{F5EDD5DB-3E52-4B0B-88C0-53DEFCAE438E}"/>
+                <a16:creationId xmlns:a16="http://schemas.microsoft.com/office/drawing/2014/main" id="{BCE59857-5B5E-4C54-BA5E-4696A77744A8}"/>
               </a:ext>
             </a:extLst>
           </p:cNvPr>
@@ -30200,7 +29396,7 @@
           <p:cNvPr id="2" name="">
             <a:extLst xmlns:a="http://schemas.openxmlformats.org/drawingml/2006/main">
               <a:ext uri="{FF2B5EF4-FFF2-40B4-BE49-F238E27FC236}">
-                <a16:creationId xmlns:a16="http://schemas.microsoft.com/office/drawing/2014/main" id="{3A5B0A60-4DC4-483D-AC44-89BAA23E7F6F}"/>
+                <a16:creationId xmlns:a16="http://schemas.microsoft.com/office/drawing/2014/main" id="{06C16E28-D887-4DB6-BDCF-A4D84F2F8C22}"/>
               </a:ext>
             </a:extLst>
           </p:cNvPr>
@@ -30231,7 +29427,7 @@
           <p:cNvPr id="3" name="">
             <a:extLst xmlns:a="http://schemas.openxmlformats.org/drawingml/2006/main">
               <a:ext uri="{FF2B5EF4-FFF2-40B4-BE49-F238E27FC236}">
-                <a16:creationId xmlns:a16="http://schemas.microsoft.com/office/drawing/2014/main" id="{7E42313D-79FE-454E-AE56-2F083642D4F0}"/>
+                <a16:creationId xmlns:a16="http://schemas.microsoft.com/office/drawing/2014/main" id="{7DE0E820-B222-45A8-AA93-A563AAA7E627}"/>
               </a:ext>
             </a:extLst>
           </p:cNvPr>
@@ -30262,7 +29458,7 @@
           <p:cNvPr id="4" name="">
             <a:extLst xmlns:a="http://schemas.openxmlformats.org/drawingml/2006/main">
               <a:ext uri="{FF2B5EF4-FFF2-40B4-BE49-F238E27FC236}">
-                <a16:creationId xmlns:a16="http://schemas.microsoft.com/office/drawing/2014/main" id="{7768821D-19AB-400A-AD69-82E988BB216C}"/>
+                <a16:creationId xmlns:a16="http://schemas.microsoft.com/office/drawing/2014/main" id="{B6E2440E-8819-4081-8B1A-FB111E647862}"/>
               </a:ext>
             </a:extLst>
           </p:cNvPr>
@@ -30293,7 +29489,7 @@
           <p:cNvPr id="5" name="">
             <a:extLst xmlns:a="http://schemas.openxmlformats.org/drawingml/2006/main">
               <a:ext uri="{FF2B5EF4-FFF2-40B4-BE49-F238E27FC236}">
-                <a16:creationId xmlns:a16="http://schemas.microsoft.com/office/drawing/2014/main" id="{529E3633-065F-4C4D-890A-0081E1A1B308}"/>
+                <a16:creationId xmlns:a16="http://schemas.microsoft.com/office/drawing/2014/main" id="{2243B9F9-45D2-42E9-8A5D-60F6FFC30EBF}"/>
               </a:ext>
             </a:extLst>
           </p:cNvPr>
@@ -30324,7 +29520,7 @@
           <p:cNvPr id="6" name="">
             <a:extLst xmlns:a="http://schemas.openxmlformats.org/drawingml/2006/main">
               <a:ext uri="{FF2B5EF4-FFF2-40B4-BE49-F238E27FC236}">
-                <a16:creationId xmlns:a16="http://schemas.microsoft.com/office/drawing/2014/main" id="{E043B520-76A0-4E2A-9ABD-CB637A345483}"/>
+                <a16:creationId xmlns:a16="http://schemas.microsoft.com/office/drawing/2014/main" id="{5CB4A92D-2346-479F-8B5E-568F8950F2F5}"/>
               </a:ext>
             </a:extLst>
           </p:cNvPr>
@@ -30355,7 +29551,7 @@
           <p:cNvPr id="7" name="">
             <a:extLst xmlns:a="http://schemas.openxmlformats.org/drawingml/2006/main">
               <a:ext uri="{FF2B5EF4-FFF2-40B4-BE49-F238E27FC236}">
-                <a16:creationId xmlns:a16="http://schemas.microsoft.com/office/drawing/2014/main" id="{DE560194-D44C-4304-A7FD-3C3B6FE0B9AA}"/>
+                <a16:creationId xmlns:a16="http://schemas.microsoft.com/office/drawing/2014/main" id="{A20B29C4-FD70-4A6E-AACB-ED6055960DB8}"/>
               </a:ext>
             </a:extLst>
           </p:cNvPr>
@@ -30386,7 +29582,7 @@
           <p:cNvPr id="8" name="">
             <a:extLst xmlns:a="http://schemas.openxmlformats.org/drawingml/2006/main">
               <a:ext uri="{FF2B5EF4-FFF2-40B4-BE49-F238E27FC236}">
-                <a16:creationId xmlns:a16="http://schemas.microsoft.com/office/drawing/2014/main" id="{7FC7BE03-F32C-48DE-B5C5-6B47D2B4C2BF}"/>
+                <a16:creationId xmlns:a16="http://schemas.microsoft.com/office/drawing/2014/main" id="{4FFCAD46-C670-4B3C-997A-E7E81651C761}"/>
               </a:ext>
             </a:extLst>
           </p:cNvPr>
@@ -30417,7 +29613,7 @@
           <p:cNvPr id="9" name="">
             <a:extLst xmlns:a="http://schemas.openxmlformats.org/drawingml/2006/main">
               <a:ext uri="{FF2B5EF4-FFF2-40B4-BE49-F238E27FC236}">
-                <a16:creationId xmlns:a16="http://schemas.microsoft.com/office/drawing/2014/main" id="{B992C1BC-07D1-49EB-8742-CC48931B439C}"/>
+                <a16:creationId xmlns:a16="http://schemas.microsoft.com/office/drawing/2014/main" id="{085AC75A-3508-478C-8CD1-4C5EA5432CD4}"/>
               </a:ext>
             </a:extLst>
           </p:cNvPr>
@@ -30448,7 +29644,7 @@
           <p:cNvPr id="10" name="">
             <a:extLst xmlns:a="http://schemas.openxmlformats.org/drawingml/2006/main">
               <a:ext uri="{FF2B5EF4-FFF2-40B4-BE49-F238E27FC236}">
-                <a16:creationId xmlns:a16="http://schemas.microsoft.com/office/drawing/2014/main" id="{20EA5A02-8020-4DAE-9609-AEDD586BB821}"/>
+                <a16:creationId xmlns:a16="http://schemas.microsoft.com/office/drawing/2014/main" id="{CF926077-430D-46A4-AAEF-AFB6642557AB}"/>
               </a:ext>
             </a:extLst>
           </p:cNvPr>
@@ -30479,7 +29675,7 @@
           <p:cNvPr id="11" name="">
             <a:extLst xmlns:a="http://schemas.openxmlformats.org/drawingml/2006/main">
               <a:ext uri="{FF2B5EF4-FFF2-40B4-BE49-F238E27FC236}">
-                <a16:creationId xmlns:a16="http://schemas.microsoft.com/office/drawing/2014/main" id="{9E725356-0FD8-49FF-A10C-EDE58A073DA5}"/>
+                <a16:creationId xmlns:a16="http://schemas.microsoft.com/office/drawing/2014/main" id="{A3995372-1F5F-465F-A317-B87604C4CDEC}"/>
               </a:ext>
             </a:extLst>
           </p:cNvPr>
@@ -30510,7 +29706,7 @@
           <p:cNvPr id="12" name="">
             <a:extLst xmlns:a="http://schemas.openxmlformats.org/drawingml/2006/main">
               <a:ext uri="{FF2B5EF4-FFF2-40B4-BE49-F238E27FC236}">
-                <a16:creationId xmlns:a16="http://schemas.microsoft.com/office/drawing/2014/main" id="{1164B3A0-2FA6-4E16-8353-1263E442AB91}"/>
+                <a16:creationId xmlns:a16="http://schemas.microsoft.com/office/drawing/2014/main" id="{D5F6AFCE-B5D5-4B41-8B6E-FE1055C5BB57}"/>
               </a:ext>
             </a:extLst>
           </p:cNvPr>
@@ -30541,7 +29737,7 @@
           <p:cNvPr id="13" name="">
             <a:extLst xmlns:a="http://schemas.openxmlformats.org/drawingml/2006/main">
               <a:ext uri="{FF2B5EF4-FFF2-40B4-BE49-F238E27FC236}">
-                <a16:creationId xmlns:a16="http://schemas.microsoft.com/office/drawing/2014/main" id="{A2EF9E21-16F9-4037-B27F-74FBA80470D8}"/>
+                <a16:creationId xmlns:a16="http://schemas.microsoft.com/office/drawing/2014/main" id="{84003B77-CB86-4D6A-AA87-A55693343B79}"/>
               </a:ext>
             </a:extLst>
           </p:cNvPr>
@@ -30572,7 +29768,7 @@
           <p:cNvPr id="14" name="">
             <a:extLst xmlns:a="http://schemas.openxmlformats.org/drawingml/2006/main">
               <a:ext uri="{FF2B5EF4-FFF2-40B4-BE49-F238E27FC236}">
-                <a16:creationId xmlns:a16="http://schemas.microsoft.com/office/drawing/2014/main" id="{6FB4D243-EB34-49AA-9CEC-39349D079D42}"/>
+                <a16:creationId xmlns:a16="http://schemas.microsoft.com/office/drawing/2014/main" id="{AEA0397C-F452-4A2C-80D5-B14ECF3BC29C}"/>
               </a:ext>
             </a:extLst>
           </p:cNvPr>
@@ -30603,7 +29799,7 @@
           <p:cNvPr id="15" name="">
             <a:extLst xmlns:a="http://schemas.openxmlformats.org/drawingml/2006/main">
               <a:ext uri="{FF2B5EF4-FFF2-40B4-BE49-F238E27FC236}">
-                <a16:creationId xmlns:a16="http://schemas.microsoft.com/office/drawing/2014/main" id="{96601B89-A33F-464E-86B9-875D0F207D45}"/>
+                <a16:creationId xmlns:a16="http://schemas.microsoft.com/office/drawing/2014/main" id="{75E69FE1-744F-46FC-8D9B-EFCE5C56549F}"/>
               </a:ext>
             </a:extLst>
           </p:cNvPr>
@@ -30634,7 +29830,7 @@
           <p:cNvPr id="16" name="">
             <a:extLst xmlns:a="http://schemas.openxmlformats.org/drawingml/2006/main">
               <a:ext uri="{FF2B5EF4-FFF2-40B4-BE49-F238E27FC236}">
-                <a16:creationId xmlns:a16="http://schemas.microsoft.com/office/drawing/2014/main" id="{94682114-7809-4790-8F7D-509C828ED014}"/>
+                <a16:creationId xmlns:a16="http://schemas.microsoft.com/office/drawing/2014/main" id="{5778FA79-A3A3-4D0D-8556-01CCED6FA300}"/>
               </a:ext>
             </a:extLst>
           </p:cNvPr>
@@ -30665,7 +29861,7 @@
           <p:cNvPr id="17" name="">
             <a:extLst xmlns:a="http://schemas.openxmlformats.org/drawingml/2006/main">
               <a:ext uri="{FF2B5EF4-FFF2-40B4-BE49-F238E27FC236}">
-                <a16:creationId xmlns:a16="http://schemas.microsoft.com/office/drawing/2014/main" id="{C5A7E262-3CA5-48D8-BCC0-36F3CED67DFB}"/>
+                <a16:creationId xmlns:a16="http://schemas.microsoft.com/office/drawing/2014/main" id="{15495D3A-A551-4464-A4DE-9652B648F18A}"/>
               </a:ext>
             </a:extLst>
           </p:cNvPr>
@@ -30696,7 +29892,7 @@
           <p:cNvPr id="18" name="">
             <a:extLst xmlns:a="http://schemas.openxmlformats.org/drawingml/2006/main">
               <a:ext uri="{FF2B5EF4-FFF2-40B4-BE49-F238E27FC236}">
-                <a16:creationId xmlns:a16="http://schemas.microsoft.com/office/drawing/2014/main" id="{66C9FB02-5C31-4856-9F75-14DD0C502352}"/>
+                <a16:creationId xmlns:a16="http://schemas.microsoft.com/office/drawing/2014/main" id="{3CD9CDB5-477D-4A14-9715-290E717E7C87}"/>
               </a:ext>
             </a:extLst>
           </p:cNvPr>
@@ -30727,7 +29923,7 @@
           <p:cNvPr id="19" name="">
             <a:extLst xmlns:a="http://schemas.openxmlformats.org/drawingml/2006/main">
               <a:ext uri="{FF2B5EF4-FFF2-40B4-BE49-F238E27FC236}">
-                <a16:creationId xmlns:a16="http://schemas.microsoft.com/office/drawing/2014/main" id="{A137A8C2-8E93-40F4-9DFD-67AE9C61637E}"/>
+                <a16:creationId xmlns:a16="http://schemas.microsoft.com/office/drawing/2014/main" id="{F610EA14-A7DB-4D6A-AC2E-4E87FD941B57}"/>
               </a:ext>
             </a:extLst>
           </p:cNvPr>
@@ -30758,7 +29954,7 @@
           <p:cNvPr id="20" name="">
             <a:extLst xmlns:a="http://schemas.openxmlformats.org/drawingml/2006/main">
               <a:ext uri="{FF2B5EF4-FFF2-40B4-BE49-F238E27FC236}">
-                <a16:creationId xmlns:a16="http://schemas.microsoft.com/office/drawing/2014/main" id="{AF373C15-90C4-41AE-BFC1-E0F4CB776023}"/>
+                <a16:creationId xmlns:a16="http://schemas.microsoft.com/office/drawing/2014/main" id="{DE6FC740-1D4F-481B-9912-F217A045FFFA}"/>
               </a:ext>
             </a:extLst>
           </p:cNvPr>
@@ -30789,7 +29985,7 @@
           <p:cNvPr id="21" name="">
             <a:extLst xmlns:a="http://schemas.openxmlformats.org/drawingml/2006/main">
               <a:ext uri="{FF2B5EF4-FFF2-40B4-BE49-F238E27FC236}">
-                <a16:creationId xmlns:a16="http://schemas.microsoft.com/office/drawing/2014/main" id="{C21D02FA-7C1B-4607-8EFC-FEFB64E993A8}"/>
+                <a16:creationId xmlns:a16="http://schemas.microsoft.com/office/drawing/2014/main" id="{FFA20363-407B-4C1A-9363-1EFC70F96385}"/>
               </a:ext>
             </a:extLst>
           </p:cNvPr>
@@ -30820,7 +30016,7 @@
           <p:cNvPr id="22" name="">
             <a:extLst xmlns:a="http://schemas.openxmlformats.org/drawingml/2006/main">
               <a:ext uri="{FF2B5EF4-FFF2-40B4-BE49-F238E27FC236}">
-                <a16:creationId xmlns:a16="http://schemas.microsoft.com/office/drawing/2014/main" id="{1D1A1F31-DDD2-4A00-B2A8-B8744CC05436}"/>
+                <a16:creationId xmlns:a16="http://schemas.microsoft.com/office/drawing/2014/main" id="{2408D5E7-BEAF-45D3-B2E7-C178FEAC148D}"/>
               </a:ext>
             </a:extLst>
           </p:cNvPr>
@@ -30851,7 +30047,7 @@
           <p:cNvPr id="23" name="">
             <a:extLst xmlns:a="http://schemas.openxmlformats.org/drawingml/2006/main">
               <a:ext uri="{FF2B5EF4-FFF2-40B4-BE49-F238E27FC236}">
-                <a16:creationId xmlns:a16="http://schemas.microsoft.com/office/drawing/2014/main" id="{3E148DB8-0F34-4D2A-B332-9B2EF213150F}"/>
+                <a16:creationId xmlns:a16="http://schemas.microsoft.com/office/drawing/2014/main" id="{E4AD9B22-4F1E-455A-9E1F-4EFE1B92A621}"/>
               </a:ext>
             </a:extLst>
           </p:cNvPr>
@@ -30882,7 +30078,7 @@
           <p:cNvPr id="24" name="">
             <a:extLst xmlns:a="http://schemas.openxmlformats.org/drawingml/2006/main">
               <a:ext uri="{FF2B5EF4-FFF2-40B4-BE49-F238E27FC236}">
-                <a16:creationId xmlns:a16="http://schemas.microsoft.com/office/drawing/2014/main" id="{08C0BE3E-81CC-4D64-8F03-C0254971EF8A}"/>
+                <a16:creationId xmlns:a16="http://schemas.microsoft.com/office/drawing/2014/main" id="{C7EF52D2-3465-4190-9739-E1A5859EC33C}"/>
               </a:ext>
             </a:extLst>
           </p:cNvPr>
@@ -30913,7 +30109,7 @@
           <p:cNvPr id="25" name="">
             <a:extLst xmlns:a="http://schemas.openxmlformats.org/drawingml/2006/main">
               <a:ext uri="{FF2B5EF4-FFF2-40B4-BE49-F238E27FC236}">
-                <a16:creationId xmlns:a16="http://schemas.microsoft.com/office/drawing/2014/main" id="{CEC1358F-C821-49CF-A764-CFBE06FB19B2}"/>
+                <a16:creationId xmlns:a16="http://schemas.microsoft.com/office/drawing/2014/main" id="{5E970814-2C25-4930-A41E-C73BC9B39851}"/>
               </a:ext>
             </a:extLst>
           </p:cNvPr>
@@ -30944,7 +30140,7 @@
           <p:cNvPr id="26" name="">
             <a:extLst xmlns:a="http://schemas.openxmlformats.org/drawingml/2006/main">
               <a:ext uri="{FF2B5EF4-FFF2-40B4-BE49-F238E27FC236}">
-                <a16:creationId xmlns:a16="http://schemas.microsoft.com/office/drawing/2014/main" id="{7B24D0E1-2453-4341-9B34-AD7C0DC93543}"/>
+                <a16:creationId xmlns:a16="http://schemas.microsoft.com/office/drawing/2014/main" id="{07555571-085E-4AB6-8D67-A68FF02120F4}"/>
               </a:ext>
             </a:extLst>
           </p:cNvPr>
@@ -30975,7 +30171,7 @@
           <p:cNvPr id="27" name="">
             <a:extLst xmlns:a="http://schemas.openxmlformats.org/drawingml/2006/main">
               <a:ext uri="{FF2B5EF4-FFF2-40B4-BE49-F238E27FC236}">
-                <a16:creationId xmlns:a16="http://schemas.microsoft.com/office/drawing/2014/main" id="{C11679C5-34DC-4AD0-83B1-BD993AEED4F9}"/>
+                <a16:creationId xmlns:a16="http://schemas.microsoft.com/office/drawing/2014/main" id="{FAAEB978-ADC6-490A-81A4-1EBD83EE6392}"/>
               </a:ext>
             </a:extLst>
           </p:cNvPr>
@@ -31006,7 +30202,7 @@
           <p:cNvPr id="28" name="">
             <a:extLst xmlns:a="http://schemas.openxmlformats.org/drawingml/2006/main">
               <a:ext uri="{FF2B5EF4-FFF2-40B4-BE49-F238E27FC236}">
-                <a16:creationId xmlns:a16="http://schemas.microsoft.com/office/drawing/2014/main" id="{CFC91285-8FEB-4E2B-BB08-B709C2B03A7B}"/>
+                <a16:creationId xmlns:a16="http://schemas.microsoft.com/office/drawing/2014/main" id="{1E0A4F15-D42E-46D4-970E-CCE76DC9F3BA}"/>
               </a:ext>
             </a:extLst>
           </p:cNvPr>
@@ -31037,7 +30233,7 @@
           <p:cNvPr id="29" name="">
             <a:extLst xmlns:a="http://schemas.openxmlformats.org/drawingml/2006/main">
               <a:ext uri="{FF2B5EF4-FFF2-40B4-BE49-F238E27FC236}">
-                <a16:creationId xmlns:a16="http://schemas.microsoft.com/office/drawing/2014/main" id="{4CA3999B-71DB-4D1A-9EA9-EFC18F18D11C}"/>
+                <a16:creationId xmlns:a16="http://schemas.microsoft.com/office/drawing/2014/main" id="{2DD1CDC6-B2C8-45BF-A0DB-03094F03843B}"/>
               </a:ext>
             </a:extLst>
           </p:cNvPr>
@@ -31068,7 +30264,7 @@
           <p:cNvPr id="30" name="">
             <a:extLst xmlns:a="http://schemas.openxmlformats.org/drawingml/2006/main">
               <a:ext uri="{FF2B5EF4-FFF2-40B4-BE49-F238E27FC236}">
-                <a16:creationId xmlns:a16="http://schemas.microsoft.com/office/drawing/2014/main" id="{BB861FD0-A0CF-4ECE-B173-D98CE5DDD646}"/>
+                <a16:creationId xmlns:a16="http://schemas.microsoft.com/office/drawing/2014/main" id="{D64C4CF5-96BE-4BEC-8B83-391356AFF8B1}"/>
               </a:ext>
             </a:extLst>
           </p:cNvPr>
@@ -31099,7 +30295,7 @@
           <p:cNvPr id="31" name="">
             <a:extLst xmlns:a="http://schemas.openxmlformats.org/drawingml/2006/main">
               <a:ext uri="{FF2B5EF4-FFF2-40B4-BE49-F238E27FC236}">
-                <a16:creationId xmlns:a16="http://schemas.microsoft.com/office/drawing/2014/main" id="{A17DB122-3563-4207-A2A6-E5625ECD6213}"/>
+                <a16:creationId xmlns:a16="http://schemas.microsoft.com/office/drawing/2014/main" id="{FCB0135B-F5F7-4AF0-85AD-26C9E52E5634}"/>
               </a:ext>
             </a:extLst>
           </p:cNvPr>
@@ -31130,7 +30326,7 @@
           <p:cNvPr id="32" name="">
             <a:extLst xmlns:a="http://schemas.openxmlformats.org/drawingml/2006/main">
               <a:ext uri="{FF2B5EF4-FFF2-40B4-BE49-F238E27FC236}">
-                <a16:creationId xmlns:a16="http://schemas.microsoft.com/office/drawing/2014/main" id="{CEECAD0C-1C14-4C44-9083-85CB24E6C7A3}"/>
+                <a16:creationId xmlns:a16="http://schemas.microsoft.com/office/drawing/2014/main" id="{592C9EF5-D29B-4984-9336-4AA921361E06}"/>
               </a:ext>
             </a:extLst>
           </p:cNvPr>
@@ -31186,7 +30382,7 @@
           <p:cNvPr id="33" name="">
             <a:extLst xmlns:a="http://schemas.openxmlformats.org/drawingml/2006/main">
               <a:ext uri="{FF2B5EF4-FFF2-40B4-BE49-F238E27FC236}">
-                <a16:creationId xmlns:a16="http://schemas.microsoft.com/office/drawing/2014/main" id="{8071F3B7-8CC6-485A-80EC-D863B9B9D9D9}"/>
+                <a16:creationId xmlns:a16="http://schemas.microsoft.com/office/drawing/2014/main" id="{848BF447-16F3-4AFE-BD31-E7DE059D9007}"/>
               </a:ext>
             </a:extLst>
           </p:cNvPr>
@@ -31242,7 +30438,7 @@
           <p:cNvPr id="34" name="">
             <a:extLst xmlns:a="http://schemas.openxmlformats.org/drawingml/2006/main">
               <a:ext uri="{FF2B5EF4-FFF2-40B4-BE49-F238E27FC236}">
-                <a16:creationId xmlns:a16="http://schemas.microsoft.com/office/drawing/2014/main" id="{314910B7-AD7F-4AFB-BAB7-0237CC94FFF0}"/>
+                <a16:creationId xmlns:a16="http://schemas.microsoft.com/office/drawing/2014/main" id="{A05EDAA0-88C7-4F17-A323-F5E57C7A56E0}"/>
               </a:ext>
             </a:extLst>
           </p:cNvPr>
@@ -31298,7 +30494,7 @@
           <p:cNvPr id="35" name="">
             <a:extLst xmlns:a="http://schemas.openxmlformats.org/drawingml/2006/main">
               <a:ext uri="{FF2B5EF4-FFF2-40B4-BE49-F238E27FC236}">
-                <a16:creationId xmlns:a16="http://schemas.microsoft.com/office/drawing/2014/main" id="{B8C5FACF-F96F-4201-93D7-E3C0E9D2D7E3}"/>
+                <a16:creationId xmlns:a16="http://schemas.microsoft.com/office/drawing/2014/main" id="{3A9FDA3A-0E7E-4BE2-85E2-42D88B80B223}"/>
               </a:ext>
             </a:extLst>
           </p:cNvPr>
@@ -31333,7 +30529,7 @@
           <p:cNvPr id="36" name="">
             <a:extLst xmlns:a="http://schemas.openxmlformats.org/drawingml/2006/main">
               <a:ext uri="{FF2B5EF4-FFF2-40B4-BE49-F238E27FC236}">
-                <a16:creationId xmlns:a16="http://schemas.microsoft.com/office/drawing/2014/main" id="{76605361-A547-472D-AE26-8552EC2F4CAE}"/>
+                <a16:creationId xmlns:a16="http://schemas.microsoft.com/office/drawing/2014/main" id="{21021736-DB0A-4D61-A7F0-94879590CE91}"/>
               </a:ext>
             </a:extLst>
           </p:cNvPr>
@@ -31366,7 +30562,7 @@
           <p:cNvPr id="37" name="">
             <a:extLst xmlns:a="http://schemas.openxmlformats.org/drawingml/2006/main">
               <a:ext uri="{FF2B5EF4-FFF2-40B4-BE49-F238E27FC236}">
-                <a16:creationId xmlns:a16="http://schemas.microsoft.com/office/drawing/2014/main" id="{48A5B086-340E-467B-914D-72111C3C14DA}"/>
+                <a16:creationId xmlns:a16="http://schemas.microsoft.com/office/drawing/2014/main" id="{087C09AD-BE20-45A6-8AE2-363BDC16C8BF}"/>
               </a:ext>
             </a:extLst>
           </p:cNvPr>
@@ -31422,7 +30618,7 @@
           <p:cNvPr id="38" name="">
             <a:extLst xmlns:a="http://schemas.openxmlformats.org/drawingml/2006/main">
               <a:ext uri="{FF2B5EF4-FFF2-40B4-BE49-F238E27FC236}">
-                <a16:creationId xmlns:a16="http://schemas.microsoft.com/office/drawing/2014/main" id="{ED257633-924D-43F4-84E7-4BD38251D77B}"/>
+                <a16:creationId xmlns:a16="http://schemas.microsoft.com/office/drawing/2014/main" id="{4AABF954-720B-4026-A6DC-B9789D61BEB0}"/>
               </a:ext>
             </a:extLst>
           </p:cNvPr>
@@ -31478,7 +30674,7 @@
           <p:cNvPr id="39" name="">
             <a:extLst xmlns:a="http://schemas.openxmlformats.org/drawingml/2006/main">
               <a:ext uri="{FF2B5EF4-FFF2-40B4-BE49-F238E27FC236}">
-                <a16:creationId xmlns:a16="http://schemas.microsoft.com/office/drawing/2014/main" id="{51E09A50-D2D9-41E2-8F69-FD992CD1151A}"/>
+                <a16:creationId xmlns:a16="http://schemas.microsoft.com/office/drawing/2014/main" id="{0DD8F46C-80B7-4B37-A21F-F176D4F1BEF8}"/>
               </a:ext>
             </a:extLst>
           </p:cNvPr>
@@ -31534,7 +30730,7 @@
           <p:cNvPr id="40" name="">
             <a:extLst xmlns:a="http://schemas.openxmlformats.org/drawingml/2006/main">
               <a:ext uri="{FF2B5EF4-FFF2-40B4-BE49-F238E27FC236}">
-                <a16:creationId xmlns:a16="http://schemas.microsoft.com/office/drawing/2014/main" id="{5BF57FB2-7DF7-4263-ABA5-7F7DD867D9A6}"/>
+                <a16:creationId xmlns:a16="http://schemas.microsoft.com/office/drawing/2014/main" id="{AABD71F8-3F50-48EF-B664-B4AEEC9735B3}"/>
               </a:ext>
             </a:extLst>
           </p:cNvPr>
@@ -31569,7 +30765,7 @@
           <p:cNvPr id="41" name="">
             <a:extLst xmlns:a="http://schemas.openxmlformats.org/drawingml/2006/main">
               <a:ext uri="{FF2B5EF4-FFF2-40B4-BE49-F238E27FC236}">
-                <a16:creationId xmlns:a16="http://schemas.microsoft.com/office/drawing/2014/main" id="{927869B4-D696-4CDC-A479-EF0330A7ADEB}"/>
+                <a16:creationId xmlns:a16="http://schemas.microsoft.com/office/drawing/2014/main" id="{31407F53-0AE4-4001-AC7C-FE2F19C548D8}"/>
               </a:ext>
             </a:extLst>
           </p:cNvPr>
@@ -31602,7 +30798,7 @@
           <p:cNvPr id="42" name="">
             <a:extLst xmlns:a="http://schemas.openxmlformats.org/drawingml/2006/main">
               <a:ext uri="{FF2B5EF4-FFF2-40B4-BE49-F238E27FC236}">
-                <a16:creationId xmlns:a16="http://schemas.microsoft.com/office/drawing/2014/main" id="{D9D6D56C-A1E4-4ECB-A822-FB3F099507E6}"/>
+                <a16:creationId xmlns:a16="http://schemas.microsoft.com/office/drawing/2014/main" id="{32439514-68E9-4D68-8F6D-513223C6B72E}"/>
               </a:ext>
             </a:extLst>
           </p:cNvPr>
@@ -31658,7 +30854,7 @@
           <p:cNvPr id="43" name="">
             <a:extLst xmlns:a="http://schemas.openxmlformats.org/drawingml/2006/main">
               <a:ext uri="{FF2B5EF4-FFF2-40B4-BE49-F238E27FC236}">
-                <a16:creationId xmlns:a16="http://schemas.microsoft.com/office/drawing/2014/main" id="{596D6F7E-F5BC-463B-B29E-2F4EC26310E1}"/>
+                <a16:creationId xmlns:a16="http://schemas.microsoft.com/office/drawing/2014/main" id="{8604C14C-6BB2-4D3A-A67E-8D2468B377B0}"/>
               </a:ext>
             </a:extLst>
           </p:cNvPr>
@@ -31714,7 +30910,7 @@
           <p:cNvPr id="44" name="">
             <a:extLst xmlns:a="http://schemas.openxmlformats.org/drawingml/2006/main">
               <a:ext uri="{FF2B5EF4-FFF2-40B4-BE49-F238E27FC236}">
-                <a16:creationId xmlns:a16="http://schemas.microsoft.com/office/drawing/2014/main" id="{5E9272F1-AC5E-4F33-9818-C6AE1152C1D1}"/>
+                <a16:creationId xmlns:a16="http://schemas.microsoft.com/office/drawing/2014/main" id="{9CA77FDA-37A5-4496-A920-1EA08F8D1ECE}"/>
               </a:ext>
             </a:extLst>
           </p:cNvPr>
@@ -31770,7 +30966,7 @@
           <p:cNvPr id="45" name="">
             <a:extLst xmlns:a="http://schemas.openxmlformats.org/drawingml/2006/main">
               <a:ext uri="{FF2B5EF4-FFF2-40B4-BE49-F238E27FC236}">
-                <a16:creationId xmlns:a16="http://schemas.microsoft.com/office/drawing/2014/main" id="{F1899912-1131-4D12-8B75-31AF8483D67B}"/>
+                <a16:creationId xmlns:a16="http://schemas.microsoft.com/office/drawing/2014/main" id="{80BB854B-614A-4580-8279-440F3CFCC551}"/>
               </a:ext>
             </a:extLst>
           </p:cNvPr>
@@ -31805,7 +31001,7 @@
           <p:cNvPr id="46" name="">
             <a:extLst xmlns:a="http://schemas.openxmlformats.org/drawingml/2006/main">
               <a:ext uri="{FF2B5EF4-FFF2-40B4-BE49-F238E27FC236}">
-                <a16:creationId xmlns:a16="http://schemas.microsoft.com/office/drawing/2014/main" id="{CD4C57B5-04CE-46B0-AD42-178AC84CCC4A}"/>
+                <a16:creationId xmlns:a16="http://schemas.microsoft.com/office/drawing/2014/main" id="{170C2E9C-E235-418E-9AED-DB923CB78C4E}"/>
               </a:ext>
             </a:extLst>
           </p:cNvPr>
@@ -31838,7 +31034,7 @@
           <p:cNvPr id="47" name="">
             <a:extLst xmlns:a="http://schemas.openxmlformats.org/drawingml/2006/main">
               <a:ext uri="{FF2B5EF4-FFF2-40B4-BE49-F238E27FC236}">
-                <a16:creationId xmlns:a16="http://schemas.microsoft.com/office/drawing/2014/main" id="{3EC84BF2-7929-4F03-A3F8-E26F6FA573D8}"/>
+                <a16:creationId xmlns:a16="http://schemas.microsoft.com/office/drawing/2014/main" id="{9AA629E8-79A0-4E90-8312-A2F45C53B00C}"/>
               </a:ext>
             </a:extLst>
           </p:cNvPr>
@@ -31894,7 +31090,7 @@
           <p:cNvPr id="48" name="">
             <a:extLst xmlns:a="http://schemas.openxmlformats.org/drawingml/2006/main">
               <a:ext uri="{FF2B5EF4-FFF2-40B4-BE49-F238E27FC236}">
-                <a16:creationId xmlns:a16="http://schemas.microsoft.com/office/drawing/2014/main" id="{84394C30-099C-4245-9D8E-63D49035406F}"/>
+                <a16:creationId xmlns:a16="http://schemas.microsoft.com/office/drawing/2014/main" id="{D735098C-8F35-4E8B-BB2B-2FA5E87B9584}"/>
               </a:ext>
             </a:extLst>
           </p:cNvPr>
@@ -31950,7 +31146,7 @@
           <p:cNvPr id="49" name="">
             <a:extLst xmlns:a="http://schemas.openxmlformats.org/drawingml/2006/main">
               <a:ext uri="{FF2B5EF4-FFF2-40B4-BE49-F238E27FC236}">
-                <a16:creationId xmlns:a16="http://schemas.microsoft.com/office/drawing/2014/main" id="{0A1AB224-803E-4FD0-B54A-93E726A1B2A9}"/>
+                <a16:creationId xmlns:a16="http://schemas.microsoft.com/office/drawing/2014/main" id="{57F4B282-DC93-48C9-A32D-F9CA7A7D175C}"/>
               </a:ext>
             </a:extLst>
           </p:cNvPr>
@@ -32006,7 +31202,7 @@
           <p:cNvPr id="50" name="">
             <a:extLst xmlns:a="http://schemas.openxmlformats.org/drawingml/2006/main">
               <a:ext uri="{FF2B5EF4-FFF2-40B4-BE49-F238E27FC236}">
-                <a16:creationId xmlns:a16="http://schemas.microsoft.com/office/drawing/2014/main" id="{955C710C-3E86-4CA9-A9E5-22B0E09B4A35}"/>
+                <a16:creationId xmlns:a16="http://schemas.microsoft.com/office/drawing/2014/main" id="{09D1442D-0E6A-4F7F-ADBC-9426A9D00BC1}"/>
               </a:ext>
             </a:extLst>
           </p:cNvPr>
@@ -32041,7 +31237,7 @@
           <p:cNvPr id="51" name="">
             <a:extLst xmlns:a="http://schemas.openxmlformats.org/drawingml/2006/main">
               <a:ext uri="{FF2B5EF4-FFF2-40B4-BE49-F238E27FC236}">
-                <a16:creationId xmlns:a16="http://schemas.microsoft.com/office/drawing/2014/main" id="{1D1CAA61-B6C0-44AB-9758-1FFF3C218D48}"/>
+                <a16:creationId xmlns:a16="http://schemas.microsoft.com/office/drawing/2014/main" id="{7502D31F-3F68-4B31-BFF0-BEC7D7329072}"/>
               </a:ext>
             </a:extLst>
           </p:cNvPr>
@@ -32074,7 +31270,7 @@
           <p:cNvPr id="52" name="">
             <a:extLst xmlns:a="http://schemas.openxmlformats.org/drawingml/2006/main">
               <a:ext uri="{FF2B5EF4-FFF2-40B4-BE49-F238E27FC236}">
-                <a16:creationId xmlns:a16="http://schemas.microsoft.com/office/drawing/2014/main" id="{294A6A0C-A509-4954-87E3-DEDF32EFD377}"/>
+                <a16:creationId xmlns:a16="http://schemas.microsoft.com/office/drawing/2014/main" id="{0239CAA9-7EE3-47BE-BB10-B3A292052F09}"/>
               </a:ext>
             </a:extLst>
           </p:cNvPr>
@@ -32130,7 +31326,7 @@
           <p:cNvPr id="53" name="">
             <a:extLst xmlns:a="http://schemas.openxmlformats.org/drawingml/2006/main">
               <a:ext uri="{FF2B5EF4-FFF2-40B4-BE49-F238E27FC236}">
-                <a16:creationId xmlns:a16="http://schemas.microsoft.com/office/drawing/2014/main" id="{BF59C3FF-2F5F-4112-A7F0-500F9EED9097}"/>
+                <a16:creationId xmlns:a16="http://schemas.microsoft.com/office/drawing/2014/main" id="{FDEB9A9A-51AA-40C4-894E-70B45CDE058F}"/>
               </a:ext>
             </a:extLst>
           </p:cNvPr>
@@ -32186,7 +31382,7 @@
           <p:cNvPr id="54" name="">
             <a:extLst xmlns:a="http://schemas.openxmlformats.org/drawingml/2006/main">
               <a:ext uri="{FF2B5EF4-FFF2-40B4-BE49-F238E27FC236}">
-                <a16:creationId xmlns:a16="http://schemas.microsoft.com/office/drawing/2014/main" id="{809A7B23-8AD9-4940-A7FE-1F3AF9C30C7D}"/>
+                <a16:creationId xmlns:a16="http://schemas.microsoft.com/office/drawing/2014/main" id="{06E48328-86CE-4ACA-BFF2-83B5BB13D1EE}"/>
               </a:ext>
             </a:extLst>
           </p:cNvPr>
@@ -32242,7 +31438,7 @@
           <p:cNvPr id="55" name="">
             <a:extLst xmlns:a="http://schemas.openxmlformats.org/drawingml/2006/main">
               <a:ext uri="{FF2B5EF4-FFF2-40B4-BE49-F238E27FC236}">
-                <a16:creationId xmlns:a16="http://schemas.microsoft.com/office/drawing/2014/main" id="{050DDDD2-8F91-4438-AFD6-C2B49AF26A96}"/>
+                <a16:creationId xmlns:a16="http://schemas.microsoft.com/office/drawing/2014/main" id="{D453C257-1C57-4203-91C0-087F80B970B1}"/>
               </a:ext>
             </a:extLst>
           </p:cNvPr>
@@ -32277,7 +31473,7 @@
           <p:cNvPr id="56" name="">
             <a:extLst xmlns:a="http://schemas.openxmlformats.org/drawingml/2006/main">
               <a:ext uri="{FF2B5EF4-FFF2-40B4-BE49-F238E27FC236}">
-                <a16:creationId xmlns:a16="http://schemas.microsoft.com/office/drawing/2014/main" id="{0EF21517-CE55-45DB-8709-E48C8C4E8EB4}"/>
+                <a16:creationId xmlns:a16="http://schemas.microsoft.com/office/drawing/2014/main" id="{89EC2FD5-89D2-43A4-9DE6-CEFC8C307FC8}"/>
               </a:ext>
             </a:extLst>
           </p:cNvPr>
@@ -32333,7 +31529,7 @@
           <p:cNvPr id="57" name="">
             <a:extLst xmlns:a="http://schemas.openxmlformats.org/drawingml/2006/main">
               <a:ext uri="{FF2B5EF4-FFF2-40B4-BE49-F238E27FC236}">
-                <a16:creationId xmlns:a16="http://schemas.microsoft.com/office/drawing/2014/main" id="{63E74DFF-2CF4-4D78-8A4A-C004CD5F2FA4}"/>
+                <a16:creationId xmlns:a16="http://schemas.microsoft.com/office/drawing/2014/main" id="{C2EF480C-E32A-47D1-96EC-101263595AAE}"/>
               </a:ext>
             </a:extLst>
           </p:cNvPr>
@@ -32389,7 +31585,7 @@
           <p:cNvPr id="58" name="">
             <a:extLst xmlns:a="http://schemas.openxmlformats.org/drawingml/2006/main">
               <a:ext uri="{FF2B5EF4-FFF2-40B4-BE49-F238E27FC236}">
-                <a16:creationId xmlns:a16="http://schemas.microsoft.com/office/drawing/2014/main" id="{BC2C4EFD-57F9-469D-928B-2CB37F38C68A}"/>
+                <a16:creationId xmlns:a16="http://schemas.microsoft.com/office/drawing/2014/main" id="{4A9424D3-372C-44BA-AAF7-5814879F9BE4}"/>
               </a:ext>
             </a:extLst>
           </p:cNvPr>
@@ -32443,7 +31639,7 @@
     </p:spTree>
     <p:extLst>
       <p:ext uri="{BB962C8B-B14F-4D97-AF65-F5344CB8AC3E}">
-        <p14:creationId xmlns:p14="http://schemas.microsoft.com/office/powerpoint/2010/main" val="1786714560"/>
+        <p14:creationId xmlns:p14="http://schemas.microsoft.com/office/powerpoint/2010/main" val="396348614"/>
       </p:ext>
     </p:extLst>
   </p:cSld>

--- a/outputs/AI-Transforming-Hospital-Operations-SRS-2026.pptx
+++ b/outputs/AI-Transforming-Hospital-Operations-SRS-2026.pptx
@@ -2,28 +2,28 @@
 <file path=ppt/presentation.xml><?xml version="1.0" encoding="utf-8"?>
 <p:presentation xmlns:p="http://schemas.openxmlformats.org/presentationml/2006/main">
   <p:sldMasterIdLst>
-    <p:sldMasterId xmlns:r="http://schemas.openxmlformats.org/officeDocument/2006/relationships" id="2147483648" r:id="R464a1ecc4a814994"/>
+    <p:sldMasterId xmlns:r="http://schemas.openxmlformats.org/officeDocument/2006/relationships" id="2147483648" r:id="Ra756ebda8e544ff1"/>
   </p:sldMasterIdLst>
   <p:notesMasterIdLst>
-    <p:notesMasterId xmlns:r="http://schemas.openxmlformats.org/officeDocument/2006/relationships" r:id="R083272e6615d4e67"/>
+    <p:notesMasterId xmlns:r="http://schemas.openxmlformats.org/officeDocument/2006/relationships" r:id="R6abd22e0fa314727"/>
   </p:notesMasterIdLst>
   <p:sldIdLst>
-    <p:sldId xmlns:r="http://schemas.openxmlformats.org/officeDocument/2006/relationships" id="256" r:id="R353481b06b084180"/>
-    <p:sldId xmlns:r="http://schemas.openxmlformats.org/officeDocument/2006/relationships" id="257" r:id="R4004f2552f94452d"/>
-    <p:sldId xmlns:r="http://schemas.openxmlformats.org/officeDocument/2006/relationships" id="258" r:id="Rafd0cec0724241f2"/>
-    <p:sldId xmlns:r="http://schemas.openxmlformats.org/officeDocument/2006/relationships" id="259" r:id="R6551f2d3fca94408"/>
-    <p:sldId xmlns:r="http://schemas.openxmlformats.org/officeDocument/2006/relationships" id="260" r:id="Rd2598feb5f354124"/>
-    <p:sldId xmlns:r="http://schemas.openxmlformats.org/officeDocument/2006/relationships" id="261" r:id="R78d17f9905834f87"/>
-    <p:sldId xmlns:r="http://schemas.openxmlformats.org/officeDocument/2006/relationships" id="262" r:id="Rd589c00e73d944ce"/>
-    <p:sldId xmlns:r="http://schemas.openxmlformats.org/officeDocument/2006/relationships" id="263" r:id="R541899248ff84407"/>
-    <p:sldId xmlns:r="http://schemas.openxmlformats.org/officeDocument/2006/relationships" id="264" r:id="R20c36a9976fe4881"/>
-    <p:sldId xmlns:r="http://schemas.openxmlformats.org/officeDocument/2006/relationships" id="265" r:id="R0210fd83ea594c92"/>
-    <p:sldId xmlns:r="http://schemas.openxmlformats.org/officeDocument/2006/relationships" id="266" r:id="R42a99fe409184011"/>
-    <p:sldId xmlns:r="http://schemas.openxmlformats.org/officeDocument/2006/relationships" id="267" r:id="R8c2f68d0b3cc4d1e"/>
-    <p:sldId xmlns:r="http://schemas.openxmlformats.org/officeDocument/2006/relationships" id="268" r:id="R5623bf48132849a2"/>
-    <p:sldId xmlns:r="http://schemas.openxmlformats.org/officeDocument/2006/relationships" id="269" r:id="R1e5fb8492eef44d7"/>
-    <p:sldId xmlns:r="http://schemas.openxmlformats.org/officeDocument/2006/relationships" id="270" r:id="R819e6c251f2b4d4c"/>
-    <p:sldId xmlns:r="http://schemas.openxmlformats.org/officeDocument/2006/relationships" id="271" r:id="R4b7da2f81e4249cf"/>
+    <p:sldId xmlns:r="http://schemas.openxmlformats.org/officeDocument/2006/relationships" id="256" r:id="R138f23958a274a4f"/>
+    <p:sldId xmlns:r="http://schemas.openxmlformats.org/officeDocument/2006/relationships" id="257" r:id="R8a9b99c8c6374fbf"/>
+    <p:sldId xmlns:r="http://schemas.openxmlformats.org/officeDocument/2006/relationships" id="258" r:id="Rf6177f5291fd4c1c"/>
+    <p:sldId xmlns:r="http://schemas.openxmlformats.org/officeDocument/2006/relationships" id="259" r:id="Rb6f2329dc2d34cfa"/>
+    <p:sldId xmlns:r="http://schemas.openxmlformats.org/officeDocument/2006/relationships" id="260" r:id="R1348f3f0f0cd4540"/>
+    <p:sldId xmlns:r="http://schemas.openxmlformats.org/officeDocument/2006/relationships" id="261" r:id="R673fbf304ff04640"/>
+    <p:sldId xmlns:r="http://schemas.openxmlformats.org/officeDocument/2006/relationships" id="262" r:id="Raf25bf298a9d4264"/>
+    <p:sldId xmlns:r="http://schemas.openxmlformats.org/officeDocument/2006/relationships" id="263" r:id="R22a40250c7324013"/>
+    <p:sldId xmlns:r="http://schemas.openxmlformats.org/officeDocument/2006/relationships" id="264" r:id="R045ee8b3cdec4d13"/>
+    <p:sldId xmlns:r="http://schemas.openxmlformats.org/officeDocument/2006/relationships" id="265" r:id="R451da572a90e47e3"/>
+    <p:sldId xmlns:r="http://schemas.openxmlformats.org/officeDocument/2006/relationships" id="266" r:id="R92e73b1202bd4991"/>
+    <p:sldId xmlns:r="http://schemas.openxmlformats.org/officeDocument/2006/relationships" id="267" r:id="Rec473b6c5648495e"/>
+    <p:sldId xmlns:r="http://schemas.openxmlformats.org/officeDocument/2006/relationships" id="268" r:id="R2df208edeae247c6"/>
+    <p:sldId xmlns:r="http://schemas.openxmlformats.org/officeDocument/2006/relationships" id="269" r:id="R745bbaa9cf69471c"/>
+    <p:sldId xmlns:r="http://schemas.openxmlformats.org/officeDocument/2006/relationships" id="270" r:id="R76f6643c64d14e0a"/>
+    <p:sldId xmlns:r="http://schemas.openxmlformats.org/officeDocument/2006/relationships" id="271" r:id="R7b8efbe29ac2445a"/>
   </p:sldIdLst>
   <p:sldSz cx="12192000" cy="6858000"/>
   <p:notesSz cx="6858000" cy="9144000"/>
@@ -1552,7 +1552,7 @@
           <a:lstStyle xmlns:a="http://schemas.openxmlformats.org/drawingml/2006/main"/>
           <a:p xmlns:a="http://schemas.openxmlformats.org/drawingml/2006/main">
             <a:r>
-              <a:t>Transition into the Hospital Lab. Say: same 600 synthetic episodes, same 30-day demand trace, same clinical priority—different operating rules. Reset the twin, run the guided sequence, and ask the audience to watch the constraint move.</a:t>
+              <a:t>Transition into the Hospital Lab. Say: same 600 synthetic episodes, same 30-day demand trace, same clinical priority—different operating rules. Reset the twin, run the guided sequence, and ask the audience to watch the constraint move. Point out once that the cars, EMS, patients, and caregivers keep moving at the same speed; improvement appears as fewer touches, shorter journeys, more completed episodes, and a different binding constraint.</a:t>
             </a:r>
           </a:p>
           <a:p xmlns:a="http://schemas.openxmlformats.org/drawingml/2006/main">
@@ -1562,7 +1562,7 @@
           </a:p>
           <a:p xmlns:a="http://schemas.openxmlformats.org/drawingml/2006/main">
             <a:r>
-              <a:t>Credibility moments: Precision Medicine adds selective upstream work; Robotics releases local capacity without immediately moving enterprise throughput; the connected system ultimately exposes staffed recovery capacity as the next investment decision. All coefficients are illustrative assumptions, not observed AdventHealth performance.</a:t>
+              <a:t>Credibility moments: pain-point callouts resolve and migrate as each lever enters the operating model; Precision Medicine adds selective upstream work; Robotics releases local capacity without immediately moving enterprise throughput; the connected system ultimately exposes staffed recovery capacity as the next investment decision. All coefficients are illustrative assumptions, not observed AdventHealth performance.</a:t>
             </a:r>
           </a:p>
         </p:txBody>
@@ -1700,7 +1700,7 @@
   </p:cSld>
   <p:clrMap bg1="lt1" tx1="dk1" bg2="lt2" tx2="dk2" accent1="accent1" accent2="accent2" accent3="accent3" accent4="accent4" accent5="accent5" accent6="accent6" hlink="hlink" folHlink="folHlink"/>
   <p:sldLayoutIdLst>
-    <p:sldLayoutId xmlns:r="http://schemas.openxmlformats.org/officeDocument/2006/relationships" id="2147483649" r:id="Ra1062157300c464b"/>
+    <p:sldLayoutId xmlns:r="http://schemas.openxmlformats.org/officeDocument/2006/relationships" id="2147483649" r:id="R37792025d10d421b"/>
   </p:sldLayoutIdLst>
   <p:txStyles>
     <p:titleStyle>
@@ -2251,7 +2251,7 @@
           <p:cNvPr id="1" name="">
             <a:extLst xmlns:a="http://schemas.openxmlformats.org/drawingml/2006/main">
               <a:ext uri="{FF2B5EF4-FFF2-40B4-BE49-F238E27FC236}">
-                <a16:creationId xmlns:a16="http://schemas.microsoft.com/office/drawing/2014/main" id="{0B708058-5F6F-4500-B7C7-FB21A0B6B5DE}"/>
+                <a16:creationId xmlns:a16="http://schemas.microsoft.com/office/drawing/2014/main" id="{4F20CE48-8CC9-4617-A5FD-2B82C6889E45}"/>
               </a:ext>
             </a:extLst>
           </p:cNvPr>
@@ -2282,7 +2282,7 @@
           <p:cNvPr id="2" name="">
             <a:extLst xmlns:a="http://schemas.openxmlformats.org/drawingml/2006/main">
               <a:ext uri="{FF2B5EF4-FFF2-40B4-BE49-F238E27FC236}">
-                <a16:creationId xmlns:a16="http://schemas.microsoft.com/office/drawing/2014/main" id="{CC2255ED-7D4A-43C9-8D7B-FE2B44F2F8DB}"/>
+                <a16:creationId xmlns:a16="http://schemas.microsoft.com/office/drawing/2014/main" id="{ACC2065B-65A0-41BC-95DE-884FD3190687}"/>
               </a:ext>
             </a:extLst>
           </p:cNvPr>
@@ -2313,7 +2313,7 @@
           <p:cNvPr id="3" name="">
             <a:extLst xmlns:a="http://schemas.openxmlformats.org/drawingml/2006/main">
               <a:ext uri="{FF2B5EF4-FFF2-40B4-BE49-F238E27FC236}">
-                <a16:creationId xmlns:a16="http://schemas.microsoft.com/office/drawing/2014/main" id="{71D1F309-F29B-4CFE-972C-82E8B169CF25}"/>
+                <a16:creationId xmlns:a16="http://schemas.microsoft.com/office/drawing/2014/main" id="{6C731FA4-5953-4C18-BE28-8C3EE72BEA92}"/>
               </a:ext>
             </a:extLst>
           </p:cNvPr>
@@ -2344,7 +2344,7 @@
           <p:cNvPr id="4" name="">
             <a:extLst xmlns:a="http://schemas.openxmlformats.org/drawingml/2006/main">
               <a:ext uri="{FF2B5EF4-FFF2-40B4-BE49-F238E27FC236}">
-                <a16:creationId xmlns:a16="http://schemas.microsoft.com/office/drawing/2014/main" id="{A233B0BC-C486-4413-BA4E-E1531C11E5D4}"/>
+                <a16:creationId xmlns:a16="http://schemas.microsoft.com/office/drawing/2014/main" id="{B9D10141-219F-4A16-A6A3-A842E2DCD6B9}"/>
               </a:ext>
             </a:extLst>
           </p:cNvPr>
@@ -2375,7 +2375,7 @@
           <p:cNvPr id="5" name="">
             <a:extLst xmlns:a="http://schemas.openxmlformats.org/drawingml/2006/main">
               <a:ext uri="{FF2B5EF4-FFF2-40B4-BE49-F238E27FC236}">
-                <a16:creationId xmlns:a16="http://schemas.microsoft.com/office/drawing/2014/main" id="{3C9EF9F5-5FEF-4F42-9177-2B2DA7134C1F}"/>
+                <a16:creationId xmlns:a16="http://schemas.microsoft.com/office/drawing/2014/main" id="{08E6BEE1-C7D0-46A6-B55F-D85FAFF2B3BD}"/>
               </a:ext>
             </a:extLst>
           </p:cNvPr>
@@ -2406,7 +2406,7 @@
           <p:cNvPr id="6" name="">
             <a:extLst xmlns:a="http://schemas.openxmlformats.org/drawingml/2006/main">
               <a:ext uri="{FF2B5EF4-FFF2-40B4-BE49-F238E27FC236}">
-                <a16:creationId xmlns:a16="http://schemas.microsoft.com/office/drawing/2014/main" id="{B5E67FB0-F969-4763-AC6F-6A3A54CB317D}"/>
+                <a16:creationId xmlns:a16="http://schemas.microsoft.com/office/drawing/2014/main" id="{B50A8C70-7B56-4B8A-985C-0F483DB8B074}"/>
               </a:ext>
             </a:extLst>
           </p:cNvPr>
@@ -2437,7 +2437,7 @@
           <p:cNvPr id="7" name="">
             <a:extLst xmlns:a="http://schemas.openxmlformats.org/drawingml/2006/main">
               <a:ext uri="{FF2B5EF4-FFF2-40B4-BE49-F238E27FC236}">
-                <a16:creationId xmlns:a16="http://schemas.microsoft.com/office/drawing/2014/main" id="{8759E0B8-2F5C-4AD1-AD44-5EB45FB8A465}"/>
+                <a16:creationId xmlns:a16="http://schemas.microsoft.com/office/drawing/2014/main" id="{C514DE43-7AC0-481E-A8F5-9990A2EFCA2E}"/>
               </a:ext>
             </a:extLst>
           </p:cNvPr>
@@ -2468,7 +2468,7 @@
           <p:cNvPr id="8" name="">
             <a:extLst xmlns:a="http://schemas.openxmlformats.org/drawingml/2006/main">
               <a:ext uri="{FF2B5EF4-FFF2-40B4-BE49-F238E27FC236}">
-                <a16:creationId xmlns:a16="http://schemas.microsoft.com/office/drawing/2014/main" id="{7D715476-5F90-4D08-855C-47E2F01C7997}"/>
+                <a16:creationId xmlns:a16="http://schemas.microsoft.com/office/drawing/2014/main" id="{FE9CD367-DF25-43C0-9DFD-6C4ACBBD483D}"/>
               </a:ext>
             </a:extLst>
           </p:cNvPr>
@@ -2499,7 +2499,7 @@
           <p:cNvPr id="9" name="">
             <a:extLst xmlns:a="http://schemas.openxmlformats.org/drawingml/2006/main">
               <a:ext uri="{FF2B5EF4-FFF2-40B4-BE49-F238E27FC236}">
-                <a16:creationId xmlns:a16="http://schemas.microsoft.com/office/drawing/2014/main" id="{7A616909-0C6A-45F9-B911-3083606DDD43}"/>
+                <a16:creationId xmlns:a16="http://schemas.microsoft.com/office/drawing/2014/main" id="{311679EE-8109-43AB-9F3A-0C755C447CDB}"/>
               </a:ext>
             </a:extLst>
           </p:cNvPr>
@@ -2530,7 +2530,7 @@
           <p:cNvPr id="10" name="">
             <a:extLst xmlns:a="http://schemas.openxmlformats.org/drawingml/2006/main">
               <a:ext uri="{FF2B5EF4-FFF2-40B4-BE49-F238E27FC236}">
-                <a16:creationId xmlns:a16="http://schemas.microsoft.com/office/drawing/2014/main" id="{FEAA2257-A67C-45FC-A37A-51071C4A141B}"/>
+                <a16:creationId xmlns:a16="http://schemas.microsoft.com/office/drawing/2014/main" id="{D1E98575-BB65-4FB4-9703-93DDF4951B4E}"/>
               </a:ext>
             </a:extLst>
           </p:cNvPr>
@@ -2561,7 +2561,7 @@
           <p:cNvPr id="11" name="">
             <a:extLst xmlns:a="http://schemas.openxmlformats.org/drawingml/2006/main">
               <a:ext uri="{FF2B5EF4-FFF2-40B4-BE49-F238E27FC236}">
-                <a16:creationId xmlns:a16="http://schemas.microsoft.com/office/drawing/2014/main" id="{3397292B-45EF-4FCB-ABC7-B4AF8AE476FD}"/>
+                <a16:creationId xmlns:a16="http://schemas.microsoft.com/office/drawing/2014/main" id="{5B760CEA-28DB-477A-9F0A-A7CADB594F53}"/>
               </a:ext>
             </a:extLst>
           </p:cNvPr>
@@ -2592,7 +2592,7 @@
           <p:cNvPr id="12" name="">
             <a:extLst xmlns:a="http://schemas.openxmlformats.org/drawingml/2006/main">
               <a:ext uri="{FF2B5EF4-FFF2-40B4-BE49-F238E27FC236}">
-                <a16:creationId xmlns:a16="http://schemas.microsoft.com/office/drawing/2014/main" id="{0F997F9C-C5DD-4B4D-A150-15395586F2AF}"/>
+                <a16:creationId xmlns:a16="http://schemas.microsoft.com/office/drawing/2014/main" id="{ABD31392-DF84-42C5-B5CB-BCD545F42328}"/>
               </a:ext>
             </a:extLst>
           </p:cNvPr>
@@ -2623,7 +2623,7 @@
           <p:cNvPr id="13" name="">
             <a:extLst xmlns:a="http://schemas.openxmlformats.org/drawingml/2006/main">
               <a:ext uri="{FF2B5EF4-FFF2-40B4-BE49-F238E27FC236}">
-                <a16:creationId xmlns:a16="http://schemas.microsoft.com/office/drawing/2014/main" id="{B4145A39-AACB-4208-B7DF-185617623347}"/>
+                <a16:creationId xmlns:a16="http://schemas.microsoft.com/office/drawing/2014/main" id="{9D8B21CB-7F60-4EE1-9285-EEED0D826C7B}"/>
               </a:ext>
             </a:extLst>
           </p:cNvPr>
@@ -2654,7 +2654,7 @@
           <p:cNvPr id="14" name="">
             <a:extLst xmlns:a="http://schemas.openxmlformats.org/drawingml/2006/main">
               <a:ext uri="{FF2B5EF4-FFF2-40B4-BE49-F238E27FC236}">
-                <a16:creationId xmlns:a16="http://schemas.microsoft.com/office/drawing/2014/main" id="{17C6DA2B-018C-43BE-9209-C5CF4375A585}"/>
+                <a16:creationId xmlns:a16="http://schemas.microsoft.com/office/drawing/2014/main" id="{A2ABEB5F-C9CD-486F-8FD9-CA96F0F4EEAC}"/>
               </a:ext>
             </a:extLst>
           </p:cNvPr>
@@ -2685,7 +2685,7 @@
           <p:cNvPr id="15" name="">
             <a:extLst xmlns:a="http://schemas.openxmlformats.org/drawingml/2006/main">
               <a:ext uri="{FF2B5EF4-FFF2-40B4-BE49-F238E27FC236}">
-                <a16:creationId xmlns:a16="http://schemas.microsoft.com/office/drawing/2014/main" id="{6A304AFF-8762-4A06-9867-C83812BB3CDC}"/>
+                <a16:creationId xmlns:a16="http://schemas.microsoft.com/office/drawing/2014/main" id="{ABBE5934-FD31-43BD-8E10-E17F3959D222}"/>
               </a:ext>
             </a:extLst>
           </p:cNvPr>
@@ -2716,7 +2716,7 @@
           <p:cNvPr id="16" name="">
             <a:extLst xmlns:a="http://schemas.openxmlformats.org/drawingml/2006/main">
               <a:ext uri="{FF2B5EF4-FFF2-40B4-BE49-F238E27FC236}">
-                <a16:creationId xmlns:a16="http://schemas.microsoft.com/office/drawing/2014/main" id="{BD677C29-AD8C-47E4-96A2-F35D8E4B4E2E}"/>
+                <a16:creationId xmlns:a16="http://schemas.microsoft.com/office/drawing/2014/main" id="{A7E7D6E5-8F8F-475F-80AD-06740C49CCBC}"/>
               </a:ext>
             </a:extLst>
           </p:cNvPr>
@@ -2747,7 +2747,7 @@
           <p:cNvPr id="17" name="">
             <a:extLst xmlns:a="http://schemas.openxmlformats.org/drawingml/2006/main">
               <a:ext uri="{FF2B5EF4-FFF2-40B4-BE49-F238E27FC236}">
-                <a16:creationId xmlns:a16="http://schemas.microsoft.com/office/drawing/2014/main" id="{54F55FDD-FE16-429E-B7C6-35D39995DA23}"/>
+                <a16:creationId xmlns:a16="http://schemas.microsoft.com/office/drawing/2014/main" id="{59764D6F-2C73-444D-B4D7-21810C2C3DA9}"/>
               </a:ext>
             </a:extLst>
           </p:cNvPr>
@@ -2778,7 +2778,7 @@
           <p:cNvPr id="18" name="">
             <a:extLst xmlns:a="http://schemas.openxmlformats.org/drawingml/2006/main">
               <a:ext uri="{FF2B5EF4-FFF2-40B4-BE49-F238E27FC236}">
-                <a16:creationId xmlns:a16="http://schemas.microsoft.com/office/drawing/2014/main" id="{DEB1147B-83B7-492A-84E0-ACE20A32B2A1}"/>
+                <a16:creationId xmlns:a16="http://schemas.microsoft.com/office/drawing/2014/main" id="{869673DC-F2ED-4C1B-BD1A-64E255DE1A92}"/>
               </a:ext>
             </a:extLst>
           </p:cNvPr>
@@ -2809,7 +2809,7 @@
           <p:cNvPr id="19" name="">
             <a:extLst xmlns:a="http://schemas.openxmlformats.org/drawingml/2006/main">
               <a:ext uri="{FF2B5EF4-FFF2-40B4-BE49-F238E27FC236}">
-                <a16:creationId xmlns:a16="http://schemas.microsoft.com/office/drawing/2014/main" id="{49A346C3-CC14-4570-A67D-0FDCB040E845}"/>
+                <a16:creationId xmlns:a16="http://schemas.microsoft.com/office/drawing/2014/main" id="{7AAC7839-789D-4030-A7E3-CC996F127B76}"/>
               </a:ext>
             </a:extLst>
           </p:cNvPr>
@@ -2840,7 +2840,7 @@
           <p:cNvPr id="20" name="">
             <a:extLst xmlns:a="http://schemas.openxmlformats.org/drawingml/2006/main">
               <a:ext uri="{FF2B5EF4-FFF2-40B4-BE49-F238E27FC236}">
-                <a16:creationId xmlns:a16="http://schemas.microsoft.com/office/drawing/2014/main" id="{2DB64C96-908A-4D02-8974-17EFF7C9B4A5}"/>
+                <a16:creationId xmlns:a16="http://schemas.microsoft.com/office/drawing/2014/main" id="{08A35764-064E-4DD9-98CA-4BD436A057F0}"/>
               </a:ext>
             </a:extLst>
           </p:cNvPr>
@@ -2871,7 +2871,7 @@
           <p:cNvPr id="21" name="">
             <a:extLst xmlns:a="http://schemas.openxmlformats.org/drawingml/2006/main">
               <a:ext uri="{FF2B5EF4-FFF2-40B4-BE49-F238E27FC236}">
-                <a16:creationId xmlns:a16="http://schemas.microsoft.com/office/drawing/2014/main" id="{787F48E9-E0E3-4B29-8E4D-B905DCAE0B97}"/>
+                <a16:creationId xmlns:a16="http://schemas.microsoft.com/office/drawing/2014/main" id="{D94624C5-6DBF-4F51-B4F9-1A5DD8715589}"/>
               </a:ext>
             </a:extLst>
           </p:cNvPr>
@@ -2902,7 +2902,7 @@
           <p:cNvPr id="22" name="">
             <a:extLst xmlns:a="http://schemas.openxmlformats.org/drawingml/2006/main">
               <a:ext uri="{FF2B5EF4-FFF2-40B4-BE49-F238E27FC236}">
-                <a16:creationId xmlns:a16="http://schemas.microsoft.com/office/drawing/2014/main" id="{BA338D3D-758F-44CC-8A6E-2D73A2584520}"/>
+                <a16:creationId xmlns:a16="http://schemas.microsoft.com/office/drawing/2014/main" id="{5BC29A04-D437-4DF1-B17B-0444D078C746}"/>
               </a:ext>
             </a:extLst>
           </p:cNvPr>
@@ -2933,7 +2933,7 @@
           <p:cNvPr id="23" name="">
             <a:extLst xmlns:a="http://schemas.openxmlformats.org/drawingml/2006/main">
               <a:ext uri="{FF2B5EF4-FFF2-40B4-BE49-F238E27FC236}">
-                <a16:creationId xmlns:a16="http://schemas.microsoft.com/office/drawing/2014/main" id="{B2A7F0B1-A71B-4883-BDCE-7D953C2920AD}"/>
+                <a16:creationId xmlns:a16="http://schemas.microsoft.com/office/drawing/2014/main" id="{25AEC22D-F8A3-47A6-91A8-5AA23466D587}"/>
               </a:ext>
             </a:extLst>
           </p:cNvPr>
@@ -2964,7 +2964,7 @@
           <p:cNvPr id="24" name="">
             <a:extLst xmlns:a="http://schemas.openxmlformats.org/drawingml/2006/main">
               <a:ext uri="{FF2B5EF4-FFF2-40B4-BE49-F238E27FC236}">
-                <a16:creationId xmlns:a16="http://schemas.microsoft.com/office/drawing/2014/main" id="{EADB30C8-C5B5-4738-9E97-FC46D57120E5}"/>
+                <a16:creationId xmlns:a16="http://schemas.microsoft.com/office/drawing/2014/main" id="{58FAA299-CDE3-4852-9C0B-830F223D667D}"/>
               </a:ext>
             </a:extLst>
           </p:cNvPr>
@@ -2995,7 +2995,7 @@
           <p:cNvPr id="25" name="">
             <a:extLst xmlns:a="http://schemas.openxmlformats.org/drawingml/2006/main">
               <a:ext uri="{FF2B5EF4-FFF2-40B4-BE49-F238E27FC236}">
-                <a16:creationId xmlns:a16="http://schemas.microsoft.com/office/drawing/2014/main" id="{08BFEFDD-1FCE-4ADF-9FA1-E2B9D6934812}"/>
+                <a16:creationId xmlns:a16="http://schemas.microsoft.com/office/drawing/2014/main" id="{60B44E66-DC4C-406D-9A86-5FFB3FBDD013}"/>
               </a:ext>
             </a:extLst>
           </p:cNvPr>
@@ -3026,7 +3026,7 @@
           <p:cNvPr id="26" name="">
             <a:extLst xmlns:a="http://schemas.openxmlformats.org/drawingml/2006/main">
               <a:ext uri="{FF2B5EF4-FFF2-40B4-BE49-F238E27FC236}">
-                <a16:creationId xmlns:a16="http://schemas.microsoft.com/office/drawing/2014/main" id="{E174EB19-1631-4F1E-BB8E-FF381B37D814}"/>
+                <a16:creationId xmlns:a16="http://schemas.microsoft.com/office/drawing/2014/main" id="{555723BF-D2B4-4956-91C9-2210600D69AF}"/>
               </a:ext>
             </a:extLst>
           </p:cNvPr>
@@ -3057,7 +3057,7 @@
           <p:cNvPr id="27" name="">
             <a:extLst xmlns:a="http://schemas.openxmlformats.org/drawingml/2006/main">
               <a:ext uri="{FF2B5EF4-FFF2-40B4-BE49-F238E27FC236}">
-                <a16:creationId xmlns:a16="http://schemas.microsoft.com/office/drawing/2014/main" id="{949A979D-293A-4A2C-8B6D-95C1EDF786C5}"/>
+                <a16:creationId xmlns:a16="http://schemas.microsoft.com/office/drawing/2014/main" id="{68445D03-E55D-4145-8235-09687BD2C49B}"/>
               </a:ext>
             </a:extLst>
           </p:cNvPr>
@@ -3088,7 +3088,7 @@
           <p:cNvPr id="28" name="">
             <a:extLst xmlns:a="http://schemas.openxmlformats.org/drawingml/2006/main">
               <a:ext uri="{FF2B5EF4-FFF2-40B4-BE49-F238E27FC236}">
-                <a16:creationId xmlns:a16="http://schemas.microsoft.com/office/drawing/2014/main" id="{991809F1-F119-4050-A591-48558662D79C}"/>
+                <a16:creationId xmlns:a16="http://schemas.microsoft.com/office/drawing/2014/main" id="{ADB351DF-A071-4E75-AC00-A3F33C1F498C}"/>
               </a:ext>
             </a:extLst>
           </p:cNvPr>
@@ -3119,7 +3119,7 @@
           <p:cNvPr id="29" name="">
             <a:extLst xmlns:a="http://schemas.openxmlformats.org/drawingml/2006/main">
               <a:ext uri="{FF2B5EF4-FFF2-40B4-BE49-F238E27FC236}">
-                <a16:creationId xmlns:a16="http://schemas.microsoft.com/office/drawing/2014/main" id="{DEE9581F-39D2-49D1-A904-73709F7FC882}"/>
+                <a16:creationId xmlns:a16="http://schemas.microsoft.com/office/drawing/2014/main" id="{3C634A72-E56D-43F4-A8B7-04C09A9E7953}"/>
               </a:ext>
             </a:extLst>
           </p:cNvPr>
@@ -3150,7 +3150,7 @@
           <p:cNvPr id="30" name="">
             <a:extLst xmlns:a="http://schemas.openxmlformats.org/drawingml/2006/main">
               <a:ext uri="{FF2B5EF4-FFF2-40B4-BE49-F238E27FC236}">
-                <a16:creationId xmlns:a16="http://schemas.microsoft.com/office/drawing/2014/main" id="{7F4A300E-7B39-427F-8823-012A336BD5D3}"/>
+                <a16:creationId xmlns:a16="http://schemas.microsoft.com/office/drawing/2014/main" id="{8884A3E9-E222-4ACA-8E42-992316CD5D87}"/>
               </a:ext>
             </a:extLst>
           </p:cNvPr>
@@ -3181,7 +3181,7 @@
           <p:cNvPr id="31" name="">
             <a:extLst xmlns:a="http://schemas.openxmlformats.org/drawingml/2006/main">
               <a:ext uri="{FF2B5EF4-FFF2-40B4-BE49-F238E27FC236}">
-                <a16:creationId xmlns:a16="http://schemas.microsoft.com/office/drawing/2014/main" id="{8CD912D9-60A6-4ABB-A102-4BEEB64FDC01}"/>
+                <a16:creationId xmlns:a16="http://schemas.microsoft.com/office/drawing/2014/main" id="{AC55D5F2-21F4-4171-BFDB-3E8296252B78}"/>
               </a:ext>
             </a:extLst>
           </p:cNvPr>
@@ -3212,7 +3212,7 @@
           <p:cNvPr id="32" name="">
             <a:extLst xmlns:a="http://schemas.openxmlformats.org/drawingml/2006/main">
               <a:ext uri="{FF2B5EF4-FFF2-40B4-BE49-F238E27FC236}">
-                <a16:creationId xmlns:a16="http://schemas.microsoft.com/office/drawing/2014/main" id="{94440590-7C85-4E91-BCF6-1AD1EE69A86F}"/>
+                <a16:creationId xmlns:a16="http://schemas.microsoft.com/office/drawing/2014/main" id="{C913B2D2-2B1A-4B50-8606-7E5CDBD153C9}"/>
               </a:ext>
             </a:extLst>
           </p:cNvPr>
@@ -3268,7 +3268,7 @@
           <p:cNvPr id="33" name="">
             <a:extLst xmlns:a="http://schemas.openxmlformats.org/drawingml/2006/main">
               <a:ext uri="{FF2B5EF4-FFF2-40B4-BE49-F238E27FC236}">
-                <a16:creationId xmlns:a16="http://schemas.microsoft.com/office/drawing/2014/main" id="{94F5040C-C40A-41E7-993E-4C0E29B374C5}"/>
+                <a16:creationId xmlns:a16="http://schemas.microsoft.com/office/drawing/2014/main" id="{8135CCBE-C28E-40CB-9D62-BB2C00C57C0C}"/>
               </a:ext>
             </a:extLst>
           </p:cNvPr>
@@ -3347,7 +3347,7 @@
           <p:cNvPr id="34" name="">
             <a:extLst xmlns:a="http://schemas.openxmlformats.org/drawingml/2006/main">
               <a:ext uri="{FF2B5EF4-FFF2-40B4-BE49-F238E27FC236}">
-                <a16:creationId xmlns:a16="http://schemas.microsoft.com/office/drawing/2014/main" id="{92EF708A-2E63-483E-81E4-0960662AE8EF}"/>
+                <a16:creationId xmlns:a16="http://schemas.microsoft.com/office/drawing/2014/main" id="{BCA455B9-0056-4B31-94E2-616049903F27}"/>
               </a:ext>
             </a:extLst>
           </p:cNvPr>
@@ -3426,7 +3426,7 @@
           <p:cNvPr id="35" name="">
             <a:extLst xmlns:a="http://schemas.openxmlformats.org/drawingml/2006/main">
               <a:ext uri="{FF2B5EF4-FFF2-40B4-BE49-F238E27FC236}">
-                <a16:creationId xmlns:a16="http://schemas.microsoft.com/office/drawing/2014/main" id="{64A019CD-CA00-44C8-8813-30EF7B4DCD38}"/>
+                <a16:creationId xmlns:a16="http://schemas.microsoft.com/office/drawing/2014/main" id="{0BEB521D-AAF5-4F60-8585-DA3150C6B13F}"/>
               </a:ext>
             </a:extLst>
           </p:cNvPr>
@@ -3461,7 +3461,7 @@
           <p:cNvPr id="36" name="">
             <a:extLst xmlns:a="http://schemas.openxmlformats.org/drawingml/2006/main">
               <a:ext uri="{FF2B5EF4-FFF2-40B4-BE49-F238E27FC236}">
-                <a16:creationId xmlns:a16="http://schemas.microsoft.com/office/drawing/2014/main" id="{49C6CC6E-35E0-4292-852C-8870D2F378CF}"/>
+                <a16:creationId xmlns:a16="http://schemas.microsoft.com/office/drawing/2014/main" id="{E4D2FB1B-45B0-43A1-9818-AE44AD30C77E}"/>
               </a:ext>
             </a:extLst>
           </p:cNvPr>
@@ -3517,7 +3517,7 @@
           <p:cNvPr id="37" name="">
             <a:extLst xmlns:a="http://schemas.openxmlformats.org/drawingml/2006/main">
               <a:ext uri="{FF2B5EF4-FFF2-40B4-BE49-F238E27FC236}">
-                <a16:creationId xmlns:a16="http://schemas.microsoft.com/office/drawing/2014/main" id="{AEAFB0C1-5B12-4028-9C1C-F53BB4DCDCAF}"/>
+                <a16:creationId xmlns:a16="http://schemas.microsoft.com/office/drawing/2014/main" id="{045D6237-E001-4836-BF31-F2BCF3FE09F6}"/>
               </a:ext>
             </a:extLst>
           </p:cNvPr>
@@ -3573,7 +3573,7 @@
           <p:cNvPr id="38" name="">
             <a:extLst xmlns:a="http://schemas.openxmlformats.org/drawingml/2006/main">
               <a:ext uri="{FF2B5EF4-FFF2-40B4-BE49-F238E27FC236}">
-                <a16:creationId xmlns:a16="http://schemas.microsoft.com/office/drawing/2014/main" id="{F5273F34-A176-41BC-BD66-B93D3BFC326C}"/>
+                <a16:creationId xmlns:a16="http://schemas.microsoft.com/office/drawing/2014/main" id="{41B02D3D-6117-4A6D-B0E2-BF3D8B549CA0}"/>
               </a:ext>
             </a:extLst>
           </p:cNvPr>
@@ -3629,7 +3629,7 @@
           <p:cNvPr id="39" name="">
             <a:extLst xmlns:a="http://schemas.openxmlformats.org/drawingml/2006/main">
               <a:ext uri="{FF2B5EF4-FFF2-40B4-BE49-F238E27FC236}">
-                <a16:creationId xmlns:a16="http://schemas.microsoft.com/office/drawing/2014/main" id="{69D8117E-4D92-4FF1-AB82-7B9E8399E08D}"/>
+                <a16:creationId xmlns:a16="http://schemas.microsoft.com/office/drawing/2014/main" id="{0C00FBD6-1CF7-4F0B-8D0D-9D8D7997DAA7}"/>
               </a:ext>
             </a:extLst>
           </p:cNvPr>
@@ -3660,7 +3660,7 @@
           <p:cNvPr id="40" name="">
             <a:extLst xmlns:a="http://schemas.openxmlformats.org/drawingml/2006/main">
               <a:ext uri="{FF2B5EF4-FFF2-40B4-BE49-F238E27FC236}">
-                <a16:creationId xmlns:a16="http://schemas.microsoft.com/office/drawing/2014/main" id="{DF5AD4CA-97A2-47A8-A621-2C8FB87C282C}"/>
+                <a16:creationId xmlns:a16="http://schemas.microsoft.com/office/drawing/2014/main" id="{42653872-FEEC-41C9-B830-51A38772DDBD}"/>
               </a:ext>
             </a:extLst>
           </p:cNvPr>
@@ -3716,7 +3716,7 @@
           <p:cNvPr id="41" name="">
             <a:extLst xmlns:a="http://schemas.openxmlformats.org/drawingml/2006/main">
               <a:ext uri="{FF2B5EF4-FFF2-40B4-BE49-F238E27FC236}">
-                <a16:creationId xmlns:a16="http://schemas.microsoft.com/office/drawing/2014/main" id="{8FBD4CAE-5AF9-42F2-9544-67557491B3E9}"/>
+                <a16:creationId xmlns:a16="http://schemas.microsoft.com/office/drawing/2014/main" id="{3C274B2B-C074-4719-9A07-116AA6F87EB7}"/>
               </a:ext>
             </a:extLst>
           </p:cNvPr>
@@ -3772,7 +3772,7 @@
           <p:cNvPr id="42" name="">
             <a:extLst xmlns:a="http://schemas.openxmlformats.org/drawingml/2006/main">
               <a:ext uri="{FF2B5EF4-FFF2-40B4-BE49-F238E27FC236}">
-                <a16:creationId xmlns:a16="http://schemas.microsoft.com/office/drawing/2014/main" id="{0BE0611E-74E9-4AAC-886A-9BC9547EF53E}"/>
+                <a16:creationId xmlns:a16="http://schemas.microsoft.com/office/drawing/2014/main" id="{FFB811CD-3ABB-40A4-A0DC-81716D9F181B}"/>
               </a:ext>
             </a:extLst>
           </p:cNvPr>
@@ -3803,7 +3803,7 @@
           <p:cNvPr id="43" name="">
             <a:extLst xmlns:a="http://schemas.openxmlformats.org/drawingml/2006/main">
               <a:ext uri="{FF2B5EF4-FFF2-40B4-BE49-F238E27FC236}">
-                <a16:creationId xmlns:a16="http://schemas.microsoft.com/office/drawing/2014/main" id="{D97A0705-FD83-43A3-B889-120BC82D3E31}"/>
+                <a16:creationId xmlns:a16="http://schemas.microsoft.com/office/drawing/2014/main" id="{A1049AAD-0CE0-4DBF-9F00-3FC9E6E312E6}"/>
               </a:ext>
             </a:extLst>
           </p:cNvPr>
@@ -3859,7 +3859,7 @@
           <p:cNvPr id="44" name="">
             <a:extLst xmlns:a="http://schemas.openxmlformats.org/drawingml/2006/main">
               <a:ext uri="{FF2B5EF4-FFF2-40B4-BE49-F238E27FC236}">
-                <a16:creationId xmlns:a16="http://schemas.microsoft.com/office/drawing/2014/main" id="{F1D80941-407A-4EB4-87D2-C1F52773CA93}"/>
+                <a16:creationId xmlns:a16="http://schemas.microsoft.com/office/drawing/2014/main" id="{74D9AEA4-2393-4F77-AB5E-84C7FA0DE99C}"/>
               </a:ext>
             </a:extLst>
           </p:cNvPr>
@@ -3915,7 +3915,7 @@
           <p:cNvPr id="45" name="">
             <a:extLst xmlns:a="http://schemas.openxmlformats.org/drawingml/2006/main">
               <a:ext uri="{FF2B5EF4-FFF2-40B4-BE49-F238E27FC236}">
-                <a16:creationId xmlns:a16="http://schemas.microsoft.com/office/drawing/2014/main" id="{45696067-766A-45BB-AA2B-B826903E986C}"/>
+                <a16:creationId xmlns:a16="http://schemas.microsoft.com/office/drawing/2014/main" id="{D27984DE-5F9B-4723-92E4-B6B2CEEDA713}"/>
               </a:ext>
             </a:extLst>
           </p:cNvPr>
@@ -3946,7 +3946,7 @@
           <p:cNvPr id="46" name="">
             <a:extLst xmlns:a="http://schemas.openxmlformats.org/drawingml/2006/main">
               <a:ext uri="{FF2B5EF4-FFF2-40B4-BE49-F238E27FC236}">
-                <a16:creationId xmlns:a16="http://schemas.microsoft.com/office/drawing/2014/main" id="{82148DBA-4598-49FE-BDE2-912E9709FE05}"/>
+                <a16:creationId xmlns:a16="http://schemas.microsoft.com/office/drawing/2014/main" id="{18FB52DB-EFF6-48F2-9E95-D10AB7FCB014}"/>
               </a:ext>
             </a:extLst>
           </p:cNvPr>
@@ -4002,7 +4002,7 @@
           <p:cNvPr id="47" name="">
             <a:extLst xmlns:a="http://schemas.openxmlformats.org/drawingml/2006/main">
               <a:ext uri="{FF2B5EF4-FFF2-40B4-BE49-F238E27FC236}">
-                <a16:creationId xmlns:a16="http://schemas.microsoft.com/office/drawing/2014/main" id="{F556CE14-2B3B-447A-85A8-D2083AEBDF26}"/>
+                <a16:creationId xmlns:a16="http://schemas.microsoft.com/office/drawing/2014/main" id="{24244104-E51B-403C-A3F1-68AC7FCB1F69}"/>
               </a:ext>
             </a:extLst>
           </p:cNvPr>
@@ -4058,7 +4058,7 @@
           <p:cNvPr id="48" name="">
             <a:extLst xmlns:a="http://schemas.openxmlformats.org/drawingml/2006/main">
               <a:ext uri="{FF2B5EF4-FFF2-40B4-BE49-F238E27FC236}">
-                <a16:creationId xmlns:a16="http://schemas.microsoft.com/office/drawing/2014/main" id="{2601DB4E-7D8C-4FC9-B9E5-DA302506964F}"/>
+                <a16:creationId xmlns:a16="http://schemas.microsoft.com/office/drawing/2014/main" id="{B2053A0A-5742-4AA2-9A0B-E035B7A477C4}"/>
               </a:ext>
             </a:extLst>
           </p:cNvPr>
@@ -4089,7 +4089,7 @@
           <p:cNvPr id="49" name="">
             <a:extLst xmlns:a="http://schemas.openxmlformats.org/drawingml/2006/main">
               <a:ext uri="{FF2B5EF4-FFF2-40B4-BE49-F238E27FC236}">
-                <a16:creationId xmlns:a16="http://schemas.microsoft.com/office/drawing/2014/main" id="{E18DBF0D-E3FA-4793-B98E-F2E868DAA4F2}"/>
+                <a16:creationId xmlns:a16="http://schemas.microsoft.com/office/drawing/2014/main" id="{1B866B72-B61D-4BE7-A392-7084B0C41FFD}"/>
               </a:ext>
             </a:extLst>
           </p:cNvPr>
@@ -4145,7 +4145,7 @@
           <p:cNvPr id="50" name="">
             <a:extLst xmlns:a="http://schemas.openxmlformats.org/drawingml/2006/main">
               <a:ext uri="{FF2B5EF4-FFF2-40B4-BE49-F238E27FC236}">
-                <a16:creationId xmlns:a16="http://schemas.microsoft.com/office/drawing/2014/main" id="{74C85A93-ED1F-4DFE-BDFA-1BF34BDBA87E}"/>
+                <a16:creationId xmlns:a16="http://schemas.microsoft.com/office/drawing/2014/main" id="{60544ED7-C5B9-4435-A333-6D6094B34D7D}"/>
               </a:ext>
             </a:extLst>
           </p:cNvPr>
@@ -4201,7 +4201,7 @@
           <p:cNvPr id="51" name="">
             <a:extLst xmlns:a="http://schemas.openxmlformats.org/drawingml/2006/main">
               <a:ext uri="{FF2B5EF4-FFF2-40B4-BE49-F238E27FC236}">
-                <a16:creationId xmlns:a16="http://schemas.microsoft.com/office/drawing/2014/main" id="{F653E1E3-5CD3-454B-9057-4706FB34A34F}"/>
+                <a16:creationId xmlns:a16="http://schemas.microsoft.com/office/drawing/2014/main" id="{31255642-AA8D-43BA-9956-2AB9005CD8C8}"/>
               </a:ext>
             </a:extLst>
           </p:cNvPr>
@@ -4257,7 +4257,7 @@
           <p:cNvPr id="52" name="">
             <a:extLst xmlns:a="http://schemas.openxmlformats.org/drawingml/2006/main">
               <a:ext uri="{FF2B5EF4-FFF2-40B4-BE49-F238E27FC236}">
-                <a16:creationId xmlns:a16="http://schemas.microsoft.com/office/drawing/2014/main" id="{BF2DD9C4-0C2B-4719-9BF8-9C1E9DC8A8EE}"/>
+                <a16:creationId xmlns:a16="http://schemas.microsoft.com/office/drawing/2014/main" id="{857B1CAE-22E0-47B0-BE65-50FF45B045A4}"/>
               </a:ext>
             </a:extLst>
           </p:cNvPr>
@@ -4313,7 +4313,7 @@
           <p:cNvPr id="53" name="">
             <a:extLst xmlns:a="http://schemas.openxmlformats.org/drawingml/2006/main">
               <a:ext uri="{FF2B5EF4-FFF2-40B4-BE49-F238E27FC236}">
-                <a16:creationId xmlns:a16="http://schemas.microsoft.com/office/drawing/2014/main" id="{C6BE609D-0E4B-4D83-ADC1-DF6DD3F34C4E}"/>
+                <a16:creationId xmlns:a16="http://schemas.microsoft.com/office/drawing/2014/main" id="{0A651559-A52C-445D-BAD4-B78A15007D00}"/>
               </a:ext>
             </a:extLst>
           </p:cNvPr>
@@ -4367,7 +4367,7 @@
     </p:spTree>
     <p:extLst>
       <p:ext uri="{BB962C8B-B14F-4D97-AF65-F5344CB8AC3E}">
-        <p14:creationId xmlns:p14="http://schemas.microsoft.com/office/powerpoint/2010/main" val="649209323"/>
+        <p14:creationId xmlns:p14="http://schemas.microsoft.com/office/powerpoint/2010/main" val="761136738"/>
       </p:ext>
     </p:extLst>
   </p:cSld>
@@ -4398,7 +4398,7 @@
           <p:cNvPr id="1" name="">
             <a:extLst xmlns:a="http://schemas.openxmlformats.org/drawingml/2006/main">
               <a:ext uri="{FF2B5EF4-FFF2-40B4-BE49-F238E27FC236}">
-                <a16:creationId xmlns:a16="http://schemas.microsoft.com/office/drawing/2014/main" id="{2D02E910-461E-4B63-BF59-A063A0C6F170}"/>
+                <a16:creationId xmlns:a16="http://schemas.microsoft.com/office/drawing/2014/main" id="{5336EB36-42CC-4BDE-BFAB-0245D39D77E0}"/>
               </a:ext>
             </a:extLst>
           </p:cNvPr>
@@ -4429,7 +4429,7 @@
           <p:cNvPr id="2" name="">
             <a:extLst xmlns:a="http://schemas.openxmlformats.org/drawingml/2006/main">
               <a:ext uri="{FF2B5EF4-FFF2-40B4-BE49-F238E27FC236}">
-                <a16:creationId xmlns:a16="http://schemas.microsoft.com/office/drawing/2014/main" id="{80B34A05-5010-4972-8998-A1F79BADFB48}"/>
+                <a16:creationId xmlns:a16="http://schemas.microsoft.com/office/drawing/2014/main" id="{5F5930A1-9D37-4202-912F-DB80AA20639C}"/>
               </a:ext>
             </a:extLst>
           </p:cNvPr>
@@ -4485,7 +4485,7 @@
           <p:cNvPr id="3" name="">
             <a:extLst xmlns:a="http://schemas.openxmlformats.org/drawingml/2006/main">
               <a:ext uri="{FF2B5EF4-FFF2-40B4-BE49-F238E27FC236}">
-                <a16:creationId xmlns:a16="http://schemas.microsoft.com/office/drawing/2014/main" id="{21608908-FD57-4CC7-B551-5906CF0D8D8C}"/>
+                <a16:creationId xmlns:a16="http://schemas.microsoft.com/office/drawing/2014/main" id="{ED16D731-ED13-4636-A2DE-B73B554CD150}"/>
               </a:ext>
             </a:extLst>
           </p:cNvPr>
@@ -4541,7 +4541,7 @@
           <p:cNvPr id="4" name="">
             <a:extLst xmlns:a="http://schemas.openxmlformats.org/drawingml/2006/main">
               <a:ext uri="{FF2B5EF4-FFF2-40B4-BE49-F238E27FC236}">
-                <a16:creationId xmlns:a16="http://schemas.microsoft.com/office/drawing/2014/main" id="{D2199EBF-1194-4D0A-A5B2-52CF43C3AA94}"/>
+                <a16:creationId xmlns:a16="http://schemas.microsoft.com/office/drawing/2014/main" id="{F5B4BA74-EFE9-4691-B5BF-83DBBC21AB3D}"/>
               </a:ext>
             </a:extLst>
           </p:cNvPr>
@@ -4597,7 +4597,7 @@
           <p:cNvPr id="5" name="">
             <a:extLst xmlns:a="http://schemas.openxmlformats.org/drawingml/2006/main">
               <a:ext uri="{FF2B5EF4-FFF2-40B4-BE49-F238E27FC236}">
-                <a16:creationId xmlns:a16="http://schemas.microsoft.com/office/drawing/2014/main" id="{1B5E076E-A860-4B84-87EC-9A794C5BEC56}"/>
+                <a16:creationId xmlns:a16="http://schemas.microsoft.com/office/drawing/2014/main" id="{2BAC9552-EF93-42C0-BF33-55D21D97441E}"/>
               </a:ext>
             </a:extLst>
           </p:cNvPr>
@@ -4632,7 +4632,7 @@
           <p:cNvPr id="6" name="">
             <a:extLst xmlns:a="http://schemas.openxmlformats.org/drawingml/2006/main">
               <a:ext uri="{FF2B5EF4-FFF2-40B4-BE49-F238E27FC236}">
-                <a16:creationId xmlns:a16="http://schemas.microsoft.com/office/drawing/2014/main" id="{216AA482-8767-4815-A89C-BB9A971C3014}"/>
+                <a16:creationId xmlns:a16="http://schemas.microsoft.com/office/drawing/2014/main" id="{440ADDB4-2EDB-4B3E-AA84-D2DAAF6BC8D2}"/>
               </a:ext>
             </a:extLst>
           </p:cNvPr>
@@ -4688,7 +4688,7 @@
           <p:cNvPr id="7" name="">
             <a:extLst xmlns:a="http://schemas.openxmlformats.org/drawingml/2006/main">
               <a:ext uri="{FF2B5EF4-FFF2-40B4-BE49-F238E27FC236}">
-                <a16:creationId xmlns:a16="http://schemas.microsoft.com/office/drawing/2014/main" id="{E62C256F-5F11-4374-B5A5-0D7735AB678D}"/>
+                <a16:creationId xmlns:a16="http://schemas.microsoft.com/office/drawing/2014/main" id="{0975B479-51EC-426D-84A3-2F98C1275181}"/>
               </a:ext>
             </a:extLst>
           </p:cNvPr>
@@ -4744,7 +4744,7 @@
           <p:cNvPr id="8" name="">
             <a:extLst xmlns:a="http://schemas.openxmlformats.org/drawingml/2006/main">
               <a:ext uri="{FF2B5EF4-FFF2-40B4-BE49-F238E27FC236}">
-                <a16:creationId xmlns:a16="http://schemas.microsoft.com/office/drawing/2014/main" id="{3122C91E-AE19-4617-80E3-D8F6090363D8}"/>
+                <a16:creationId xmlns:a16="http://schemas.microsoft.com/office/drawing/2014/main" id="{F8908177-DFC5-4B52-B157-22E47F72BD57}"/>
               </a:ext>
             </a:extLst>
           </p:cNvPr>
@@ -4800,7 +4800,7 @@
           <p:cNvPr id="9" name="">
             <a:extLst xmlns:a="http://schemas.openxmlformats.org/drawingml/2006/main">
               <a:ext uri="{FF2B5EF4-FFF2-40B4-BE49-F238E27FC236}">
-                <a16:creationId xmlns:a16="http://schemas.microsoft.com/office/drawing/2014/main" id="{69220218-3CBF-453D-9F05-2524AF9A608B}"/>
+                <a16:creationId xmlns:a16="http://schemas.microsoft.com/office/drawing/2014/main" id="{EB2B03FF-4473-41D0-80C2-474BE96D3552}"/>
               </a:ext>
             </a:extLst>
           </p:cNvPr>
@@ -4835,7 +4835,7 @@
           <p:cNvPr id="10" name="">
             <a:extLst xmlns:a="http://schemas.openxmlformats.org/drawingml/2006/main">
               <a:ext uri="{FF2B5EF4-FFF2-40B4-BE49-F238E27FC236}">
-                <a16:creationId xmlns:a16="http://schemas.microsoft.com/office/drawing/2014/main" id="{2075A98E-F2B0-478F-BC4C-D13D140881E1}"/>
+                <a16:creationId xmlns:a16="http://schemas.microsoft.com/office/drawing/2014/main" id="{1A12B4D4-E8C8-47A2-A5D0-D15938AC0F33}"/>
               </a:ext>
             </a:extLst>
           </p:cNvPr>
@@ -4891,7 +4891,7 @@
           <p:cNvPr id="11" name="">
             <a:extLst xmlns:a="http://schemas.openxmlformats.org/drawingml/2006/main">
               <a:ext uri="{FF2B5EF4-FFF2-40B4-BE49-F238E27FC236}">
-                <a16:creationId xmlns:a16="http://schemas.microsoft.com/office/drawing/2014/main" id="{60451DAF-6587-4AF1-9926-DF9157CFD393}"/>
+                <a16:creationId xmlns:a16="http://schemas.microsoft.com/office/drawing/2014/main" id="{F1D59948-E3CB-4268-B5B9-9B5E2E5C4DA7}"/>
               </a:ext>
             </a:extLst>
           </p:cNvPr>
@@ -4947,7 +4947,7 @@
           <p:cNvPr id="12" name="">
             <a:extLst xmlns:a="http://schemas.openxmlformats.org/drawingml/2006/main">
               <a:ext uri="{FF2B5EF4-FFF2-40B4-BE49-F238E27FC236}">
-                <a16:creationId xmlns:a16="http://schemas.microsoft.com/office/drawing/2014/main" id="{D1375652-550E-41FF-8CD9-3577F6B0FCE7}"/>
+                <a16:creationId xmlns:a16="http://schemas.microsoft.com/office/drawing/2014/main" id="{18BB6444-C5A5-44F6-976B-5AC3125D66E0}"/>
               </a:ext>
             </a:extLst>
           </p:cNvPr>
@@ -5003,7 +5003,7 @@
           <p:cNvPr id="13" name="">
             <a:extLst xmlns:a="http://schemas.openxmlformats.org/drawingml/2006/main">
               <a:ext uri="{FF2B5EF4-FFF2-40B4-BE49-F238E27FC236}">
-                <a16:creationId xmlns:a16="http://schemas.microsoft.com/office/drawing/2014/main" id="{8856E13A-49A6-43C9-B213-050076936B64}"/>
+                <a16:creationId xmlns:a16="http://schemas.microsoft.com/office/drawing/2014/main" id="{93EA312D-BB40-431D-9CD5-F94CD18CA124}"/>
               </a:ext>
             </a:extLst>
           </p:cNvPr>
@@ -5038,7 +5038,7 @@
           <p:cNvPr id="14" name="">
             <a:extLst xmlns:a="http://schemas.openxmlformats.org/drawingml/2006/main">
               <a:ext uri="{FF2B5EF4-FFF2-40B4-BE49-F238E27FC236}">
-                <a16:creationId xmlns:a16="http://schemas.microsoft.com/office/drawing/2014/main" id="{96C7E117-9C95-415B-8ED9-EC426EE1E7EB}"/>
+                <a16:creationId xmlns:a16="http://schemas.microsoft.com/office/drawing/2014/main" id="{1D3051BC-486D-4558-8D41-A02836829347}"/>
               </a:ext>
             </a:extLst>
           </p:cNvPr>
@@ -5094,7 +5094,7 @@
           <p:cNvPr id="15" name="">
             <a:extLst xmlns:a="http://schemas.openxmlformats.org/drawingml/2006/main">
               <a:ext uri="{FF2B5EF4-FFF2-40B4-BE49-F238E27FC236}">
-                <a16:creationId xmlns:a16="http://schemas.microsoft.com/office/drawing/2014/main" id="{6A397B71-2196-4E7B-9E88-E7CEA05FD9E3}"/>
+                <a16:creationId xmlns:a16="http://schemas.microsoft.com/office/drawing/2014/main" id="{B71F2579-8360-49F3-B928-423456B098D6}"/>
               </a:ext>
             </a:extLst>
           </p:cNvPr>
@@ -5150,7 +5150,7 @@
           <p:cNvPr id="16" name="">
             <a:extLst xmlns:a="http://schemas.openxmlformats.org/drawingml/2006/main">
               <a:ext uri="{FF2B5EF4-FFF2-40B4-BE49-F238E27FC236}">
-                <a16:creationId xmlns:a16="http://schemas.microsoft.com/office/drawing/2014/main" id="{FBE863D4-A10E-4713-8D1A-3B9F2A2323CD}"/>
+                <a16:creationId xmlns:a16="http://schemas.microsoft.com/office/drawing/2014/main" id="{4356D35C-DB21-4F50-9AD0-900302752BB3}"/>
               </a:ext>
             </a:extLst>
           </p:cNvPr>
@@ -5206,7 +5206,7 @@
           <p:cNvPr id="17" name="">
             <a:extLst xmlns:a="http://schemas.openxmlformats.org/drawingml/2006/main">
               <a:ext uri="{FF2B5EF4-FFF2-40B4-BE49-F238E27FC236}">
-                <a16:creationId xmlns:a16="http://schemas.microsoft.com/office/drawing/2014/main" id="{213213D9-B214-4D17-9BF2-76632E01060D}"/>
+                <a16:creationId xmlns:a16="http://schemas.microsoft.com/office/drawing/2014/main" id="{D664DCF2-EB13-4E80-A49E-1F3253E479E2}"/>
               </a:ext>
             </a:extLst>
           </p:cNvPr>
@@ -5241,7 +5241,7 @@
           <p:cNvPr id="18" name="">
             <a:extLst xmlns:a="http://schemas.openxmlformats.org/drawingml/2006/main">
               <a:ext uri="{FF2B5EF4-FFF2-40B4-BE49-F238E27FC236}">
-                <a16:creationId xmlns:a16="http://schemas.microsoft.com/office/drawing/2014/main" id="{2DCE259D-C08C-4D3F-811D-ED96DF468FC9}"/>
+                <a16:creationId xmlns:a16="http://schemas.microsoft.com/office/drawing/2014/main" id="{FA098213-AD74-49E0-B1F9-997995D9F50C}"/>
               </a:ext>
             </a:extLst>
           </p:cNvPr>
@@ -5297,7 +5297,7 @@
           <p:cNvPr id="19" name="">
             <a:extLst xmlns:a="http://schemas.openxmlformats.org/drawingml/2006/main">
               <a:ext uri="{FF2B5EF4-FFF2-40B4-BE49-F238E27FC236}">
-                <a16:creationId xmlns:a16="http://schemas.microsoft.com/office/drawing/2014/main" id="{1B3F2D21-3ECC-4432-8A2F-1306AED094B2}"/>
+                <a16:creationId xmlns:a16="http://schemas.microsoft.com/office/drawing/2014/main" id="{8061CC83-E4EA-443F-B138-BC2319030F9A}"/>
               </a:ext>
             </a:extLst>
           </p:cNvPr>
@@ -5353,7 +5353,7 @@
           <p:cNvPr id="20" name="">
             <a:extLst xmlns:a="http://schemas.openxmlformats.org/drawingml/2006/main">
               <a:ext uri="{FF2B5EF4-FFF2-40B4-BE49-F238E27FC236}">
-                <a16:creationId xmlns:a16="http://schemas.microsoft.com/office/drawing/2014/main" id="{84BDA68E-C0AE-42A2-9DDF-858E4609197C}"/>
+                <a16:creationId xmlns:a16="http://schemas.microsoft.com/office/drawing/2014/main" id="{264919C9-1D8A-4933-8573-B0CBDF4B258E}"/>
               </a:ext>
             </a:extLst>
           </p:cNvPr>
@@ -5409,7 +5409,7 @@
           <p:cNvPr id="21" name="">
             <a:extLst xmlns:a="http://schemas.openxmlformats.org/drawingml/2006/main">
               <a:ext uri="{FF2B5EF4-FFF2-40B4-BE49-F238E27FC236}">
-                <a16:creationId xmlns:a16="http://schemas.microsoft.com/office/drawing/2014/main" id="{1B1B2FB6-0598-473D-AAAF-2FC8A4239569}"/>
+                <a16:creationId xmlns:a16="http://schemas.microsoft.com/office/drawing/2014/main" id="{BF9791A6-8AFD-41B1-845E-21E463046130}"/>
               </a:ext>
             </a:extLst>
           </p:cNvPr>
@@ -5465,7 +5465,7 @@
           <p:cNvPr id="22" name="">
             <a:extLst xmlns:a="http://schemas.openxmlformats.org/drawingml/2006/main">
               <a:ext uri="{FF2B5EF4-FFF2-40B4-BE49-F238E27FC236}">
-                <a16:creationId xmlns:a16="http://schemas.microsoft.com/office/drawing/2014/main" id="{4CB093D8-26A3-431A-A52E-934FBF12E22D}"/>
+                <a16:creationId xmlns:a16="http://schemas.microsoft.com/office/drawing/2014/main" id="{DEFF955D-792A-41D3-BD24-924037795BEB}"/>
               </a:ext>
             </a:extLst>
           </p:cNvPr>
@@ -5500,7 +5500,7 @@
           <p:cNvPr id="23" name="">
             <a:extLst xmlns:a="http://schemas.openxmlformats.org/drawingml/2006/main">
               <a:ext uri="{FF2B5EF4-FFF2-40B4-BE49-F238E27FC236}">
-                <a16:creationId xmlns:a16="http://schemas.microsoft.com/office/drawing/2014/main" id="{6E298AEF-72E4-45D6-A2F9-E5AEAD041017}"/>
+                <a16:creationId xmlns:a16="http://schemas.microsoft.com/office/drawing/2014/main" id="{D548FA63-445E-412D-B04C-4A306E22247E}"/>
               </a:ext>
             </a:extLst>
           </p:cNvPr>
@@ -5556,7 +5556,7 @@
           <p:cNvPr id="24" name="">
             <a:extLst xmlns:a="http://schemas.openxmlformats.org/drawingml/2006/main">
               <a:ext uri="{FF2B5EF4-FFF2-40B4-BE49-F238E27FC236}">
-                <a16:creationId xmlns:a16="http://schemas.microsoft.com/office/drawing/2014/main" id="{61E4FE94-1D8B-4AE0-A347-58DFECA11576}"/>
+                <a16:creationId xmlns:a16="http://schemas.microsoft.com/office/drawing/2014/main" id="{8123324E-1CF3-4F6E-8764-E9EF56775B9E}"/>
               </a:ext>
             </a:extLst>
           </p:cNvPr>
@@ -5635,7 +5635,7 @@
           <p:cNvPr id="25" name="">
             <a:extLst xmlns:a="http://schemas.openxmlformats.org/drawingml/2006/main">
               <a:ext uri="{FF2B5EF4-FFF2-40B4-BE49-F238E27FC236}">
-                <a16:creationId xmlns:a16="http://schemas.microsoft.com/office/drawing/2014/main" id="{5445D8F8-30F8-43F9-8227-DFAF35BAE189}"/>
+                <a16:creationId xmlns:a16="http://schemas.microsoft.com/office/drawing/2014/main" id="{FDCD6F30-2EFE-460A-A03D-3D32AE2C0C01}"/>
               </a:ext>
             </a:extLst>
           </p:cNvPr>
@@ -5691,7 +5691,7 @@
           <p:cNvPr id="26" name="">
             <a:extLst xmlns:a="http://schemas.openxmlformats.org/drawingml/2006/main">
               <a:ext uri="{FF2B5EF4-FFF2-40B4-BE49-F238E27FC236}">
-                <a16:creationId xmlns:a16="http://schemas.microsoft.com/office/drawing/2014/main" id="{697B57D2-BB36-42CD-AAAE-4BE840002D58}"/>
+                <a16:creationId xmlns:a16="http://schemas.microsoft.com/office/drawing/2014/main" id="{B3765E87-13D2-43EB-8AD5-7C6C8406874C}"/>
               </a:ext>
             </a:extLst>
           </p:cNvPr>
@@ -5747,7 +5747,7 @@
           <p:cNvPr id="27" name="">
             <a:extLst xmlns:a="http://schemas.openxmlformats.org/drawingml/2006/main">
               <a:ext uri="{FF2B5EF4-FFF2-40B4-BE49-F238E27FC236}">
-                <a16:creationId xmlns:a16="http://schemas.microsoft.com/office/drawing/2014/main" id="{0B83F396-B5B2-4794-B84B-CA7D33904C82}"/>
+                <a16:creationId xmlns:a16="http://schemas.microsoft.com/office/drawing/2014/main" id="{C811C4A1-6819-4078-A79C-989960F1BBD9}"/>
               </a:ext>
             </a:extLst>
           </p:cNvPr>
@@ -5778,7 +5778,7 @@
           <p:cNvPr id="28" name="">
             <a:extLst xmlns:a="http://schemas.openxmlformats.org/drawingml/2006/main">
               <a:ext uri="{FF2B5EF4-FFF2-40B4-BE49-F238E27FC236}">
-                <a16:creationId xmlns:a16="http://schemas.microsoft.com/office/drawing/2014/main" id="{18E3EABF-7AEC-499B-87FC-DFE8E1A5F2AE}"/>
+                <a16:creationId xmlns:a16="http://schemas.microsoft.com/office/drawing/2014/main" id="{A2D6E6E5-9477-44A2-ACC9-37C55738DB2C}"/>
               </a:ext>
             </a:extLst>
           </p:cNvPr>
@@ -5834,7 +5834,7 @@
           <p:cNvPr id="29" name="">
             <a:extLst xmlns:a="http://schemas.openxmlformats.org/drawingml/2006/main">
               <a:ext uri="{FF2B5EF4-FFF2-40B4-BE49-F238E27FC236}">
-                <a16:creationId xmlns:a16="http://schemas.microsoft.com/office/drawing/2014/main" id="{8E2FEB8B-A3DC-40FF-94C1-3421A5C0D260}"/>
+                <a16:creationId xmlns:a16="http://schemas.microsoft.com/office/drawing/2014/main" id="{AD064A86-5DE3-4115-9E27-F64875A2EE48}"/>
               </a:ext>
             </a:extLst>
           </p:cNvPr>
@@ -5890,7 +5890,7 @@
           <p:cNvPr id="30" name="">
             <a:extLst xmlns:a="http://schemas.openxmlformats.org/drawingml/2006/main">
               <a:ext uri="{FF2B5EF4-FFF2-40B4-BE49-F238E27FC236}">
-                <a16:creationId xmlns:a16="http://schemas.microsoft.com/office/drawing/2014/main" id="{CF3D1AD8-028B-4865-B820-A42BF50B8104}"/>
+                <a16:creationId xmlns:a16="http://schemas.microsoft.com/office/drawing/2014/main" id="{9E928413-E5B9-4FC5-A48A-F2D959C1D0C8}"/>
               </a:ext>
             </a:extLst>
           </p:cNvPr>
@@ -5921,7 +5921,7 @@
           <p:cNvPr id="31" name="">
             <a:extLst xmlns:a="http://schemas.openxmlformats.org/drawingml/2006/main">
               <a:ext uri="{FF2B5EF4-FFF2-40B4-BE49-F238E27FC236}">
-                <a16:creationId xmlns:a16="http://schemas.microsoft.com/office/drawing/2014/main" id="{9F28EF29-2742-4E0C-B6D6-997DF0C7DBBC}"/>
+                <a16:creationId xmlns:a16="http://schemas.microsoft.com/office/drawing/2014/main" id="{C853284F-75C1-45AE-BB26-F9644BA410C2}"/>
               </a:ext>
             </a:extLst>
           </p:cNvPr>
@@ -5977,7 +5977,7 @@
           <p:cNvPr id="32" name="">
             <a:extLst xmlns:a="http://schemas.openxmlformats.org/drawingml/2006/main">
               <a:ext uri="{FF2B5EF4-FFF2-40B4-BE49-F238E27FC236}">
-                <a16:creationId xmlns:a16="http://schemas.microsoft.com/office/drawing/2014/main" id="{54A314F2-17C1-4649-B371-2C2328C69BA5}"/>
+                <a16:creationId xmlns:a16="http://schemas.microsoft.com/office/drawing/2014/main" id="{DFD5B021-2152-42F4-B61A-3253865DFDCB}"/>
               </a:ext>
             </a:extLst>
           </p:cNvPr>
@@ -6033,7 +6033,7 @@
           <p:cNvPr id="33" name="">
             <a:extLst xmlns:a="http://schemas.openxmlformats.org/drawingml/2006/main">
               <a:ext uri="{FF2B5EF4-FFF2-40B4-BE49-F238E27FC236}">
-                <a16:creationId xmlns:a16="http://schemas.microsoft.com/office/drawing/2014/main" id="{66BAC103-ED50-4E45-A89C-D36A656A1DA7}"/>
+                <a16:creationId xmlns:a16="http://schemas.microsoft.com/office/drawing/2014/main" id="{502F1375-B147-487A-948A-60EFAD71995A}"/>
               </a:ext>
             </a:extLst>
           </p:cNvPr>
@@ -6064,7 +6064,7 @@
           <p:cNvPr id="34" name="">
             <a:extLst xmlns:a="http://schemas.openxmlformats.org/drawingml/2006/main">
               <a:ext uri="{FF2B5EF4-FFF2-40B4-BE49-F238E27FC236}">
-                <a16:creationId xmlns:a16="http://schemas.microsoft.com/office/drawing/2014/main" id="{DA4A93A6-7F28-49DA-9E26-0E4842CB539B}"/>
+                <a16:creationId xmlns:a16="http://schemas.microsoft.com/office/drawing/2014/main" id="{D3778F7D-B0B2-4BDE-AD5D-CCA952172FE9}"/>
               </a:ext>
             </a:extLst>
           </p:cNvPr>
@@ -6120,7 +6120,7 @@
           <p:cNvPr id="35" name="">
             <a:extLst xmlns:a="http://schemas.openxmlformats.org/drawingml/2006/main">
               <a:ext uri="{FF2B5EF4-FFF2-40B4-BE49-F238E27FC236}">
-                <a16:creationId xmlns:a16="http://schemas.microsoft.com/office/drawing/2014/main" id="{15F249A3-E7C0-44F7-8859-0DB35ABF233C}"/>
+                <a16:creationId xmlns:a16="http://schemas.microsoft.com/office/drawing/2014/main" id="{36BF3C1A-24BD-4B63-A6D9-91AC3704F89C}"/>
               </a:ext>
             </a:extLst>
           </p:cNvPr>
@@ -6176,7 +6176,7 @@
           <p:cNvPr id="36" name="">
             <a:extLst xmlns:a="http://schemas.openxmlformats.org/drawingml/2006/main">
               <a:ext uri="{FF2B5EF4-FFF2-40B4-BE49-F238E27FC236}">
-                <a16:creationId xmlns:a16="http://schemas.microsoft.com/office/drawing/2014/main" id="{EF786C39-165B-4E45-9082-C7DC575BDD5B}"/>
+                <a16:creationId xmlns:a16="http://schemas.microsoft.com/office/drawing/2014/main" id="{2CC1B952-D496-4781-8CC5-47C8E3C8B729}"/>
               </a:ext>
             </a:extLst>
           </p:cNvPr>
@@ -6207,7 +6207,7 @@
           <p:cNvPr id="37" name="">
             <a:extLst xmlns:a="http://schemas.openxmlformats.org/drawingml/2006/main">
               <a:ext uri="{FF2B5EF4-FFF2-40B4-BE49-F238E27FC236}">
-                <a16:creationId xmlns:a16="http://schemas.microsoft.com/office/drawing/2014/main" id="{30021E87-F773-4F6C-ABC1-30C21EAA0191}"/>
+                <a16:creationId xmlns:a16="http://schemas.microsoft.com/office/drawing/2014/main" id="{0396E1CF-D415-401C-8EA5-BA886A7DDED4}"/>
               </a:ext>
             </a:extLst>
           </p:cNvPr>
@@ -6263,7 +6263,7 @@
           <p:cNvPr id="38" name="">
             <a:extLst xmlns:a="http://schemas.openxmlformats.org/drawingml/2006/main">
               <a:ext uri="{FF2B5EF4-FFF2-40B4-BE49-F238E27FC236}">
-                <a16:creationId xmlns:a16="http://schemas.microsoft.com/office/drawing/2014/main" id="{E5502AAC-0A0B-44A6-9518-77199C1FFD31}"/>
+                <a16:creationId xmlns:a16="http://schemas.microsoft.com/office/drawing/2014/main" id="{EE6B8CE9-4D29-4557-86D6-78E3A9475BAD}"/>
               </a:ext>
             </a:extLst>
           </p:cNvPr>
@@ -6319,7 +6319,7 @@
           <p:cNvPr id="39" name="">
             <a:extLst xmlns:a="http://schemas.openxmlformats.org/drawingml/2006/main">
               <a:ext uri="{FF2B5EF4-FFF2-40B4-BE49-F238E27FC236}">
-                <a16:creationId xmlns:a16="http://schemas.microsoft.com/office/drawing/2014/main" id="{CE2B97D9-337D-45B3-9F6A-EEC67AD204DE}"/>
+                <a16:creationId xmlns:a16="http://schemas.microsoft.com/office/drawing/2014/main" id="{B4136A44-1D72-45E6-8565-7415FFB7481F}"/>
               </a:ext>
             </a:extLst>
           </p:cNvPr>
@@ -6354,7 +6354,7 @@
           <p:cNvPr id="40" name="">
             <a:extLst xmlns:a="http://schemas.openxmlformats.org/drawingml/2006/main">
               <a:ext uri="{FF2B5EF4-FFF2-40B4-BE49-F238E27FC236}">
-                <a16:creationId xmlns:a16="http://schemas.microsoft.com/office/drawing/2014/main" id="{05CD8765-6507-49EB-AB07-13C97816D120}"/>
+                <a16:creationId xmlns:a16="http://schemas.microsoft.com/office/drawing/2014/main" id="{35381DFE-D646-4448-BBED-424286433D91}"/>
               </a:ext>
             </a:extLst>
           </p:cNvPr>
@@ -6410,7 +6410,7 @@
           <p:cNvPr id="41" name="">
             <a:extLst xmlns:a="http://schemas.openxmlformats.org/drawingml/2006/main">
               <a:ext uri="{FF2B5EF4-FFF2-40B4-BE49-F238E27FC236}">
-                <a16:creationId xmlns:a16="http://schemas.microsoft.com/office/drawing/2014/main" id="{B07E4830-E5D0-491F-BF04-C438CAC6E6B8}"/>
+                <a16:creationId xmlns:a16="http://schemas.microsoft.com/office/drawing/2014/main" id="{5F119930-AF82-4DBD-A3CF-36370CB8F958}"/>
               </a:ext>
             </a:extLst>
           </p:cNvPr>
@@ -6464,7 +6464,7 @@
     </p:spTree>
     <p:extLst>
       <p:ext uri="{BB962C8B-B14F-4D97-AF65-F5344CB8AC3E}">
-        <p14:creationId xmlns:p14="http://schemas.microsoft.com/office/powerpoint/2010/main" val="1805751409"/>
+        <p14:creationId xmlns:p14="http://schemas.microsoft.com/office/powerpoint/2010/main" val="554535689"/>
       </p:ext>
     </p:extLst>
   </p:cSld>
@@ -6495,7 +6495,7 @@
           <p:cNvPr id="1" name="">
             <a:extLst xmlns:a="http://schemas.openxmlformats.org/drawingml/2006/main">
               <a:ext uri="{FF2B5EF4-FFF2-40B4-BE49-F238E27FC236}">
-                <a16:creationId xmlns:a16="http://schemas.microsoft.com/office/drawing/2014/main" id="{FDA1C33D-3365-43C0-84B1-CA2F98DE38CC}"/>
+                <a16:creationId xmlns:a16="http://schemas.microsoft.com/office/drawing/2014/main" id="{B6FC0ECA-2C0B-46E9-824A-40847354C4CB}"/>
               </a:ext>
             </a:extLst>
           </p:cNvPr>
@@ -6526,7 +6526,7 @@
           <p:cNvPr id="2" name="">
             <a:extLst xmlns:a="http://schemas.openxmlformats.org/drawingml/2006/main">
               <a:ext uri="{FF2B5EF4-FFF2-40B4-BE49-F238E27FC236}">
-                <a16:creationId xmlns:a16="http://schemas.microsoft.com/office/drawing/2014/main" id="{A63DC95B-4F9F-4BC0-AE66-4A225C28C595}"/>
+                <a16:creationId xmlns:a16="http://schemas.microsoft.com/office/drawing/2014/main" id="{271C0462-D5A5-4653-A4E3-F72FB0875241}"/>
               </a:ext>
             </a:extLst>
           </p:cNvPr>
@@ -6582,7 +6582,7 @@
           <p:cNvPr id="3" name="">
             <a:extLst xmlns:a="http://schemas.openxmlformats.org/drawingml/2006/main">
               <a:ext uri="{FF2B5EF4-FFF2-40B4-BE49-F238E27FC236}">
-                <a16:creationId xmlns:a16="http://schemas.microsoft.com/office/drawing/2014/main" id="{11FE0C60-2B2F-4810-985F-C17E303ED907}"/>
+                <a16:creationId xmlns:a16="http://schemas.microsoft.com/office/drawing/2014/main" id="{619BCA67-4D81-4C6C-9E7E-45DCC9A37BC1}"/>
               </a:ext>
             </a:extLst>
           </p:cNvPr>
@@ -6638,7 +6638,7 @@
           <p:cNvPr id="4" name="">
             <a:extLst xmlns:a="http://schemas.openxmlformats.org/drawingml/2006/main">
               <a:ext uri="{FF2B5EF4-FFF2-40B4-BE49-F238E27FC236}">
-                <a16:creationId xmlns:a16="http://schemas.microsoft.com/office/drawing/2014/main" id="{DF6E3946-EC12-4E46-92F4-878284518240}"/>
+                <a16:creationId xmlns:a16="http://schemas.microsoft.com/office/drawing/2014/main" id="{BD5C6601-6CD1-435C-8E44-D325416F0476}"/>
               </a:ext>
             </a:extLst>
           </p:cNvPr>
@@ -6694,7 +6694,7 @@
           <p:cNvPr id="5" name="">
             <a:extLst xmlns:a="http://schemas.openxmlformats.org/drawingml/2006/main">
               <a:ext uri="{FF2B5EF4-FFF2-40B4-BE49-F238E27FC236}">
-                <a16:creationId xmlns:a16="http://schemas.microsoft.com/office/drawing/2014/main" id="{79B86505-574D-4A92-869E-C8E0688BE26A}"/>
+                <a16:creationId xmlns:a16="http://schemas.microsoft.com/office/drawing/2014/main" id="{AFEF3011-9855-463A-A656-D69275E54951}"/>
               </a:ext>
             </a:extLst>
           </p:cNvPr>
@@ -6750,7 +6750,7 @@
           <p:cNvPr id="6" name="">
             <a:extLst xmlns:a="http://schemas.openxmlformats.org/drawingml/2006/main">
               <a:ext uri="{FF2B5EF4-FFF2-40B4-BE49-F238E27FC236}">
-                <a16:creationId xmlns:a16="http://schemas.microsoft.com/office/drawing/2014/main" id="{BC310A9F-6C48-430F-BC50-9BF789D2A2F4}"/>
+                <a16:creationId xmlns:a16="http://schemas.microsoft.com/office/drawing/2014/main" id="{BBFF785D-F4DB-4D10-B046-C56823E6504D}"/>
               </a:ext>
             </a:extLst>
           </p:cNvPr>
@@ -6806,7 +6806,7 @@
           <p:cNvPr id="7" name="">
             <a:extLst xmlns:a="http://schemas.openxmlformats.org/drawingml/2006/main">
               <a:ext uri="{FF2B5EF4-FFF2-40B4-BE49-F238E27FC236}">
-                <a16:creationId xmlns:a16="http://schemas.microsoft.com/office/drawing/2014/main" id="{F98330AB-FF25-4054-BBF3-091B155264A5}"/>
+                <a16:creationId xmlns:a16="http://schemas.microsoft.com/office/drawing/2014/main" id="{ED4D1DBB-552A-4A8E-8226-34DC908CD87A}"/>
               </a:ext>
             </a:extLst>
           </p:cNvPr>
@@ -6862,7 +6862,7 @@
           <p:cNvPr id="8" name="">
             <a:extLst xmlns:a="http://schemas.openxmlformats.org/drawingml/2006/main">
               <a:ext uri="{FF2B5EF4-FFF2-40B4-BE49-F238E27FC236}">
-                <a16:creationId xmlns:a16="http://schemas.microsoft.com/office/drawing/2014/main" id="{0CED8924-8DEB-49A7-82A1-E0AC422911E4}"/>
+                <a16:creationId xmlns:a16="http://schemas.microsoft.com/office/drawing/2014/main" id="{BF7BF2D2-2490-4B19-A180-9EF578E09D56}"/>
               </a:ext>
             </a:extLst>
           </p:cNvPr>
@@ -6918,7 +6918,7 @@
           <p:cNvPr id="9" name="">
             <a:extLst xmlns:a="http://schemas.openxmlformats.org/drawingml/2006/main">
               <a:ext uri="{FF2B5EF4-FFF2-40B4-BE49-F238E27FC236}">
-                <a16:creationId xmlns:a16="http://schemas.microsoft.com/office/drawing/2014/main" id="{48600BC6-10A2-4179-89FC-6265CB9A1BB2}"/>
+                <a16:creationId xmlns:a16="http://schemas.microsoft.com/office/drawing/2014/main" id="{7BC15967-F3C3-4319-A7A1-1D156AD58055}"/>
               </a:ext>
             </a:extLst>
           </p:cNvPr>
@@ -6974,7 +6974,7 @@
           <p:cNvPr id="10" name="">
             <a:extLst xmlns:a="http://schemas.openxmlformats.org/drawingml/2006/main">
               <a:ext uri="{FF2B5EF4-FFF2-40B4-BE49-F238E27FC236}">
-                <a16:creationId xmlns:a16="http://schemas.microsoft.com/office/drawing/2014/main" id="{EF96773D-DF49-4829-8FBA-A6EF63D3033E}"/>
+                <a16:creationId xmlns:a16="http://schemas.microsoft.com/office/drawing/2014/main" id="{8D6AFB32-0F14-4F03-866A-8BAD14BA1EF6}"/>
               </a:ext>
             </a:extLst>
           </p:cNvPr>
@@ -7030,7 +7030,7 @@
           <p:cNvPr id="11" name="">
             <a:extLst xmlns:a="http://schemas.openxmlformats.org/drawingml/2006/main">
               <a:ext uri="{FF2B5EF4-FFF2-40B4-BE49-F238E27FC236}">
-                <a16:creationId xmlns:a16="http://schemas.microsoft.com/office/drawing/2014/main" id="{091C0EB6-9FDC-41E6-9CFD-ED150E50383B}"/>
+                <a16:creationId xmlns:a16="http://schemas.microsoft.com/office/drawing/2014/main" id="{A4BD535C-4325-47D5-90AF-1350384737D7}"/>
               </a:ext>
             </a:extLst>
           </p:cNvPr>
@@ -7086,7 +7086,7 @@
           <p:cNvPr id="12" name="">
             <a:extLst xmlns:a="http://schemas.openxmlformats.org/drawingml/2006/main">
               <a:ext uri="{FF2B5EF4-FFF2-40B4-BE49-F238E27FC236}">
-                <a16:creationId xmlns:a16="http://schemas.microsoft.com/office/drawing/2014/main" id="{81C190EF-403A-4442-BB06-5B3D20F5ECF4}"/>
+                <a16:creationId xmlns:a16="http://schemas.microsoft.com/office/drawing/2014/main" id="{EEB9F95D-49A2-4DDE-B55A-32E19A7F65D9}"/>
               </a:ext>
             </a:extLst>
           </p:cNvPr>
@@ -7142,7 +7142,7 @@
           <p:cNvPr id="13" name="">
             <a:extLst xmlns:a="http://schemas.openxmlformats.org/drawingml/2006/main">
               <a:ext uri="{FF2B5EF4-FFF2-40B4-BE49-F238E27FC236}">
-                <a16:creationId xmlns:a16="http://schemas.microsoft.com/office/drawing/2014/main" id="{05B33207-BDB2-43DE-8F34-EBA9DC03F73E}"/>
+                <a16:creationId xmlns:a16="http://schemas.microsoft.com/office/drawing/2014/main" id="{0F3850EC-C8FB-48AB-A530-D49B1B03CB6E}"/>
               </a:ext>
             </a:extLst>
           </p:cNvPr>
@@ -7177,7 +7177,7 @@
           <p:cNvPr id="14" name="">
             <a:extLst xmlns:a="http://schemas.openxmlformats.org/drawingml/2006/main">
               <a:ext uri="{FF2B5EF4-FFF2-40B4-BE49-F238E27FC236}">
-                <a16:creationId xmlns:a16="http://schemas.microsoft.com/office/drawing/2014/main" id="{89C0890E-53D6-4C54-B127-181F88B4B9DA}"/>
+                <a16:creationId xmlns:a16="http://schemas.microsoft.com/office/drawing/2014/main" id="{620416DB-32DB-47A1-BC9E-8CD758849B23}"/>
               </a:ext>
             </a:extLst>
           </p:cNvPr>
@@ -7233,7 +7233,7 @@
           <p:cNvPr id="15" name="">
             <a:extLst xmlns:a="http://schemas.openxmlformats.org/drawingml/2006/main">
               <a:ext uri="{FF2B5EF4-FFF2-40B4-BE49-F238E27FC236}">
-                <a16:creationId xmlns:a16="http://schemas.microsoft.com/office/drawing/2014/main" id="{49E7C868-538F-423F-A064-7C244EA5ED85}"/>
+                <a16:creationId xmlns:a16="http://schemas.microsoft.com/office/drawing/2014/main" id="{4420D51E-FB79-4E4B-8689-0B567FBE075B}"/>
               </a:ext>
             </a:extLst>
           </p:cNvPr>
@@ -7289,7 +7289,7 @@
           <p:cNvPr id="16" name="">
             <a:extLst xmlns:a="http://schemas.openxmlformats.org/drawingml/2006/main">
               <a:ext uri="{FF2B5EF4-FFF2-40B4-BE49-F238E27FC236}">
-                <a16:creationId xmlns:a16="http://schemas.microsoft.com/office/drawing/2014/main" id="{5EC5E62E-8EA0-4BF9-BC00-DFCD35154882}"/>
+                <a16:creationId xmlns:a16="http://schemas.microsoft.com/office/drawing/2014/main" id="{8D58FCBE-F2B8-4BB4-8C42-6EFAFAF351DC}"/>
               </a:ext>
             </a:extLst>
           </p:cNvPr>
@@ -7349,7 +7349,7 @@
           <p:nvPr/>
         </p:nvPicPr>
         <p:blipFill>
-          <a:blip xmlns:r="http://schemas.openxmlformats.org/officeDocument/2006/relationships" xmlns:a="http://schemas.openxmlformats.org/drawingml/2006/main" r:embed="R8363554d41a440dc"/>
+          <a:blip xmlns:r="http://schemas.openxmlformats.org/officeDocument/2006/relationships" xmlns:a="http://schemas.openxmlformats.org/drawingml/2006/main" r:embed="Rff50221032b24282"/>
           <a:srcRect xmlns:a="http://schemas.openxmlformats.org/drawingml/2006/main" l="19" t="0" r="19" b="0"/>
           <a:stretch xmlns:a="http://schemas.openxmlformats.org/drawingml/2006/main">
             <a:fillRect l="0" t="0" r="0" b="0"/>
@@ -7370,7 +7370,7 @@
     </p:spTree>
     <p:extLst>
       <p:ext uri="{BB962C8B-B14F-4D97-AF65-F5344CB8AC3E}">
-        <p14:creationId xmlns:p14="http://schemas.microsoft.com/office/powerpoint/2010/main" val="105376756"/>
+        <p14:creationId xmlns:p14="http://schemas.microsoft.com/office/powerpoint/2010/main" val="788179628"/>
       </p:ext>
     </p:extLst>
   </p:cSld>
@@ -7401,7 +7401,7 @@
           <p:cNvPr id="1" name="">
             <a:extLst xmlns:a="http://schemas.openxmlformats.org/drawingml/2006/main">
               <a:ext uri="{FF2B5EF4-FFF2-40B4-BE49-F238E27FC236}">
-                <a16:creationId xmlns:a16="http://schemas.microsoft.com/office/drawing/2014/main" id="{F0F9D432-DD66-439C-989A-AE031EFDE309}"/>
+                <a16:creationId xmlns:a16="http://schemas.microsoft.com/office/drawing/2014/main" id="{8D0CCF4B-C810-450E-8FB1-FB17110CEC85}"/>
               </a:ext>
             </a:extLst>
           </p:cNvPr>
@@ -7432,7 +7432,7 @@
           <p:cNvPr id="2" name="">
             <a:extLst xmlns:a="http://schemas.openxmlformats.org/drawingml/2006/main">
               <a:ext uri="{FF2B5EF4-FFF2-40B4-BE49-F238E27FC236}">
-                <a16:creationId xmlns:a16="http://schemas.microsoft.com/office/drawing/2014/main" id="{542308C7-F351-4D03-8DD3-6D71A49D99FF}"/>
+                <a16:creationId xmlns:a16="http://schemas.microsoft.com/office/drawing/2014/main" id="{F60A43BE-49C3-4855-B383-8235CEFCD286}"/>
               </a:ext>
             </a:extLst>
           </p:cNvPr>
@@ -7488,7 +7488,7 @@
           <p:cNvPr id="3" name="">
             <a:extLst xmlns:a="http://schemas.openxmlformats.org/drawingml/2006/main">
               <a:ext uri="{FF2B5EF4-FFF2-40B4-BE49-F238E27FC236}">
-                <a16:creationId xmlns:a16="http://schemas.microsoft.com/office/drawing/2014/main" id="{78D6089A-D4CF-4B4A-87B9-9936985E3138}"/>
+                <a16:creationId xmlns:a16="http://schemas.microsoft.com/office/drawing/2014/main" id="{D447511C-75AE-42FC-89DD-4FDEE9C88E14}"/>
               </a:ext>
             </a:extLst>
           </p:cNvPr>
@@ -7544,7 +7544,7 @@
           <p:cNvPr id="4" name="">
             <a:extLst xmlns:a="http://schemas.openxmlformats.org/drawingml/2006/main">
               <a:ext uri="{FF2B5EF4-FFF2-40B4-BE49-F238E27FC236}">
-                <a16:creationId xmlns:a16="http://schemas.microsoft.com/office/drawing/2014/main" id="{282EDF2C-4253-4133-8270-B201B39C9B42}"/>
+                <a16:creationId xmlns:a16="http://schemas.microsoft.com/office/drawing/2014/main" id="{8C9EDF0E-AA28-4FAD-A0D9-EF5E5B367CC8}"/>
               </a:ext>
             </a:extLst>
           </p:cNvPr>
@@ -7600,7 +7600,7 @@
           <p:cNvPr id="5" name="">
             <a:extLst xmlns:a="http://schemas.openxmlformats.org/drawingml/2006/main">
               <a:ext uri="{FF2B5EF4-FFF2-40B4-BE49-F238E27FC236}">
-                <a16:creationId xmlns:a16="http://schemas.microsoft.com/office/drawing/2014/main" id="{CC9D74C5-A360-411F-8767-8B25C9BD122B}"/>
+                <a16:creationId xmlns:a16="http://schemas.microsoft.com/office/drawing/2014/main" id="{504AB18B-8E47-4CDB-8D71-8E3E67A394B8}"/>
               </a:ext>
             </a:extLst>
           </p:cNvPr>
@@ -7631,7 +7631,7 @@
           <p:cNvPr id="6" name="">
             <a:extLst xmlns:a="http://schemas.openxmlformats.org/drawingml/2006/main">
               <a:ext uri="{FF2B5EF4-FFF2-40B4-BE49-F238E27FC236}">
-                <a16:creationId xmlns:a16="http://schemas.microsoft.com/office/drawing/2014/main" id="{AD8F4E53-DB88-4473-970E-A0281ADD516E}"/>
+                <a16:creationId xmlns:a16="http://schemas.microsoft.com/office/drawing/2014/main" id="{BF45F78A-93D8-4F40-87DE-C75E9483E3EE}"/>
               </a:ext>
             </a:extLst>
           </p:cNvPr>
@@ -7687,7 +7687,7 @@
           <p:cNvPr id="7" name="">
             <a:extLst xmlns:a="http://schemas.openxmlformats.org/drawingml/2006/main">
               <a:ext uri="{FF2B5EF4-FFF2-40B4-BE49-F238E27FC236}">
-                <a16:creationId xmlns:a16="http://schemas.microsoft.com/office/drawing/2014/main" id="{9D7810BE-74A2-4A2F-86F9-81D3A1E34A6C}"/>
+                <a16:creationId xmlns:a16="http://schemas.microsoft.com/office/drawing/2014/main" id="{DE38A647-9ECA-4DD5-90D7-7B781A86F775}"/>
               </a:ext>
             </a:extLst>
           </p:cNvPr>
@@ -7743,7 +7743,7 @@
           <p:cNvPr id="8" name="">
             <a:extLst xmlns:a="http://schemas.openxmlformats.org/drawingml/2006/main">
               <a:ext uri="{FF2B5EF4-FFF2-40B4-BE49-F238E27FC236}">
-                <a16:creationId xmlns:a16="http://schemas.microsoft.com/office/drawing/2014/main" id="{D9332AC0-DC70-4D6D-A20E-1DB7E3613CEF}"/>
+                <a16:creationId xmlns:a16="http://schemas.microsoft.com/office/drawing/2014/main" id="{3DAAFC86-DC34-4042-AED0-1C4677710B3B}"/>
               </a:ext>
             </a:extLst>
           </p:cNvPr>
@@ -7799,7 +7799,7 @@
           <p:cNvPr id="9" name="">
             <a:extLst xmlns:a="http://schemas.openxmlformats.org/drawingml/2006/main">
               <a:ext uri="{FF2B5EF4-FFF2-40B4-BE49-F238E27FC236}">
-                <a16:creationId xmlns:a16="http://schemas.microsoft.com/office/drawing/2014/main" id="{86DC44C4-CA6B-4393-B422-6644D8D354AA}"/>
+                <a16:creationId xmlns:a16="http://schemas.microsoft.com/office/drawing/2014/main" id="{F7DBB586-43FB-4186-820C-623AF000E2AB}"/>
               </a:ext>
             </a:extLst>
           </p:cNvPr>
@@ -7855,7 +7855,7 @@
           <p:cNvPr id="10" name="">
             <a:extLst xmlns:a="http://schemas.openxmlformats.org/drawingml/2006/main">
               <a:ext uri="{FF2B5EF4-FFF2-40B4-BE49-F238E27FC236}">
-                <a16:creationId xmlns:a16="http://schemas.microsoft.com/office/drawing/2014/main" id="{E758A415-F0F4-4AD4-80E6-DA22E403A153}"/>
+                <a16:creationId xmlns:a16="http://schemas.microsoft.com/office/drawing/2014/main" id="{BD5EB331-47E4-4FD7-B02B-6804C450E49D}"/>
               </a:ext>
             </a:extLst>
           </p:cNvPr>
@@ -7890,7 +7890,7 @@
           <p:cNvPr id="11" name="">
             <a:extLst xmlns:a="http://schemas.openxmlformats.org/drawingml/2006/main">
               <a:ext uri="{FF2B5EF4-FFF2-40B4-BE49-F238E27FC236}">
-                <a16:creationId xmlns:a16="http://schemas.microsoft.com/office/drawing/2014/main" id="{7944CCD8-9EB0-4094-B350-912539BD37A6}"/>
+                <a16:creationId xmlns:a16="http://schemas.microsoft.com/office/drawing/2014/main" id="{B3367250-2204-4EB2-876C-EC96C263EC5D}"/>
               </a:ext>
             </a:extLst>
           </p:cNvPr>
@@ -7946,7 +7946,7 @@
           <p:cNvPr id="12" name="">
             <a:extLst xmlns:a="http://schemas.openxmlformats.org/drawingml/2006/main">
               <a:ext uri="{FF2B5EF4-FFF2-40B4-BE49-F238E27FC236}">
-                <a16:creationId xmlns:a16="http://schemas.microsoft.com/office/drawing/2014/main" id="{5414028A-7CCB-418C-9138-7A8FDEF95AD1}"/>
+                <a16:creationId xmlns:a16="http://schemas.microsoft.com/office/drawing/2014/main" id="{42F76C91-CF3E-4F03-839B-1E395528EB6F}"/>
               </a:ext>
             </a:extLst>
           </p:cNvPr>
@@ -8002,7 +8002,7 @@
           <p:cNvPr id="13" name="">
             <a:extLst xmlns:a="http://schemas.openxmlformats.org/drawingml/2006/main">
               <a:ext uri="{FF2B5EF4-FFF2-40B4-BE49-F238E27FC236}">
-                <a16:creationId xmlns:a16="http://schemas.microsoft.com/office/drawing/2014/main" id="{20639B4C-B8BC-4133-A45F-D22707D92D2E}"/>
+                <a16:creationId xmlns:a16="http://schemas.microsoft.com/office/drawing/2014/main" id="{A10A948E-16F5-40B2-BC36-6CD8B745F48D}"/>
               </a:ext>
             </a:extLst>
           </p:cNvPr>
@@ -8058,7 +8058,7 @@
           <p:cNvPr id="14" name="">
             <a:extLst xmlns:a="http://schemas.openxmlformats.org/drawingml/2006/main">
               <a:ext uri="{FF2B5EF4-FFF2-40B4-BE49-F238E27FC236}">
-                <a16:creationId xmlns:a16="http://schemas.microsoft.com/office/drawing/2014/main" id="{97CEAE67-672C-4AD8-91A7-C2F356D2F142}"/>
+                <a16:creationId xmlns:a16="http://schemas.microsoft.com/office/drawing/2014/main" id="{CA1BC328-B453-48E1-B49C-FB366BB9D900}"/>
               </a:ext>
             </a:extLst>
           </p:cNvPr>
@@ -8114,7 +8114,7 @@
           <p:cNvPr id="15" name="">
             <a:extLst xmlns:a="http://schemas.openxmlformats.org/drawingml/2006/main">
               <a:ext uri="{FF2B5EF4-FFF2-40B4-BE49-F238E27FC236}">
-                <a16:creationId xmlns:a16="http://schemas.microsoft.com/office/drawing/2014/main" id="{1F9BEE17-047A-4623-897F-1D26FB0E0B1F}"/>
+                <a16:creationId xmlns:a16="http://schemas.microsoft.com/office/drawing/2014/main" id="{EA7EE731-78C7-4061-8211-5E508F4AA8F1}"/>
               </a:ext>
             </a:extLst>
           </p:cNvPr>
@@ -8170,7 +8170,7 @@
           <p:cNvPr id="16" name="">
             <a:extLst xmlns:a="http://schemas.openxmlformats.org/drawingml/2006/main">
               <a:ext uri="{FF2B5EF4-FFF2-40B4-BE49-F238E27FC236}">
-                <a16:creationId xmlns:a16="http://schemas.microsoft.com/office/drawing/2014/main" id="{6F033EB0-A35A-4595-9211-E38D0DF1D499}"/>
+                <a16:creationId xmlns:a16="http://schemas.microsoft.com/office/drawing/2014/main" id="{44B7087B-2821-431F-9D76-32C7A05C714D}"/>
               </a:ext>
             </a:extLst>
           </p:cNvPr>
@@ -8205,7 +8205,7 @@
           <p:cNvPr id="17" name="">
             <a:extLst xmlns:a="http://schemas.openxmlformats.org/drawingml/2006/main">
               <a:ext uri="{FF2B5EF4-FFF2-40B4-BE49-F238E27FC236}">
-                <a16:creationId xmlns:a16="http://schemas.microsoft.com/office/drawing/2014/main" id="{A2CC9F64-3CC0-44F2-B32E-76AE28A68723}"/>
+                <a16:creationId xmlns:a16="http://schemas.microsoft.com/office/drawing/2014/main" id="{C86F361D-2031-4703-94B9-A589A97ED765}"/>
               </a:ext>
             </a:extLst>
           </p:cNvPr>
@@ -8261,7 +8261,7 @@
           <p:cNvPr id="18" name="">
             <a:extLst xmlns:a="http://schemas.openxmlformats.org/drawingml/2006/main">
               <a:ext uri="{FF2B5EF4-FFF2-40B4-BE49-F238E27FC236}">
-                <a16:creationId xmlns:a16="http://schemas.microsoft.com/office/drawing/2014/main" id="{D97C654F-61D4-4A67-9A96-B3C7885E6B32}"/>
+                <a16:creationId xmlns:a16="http://schemas.microsoft.com/office/drawing/2014/main" id="{C3FC108F-3D1A-4053-AD2F-21ACDD99F8F8}"/>
               </a:ext>
             </a:extLst>
           </p:cNvPr>
@@ -8296,7 +8296,7 @@
           <p:cNvPr id="19" name="">
             <a:extLst xmlns:a="http://schemas.openxmlformats.org/drawingml/2006/main">
               <a:ext uri="{FF2B5EF4-FFF2-40B4-BE49-F238E27FC236}">
-                <a16:creationId xmlns:a16="http://schemas.microsoft.com/office/drawing/2014/main" id="{BCBA578F-0DFE-48CE-B82E-30E36D50BC75}"/>
+                <a16:creationId xmlns:a16="http://schemas.microsoft.com/office/drawing/2014/main" id="{AA7A2C34-0B60-4F43-9B48-AF6DAE960C52}"/>
               </a:ext>
             </a:extLst>
           </p:cNvPr>
@@ -8352,7 +8352,7 @@
           <p:cNvPr id="20" name="">
             <a:extLst xmlns:a="http://schemas.openxmlformats.org/drawingml/2006/main">
               <a:ext uri="{FF2B5EF4-FFF2-40B4-BE49-F238E27FC236}">
-                <a16:creationId xmlns:a16="http://schemas.microsoft.com/office/drawing/2014/main" id="{F2C33EB2-FCC7-4FE4-A81B-0FFB7614AB73}"/>
+                <a16:creationId xmlns:a16="http://schemas.microsoft.com/office/drawing/2014/main" id="{A696A965-EC78-4874-B325-5861A358F869}"/>
               </a:ext>
             </a:extLst>
           </p:cNvPr>
@@ -8408,7 +8408,7 @@
           <p:cNvPr id="21" name="">
             <a:extLst xmlns:a="http://schemas.openxmlformats.org/drawingml/2006/main">
               <a:ext uri="{FF2B5EF4-FFF2-40B4-BE49-F238E27FC236}">
-                <a16:creationId xmlns:a16="http://schemas.microsoft.com/office/drawing/2014/main" id="{7A650828-D205-4893-A866-B100ADC17CBC}"/>
+                <a16:creationId xmlns:a16="http://schemas.microsoft.com/office/drawing/2014/main" id="{41EFB6E3-5D90-4BE5-AF5A-DC3CFDD3587A}"/>
               </a:ext>
             </a:extLst>
           </p:cNvPr>
@@ -8462,7 +8462,7 @@
     </p:spTree>
     <p:extLst>
       <p:ext uri="{BB962C8B-B14F-4D97-AF65-F5344CB8AC3E}">
-        <p14:creationId xmlns:p14="http://schemas.microsoft.com/office/powerpoint/2010/main" val="1691569425"/>
+        <p14:creationId xmlns:p14="http://schemas.microsoft.com/office/powerpoint/2010/main" val="2031908588"/>
       </p:ext>
     </p:extLst>
   </p:cSld>
@@ -8493,7 +8493,7 @@
           <p:cNvPr id="1" name="">
             <a:extLst xmlns:a="http://schemas.openxmlformats.org/drawingml/2006/main">
               <a:ext uri="{FF2B5EF4-FFF2-40B4-BE49-F238E27FC236}">
-                <a16:creationId xmlns:a16="http://schemas.microsoft.com/office/drawing/2014/main" id="{4CBF306F-2A1D-4726-81CB-3089803FFCEC}"/>
+                <a16:creationId xmlns:a16="http://schemas.microsoft.com/office/drawing/2014/main" id="{34B3F9CA-DD29-4D8A-8ECE-31AB8C8EF4A1}"/>
               </a:ext>
             </a:extLst>
           </p:cNvPr>
@@ -8524,7 +8524,7 @@
           <p:cNvPr id="2" name="">
             <a:extLst xmlns:a="http://schemas.openxmlformats.org/drawingml/2006/main">
               <a:ext uri="{FF2B5EF4-FFF2-40B4-BE49-F238E27FC236}">
-                <a16:creationId xmlns:a16="http://schemas.microsoft.com/office/drawing/2014/main" id="{D89CDBF7-A43F-4EAD-907A-0CD164E11486}"/>
+                <a16:creationId xmlns:a16="http://schemas.microsoft.com/office/drawing/2014/main" id="{96FFA239-01D8-49EA-927A-C6C37D0962F1}"/>
               </a:ext>
             </a:extLst>
           </p:cNvPr>
@@ -8555,7 +8555,7 @@
           <p:cNvPr id="3" name="">
             <a:extLst xmlns:a="http://schemas.openxmlformats.org/drawingml/2006/main">
               <a:ext uri="{FF2B5EF4-FFF2-40B4-BE49-F238E27FC236}">
-                <a16:creationId xmlns:a16="http://schemas.microsoft.com/office/drawing/2014/main" id="{BDBE9BEF-14A5-44C6-98CC-B55D8C847184}"/>
+                <a16:creationId xmlns:a16="http://schemas.microsoft.com/office/drawing/2014/main" id="{4C842E52-FCC8-4A85-A861-3CD99C3ECED2}"/>
               </a:ext>
             </a:extLst>
           </p:cNvPr>
@@ -8586,7 +8586,7 @@
           <p:cNvPr id="4" name="">
             <a:extLst xmlns:a="http://schemas.openxmlformats.org/drawingml/2006/main">
               <a:ext uri="{FF2B5EF4-FFF2-40B4-BE49-F238E27FC236}">
-                <a16:creationId xmlns:a16="http://schemas.microsoft.com/office/drawing/2014/main" id="{A63B7BC7-329D-4A0E-8DDA-45EDB2ACA268}"/>
+                <a16:creationId xmlns:a16="http://schemas.microsoft.com/office/drawing/2014/main" id="{6DB126BE-10C8-471D-95B0-465CBDEA8AA2}"/>
               </a:ext>
             </a:extLst>
           </p:cNvPr>
@@ -8617,7 +8617,7 @@
           <p:cNvPr id="5" name="">
             <a:extLst xmlns:a="http://schemas.openxmlformats.org/drawingml/2006/main">
               <a:ext uri="{FF2B5EF4-FFF2-40B4-BE49-F238E27FC236}">
-                <a16:creationId xmlns:a16="http://schemas.microsoft.com/office/drawing/2014/main" id="{BC715445-6C85-45CB-99A7-7713328A5A90}"/>
+                <a16:creationId xmlns:a16="http://schemas.microsoft.com/office/drawing/2014/main" id="{66317EAA-5C16-46F8-82E6-4D98CB58B705}"/>
               </a:ext>
             </a:extLst>
           </p:cNvPr>
@@ -8648,7 +8648,7 @@
           <p:cNvPr id="6" name="">
             <a:extLst xmlns:a="http://schemas.openxmlformats.org/drawingml/2006/main">
               <a:ext uri="{FF2B5EF4-FFF2-40B4-BE49-F238E27FC236}">
-                <a16:creationId xmlns:a16="http://schemas.microsoft.com/office/drawing/2014/main" id="{374B3D97-D42D-4D8F-9C2F-458A157E3011}"/>
+                <a16:creationId xmlns:a16="http://schemas.microsoft.com/office/drawing/2014/main" id="{C5600EF6-BB01-4514-8AA8-905C0BA2AECE}"/>
               </a:ext>
             </a:extLst>
           </p:cNvPr>
@@ -8679,7 +8679,7 @@
           <p:cNvPr id="7" name="">
             <a:extLst xmlns:a="http://schemas.openxmlformats.org/drawingml/2006/main">
               <a:ext uri="{FF2B5EF4-FFF2-40B4-BE49-F238E27FC236}">
-                <a16:creationId xmlns:a16="http://schemas.microsoft.com/office/drawing/2014/main" id="{DDCFF145-1D0F-4A41-88AA-BDCB2E8BFACB}"/>
+                <a16:creationId xmlns:a16="http://schemas.microsoft.com/office/drawing/2014/main" id="{AEF64C39-04B2-4B69-87FB-A5EEB5F3BF8A}"/>
               </a:ext>
             </a:extLst>
           </p:cNvPr>
@@ -8710,7 +8710,7 @@
           <p:cNvPr id="8" name="">
             <a:extLst xmlns:a="http://schemas.openxmlformats.org/drawingml/2006/main">
               <a:ext uri="{FF2B5EF4-FFF2-40B4-BE49-F238E27FC236}">
-                <a16:creationId xmlns:a16="http://schemas.microsoft.com/office/drawing/2014/main" id="{DAD48340-0361-40A3-8D06-3C4BC395B52F}"/>
+                <a16:creationId xmlns:a16="http://schemas.microsoft.com/office/drawing/2014/main" id="{FF8F9B04-6F0D-4109-AD95-2DA1D5269CBA}"/>
               </a:ext>
             </a:extLst>
           </p:cNvPr>
@@ -8741,7 +8741,7 @@
           <p:cNvPr id="9" name="">
             <a:extLst xmlns:a="http://schemas.openxmlformats.org/drawingml/2006/main">
               <a:ext uri="{FF2B5EF4-FFF2-40B4-BE49-F238E27FC236}">
-                <a16:creationId xmlns:a16="http://schemas.microsoft.com/office/drawing/2014/main" id="{55AB169A-0F87-48CC-8115-7621BD321F7B}"/>
+                <a16:creationId xmlns:a16="http://schemas.microsoft.com/office/drawing/2014/main" id="{52D7FC4E-F87C-4641-8E61-5A78987899BD}"/>
               </a:ext>
             </a:extLst>
           </p:cNvPr>
@@ -8772,7 +8772,7 @@
           <p:cNvPr id="10" name="">
             <a:extLst xmlns:a="http://schemas.openxmlformats.org/drawingml/2006/main">
               <a:ext uri="{FF2B5EF4-FFF2-40B4-BE49-F238E27FC236}">
-                <a16:creationId xmlns:a16="http://schemas.microsoft.com/office/drawing/2014/main" id="{A27E7F10-0B3C-4FC5-9021-C53FFBCD606C}"/>
+                <a16:creationId xmlns:a16="http://schemas.microsoft.com/office/drawing/2014/main" id="{D3B17E45-84A1-45E4-B840-1E2F716BF00D}"/>
               </a:ext>
             </a:extLst>
           </p:cNvPr>
@@ -8803,7 +8803,7 @@
           <p:cNvPr id="11" name="">
             <a:extLst xmlns:a="http://schemas.openxmlformats.org/drawingml/2006/main">
               <a:ext uri="{FF2B5EF4-FFF2-40B4-BE49-F238E27FC236}">
-                <a16:creationId xmlns:a16="http://schemas.microsoft.com/office/drawing/2014/main" id="{1376533F-2C87-420F-9703-7D76E1C55075}"/>
+                <a16:creationId xmlns:a16="http://schemas.microsoft.com/office/drawing/2014/main" id="{D7C9FE81-4E63-43CC-8CB8-279580135992}"/>
               </a:ext>
             </a:extLst>
           </p:cNvPr>
@@ -8834,7 +8834,7 @@
           <p:cNvPr id="12" name="">
             <a:extLst xmlns:a="http://schemas.openxmlformats.org/drawingml/2006/main">
               <a:ext uri="{FF2B5EF4-FFF2-40B4-BE49-F238E27FC236}">
-                <a16:creationId xmlns:a16="http://schemas.microsoft.com/office/drawing/2014/main" id="{19F9804D-9660-42CC-9072-C669BFFF391D}"/>
+                <a16:creationId xmlns:a16="http://schemas.microsoft.com/office/drawing/2014/main" id="{B73D2872-351A-495B-BCB7-6377DF3F9D04}"/>
               </a:ext>
             </a:extLst>
           </p:cNvPr>
@@ -8865,7 +8865,7 @@
           <p:cNvPr id="13" name="">
             <a:extLst xmlns:a="http://schemas.openxmlformats.org/drawingml/2006/main">
               <a:ext uri="{FF2B5EF4-FFF2-40B4-BE49-F238E27FC236}">
-                <a16:creationId xmlns:a16="http://schemas.microsoft.com/office/drawing/2014/main" id="{BD1BEEAC-F636-44E2-AB83-004068EC989B}"/>
+                <a16:creationId xmlns:a16="http://schemas.microsoft.com/office/drawing/2014/main" id="{E07B5834-A58C-444B-B843-AA76E097CCB7}"/>
               </a:ext>
             </a:extLst>
           </p:cNvPr>
@@ -8896,7 +8896,7 @@
           <p:cNvPr id="14" name="">
             <a:extLst xmlns:a="http://schemas.openxmlformats.org/drawingml/2006/main">
               <a:ext uri="{FF2B5EF4-FFF2-40B4-BE49-F238E27FC236}">
-                <a16:creationId xmlns:a16="http://schemas.microsoft.com/office/drawing/2014/main" id="{6F5B564F-F83D-4298-97A8-FE71A33499FC}"/>
+                <a16:creationId xmlns:a16="http://schemas.microsoft.com/office/drawing/2014/main" id="{CC263AF9-150F-446C-8E6B-5D1F81806CDA}"/>
               </a:ext>
             </a:extLst>
           </p:cNvPr>
@@ -8927,7 +8927,7 @@
           <p:cNvPr id="15" name="">
             <a:extLst xmlns:a="http://schemas.openxmlformats.org/drawingml/2006/main">
               <a:ext uri="{FF2B5EF4-FFF2-40B4-BE49-F238E27FC236}">
-                <a16:creationId xmlns:a16="http://schemas.microsoft.com/office/drawing/2014/main" id="{ADADFF80-FFE0-44BD-8AE3-DB962DAFDDD1}"/>
+                <a16:creationId xmlns:a16="http://schemas.microsoft.com/office/drawing/2014/main" id="{30E78E79-F93B-482D-A1A2-46C5A14DC470}"/>
               </a:ext>
             </a:extLst>
           </p:cNvPr>
@@ -8958,7 +8958,7 @@
           <p:cNvPr id="16" name="">
             <a:extLst xmlns:a="http://schemas.openxmlformats.org/drawingml/2006/main">
               <a:ext uri="{FF2B5EF4-FFF2-40B4-BE49-F238E27FC236}">
-                <a16:creationId xmlns:a16="http://schemas.microsoft.com/office/drawing/2014/main" id="{A539DD72-E31A-477D-B9B1-2C51E94E6938}"/>
+                <a16:creationId xmlns:a16="http://schemas.microsoft.com/office/drawing/2014/main" id="{4135BF78-04E4-4712-901E-D410A23452D3}"/>
               </a:ext>
             </a:extLst>
           </p:cNvPr>
@@ -8989,7 +8989,7 @@
           <p:cNvPr id="17" name="">
             <a:extLst xmlns:a="http://schemas.openxmlformats.org/drawingml/2006/main">
               <a:ext uri="{FF2B5EF4-FFF2-40B4-BE49-F238E27FC236}">
-                <a16:creationId xmlns:a16="http://schemas.microsoft.com/office/drawing/2014/main" id="{1F4B5361-7B6F-4171-9144-5CF538989F40}"/>
+                <a16:creationId xmlns:a16="http://schemas.microsoft.com/office/drawing/2014/main" id="{E3A2FD32-CCA5-4E0F-A143-A12786BC44B1}"/>
               </a:ext>
             </a:extLst>
           </p:cNvPr>
@@ -9020,7 +9020,7 @@
           <p:cNvPr id="18" name="">
             <a:extLst xmlns:a="http://schemas.openxmlformats.org/drawingml/2006/main">
               <a:ext uri="{FF2B5EF4-FFF2-40B4-BE49-F238E27FC236}">
-                <a16:creationId xmlns:a16="http://schemas.microsoft.com/office/drawing/2014/main" id="{A483F5DA-F67E-43C6-BEDF-A1F205C65935}"/>
+                <a16:creationId xmlns:a16="http://schemas.microsoft.com/office/drawing/2014/main" id="{F837BF54-CE2A-4D4C-A482-78AB92B550E8}"/>
               </a:ext>
             </a:extLst>
           </p:cNvPr>
@@ -9051,7 +9051,7 @@
           <p:cNvPr id="19" name="">
             <a:extLst xmlns:a="http://schemas.openxmlformats.org/drawingml/2006/main">
               <a:ext uri="{FF2B5EF4-FFF2-40B4-BE49-F238E27FC236}">
-                <a16:creationId xmlns:a16="http://schemas.microsoft.com/office/drawing/2014/main" id="{AF20797A-2DA0-4AEA-9D3B-0FAB9758AD6E}"/>
+                <a16:creationId xmlns:a16="http://schemas.microsoft.com/office/drawing/2014/main" id="{A8BBC3EA-1A9C-45A0-B787-AD07D6150A3C}"/>
               </a:ext>
             </a:extLst>
           </p:cNvPr>
@@ -9082,7 +9082,7 @@
           <p:cNvPr id="20" name="">
             <a:extLst xmlns:a="http://schemas.openxmlformats.org/drawingml/2006/main">
               <a:ext uri="{FF2B5EF4-FFF2-40B4-BE49-F238E27FC236}">
-                <a16:creationId xmlns:a16="http://schemas.microsoft.com/office/drawing/2014/main" id="{34909A5D-4D5F-4F4B-A26B-7756020C4B1E}"/>
+                <a16:creationId xmlns:a16="http://schemas.microsoft.com/office/drawing/2014/main" id="{5F638003-6CEF-40E7-B5C6-433A046DED98}"/>
               </a:ext>
             </a:extLst>
           </p:cNvPr>
@@ -9113,7 +9113,7 @@
           <p:cNvPr id="21" name="">
             <a:extLst xmlns:a="http://schemas.openxmlformats.org/drawingml/2006/main">
               <a:ext uri="{FF2B5EF4-FFF2-40B4-BE49-F238E27FC236}">
-                <a16:creationId xmlns:a16="http://schemas.microsoft.com/office/drawing/2014/main" id="{9D1493CE-7CD0-4CDE-B389-24DCCC27A457}"/>
+                <a16:creationId xmlns:a16="http://schemas.microsoft.com/office/drawing/2014/main" id="{F2128938-AD58-4AB5-B256-1E8819F73752}"/>
               </a:ext>
             </a:extLst>
           </p:cNvPr>
@@ -9144,7 +9144,7 @@
           <p:cNvPr id="22" name="">
             <a:extLst xmlns:a="http://schemas.openxmlformats.org/drawingml/2006/main">
               <a:ext uri="{FF2B5EF4-FFF2-40B4-BE49-F238E27FC236}">
-                <a16:creationId xmlns:a16="http://schemas.microsoft.com/office/drawing/2014/main" id="{B07D2156-B9EB-4A4C-8ABA-C93E8926C4B1}"/>
+                <a16:creationId xmlns:a16="http://schemas.microsoft.com/office/drawing/2014/main" id="{9B69AF75-3A36-4975-B53C-0E43E033F4B4}"/>
               </a:ext>
             </a:extLst>
           </p:cNvPr>
@@ -9175,7 +9175,7 @@
           <p:cNvPr id="23" name="">
             <a:extLst xmlns:a="http://schemas.openxmlformats.org/drawingml/2006/main">
               <a:ext uri="{FF2B5EF4-FFF2-40B4-BE49-F238E27FC236}">
-                <a16:creationId xmlns:a16="http://schemas.microsoft.com/office/drawing/2014/main" id="{06490057-B16B-4AE3-ADAE-4AE17BBABA2C}"/>
+                <a16:creationId xmlns:a16="http://schemas.microsoft.com/office/drawing/2014/main" id="{89593329-FC4F-454F-8CBC-CBD4BCA9307C}"/>
               </a:ext>
             </a:extLst>
           </p:cNvPr>
@@ -9206,7 +9206,7 @@
           <p:cNvPr id="24" name="">
             <a:extLst xmlns:a="http://schemas.openxmlformats.org/drawingml/2006/main">
               <a:ext uri="{FF2B5EF4-FFF2-40B4-BE49-F238E27FC236}">
-                <a16:creationId xmlns:a16="http://schemas.microsoft.com/office/drawing/2014/main" id="{0675EB89-C225-4EA7-8DE8-0E81C90CBD59}"/>
+                <a16:creationId xmlns:a16="http://schemas.microsoft.com/office/drawing/2014/main" id="{EA37CC91-920F-4F1D-950B-9E849AE2903A}"/>
               </a:ext>
             </a:extLst>
           </p:cNvPr>
@@ -9237,7 +9237,7 @@
           <p:cNvPr id="25" name="">
             <a:extLst xmlns:a="http://schemas.openxmlformats.org/drawingml/2006/main">
               <a:ext uri="{FF2B5EF4-FFF2-40B4-BE49-F238E27FC236}">
-                <a16:creationId xmlns:a16="http://schemas.microsoft.com/office/drawing/2014/main" id="{3F0ED037-9D44-44CD-8D87-81A6ACFC2DE4}"/>
+                <a16:creationId xmlns:a16="http://schemas.microsoft.com/office/drawing/2014/main" id="{0CD2ED90-0BD1-45F6-A3A2-214AAFE69FAF}"/>
               </a:ext>
             </a:extLst>
           </p:cNvPr>
@@ -9268,7 +9268,7 @@
           <p:cNvPr id="26" name="">
             <a:extLst xmlns:a="http://schemas.openxmlformats.org/drawingml/2006/main">
               <a:ext uri="{FF2B5EF4-FFF2-40B4-BE49-F238E27FC236}">
-                <a16:creationId xmlns:a16="http://schemas.microsoft.com/office/drawing/2014/main" id="{84E8C1FA-A114-4A0D-B40F-7A5336D7EA3D}"/>
+                <a16:creationId xmlns:a16="http://schemas.microsoft.com/office/drawing/2014/main" id="{7E0DD2BE-C4DD-46D4-9A22-B67E6466B1D6}"/>
               </a:ext>
             </a:extLst>
           </p:cNvPr>
@@ -9299,7 +9299,7 @@
           <p:cNvPr id="27" name="">
             <a:extLst xmlns:a="http://schemas.openxmlformats.org/drawingml/2006/main">
               <a:ext uri="{FF2B5EF4-FFF2-40B4-BE49-F238E27FC236}">
-                <a16:creationId xmlns:a16="http://schemas.microsoft.com/office/drawing/2014/main" id="{E5D5BA4D-B571-41E8-86CC-5174C1721D9B}"/>
+                <a16:creationId xmlns:a16="http://schemas.microsoft.com/office/drawing/2014/main" id="{0F67C678-B89F-4B62-BA1F-E05BACBDE0E9}"/>
               </a:ext>
             </a:extLst>
           </p:cNvPr>
@@ -9330,7 +9330,7 @@
           <p:cNvPr id="28" name="">
             <a:extLst xmlns:a="http://schemas.openxmlformats.org/drawingml/2006/main">
               <a:ext uri="{FF2B5EF4-FFF2-40B4-BE49-F238E27FC236}">
-                <a16:creationId xmlns:a16="http://schemas.microsoft.com/office/drawing/2014/main" id="{7B41A0EB-E6A3-4E18-B531-42412DECBB81}"/>
+                <a16:creationId xmlns:a16="http://schemas.microsoft.com/office/drawing/2014/main" id="{75A3C94D-8346-4716-A5C4-37C1E009E20F}"/>
               </a:ext>
             </a:extLst>
           </p:cNvPr>
@@ -9361,7 +9361,7 @@
           <p:cNvPr id="29" name="">
             <a:extLst xmlns:a="http://schemas.openxmlformats.org/drawingml/2006/main">
               <a:ext uri="{FF2B5EF4-FFF2-40B4-BE49-F238E27FC236}">
-                <a16:creationId xmlns:a16="http://schemas.microsoft.com/office/drawing/2014/main" id="{587E21DA-DAC3-4670-BCF1-EB4EAFAEBB2D}"/>
+                <a16:creationId xmlns:a16="http://schemas.microsoft.com/office/drawing/2014/main" id="{359C2C69-E104-4BA2-9ED3-C51834C325E3}"/>
               </a:ext>
             </a:extLst>
           </p:cNvPr>
@@ -9392,7 +9392,7 @@
           <p:cNvPr id="30" name="">
             <a:extLst xmlns:a="http://schemas.openxmlformats.org/drawingml/2006/main">
               <a:ext uri="{FF2B5EF4-FFF2-40B4-BE49-F238E27FC236}">
-                <a16:creationId xmlns:a16="http://schemas.microsoft.com/office/drawing/2014/main" id="{BA2B0D14-BA93-4164-A818-D640A7B84E53}"/>
+                <a16:creationId xmlns:a16="http://schemas.microsoft.com/office/drawing/2014/main" id="{EB5E1795-5BA2-48FC-81DE-A53998F6E745}"/>
               </a:ext>
             </a:extLst>
           </p:cNvPr>
@@ -9423,7 +9423,7 @@
           <p:cNvPr id="31" name="">
             <a:extLst xmlns:a="http://schemas.openxmlformats.org/drawingml/2006/main">
               <a:ext uri="{FF2B5EF4-FFF2-40B4-BE49-F238E27FC236}">
-                <a16:creationId xmlns:a16="http://schemas.microsoft.com/office/drawing/2014/main" id="{32B6EFAB-FC44-40AC-9A06-7089AB75CB94}"/>
+                <a16:creationId xmlns:a16="http://schemas.microsoft.com/office/drawing/2014/main" id="{0EE412BB-882D-4782-B677-513B42514B31}"/>
               </a:ext>
             </a:extLst>
           </p:cNvPr>
@@ -9454,7 +9454,7 @@
           <p:cNvPr id="32" name="">
             <a:extLst xmlns:a="http://schemas.openxmlformats.org/drawingml/2006/main">
               <a:ext uri="{FF2B5EF4-FFF2-40B4-BE49-F238E27FC236}">
-                <a16:creationId xmlns:a16="http://schemas.microsoft.com/office/drawing/2014/main" id="{D92AC8BB-B3E9-4571-B317-50A944DE1FA1}"/>
+                <a16:creationId xmlns:a16="http://schemas.microsoft.com/office/drawing/2014/main" id="{4AA4A2AE-091A-4289-AD08-D7BD06554B86}"/>
               </a:ext>
             </a:extLst>
           </p:cNvPr>
@@ -9510,7 +9510,7 @@
           <p:cNvPr id="33" name="">
             <a:extLst xmlns:a="http://schemas.openxmlformats.org/drawingml/2006/main">
               <a:ext uri="{FF2B5EF4-FFF2-40B4-BE49-F238E27FC236}">
-                <a16:creationId xmlns:a16="http://schemas.microsoft.com/office/drawing/2014/main" id="{78C3B7D2-25E6-4980-A67E-68BC86FE6E86}"/>
+                <a16:creationId xmlns:a16="http://schemas.microsoft.com/office/drawing/2014/main" id="{57D2C169-1E8C-4E9D-BDBA-91A618FF4F6C}"/>
               </a:ext>
             </a:extLst>
           </p:cNvPr>
@@ -9566,7 +9566,7 @@
           <p:cNvPr id="34" name="">
             <a:extLst xmlns:a="http://schemas.openxmlformats.org/drawingml/2006/main">
               <a:ext uri="{FF2B5EF4-FFF2-40B4-BE49-F238E27FC236}">
-                <a16:creationId xmlns:a16="http://schemas.microsoft.com/office/drawing/2014/main" id="{7BFB9906-0C93-48C0-AEEB-D952A542FFDD}"/>
+                <a16:creationId xmlns:a16="http://schemas.microsoft.com/office/drawing/2014/main" id="{7B787944-23F8-497E-AC6B-2AFF763E2C83}"/>
               </a:ext>
             </a:extLst>
           </p:cNvPr>
@@ -9622,7 +9622,7 @@
           <p:cNvPr id="35" name="">
             <a:extLst xmlns:a="http://schemas.openxmlformats.org/drawingml/2006/main">
               <a:ext uri="{FF2B5EF4-FFF2-40B4-BE49-F238E27FC236}">
-                <a16:creationId xmlns:a16="http://schemas.microsoft.com/office/drawing/2014/main" id="{A4583417-1697-45F5-8111-CCF814F56696}"/>
+                <a16:creationId xmlns:a16="http://schemas.microsoft.com/office/drawing/2014/main" id="{998BD927-B750-4380-AABE-56444A948757}"/>
               </a:ext>
             </a:extLst>
           </p:cNvPr>
@@ -9657,7 +9657,7 @@
           <p:cNvPr id="36" name="">
             <a:extLst xmlns:a="http://schemas.openxmlformats.org/drawingml/2006/main">
               <a:ext uri="{FF2B5EF4-FFF2-40B4-BE49-F238E27FC236}">
-                <a16:creationId xmlns:a16="http://schemas.microsoft.com/office/drawing/2014/main" id="{E1736777-C434-47F7-B086-BA9A5C95C61E}"/>
+                <a16:creationId xmlns:a16="http://schemas.microsoft.com/office/drawing/2014/main" id="{0204C189-EB44-4CE0-863F-5F307526F982}"/>
               </a:ext>
             </a:extLst>
           </p:cNvPr>
@@ -9688,7 +9688,7 @@
           <p:cNvPr id="37" name="">
             <a:extLst xmlns:a="http://schemas.openxmlformats.org/drawingml/2006/main">
               <a:ext uri="{FF2B5EF4-FFF2-40B4-BE49-F238E27FC236}">
-                <a16:creationId xmlns:a16="http://schemas.microsoft.com/office/drawing/2014/main" id="{7A0331ED-3364-4AF7-92BF-46EF42B557DB}"/>
+                <a16:creationId xmlns:a16="http://schemas.microsoft.com/office/drawing/2014/main" id="{52D6FBAA-D0BD-4E39-8858-467A5A93738F}"/>
               </a:ext>
             </a:extLst>
           </p:cNvPr>
@@ -9723,7 +9723,7 @@
           <p:cNvPr id="38" name="">
             <a:extLst xmlns:a="http://schemas.openxmlformats.org/drawingml/2006/main">
               <a:ext uri="{FF2B5EF4-FFF2-40B4-BE49-F238E27FC236}">
-                <a16:creationId xmlns:a16="http://schemas.microsoft.com/office/drawing/2014/main" id="{3D91A499-23BF-4093-AF27-C1D9644F8F9C}"/>
+                <a16:creationId xmlns:a16="http://schemas.microsoft.com/office/drawing/2014/main" id="{01429BFA-89DF-4A74-A00F-4C52C5AD69A5}"/>
               </a:ext>
             </a:extLst>
           </p:cNvPr>
@@ -9754,7 +9754,7 @@
           <p:cNvPr id="39" name="">
             <a:extLst xmlns:a="http://schemas.openxmlformats.org/drawingml/2006/main">
               <a:ext uri="{FF2B5EF4-FFF2-40B4-BE49-F238E27FC236}">
-                <a16:creationId xmlns:a16="http://schemas.microsoft.com/office/drawing/2014/main" id="{D419E220-C8EA-4D1B-A224-54D186DB9095}"/>
+                <a16:creationId xmlns:a16="http://schemas.microsoft.com/office/drawing/2014/main" id="{CBA8B2D5-7EDF-4F63-8EF1-062AE4AD35AD}"/>
               </a:ext>
             </a:extLst>
           </p:cNvPr>
@@ -9789,7 +9789,7 @@
           <p:cNvPr id="40" name="">
             <a:extLst xmlns:a="http://schemas.openxmlformats.org/drawingml/2006/main">
               <a:ext uri="{FF2B5EF4-FFF2-40B4-BE49-F238E27FC236}">
-                <a16:creationId xmlns:a16="http://schemas.microsoft.com/office/drawing/2014/main" id="{178D512D-8B81-463D-8669-88DC781F54D6}"/>
+                <a16:creationId xmlns:a16="http://schemas.microsoft.com/office/drawing/2014/main" id="{C5055B96-3598-471E-A95C-F777DD36345A}"/>
               </a:ext>
             </a:extLst>
           </p:cNvPr>
@@ -9820,7 +9820,7 @@
           <p:cNvPr id="41" name="">
             <a:extLst xmlns:a="http://schemas.openxmlformats.org/drawingml/2006/main">
               <a:ext uri="{FF2B5EF4-FFF2-40B4-BE49-F238E27FC236}">
-                <a16:creationId xmlns:a16="http://schemas.microsoft.com/office/drawing/2014/main" id="{31FC8FA5-1393-4ADF-B620-1653A0A1DCFC}"/>
+                <a16:creationId xmlns:a16="http://schemas.microsoft.com/office/drawing/2014/main" id="{E10C2FBA-5066-45F6-835B-5F51544A7C1F}"/>
               </a:ext>
             </a:extLst>
           </p:cNvPr>
@@ -9855,7 +9855,7 @@
           <p:cNvPr id="42" name="">
             <a:extLst xmlns:a="http://schemas.openxmlformats.org/drawingml/2006/main">
               <a:ext uri="{FF2B5EF4-FFF2-40B4-BE49-F238E27FC236}">
-                <a16:creationId xmlns:a16="http://schemas.microsoft.com/office/drawing/2014/main" id="{7848808E-4680-4CA5-A261-4E46F3839443}"/>
+                <a16:creationId xmlns:a16="http://schemas.microsoft.com/office/drawing/2014/main" id="{EFD0F16B-C3A8-4B5A-995C-6DDF9D25083D}"/>
               </a:ext>
             </a:extLst>
           </p:cNvPr>
@@ -9886,7 +9886,7 @@
           <p:cNvPr id="43" name="">
             <a:extLst xmlns:a="http://schemas.openxmlformats.org/drawingml/2006/main">
               <a:ext uri="{FF2B5EF4-FFF2-40B4-BE49-F238E27FC236}">
-                <a16:creationId xmlns:a16="http://schemas.microsoft.com/office/drawing/2014/main" id="{C72B0427-070B-440A-A732-12DFD595E516}"/>
+                <a16:creationId xmlns:a16="http://schemas.microsoft.com/office/drawing/2014/main" id="{C66B4102-E45F-4A62-9BFF-AA13FC913682}"/>
               </a:ext>
             </a:extLst>
           </p:cNvPr>
@@ -9921,7 +9921,7 @@
           <p:cNvPr id="44" name="">
             <a:extLst xmlns:a="http://schemas.openxmlformats.org/drawingml/2006/main">
               <a:ext uri="{FF2B5EF4-FFF2-40B4-BE49-F238E27FC236}">
-                <a16:creationId xmlns:a16="http://schemas.microsoft.com/office/drawing/2014/main" id="{F6348F2A-134E-4965-856F-6349A9D25B67}"/>
+                <a16:creationId xmlns:a16="http://schemas.microsoft.com/office/drawing/2014/main" id="{508D1124-26C6-4977-8B19-78C3ACE66555}"/>
               </a:ext>
             </a:extLst>
           </p:cNvPr>
@@ -9952,7 +9952,7 @@
           <p:cNvPr id="45" name="">
             <a:extLst xmlns:a="http://schemas.openxmlformats.org/drawingml/2006/main">
               <a:ext uri="{FF2B5EF4-FFF2-40B4-BE49-F238E27FC236}">
-                <a16:creationId xmlns:a16="http://schemas.microsoft.com/office/drawing/2014/main" id="{4B6A623F-55F8-47FD-9A8D-88370209D6BB}"/>
+                <a16:creationId xmlns:a16="http://schemas.microsoft.com/office/drawing/2014/main" id="{B0D75374-3EB8-4298-9A76-EBCD017B8E65}"/>
               </a:ext>
             </a:extLst>
           </p:cNvPr>
@@ -9987,7 +9987,7 @@
           <p:cNvPr id="46" name="">
             <a:extLst xmlns:a="http://schemas.openxmlformats.org/drawingml/2006/main">
               <a:ext uri="{FF2B5EF4-FFF2-40B4-BE49-F238E27FC236}">
-                <a16:creationId xmlns:a16="http://schemas.microsoft.com/office/drawing/2014/main" id="{7DD4F051-6FFA-4009-AB6E-309B50160E31}"/>
+                <a16:creationId xmlns:a16="http://schemas.microsoft.com/office/drawing/2014/main" id="{31848E24-FD4A-4190-8F11-0D2C6D9355A8}"/>
               </a:ext>
             </a:extLst>
           </p:cNvPr>
@@ -10018,7 +10018,7 @@
           <p:cNvPr id="47" name="">
             <a:extLst xmlns:a="http://schemas.openxmlformats.org/drawingml/2006/main">
               <a:ext uri="{FF2B5EF4-FFF2-40B4-BE49-F238E27FC236}">
-                <a16:creationId xmlns:a16="http://schemas.microsoft.com/office/drawing/2014/main" id="{BBF01F77-3B1F-40AD-B7C6-BB22424F648B}"/>
+                <a16:creationId xmlns:a16="http://schemas.microsoft.com/office/drawing/2014/main" id="{B5544670-E7AD-4F7F-95B5-B0B467F969C7}"/>
               </a:ext>
             </a:extLst>
           </p:cNvPr>
@@ -10053,7 +10053,7 @@
           <p:cNvPr id="48" name="">
             <a:extLst xmlns:a="http://schemas.openxmlformats.org/drawingml/2006/main">
               <a:ext uri="{FF2B5EF4-FFF2-40B4-BE49-F238E27FC236}">
-                <a16:creationId xmlns:a16="http://schemas.microsoft.com/office/drawing/2014/main" id="{D6949FE7-C8E6-4CDA-83D2-CBD322B31B98}"/>
+                <a16:creationId xmlns:a16="http://schemas.microsoft.com/office/drawing/2014/main" id="{638C5FB3-12FF-4611-8811-36FDB1A8C4FA}"/>
               </a:ext>
             </a:extLst>
           </p:cNvPr>
@@ -10084,7 +10084,7 @@
           <p:cNvPr id="49" name="">
             <a:extLst xmlns:a="http://schemas.openxmlformats.org/drawingml/2006/main">
               <a:ext uri="{FF2B5EF4-FFF2-40B4-BE49-F238E27FC236}">
-                <a16:creationId xmlns:a16="http://schemas.microsoft.com/office/drawing/2014/main" id="{D0377D56-59E1-4CDA-8362-68B00FDAC8D1}"/>
+                <a16:creationId xmlns:a16="http://schemas.microsoft.com/office/drawing/2014/main" id="{FBFCC66F-ECC3-4A15-BF31-819E5F937DF4}"/>
               </a:ext>
             </a:extLst>
           </p:cNvPr>
@@ -10119,7 +10119,7 @@
           <p:cNvPr id="50" name="">
             <a:extLst xmlns:a="http://schemas.openxmlformats.org/drawingml/2006/main">
               <a:ext uri="{FF2B5EF4-FFF2-40B4-BE49-F238E27FC236}">
-                <a16:creationId xmlns:a16="http://schemas.microsoft.com/office/drawing/2014/main" id="{A9B40BCA-FE39-4973-98DE-C40DA5817A9A}"/>
+                <a16:creationId xmlns:a16="http://schemas.microsoft.com/office/drawing/2014/main" id="{34D31CE1-0AE2-45E1-950A-D15E5111795F}"/>
               </a:ext>
             </a:extLst>
           </p:cNvPr>
@@ -10150,7 +10150,7 @@
           <p:cNvPr id="51" name="">
             <a:extLst xmlns:a="http://schemas.openxmlformats.org/drawingml/2006/main">
               <a:ext uri="{FF2B5EF4-FFF2-40B4-BE49-F238E27FC236}">
-                <a16:creationId xmlns:a16="http://schemas.microsoft.com/office/drawing/2014/main" id="{34BE27F4-8995-4353-A012-90AD3A01A922}"/>
+                <a16:creationId xmlns:a16="http://schemas.microsoft.com/office/drawing/2014/main" id="{29522E4B-8AE2-49B7-97F5-68A871243CD4}"/>
               </a:ext>
             </a:extLst>
           </p:cNvPr>
@@ -10185,7 +10185,7 @@
           <p:cNvPr id="52" name="">
             <a:extLst xmlns:a="http://schemas.openxmlformats.org/drawingml/2006/main">
               <a:ext uri="{FF2B5EF4-FFF2-40B4-BE49-F238E27FC236}">
-                <a16:creationId xmlns:a16="http://schemas.microsoft.com/office/drawing/2014/main" id="{ADAD9469-E883-4691-B288-09E922855444}"/>
+                <a16:creationId xmlns:a16="http://schemas.microsoft.com/office/drawing/2014/main" id="{5A18C54E-A96E-4781-BED1-2231DA60DD3E}"/>
               </a:ext>
             </a:extLst>
           </p:cNvPr>
@@ -10216,7 +10216,7 @@
           <p:cNvPr id="53" name="">
             <a:extLst xmlns:a="http://schemas.openxmlformats.org/drawingml/2006/main">
               <a:ext uri="{FF2B5EF4-FFF2-40B4-BE49-F238E27FC236}">
-                <a16:creationId xmlns:a16="http://schemas.microsoft.com/office/drawing/2014/main" id="{9F006751-2BAF-42B2-9385-92A93013DE4D}"/>
+                <a16:creationId xmlns:a16="http://schemas.microsoft.com/office/drawing/2014/main" id="{427EFA4E-753E-49EF-8D47-575DEF6EE2B7}"/>
               </a:ext>
             </a:extLst>
           </p:cNvPr>
@@ -10272,7 +10272,7 @@
           <p:cNvPr id="54" name="">
             <a:extLst xmlns:a="http://schemas.openxmlformats.org/drawingml/2006/main">
               <a:ext uri="{FF2B5EF4-FFF2-40B4-BE49-F238E27FC236}">
-                <a16:creationId xmlns:a16="http://schemas.microsoft.com/office/drawing/2014/main" id="{E8779FBD-FE1C-4D3F-9C51-82CD1DF763B3}"/>
+                <a16:creationId xmlns:a16="http://schemas.microsoft.com/office/drawing/2014/main" id="{D5795CC4-A07A-4024-8EF7-0502D35AC7A4}"/>
               </a:ext>
             </a:extLst>
           </p:cNvPr>
@@ -10328,7 +10328,7 @@
           <p:cNvPr id="55" name="">
             <a:extLst xmlns:a="http://schemas.openxmlformats.org/drawingml/2006/main">
               <a:ext uri="{FF2B5EF4-FFF2-40B4-BE49-F238E27FC236}">
-                <a16:creationId xmlns:a16="http://schemas.microsoft.com/office/drawing/2014/main" id="{422467F7-9EF6-43F2-9429-7914437B7E91}"/>
+                <a16:creationId xmlns:a16="http://schemas.microsoft.com/office/drawing/2014/main" id="{A99657AE-335E-449B-9262-FCDF86023E07}"/>
               </a:ext>
             </a:extLst>
           </p:cNvPr>
@@ -10363,7 +10363,7 @@
           <p:cNvPr id="56" name="">
             <a:extLst xmlns:a="http://schemas.openxmlformats.org/drawingml/2006/main">
               <a:ext uri="{FF2B5EF4-FFF2-40B4-BE49-F238E27FC236}">
-                <a16:creationId xmlns:a16="http://schemas.microsoft.com/office/drawing/2014/main" id="{41697985-B46C-4A78-BCEA-9F81B4DA923B}"/>
+                <a16:creationId xmlns:a16="http://schemas.microsoft.com/office/drawing/2014/main" id="{C3237876-1727-4C0D-903F-FDBC559B0558}"/>
               </a:ext>
             </a:extLst>
           </p:cNvPr>
@@ -10419,7 +10419,7 @@
           <p:cNvPr id="57" name="">
             <a:extLst xmlns:a="http://schemas.openxmlformats.org/drawingml/2006/main">
               <a:ext uri="{FF2B5EF4-FFF2-40B4-BE49-F238E27FC236}">
-                <a16:creationId xmlns:a16="http://schemas.microsoft.com/office/drawing/2014/main" id="{4ACC57FC-91AD-47A3-8242-998C5EBEFBA9}"/>
+                <a16:creationId xmlns:a16="http://schemas.microsoft.com/office/drawing/2014/main" id="{0A001D6C-22A8-4FEA-B71F-4333891D7B9F}"/>
               </a:ext>
             </a:extLst>
           </p:cNvPr>
@@ -10450,7 +10450,7 @@
           <p:cNvPr id="58" name="">
             <a:extLst xmlns:a="http://schemas.openxmlformats.org/drawingml/2006/main">
               <a:ext uri="{FF2B5EF4-FFF2-40B4-BE49-F238E27FC236}">
-                <a16:creationId xmlns:a16="http://schemas.microsoft.com/office/drawing/2014/main" id="{040B7A8D-AF1F-400F-886E-C7EFB4C805AD}"/>
+                <a16:creationId xmlns:a16="http://schemas.microsoft.com/office/drawing/2014/main" id="{49D4825F-682F-47F4-9940-98CBD256C2B3}"/>
               </a:ext>
             </a:extLst>
           </p:cNvPr>
@@ -10506,7 +10506,7 @@
           <p:cNvPr id="59" name="">
             <a:extLst xmlns:a="http://schemas.openxmlformats.org/drawingml/2006/main">
               <a:ext uri="{FF2B5EF4-FFF2-40B4-BE49-F238E27FC236}">
-                <a16:creationId xmlns:a16="http://schemas.microsoft.com/office/drawing/2014/main" id="{6E2047D0-44FB-4D30-AF39-4733690D5BE6}"/>
+                <a16:creationId xmlns:a16="http://schemas.microsoft.com/office/drawing/2014/main" id="{87B6C961-C943-4808-8DF0-682C8BB3C7FF}"/>
               </a:ext>
             </a:extLst>
           </p:cNvPr>
@@ -10562,7 +10562,7 @@
           <p:cNvPr id="60" name="">
             <a:extLst xmlns:a="http://schemas.openxmlformats.org/drawingml/2006/main">
               <a:ext uri="{FF2B5EF4-FFF2-40B4-BE49-F238E27FC236}">
-                <a16:creationId xmlns:a16="http://schemas.microsoft.com/office/drawing/2014/main" id="{69BF6423-B23F-4A69-BD5E-71B57BA86D5C}"/>
+                <a16:creationId xmlns:a16="http://schemas.microsoft.com/office/drawing/2014/main" id="{6771FA01-F859-414F-AB36-DD56FB2BF2E6}"/>
               </a:ext>
             </a:extLst>
           </p:cNvPr>
@@ -10618,7 +10618,7 @@
           <p:cNvPr id="61" name="">
             <a:extLst xmlns:a="http://schemas.openxmlformats.org/drawingml/2006/main">
               <a:ext uri="{FF2B5EF4-FFF2-40B4-BE49-F238E27FC236}">
-                <a16:creationId xmlns:a16="http://schemas.microsoft.com/office/drawing/2014/main" id="{AEEB39D1-844B-454E-A0A1-F11F00B3E608}"/>
+                <a16:creationId xmlns:a16="http://schemas.microsoft.com/office/drawing/2014/main" id="{06564D49-7D36-448E-B486-FA9B72641A1D}"/>
               </a:ext>
             </a:extLst>
           </p:cNvPr>
@@ -10672,7 +10672,7 @@
     </p:spTree>
     <p:extLst>
       <p:ext uri="{BB962C8B-B14F-4D97-AF65-F5344CB8AC3E}">
-        <p14:creationId xmlns:p14="http://schemas.microsoft.com/office/powerpoint/2010/main" val="1147820621"/>
+        <p14:creationId xmlns:p14="http://schemas.microsoft.com/office/powerpoint/2010/main" val="180612794"/>
       </p:ext>
     </p:extLst>
   </p:cSld>
@@ -10703,7 +10703,7 @@
           <p:cNvPr id="1" name="">
             <a:extLst xmlns:a="http://schemas.openxmlformats.org/drawingml/2006/main">
               <a:ext uri="{FF2B5EF4-FFF2-40B4-BE49-F238E27FC236}">
-                <a16:creationId xmlns:a16="http://schemas.microsoft.com/office/drawing/2014/main" id="{620B079D-56C4-4F88-8084-432A001EAC89}"/>
+                <a16:creationId xmlns:a16="http://schemas.microsoft.com/office/drawing/2014/main" id="{F6AE1AB0-77DB-4099-9CC8-856A30ADDFF3}"/>
               </a:ext>
             </a:extLst>
           </p:cNvPr>
@@ -10734,7 +10734,7 @@
           <p:cNvPr id="2" name="">
             <a:extLst xmlns:a="http://schemas.openxmlformats.org/drawingml/2006/main">
               <a:ext uri="{FF2B5EF4-FFF2-40B4-BE49-F238E27FC236}">
-                <a16:creationId xmlns:a16="http://schemas.microsoft.com/office/drawing/2014/main" id="{EA7B7EB8-70AE-422D-9D91-C5C2A0980402}"/>
+                <a16:creationId xmlns:a16="http://schemas.microsoft.com/office/drawing/2014/main" id="{5A7A0352-9856-4771-B7D4-9D578A97A394}"/>
               </a:ext>
             </a:extLst>
           </p:cNvPr>
@@ -10790,7 +10790,7 @@
           <p:cNvPr id="3" name="">
             <a:extLst xmlns:a="http://schemas.openxmlformats.org/drawingml/2006/main">
               <a:ext uri="{FF2B5EF4-FFF2-40B4-BE49-F238E27FC236}">
-                <a16:creationId xmlns:a16="http://schemas.microsoft.com/office/drawing/2014/main" id="{FFDF4EDE-03D2-48FA-B666-2C1FC1C05700}"/>
+                <a16:creationId xmlns:a16="http://schemas.microsoft.com/office/drawing/2014/main" id="{5EF3913C-4CA7-4A7D-BD1D-113D6C3CED20}"/>
               </a:ext>
             </a:extLst>
           </p:cNvPr>
@@ -10846,7 +10846,7 @@
           <p:cNvPr id="4" name="">
             <a:extLst xmlns:a="http://schemas.openxmlformats.org/drawingml/2006/main">
               <a:ext uri="{FF2B5EF4-FFF2-40B4-BE49-F238E27FC236}">
-                <a16:creationId xmlns:a16="http://schemas.microsoft.com/office/drawing/2014/main" id="{06F05B30-49C8-4C22-BDD7-2DA730B1B22F}"/>
+                <a16:creationId xmlns:a16="http://schemas.microsoft.com/office/drawing/2014/main" id="{C2ABF5A4-25F7-4C4F-ADBE-CB6A1920ECC6}"/>
               </a:ext>
             </a:extLst>
           </p:cNvPr>
@@ -10902,7 +10902,7 @@
           <p:cNvPr id="5" name="">
             <a:extLst xmlns:a="http://schemas.openxmlformats.org/drawingml/2006/main">
               <a:ext uri="{FF2B5EF4-FFF2-40B4-BE49-F238E27FC236}">
-                <a16:creationId xmlns:a16="http://schemas.microsoft.com/office/drawing/2014/main" id="{7CA9036A-76CB-4D59-912D-5C074E0C107E}"/>
+                <a16:creationId xmlns:a16="http://schemas.microsoft.com/office/drawing/2014/main" id="{1A58A940-3F31-4CC5-9371-DFA93AE8AE05}"/>
               </a:ext>
             </a:extLst>
           </p:cNvPr>
@@ -10958,7 +10958,7 @@
           <p:cNvPr id="6" name="">
             <a:extLst xmlns:a="http://schemas.openxmlformats.org/drawingml/2006/main">
               <a:ext uri="{FF2B5EF4-FFF2-40B4-BE49-F238E27FC236}">
-                <a16:creationId xmlns:a16="http://schemas.microsoft.com/office/drawing/2014/main" id="{10A6090E-B31E-4391-AE5E-D66AEA7A2372}"/>
+                <a16:creationId xmlns:a16="http://schemas.microsoft.com/office/drawing/2014/main" id="{A5FCB9DF-9E0E-4C00-80A7-127C1A532372}"/>
               </a:ext>
             </a:extLst>
           </p:cNvPr>
@@ -10993,7 +10993,7 @@
           <p:cNvPr id="7" name="">
             <a:extLst xmlns:a="http://schemas.openxmlformats.org/drawingml/2006/main">
               <a:ext uri="{FF2B5EF4-FFF2-40B4-BE49-F238E27FC236}">
-                <a16:creationId xmlns:a16="http://schemas.microsoft.com/office/drawing/2014/main" id="{8B654614-A288-4AD9-801E-491232C89C34}"/>
+                <a16:creationId xmlns:a16="http://schemas.microsoft.com/office/drawing/2014/main" id="{C8232F15-69AE-498D-B8D2-FE6EDD8EB4E2}"/>
               </a:ext>
             </a:extLst>
           </p:cNvPr>
@@ -11049,7 +11049,7 @@
           <p:cNvPr id="8" name="">
             <a:extLst xmlns:a="http://schemas.openxmlformats.org/drawingml/2006/main">
               <a:ext uri="{FF2B5EF4-FFF2-40B4-BE49-F238E27FC236}">
-                <a16:creationId xmlns:a16="http://schemas.microsoft.com/office/drawing/2014/main" id="{5ABB55EA-FA33-4D94-8694-5681CD606494}"/>
+                <a16:creationId xmlns:a16="http://schemas.microsoft.com/office/drawing/2014/main" id="{626A341B-4D65-4FFD-9E7B-C68CC2C4311C}"/>
               </a:ext>
             </a:extLst>
           </p:cNvPr>
@@ -11105,7 +11105,7 @@
           <p:cNvPr id="9" name="">
             <a:extLst xmlns:a="http://schemas.openxmlformats.org/drawingml/2006/main">
               <a:ext uri="{FF2B5EF4-FFF2-40B4-BE49-F238E27FC236}">
-                <a16:creationId xmlns:a16="http://schemas.microsoft.com/office/drawing/2014/main" id="{D8B3B87D-42F0-41F1-8343-F746FBEEDDF5}"/>
+                <a16:creationId xmlns:a16="http://schemas.microsoft.com/office/drawing/2014/main" id="{E39D3828-A909-4CE2-B4B1-4A8E56E70617}"/>
               </a:ext>
             </a:extLst>
           </p:cNvPr>
@@ -11161,7 +11161,7 @@
           <p:cNvPr id="10" name="">
             <a:extLst xmlns:a="http://schemas.openxmlformats.org/drawingml/2006/main">
               <a:ext uri="{FF2B5EF4-FFF2-40B4-BE49-F238E27FC236}">
-                <a16:creationId xmlns:a16="http://schemas.microsoft.com/office/drawing/2014/main" id="{C61A397D-D3B5-4A1F-A67A-5ED741A923FE}"/>
+                <a16:creationId xmlns:a16="http://schemas.microsoft.com/office/drawing/2014/main" id="{FFD26A8C-4612-4AC1-801B-8A07E7E7981B}"/>
               </a:ext>
             </a:extLst>
           </p:cNvPr>
@@ -11196,7 +11196,7 @@
           <p:cNvPr id="11" name="">
             <a:extLst xmlns:a="http://schemas.openxmlformats.org/drawingml/2006/main">
               <a:ext uri="{FF2B5EF4-FFF2-40B4-BE49-F238E27FC236}">
-                <a16:creationId xmlns:a16="http://schemas.microsoft.com/office/drawing/2014/main" id="{D080FE5E-5899-4329-BB83-70B7749D946A}"/>
+                <a16:creationId xmlns:a16="http://schemas.microsoft.com/office/drawing/2014/main" id="{5313523A-73F9-4147-ACD4-8C457CCBC77C}"/>
               </a:ext>
             </a:extLst>
           </p:cNvPr>
@@ -11252,7 +11252,7 @@
           <p:cNvPr id="12" name="">
             <a:extLst xmlns:a="http://schemas.openxmlformats.org/drawingml/2006/main">
               <a:ext uri="{FF2B5EF4-FFF2-40B4-BE49-F238E27FC236}">
-                <a16:creationId xmlns:a16="http://schemas.microsoft.com/office/drawing/2014/main" id="{7C78E271-F41E-4D97-81BE-B2D3759AB10E}"/>
+                <a16:creationId xmlns:a16="http://schemas.microsoft.com/office/drawing/2014/main" id="{1366B76E-D7F1-4F8C-A05F-6114DD546F22}"/>
               </a:ext>
             </a:extLst>
           </p:cNvPr>
@@ -11308,7 +11308,7 @@
           <p:cNvPr id="13" name="">
             <a:extLst xmlns:a="http://schemas.openxmlformats.org/drawingml/2006/main">
               <a:ext uri="{FF2B5EF4-FFF2-40B4-BE49-F238E27FC236}">
-                <a16:creationId xmlns:a16="http://schemas.microsoft.com/office/drawing/2014/main" id="{01038EED-AB4E-4E0D-8278-C7001A33350F}"/>
+                <a16:creationId xmlns:a16="http://schemas.microsoft.com/office/drawing/2014/main" id="{D54CDAF6-4F90-4102-AE31-A563C9C483D0}"/>
               </a:ext>
             </a:extLst>
           </p:cNvPr>
@@ -11364,7 +11364,7 @@
           <p:cNvPr id="14" name="">
             <a:extLst xmlns:a="http://schemas.openxmlformats.org/drawingml/2006/main">
               <a:ext uri="{FF2B5EF4-FFF2-40B4-BE49-F238E27FC236}">
-                <a16:creationId xmlns:a16="http://schemas.microsoft.com/office/drawing/2014/main" id="{B91A7041-AAA8-400A-BC41-C960D96A74C9}"/>
+                <a16:creationId xmlns:a16="http://schemas.microsoft.com/office/drawing/2014/main" id="{8B13757D-6154-4EEA-B110-90D72B3E23D2}"/>
               </a:ext>
             </a:extLst>
           </p:cNvPr>
@@ -11399,7 +11399,7 @@
           <p:cNvPr id="15" name="">
             <a:extLst xmlns:a="http://schemas.openxmlformats.org/drawingml/2006/main">
               <a:ext uri="{FF2B5EF4-FFF2-40B4-BE49-F238E27FC236}">
-                <a16:creationId xmlns:a16="http://schemas.microsoft.com/office/drawing/2014/main" id="{0E3C3F9F-A33E-4C03-B084-23D2E116D744}"/>
+                <a16:creationId xmlns:a16="http://schemas.microsoft.com/office/drawing/2014/main" id="{AC0E07FF-3517-48C9-903C-9F0F0E7BC154}"/>
               </a:ext>
             </a:extLst>
           </p:cNvPr>
@@ -11455,7 +11455,7 @@
           <p:cNvPr id="16" name="">
             <a:extLst xmlns:a="http://schemas.openxmlformats.org/drawingml/2006/main">
               <a:ext uri="{FF2B5EF4-FFF2-40B4-BE49-F238E27FC236}">
-                <a16:creationId xmlns:a16="http://schemas.microsoft.com/office/drawing/2014/main" id="{730349C2-8001-44F8-BDFD-9F583E6E3C7B}"/>
+                <a16:creationId xmlns:a16="http://schemas.microsoft.com/office/drawing/2014/main" id="{5F36CC07-5A85-40CE-B380-718984707DF7}"/>
               </a:ext>
             </a:extLst>
           </p:cNvPr>
@@ -11511,7 +11511,7 @@
           <p:cNvPr id="17" name="">
             <a:extLst xmlns:a="http://schemas.openxmlformats.org/drawingml/2006/main">
               <a:ext uri="{FF2B5EF4-FFF2-40B4-BE49-F238E27FC236}">
-                <a16:creationId xmlns:a16="http://schemas.microsoft.com/office/drawing/2014/main" id="{94E99987-D57D-4021-ABCC-A0FC3B4011AF}"/>
+                <a16:creationId xmlns:a16="http://schemas.microsoft.com/office/drawing/2014/main" id="{4453530B-F41D-4D64-AAB2-D93C8A5BB54C}"/>
               </a:ext>
             </a:extLst>
           </p:cNvPr>
@@ -11567,7 +11567,7 @@
           <p:cNvPr id="18" name="">
             <a:extLst xmlns:a="http://schemas.openxmlformats.org/drawingml/2006/main">
               <a:ext uri="{FF2B5EF4-FFF2-40B4-BE49-F238E27FC236}">
-                <a16:creationId xmlns:a16="http://schemas.microsoft.com/office/drawing/2014/main" id="{987B4542-12F0-404A-BF68-19A0B87D80BD}"/>
+                <a16:creationId xmlns:a16="http://schemas.microsoft.com/office/drawing/2014/main" id="{03F09800-B30F-42D7-9656-E85608F3442B}"/>
               </a:ext>
             </a:extLst>
           </p:cNvPr>
@@ -11602,7 +11602,7 @@
           <p:cNvPr id="19" name="">
             <a:extLst xmlns:a="http://schemas.openxmlformats.org/drawingml/2006/main">
               <a:ext uri="{FF2B5EF4-FFF2-40B4-BE49-F238E27FC236}">
-                <a16:creationId xmlns:a16="http://schemas.microsoft.com/office/drawing/2014/main" id="{974A6F9D-A0AE-4631-8EF9-8B43A7581B95}"/>
+                <a16:creationId xmlns:a16="http://schemas.microsoft.com/office/drawing/2014/main" id="{4480D280-0086-40AE-9A12-413A768920D0}"/>
               </a:ext>
             </a:extLst>
           </p:cNvPr>
@@ -11658,7 +11658,7 @@
           <p:cNvPr id="20" name="">
             <a:extLst xmlns:a="http://schemas.openxmlformats.org/drawingml/2006/main">
               <a:ext uri="{FF2B5EF4-FFF2-40B4-BE49-F238E27FC236}">
-                <a16:creationId xmlns:a16="http://schemas.microsoft.com/office/drawing/2014/main" id="{C7A267FB-F0C1-4E47-BA30-DB0E0CA32E14}"/>
+                <a16:creationId xmlns:a16="http://schemas.microsoft.com/office/drawing/2014/main" id="{4D73FB04-4D25-4AD5-9F60-5732ACC575CB}"/>
               </a:ext>
             </a:extLst>
           </p:cNvPr>
@@ -11714,7 +11714,7 @@
           <p:cNvPr id="21" name="">
             <a:extLst xmlns:a="http://schemas.openxmlformats.org/drawingml/2006/main">
               <a:ext uri="{FF2B5EF4-FFF2-40B4-BE49-F238E27FC236}">
-                <a16:creationId xmlns:a16="http://schemas.microsoft.com/office/drawing/2014/main" id="{B6DFCEC8-5A72-4CD4-8381-4E60529825D4}"/>
+                <a16:creationId xmlns:a16="http://schemas.microsoft.com/office/drawing/2014/main" id="{56892DDC-DD88-4A96-AE4D-526195979CE4}"/>
               </a:ext>
             </a:extLst>
           </p:cNvPr>
@@ -11770,7 +11770,7 @@
           <p:cNvPr id="22" name="">
             <a:extLst xmlns:a="http://schemas.openxmlformats.org/drawingml/2006/main">
               <a:ext uri="{FF2B5EF4-FFF2-40B4-BE49-F238E27FC236}">
-                <a16:creationId xmlns:a16="http://schemas.microsoft.com/office/drawing/2014/main" id="{46AB698D-8904-408D-A1DA-F7F87562902C}"/>
+                <a16:creationId xmlns:a16="http://schemas.microsoft.com/office/drawing/2014/main" id="{1DB72812-E927-42DC-8F15-0C89F68395CB}"/>
               </a:ext>
             </a:extLst>
           </p:cNvPr>
@@ -11805,7 +11805,7 @@
           <p:cNvPr id="23" name="">
             <a:extLst xmlns:a="http://schemas.openxmlformats.org/drawingml/2006/main">
               <a:ext uri="{FF2B5EF4-FFF2-40B4-BE49-F238E27FC236}">
-                <a16:creationId xmlns:a16="http://schemas.microsoft.com/office/drawing/2014/main" id="{164436EB-D711-4D96-942A-EBF91E276C54}"/>
+                <a16:creationId xmlns:a16="http://schemas.microsoft.com/office/drawing/2014/main" id="{48856818-37E7-4E33-AE78-C4E84F7E5D77}"/>
               </a:ext>
             </a:extLst>
           </p:cNvPr>
@@ -11861,7 +11861,7 @@
           <p:cNvPr id="24" name="">
             <a:extLst xmlns:a="http://schemas.openxmlformats.org/drawingml/2006/main">
               <a:ext uri="{FF2B5EF4-FFF2-40B4-BE49-F238E27FC236}">
-                <a16:creationId xmlns:a16="http://schemas.microsoft.com/office/drawing/2014/main" id="{F5935810-981F-4473-9F01-184346A65735}"/>
+                <a16:creationId xmlns:a16="http://schemas.microsoft.com/office/drawing/2014/main" id="{11C16388-9E09-4EF8-8980-D2AF2FD19836}"/>
               </a:ext>
             </a:extLst>
           </p:cNvPr>
@@ -11917,7 +11917,7 @@
           <p:cNvPr id="25" name="">
             <a:extLst xmlns:a="http://schemas.openxmlformats.org/drawingml/2006/main">
               <a:ext uri="{FF2B5EF4-FFF2-40B4-BE49-F238E27FC236}">
-                <a16:creationId xmlns:a16="http://schemas.microsoft.com/office/drawing/2014/main" id="{76424F35-4A3E-451B-9CFE-A794D25AD1B3}"/>
+                <a16:creationId xmlns:a16="http://schemas.microsoft.com/office/drawing/2014/main" id="{B4063D51-4683-4D6D-9D1F-1E890220F9D3}"/>
               </a:ext>
             </a:extLst>
           </p:cNvPr>
@@ -11973,7 +11973,7 @@
           <p:cNvPr id="26" name="">
             <a:extLst xmlns:a="http://schemas.openxmlformats.org/drawingml/2006/main">
               <a:ext uri="{FF2B5EF4-FFF2-40B4-BE49-F238E27FC236}">
-                <a16:creationId xmlns:a16="http://schemas.microsoft.com/office/drawing/2014/main" id="{D1284731-6B48-485F-8AE7-7110FB8C0988}"/>
+                <a16:creationId xmlns:a16="http://schemas.microsoft.com/office/drawing/2014/main" id="{2A902AFC-D0DF-4038-89B2-B85FFB685B71}"/>
               </a:ext>
             </a:extLst>
           </p:cNvPr>
@@ -12004,7 +12004,7 @@
           <p:cNvPr id="27" name="">
             <a:extLst xmlns:a="http://schemas.openxmlformats.org/drawingml/2006/main">
               <a:ext uri="{FF2B5EF4-FFF2-40B4-BE49-F238E27FC236}">
-                <a16:creationId xmlns:a16="http://schemas.microsoft.com/office/drawing/2014/main" id="{02E39877-BB5B-413F-A99B-F7B3A10A819D}"/>
+                <a16:creationId xmlns:a16="http://schemas.microsoft.com/office/drawing/2014/main" id="{E05C1ED7-5461-43A6-AE8D-3203E0E9F368}"/>
               </a:ext>
             </a:extLst>
           </p:cNvPr>
@@ -12060,7 +12060,7 @@
           <p:cNvPr id="28" name="">
             <a:extLst xmlns:a="http://schemas.openxmlformats.org/drawingml/2006/main">
               <a:ext uri="{FF2B5EF4-FFF2-40B4-BE49-F238E27FC236}">
-                <a16:creationId xmlns:a16="http://schemas.microsoft.com/office/drawing/2014/main" id="{342669DE-0F27-4B1B-A000-C63806A85302}"/>
+                <a16:creationId xmlns:a16="http://schemas.microsoft.com/office/drawing/2014/main" id="{A47845E5-34ED-450A-BA60-B1C47C33BDB6}"/>
               </a:ext>
             </a:extLst>
           </p:cNvPr>
@@ -12095,7 +12095,7 @@
           <p:cNvPr id="29" name="">
             <a:extLst xmlns:a="http://schemas.openxmlformats.org/drawingml/2006/main">
               <a:ext uri="{FF2B5EF4-FFF2-40B4-BE49-F238E27FC236}">
-                <a16:creationId xmlns:a16="http://schemas.microsoft.com/office/drawing/2014/main" id="{97CF3416-7B1F-436D-9EC5-5A9C6E74C9E8}"/>
+                <a16:creationId xmlns:a16="http://schemas.microsoft.com/office/drawing/2014/main" id="{1AE80A52-80C1-423F-B4F0-A62B3EE89FC7}"/>
               </a:ext>
             </a:extLst>
           </p:cNvPr>
@@ -12151,7 +12151,7 @@
           <p:cNvPr id="30" name="">
             <a:extLst xmlns:a="http://schemas.openxmlformats.org/drawingml/2006/main">
               <a:ext uri="{FF2B5EF4-FFF2-40B4-BE49-F238E27FC236}">
-                <a16:creationId xmlns:a16="http://schemas.microsoft.com/office/drawing/2014/main" id="{A9609241-0966-4A92-A6BF-7FB2DF871B20}"/>
+                <a16:creationId xmlns:a16="http://schemas.microsoft.com/office/drawing/2014/main" id="{56267F1D-3C05-4DC9-A5C5-522EFF420224}"/>
               </a:ext>
             </a:extLst>
           </p:cNvPr>
@@ -12205,7 +12205,7 @@
     </p:spTree>
     <p:extLst>
       <p:ext uri="{BB962C8B-B14F-4D97-AF65-F5344CB8AC3E}">
-        <p14:creationId xmlns:p14="http://schemas.microsoft.com/office/powerpoint/2010/main" val="65175878"/>
+        <p14:creationId xmlns:p14="http://schemas.microsoft.com/office/powerpoint/2010/main" val="1278688127"/>
       </p:ext>
     </p:extLst>
   </p:cSld>
@@ -12236,7 +12236,7 @@
           <p:cNvPr id="1" name="">
             <a:extLst xmlns:a="http://schemas.openxmlformats.org/drawingml/2006/main">
               <a:ext uri="{FF2B5EF4-FFF2-40B4-BE49-F238E27FC236}">
-                <a16:creationId xmlns:a16="http://schemas.microsoft.com/office/drawing/2014/main" id="{7F88962D-EAAC-4084-B1A9-2C5FB2EB28F8}"/>
+                <a16:creationId xmlns:a16="http://schemas.microsoft.com/office/drawing/2014/main" id="{C3A6D7D1-40D4-4E6D-9BB8-3E95BAD05360}"/>
               </a:ext>
             </a:extLst>
           </p:cNvPr>
@@ -12267,7 +12267,7 @@
           <p:cNvPr id="2" name="">
             <a:extLst xmlns:a="http://schemas.openxmlformats.org/drawingml/2006/main">
               <a:ext uri="{FF2B5EF4-FFF2-40B4-BE49-F238E27FC236}">
-                <a16:creationId xmlns:a16="http://schemas.microsoft.com/office/drawing/2014/main" id="{0AB0FFEB-1990-4D03-8CB6-500CFE49BD01}"/>
+                <a16:creationId xmlns:a16="http://schemas.microsoft.com/office/drawing/2014/main" id="{C5C7AEC1-922F-46C8-992B-DCA47B41292F}"/>
               </a:ext>
             </a:extLst>
           </p:cNvPr>
@@ -12298,7 +12298,7 @@
           <p:cNvPr id="3" name="">
             <a:extLst xmlns:a="http://schemas.openxmlformats.org/drawingml/2006/main">
               <a:ext uri="{FF2B5EF4-FFF2-40B4-BE49-F238E27FC236}">
-                <a16:creationId xmlns:a16="http://schemas.microsoft.com/office/drawing/2014/main" id="{A7336956-A346-4A5E-A7F7-5CEFD7B06743}"/>
+                <a16:creationId xmlns:a16="http://schemas.microsoft.com/office/drawing/2014/main" id="{7D1D4CA7-1278-42B4-9AB4-FF6A1A8D3C15}"/>
               </a:ext>
             </a:extLst>
           </p:cNvPr>
@@ -12329,7 +12329,7 @@
           <p:cNvPr id="4" name="">
             <a:extLst xmlns:a="http://schemas.openxmlformats.org/drawingml/2006/main">
               <a:ext uri="{FF2B5EF4-FFF2-40B4-BE49-F238E27FC236}">
-                <a16:creationId xmlns:a16="http://schemas.microsoft.com/office/drawing/2014/main" id="{D7CDDEF6-F703-4CD0-B599-45CBBF72287E}"/>
+                <a16:creationId xmlns:a16="http://schemas.microsoft.com/office/drawing/2014/main" id="{B79CBB1D-8621-48FA-B9F5-C5BA7A453D19}"/>
               </a:ext>
             </a:extLst>
           </p:cNvPr>
@@ -12360,7 +12360,7 @@
           <p:cNvPr id="5" name="">
             <a:extLst xmlns:a="http://schemas.openxmlformats.org/drawingml/2006/main">
               <a:ext uri="{FF2B5EF4-FFF2-40B4-BE49-F238E27FC236}">
-                <a16:creationId xmlns:a16="http://schemas.microsoft.com/office/drawing/2014/main" id="{BDF9AE5A-97F2-422E-8370-B73FD872047A}"/>
+                <a16:creationId xmlns:a16="http://schemas.microsoft.com/office/drawing/2014/main" id="{A3D645C0-A325-434F-AB88-D8EA3488FEE1}"/>
               </a:ext>
             </a:extLst>
           </p:cNvPr>
@@ -12391,7 +12391,7 @@
           <p:cNvPr id="6" name="">
             <a:extLst xmlns:a="http://schemas.openxmlformats.org/drawingml/2006/main">
               <a:ext uri="{FF2B5EF4-FFF2-40B4-BE49-F238E27FC236}">
-                <a16:creationId xmlns:a16="http://schemas.microsoft.com/office/drawing/2014/main" id="{FC971599-CFCF-46F4-A079-4237044BEA79}"/>
+                <a16:creationId xmlns:a16="http://schemas.microsoft.com/office/drawing/2014/main" id="{4765A84E-7352-4DE9-A5A7-D1ABA0A4CA95}"/>
               </a:ext>
             </a:extLst>
           </p:cNvPr>
@@ -12422,7 +12422,7 @@
           <p:cNvPr id="7" name="">
             <a:extLst xmlns:a="http://schemas.openxmlformats.org/drawingml/2006/main">
               <a:ext uri="{FF2B5EF4-FFF2-40B4-BE49-F238E27FC236}">
-                <a16:creationId xmlns:a16="http://schemas.microsoft.com/office/drawing/2014/main" id="{CB0455A2-A242-49FB-AA50-41D622BAB447}"/>
+                <a16:creationId xmlns:a16="http://schemas.microsoft.com/office/drawing/2014/main" id="{ACEE2549-6F86-4D9A-85C9-A791EA201964}"/>
               </a:ext>
             </a:extLst>
           </p:cNvPr>
@@ -12453,7 +12453,7 @@
           <p:cNvPr id="8" name="">
             <a:extLst xmlns:a="http://schemas.openxmlformats.org/drawingml/2006/main">
               <a:ext uri="{FF2B5EF4-FFF2-40B4-BE49-F238E27FC236}">
-                <a16:creationId xmlns:a16="http://schemas.microsoft.com/office/drawing/2014/main" id="{64F70860-CA03-4DBB-89D5-C126CDC5F90F}"/>
+                <a16:creationId xmlns:a16="http://schemas.microsoft.com/office/drawing/2014/main" id="{3F5F4B52-0690-4681-89F5-C4FE90E8436E}"/>
               </a:ext>
             </a:extLst>
           </p:cNvPr>
@@ -12484,7 +12484,7 @@
           <p:cNvPr id="9" name="">
             <a:extLst xmlns:a="http://schemas.openxmlformats.org/drawingml/2006/main">
               <a:ext uri="{FF2B5EF4-FFF2-40B4-BE49-F238E27FC236}">
-                <a16:creationId xmlns:a16="http://schemas.microsoft.com/office/drawing/2014/main" id="{EDBAAC39-2DD0-4A4C-9FDE-CCECBFAC2053}"/>
+                <a16:creationId xmlns:a16="http://schemas.microsoft.com/office/drawing/2014/main" id="{B1C1C5FC-BBE9-480D-9102-AAB7DA282C90}"/>
               </a:ext>
             </a:extLst>
           </p:cNvPr>
@@ -12515,7 +12515,7 @@
           <p:cNvPr id="10" name="">
             <a:extLst xmlns:a="http://schemas.openxmlformats.org/drawingml/2006/main">
               <a:ext uri="{FF2B5EF4-FFF2-40B4-BE49-F238E27FC236}">
-                <a16:creationId xmlns:a16="http://schemas.microsoft.com/office/drawing/2014/main" id="{A0652297-39C1-4822-84B9-A89FE31C9144}"/>
+                <a16:creationId xmlns:a16="http://schemas.microsoft.com/office/drawing/2014/main" id="{3A675C76-06D3-4A95-90C2-14ABA6E9E156}"/>
               </a:ext>
             </a:extLst>
           </p:cNvPr>
@@ -12546,7 +12546,7 @@
           <p:cNvPr id="11" name="">
             <a:extLst xmlns:a="http://schemas.openxmlformats.org/drawingml/2006/main">
               <a:ext uri="{FF2B5EF4-FFF2-40B4-BE49-F238E27FC236}">
-                <a16:creationId xmlns:a16="http://schemas.microsoft.com/office/drawing/2014/main" id="{0419ACC9-5548-4230-8AB7-74025EB77210}"/>
+                <a16:creationId xmlns:a16="http://schemas.microsoft.com/office/drawing/2014/main" id="{91F808C7-789D-4C09-B364-ADA6D3C71D27}"/>
               </a:ext>
             </a:extLst>
           </p:cNvPr>
@@ -12577,7 +12577,7 @@
           <p:cNvPr id="12" name="">
             <a:extLst xmlns:a="http://schemas.openxmlformats.org/drawingml/2006/main">
               <a:ext uri="{FF2B5EF4-FFF2-40B4-BE49-F238E27FC236}">
-                <a16:creationId xmlns:a16="http://schemas.microsoft.com/office/drawing/2014/main" id="{F15278FD-242A-4D22-9F01-A860F113271E}"/>
+                <a16:creationId xmlns:a16="http://schemas.microsoft.com/office/drawing/2014/main" id="{0E8B289D-4CC6-4CD4-B2A1-F16AE4BC0100}"/>
               </a:ext>
             </a:extLst>
           </p:cNvPr>
@@ -12608,7 +12608,7 @@
           <p:cNvPr id="13" name="">
             <a:extLst xmlns:a="http://schemas.openxmlformats.org/drawingml/2006/main">
               <a:ext uri="{FF2B5EF4-FFF2-40B4-BE49-F238E27FC236}">
-                <a16:creationId xmlns:a16="http://schemas.microsoft.com/office/drawing/2014/main" id="{35333FF3-D9F7-4266-87C6-E2F9FF202EFB}"/>
+                <a16:creationId xmlns:a16="http://schemas.microsoft.com/office/drawing/2014/main" id="{BEC4D33B-611C-436A-89D0-D3BF5B50F26F}"/>
               </a:ext>
             </a:extLst>
           </p:cNvPr>
@@ -12639,7 +12639,7 @@
           <p:cNvPr id="14" name="">
             <a:extLst xmlns:a="http://schemas.openxmlformats.org/drawingml/2006/main">
               <a:ext uri="{FF2B5EF4-FFF2-40B4-BE49-F238E27FC236}">
-                <a16:creationId xmlns:a16="http://schemas.microsoft.com/office/drawing/2014/main" id="{CAA6E013-A970-4478-848A-3219DE5BADC6}"/>
+                <a16:creationId xmlns:a16="http://schemas.microsoft.com/office/drawing/2014/main" id="{9302889B-24CE-42F3-A883-42B58E4FDA9E}"/>
               </a:ext>
             </a:extLst>
           </p:cNvPr>
@@ -12670,7 +12670,7 @@
           <p:cNvPr id="15" name="">
             <a:extLst xmlns:a="http://schemas.openxmlformats.org/drawingml/2006/main">
               <a:ext uri="{FF2B5EF4-FFF2-40B4-BE49-F238E27FC236}">
-                <a16:creationId xmlns:a16="http://schemas.microsoft.com/office/drawing/2014/main" id="{439761CC-41BB-403F-967F-6D4F03EEF691}"/>
+                <a16:creationId xmlns:a16="http://schemas.microsoft.com/office/drawing/2014/main" id="{9848B941-1810-4D63-9005-D669B9EDF0F7}"/>
               </a:ext>
             </a:extLst>
           </p:cNvPr>
@@ -12701,7 +12701,7 @@
           <p:cNvPr id="16" name="">
             <a:extLst xmlns:a="http://schemas.openxmlformats.org/drawingml/2006/main">
               <a:ext uri="{FF2B5EF4-FFF2-40B4-BE49-F238E27FC236}">
-                <a16:creationId xmlns:a16="http://schemas.microsoft.com/office/drawing/2014/main" id="{56CEBF4E-8141-44DC-B847-51C44C27E4CF}"/>
+                <a16:creationId xmlns:a16="http://schemas.microsoft.com/office/drawing/2014/main" id="{048419F0-3BEA-465C-A1EF-F815CC2470CE}"/>
               </a:ext>
             </a:extLst>
           </p:cNvPr>
@@ -12732,7 +12732,7 @@
           <p:cNvPr id="17" name="">
             <a:extLst xmlns:a="http://schemas.openxmlformats.org/drawingml/2006/main">
               <a:ext uri="{FF2B5EF4-FFF2-40B4-BE49-F238E27FC236}">
-                <a16:creationId xmlns:a16="http://schemas.microsoft.com/office/drawing/2014/main" id="{1E027626-F602-4DA2-B744-A1967E85C8F2}"/>
+                <a16:creationId xmlns:a16="http://schemas.microsoft.com/office/drawing/2014/main" id="{5E841193-0006-42A7-B788-528A7C539FB7}"/>
               </a:ext>
             </a:extLst>
           </p:cNvPr>
@@ -12763,7 +12763,7 @@
           <p:cNvPr id="18" name="">
             <a:extLst xmlns:a="http://schemas.openxmlformats.org/drawingml/2006/main">
               <a:ext uri="{FF2B5EF4-FFF2-40B4-BE49-F238E27FC236}">
-                <a16:creationId xmlns:a16="http://schemas.microsoft.com/office/drawing/2014/main" id="{B5CCAA59-08C7-4379-92BD-259846F98E1B}"/>
+                <a16:creationId xmlns:a16="http://schemas.microsoft.com/office/drawing/2014/main" id="{FF687954-085F-4F08-878B-C7B2CBD86CA1}"/>
               </a:ext>
             </a:extLst>
           </p:cNvPr>
@@ -12794,7 +12794,7 @@
           <p:cNvPr id="19" name="">
             <a:extLst xmlns:a="http://schemas.openxmlformats.org/drawingml/2006/main">
               <a:ext uri="{FF2B5EF4-FFF2-40B4-BE49-F238E27FC236}">
-                <a16:creationId xmlns:a16="http://schemas.microsoft.com/office/drawing/2014/main" id="{E862409E-5E7C-4AE6-BA8D-0C412329A72E}"/>
+                <a16:creationId xmlns:a16="http://schemas.microsoft.com/office/drawing/2014/main" id="{F786FF11-45DD-4D1F-9501-98C40BFD61F1}"/>
               </a:ext>
             </a:extLst>
           </p:cNvPr>
@@ -12825,7 +12825,7 @@
           <p:cNvPr id="20" name="">
             <a:extLst xmlns:a="http://schemas.openxmlformats.org/drawingml/2006/main">
               <a:ext uri="{FF2B5EF4-FFF2-40B4-BE49-F238E27FC236}">
-                <a16:creationId xmlns:a16="http://schemas.microsoft.com/office/drawing/2014/main" id="{5717A525-9A0A-4D56-9C6A-CFF81DB21A5E}"/>
+                <a16:creationId xmlns:a16="http://schemas.microsoft.com/office/drawing/2014/main" id="{924E4FA4-0815-4542-98AB-692C864575B5}"/>
               </a:ext>
             </a:extLst>
           </p:cNvPr>
@@ -12856,7 +12856,7 @@
           <p:cNvPr id="21" name="">
             <a:extLst xmlns:a="http://schemas.openxmlformats.org/drawingml/2006/main">
               <a:ext uri="{FF2B5EF4-FFF2-40B4-BE49-F238E27FC236}">
-                <a16:creationId xmlns:a16="http://schemas.microsoft.com/office/drawing/2014/main" id="{9E2D0AC3-DAF1-4C88-9BD0-B135F4FF087C}"/>
+                <a16:creationId xmlns:a16="http://schemas.microsoft.com/office/drawing/2014/main" id="{0107417A-5D71-4DF9-8586-F4E354074ABA}"/>
               </a:ext>
             </a:extLst>
           </p:cNvPr>
@@ -12887,7 +12887,7 @@
           <p:cNvPr id="22" name="">
             <a:extLst xmlns:a="http://schemas.openxmlformats.org/drawingml/2006/main">
               <a:ext uri="{FF2B5EF4-FFF2-40B4-BE49-F238E27FC236}">
-                <a16:creationId xmlns:a16="http://schemas.microsoft.com/office/drawing/2014/main" id="{85BB83B0-FF10-4922-B4B5-4AC483F958DE}"/>
+                <a16:creationId xmlns:a16="http://schemas.microsoft.com/office/drawing/2014/main" id="{F7BAAB13-7362-49DF-B3FD-8B28B8932F12}"/>
               </a:ext>
             </a:extLst>
           </p:cNvPr>
@@ -12918,7 +12918,7 @@
           <p:cNvPr id="23" name="">
             <a:extLst xmlns:a="http://schemas.openxmlformats.org/drawingml/2006/main">
               <a:ext uri="{FF2B5EF4-FFF2-40B4-BE49-F238E27FC236}">
-                <a16:creationId xmlns:a16="http://schemas.microsoft.com/office/drawing/2014/main" id="{11D68B40-6A08-44B4-A1D5-7997F331358E}"/>
+                <a16:creationId xmlns:a16="http://schemas.microsoft.com/office/drawing/2014/main" id="{28E1F8BF-E1FF-40DB-B472-54DDBDD678B4}"/>
               </a:ext>
             </a:extLst>
           </p:cNvPr>
@@ -12949,7 +12949,7 @@
           <p:cNvPr id="24" name="">
             <a:extLst xmlns:a="http://schemas.openxmlformats.org/drawingml/2006/main">
               <a:ext uri="{FF2B5EF4-FFF2-40B4-BE49-F238E27FC236}">
-                <a16:creationId xmlns:a16="http://schemas.microsoft.com/office/drawing/2014/main" id="{DA5A5ADF-BDA6-4D40-95D7-3EE3E2ED8332}"/>
+                <a16:creationId xmlns:a16="http://schemas.microsoft.com/office/drawing/2014/main" id="{0B9594F5-635D-46D0-AD2B-792965233C9E}"/>
               </a:ext>
             </a:extLst>
           </p:cNvPr>
@@ -12980,7 +12980,7 @@
           <p:cNvPr id="25" name="">
             <a:extLst xmlns:a="http://schemas.openxmlformats.org/drawingml/2006/main">
               <a:ext uri="{FF2B5EF4-FFF2-40B4-BE49-F238E27FC236}">
-                <a16:creationId xmlns:a16="http://schemas.microsoft.com/office/drawing/2014/main" id="{1577F49F-74B0-4B45-A4B3-D79B62BFBF3F}"/>
+                <a16:creationId xmlns:a16="http://schemas.microsoft.com/office/drawing/2014/main" id="{6ED550B3-A239-4C55-8627-43CB62CAA63D}"/>
               </a:ext>
             </a:extLst>
           </p:cNvPr>
@@ -13011,7 +13011,7 @@
           <p:cNvPr id="26" name="">
             <a:extLst xmlns:a="http://schemas.openxmlformats.org/drawingml/2006/main">
               <a:ext uri="{FF2B5EF4-FFF2-40B4-BE49-F238E27FC236}">
-                <a16:creationId xmlns:a16="http://schemas.microsoft.com/office/drawing/2014/main" id="{5FEB5D81-E10B-4F41-BD4D-616A6B5CDE72}"/>
+                <a16:creationId xmlns:a16="http://schemas.microsoft.com/office/drawing/2014/main" id="{B83CBAD9-8FB6-424F-9CA8-C5D042692D94}"/>
               </a:ext>
             </a:extLst>
           </p:cNvPr>
@@ -13042,7 +13042,7 @@
           <p:cNvPr id="27" name="">
             <a:extLst xmlns:a="http://schemas.openxmlformats.org/drawingml/2006/main">
               <a:ext uri="{FF2B5EF4-FFF2-40B4-BE49-F238E27FC236}">
-                <a16:creationId xmlns:a16="http://schemas.microsoft.com/office/drawing/2014/main" id="{DE828B97-2A07-4B1A-812B-38B2CA32B6E1}"/>
+                <a16:creationId xmlns:a16="http://schemas.microsoft.com/office/drawing/2014/main" id="{B3FF4687-E77B-43DF-A928-F90122EC07E7}"/>
               </a:ext>
             </a:extLst>
           </p:cNvPr>
@@ -13073,7 +13073,7 @@
           <p:cNvPr id="28" name="">
             <a:extLst xmlns:a="http://schemas.openxmlformats.org/drawingml/2006/main">
               <a:ext uri="{FF2B5EF4-FFF2-40B4-BE49-F238E27FC236}">
-                <a16:creationId xmlns:a16="http://schemas.microsoft.com/office/drawing/2014/main" id="{FB284FFB-FA0D-44C0-A82C-3C0C8EFC7E30}"/>
+                <a16:creationId xmlns:a16="http://schemas.microsoft.com/office/drawing/2014/main" id="{EAAE9E47-5F7B-423A-8227-2193C4B7A8C5}"/>
               </a:ext>
             </a:extLst>
           </p:cNvPr>
@@ -13104,7 +13104,7 @@
           <p:cNvPr id="29" name="">
             <a:extLst xmlns:a="http://schemas.openxmlformats.org/drawingml/2006/main">
               <a:ext uri="{FF2B5EF4-FFF2-40B4-BE49-F238E27FC236}">
-                <a16:creationId xmlns:a16="http://schemas.microsoft.com/office/drawing/2014/main" id="{813B9C13-6618-47C1-B2FB-38CDCDF2C7AE}"/>
+                <a16:creationId xmlns:a16="http://schemas.microsoft.com/office/drawing/2014/main" id="{F1FB7631-0E12-4309-92F3-825F2D391921}"/>
               </a:ext>
             </a:extLst>
           </p:cNvPr>
@@ -13135,7 +13135,7 @@
           <p:cNvPr id="30" name="">
             <a:extLst xmlns:a="http://schemas.openxmlformats.org/drawingml/2006/main">
               <a:ext uri="{FF2B5EF4-FFF2-40B4-BE49-F238E27FC236}">
-                <a16:creationId xmlns:a16="http://schemas.microsoft.com/office/drawing/2014/main" id="{28B8F77E-2C10-4F37-BFA4-BDECDA6C5F5F}"/>
+                <a16:creationId xmlns:a16="http://schemas.microsoft.com/office/drawing/2014/main" id="{7F9B2DAC-01A7-4ED5-AFA1-7C7A64359833}"/>
               </a:ext>
             </a:extLst>
           </p:cNvPr>
@@ -13166,7 +13166,7 @@
           <p:cNvPr id="31" name="">
             <a:extLst xmlns:a="http://schemas.openxmlformats.org/drawingml/2006/main">
               <a:ext uri="{FF2B5EF4-FFF2-40B4-BE49-F238E27FC236}">
-                <a16:creationId xmlns:a16="http://schemas.microsoft.com/office/drawing/2014/main" id="{D07DDF21-E8EE-4C15-BA50-7E13BF406769}"/>
+                <a16:creationId xmlns:a16="http://schemas.microsoft.com/office/drawing/2014/main" id="{00C2B268-D37D-47B9-9046-FA97F8FD5675}"/>
               </a:ext>
             </a:extLst>
           </p:cNvPr>
@@ -13197,7 +13197,7 @@
           <p:cNvPr id="32" name="">
             <a:extLst xmlns:a="http://schemas.openxmlformats.org/drawingml/2006/main">
               <a:ext uri="{FF2B5EF4-FFF2-40B4-BE49-F238E27FC236}">
-                <a16:creationId xmlns:a16="http://schemas.microsoft.com/office/drawing/2014/main" id="{ECF3B341-78E7-47BA-B115-7CEA2324F6EF}"/>
+                <a16:creationId xmlns:a16="http://schemas.microsoft.com/office/drawing/2014/main" id="{097B8ED0-96F8-41DE-A488-17CCF81EFF6F}"/>
               </a:ext>
             </a:extLst>
           </p:cNvPr>
@@ -13253,7 +13253,7 @@
           <p:cNvPr id="33" name="">
             <a:extLst xmlns:a="http://schemas.openxmlformats.org/drawingml/2006/main">
               <a:ext uri="{FF2B5EF4-FFF2-40B4-BE49-F238E27FC236}">
-                <a16:creationId xmlns:a16="http://schemas.microsoft.com/office/drawing/2014/main" id="{C864B365-24CC-45D4-89A0-6B6F5FD411C5}"/>
+                <a16:creationId xmlns:a16="http://schemas.microsoft.com/office/drawing/2014/main" id="{6A42E83D-F63C-4D4B-B29E-A0C9AC6BDB16}"/>
               </a:ext>
             </a:extLst>
           </p:cNvPr>
@@ -13309,7 +13309,7 @@
           <p:cNvPr id="34" name="">
             <a:extLst xmlns:a="http://schemas.openxmlformats.org/drawingml/2006/main">
               <a:ext uri="{FF2B5EF4-FFF2-40B4-BE49-F238E27FC236}">
-                <a16:creationId xmlns:a16="http://schemas.microsoft.com/office/drawing/2014/main" id="{9A9A5E8D-41AA-4070-940C-BF92C1F4DECB}"/>
+                <a16:creationId xmlns:a16="http://schemas.microsoft.com/office/drawing/2014/main" id="{16444364-5B14-4ABB-82CD-127D6A7D8E82}"/>
               </a:ext>
             </a:extLst>
           </p:cNvPr>
@@ -13365,7 +13365,7 @@
           <p:cNvPr id="35" name="">
             <a:extLst xmlns:a="http://schemas.openxmlformats.org/drawingml/2006/main">
               <a:ext uri="{FF2B5EF4-FFF2-40B4-BE49-F238E27FC236}">
-                <a16:creationId xmlns:a16="http://schemas.microsoft.com/office/drawing/2014/main" id="{7BB438A2-8631-49C7-8B5F-828F65F70C96}"/>
+                <a16:creationId xmlns:a16="http://schemas.microsoft.com/office/drawing/2014/main" id="{90639C35-EF4F-4FAD-937B-60A322695EB6}"/>
               </a:ext>
             </a:extLst>
           </p:cNvPr>
@@ -13421,7 +13421,7 @@
           <p:cNvPr id="36" name="">
             <a:extLst xmlns:a="http://schemas.openxmlformats.org/drawingml/2006/main">
               <a:ext uri="{FF2B5EF4-FFF2-40B4-BE49-F238E27FC236}">
-                <a16:creationId xmlns:a16="http://schemas.microsoft.com/office/drawing/2014/main" id="{21B89A72-97ED-4ED6-A060-A64E425A615C}"/>
+                <a16:creationId xmlns:a16="http://schemas.microsoft.com/office/drawing/2014/main" id="{2E3D45F1-1143-4E53-8489-0BE6BAE9C833}"/>
               </a:ext>
             </a:extLst>
           </p:cNvPr>
@@ -13477,7 +13477,7 @@
           <p:cNvPr id="37" name="">
             <a:extLst xmlns:a="http://schemas.openxmlformats.org/drawingml/2006/main">
               <a:ext uri="{FF2B5EF4-FFF2-40B4-BE49-F238E27FC236}">
-                <a16:creationId xmlns:a16="http://schemas.microsoft.com/office/drawing/2014/main" id="{92C9DF27-D286-4B65-9C02-AC7B2DF7D54C}"/>
+                <a16:creationId xmlns:a16="http://schemas.microsoft.com/office/drawing/2014/main" id="{545F40AF-2CE5-45E4-803D-87C589543040}"/>
               </a:ext>
             </a:extLst>
           </p:cNvPr>
@@ -13508,7 +13508,7 @@
           <p:cNvPr id="38" name="">
             <a:extLst xmlns:a="http://schemas.openxmlformats.org/drawingml/2006/main">
               <a:ext uri="{FF2B5EF4-FFF2-40B4-BE49-F238E27FC236}">
-                <a16:creationId xmlns:a16="http://schemas.microsoft.com/office/drawing/2014/main" id="{514DB823-DB2C-4008-B9C4-82EEA0673B7D}"/>
+                <a16:creationId xmlns:a16="http://schemas.microsoft.com/office/drawing/2014/main" id="{186058DA-6978-4BD3-BD36-C6C9594CE9A4}"/>
               </a:ext>
             </a:extLst>
           </p:cNvPr>
@@ -13610,7 +13610,7 @@
           <p:cNvPr id="39" name="">
             <a:extLst xmlns:a="http://schemas.openxmlformats.org/drawingml/2006/main">
               <a:ext uri="{FF2B5EF4-FFF2-40B4-BE49-F238E27FC236}">
-                <a16:creationId xmlns:a16="http://schemas.microsoft.com/office/drawing/2014/main" id="{EC6ADB86-4817-4FCC-9984-9EC58AE4E3AD}"/>
+                <a16:creationId xmlns:a16="http://schemas.microsoft.com/office/drawing/2014/main" id="{A0F092F2-F73A-4F3A-9A78-3985A2D60692}"/>
               </a:ext>
             </a:extLst>
           </p:cNvPr>
@@ -13666,7 +13666,7 @@
           <p:cNvPr id="40" name="">
             <a:extLst xmlns:a="http://schemas.openxmlformats.org/drawingml/2006/main">
               <a:ext uri="{FF2B5EF4-FFF2-40B4-BE49-F238E27FC236}">
-                <a16:creationId xmlns:a16="http://schemas.microsoft.com/office/drawing/2014/main" id="{2B1D7624-3D1A-40C9-A7EA-DAFB73C97CE7}"/>
+                <a16:creationId xmlns:a16="http://schemas.microsoft.com/office/drawing/2014/main" id="{DB1A9CBA-19C0-4F12-8F79-0C9C308A4143}"/>
               </a:ext>
             </a:extLst>
           </p:cNvPr>
@@ -13722,7 +13722,7 @@
           <p:cNvPr id="41" name="">
             <a:extLst xmlns:a="http://schemas.openxmlformats.org/drawingml/2006/main">
               <a:ext uri="{FF2B5EF4-FFF2-40B4-BE49-F238E27FC236}">
-                <a16:creationId xmlns:a16="http://schemas.microsoft.com/office/drawing/2014/main" id="{3CB59C94-A76B-4FF6-BA15-41342EB2FC8F}"/>
+                <a16:creationId xmlns:a16="http://schemas.microsoft.com/office/drawing/2014/main" id="{05238D39-71F8-415A-B300-3AF761CAA7BC}"/>
               </a:ext>
             </a:extLst>
           </p:cNvPr>
@@ -13778,7 +13778,7 @@
           <p:cNvPr id="42" name="">
             <a:extLst xmlns:a="http://schemas.openxmlformats.org/drawingml/2006/main">
               <a:ext uri="{FF2B5EF4-FFF2-40B4-BE49-F238E27FC236}">
-                <a16:creationId xmlns:a16="http://schemas.microsoft.com/office/drawing/2014/main" id="{4005F26D-8A0B-45D0-978C-E61115FF415A}"/>
+                <a16:creationId xmlns:a16="http://schemas.microsoft.com/office/drawing/2014/main" id="{4DA4702F-EED8-4935-81EB-CAD9DBD31081}"/>
               </a:ext>
             </a:extLst>
           </p:cNvPr>
@@ -13809,7 +13809,7 @@
           <p:cNvPr id="43" name="">
             <a:extLst xmlns:a="http://schemas.openxmlformats.org/drawingml/2006/main">
               <a:ext uri="{FF2B5EF4-FFF2-40B4-BE49-F238E27FC236}">
-                <a16:creationId xmlns:a16="http://schemas.microsoft.com/office/drawing/2014/main" id="{239AACB1-E569-47B2-8C49-0EB4986A58B8}"/>
+                <a16:creationId xmlns:a16="http://schemas.microsoft.com/office/drawing/2014/main" id="{08444FE1-F0FA-4AF8-ABCA-C458F7088338}"/>
               </a:ext>
             </a:extLst>
           </p:cNvPr>
@@ -13911,7 +13911,7 @@
           <p:cNvPr id="44" name="">
             <a:extLst xmlns:a="http://schemas.openxmlformats.org/drawingml/2006/main">
               <a:ext uri="{FF2B5EF4-FFF2-40B4-BE49-F238E27FC236}">
-                <a16:creationId xmlns:a16="http://schemas.microsoft.com/office/drawing/2014/main" id="{EFACF92C-9C6F-4433-A177-1CDDAF86706D}"/>
+                <a16:creationId xmlns:a16="http://schemas.microsoft.com/office/drawing/2014/main" id="{B763FA26-E1BF-49DD-AB89-F733B94ECCA8}"/>
               </a:ext>
             </a:extLst>
           </p:cNvPr>
@@ -13967,7 +13967,7 @@
           <p:cNvPr id="45" name="">
             <a:extLst xmlns:a="http://schemas.openxmlformats.org/drawingml/2006/main">
               <a:ext uri="{FF2B5EF4-FFF2-40B4-BE49-F238E27FC236}">
-                <a16:creationId xmlns:a16="http://schemas.microsoft.com/office/drawing/2014/main" id="{8858F787-81DF-4E2A-97B2-DFA311E90F46}"/>
+                <a16:creationId xmlns:a16="http://schemas.microsoft.com/office/drawing/2014/main" id="{932C88E6-0D74-481C-84ED-3BD93EC25B5E}"/>
               </a:ext>
             </a:extLst>
           </p:cNvPr>
@@ -14023,7 +14023,7 @@
           <p:cNvPr id="46" name="">
             <a:extLst xmlns:a="http://schemas.openxmlformats.org/drawingml/2006/main">
               <a:ext uri="{FF2B5EF4-FFF2-40B4-BE49-F238E27FC236}">
-                <a16:creationId xmlns:a16="http://schemas.microsoft.com/office/drawing/2014/main" id="{9961617F-76F9-42BC-AC7A-36E8C3B97CF5}"/>
+                <a16:creationId xmlns:a16="http://schemas.microsoft.com/office/drawing/2014/main" id="{3A4544E8-0E7C-4F42-827B-D84C38C439EF}"/>
               </a:ext>
             </a:extLst>
           </p:cNvPr>
@@ -14079,7 +14079,7 @@
           <p:cNvPr id="47" name="">
             <a:extLst xmlns:a="http://schemas.openxmlformats.org/drawingml/2006/main">
               <a:ext uri="{FF2B5EF4-FFF2-40B4-BE49-F238E27FC236}">
-                <a16:creationId xmlns:a16="http://schemas.microsoft.com/office/drawing/2014/main" id="{C6CA9091-89AD-42D6-B1D0-2977A4A6187F}"/>
+                <a16:creationId xmlns:a16="http://schemas.microsoft.com/office/drawing/2014/main" id="{4B7B0B96-8C80-4372-9231-A4BB755783D1}"/>
               </a:ext>
             </a:extLst>
           </p:cNvPr>
@@ -14110,7 +14110,7 @@
           <p:cNvPr id="48" name="">
             <a:extLst xmlns:a="http://schemas.openxmlformats.org/drawingml/2006/main">
               <a:ext uri="{FF2B5EF4-FFF2-40B4-BE49-F238E27FC236}">
-                <a16:creationId xmlns:a16="http://schemas.microsoft.com/office/drawing/2014/main" id="{C1930646-F5F1-46AE-A34D-7204733A79D7}"/>
+                <a16:creationId xmlns:a16="http://schemas.microsoft.com/office/drawing/2014/main" id="{368A7746-878B-4C08-BF57-AB259200823E}"/>
               </a:ext>
             </a:extLst>
           </p:cNvPr>
@@ -14212,7 +14212,7 @@
           <p:cNvPr id="49" name="">
             <a:extLst xmlns:a="http://schemas.openxmlformats.org/drawingml/2006/main">
               <a:ext uri="{FF2B5EF4-FFF2-40B4-BE49-F238E27FC236}">
-                <a16:creationId xmlns:a16="http://schemas.microsoft.com/office/drawing/2014/main" id="{47605E1D-BC0E-464A-825A-58FBC5CE30FD}"/>
+                <a16:creationId xmlns:a16="http://schemas.microsoft.com/office/drawing/2014/main" id="{DA59A06E-6696-409A-B3BB-D92A4EE309B2}"/>
               </a:ext>
             </a:extLst>
           </p:cNvPr>
@@ -14268,7 +14268,7 @@
           <p:cNvPr id="50" name="">
             <a:extLst xmlns:a="http://schemas.openxmlformats.org/drawingml/2006/main">
               <a:ext uri="{FF2B5EF4-FFF2-40B4-BE49-F238E27FC236}">
-                <a16:creationId xmlns:a16="http://schemas.microsoft.com/office/drawing/2014/main" id="{64D16580-DAD6-4EF4-8F8E-2CF336997549}"/>
+                <a16:creationId xmlns:a16="http://schemas.microsoft.com/office/drawing/2014/main" id="{73BED83E-5E7C-4218-9704-A922659E08E7}"/>
               </a:ext>
             </a:extLst>
           </p:cNvPr>
@@ -14303,7 +14303,7 @@
           <p:cNvPr id="51" name="">
             <a:extLst xmlns:a="http://schemas.openxmlformats.org/drawingml/2006/main">
               <a:ext uri="{FF2B5EF4-FFF2-40B4-BE49-F238E27FC236}">
-                <a16:creationId xmlns:a16="http://schemas.microsoft.com/office/drawing/2014/main" id="{FA8D81D2-F2C5-4226-859A-C39FA57B67C5}"/>
+                <a16:creationId xmlns:a16="http://schemas.microsoft.com/office/drawing/2014/main" id="{7FACE791-69FE-4588-A5B1-793536BC8B5F}"/>
               </a:ext>
             </a:extLst>
           </p:cNvPr>
@@ -14359,7 +14359,7 @@
           <p:cNvPr id="52" name="">
             <a:extLst xmlns:a="http://schemas.openxmlformats.org/drawingml/2006/main">
               <a:ext uri="{FF2B5EF4-FFF2-40B4-BE49-F238E27FC236}">
-                <a16:creationId xmlns:a16="http://schemas.microsoft.com/office/drawing/2014/main" id="{599DF052-AAF1-4E1B-8602-48AFBE5DF8E2}"/>
+                <a16:creationId xmlns:a16="http://schemas.microsoft.com/office/drawing/2014/main" id="{4AFCA7BE-296F-4832-A77D-E45C41F7745F}"/>
               </a:ext>
             </a:extLst>
           </p:cNvPr>
@@ -14394,7 +14394,7 @@
           <p:cNvPr id="53" name="">
             <a:extLst xmlns:a="http://schemas.openxmlformats.org/drawingml/2006/main">
               <a:ext uri="{FF2B5EF4-FFF2-40B4-BE49-F238E27FC236}">
-                <a16:creationId xmlns:a16="http://schemas.microsoft.com/office/drawing/2014/main" id="{2DC59F1F-11E2-4973-A9D8-FC2C2DEB0084}"/>
+                <a16:creationId xmlns:a16="http://schemas.microsoft.com/office/drawing/2014/main" id="{DD2AA4C6-C54F-40A7-BBF7-A815C6561726}"/>
               </a:ext>
             </a:extLst>
           </p:cNvPr>
@@ -14450,7 +14450,7 @@
           <p:cNvPr id="54" name="">
             <a:extLst xmlns:a="http://schemas.openxmlformats.org/drawingml/2006/main">
               <a:ext uri="{FF2B5EF4-FFF2-40B4-BE49-F238E27FC236}">
-                <a16:creationId xmlns:a16="http://schemas.microsoft.com/office/drawing/2014/main" id="{22FAE25A-D41A-41C7-8A5E-ED12E0CE72F9}"/>
+                <a16:creationId xmlns:a16="http://schemas.microsoft.com/office/drawing/2014/main" id="{5E3231D8-16EC-4636-9320-D6878290349B}"/>
               </a:ext>
             </a:extLst>
           </p:cNvPr>
@@ -14485,7 +14485,7 @@
           <p:cNvPr id="55" name="">
             <a:extLst xmlns:a="http://schemas.openxmlformats.org/drawingml/2006/main">
               <a:ext uri="{FF2B5EF4-FFF2-40B4-BE49-F238E27FC236}">
-                <a16:creationId xmlns:a16="http://schemas.microsoft.com/office/drawing/2014/main" id="{BA2E7DC2-E073-415C-A93D-7E6F2F9D0803}"/>
+                <a16:creationId xmlns:a16="http://schemas.microsoft.com/office/drawing/2014/main" id="{5A163DD7-41DC-4A05-96AD-BEA6FC21A4D3}"/>
               </a:ext>
             </a:extLst>
           </p:cNvPr>
@@ -14541,7 +14541,7 @@
           <p:cNvPr id="56" name="">
             <a:extLst xmlns:a="http://schemas.openxmlformats.org/drawingml/2006/main">
               <a:ext uri="{FF2B5EF4-FFF2-40B4-BE49-F238E27FC236}">
-                <a16:creationId xmlns:a16="http://schemas.microsoft.com/office/drawing/2014/main" id="{4F9E28FD-AA76-4807-9270-2BF6D443BEFB}"/>
+                <a16:creationId xmlns:a16="http://schemas.microsoft.com/office/drawing/2014/main" id="{8D34C608-AE11-4BAF-A00E-5A4F6A8B8C62}"/>
               </a:ext>
             </a:extLst>
           </p:cNvPr>
@@ -14576,7 +14576,7 @@
           <p:cNvPr id="57" name="">
             <a:extLst xmlns:a="http://schemas.openxmlformats.org/drawingml/2006/main">
               <a:ext uri="{FF2B5EF4-FFF2-40B4-BE49-F238E27FC236}">
-                <a16:creationId xmlns:a16="http://schemas.microsoft.com/office/drawing/2014/main" id="{0A82ED12-9330-4733-AB14-F016B395D69D}"/>
+                <a16:creationId xmlns:a16="http://schemas.microsoft.com/office/drawing/2014/main" id="{78677B58-66AC-4B21-8988-1C15E861839B}"/>
               </a:ext>
             </a:extLst>
           </p:cNvPr>
@@ -14632,7 +14632,7 @@
           <p:cNvPr id="58" name="">
             <a:extLst xmlns:a="http://schemas.openxmlformats.org/drawingml/2006/main">
               <a:ext uri="{FF2B5EF4-FFF2-40B4-BE49-F238E27FC236}">
-                <a16:creationId xmlns:a16="http://schemas.microsoft.com/office/drawing/2014/main" id="{DEF8C867-1C4A-4C2F-8409-6A4673C58A7F}"/>
+                <a16:creationId xmlns:a16="http://schemas.microsoft.com/office/drawing/2014/main" id="{C2212316-96E1-4602-940D-AAE86A394DF6}"/>
               </a:ext>
             </a:extLst>
           </p:cNvPr>
@@ -14667,7 +14667,7 @@
           <p:cNvPr id="59" name="">
             <a:extLst xmlns:a="http://schemas.openxmlformats.org/drawingml/2006/main">
               <a:ext uri="{FF2B5EF4-FFF2-40B4-BE49-F238E27FC236}">
-                <a16:creationId xmlns:a16="http://schemas.microsoft.com/office/drawing/2014/main" id="{BA9BB814-296F-4E19-B328-41A16C5A0323}"/>
+                <a16:creationId xmlns:a16="http://schemas.microsoft.com/office/drawing/2014/main" id="{7AFDEA60-0588-45BD-AFDA-83DF57D73D72}"/>
               </a:ext>
             </a:extLst>
           </p:cNvPr>
@@ -14723,7 +14723,7 @@
           <p:cNvPr id="60" name="">
             <a:extLst xmlns:a="http://schemas.openxmlformats.org/drawingml/2006/main">
               <a:ext uri="{FF2B5EF4-FFF2-40B4-BE49-F238E27FC236}">
-                <a16:creationId xmlns:a16="http://schemas.microsoft.com/office/drawing/2014/main" id="{4C5D710F-B7E9-4A4C-B658-B490381C482F}"/>
+                <a16:creationId xmlns:a16="http://schemas.microsoft.com/office/drawing/2014/main" id="{19D7F04B-B591-44B0-9E64-0DD336671C92}"/>
               </a:ext>
             </a:extLst>
           </p:cNvPr>
@@ -14758,7 +14758,7 @@
           <p:cNvPr id="61" name="">
             <a:extLst xmlns:a="http://schemas.openxmlformats.org/drawingml/2006/main">
               <a:ext uri="{FF2B5EF4-FFF2-40B4-BE49-F238E27FC236}">
-                <a16:creationId xmlns:a16="http://schemas.microsoft.com/office/drawing/2014/main" id="{BF661F62-681A-4D89-9B25-0C626C97E116}"/>
+                <a16:creationId xmlns:a16="http://schemas.microsoft.com/office/drawing/2014/main" id="{C3B77726-F0B6-491A-A6B2-E41DC07D4CBD}"/>
               </a:ext>
             </a:extLst>
           </p:cNvPr>
@@ -14814,7 +14814,7 @@
           <p:cNvPr id="62" name="">
             <a:extLst xmlns:a="http://schemas.openxmlformats.org/drawingml/2006/main">
               <a:ext uri="{FF2B5EF4-FFF2-40B4-BE49-F238E27FC236}">
-                <a16:creationId xmlns:a16="http://schemas.microsoft.com/office/drawing/2014/main" id="{51788EDD-1C72-4BE2-A239-476201555746}"/>
+                <a16:creationId xmlns:a16="http://schemas.microsoft.com/office/drawing/2014/main" id="{17026B72-2091-47DE-A493-6EE1FD1012AB}"/>
               </a:ext>
             </a:extLst>
           </p:cNvPr>
@@ -14868,7 +14868,7 @@
     </p:spTree>
     <p:extLst>
       <p:ext uri="{BB962C8B-B14F-4D97-AF65-F5344CB8AC3E}">
-        <p14:creationId xmlns:p14="http://schemas.microsoft.com/office/powerpoint/2010/main" val="463450295"/>
+        <p14:creationId xmlns:p14="http://schemas.microsoft.com/office/powerpoint/2010/main" val="1402583338"/>
       </p:ext>
     </p:extLst>
   </p:cSld>
@@ -14899,7 +14899,7 @@
           <p:cNvPr id="1" name="">
             <a:extLst xmlns:a="http://schemas.openxmlformats.org/drawingml/2006/main">
               <a:ext uri="{FF2B5EF4-FFF2-40B4-BE49-F238E27FC236}">
-                <a16:creationId xmlns:a16="http://schemas.microsoft.com/office/drawing/2014/main" id="{FB6CC782-E76B-4507-9E57-CDC29F8C3877}"/>
+                <a16:creationId xmlns:a16="http://schemas.microsoft.com/office/drawing/2014/main" id="{FD62BC1F-3DBE-4BBA-BE0D-5B8DA423E0CF}"/>
               </a:ext>
             </a:extLst>
           </p:cNvPr>
@@ -14930,7 +14930,7 @@
           <p:cNvPr id="2" name="">
             <a:extLst xmlns:a="http://schemas.openxmlformats.org/drawingml/2006/main">
               <a:ext uri="{FF2B5EF4-FFF2-40B4-BE49-F238E27FC236}">
-                <a16:creationId xmlns:a16="http://schemas.microsoft.com/office/drawing/2014/main" id="{C377A597-688E-4EEC-8B48-030C2138D1D3}"/>
+                <a16:creationId xmlns:a16="http://schemas.microsoft.com/office/drawing/2014/main" id="{B555C622-1BFE-4EFE-9383-63D7F4E8C4D2}"/>
               </a:ext>
             </a:extLst>
           </p:cNvPr>
@@ -14961,7 +14961,7 @@
           <p:cNvPr id="3" name="">
             <a:extLst xmlns:a="http://schemas.openxmlformats.org/drawingml/2006/main">
               <a:ext uri="{FF2B5EF4-FFF2-40B4-BE49-F238E27FC236}">
-                <a16:creationId xmlns:a16="http://schemas.microsoft.com/office/drawing/2014/main" id="{75E06E8D-39E2-48C5-8A30-DED1042BFFE8}"/>
+                <a16:creationId xmlns:a16="http://schemas.microsoft.com/office/drawing/2014/main" id="{41DE504B-A6F0-42A5-8B69-CBD6B3462434}"/>
               </a:ext>
             </a:extLst>
           </p:cNvPr>
@@ -14992,7 +14992,7 @@
           <p:cNvPr id="4" name="">
             <a:extLst xmlns:a="http://schemas.openxmlformats.org/drawingml/2006/main">
               <a:ext uri="{FF2B5EF4-FFF2-40B4-BE49-F238E27FC236}">
-                <a16:creationId xmlns:a16="http://schemas.microsoft.com/office/drawing/2014/main" id="{9BE98DC0-0EF5-4192-A9A2-BAB3CDACBFC6}"/>
+                <a16:creationId xmlns:a16="http://schemas.microsoft.com/office/drawing/2014/main" id="{0EB81846-6A4E-4D1B-AA57-ACFF505BCF84}"/>
               </a:ext>
             </a:extLst>
           </p:cNvPr>
@@ -15023,7 +15023,7 @@
           <p:cNvPr id="5" name="">
             <a:extLst xmlns:a="http://schemas.openxmlformats.org/drawingml/2006/main">
               <a:ext uri="{FF2B5EF4-FFF2-40B4-BE49-F238E27FC236}">
-                <a16:creationId xmlns:a16="http://schemas.microsoft.com/office/drawing/2014/main" id="{B29374BC-CF6B-4DBB-8283-6695E5CD673F}"/>
+                <a16:creationId xmlns:a16="http://schemas.microsoft.com/office/drawing/2014/main" id="{F035B438-1F6E-451F-91E5-E1E65EAD6984}"/>
               </a:ext>
             </a:extLst>
           </p:cNvPr>
@@ -15054,7 +15054,7 @@
           <p:cNvPr id="6" name="">
             <a:extLst xmlns:a="http://schemas.openxmlformats.org/drawingml/2006/main">
               <a:ext uri="{FF2B5EF4-FFF2-40B4-BE49-F238E27FC236}">
-                <a16:creationId xmlns:a16="http://schemas.microsoft.com/office/drawing/2014/main" id="{C9DA1228-4F48-4DC7-9FAF-76FE92630E87}"/>
+                <a16:creationId xmlns:a16="http://schemas.microsoft.com/office/drawing/2014/main" id="{9AF8C334-E562-4B37-A864-906296DB6FF4}"/>
               </a:ext>
             </a:extLst>
           </p:cNvPr>
@@ -15085,7 +15085,7 @@
           <p:cNvPr id="7" name="">
             <a:extLst xmlns:a="http://schemas.openxmlformats.org/drawingml/2006/main">
               <a:ext uri="{FF2B5EF4-FFF2-40B4-BE49-F238E27FC236}">
-                <a16:creationId xmlns:a16="http://schemas.microsoft.com/office/drawing/2014/main" id="{05E2988A-AFCB-4DD6-AFA6-E5569DB7779E}"/>
+                <a16:creationId xmlns:a16="http://schemas.microsoft.com/office/drawing/2014/main" id="{A7E1437A-9261-441A-8886-52468CA41B70}"/>
               </a:ext>
             </a:extLst>
           </p:cNvPr>
@@ -15116,7 +15116,7 @@
           <p:cNvPr id="8" name="">
             <a:extLst xmlns:a="http://schemas.openxmlformats.org/drawingml/2006/main">
               <a:ext uri="{FF2B5EF4-FFF2-40B4-BE49-F238E27FC236}">
-                <a16:creationId xmlns:a16="http://schemas.microsoft.com/office/drawing/2014/main" id="{4C1E1E41-14E8-4C64-AB0D-EF8C4C879111}"/>
+                <a16:creationId xmlns:a16="http://schemas.microsoft.com/office/drawing/2014/main" id="{CA899E85-DF36-4BAF-9CCE-EE9B53F1AE46}"/>
               </a:ext>
             </a:extLst>
           </p:cNvPr>
@@ -15147,7 +15147,7 @@
           <p:cNvPr id="9" name="">
             <a:extLst xmlns:a="http://schemas.openxmlformats.org/drawingml/2006/main">
               <a:ext uri="{FF2B5EF4-FFF2-40B4-BE49-F238E27FC236}">
-                <a16:creationId xmlns:a16="http://schemas.microsoft.com/office/drawing/2014/main" id="{AA7C140E-3D14-43A8-9610-32EDD2620339}"/>
+                <a16:creationId xmlns:a16="http://schemas.microsoft.com/office/drawing/2014/main" id="{1AC45073-4666-4E89-801E-2898F5B78DBB}"/>
               </a:ext>
             </a:extLst>
           </p:cNvPr>
@@ -15178,7 +15178,7 @@
           <p:cNvPr id="10" name="">
             <a:extLst xmlns:a="http://schemas.openxmlformats.org/drawingml/2006/main">
               <a:ext uri="{FF2B5EF4-FFF2-40B4-BE49-F238E27FC236}">
-                <a16:creationId xmlns:a16="http://schemas.microsoft.com/office/drawing/2014/main" id="{7B218E25-F790-4666-8EEA-154EBB6A757C}"/>
+                <a16:creationId xmlns:a16="http://schemas.microsoft.com/office/drawing/2014/main" id="{0E5FBD0F-8258-4B44-853D-39603117E2E0}"/>
               </a:ext>
             </a:extLst>
           </p:cNvPr>
@@ -15209,7 +15209,7 @@
           <p:cNvPr id="11" name="">
             <a:extLst xmlns:a="http://schemas.openxmlformats.org/drawingml/2006/main">
               <a:ext uri="{FF2B5EF4-FFF2-40B4-BE49-F238E27FC236}">
-                <a16:creationId xmlns:a16="http://schemas.microsoft.com/office/drawing/2014/main" id="{5124B5DD-6C10-437E-AE3A-8F98E622CAA5}"/>
+                <a16:creationId xmlns:a16="http://schemas.microsoft.com/office/drawing/2014/main" id="{E73B8B3D-A99B-4E2B-9E23-A24FBC56CC82}"/>
               </a:ext>
             </a:extLst>
           </p:cNvPr>
@@ -15240,7 +15240,7 @@
           <p:cNvPr id="12" name="">
             <a:extLst xmlns:a="http://schemas.openxmlformats.org/drawingml/2006/main">
               <a:ext uri="{FF2B5EF4-FFF2-40B4-BE49-F238E27FC236}">
-                <a16:creationId xmlns:a16="http://schemas.microsoft.com/office/drawing/2014/main" id="{EB8F28D9-4BE7-4A59-AA09-9B5F18C91865}"/>
+                <a16:creationId xmlns:a16="http://schemas.microsoft.com/office/drawing/2014/main" id="{3DE7F380-C663-47DE-A5E5-0010FB05A3E4}"/>
               </a:ext>
             </a:extLst>
           </p:cNvPr>
@@ -15271,7 +15271,7 @@
           <p:cNvPr id="13" name="">
             <a:extLst xmlns:a="http://schemas.openxmlformats.org/drawingml/2006/main">
               <a:ext uri="{FF2B5EF4-FFF2-40B4-BE49-F238E27FC236}">
-                <a16:creationId xmlns:a16="http://schemas.microsoft.com/office/drawing/2014/main" id="{14A8D4E6-4469-4942-B41D-23C6AB3C8BF5}"/>
+                <a16:creationId xmlns:a16="http://schemas.microsoft.com/office/drawing/2014/main" id="{1DC737A7-6313-406D-BB29-DB7FEA6D5015}"/>
               </a:ext>
             </a:extLst>
           </p:cNvPr>
@@ -15302,7 +15302,7 @@
           <p:cNvPr id="14" name="">
             <a:extLst xmlns:a="http://schemas.openxmlformats.org/drawingml/2006/main">
               <a:ext uri="{FF2B5EF4-FFF2-40B4-BE49-F238E27FC236}">
-                <a16:creationId xmlns:a16="http://schemas.microsoft.com/office/drawing/2014/main" id="{0DF1AAB9-6846-4317-9B9F-5DA569BD921F}"/>
+                <a16:creationId xmlns:a16="http://schemas.microsoft.com/office/drawing/2014/main" id="{6CB7240D-28F3-4960-8B85-32B00EA56097}"/>
               </a:ext>
             </a:extLst>
           </p:cNvPr>
@@ -15333,7 +15333,7 @@
           <p:cNvPr id="15" name="">
             <a:extLst xmlns:a="http://schemas.openxmlformats.org/drawingml/2006/main">
               <a:ext uri="{FF2B5EF4-FFF2-40B4-BE49-F238E27FC236}">
-                <a16:creationId xmlns:a16="http://schemas.microsoft.com/office/drawing/2014/main" id="{5F99B025-5D71-4303-92A8-05696D6EA0D2}"/>
+                <a16:creationId xmlns:a16="http://schemas.microsoft.com/office/drawing/2014/main" id="{2DF5FA6B-A36D-4109-BBF6-7D85E64C87B0}"/>
               </a:ext>
             </a:extLst>
           </p:cNvPr>
@@ -15364,7 +15364,7 @@
           <p:cNvPr id="16" name="">
             <a:extLst xmlns:a="http://schemas.openxmlformats.org/drawingml/2006/main">
               <a:ext uri="{FF2B5EF4-FFF2-40B4-BE49-F238E27FC236}">
-                <a16:creationId xmlns:a16="http://schemas.microsoft.com/office/drawing/2014/main" id="{03F8DE95-A3F4-4136-A85D-66F9E853B507}"/>
+                <a16:creationId xmlns:a16="http://schemas.microsoft.com/office/drawing/2014/main" id="{22C8F2A9-FDC2-4239-BCEE-17CB1F5BC533}"/>
               </a:ext>
             </a:extLst>
           </p:cNvPr>
@@ -15395,7 +15395,7 @@
           <p:cNvPr id="17" name="">
             <a:extLst xmlns:a="http://schemas.openxmlformats.org/drawingml/2006/main">
               <a:ext uri="{FF2B5EF4-FFF2-40B4-BE49-F238E27FC236}">
-                <a16:creationId xmlns:a16="http://schemas.microsoft.com/office/drawing/2014/main" id="{805FA73E-5C47-4681-B3F5-FA6F35FC0ADF}"/>
+                <a16:creationId xmlns:a16="http://schemas.microsoft.com/office/drawing/2014/main" id="{4F573085-C8E6-4C16-8DAD-8EC2EFC50D4D}"/>
               </a:ext>
             </a:extLst>
           </p:cNvPr>
@@ -15426,7 +15426,7 @@
           <p:cNvPr id="18" name="">
             <a:extLst xmlns:a="http://schemas.openxmlformats.org/drawingml/2006/main">
               <a:ext uri="{FF2B5EF4-FFF2-40B4-BE49-F238E27FC236}">
-                <a16:creationId xmlns:a16="http://schemas.microsoft.com/office/drawing/2014/main" id="{3D624829-AEC6-4340-B77E-A9C3C16313CE}"/>
+                <a16:creationId xmlns:a16="http://schemas.microsoft.com/office/drawing/2014/main" id="{E3DFFEAB-DDC6-4431-B205-248BA130EF30}"/>
               </a:ext>
             </a:extLst>
           </p:cNvPr>
@@ -15457,7 +15457,7 @@
           <p:cNvPr id="19" name="">
             <a:extLst xmlns:a="http://schemas.openxmlformats.org/drawingml/2006/main">
               <a:ext uri="{FF2B5EF4-FFF2-40B4-BE49-F238E27FC236}">
-                <a16:creationId xmlns:a16="http://schemas.microsoft.com/office/drawing/2014/main" id="{3F62E8AB-CAAE-4671-9449-95920DADAB8D}"/>
+                <a16:creationId xmlns:a16="http://schemas.microsoft.com/office/drawing/2014/main" id="{7A88A775-9643-4953-8E73-84C426F1AF92}"/>
               </a:ext>
             </a:extLst>
           </p:cNvPr>
@@ -15488,7 +15488,7 @@
           <p:cNvPr id="20" name="">
             <a:extLst xmlns:a="http://schemas.openxmlformats.org/drawingml/2006/main">
               <a:ext uri="{FF2B5EF4-FFF2-40B4-BE49-F238E27FC236}">
-                <a16:creationId xmlns:a16="http://schemas.microsoft.com/office/drawing/2014/main" id="{853223FD-AEE7-4CAA-8E3B-94F78206082E}"/>
+                <a16:creationId xmlns:a16="http://schemas.microsoft.com/office/drawing/2014/main" id="{5143AE55-D735-4908-9B3B-62ADE63937F3}"/>
               </a:ext>
             </a:extLst>
           </p:cNvPr>
@@ -15519,7 +15519,7 @@
           <p:cNvPr id="21" name="">
             <a:extLst xmlns:a="http://schemas.openxmlformats.org/drawingml/2006/main">
               <a:ext uri="{FF2B5EF4-FFF2-40B4-BE49-F238E27FC236}">
-                <a16:creationId xmlns:a16="http://schemas.microsoft.com/office/drawing/2014/main" id="{8732D8AB-F663-4CBF-8D47-516B3201722F}"/>
+                <a16:creationId xmlns:a16="http://schemas.microsoft.com/office/drawing/2014/main" id="{99D1568B-D7F3-4DB9-9A53-07DEF1142893}"/>
               </a:ext>
             </a:extLst>
           </p:cNvPr>
@@ -15550,7 +15550,7 @@
           <p:cNvPr id="22" name="">
             <a:extLst xmlns:a="http://schemas.openxmlformats.org/drawingml/2006/main">
               <a:ext uri="{FF2B5EF4-FFF2-40B4-BE49-F238E27FC236}">
-                <a16:creationId xmlns:a16="http://schemas.microsoft.com/office/drawing/2014/main" id="{6C681634-DD6C-4E24-97D5-ADFD1E62E8FC}"/>
+                <a16:creationId xmlns:a16="http://schemas.microsoft.com/office/drawing/2014/main" id="{6CE68E6A-844E-4A40-AE4C-780382B2E785}"/>
               </a:ext>
             </a:extLst>
           </p:cNvPr>
@@ -15581,7 +15581,7 @@
           <p:cNvPr id="23" name="">
             <a:extLst xmlns:a="http://schemas.openxmlformats.org/drawingml/2006/main">
               <a:ext uri="{FF2B5EF4-FFF2-40B4-BE49-F238E27FC236}">
-                <a16:creationId xmlns:a16="http://schemas.microsoft.com/office/drawing/2014/main" id="{5D297BF0-FFC5-4084-B624-7D1EDCD968FA}"/>
+                <a16:creationId xmlns:a16="http://schemas.microsoft.com/office/drawing/2014/main" id="{3E2DD40F-B49B-4975-887C-C51E35A94467}"/>
               </a:ext>
             </a:extLst>
           </p:cNvPr>
@@ -15612,7 +15612,7 @@
           <p:cNvPr id="24" name="">
             <a:extLst xmlns:a="http://schemas.openxmlformats.org/drawingml/2006/main">
               <a:ext uri="{FF2B5EF4-FFF2-40B4-BE49-F238E27FC236}">
-                <a16:creationId xmlns:a16="http://schemas.microsoft.com/office/drawing/2014/main" id="{56656EC1-C237-4049-B159-FC93843C718A}"/>
+                <a16:creationId xmlns:a16="http://schemas.microsoft.com/office/drawing/2014/main" id="{A83DF063-20A6-4CBA-9F11-DE7619BD61A5}"/>
               </a:ext>
             </a:extLst>
           </p:cNvPr>
@@ -15643,7 +15643,7 @@
           <p:cNvPr id="25" name="">
             <a:extLst xmlns:a="http://schemas.openxmlformats.org/drawingml/2006/main">
               <a:ext uri="{FF2B5EF4-FFF2-40B4-BE49-F238E27FC236}">
-                <a16:creationId xmlns:a16="http://schemas.microsoft.com/office/drawing/2014/main" id="{8BC53967-0C10-4111-A692-164A4F8CE04C}"/>
+                <a16:creationId xmlns:a16="http://schemas.microsoft.com/office/drawing/2014/main" id="{AB596187-A198-46FA-8422-011E91110497}"/>
               </a:ext>
             </a:extLst>
           </p:cNvPr>
@@ -15674,7 +15674,7 @@
           <p:cNvPr id="26" name="">
             <a:extLst xmlns:a="http://schemas.openxmlformats.org/drawingml/2006/main">
               <a:ext uri="{FF2B5EF4-FFF2-40B4-BE49-F238E27FC236}">
-                <a16:creationId xmlns:a16="http://schemas.microsoft.com/office/drawing/2014/main" id="{248112EB-F520-47B7-BED8-675191B94BBA}"/>
+                <a16:creationId xmlns:a16="http://schemas.microsoft.com/office/drawing/2014/main" id="{BA091B1D-98D7-49DC-91D9-9EC6644CE678}"/>
               </a:ext>
             </a:extLst>
           </p:cNvPr>
@@ -15705,7 +15705,7 @@
           <p:cNvPr id="27" name="">
             <a:extLst xmlns:a="http://schemas.openxmlformats.org/drawingml/2006/main">
               <a:ext uri="{FF2B5EF4-FFF2-40B4-BE49-F238E27FC236}">
-                <a16:creationId xmlns:a16="http://schemas.microsoft.com/office/drawing/2014/main" id="{0966BDF0-E98F-46F2-AAE2-530460A822EF}"/>
+                <a16:creationId xmlns:a16="http://schemas.microsoft.com/office/drawing/2014/main" id="{D45C66B5-91F0-4DF6-BE07-464F5C891D6B}"/>
               </a:ext>
             </a:extLst>
           </p:cNvPr>
@@ -15736,7 +15736,7 @@
           <p:cNvPr id="28" name="">
             <a:extLst xmlns:a="http://schemas.openxmlformats.org/drawingml/2006/main">
               <a:ext uri="{FF2B5EF4-FFF2-40B4-BE49-F238E27FC236}">
-                <a16:creationId xmlns:a16="http://schemas.microsoft.com/office/drawing/2014/main" id="{D3D9D203-152F-4453-8165-1E20012683C6}"/>
+                <a16:creationId xmlns:a16="http://schemas.microsoft.com/office/drawing/2014/main" id="{2DCAC217-869B-45F1-BFD4-9788F1D4D20E}"/>
               </a:ext>
             </a:extLst>
           </p:cNvPr>
@@ -15767,7 +15767,7 @@
           <p:cNvPr id="29" name="">
             <a:extLst xmlns:a="http://schemas.openxmlformats.org/drawingml/2006/main">
               <a:ext uri="{FF2B5EF4-FFF2-40B4-BE49-F238E27FC236}">
-                <a16:creationId xmlns:a16="http://schemas.microsoft.com/office/drawing/2014/main" id="{3594E7E7-DEFE-40D7-9AB7-021A50109B40}"/>
+                <a16:creationId xmlns:a16="http://schemas.microsoft.com/office/drawing/2014/main" id="{A8530CA9-1398-42D1-9893-DBADB8E9E27C}"/>
               </a:ext>
             </a:extLst>
           </p:cNvPr>
@@ -15798,7 +15798,7 @@
           <p:cNvPr id="30" name="">
             <a:extLst xmlns:a="http://schemas.openxmlformats.org/drawingml/2006/main">
               <a:ext uri="{FF2B5EF4-FFF2-40B4-BE49-F238E27FC236}">
-                <a16:creationId xmlns:a16="http://schemas.microsoft.com/office/drawing/2014/main" id="{ED9D839B-E7CB-4135-B91C-8BF600E60B70}"/>
+                <a16:creationId xmlns:a16="http://schemas.microsoft.com/office/drawing/2014/main" id="{CA18BCFB-36CC-463B-B433-A5B176289F0B}"/>
               </a:ext>
             </a:extLst>
           </p:cNvPr>
@@ -15829,7 +15829,7 @@
           <p:cNvPr id="31" name="">
             <a:extLst xmlns:a="http://schemas.openxmlformats.org/drawingml/2006/main">
               <a:ext uri="{FF2B5EF4-FFF2-40B4-BE49-F238E27FC236}">
-                <a16:creationId xmlns:a16="http://schemas.microsoft.com/office/drawing/2014/main" id="{FF68CEC3-5E62-4C2F-A7F3-5FFB1401DE25}"/>
+                <a16:creationId xmlns:a16="http://schemas.microsoft.com/office/drawing/2014/main" id="{6148E710-737B-4200-9111-433E77DEE62A}"/>
               </a:ext>
             </a:extLst>
           </p:cNvPr>
@@ -15860,7 +15860,7 @@
           <p:cNvPr id="32" name="">
             <a:extLst xmlns:a="http://schemas.openxmlformats.org/drawingml/2006/main">
               <a:ext uri="{FF2B5EF4-FFF2-40B4-BE49-F238E27FC236}">
-                <a16:creationId xmlns:a16="http://schemas.microsoft.com/office/drawing/2014/main" id="{33F29D8D-D23C-4DFA-8F52-5DD1D91C3183}"/>
+                <a16:creationId xmlns:a16="http://schemas.microsoft.com/office/drawing/2014/main" id="{1BB070EA-4C9B-4FC5-B6EE-E4BBC9283540}"/>
               </a:ext>
             </a:extLst>
           </p:cNvPr>
@@ -15916,7 +15916,7 @@
           <p:cNvPr id="33" name="">
             <a:extLst xmlns:a="http://schemas.openxmlformats.org/drawingml/2006/main">
               <a:ext uri="{FF2B5EF4-FFF2-40B4-BE49-F238E27FC236}">
-                <a16:creationId xmlns:a16="http://schemas.microsoft.com/office/drawing/2014/main" id="{F1777B8C-8FA4-4BCF-87B8-C411EB347F7D}"/>
+                <a16:creationId xmlns:a16="http://schemas.microsoft.com/office/drawing/2014/main" id="{1B9646F2-2B61-4828-AAAA-ED8286FF5312}"/>
               </a:ext>
             </a:extLst>
           </p:cNvPr>
@@ -15995,7 +15995,7 @@
           <p:cNvPr id="34" name="">
             <a:extLst xmlns:a="http://schemas.openxmlformats.org/drawingml/2006/main">
               <a:ext uri="{FF2B5EF4-FFF2-40B4-BE49-F238E27FC236}">
-                <a16:creationId xmlns:a16="http://schemas.microsoft.com/office/drawing/2014/main" id="{1123564B-B853-4554-9B59-A72B4154AE3A}"/>
+                <a16:creationId xmlns:a16="http://schemas.microsoft.com/office/drawing/2014/main" id="{4E8D7D82-36FC-43AA-9385-A3B0577EC7CA}"/>
               </a:ext>
             </a:extLst>
           </p:cNvPr>
@@ -16074,7 +16074,7 @@
           <p:cNvPr id="35" name="">
             <a:extLst xmlns:a="http://schemas.openxmlformats.org/drawingml/2006/main">
               <a:ext uri="{FF2B5EF4-FFF2-40B4-BE49-F238E27FC236}">
-                <a16:creationId xmlns:a16="http://schemas.microsoft.com/office/drawing/2014/main" id="{55D8DA07-BA35-44CC-97D3-FFD18371D790}"/>
+                <a16:creationId xmlns:a16="http://schemas.microsoft.com/office/drawing/2014/main" id="{8CE56B04-0234-4A68-8A40-AB13FA0C8DC4}"/>
               </a:ext>
             </a:extLst>
           </p:cNvPr>
@@ -16105,7 +16105,7 @@
           <p:cNvPr id="36" name="">
             <a:extLst xmlns:a="http://schemas.openxmlformats.org/drawingml/2006/main">
               <a:ext uri="{FF2B5EF4-FFF2-40B4-BE49-F238E27FC236}">
-                <a16:creationId xmlns:a16="http://schemas.microsoft.com/office/drawing/2014/main" id="{CF95AD4A-F7AB-4302-AF37-2538A0102D40}"/>
+                <a16:creationId xmlns:a16="http://schemas.microsoft.com/office/drawing/2014/main" id="{9EC2B32A-D53A-42C9-A171-B3C125E12F6F}"/>
               </a:ext>
             </a:extLst>
           </p:cNvPr>
@@ -16161,7 +16161,7 @@
           <p:cNvPr id="37" name="">
             <a:extLst xmlns:a="http://schemas.openxmlformats.org/drawingml/2006/main">
               <a:ext uri="{FF2B5EF4-FFF2-40B4-BE49-F238E27FC236}">
-                <a16:creationId xmlns:a16="http://schemas.microsoft.com/office/drawing/2014/main" id="{8F744EF8-EE71-4CEF-98BA-25D05FB1FAE4}"/>
+                <a16:creationId xmlns:a16="http://schemas.microsoft.com/office/drawing/2014/main" id="{D4137AD4-6DB9-42A2-A6DB-139398FD9A1D}"/>
               </a:ext>
             </a:extLst>
           </p:cNvPr>
@@ -16217,7 +16217,7 @@
           <p:cNvPr id="38" name="">
             <a:extLst xmlns:a="http://schemas.openxmlformats.org/drawingml/2006/main">
               <a:ext uri="{FF2B5EF4-FFF2-40B4-BE49-F238E27FC236}">
-                <a16:creationId xmlns:a16="http://schemas.microsoft.com/office/drawing/2014/main" id="{27B41D5E-2515-496A-9776-4647AE833B76}"/>
+                <a16:creationId xmlns:a16="http://schemas.microsoft.com/office/drawing/2014/main" id="{8CA1AE64-067D-4EFA-9D9E-AC26921ACB30}"/>
               </a:ext>
             </a:extLst>
           </p:cNvPr>
@@ -16273,7 +16273,7 @@
           <p:cNvPr id="39" name="">
             <a:extLst xmlns:a="http://schemas.openxmlformats.org/drawingml/2006/main">
               <a:ext uri="{FF2B5EF4-FFF2-40B4-BE49-F238E27FC236}">
-                <a16:creationId xmlns:a16="http://schemas.microsoft.com/office/drawing/2014/main" id="{88D14149-1457-4C3D-82BD-E22C299380CB}"/>
+                <a16:creationId xmlns:a16="http://schemas.microsoft.com/office/drawing/2014/main" id="{7E98FE53-B1D9-4FFC-B7E8-8007A260F785}"/>
               </a:ext>
             </a:extLst>
           </p:cNvPr>
@@ -16329,7 +16329,7 @@
           <p:cNvPr id="40" name="">
             <a:extLst xmlns:a="http://schemas.openxmlformats.org/drawingml/2006/main">
               <a:ext uri="{FF2B5EF4-FFF2-40B4-BE49-F238E27FC236}">
-                <a16:creationId xmlns:a16="http://schemas.microsoft.com/office/drawing/2014/main" id="{DDDA19BB-85C9-4934-9AE8-BC9C7DBF5DB1}"/>
+                <a16:creationId xmlns:a16="http://schemas.microsoft.com/office/drawing/2014/main" id="{D25BA34D-6CB2-491D-A649-20F3AAFBAA52}"/>
               </a:ext>
             </a:extLst>
           </p:cNvPr>
@@ -16385,7 +16385,7 @@
           <p:cNvPr id="41" name="">
             <a:extLst xmlns:a="http://schemas.openxmlformats.org/drawingml/2006/main">
               <a:ext uri="{FF2B5EF4-FFF2-40B4-BE49-F238E27FC236}">
-                <a16:creationId xmlns:a16="http://schemas.microsoft.com/office/drawing/2014/main" id="{8AF5DED4-6F9C-4071-9AAF-6A3476CD8FFF}"/>
+                <a16:creationId xmlns:a16="http://schemas.microsoft.com/office/drawing/2014/main" id="{A54B8D1B-4F97-40BE-85C6-8B17A879CADE}"/>
               </a:ext>
             </a:extLst>
           </p:cNvPr>
@@ -16441,7 +16441,7 @@
           <p:cNvPr id="42" name="">
             <a:extLst xmlns:a="http://schemas.openxmlformats.org/drawingml/2006/main">
               <a:ext uri="{FF2B5EF4-FFF2-40B4-BE49-F238E27FC236}">
-                <a16:creationId xmlns:a16="http://schemas.microsoft.com/office/drawing/2014/main" id="{8F68B1A3-8CA2-4240-AA3C-2ED13BA73711}"/>
+                <a16:creationId xmlns:a16="http://schemas.microsoft.com/office/drawing/2014/main" id="{A47A062A-B4F1-4C6D-8A8F-854F296260CD}"/>
               </a:ext>
             </a:extLst>
           </p:cNvPr>
@@ -16497,7 +16497,7 @@
           <p:cNvPr id="43" name="">
             <a:extLst xmlns:a="http://schemas.openxmlformats.org/drawingml/2006/main">
               <a:ext uri="{FF2B5EF4-FFF2-40B4-BE49-F238E27FC236}">
-                <a16:creationId xmlns:a16="http://schemas.microsoft.com/office/drawing/2014/main" id="{A6B24F27-5862-4378-84FA-BC0651308047}"/>
+                <a16:creationId xmlns:a16="http://schemas.microsoft.com/office/drawing/2014/main" id="{F900FD59-F8B2-4F61-A5E5-335FDCA64799}"/>
               </a:ext>
             </a:extLst>
           </p:cNvPr>
@@ -16553,7 +16553,7 @@
           <p:cNvPr id="44" name="">
             <a:extLst xmlns:a="http://schemas.openxmlformats.org/drawingml/2006/main">
               <a:ext uri="{FF2B5EF4-FFF2-40B4-BE49-F238E27FC236}">
-                <a16:creationId xmlns:a16="http://schemas.microsoft.com/office/drawing/2014/main" id="{4232AE7D-B626-4709-968C-A2E8106E0ECF}"/>
+                <a16:creationId xmlns:a16="http://schemas.microsoft.com/office/drawing/2014/main" id="{AC5831EB-0316-427A-99FD-FAE2FE7F0346}"/>
               </a:ext>
             </a:extLst>
           </p:cNvPr>
@@ -16588,7 +16588,7 @@
           <p:cNvPr id="45" name="">
             <a:extLst xmlns:a="http://schemas.openxmlformats.org/drawingml/2006/main">
               <a:ext uri="{FF2B5EF4-FFF2-40B4-BE49-F238E27FC236}">
-                <a16:creationId xmlns:a16="http://schemas.microsoft.com/office/drawing/2014/main" id="{75B1CD76-7FB0-48B5-83DD-259C89B62899}"/>
+                <a16:creationId xmlns:a16="http://schemas.microsoft.com/office/drawing/2014/main" id="{760EC442-2A75-4855-9E7C-19CA0F077148}"/>
               </a:ext>
             </a:extLst>
           </p:cNvPr>
@@ -16644,7 +16644,7 @@
           <p:cNvPr id="46" name="">
             <a:extLst xmlns:a="http://schemas.openxmlformats.org/drawingml/2006/main">
               <a:ext uri="{FF2B5EF4-FFF2-40B4-BE49-F238E27FC236}">
-                <a16:creationId xmlns:a16="http://schemas.microsoft.com/office/drawing/2014/main" id="{D4084D58-94D2-4BF4-937D-EB7DF0B8CA06}"/>
+                <a16:creationId xmlns:a16="http://schemas.microsoft.com/office/drawing/2014/main" id="{B1927A63-C90E-4B26-B541-6782D4E480EE}"/>
               </a:ext>
             </a:extLst>
           </p:cNvPr>
@@ -16698,7 +16698,7 @@
     </p:spTree>
     <p:extLst>
       <p:ext uri="{BB962C8B-B14F-4D97-AF65-F5344CB8AC3E}">
-        <p14:creationId xmlns:p14="http://schemas.microsoft.com/office/powerpoint/2010/main" val="2066834448"/>
+        <p14:creationId xmlns:p14="http://schemas.microsoft.com/office/powerpoint/2010/main" val="318587491"/>
       </p:ext>
     </p:extLst>
   </p:cSld>
@@ -16729,7 +16729,7 @@
           <p:cNvPr id="1" name="">
             <a:extLst xmlns:a="http://schemas.openxmlformats.org/drawingml/2006/main">
               <a:ext uri="{FF2B5EF4-FFF2-40B4-BE49-F238E27FC236}">
-                <a16:creationId xmlns:a16="http://schemas.microsoft.com/office/drawing/2014/main" id="{E39D2DA2-0641-4D9E-934F-AE0577D09385}"/>
+                <a16:creationId xmlns:a16="http://schemas.microsoft.com/office/drawing/2014/main" id="{A219F5D9-2BF3-4F54-89AA-E57BDFE56BB1}"/>
               </a:ext>
             </a:extLst>
           </p:cNvPr>
@@ -16760,7 +16760,7 @@
           <p:cNvPr id="2" name="">
             <a:extLst xmlns:a="http://schemas.openxmlformats.org/drawingml/2006/main">
               <a:ext uri="{FF2B5EF4-FFF2-40B4-BE49-F238E27FC236}">
-                <a16:creationId xmlns:a16="http://schemas.microsoft.com/office/drawing/2014/main" id="{BA8A4F90-582D-43D9-844A-A92CCA2C4642}"/>
+                <a16:creationId xmlns:a16="http://schemas.microsoft.com/office/drawing/2014/main" id="{D6217FD6-CE58-4A4F-8BB1-058CE2649F6D}"/>
               </a:ext>
             </a:extLst>
           </p:cNvPr>
@@ -16816,7 +16816,7 @@
           <p:cNvPr id="3" name="">
             <a:extLst xmlns:a="http://schemas.openxmlformats.org/drawingml/2006/main">
               <a:ext uri="{FF2B5EF4-FFF2-40B4-BE49-F238E27FC236}">
-                <a16:creationId xmlns:a16="http://schemas.microsoft.com/office/drawing/2014/main" id="{16FC16FF-A8FA-4CC2-8398-42C1D24F2090}"/>
+                <a16:creationId xmlns:a16="http://schemas.microsoft.com/office/drawing/2014/main" id="{4F59F94E-108B-4345-8254-E34193E98F48}"/>
               </a:ext>
             </a:extLst>
           </p:cNvPr>
@@ -16872,7 +16872,7 @@
           <p:cNvPr id="4" name="">
             <a:extLst xmlns:a="http://schemas.openxmlformats.org/drawingml/2006/main">
               <a:ext uri="{FF2B5EF4-FFF2-40B4-BE49-F238E27FC236}">
-                <a16:creationId xmlns:a16="http://schemas.microsoft.com/office/drawing/2014/main" id="{BECF3AC8-00AC-42BC-A92C-6F5573C64ED9}"/>
+                <a16:creationId xmlns:a16="http://schemas.microsoft.com/office/drawing/2014/main" id="{E0D6A40B-7C2F-45AE-8BAF-F61123620916}"/>
               </a:ext>
             </a:extLst>
           </p:cNvPr>
@@ -16928,7 +16928,7 @@
           <p:cNvPr id="5" name="">
             <a:extLst xmlns:a="http://schemas.openxmlformats.org/drawingml/2006/main">
               <a:ext uri="{FF2B5EF4-FFF2-40B4-BE49-F238E27FC236}">
-                <a16:creationId xmlns:a16="http://schemas.microsoft.com/office/drawing/2014/main" id="{013AC8E7-74FE-424B-AD64-C3A30BC372F0}"/>
+                <a16:creationId xmlns:a16="http://schemas.microsoft.com/office/drawing/2014/main" id="{7165775F-C766-42D2-B5D1-56DF63F007CC}"/>
               </a:ext>
             </a:extLst>
           </p:cNvPr>
@@ -16984,7 +16984,7 @@
           <p:cNvPr id="6" name="">
             <a:extLst xmlns:a="http://schemas.openxmlformats.org/drawingml/2006/main">
               <a:ext uri="{FF2B5EF4-FFF2-40B4-BE49-F238E27FC236}">
-                <a16:creationId xmlns:a16="http://schemas.microsoft.com/office/drawing/2014/main" id="{C89510F7-8DB0-4E19-A842-30B2932EE923}"/>
+                <a16:creationId xmlns:a16="http://schemas.microsoft.com/office/drawing/2014/main" id="{6CCD32B9-AEBF-4D10-BDA3-5EEAC7B15B22}"/>
               </a:ext>
             </a:extLst>
           </p:cNvPr>
@@ -17040,7 +17040,7 @@
           <p:cNvPr id="7" name="">
             <a:extLst xmlns:a="http://schemas.openxmlformats.org/drawingml/2006/main">
               <a:ext uri="{FF2B5EF4-FFF2-40B4-BE49-F238E27FC236}">
-                <a16:creationId xmlns:a16="http://schemas.microsoft.com/office/drawing/2014/main" id="{E70DE23F-C198-4BA9-93AD-B1B270F284DE}"/>
+                <a16:creationId xmlns:a16="http://schemas.microsoft.com/office/drawing/2014/main" id="{24B24C78-9284-474F-AC5A-8F46A1A2B3B4}"/>
               </a:ext>
             </a:extLst>
           </p:cNvPr>
@@ -17071,7 +17071,7 @@
           <p:cNvPr id="8" name="">
             <a:extLst xmlns:a="http://schemas.openxmlformats.org/drawingml/2006/main">
               <a:ext uri="{FF2B5EF4-FFF2-40B4-BE49-F238E27FC236}">
-                <a16:creationId xmlns:a16="http://schemas.microsoft.com/office/drawing/2014/main" id="{F2BDBC0A-7BA6-4050-BF61-520DE5656B36}"/>
+                <a16:creationId xmlns:a16="http://schemas.microsoft.com/office/drawing/2014/main" id="{0E87B7AF-90EF-4050-93C1-444ECB207E3D}"/>
               </a:ext>
             </a:extLst>
           </p:cNvPr>
@@ -17127,7 +17127,7 @@
           <p:cNvPr id="9" name="">
             <a:extLst xmlns:a="http://schemas.openxmlformats.org/drawingml/2006/main">
               <a:ext uri="{FF2B5EF4-FFF2-40B4-BE49-F238E27FC236}">
-                <a16:creationId xmlns:a16="http://schemas.microsoft.com/office/drawing/2014/main" id="{2DE3DCC8-3760-4278-914C-AD015A37C173}"/>
+                <a16:creationId xmlns:a16="http://schemas.microsoft.com/office/drawing/2014/main" id="{E23F763C-A484-4277-B6B3-458475DD2724}"/>
               </a:ext>
             </a:extLst>
           </p:cNvPr>
@@ -17183,7 +17183,7 @@
           <p:cNvPr id="10" name="">
             <a:extLst xmlns:a="http://schemas.openxmlformats.org/drawingml/2006/main">
               <a:ext uri="{FF2B5EF4-FFF2-40B4-BE49-F238E27FC236}">
-                <a16:creationId xmlns:a16="http://schemas.microsoft.com/office/drawing/2014/main" id="{B791B1DF-23E8-426C-AA1A-928667722676}"/>
+                <a16:creationId xmlns:a16="http://schemas.microsoft.com/office/drawing/2014/main" id="{E53AE086-854B-46F7-80E9-3256A4E3BC64}"/>
               </a:ext>
             </a:extLst>
           </p:cNvPr>
@@ -17239,7 +17239,7 @@
           <p:cNvPr id="11" name="">
             <a:extLst xmlns:a="http://schemas.openxmlformats.org/drawingml/2006/main">
               <a:ext uri="{FF2B5EF4-FFF2-40B4-BE49-F238E27FC236}">
-                <a16:creationId xmlns:a16="http://schemas.microsoft.com/office/drawing/2014/main" id="{EE66FCFF-0861-40C5-A94B-96E7915EE355}"/>
+                <a16:creationId xmlns:a16="http://schemas.microsoft.com/office/drawing/2014/main" id="{88BC8C0D-9577-4E67-8F92-4DFE04DE3C7E}"/>
               </a:ext>
             </a:extLst>
           </p:cNvPr>
@@ -17270,7 +17270,7 @@
           <p:cNvPr id="12" name="">
             <a:extLst xmlns:a="http://schemas.openxmlformats.org/drawingml/2006/main">
               <a:ext uri="{FF2B5EF4-FFF2-40B4-BE49-F238E27FC236}">
-                <a16:creationId xmlns:a16="http://schemas.microsoft.com/office/drawing/2014/main" id="{1245E5EE-54F6-423E-9961-40974A2E4102}"/>
+                <a16:creationId xmlns:a16="http://schemas.microsoft.com/office/drawing/2014/main" id="{BFFED81B-A445-4F79-88D8-32F6153EA502}"/>
               </a:ext>
             </a:extLst>
           </p:cNvPr>
@@ -17326,7 +17326,7 @@
           <p:cNvPr id="13" name="">
             <a:extLst xmlns:a="http://schemas.openxmlformats.org/drawingml/2006/main">
               <a:ext uri="{FF2B5EF4-FFF2-40B4-BE49-F238E27FC236}">
-                <a16:creationId xmlns:a16="http://schemas.microsoft.com/office/drawing/2014/main" id="{7BD5DA66-23CE-43F8-8752-4F8E420E5488}"/>
+                <a16:creationId xmlns:a16="http://schemas.microsoft.com/office/drawing/2014/main" id="{432E4649-709F-4D3B-8128-39E73544C594}"/>
               </a:ext>
             </a:extLst>
           </p:cNvPr>
@@ -17382,7 +17382,7 @@
           <p:cNvPr id="14" name="">
             <a:extLst xmlns:a="http://schemas.openxmlformats.org/drawingml/2006/main">
               <a:ext uri="{FF2B5EF4-FFF2-40B4-BE49-F238E27FC236}">
-                <a16:creationId xmlns:a16="http://schemas.microsoft.com/office/drawing/2014/main" id="{0EAE599A-065F-4E6A-A2AF-706D5AF3C603}"/>
+                <a16:creationId xmlns:a16="http://schemas.microsoft.com/office/drawing/2014/main" id="{3B019331-D47A-48C2-B0FE-C85143CC12E8}"/>
               </a:ext>
             </a:extLst>
           </p:cNvPr>
@@ -17438,7 +17438,7 @@
           <p:cNvPr id="15" name="">
             <a:extLst xmlns:a="http://schemas.openxmlformats.org/drawingml/2006/main">
               <a:ext uri="{FF2B5EF4-FFF2-40B4-BE49-F238E27FC236}">
-                <a16:creationId xmlns:a16="http://schemas.microsoft.com/office/drawing/2014/main" id="{0C46E04D-743C-4FB6-9749-93031B429869}"/>
+                <a16:creationId xmlns:a16="http://schemas.microsoft.com/office/drawing/2014/main" id="{C5E49E23-83BB-4A07-BE0A-4BEF4129B6D3}"/>
               </a:ext>
             </a:extLst>
           </p:cNvPr>
@@ -17473,7 +17473,7 @@
           <p:cNvPr id="16" name="">
             <a:extLst xmlns:a="http://schemas.openxmlformats.org/drawingml/2006/main">
               <a:ext uri="{FF2B5EF4-FFF2-40B4-BE49-F238E27FC236}">
-                <a16:creationId xmlns:a16="http://schemas.microsoft.com/office/drawing/2014/main" id="{E3FA660E-00A7-444E-A3FE-FB3CBADFA0E0}"/>
+                <a16:creationId xmlns:a16="http://schemas.microsoft.com/office/drawing/2014/main" id="{44DFF387-5F93-4946-A360-309EA42FE556}"/>
               </a:ext>
             </a:extLst>
           </p:cNvPr>
@@ -17529,7 +17529,7 @@
           <p:cNvPr id="17" name="">
             <a:extLst xmlns:a="http://schemas.openxmlformats.org/drawingml/2006/main">
               <a:ext uri="{FF2B5EF4-FFF2-40B4-BE49-F238E27FC236}">
-                <a16:creationId xmlns:a16="http://schemas.microsoft.com/office/drawing/2014/main" id="{E8B5530C-06CB-4C0A-B466-414C6C8C8BEB}"/>
+                <a16:creationId xmlns:a16="http://schemas.microsoft.com/office/drawing/2014/main" id="{FF52EDF4-5A3A-4D77-B0B8-F36D830C4F11}"/>
               </a:ext>
             </a:extLst>
           </p:cNvPr>
@@ -17585,7 +17585,7 @@
           <p:cNvPr id="18" name="">
             <a:extLst xmlns:a="http://schemas.openxmlformats.org/drawingml/2006/main">
               <a:ext uri="{FF2B5EF4-FFF2-40B4-BE49-F238E27FC236}">
-                <a16:creationId xmlns:a16="http://schemas.microsoft.com/office/drawing/2014/main" id="{4672682E-4151-4E8D-A0F9-865C4E4E7850}"/>
+                <a16:creationId xmlns:a16="http://schemas.microsoft.com/office/drawing/2014/main" id="{71320D5C-7208-4C2D-8103-E21EB0DAC748}"/>
               </a:ext>
             </a:extLst>
           </p:cNvPr>
@@ -17639,7 +17639,7 @@
     </p:spTree>
     <p:extLst>
       <p:ext uri="{BB962C8B-B14F-4D97-AF65-F5344CB8AC3E}">
-        <p14:creationId xmlns:p14="http://schemas.microsoft.com/office/powerpoint/2010/main" val="1864953077"/>
+        <p14:creationId xmlns:p14="http://schemas.microsoft.com/office/powerpoint/2010/main" val="1819760826"/>
       </p:ext>
     </p:extLst>
   </p:cSld>
@@ -17670,7 +17670,7 @@
           <p:cNvPr id="1" name="">
             <a:extLst xmlns:a="http://schemas.openxmlformats.org/drawingml/2006/main">
               <a:ext uri="{FF2B5EF4-FFF2-40B4-BE49-F238E27FC236}">
-                <a16:creationId xmlns:a16="http://schemas.microsoft.com/office/drawing/2014/main" id="{4A0EAB90-EEBE-4C7C-BBBE-242C1C2EF4AC}"/>
+                <a16:creationId xmlns:a16="http://schemas.microsoft.com/office/drawing/2014/main" id="{670E1036-970B-42E5-9EE1-4E96746245E7}"/>
               </a:ext>
             </a:extLst>
           </p:cNvPr>
@@ -17701,7 +17701,7 @@
           <p:cNvPr id="2" name="">
             <a:extLst xmlns:a="http://schemas.openxmlformats.org/drawingml/2006/main">
               <a:ext uri="{FF2B5EF4-FFF2-40B4-BE49-F238E27FC236}">
-                <a16:creationId xmlns:a16="http://schemas.microsoft.com/office/drawing/2014/main" id="{3BE7FE7B-E415-419A-B073-CF3CCE9A8AE7}"/>
+                <a16:creationId xmlns:a16="http://schemas.microsoft.com/office/drawing/2014/main" id="{6E537881-0701-4963-A413-D74811739FF3}"/>
               </a:ext>
             </a:extLst>
           </p:cNvPr>
@@ -17732,7 +17732,7 @@
           <p:cNvPr id="3" name="">
             <a:extLst xmlns:a="http://schemas.openxmlformats.org/drawingml/2006/main">
               <a:ext uri="{FF2B5EF4-FFF2-40B4-BE49-F238E27FC236}">
-                <a16:creationId xmlns:a16="http://schemas.microsoft.com/office/drawing/2014/main" id="{2AB1B76C-4F00-47AC-9C5C-5C72BE702AA0}"/>
+                <a16:creationId xmlns:a16="http://schemas.microsoft.com/office/drawing/2014/main" id="{2E922B7F-71AF-4176-8F3A-C822CBCC1139}"/>
               </a:ext>
             </a:extLst>
           </p:cNvPr>
@@ -17763,7 +17763,7 @@
           <p:cNvPr id="4" name="">
             <a:extLst xmlns:a="http://schemas.openxmlformats.org/drawingml/2006/main">
               <a:ext uri="{FF2B5EF4-FFF2-40B4-BE49-F238E27FC236}">
-                <a16:creationId xmlns:a16="http://schemas.microsoft.com/office/drawing/2014/main" id="{354597E7-9D13-426E-912A-E3639FE8C579}"/>
+                <a16:creationId xmlns:a16="http://schemas.microsoft.com/office/drawing/2014/main" id="{2459920E-3E0A-41BF-85D4-DCC45A7DC18E}"/>
               </a:ext>
             </a:extLst>
           </p:cNvPr>
@@ -17794,7 +17794,7 @@
           <p:cNvPr id="5" name="">
             <a:extLst xmlns:a="http://schemas.openxmlformats.org/drawingml/2006/main">
               <a:ext uri="{FF2B5EF4-FFF2-40B4-BE49-F238E27FC236}">
-                <a16:creationId xmlns:a16="http://schemas.microsoft.com/office/drawing/2014/main" id="{39C99D16-A7BF-4B6B-B389-F121C20EED50}"/>
+                <a16:creationId xmlns:a16="http://schemas.microsoft.com/office/drawing/2014/main" id="{7D741BEC-66CD-4ED8-A72F-5E554F1450CD}"/>
               </a:ext>
             </a:extLst>
           </p:cNvPr>
@@ -17825,7 +17825,7 @@
           <p:cNvPr id="6" name="">
             <a:extLst xmlns:a="http://schemas.openxmlformats.org/drawingml/2006/main">
               <a:ext uri="{FF2B5EF4-FFF2-40B4-BE49-F238E27FC236}">
-                <a16:creationId xmlns:a16="http://schemas.microsoft.com/office/drawing/2014/main" id="{E14DEB92-3C9E-4A21-BED6-B3ADE646FD09}"/>
+                <a16:creationId xmlns:a16="http://schemas.microsoft.com/office/drawing/2014/main" id="{73B1DE96-B8D0-4284-A748-38509B2A623C}"/>
               </a:ext>
             </a:extLst>
           </p:cNvPr>
@@ -17856,7 +17856,7 @@
           <p:cNvPr id="7" name="">
             <a:extLst xmlns:a="http://schemas.openxmlformats.org/drawingml/2006/main">
               <a:ext uri="{FF2B5EF4-FFF2-40B4-BE49-F238E27FC236}">
-                <a16:creationId xmlns:a16="http://schemas.microsoft.com/office/drawing/2014/main" id="{EE2FF0D5-9C06-4E15-BB3F-7FC3C0667926}"/>
+                <a16:creationId xmlns:a16="http://schemas.microsoft.com/office/drawing/2014/main" id="{29FC70F4-C814-48D9-AAA2-F041E985741D}"/>
               </a:ext>
             </a:extLst>
           </p:cNvPr>
@@ -17887,7 +17887,7 @@
           <p:cNvPr id="8" name="">
             <a:extLst xmlns:a="http://schemas.openxmlformats.org/drawingml/2006/main">
               <a:ext uri="{FF2B5EF4-FFF2-40B4-BE49-F238E27FC236}">
-                <a16:creationId xmlns:a16="http://schemas.microsoft.com/office/drawing/2014/main" id="{8BEA2272-4D93-491E-8152-780845B2A1D2}"/>
+                <a16:creationId xmlns:a16="http://schemas.microsoft.com/office/drawing/2014/main" id="{95159601-8611-4005-8DB9-50F48A1585AC}"/>
               </a:ext>
             </a:extLst>
           </p:cNvPr>
@@ -17918,7 +17918,7 @@
           <p:cNvPr id="9" name="">
             <a:extLst xmlns:a="http://schemas.openxmlformats.org/drawingml/2006/main">
               <a:ext uri="{FF2B5EF4-FFF2-40B4-BE49-F238E27FC236}">
-                <a16:creationId xmlns:a16="http://schemas.microsoft.com/office/drawing/2014/main" id="{5339B755-3F87-400A-AF46-3AA17B389194}"/>
+                <a16:creationId xmlns:a16="http://schemas.microsoft.com/office/drawing/2014/main" id="{75B2E319-C789-4AB1-8567-B8F1D774E6AC}"/>
               </a:ext>
             </a:extLst>
           </p:cNvPr>
@@ -17949,7 +17949,7 @@
           <p:cNvPr id="10" name="">
             <a:extLst xmlns:a="http://schemas.openxmlformats.org/drawingml/2006/main">
               <a:ext uri="{FF2B5EF4-FFF2-40B4-BE49-F238E27FC236}">
-                <a16:creationId xmlns:a16="http://schemas.microsoft.com/office/drawing/2014/main" id="{A5C2634C-3258-4C2C-A706-2EBD09A14411}"/>
+                <a16:creationId xmlns:a16="http://schemas.microsoft.com/office/drawing/2014/main" id="{136863E5-F33A-4951-AB1E-45C11FFC6CE0}"/>
               </a:ext>
             </a:extLst>
           </p:cNvPr>
@@ -17980,7 +17980,7 @@
           <p:cNvPr id="11" name="">
             <a:extLst xmlns:a="http://schemas.openxmlformats.org/drawingml/2006/main">
               <a:ext uri="{FF2B5EF4-FFF2-40B4-BE49-F238E27FC236}">
-                <a16:creationId xmlns:a16="http://schemas.microsoft.com/office/drawing/2014/main" id="{8D8440C7-40E1-4928-9806-928972A3B6E2}"/>
+                <a16:creationId xmlns:a16="http://schemas.microsoft.com/office/drawing/2014/main" id="{82ACCF81-7415-47D2-B938-0FEC90735803}"/>
               </a:ext>
             </a:extLst>
           </p:cNvPr>
@@ -18011,7 +18011,7 @@
           <p:cNvPr id="12" name="">
             <a:extLst xmlns:a="http://schemas.openxmlformats.org/drawingml/2006/main">
               <a:ext uri="{FF2B5EF4-FFF2-40B4-BE49-F238E27FC236}">
-                <a16:creationId xmlns:a16="http://schemas.microsoft.com/office/drawing/2014/main" id="{65D289DC-EEE7-4C6B-A322-77BEC7484D13}"/>
+                <a16:creationId xmlns:a16="http://schemas.microsoft.com/office/drawing/2014/main" id="{DAAAC626-1EE7-43B7-AF0C-669D0F7544BD}"/>
               </a:ext>
             </a:extLst>
           </p:cNvPr>
@@ -18042,7 +18042,7 @@
           <p:cNvPr id="13" name="">
             <a:extLst xmlns:a="http://schemas.openxmlformats.org/drawingml/2006/main">
               <a:ext uri="{FF2B5EF4-FFF2-40B4-BE49-F238E27FC236}">
-                <a16:creationId xmlns:a16="http://schemas.microsoft.com/office/drawing/2014/main" id="{3A31107C-4C72-4FC1-B3BC-CA08610A1DD0}"/>
+                <a16:creationId xmlns:a16="http://schemas.microsoft.com/office/drawing/2014/main" id="{7710CB45-A50E-49E0-A093-6A827E2DB7CD}"/>
               </a:ext>
             </a:extLst>
           </p:cNvPr>
@@ -18073,7 +18073,7 @@
           <p:cNvPr id="14" name="">
             <a:extLst xmlns:a="http://schemas.openxmlformats.org/drawingml/2006/main">
               <a:ext uri="{FF2B5EF4-FFF2-40B4-BE49-F238E27FC236}">
-                <a16:creationId xmlns:a16="http://schemas.microsoft.com/office/drawing/2014/main" id="{F1B0B9F7-D985-4F48-B3BC-6D152A394A5A}"/>
+                <a16:creationId xmlns:a16="http://schemas.microsoft.com/office/drawing/2014/main" id="{A9040E8B-BD87-4394-B4C8-10E1D68A810D}"/>
               </a:ext>
             </a:extLst>
           </p:cNvPr>
@@ -18104,7 +18104,7 @@
           <p:cNvPr id="15" name="">
             <a:extLst xmlns:a="http://schemas.openxmlformats.org/drawingml/2006/main">
               <a:ext uri="{FF2B5EF4-FFF2-40B4-BE49-F238E27FC236}">
-                <a16:creationId xmlns:a16="http://schemas.microsoft.com/office/drawing/2014/main" id="{B5E07970-608C-48C1-84E6-B73AD95C75E6}"/>
+                <a16:creationId xmlns:a16="http://schemas.microsoft.com/office/drawing/2014/main" id="{7731F684-0E0E-4F9F-B0B9-26ADDCB1871A}"/>
               </a:ext>
             </a:extLst>
           </p:cNvPr>
@@ -18135,7 +18135,7 @@
           <p:cNvPr id="16" name="">
             <a:extLst xmlns:a="http://schemas.openxmlformats.org/drawingml/2006/main">
               <a:ext uri="{FF2B5EF4-FFF2-40B4-BE49-F238E27FC236}">
-                <a16:creationId xmlns:a16="http://schemas.microsoft.com/office/drawing/2014/main" id="{C6499159-43AD-4568-A07D-1E9582B46A08}"/>
+                <a16:creationId xmlns:a16="http://schemas.microsoft.com/office/drawing/2014/main" id="{CD565B6E-84C2-4174-901D-8268ED986228}"/>
               </a:ext>
             </a:extLst>
           </p:cNvPr>
@@ -18166,7 +18166,7 @@
           <p:cNvPr id="17" name="">
             <a:extLst xmlns:a="http://schemas.openxmlformats.org/drawingml/2006/main">
               <a:ext uri="{FF2B5EF4-FFF2-40B4-BE49-F238E27FC236}">
-                <a16:creationId xmlns:a16="http://schemas.microsoft.com/office/drawing/2014/main" id="{8F8CC169-D4B8-4BF5-8FA3-FD264A1CF33E}"/>
+                <a16:creationId xmlns:a16="http://schemas.microsoft.com/office/drawing/2014/main" id="{2CDECEFD-77A8-4944-A431-A03A1BA52AC2}"/>
               </a:ext>
             </a:extLst>
           </p:cNvPr>
@@ -18197,7 +18197,7 @@
           <p:cNvPr id="18" name="">
             <a:extLst xmlns:a="http://schemas.openxmlformats.org/drawingml/2006/main">
               <a:ext uri="{FF2B5EF4-FFF2-40B4-BE49-F238E27FC236}">
-                <a16:creationId xmlns:a16="http://schemas.microsoft.com/office/drawing/2014/main" id="{8177645B-F528-41C6-8978-775C57350987}"/>
+                <a16:creationId xmlns:a16="http://schemas.microsoft.com/office/drawing/2014/main" id="{2A7CA58A-BF9D-4BE5-A1A6-406B20879E08}"/>
               </a:ext>
             </a:extLst>
           </p:cNvPr>
@@ -18228,7 +18228,7 @@
           <p:cNvPr id="19" name="">
             <a:extLst xmlns:a="http://schemas.openxmlformats.org/drawingml/2006/main">
               <a:ext uri="{FF2B5EF4-FFF2-40B4-BE49-F238E27FC236}">
-                <a16:creationId xmlns:a16="http://schemas.microsoft.com/office/drawing/2014/main" id="{7285E24C-8F94-4EFD-944A-2A38B6308A94}"/>
+                <a16:creationId xmlns:a16="http://schemas.microsoft.com/office/drawing/2014/main" id="{E0D0849B-19D7-40ED-8646-240A3987E21B}"/>
               </a:ext>
             </a:extLst>
           </p:cNvPr>
@@ -18259,7 +18259,7 @@
           <p:cNvPr id="20" name="">
             <a:extLst xmlns:a="http://schemas.openxmlformats.org/drawingml/2006/main">
               <a:ext uri="{FF2B5EF4-FFF2-40B4-BE49-F238E27FC236}">
-                <a16:creationId xmlns:a16="http://schemas.microsoft.com/office/drawing/2014/main" id="{63584380-1C98-46B7-AA26-BD70E0989D7B}"/>
+                <a16:creationId xmlns:a16="http://schemas.microsoft.com/office/drawing/2014/main" id="{D9C139C5-D961-41A5-94AE-E759218C2C3D}"/>
               </a:ext>
             </a:extLst>
           </p:cNvPr>
@@ -18290,7 +18290,7 @@
           <p:cNvPr id="21" name="">
             <a:extLst xmlns:a="http://schemas.openxmlformats.org/drawingml/2006/main">
               <a:ext uri="{FF2B5EF4-FFF2-40B4-BE49-F238E27FC236}">
-                <a16:creationId xmlns:a16="http://schemas.microsoft.com/office/drawing/2014/main" id="{094F04E9-66CB-4884-9FA2-D24EC3268B25}"/>
+                <a16:creationId xmlns:a16="http://schemas.microsoft.com/office/drawing/2014/main" id="{E2573549-1F6A-4536-AF1E-EDC01EF3B5A6}"/>
               </a:ext>
             </a:extLst>
           </p:cNvPr>
@@ -18321,7 +18321,7 @@
           <p:cNvPr id="22" name="">
             <a:extLst xmlns:a="http://schemas.openxmlformats.org/drawingml/2006/main">
               <a:ext uri="{FF2B5EF4-FFF2-40B4-BE49-F238E27FC236}">
-                <a16:creationId xmlns:a16="http://schemas.microsoft.com/office/drawing/2014/main" id="{0EEFDD14-6630-4273-83EA-ECF557C748EC}"/>
+                <a16:creationId xmlns:a16="http://schemas.microsoft.com/office/drawing/2014/main" id="{AD344592-F6B9-4490-B6CE-076300DF5533}"/>
               </a:ext>
             </a:extLst>
           </p:cNvPr>
@@ -18352,7 +18352,7 @@
           <p:cNvPr id="23" name="">
             <a:extLst xmlns:a="http://schemas.openxmlformats.org/drawingml/2006/main">
               <a:ext uri="{FF2B5EF4-FFF2-40B4-BE49-F238E27FC236}">
-                <a16:creationId xmlns:a16="http://schemas.microsoft.com/office/drawing/2014/main" id="{404FD973-1890-4007-A2FD-5078BA78B1C6}"/>
+                <a16:creationId xmlns:a16="http://schemas.microsoft.com/office/drawing/2014/main" id="{32639762-37B5-4BFA-9DD8-54BBFF5CB5DE}"/>
               </a:ext>
             </a:extLst>
           </p:cNvPr>
@@ -18383,7 +18383,7 @@
           <p:cNvPr id="24" name="">
             <a:extLst xmlns:a="http://schemas.openxmlformats.org/drawingml/2006/main">
               <a:ext uri="{FF2B5EF4-FFF2-40B4-BE49-F238E27FC236}">
-                <a16:creationId xmlns:a16="http://schemas.microsoft.com/office/drawing/2014/main" id="{21EF0B9E-3AC3-499E-B7B6-7A48951EC2FB}"/>
+                <a16:creationId xmlns:a16="http://schemas.microsoft.com/office/drawing/2014/main" id="{517726B8-09C2-47E2-B5A8-7B3C6FC311D4}"/>
               </a:ext>
             </a:extLst>
           </p:cNvPr>
@@ -18414,7 +18414,7 @@
           <p:cNvPr id="25" name="">
             <a:extLst xmlns:a="http://schemas.openxmlformats.org/drawingml/2006/main">
               <a:ext uri="{FF2B5EF4-FFF2-40B4-BE49-F238E27FC236}">
-                <a16:creationId xmlns:a16="http://schemas.microsoft.com/office/drawing/2014/main" id="{589186C7-7243-43B2-A530-7061F1058A36}"/>
+                <a16:creationId xmlns:a16="http://schemas.microsoft.com/office/drawing/2014/main" id="{74E5983D-3B43-485E-ACE7-07991A55F507}"/>
               </a:ext>
             </a:extLst>
           </p:cNvPr>
@@ -18445,7 +18445,7 @@
           <p:cNvPr id="26" name="">
             <a:extLst xmlns:a="http://schemas.openxmlformats.org/drawingml/2006/main">
               <a:ext uri="{FF2B5EF4-FFF2-40B4-BE49-F238E27FC236}">
-                <a16:creationId xmlns:a16="http://schemas.microsoft.com/office/drawing/2014/main" id="{ED6DB74F-405A-4F29-805C-E350B89D03B4}"/>
+                <a16:creationId xmlns:a16="http://schemas.microsoft.com/office/drawing/2014/main" id="{EBC57464-862B-46CC-8E84-A68214B493E5}"/>
               </a:ext>
             </a:extLst>
           </p:cNvPr>
@@ -18476,7 +18476,7 @@
           <p:cNvPr id="27" name="">
             <a:extLst xmlns:a="http://schemas.openxmlformats.org/drawingml/2006/main">
               <a:ext uri="{FF2B5EF4-FFF2-40B4-BE49-F238E27FC236}">
-                <a16:creationId xmlns:a16="http://schemas.microsoft.com/office/drawing/2014/main" id="{4E356327-552A-4776-80EA-9F16CFE76B48}"/>
+                <a16:creationId xmlns:a16="http://schemas.microsoft.com/office/drawing/2014/main" id="{2E6CD425-519E-46CF-97B8-724C8828CE8B}"/>
               </a:ext>
             </a:extLst>
           </p:cNvPr>
@@ -18507,7 +18507,7 @@
           <p:cNvPr id="28" name="">
             <a:extLst xmlns:a="http://schemas.openxmlformats.org/drawingml/2006/main">
               <a:ext uri="{FF2B5EF4-FFF2-40B4-BE49-F238E27FC236}">
-                <a16:creationId xmlns:a16="http://schemas.microsoft.com/office/drawing/2014/main" id="{7A81AA02-3F38-47A1-8650-41C5A49DA9C5}"/>
+                <a16:creationId xmlns:a16="http://schemas.microsoft.com/office/drawing/2014/main" id="{49F86EF4-88F5-4A08-9409-DDC3D70D8284}"/>
               </a:ext>
             </a:extLst>
           </p:cNvPr>
@@ -18538,7 +18538,7 @@
           <p:cNvPr id="29" name="">
             <a:extLst xmlns:a="http://schemas.openxmlformats.org/drawingml/2006/main">
               <a:ext uri="{FF2B5EF4-FFF2-40B4-BE49-F238E27FC236}">
-                <a16:creationId xmlns:a16="http://schemas.microsoft.com/office/drawing/2014/main" id="{9736F0CE-61DA-4EB6-8844-07F457FE75BB}"/>
+                <a16:creationId xmlns:a16="http://schemas.microsoft.com/office/drawing/2014/main" id="{AFDAA95A-227A-4AD6-9CEE-57B048BAD7BC}"/>
               </a:ext>
             </a:extLst>
           </p:cNvPr>
@@ -18569,7 +18569,7 @@
           <p:cNvPr id="30" name="">
             <a:extLst xmlns:a="http://schemas.openxmlformats.org/drawingml/2006/main">
               <a:ext uri="{FF2B5EF4-FFF2-40B4-BE49-F238E27FC236}">
-                <a16:creationId xmlns:a16="http://schemas.microsoft.com/office/drawing/2014/main" id="{FF58E506-C72E-4196-B620-919AEA7BF82A}"/>
+                <a16:creationId xmlns:a16="http://schemas.microsoft.com/office/drawing/2014/main" id="{5F6C9468-8713-482D-9A11-F1574EF35AE0}"/>
               </a:ext>
             </a:extLst>
           </p:cNvPr>
@@ -18600,7 +18600,7 @@
           <p:cNvPr id="31" name="">
             <a:extLst xmlns:a="http://schemas.openxmlformats.org/drawingml/2006/main">
               <a:ext uri="{FF2B5EF4-FFF2-40B4-BE49-F238E27FC236}">
-                <a16:creationId xmlns:a16="http://schemas.microsoft.com/office/drawing/2014/main" id="{75B20D04-C7F4-41CB-B3B5-2758AE439B79}"/>
+                <a16:creationId xmlns:a16="http://schemas.microsoft.com/office/drawing/2014/main" id="{1591BD30-FC05-4869-A920-A7CD855CBFA2}"/>
               </a:ext>
             </a:extLst>
           </p:cNvPr>
@@ -18631,7 +18631,7 @@
           <p:cNvPr id="32" name="">
             <a:extLst xmlns:a="http://schemas.openxmlformats.org/drawingml/2006/main">
               <a:ext uri="{FF2B5EF4-FFF2-40B4-BE49-F238E27FC236}">
-                <a16:creationId xmlns:a16="http://schemas.microsoft.com/office/drawing/2014/main" id="{2AA07553-D255-44AB-80B5-8301400A134A}"/>
+                <a16:creationId xmlns:a16="http://schemas.microsoft.com/office/drawing/2014/main" id="{97E51E17-035C-475D-A447-77969D549F94}"/>
               </a:ext>
             </a:extLst>
           </p:cNvPr>
@@ -18687,7 +18687,7 @@
           <p:cNvPr id="33" name="">
             <a:extLst xmlns:a="http://schemas.openxmlformats.org/drawingml/2006/main">
               <a:ext uri="{FF2B5EF4-FFF2-40B4-BE49-F238E27FC236}">
-                <a16:creationId xmlns:a16="http://schemas.microsoft.com/office/drawing/2014/main" id="{35BD50D6-1086-4FA4-8222-D516082E9CD5}"/>
+                <a16:creationId xmlns:a16="http://schemas.microsoft.com/office/drawing/2014/main" id="{1AF27EE4-CD89-4F49-8498-FCD474C48EBB}"/>
               </a:ext>
             </a:extLst>
           </p:cNvPr>
@@ -18743,7 +18743,7 @@
           <p:cNvPr id="34" name="">
             <a:extLst xmlns:a="http://schemas.openxmlformats.org/drawingml/2006/main">
               <a:ext uri="{FF2B5EF4-FFF2-40B4-BE49-F238E27FC236}">
-                <a16:creationId xmlns:a16="http://schemas.microsoft.com/office/drawing/2014/main" id="{9B4D52D6-EFF3-4BDB-9EA8-829E5A5E01A9}"/>
+                <a16:creationId xmlns:a16="http://schemas.microsoft.com/office/drawing/2014/main" id="{6ECEC79A-3F41-4CD7-B5F4-3288E6965FB5}"/>
               </a:ext>
             </a:extLst>
           </p:cNvPr>
@@ -18799,7 +18799,7 @@
           <p:cNvPr id="35" name="">
             <a:extLst xmlns:a="http://schemas.openxmlformats.org/drawingml/2006/main">
               <a:ext uri="{FF2B5EF4-FFF2-40B4-BE49-F238E27FC236}">
-                <a16:creationId xmlns:a16="http://schemas.microsoft.com/office/drawing/2014/main" id="{83470174-D27D-45A9-A807-88EAEC8ADF21}"/>
+                <a16:creationId xmlns:a16="http://schemas.microsoft.com/office/drawing/2014/main" id="{0FD36D7E-0BA2-405A-A079-A8D12145C97F}"/>
               </a:ext>
             </a:extLst>
           </p:cNvPr>
@@ -18834,7 +18834,7 @@
           <p:cNvPr id="36" name="">
             <a:extLst xmlns:a="http://schemas.openxmlformats.org/drawingml/2006/main">
               <a:ext uri="{FF2B5EF4-FFF2-40B4-BE49-F238E27FC236}">
-                <a16:creationId xmlns:a16="http://schemas.microsoft.com/office/drawing/2014/main" id="{1B7CF611-8C52-4684-A5BC-866496FB27C3}"/>
+                <a16:creationId xmlns:a16="http://schemas.microsoft.com/office/drawing/2014/main" id="{18160B3F-D42C-428A-A047-7D267A1CC076}"/>
               </a:ext>
             </a:extLst>
           </p:cNvPr>
@@ -18890,7 +18890,7 @@
           <p:cNvPr id="37" name="">
             <a:extLst xmlns:a="http://schemas.openxmlformats.org/drawingml/2006/main">
               <a:ext uri="{FF2B5EF4-FFF2-40B4-BE49-F238E27FC236}">
-                <a16:creationId xmlns:a16="http://schemas.microsoft.com/office/drawing/2014/main" id="{6D018255-1B05-458F-A3B9-24B8EC3B0963}"/>
+                <a16:creationId xmlns:a16="http://schemas.microsoft.com/office/drawing/2014/main" id="{68712976-C64D-4018-8E49-83E4F83C661B}"/>
               </a:ext>
             </a:extLst>
           </p:cNvPr>
@@ -18946,7 +18946,7 @@
           <p:cNvPr id="38" name="">
             <a:extLst xmlns:a="http://schemas.openxmlformats.org/drawingml/2006/main">
               <a:ext uri="{FF2B5EF4-FFF2-40B4-BE49-F238E27FC236}">
-                <a16:creationId xmlns:a16="http://schemas.microsoft.com/office/drawing/2014/main" id="{790D5964-EF54-4182-AEE1-D40885C68C35}"/>
+                <a16:creationId xmlns:a16="http://schemas.microsoft.com/office/drawing/2014/main" id="{D0E3F77B-4DB0-460A-86B6-76A1B78BEE65}"/>
               </a:ext>
             </a:extLst>
           </p:cNvPr>
@@ -19002,7 +19002,7 @@
           <p:cNvPr id="39" name="">
             <a:extLst xmlns:a="http://schemas.openxmlformats.org/drawingml/2006/main">
               <a:ext uri="{FF2B5EF4-FFF2-40B4-BE49-F238E27FC236}">
-                <a16:creationId xmlns:a16="http://schemas.microsoft.com/office/drawing/2014/main" id="{BD7E8704-46FA-40C5-8DE2-4ABD1477EF82}"/>
+                <a16:creationId xmlns:a16="http://schemas.microsoft.com/office/drawing/2014/main" id="{CA367908-FC4A-4164-9867-6D2CAE579110}"/>
               </a:ext>
             </a:extLst>
           </p:cNvPr>
@@ -19033,7 +19033,7 @@
           <p:cNvPr id="40" name="">
             <a:extLst xmlns:a="http://schemas.openxmlformats.org/drawingml/2006/main">
               <a:ext uri="{FF2B5EF4-FFF2-40B4-BE49-F238E27FC236}">
-                <a16:creationId xmlns:a16="http://schemas.microsoft.com/office/drawing/2014/main" id="{EE0A7967-56EF-434A-87A9-0B41F9D99306}"/>
+                <a16:creationId xmlns:a16="http://schemas.microsoft.com/office/drawing/2014/main" id="{08849E7F-D712-48C3-892E-1123F6A2FDEE}"/>
               </a:ext>
             </a:extLst>
           </p:cNvPr>
@@ -19066,7 +19066,7 @@
           <p:cNvPr id="41" name="">
             <a:extLst xmlns:a="http://schemas.openxmlformats.org/drawingml/2006/main">
               <a:ext uri="{FF2B5EF4-FFF2-40B4-BE49-F238E27FC236}">
-                <a16:creationId xmlns:a16="http://schemas.microsoft.com/office/drawing/2014/main" id="{6FBA5A4C-DB03-4EF5-93EC-ED005565F9C8}"/>
+                <a16:creationId xmlns:a16="http://schemas.microsoft.com/office/drawing/2014/main" id="{084285ED-2E75-47C5-AED7-8F8090278900}"/>
               </a:ext>
             </a:extLst>
           </p:cNvPr>
@@ -19101,7 +19101,7 @@
           <p:cNvPr id="42" name="">
             <a:extLst xmlns:a="http://schemas.openxmlformats.org/drawingml/2006/main">
               <a:ext uri="{FF2B5EF4-FFF2-40B4-BE49-F238E27FC236}">
-                <a16:creationId xmlns:a16="http://schemas.microsoft.com/office/drawing/2014/main" id="{F6FBDF69-C810-42D8-AECA-E15EA434354C}"/>
+                <a16:creationId xmlns:a16="http://schemas.microsoft.com/office/drawing/2014/main" id="{6BEF6695-02A3-49AE-B4EE-01FD58852BBE}"/>
               </a:ext>
             </a:extLst>
           </p:cNvPr>
@@ -19157,7 +19157,7 @@
           <p:cNvPr id="43" name="">
             <a:extLst xmlns:a="http://schemas.openxmlformats.org/drawingml/2006/main">
               <a:ext uri="{FF2B5EF4-FFF2-40B4-BE49-F238E27FC236}">
-                <a16:creationId xmlns:a16="http://schemas.microsoft.com/office/drawing/2014/main" id="{6B6CF76B-E6A6-4852-B8E6-E74F4B79F557}"/>
+                <a16:creationId xmlns:a16="http://schemas.microsoft.com/office/drawing/2014/main" id="{E854DEEA-7A96-4E32-8D91-59D5BEE6AF5D}"/>
               </a:ext>
             </a:extLst>
           </p:cNvPr>
@@ -19213,7 +19213,7 @@
           <p:cNvPr id="44" name="">
             <a:extLst xmlns:a="http://schemas.openxmlformats.org/drawingml/2006/main">
               <a:ext uri="{FF2B5EF4-FFF2-40B4-BE49-F238E27FC236}">
-                <a16:creationId xmlns:a16="http://schemas.microsoft.com/office/drawing/2014/main" id="{3B093218-46CB-45F6-A5B0-C2A7E011B124}"/>
+                <a16:creationId xmlns:a16="http://schemas.microsoft.com/office/drawing/2014/main" id="{9CB0F7F1-6C2F-4F6B-8E9F-06750AA03C9A}"/>
               </a:ext>
             </a:extLst>
           </p:cNvPr>
@@ -19269,7 +19269,7 @@
           <p:cNvPr id="45" name="">
             <a:extLst xmlns:a="http://schemas.openxmlformats.org/drawingml/2006/main">
               <a:ext uri="{FF2B5EF4-FFF2-40B4-BE49-F238E27FC236}">
-                <a16:creationId xmlns:a16="http://schemas.microsoft.com/office/drawing/2014/main" id="{B486DA6E-566C-481A-AB60-C7E041941795}"/>
+                <a16:creationId xmlns:a16="http://schemas.microsoft.com/office/drawing/2014/main" id="{CD9B4676-9B82-40B0-AC84-B80407D5C29E}"/>
               </a:ext>
             </a:extLst>
           </p:cNvPr>
@@ -19300,7 +19300,7 @@
           <p:cNvPr id="46" name="">
             <a:extLst xmlns:a="http://schemas.openxmlformats.org/drawingml/2006/main">
               <a:ext uri="{FF2B5EF4-FFF2-40B4-BE49-F238E27FC236}">
-                <a16:creationId xmlns:a16="http://schemas.microsoft.com/office/drawing/2014/main" id="{2948C6B7-72DE-4FB1-BC97-28059B360C61}"/>
+                <a16:creationId xmlns:a16="http://schemas.microsoft.com/office/drawing/2014/main" id="{C6DE2A28-5F52-4BCB-850B-6E37D001F0F6}"/>
               </a:ext>
             </a:extLst>
           </p:cNvPr>
@@ -19333,7 +19333,7 @@
           <p:cNvPr id="47" name="">
             <a:extLst xmlns:a="http://schemas.openxmlformats.org/drawingml/2006/main">
               <a:ext uri="{FF2B5EF4-FFF2-40B4-BE49-F238E27FC236}">
-                <a16:creationId xmlns:a16="http://schemas.microsoft.com/office/drawing/2014/main" id="{E7E43A6E-336C-4837-A3F2-0106CB5FA44C}"/>
+                <a16:creationId xmlns:a16="http://schemas.microsoft.com/office/drawing/2014/main" id="{560DF312-9276-461E-ADB4-3E99CAC1F776}"/>
               </a:ext>
             </a:extLst>
           </p:cNvPr>
@@ -19368,7 +19368,7 @@
           <p:cNvPr id="48" name="">
             <a:extLst xmlns:a="http://schemas.openxmlformats.org/drawingml/2006/main">
               <a:ext uri="{FF2B5EF4-FFF2-40B4-BE49-F238E27FC236}">
-                <a16:creationId xmlns:a16="http://schemas.microsoft.com/office/drawing/2014/main" id="{D78D726E-47F2-49EF-967E-4A893574FA43}"/>
+                <a16:creationId xmlns:a16="http://schemas.microsoft.com/office/drawing/2014/main" id="{93AF65D7-FE31-4D82-8F56-E30E38965D93}"/>
               </a:ext>
             </a:extLst>
           </p:cNvPr>
@@ -19424,7 +19424,7 @@
           <p:cNvPr id="49" name="">
             <a:extLst xmlns:a="http://schemas.openxmlformats.org/drawingml/2006/main">
               <a:ext uri="{FF2B5EF4-FFF2-40B4-BE49-F238E27FC236}">
-                <a16:creationId xmlns:a16="http://schemas.microsoft.com/office/drawing/2014/main" id="{83CC9141-9C9C-44C2-90BF-B8811B26C9E1}"/>
+                <a16:creationId xmlns:a16="http://schemas.microsoft.com/office/drawing/2014/main" id="{E82A008E-A89D-41FF-9799-77E99C2C6F59}"/>
               </a:ext>
             </a:extLst>
           </p:cNvPr>
@@ -19503,7 +19503,7 @@
           <p:cNvPr id="50" name="">
             <a:extLst xmlns:a="http://schemas.openxmlformats.org/drawingml/2006/main">
               <a:ext uri="{FF2B5EF4-FFF2-40B4-BE49-F238E27FC236}">
-                <a16:creationId xmlns:a16="http://schemas.microsoft.com/office/drawing/2014/main" id="{4D500D3B-B269-4159-97DA-6082134BFE24}"/>
+                <a16:creationId xmlns:a16="http://schemas.microsoft.com/office/drawing/2014/main" id="{C6AF114A-8E28-43C1-8C6C-1592F4F02DEB}"/>
               </a:ext>
             </a:extLst>
           </p:cNvPr>
@@ -19559,7 +19559,7 @@
           <p:cNvPr id="51" name="">
             <a:extLst xmlns:a="http://schemas.openxmlformats.org/drawingml/2006/main">
               <a:ext uri="{FF2B5EF4-FFF2-40B4-BE49-F238E27FC236}">
-                <a16:creationId xmlns:a16="http://schemas.microsoft.com/office/drawing/2014/main" id="{35A68A59-41B0-4835-A81C-791F12E792F8}"/>
+                <a16:creationId xmlns:a16="http://schemas.microsoft.com/office/drawing/2014/main" id="{CC0A2785-0389-4218-95E3-1A50C88EA2F0}"/>
               </a:ext>
             </a:extLst>
           </p:cNvPr>
@@ -19590,7 +19590,7 @@
           <p:cNvPr id="52" name="">
             <a:extLst xmlns:a="http://schemas.openxmlformats.org/drawingml/2006/main">
               <a:ext uri="{FF2B5EF4-FFF2-40B4-BE49-F238E27FC236}">
-                <a16:creationId xmlns:a16="http://schemas.microsoft.com/office/drawing/2014/main" id="{0B2F45B1-2CC8-4072-884D-A0559451E251}"/>
+                <a16:creationId xmlns:a16="http://schemas.microsoft.com/office/drawing/2014/main" id="{9D5D4F56-C3E3-499D-BD05-098D83A54884}"/>
               </a:ext>
             </a:extLst>
           </p:cNvPr>
@@ -19623,7 +19623,7 @@
           <p:cNvPr id="53" name="">
             <a:extLst xmlns:a="http://schemas.openxmlformats.org/drawingml/2006/main">
               <a:ext uri="{FF2B5EF4-FFF2-40B4-BE49-F238E27FC236}">
-                <a16:creationId xmlns:a16="http://schemas.microsoft.com/office/drawing/2014/main" id="{0430036E-5D56-437E-B5FF-94B3C4619A6B}"/>
+                <a16:creationId xmlns:a16="http://schemas.microsoft.com/office/drawing/2014/main" id="{31B117E9-1820-44FB-8A10-571B5474208E}"/>
               </a:ext>
             </a:extLst>
           </p:cNvPr>
@@ -19658,7 +19658,7 @@
           <p:cNvPr id="54" name="">
             <a:extLst xmlns:a="http://schemas.openxmlformats.org/drawingml/2006/main">
               <a:ext uri="{FF2B5EF4-FFF2-40B4-BE49-F238E27FC236}">
-                <a16:creationId xmlns:a16="http://schemas.microsoft.com/office/drawing/2014/main" id="{85429F88-D5C7-4651-A1FE-AB8551F157C6}"/>
+                <a16:creationId xmlns:a16="http://schemas.microsoft.com/office/drawing/2014/main" id="{FF2D3E90-F800-4C66-8895-E242B9366558}"/>
               </a:ext>
             </a:extLst>
           </p:cNvPr>
@@ -19714,7 +19714,7 @@
           <p:cNvPr id="55" name="">
             <a:extLst xmlns:a="http://schemas.openxmlformats.org/drawingml/2006/main">
               <a:ext uri="{FF2B5EF4-FFF2-40B4-BE49-F238E27FC236}">
-                <a16:creationId xmlns:a16="http://schemas.microsoft.com/office/drawing/2014/main" id="{950FCBFD-FCE6-4A5A-8FC7-A07EB0665480}"/>
+                <a16:creationId xmlns:a16="http://schemas.microsoft.com/office/drawing/2014/main" id="{429D30F9-875A-49E2-8DE3-4E6BACA0DD5A}"/>
               </a:ext>
             </a:extLst>
           </p:cNvPr>
@@ -19770,7 +19770,7 @@
           <p:cNvPr id="56" name="">
             <a:extLst xmlns:a="http://schemas.openxmlformats.org/drawingml/2006/main">
               <a:ext uri="{FF2B5EF4-FFF2-40B4-BE49-F238E27FC236}">
-                <a16:creationId xmlns:a16="http://schemas.microsoft.com/office/drawing/2014/main" id="{B2B8F92C-8561-42EA-8E2A-0D0C14E0AF94}"/>
+                <a16:creationId xmlns:a16="http://schemas.microsoft.com/office/drawing/2014/main" id="{8E094D3A-60FF-4DAD-8979-EEA203352B59}"/>
               </a:ext>
             </a:extLst>
           </p:cNvPr>
@@ -19826,7 +19826,7 @@
           <p:cNvPr id="57" name="">
             <a:extLst xmlns:a="http://schemas.openxmlformats.org/drawingml/2006/main">
               <a:ext uri="{FF2B5EF4-FFF2-40B4-BE49-F238E27FC236}">
-                <a16:creationId xmlns:a16="http://schemas.microsoft.com/office/drawing/2014/main" id="{29D0A65F-A823-4AB1-9E3E-5DFA6BD046BD}"/>
+                <a16:creationId xmlns:a16="http://schemas.microsoft.com/office/drawing/2014/main" id="{7F1BEF0B-67E6-4E13-B188-18A5091EC0AD}"/>
               </a:ext>
             </a:extLst>
           </p:cNvPr>
@@ -19857,7 +19857,7 @@
           <p:cNvPr id="58" name="">
             <a:extLst xmlns:a="http://schemas.openxmlformats.org/drawingml/2006/main">
               <a:ext uri="{FF2B5EF4-FFF2-40B4-BE49-F238E27FC236}">
-                <a16:creationId xmlns:a16="http://schemas.microsoft.com/office/drawing/2014/main" id="{4DFE82CE-687B-4B1A-8998-C22E136476B7}"/>
+                <a16:creationId xmlns:a16="http://schemas.microsoft.com/office/drawing/2014/main" id="{EB8A8257-36B8-4135-AC3C-A4ECC54EABB7}"/>
               </a:ext>
             </a:extLst>
           </p:cNvPr>
@@ -19890,7 +19890,7 @@
           <p:cNvPr id="59" name="">
             <a:extLst xmlns:a="http://schemas.openxmlformats.org/drawingml/2006/main">
               <a:ext uri="{FF2B5EF4-FFF2-40B4-BE49-F238E27FC236}">
-                <a16:creationId xmlns:a16="http://schemas.microsoft.com/office/drawing/2014/main" id="{AEA56520-4343-4503-B9ED-7962F2AA91E6}"/>
+                <a16:creationId xmlns:a16="http://schemas.microsoft.com/office/drawing/2014/main" id="{C4BDD88C-42D8-4F3F-8ACD-AB5DEC6B3622}"/>
               </a:ext>
             </a:extLst>
           </p:cNvPr>
@@ -19925,7 +19925,7 @@
           <p:cNvPr id="60" name="">
             <a:extLst xmlns:a="http://schemas.openxmlformats.org/drawingml/2006/main">
               <a:ext uri="{FF2B5EF4-FFF2-40B4-BE49-F238E27FC236}">
-                <a16:creationId xmlns:a16="http://schemas.microsoft.com/office/drawing/2014/main" id="{881610CB-E826-4578-BEBC-ABCABAE4644A}"/>
+                <a16:creationId xmlns:a16="http://schemas.microsoft.com/office/drawing/2014/main" id="{5AB62A6B-A5B6-4E3F-917C-E123AA22121B}"/>
               </a:ext>
             </a:extLst>
           </p:cNvPr>
@@ -19981,7 +19981,7 @@
           <p:cNvPr id="61" name="">
             <a:extLst xmlns:a="http://schemas.openxmlformats.org/drawingml/2006/main">
               <a:ext uri="{FF2B5EF4-FFF2-40B4-BE49-F238E27FC236}">
-                <a16:creationId xmlns:a16="http://schemas.microsoft.com/office/drawing/2014/main" id="{7A0032ED-6501-4946-B906-9FFC3FEF7C50}"/>
+                <a16:creationId xmlns:a16="http://schemas.microsoft.com/office/drawing/2014/main" id="{5927FA90-D707-4666-90E0-53F4CDC28711}"/>
               </a:ext>
             </a:extLst>
           </p:cNvPr>
@@ -20037,7 +20037,7 @@
           <p:cNvPr id="62" name="">
             <a:extLst xmlns:a="http://schemas.openxmlformats.org/drawingml/2006/main">
               <a:ext uri="{FF2B5EF4-FFF2-40B4-BE49-F238E27FC236}">
-                <a16:creationId xmlns:a16="http://schemas.microsoft.com/office/drawing/2014/main" id="{D771307E-7AC8-45CD-B1C7-8A00F464318C}"/>
+                <a16:creationId xmlns:a16="http://schemas.microsoft.com/office/drawing/2014/main" id="{F31DA9C0-678A-4367-BAA5-0EED4A00FB3F}"/>
               </a:ext>
             </a:extLst>
           </p:cNvPr>
@@ -20093,7 +20093,7 @@
           <p:cNvPr id="63" name="">
             <a:extLst xmlns:a="http://schemas.openxmlformats.org/drawingml/2006/main">
               <a:ext uri="{FF2B5EF4-FFF2-40B4-BE49-F238E27FC236}">
-                <a16:creationId xmlns:a16="http://schemas.microsoft.com/office/drawing/2014/main" id="{4F81953C-3D13-44D0-BC4B-C5184C0BC21A}"/>
+                <a16:creationId xmlns:a16="http://schemas.microsoft.com/office/drawing/2014/main" id="{FA2D77F2-2BE1-4497-B738-30C52387D87D}"/>
               </a:ext>
             </a:extLst>
           </p:cNvPr>
@@ -20149,7 +20149,7 @@
           <p:cNvPr id="64" name="">
             <a:extLst xmlns:a="http://schemas.openxmlformats.org/drawingml/2006/main">
               <a:ext uri="{FF2B5EF4-FFF2-40B4-BE49-F238E27FC236}">
-                <a16:creationId xmlns:a16="http://schemas.microsoft.com/office/drawing/2014/main" id="{FDF82001-4DEA-4108-AA77-B3029BABBFBD}"/>
+                <a16:creationId xmlns:a16="http://schemas.microsoft.com/office/drawing/2014/main" id="{9B7C4977-06F9-4A7F-BB3E-38C6B6F80532}"/>
               </a:ext>
             </a:extLst>
           </p:cNvPr>
@@ -20205,7 +20205,7 @@
           <p:cNvPr id="65" name="">
             <a:extLst xmlns:a="http://schemas.openxmlformats.org/drawingml/2006/main">
               <a:ext uri="{FF2B5EF4-FFF2-40B4-BE49-F238E27FC236}">
-                <a16:creationId xmlns:a16="http://schemas.microsoft.com/office/drawing/2014/main" id="{344BEBDC-D32E-44F2-99F9-B8B671943A59}"/>
+                <a16:creationId xmlns:a16="http://schemas.microsoft.com/office/drawing/2014/main" id="{6DA4EF5E-729D-451A-8D86-96A099544D96}"/>
               </a:ext>
             </a:extLst>
           </p:cNvPr>
@@ -20259,7 +20259,7 @@
     </p:spTree>
     <p:extLst>
       <p:ext uri="{BB962C8B-B14F-4D97-AF65-F5344CB8AC3E}">
-        <p14:creationId xmlns:p14="http://schemas.microsoft.com/office/powerpoint/2010/main" val="1264511236"/>
+        <p14:creationId xmlns:p14="http://schemas.microsoft.com/office/powerpoint/2010/main" val="1245104661"/>
       </p:ext>
     </p:extLst>
   </p:cSld>
@@ -20290,7 +20290,7 @@
           <p:cNvPr id="1" name="">
             <a:extLst xmlns:a="http://schemas.openxmlformats.org/drawingml/2006/main">
               <a:ext uri="{FF2B5EF4-FFF2-40B4-BE49-F238E27FC236}">
-                <a16:creationId xmlns:a16="http://schemas.microsoft.com/office/drawing/2014/main" id="{93B1ADF6-24F8-4398-9324-DADB98EAC3E8}"/>
+                <a16:creationId xmlns:a16="http://schemas.microsoft.com/office/drawing/2014/main" id="{C40F9889-55F2-4E08-8788-31989E41B2E5}"/>
               </a:ext>
             </a:extLst>
           </p:cNvPr>
@@ -20321,7 +20321,7 @@
           <p:cNvPr id="2" name="">
             <a:extLst xmlns:a="http://schemas.openxmlformats.org/drawingml/2006/main">
               <a:ext uri="{FF2B5EF4-FFF2-40B4-BE49-F238E27FC236}">
-                <a16:creationId xmlns:a16="http://schemas.microsoft.com/office/drawing/2014/main" id="{95AF1616-EE6A-41DD-9477-8AEB7D9D0171}"/>
+                <a16:creationId xmlns:a16="http://schemas.microsoft.com/office/drawing/2014/main" id="{046C2BF5-4D9D-4125-8527-642F70F7E5B7}"/>
               </a:ext>
             </a:extLst>
           </p:cNvPr>
@@ -20377,7 +20377,7 @@
           <p:cNvPr id="3" name="">
             <a:extLst xmlns:a="http://schemas.openxmlformats.org/drawingml/2006/main">
               <a:ext uri="{FF2B5EF4-FFF2-40B4-BE49-F238E27FC236}">
-                <a16:creationId xmlns:a16="http://schemas.microsoft.com/office/drawing/2014/main" id="{502FF78B-E082-4E5C-BC4B-51C3C33C6013}"/>
+                <a16:creationId xmlns:a16="http://schemas.microsoft.com/office/drawing/2014/main" id="{8D959D45-35FE-4E3A-8352-B8AC7A74059B}"/>
               </a:ext>
             </a:extLst>
           </p:cNvPr>
@@ -20433,7 +20433,7 @@
           <p:cNvPr id="4" name="">
             <a:extLst xmlns:a="http://schemas.openxmlformats.org/drawingml/2006/main">
               <a:ext uri="{FF2B5EF4-FFF2-40B4-BE49-F238E27FC236}">
-                <a16:creationId xmlns:a16="http://schemas.microsoft.com/office/drawing/2014/main" id="{5B1F626A-FAF3-4782-91CB-7E80FEBD6E2C}"/>
+                <a16:creationId xmlns:a16="http://schemas.microsoft.com/office/drawing/2014/main" id="{E6D17B33-84CB-4310-8BF7-AEEE3F174B60}"/>
               </a:ext>
             </a:extLst>
           </p:cNvPr>
@@ -20489,7 +20489,7 @@
           <p:cNvPr id="5" name="">
             <a:extLst xmlns:a="http://schemas.openxmlformats.org/drawingml/2006/main">
               <a:ext uri="{FF2B5EF4-FFF2-40B4-BE49-F238E27FC236}">
-                <a16:creationId xmlns:a16="http://schemas.microsoft.com/office/drawing/2014/main" id="{000CBE1D-1CC4-4F4D-AB4B-196C38ED43B5}"/>
+                <a16:creationId xmlns:a16="http://schemas.microsoft.com/office/drawing/2014/main" id="{FF402D3D-B5A6-420B-939E-1DB339CC4C87}"/>
               </a:ext>
             </a:extLst>
           </p:cNvPr>
@@ -20524,7 +20524,7 @@
           <p:cNvPr id="6" name="">
             <a:extLst xmlns:a="http://schemas.openxmlformats.org/drawingml/2006/main">
               <a:ext uri="{FF2B5EF4-FFF2-40B4-BE49-F238E27FC236}">
-                <a16:creationId xmlns:a16="http://schemas.microsoft.com/office/drawing/2014/main" id="{796A0C2F-D4CD-4392-9EB3-0F44EAF0C3AE}"/>
+                <a16:creationId xmlns:a16="http://schemas.microsoft.com/office/drawing/2014/main" id="{7DFB61B6-D6E0-496B-AA1E-859C4DC7593F}"/>
               </a:ext>
             </a:extLst>
           </p:cNvPr>
@@ -20580,7 +20580,7 @@
           <p:cNvPr id="7" name="">
             <a:extLst xmlns:a="http://schemas.openxmlformats.org/drawingml/2006/main">
               <a:ext uri="{FF2B5EF4-FFF2-40B4-BE49-F238E27FC236}">
-                <a16:creationId xmlns:a16="http://schemas.microsoft.com/office/drawing/2014/main" id="{403E631C-2E20-4ADA-A971-C81325F1E3DB}"/>
+                <a16:creationId xmlns:a16="http://schemas.microsoft.com/office/drawing/2014/main" id="{60640123-419D-4B50-802F-530CBF195381}"/>
               </a:ext>
             </a:extLst>
           </p:cNvPr>
@@ -20636,7 +20636,7 @@
           <p:cNvPr id="8" name="">
             <a:extLst xmlns:a="http://schemas.openxmlformats.org/drawingml/2006/main">
               <a:ext uri="{FF2B5EF4-FFF2-40B4-BE49-F238E27FC236}">
-                <a16:creationId xmlns:a16="http://schemas.microsoft.com/office/drawing/2014/main" id="{CC611CCC-766F-4CBA-993D-9C75DBE90DD3}"/>
+                <a16:creationId xmlns:a16="http://schemas.microsoft.com/office/drawing/2014/main" id="{42368E83-9335-4660-B801-BE2D0C27D767}"/>
               </a:ext>
             </a:extLst>
           </p:cNvPr>
@@ -20692,7 +20692,7 @@
           <p:cNvPr id="9" name="">
             <a:extLst xmlns:a="http://schemas.openxmlformats.org/drawingml/2006/main">
               <a:ext uri="{FF2B5EF4-FFF2-40B4-BE49-F238E27FC236}">
-                <a16:creationId xmlns:a16="http://schemas.microsoft.com/office/drawing/2014/main" id="{E329F34B-EC1B-4DBE-9A4C-4994547B0DFD}"/>
+                <a16:creationId xmlns:a16="http://schemas.microsoft.com/office/drawing/2014/main" id="{A2889753-F01B-4A79-89F5-6A72D87138D1}"/>
               </a:ext>
             </a:extLst>
           </p:cNvPr>
@@ -20748,7 +20748,7 @@
           <p:cNvPr id="10" name="">
             <a:extLst xmlns:a="http://schemas.openxmlformats.org/drawingml/2006/main">
               <a:ext uri="{FF2B5EF4-FFF2-40B4-BE49-F238E27FC236}">
-                <a16:creationId xmlns:a16="http://schemas.microsoft.com/office/drawing/2014/main" id="{37A05267-68F2-4560-AB75-5960479AB80A}"/>
+                <a16:creationId xmlns:a16="http://schemas.microsoft.com/office/drawing/2014/main" id="{87AD923C-41D9-4D73-B1F9-56DE391D019F}"/>
               </a:ext>
             </a:extLst>
           </p:cNvPr>
@@ -20783,7 +20783,7 @@
           <p:cNvPr id="11" name="">
             <a:extLst xmlns:a="http://schemas.openxmlformats.org/drawingml/2006/main">
               <a:ext uri="{FF2B5EF4-FFF2-40B4-BE49-F238E27FC236}">
-                <a16:creationId xmlns:a16="http://schemas.microsoft.com/office/drawing/2014/main" id="{C03210A4-E4DB-4D56-A687-1FCE42699DB7}"/>
+                <a16:creationId xmlns:a16="http://schemas.microsoft.com/office/drawing/2014/main" id="{A13C0492-64C7-4E45-86CA-21297520107B}"/>
               </a:ext>
             </a:extLst>
           </p:cNvPr>
@@ -20839,7 +20839,7 @@
           <p:cNvPr id="12" name="">
             <a:extLst xmlns:a="http://schemas.openxmlformats.org/drawingml/2006/main">
               <a:ext uri="{FF2B5EF4-FFF2-40B4-BE49-F238E27FC236}">
-                <a16:creationId xmlns:a16="http://schemas.microsoft.com/office/drawing/2014/main" id="{3977E036-DA82-4BF5-A2AF-3D5CA7EF568D}"/>
+                <a16:creationId xmlns:a16="http://schemas.microsoft.com/office/drawing/2014/main" id="{8A0F7B8D-3362-4646-9BB1-3C5319812259}"/>
               </a:ext>
             </a:extLst>
           </p:cNvPr>
@@ -20895,7 +20895,7 @@
           <p:cNvPr id="13" name="">
             <a:extLst xmlns:a="http://schemas.openxmlformats.org/drawingml/2006/main">
               <a:ext uri="{FF2B5EF4-FFF2-40B4-BE49-F238E27FC236}">
-                <a16:creationId xmlns:a16="http://schemas.microsoft.com/office/drawing/2014/main" id="{E7773450-C837-4708-AE2C-C6E302E290AF}"/>
+                <a16:creationId xmlns:a16="http://schemas.microsoft.com/office/drawing/2014/main" id="{9DE2E2E2-E7E1-440B-B672-439930F45027}"/>
               </a:ext>
             </a:extLst>
           </p:cNvPr>
@@ -20951,7 +20951,7 @@
           <p:cNvPr id="14" name="">
             <a:extLst xmlns:a="http://schemas.openxmlformats.org/drawingml/2006/main">
               <a:ext uri="{FF2B5EF4-FFF2-40B4-BE49-F238E27FC236}">
-                <a16:creationId xmlns:a16="http://schemas.microsoft.com/office/drawing/2014/main" id="{BF990C66-22B0-4139-A12F-EB1BE45CF240}"/>
+                <a16:creationId xmlns:a16="http://schemas.microsoft.com/office/drawing/2014/main" id="{D371FC33-E7F9-4E25-BD1E-989697F0A9F6}"/>
               </a:ext>
             </a:extLst>
           </p:cNvPr>
@@ -21007,7 +21007,7 @@
           <p:cNvPr id="15" name="">
             <a:extLst xmlns:a="http://schemas.openxmlformats.org/drawingml/2006/main">
               <a:ext uri="{FF2B5EF4-FFF2-40B4-BE49-F238E27FC236}">
-                <a16:creationId xmlns:a16="http://schemas.microsoft.com/office/drawing/2014/main" id="{3C141144-4D59-45A3-8B03-A4073138ADD4}"/>
+                <a16:creationId xmlns:a16="http://schemas.microsoft.com/office/drawing/2014/main" id="{79147059-0EF9-4DB7-892F-E777B79F707F}"/>
               </a:ext>
             </a:extLst>
           </p:cNvPr>
@@ -21042,7 +21042,7 @@
           <p:cNvPr id="16" name="">
             <a:extLst xmlns:a="http://schemas.openxmlformats.org/drawingml/2006/main">
               <a:ext uri="{FF2B5EF4-FFF2-40B4-BE49-F238E27FC236}">
-                <a16:creationId xmlns:a16="http://schemas.microsoft.com/office/drawing/2014/main" id="{7B29CEFC-4876-49AB-AE63-86C1FE4F65D2}"/>
+                <a16:creationId xmlns:a16="http://schemas.microsoft.com/office/drawing/2014/main" id="{B3BF575F-15CF-4350-BAC9-3F5F73FB1030}"/>
               </a:ext>
             </a:extLst>
           </p:cNvPr>
@@ -21098,7 +21098,7 @@
           <p:cNvPr id="17" name="">
             <a:extLst xmlns:a="http://schemas.openxmlformats.org/drawingml/2006/main">
               <a:ext uri="{FF2B5EF4-FFF2-40B4-BE49-F238E27FC236}">
-                <a16:creationId xmlns:a16="http://schemas.microsoft.com/office/drawing/2014/main" id="{DF846B00-0C5C-451A-9063-1F0F73308AB3}"/>
+                <a16:creationId xmlns:a16="http://schemas.microsoft.com/office/drawing/2014/main" id="{DDFEEF32-A3B7-4A75-A0F8-8A8FBF933F01}"/>
               </a:ext>
             </a:extLst>
           </p:cNvPr>
@@ -21154,7 +21154,7 @@
           <p:cNvPr id="18" name="">
             <a:extLst xmlns:a="http://schemas.openxmlformats.org/drawingml/2006/main">
               <a:ext uri="{FF2B5EF4-FFF2-40B4-BE49-F238E27FC236}">
-                <a16:creationId xmlns:a16="http://schemas.microsoft.com/office/drawing/2014/main" id="{89B0C6D2-3BDC-4B83-96BB-513BC00BF6E6}"/>
+                <a16:creationId xmlns:a16="http://schemas.microsoft.com/office/drawing/2014/main" id="{C9FD35F4-DD9D-48ED-A2D8-C68F20678353}"/>
               </a:ext>
             </a:extLst>
           </p:cNvPr>
@@ -21210,7 +21210,7 @@
           <p:cNvPr id="19" name="">
             <a:extLst xmlns:a="http://schemas.openxmlformats.org/drawingml/2006/main">
               <a:ext uri="{FF2B5EF4-FFF2-40B4-BE49-F238E27FC236}">
-                <a16:creationId xmlns:a16="http://schemas.microsoft.com/office/drawing/2014/main" id="{C6A7B3B6-F7A8-43EA-BF18-AD65FB8A2977}"/>
+                <a16:creationId xmlns:a16="http://schemas.microsoft.com/office/drawing/2014/main" id="{89DAA40F-9856-4B36-90F9-4D67599E56FF}"/>
               </a:ext>
             </a:extLst>
           </p:cNvPr>
@@ -21266,7 +21266,7 @@
           <p:cNvPr id="20" name="">
             <a:extLst xmlns:a="http://schemas.openxmlformats.org/drawingml/2006/main">
               <a:ext uri="{FF2B5EF4-FFF2-40B4-BE49-F238E27FC236}">
-                <a16:creationId xmlns:a16="http://schemas.microsoft.com/office/drawing/2014/main" id="{16F3EFCE-C2D0-4DBC-8833-EE5F7E806627}"/>
+                <a16:creationId xmlns:a16="http://schemas.microsoft.com/office/drawing/2014/main" id="{FC8C4DCC-B3A1-4488-9843-C68BDFF7EED0}"/>
               </a:ext>
             </a:extLst>
           </p:cNvPr>
@@ -21301,7 +21301,7 @@
           <p:cNvPr id="21" name="">
             <a:extLst xmlns:a="http://schemas.openxmlformats.org/drawingml/2006/main">
               <a:ext uri="{FF2B5EF4-FFF2-40B4-BE49-F238E27FC236}">
-                <a16:creationId xmlns:a16="http://schemas.microsoft.com/office/drawing/2014/main" id="{61274FF8-6721-42A8-8875-6FC6220F2A91}"/>
+                <a16:creationId xmlns:a16="http://schemas.microsoft.com/office/drawing/2014/main" id="{BD6A4FE2-C5A4-4910-BCDA-299C5DF4DDC3}"/>
               </a:ext>
             </a:extLst>
           </p:cNvPr>
@@ -21357,7 +21357,7 @@
           <p:cNvPr id="22" name="">
             <a:extLst xmlns:a="http://schemas.openxmlformats.org/drawingml/2006/main">
               <a:ext uri="{FF2B5EF4-FFF2-40B4-BE49-F238E27FC236}">
-                <a16:creationId xmlns:a16="http://schemas.microsoft.com/office/drawing/2014/main" id="{FB728243-2E9A-4D24-99C7-C7520A424E28}"/>
+                <a16:creationId xmlns:a16="http://schemas.microsoft.com/office/drawing/2014/main" id="{1B43EEC6-7A49-4A50-82FE-3E1F6CEE1C91}"/>
               </a:ext>
             </a:extLst>
           </p:cNvPr>
@@ -21413,7 +21413,7 @@
           <p:cNvPr id="23" name="">
             <a:extLst xmlns:a="http://schemas.openxmlformats.org/drawingml/2006/main">
               <a:ext uri="{FF2B5EF4-FFF2-40B4-BE49-F238E27FC236}">
-                <a16:creationId xmlns:a16="http://schemas.microsoft.com/office/drawing/2014/main" id="{F8BC7358-B4F7-4C28-84F1-A203F167334C}"/>
+                <a16:creationId xmlns:a16="http://schemas.microsoft.com/office/drawing/2014/main" id="{ECF06608-70FB-4D11-A091-01A4BB05ABAB}"/>
               </a:ext>
             </a:extLst>
           </p:cNvPr>
@@ -21469,7 +21469,7 @@
           <p:cNvPr id="24" name="">
             <a:extLst xmlns:a="http://schemas.openxmlformats.org/drawingml/2006/main">
               <a:ext uri="{FF2B5EF4-FFF2-40B4-BE49-F238E27FC236}">
-                <a16:creationId xmlns:a16="http://schemas.microsoft.com/office/drawing/2014/main" id="{CD984CF1-0884-4A8D-8FED-D91F2EE96529}"/>
+                <a16:creationId xmlns:a16="http://schemas.microsoft.com/office/drawing/2014/main" id="{D183668D-01FD-4C19-82EF-B6C8F80A12F2}"/>
               </a:ext>
             </a:extLst>
           </p:cNvPr>
@@ -21525,7 +21525,7 @@
           <p:cNvPr id="25" name="">
             <a:extLst xmlns:a="http://schemas.openxmlformats.org/drawingml/2006/main">
               <a:ext uri="{FF2B5EF4-FFF2-40B4-BE49-F238E27FC236}">
-                <a16:creationId xmlns:a16="http://schemas.microsoft.com/office/drawing/2014/main" id="{E3A44957-C846-4CEB-B20A-48C1F9158A38}"/>
+                <a16:creationId xmlns:a16="http://schemas.microsoft.com/office/drawing/2014/main" id="{2FD1CD45-EA4C-469D-8AE3-112D2DCC6A0D}"/>
               </a:ext>
             </a:extLst>
           </p:cNvPr>
@@ -21581,7 +21581,7 @@
           <p:cNvPr id="26" name="">
             <a:extLst xmlns:a="http://schemas.openxmlformats.org/drawingml/2006/main">
               <a:ext uri="{FF2B5EF4-FFF2-40B4-BE49-F238E27FC236}">
-                <a16:creationId xmlns:a16="http://schemas.microsoft.com/office/drawing/2014/main" id="{DF6FD6EA-F8C7-4742-8FD4-4C02641AAB75}"/>
+                <a16:creationId xmlns:a16="http://schemas.microsoft.com/office/drawing/2014/main" id="{CEA12A1A-DE2B-47FE-9C44-A25D6A508986}"/>
               </a:ext>
             </a:extLst>
           </p:cNvPr>
@@ -21637,7 +21637,7 @@
           <p:cNvPr id="27" name="">
             <a:extLst xmlns:a="http://schemas.openxmlformats.org/drawingml/2006/main">
               <a:ext uri="{FF2B5EF4-FFF2-40B4-BE49-F238E27FC236}">
-                <a16:creationId xmlns:a16="http://schemas.microsoft.com/office/drawing/2014/main" id="{93D37DD9-3187-4F29-BE53-E278DCF65201}"/>
+                <a16:creationId xmlns:a16="http://schemas.microsoft.com/office/drawing/2014/main" id="{A2356DE3-3CE2-4DB7-ADB6-4D18ED0C31CA}"/>
               </a:ext>
             </a:extLst>
           </p:cNvPr>
@@ -21693,7 +21693,7 @@
           <p:cNvPr id="28" name="">
             <a:extLst xmlns:a="http://schemas.openxmlformats.org/drawingml/2006/main">
               <a:ext uri="{FF2B5EF4-FFF2-40B4-BE49-F238E27FC236}">
-                <a16:creationId xmlns:a16="http://schemas.microsoft.com/office/drawing/2014/main" id="{88656EC8-BEFE-4ADA-B268-E4508592A546}"/>
+                <a16:creationId xmlns:a16="http://schemas.microsoft.com/office/drawing/2014/main" id="{E53B01BF-631D-49C5-99FF-F77E417412D7}"/>
               </a:ext>
             </a:extLst>
           </p:cNvPr>
@@ -21724,7 +21724,7 @@
           <p:cNvPr id="29" name="">
             <a:extLst xmlns:a="http://schemas.openxmlformats.org/drawingml/2006/main">
               <a:ext uri="{FF2B5EF4-FFF2-40B4-BE49-F238E27FC236}">
-                <a16:creationId xmlns:a16="http://schemas.microsoft.com/office/drawing/2014/main" id="{EDEB6B58-7C3A-4E53-8C5A-FCBB90466A9B}"/>
+                <a16:creationId xmlns:a16="http://schemas.microsoft.com/office/drawing/2014/main" id="{09356915-2948-4A1A-AF28-286A17159522}"/>
               </a:ext>
             </a:extLst>
           </p:cNvPr>
@@ -21778,7 +21778,7 @@
     </p:spTree>
     <p:extLst>
       <p:ext uri="{BB962C8B-B14F-4D97-AF65-F5344CB8AC3E}">
-        <p14:creationId xmlns:p14="http://schemas.microsoft.com/office/powerpoint/2010/main" val="1330404821"/>
+        <p14:creationId xmlns:p14="http://schemas.microsoft.com/office/powerpoint/2010/main" val="529948787"/>
       </p:ext>
     </p:extLst>
   </p:cSld>
@@ -21809,7 +21809,7 @@
           <p:cNvPr id="1" name="">
             <a:extLst xmlns:a="http://schemas.openxmlformats.org/drawingml/2006/main">
               <a:ext uri="{FF2B5EF4-FFF2-40B4-BE49-F238E27FC236}">
-                <a16:creationId xmlns:a16="http://schemas.microsoft.com/office/drawing/2014/main" id="{563798AA-928E-4319-A31B-18EBD4A52AD0}"/>
+                <a16:creationId xmlns:a16="http://schemas.microsoft.com/office/drawing/2014/main" id="{DA2A5CCF-C5CA-462B-92C6-9ACD5CCCAAD8}"/>
               </a:ext>
             </a:extLst>
           </p:cNvPr>
@@ -21840,7 +21840,7 @@
           <p:cNvPr id="2" name="">
             <a:extLst xmlns:a="http://schemas.openxmlformats.org/drawingml/2006/main">
               <a:ext uri="{FF2B5EF4-FFF2-40B4-BE49-F238E27FC236}">
-                <a16:creationId xmlns:a16="http://schemas.microsoft.com/office/drawing/2014/main" id="{19E424AC-AB16-4C76-A16A-DAC09BF9456B}"/>
+                <a16:creationId xmlns:a16="http://schemas.microsoft.com/office/drawing/2014/main" id="{463FEEB5-9A6B-450F-AC20-189A20D31973}"/>
               </a:ext>
             </a:extLst>
           </p:cNvPr>
@@ -21871,7 +21871,7 @@
           <p:cNvPr id="3" name="">
             <a:extLst xmlns:a="http://schemas.openxmlformats.org/drawingml/2006/main">
               <a:ext uri="{FF2B5EF4-FFF2-40B4-BE49-F238E27FC236}">
-                <a16:creationId xmlns:a16="http://schemas.microsoft.com/office/drawing/2014/main" id="{CC397147-9077-4CD6-A84C-63FD2A4CFA39}"/>
+                <a16:creationId xmlns:a16="http://schemas.microsoft.com/office/drawing/2014/main" id="{2C7AC7E4-A545-41A5-80F4-7DF7ECFC7DF6}"/>
               </a:ext>
             </a:extLst>
           </p:cNvPr>
@@ -21902,7 +21902,7 @@
           <p:cNvPr id="4" name="">
             <a:extLst xmlns:a="http://schemas.openxmlformats.org/drawingml/2006/main">
               <a:ext uri="{FF2B5EF4-FFF2-40B4-BE49-F238E27FC236}">
-                <a16:creationId xmlns:a16="http://schemas.microsoft.com/office/drawing/2014/main" id="{C98BDBC1-8567-4632-A969-09BA47A06981}"/>
+                <a16:creationId xmlns:a16="http://schemas.microsoft.com/office/drawing/2014/main" id="{F4BD59B6-0C4C-42BB-B9EB-A80AF6C740C1}"/>
               </a:ext>
             </a:extLst>
           </p:cNvPr>
@@ -21933,7 +21933,7 @@
           <p:cNvPr id="5" name="">
             <a:extLst xmlns:a="http://schemas.openxmlformats.org/drawingml/2006/main">
               <a:ext uri="{FF2B5EF4-FFF2-40B4-BE49-F238E27FC236}">
-                <a16:creationId xmlns:a16="http://schemas.microsoft.com/office/drawing/2014/main" id="{2AB54714-6F93-4400-BE40-CB82F36AEED0}"/>
+                <a16:creationId xmlns:a16="http://schemas.microsoft.com/office/drawing/2014/main" id="{6944C979-8488-49F6-8A6C-216A2568DEDB}"/>
               </a:ext>
             </a:extLst>
           </p:cNvPr>
@@ -21964,7 +21964,7 @@
           <p:cNvPr id="6" name="">
             <a:extLst xmlns:a="http://schemas.openxmlformats.org/drawingml/2006/main">
               <a:ext uri="{FF2B5EF4-FFF2-40B4-BE49-F238E27FC236}">
-                <a16:creationId xmlns:a16="http://schemas.microsoft.com/office/drawing/2014/main" id="{3839B164-DCCE-408D-AE11-91BD6B348A49}"/>
+                <a16:creationId xmlns:a16="http://schemas.microsoft.com/office/drawing/2014/main" id="{BD33B72F-FA9B-457F-875E-AAA3E539D5AC}"/>
               </a:ext>
             </a:extLst>
           </p:cNvPr>
@@ -21995,7 +21995,7 @@
           <p:cNvPr id="7" name="">
             <a:extLst xmlns:a="http://schemas.openxmlformats.org/drawingml/2006/main">
               <a:ext uri="{FF2B5EF4-FFF2-40B4-BE49-F238E27FC236}">
-                <a16:creationId xmlns:a16="http://schemas.microsoft.com/office/drawing/2014/main" id="{02B80FCC-B67C-4594-9499-639EE5B51A85}"/>
+                <a16:creationId xmlns:a16="http://schemas.microsoft.com/office/drawing/2014/main" id="{44881CB7-F088-4CC1-93F9-E500EB65FDF3}"/>
               </a:ext>
             </a:extLst>
           </p:cNvPr>
@@ -22026,7 +22026,7 @@
           <p:cNvPr id="8" name="">
             <a:extLst xmlns:a="http://schemas.openxmlformats.org/drawingml/2006/main">
               <a:ext uri="{FF2B5EF4-FFF2-40B4-BE49-F238E27FC236}">
-                <a16:creationId xmlns:a16="http://schemas.microsoft.com/office/drawing/2014/main" id="{9E255D1A-3E99-4763-9423-4F89B6592C3A}"/>
+                <a16:creationId xmlns:a16="http://schemas.microsoft.com/office/drawing/2014/main" id="{1C4FA197-74B1-4F1B-B6CB-35A1740C36A6}"/>
               </a:ext>
             </a:extLst>
           </p:cNvPr>
@@ -22057,7 +22057,7 @@
           <p:cNvPr id="9" name="">
             <a:extLst xmlns:a="http://schemas.openxmlformats.org/drawingml/2006/main">
               <a:ext uri="{FF2B5EF4-FFF2-40B4-BE49-F238E27FC236}">
-                <a16:creationId xmlns:a16="http://schemas.microsoft.com/office/drawing/2014/main" id="{3478E2CB-3B1E-412B-820D-23BD3A5EEB37}"/>
+                <a16:creationId xmlns:a16="http://schemas.microsoft.com/office/drawing/2014/main" id="{A51DDD18-B142-4BD8-8619-AD07AED34A91}"/>
               </a:ext>
             </a:extLst>
           </p:cNvPr>
@@ -22088,7 +22088,7 @@
           <p:cNvPr id="10" name="">
             <a:extLst xmlns:a="http://schemas.openxmlformats.org/drawingml/2006/main">
               <a:ext uri="{FF2B5EF4-FFF2-40B4-BE49-F238E27FC236}">
-                <a16:creationId xmlns:a16="http://schemas.microsoft.com/office/drawing/2014/main" id="{D6E2C75E-D7CC-49AD-A71A-CF0EDF860965}"/>
+                <a16:creationId xmlns:a16="http://schemas.microsoft.com/office/drawing/2014/main" id="{F7B937D6-2E33-4CE7-B08D-B1990F942483}"/>
               </a:ext>
             </a:extLst>
           </p:cNvPr>
@@ -22119,7 +22119,7 @@
           <p:cNvPr id="11" name="">
             <a:extLst xmlns:a="http://schemas.openxmlformats.org/drawingml/2006/main">
               <a:ext uri="{FF2B5EF4-FFF2-40B4-BE49-F238E27FC236}">
-                <a16:creationId xmlns:a16="http://schemas.microsoft.com/office/drawing/2014/main" id="{FD08ED2F-C487-4AA4-88EE-84789B5728E2}"/>
+                <a16:creationId xmlns:a16="http://schemas.microsoft.com/office/drawing/2014/main" id="{23D5D60E-BCA4-4475-9826-0D6A6D7F5A5D}"/>
               </a:ext>
             </a:extLst>
           </p:cNvPr>
@@ -22150,7 +22150,7 @@
           <p:cNvPr id="12" name="">
             <a:extLst xmlns:a="http://schemas.openxmlformats.org/drawingml/2006/main">
               <a:ext uri="{FF2B5EF4-FFF2-40B4-BE49-F238E27FC236}">
-                <a16:creationId xmlns:a16="http://schemas.microsoft.com/office/drawing/2014/main" id="{D8DFA520-A7B9-46AC-9781-67F542277A97}"/>
+                <a16:creationId xmlns:a16="http://schemas.microsoft.com/office/drawing/2014/main" id="{35CAF049-F8FE-486A-86B9-28C3E0EB8DD9}"/>
               </a:ext>
             </a:extLst>
           </p:cNvPr>
@@ -22181,7 +22181,7 @@
           <p:cNvPr id="13" name="">
             <a:extLst xmlns:a="http://schemas.openxmlformats.org/drawingml/2006/main">
               <a:ext uri="{FF2B5EF4-FFF2-40B4-BE49-F238E27FC236}">
-                <a16:creationId xmlns:a16="http://schemas.microsoft.com/office/drawing/2014/main" id="{4992C687-F2FD-491C-9D95-C4E8FDF724CD}"/>
+                <a16:creationId xmlns:a16="http://schemas.microsoft.com/office/drawing/2014/main" id="{3DC65544-282F-4FA2-9091-8E3E8731CF19}"/>
               </a:ext>
             </a:extLst>
           </p:cNvPr>
@@ -22212,7 +22212,7 @@
           <p:cNvPr id="14" name="">
             <a:extLst xmlns:a="http://schemas.openxmlformats.org/drawingml/2006/main">
               <a:ext uri="{FF2B5EF4-FFF2-40B4-BE49-F238E27FC236}">
-                <a16:creationId xmlns:a16="http://schemas.microsoft.com/office/drawing/2014/main" id="{F54CCE25-C252-4CEB-B330-CBF93A01CCC8}"/>
+                <a16:creationId xmlns:a16="http://schemas.microsoft.com/office/drawing/2014/main" id="{A6674DEB-8316-4C5C-AF4A-ACDFFCB8DF3A}"/>
               </a:ext>
             </a:extLst>
           </p:cNvPr>
@@ -22243,7 +22243,7 @@
           <p:cNvPr id="15" name="">
             <a:extLst xmlns:a="http://schemas.openxmlformats.org/drawingml/2006/main">
               <a:ext uri="{FF2B5EF4-FFF2-40B4-BE49-F238E27FC236}">
-                <a16:creationId xmlns:a16="http://schemas.microsoft.com/office/drawing/2014/main" id="{B8F5EF54-3A19-45E0-9460-A825A5B31AE5}"/>
+                <a16:creationId xmlns:a16="http://schemas.microsoft.com/office/drawing/2014/main" id="{B9AAD835-4A41-41A0-ADDF-5F8EB5F8012E}"/>
               </a:ext>
             </a:extLst>
           </p:cNvPr>
@@ -22274,7 +22274,7 @@
           <p:cNvPr id="16" name="">
             <a:extLst xmlns:a="http://schemas.openxmlformats.org/drawingml/2006/main">
               <a:ext uri="{FF2B5EF4-FFF2-40B4-BE49-F238E27FC236}">
-                <a16:creationId xmlns:a16="http://schemas.microsoft.com/office/drawing/2014/main" id="{993BBFA1-CF34-4FB0-9BC2-3BB7072DF3F5}"/>
+                <a16:creationId xmlns:a16="http://schemas.microsoft.com/office/drawing/2014/main" id="{D12F2FE9-C8C1-487F-A3A4-689968FC8AAA}"/>
               </a:ext>
             </a:extLst>
           </p:cNvPr>
@@ -22305,7 +22305,7 @@
           <p:cNvPr id="17" name="">
             <a:extLst xmlns:a="http://schemas.openxmlformats.org/drawingml/2006/main">
               <a:ext uri="{FF2B5EF4-FFF2-40B4-BE49-F238E27FC236}">
-                <a16:creationId xmlns:a16="http://schemas.microsoft.com/office/drawing/2014/main" id="{251818E1-C0CF-4C68-9382-CE0120223F99}"/>
+                <a16:creationId xmlns:a16="http://schemas.microsoft.com/office/drawing/2014/main" id="{D2D8211F-C6FB-4CD0-BC97-492B9415C631}"/>
               </a:ext>
             </a:extLst>
           </p:cNvPr>
@@ -22336,7 +22336,7 @@
           <p:cNvPr id="18" name="">
             <a:extLst xmlns:a="http://schemas.openxmlformats.org/drawingml/2006/main">
               <a:ext uri="{FF2B5EF4-FFF2-40B4-BE49-F238E27FC236}">
-                <a16:creationId xmlns:a16="http://schemas.microsoft.com/office/drawing/2014/main" id="{7E9D1919-7DFB-40A9-A4DC-3C31B8F4D6FC}"/>
+                <a16:creationId xmlns:a16="http://schemas.microsoft.com/office/drawing/2014/main" id="{2492B77F-151E-4178-B366-46883945F11E}"/>
               </a:ext>
             </a:extLst>
           </p:cNvPr>
@@ -22367,7 +22367,7 @@
           <p:cNvPr id="19" name="">
             <a:extLst xmlns:a="http://schemas.openxmlformats.org/drawingml/2006/main">
               <a:ext uri="{FF2B5EF4-FFF2-40B4-BE49-F238E27FC236}">
-                <a16:creationId xmlns:a16="http://schemas.microsoft.com/office/drawing/2014/main" id="{A2250ADE-97A9-4AE6-9A8F-F3A6BBCCBD35}"/>
+                <a16:creationId xmlns:a16="http://schemas.microsoft.com/office/drawing/2014/main" id="{BF930740-44DB-4EAF-82B5-2E5645AAF9B5}"/>
               </a:ext>
             </a:extLst>
           </p:cNvPr>
@@ -22398,7 +22398,7 @@
           <p:cNvPr id="20" name="">
             <a:extLst xmlns:a="http://schemas.openxmlformats.org/drawingml/2006/main">
               <a:ext uri="{FF2B5EF4-FFF2-40B4-BE49-F238E27FC236}">
-                <a16:creationId xmlns:a16="http://schemas.microsoft.com/office/drawing/2014/main" id="{BAB62E61-0063-42F0-B377-82347B0E3BD7}"/>
+                <a16:creationId xmlns:a16="http://schemas.microsoft.com/office/drawing/2014/main" id="{D954A225-D6A4-48B6-AB29-3219C2ACD882}"/>
               </a:ext>
             </a:extLst>
           </p:cNvPr>
@@ -22429,7 +22429,7 @@
           <p:cNvPr id="21" name="">
             <a:extLst xmlns:a="http://schemas.openxmlformats.org/drawingml/2006/main">
               <a:ext uri="{FF2B5EF4-FFF2-40B4-BE49-F238E27FC236}">
-                <a16:creationId xmlns:a16="http://schemas.microsoft.com/office/drawing/2014/main" id="{06740107-28C6-48BB-AF8F-1D411192E96D}"/>
+                <a16:creationId xmlns:a16="http://schemas.microsoft.com/office/drawing/2014/main" id="{99BBFF57-D157-4BE6-8C52-3BA8E7ED0109}"/>
               </a:ext>
             </a:extLst>
           </p:cNvPr>
@@ -22460,7 +22460,7 @@
           <p:cNvPr id="22" name="">
             <a:extLst xmlns:a="http://schemas.openxmlformats.org/drawingml/2006/main">
               <a:ext uri="{FF2B5EF4-FFF2-40B4-BE49-F238E27FC236}">
-                <a16:creationId xmlns:a16="http://schemas.microsoft.com/office/drawing/2014/main" id="{8B8BA326-3E3C-40F3-9B32-17D6E411A2C8}"/>
+                <a16:creationId xmlns:a16="http://schemas.microsoft.com/office/drawing/2014/main" id="{864F4087-C33E-4702-8B28-6D9968FE4A78}"/>
               </a:ext>
             </a:extLst>
           </p:cNvPr>
@@ -22491,7 +22491,7 @@
           <p:cNvPr id="23" name="">
             <a:extLst xmlns:a="http://schemas.openxmlformats.org/drawingml/2006/main">
               <a:ext uri="{FF2B5EF4-FFF2-40B4-BE49-F238E27FC236}">
-                <a16:creationId xmlns:a16="http://schemas.microsoft.com/office/drawing/2014/main" id="{71997005-A4EF-46FC-9147-78C7B2D99AAD}"/>
+                <a16:creationId xmlns:a16="http://schemas.microsoft.com/office/drawing/2014/main" id="{D0008AB3-C9C8-4245-9269-2680DCD161B2}"/>
               </a:ext>
             </a:extLst>
           </p:cNvPr>
@@ -22522,7 +22522,7 @@
           <p:cNvPr id="24" name="">
             <a:extLst xmlns:a="http://schemas.openxmlformats.org/drawingml/2006/main">
               <a:ext uri="{FF2B5EF4-FFF2-40B4-BE49-F238E27FC236}">
-                <a16:creationId xmlns:a16="http://schemas.microsoft.com/office/drawing/2014/main" id="{E13F8BA9-9E30-4F45-93DF-68DDCB78E54A}"/>
+                <a16:creationId xmlns:a16="http://schemas.microsoft.com/office/drawing/2014/main" id="{E90EFD0C-576C-4368-80FA-F0B4D446A062}"/>
               </a:ext>
             </a:extLst>
           </p:cNvPr>
@@ -22553,7 +22553,7 @@
           <p:cNvPr id="25" name="">
             <a:extLst xmlns:a="http://schemas.openxmlformats.org/drawingml/2006/main">
               <a:ext uri="{FF2B5EF4-FFF2-40B4-BE49-F238E27FC236}">
-                <a16:creationId xmlns:a16="http://schemas.microsoft.com/office/drawing/2014/main" id="{4977698F-4D16-4492-A602-08879D7E027F}"/>
+                <a16:creationId xmlns:a16="http://schemas.microsoft.com/office/drawing/2014/main" id="{5DD6AFB9-709D-48A8-A848-CB5F6D095F40}"/>
               </a:ext>
             </a:extLst>
           </p:cNvPr>
@@ -22584,7 +22584,7 @@
           <p:cNvPr id="26" name="">
             <a:extLst xmlns:a="http://schemas.openxmlformats.org/drawingml/2006/main">
               <a:ext uri="{FF2B5EF4-FFF2-40B4-BE49-F238E27FC236}">
-                <a16:creationId xmlns:a16="http://schemas.microsoft.com/office/drawing/2014/main" id="{7504E1CE-B4AE-4805-936D-4D1A8597684B}"/>
+                <a16:creationId xmlns:a16="http://schemas.microsoft.com/office/drawing/2014/main" id="{AC3E23CB-F433-49C7-A147-2B98989AE71B}"/>
               </a:ext>
             </a:extLst>
           </p:cNvPr>
@@ -22615,7 +22615,7 @@
           <p:cNvPr id="27" name="">
             <a:extLst xmlns:a="http://schemas.openxmlformats.org/drawingml/2006/main">
               <a:ext uri="{FF2B5EF4-FFF2-40B4-BE49-F238E27FC236}">
-                <a16:creationId xmlns:a16="http://schemas.microsoft.com/office/drawing/2014/main" id="{FFF260C7-AE01-4FA5-9CB6-70871A544EFE}"/>
+                <a16:creationId xmlns:a16="http://schemas.microsoft.com/office/drawing/2014/main" id="{682EF678-71FC-4C13-894B-F698FCFC3621}"/>
               </a:ext>
             </a:extLst>
           </p:cNvPr>
@@ -22646,7 +22646,7 @@
           <p:cNvPr id="28" name="">
             <a:extLst xmlns:a="http://schemas.openxmlformats.org/drawingml/2006/main">
               <a:ext uri="{FF2B5EF4-FFF2-40B4-BE49-F238E27FC236}">
-                <a16:creationId xmlns:a16="http://schemas.microsoft.com/office/drawing/2014/main" id="{26A80460-AC90-44F3-8D95-B614E0ACE9AD}"/>
+                <a16:creationId xmlns:a16="http://schemas.microsoft.com/office/drawing/2014/main" id="{51995C3B-AFD5-4744-B7E8-C1B5217BEDCB}"/>
               </a:ext>
             </a:extLst>
           </p:cNvPr>
@@ -22677,7 +22677,7 @@
           <p:cNvPr id="29" name="">
             <a:extLst xmlns:a="http://schemas.openxmlformats.org/drawingml/2006/main">
               <a:ext uri="{FF2B5EF4-FFF2-40B4-BE49-F238E27FC236}">
-                <a16:creationId xmlns:a16="http://schemas.microsoft.com/office/drawing/2014/main" id="{41951A84-8C5B-46A6-9021-D600B79DF74F}"/>
+                <a16:creationId xmlns:a16="http://schemas.microsoft.com/office/drawing/2014/main" id="{A127C363-2337-4E5C-8DE1-57EBFA5FAAD7}"/>
               </a:ext>
             </a:extLst>
           </p:cNvPr>
@@ -22708,7 +22708,7 @@
           <p:cNvPr id="30" name="">
             <a:extLst xmlns:a="http://schemas.openxmlformats.org/drawingml/2006/main">
               <a:ext uri="{FF2B5EF4-FFF2-40B4-BE49-F238E27FC236}">
-                <a16:creationId xmlns:a16="http://schemas.microsoft.com/office/drawing/2014/main" id="{97AAEA70-94E5-455D-897F-A245F99B8E3E}"/>
+                <a16:creationId xmlns:a16="http://schemas.microsoft.com/office/drawing/2014/main" id="{5EA75AA4-9EB1-436A-A341-A411EC2F82B9}"/>
               </a:ext>
             </a:extLst>
           </p:cNvPr>
@@ -22739,7 +22739,7 @@
           <p:cNvPr id="31" name="">
             <a:extLst xmlns:a="http://schemas.openxmlformats.org/drawingml/2006/main">
               <a:ext uri="{FF2B5EF4-FFF2-40B4-BE49-F238E27FC236}">
-                <a16:creationId xmlns:a16="http://schemas.microsoft.com/office/drawing/2014/main" id="{332D936D-8D17-45CA-BF38-F1F26DC934B5}"/>
+                <a16:creationId xmlns:a16="http://schemas.microsoft.com/office/drawing/2014/main" id="{424BA2AF-02B8-47B5-A78E-9544653241DF}"/>
               </a:ext>
             </a:extLst>
           </p:cNvPr>
@@ -22770,7 +22770,7 @@
           <p:cNvPr id="32" name="">
             <a:extLst xmlns:a="http://schemas.openxmlformats.org/drawingml/2006/main">
               <a:ext uri="{FF2B5EF4-FFF2-40B4-BE49-F238E27FC236}">
-                <a16:creationId xmlns:a16="http://schemas.microsoft.com/office/drawing/2014/main" id="{FEF804BE-0F8D-4AC8-8ED9-97ED20357E06}"/>
+                <a16:creationId xmlns:a16="http://schemas.microsoft.com/office/drawing/2014/main" id="{7BBB5519-FA45-44EE-93EC-0D31693FD9D6}"/>
               </a:ext>
             </a:extLst>
           </p:cNvPr>
@@ -22826,7 +22826,7 @@
           <p:cNvPr id="33" name="">
             <a:extLst xmlns:a="http://schemas.openxmlformats.org/drawingml/2006/main">
               <a:ext uri="{FF2B5EF4-FFF2-40B4-BE49-F238E27FC236}">
-                <a16:creationId xmlns:a16="http://schemas.microsoft.com/office/drawing/2014/main" id="{012D2D25-EA71-4717-9CAF-C877F515BBDB}"/>
+                <a16:creationId xmlns:a16="http://schemas.microsoft.com/office/drawing/2014/main" id="{A2C2E84B-6C3B-43D7-949C-8F591F9DC2FB}"/>
               </a:ext>
             </a:extLst>
           </p:cNvPr>
@@ -22882,7 +22882,7 @@
           <p:cNvPr id="34" name="">
             <a:extLst xmlns:a="http://schemas.openxmlformats.org/drawingml/2006/main">
               <a:ext uri="{FF2B5EF4-FFF2-40B4-BE49-F238E27FC236}">
-                <a16:creationId xmlns:a16="http://schemas.microsoft.com/office/drawing/2014/main" id="{60937624-AFA6-49C6-BCA6-E60679339F7C}"/>
+                <a16:creationId xmlns:a16="http://schemas.microsoft.com/office/drawing/2014/main" id="{82234C0C-F5E8-4D10-BFD4-EB8DD6089A8F}"/>
               </a:ext>
             </a:extLst>
           </p:cNvPr>
@@ -22938,7 +22938,7 @@
           <p:cNvPr id="35" name="">
             <a:extLst xmlns:a="http://schemas.openxmlformats.org/drawingml/2006/main">
               <a:ext uri="{FF2B5EF4-FFF2-40B4-BE49-F238E27FC236}">
-                <a16:creationId xmlns:a16="http://schemas.microsoft.com/office/drawing/2014/main" id="{5D360EF3-8A38-46D4-A071-C2D1FFC58968}"/>
+                <a16:creationId xmlns:a16="http://schemas.microsoft.com/office/drawing/2014/main" id="{AED18A09-CFC5-4F71-A998-DB0253C995EE}"/>
               </a:ext>
             </a:extLst>
           </p:cNvPr>
@@ -22973,7 +22973,7 @@
           <p:cNvPr id="36" name="">
             <a:extLst xmlns:a="http://schemas.openxmlformats.org/drawingml/2006/main">
               <a:ext uri="{FF2B5EF4-FFF2-40B4-BE49-F238E27FC236}">
-                <a16:creationId xmlns:a16="http://schemas.microsoft.com/office/drawing/2014/main" id="{7650E100-64A4-4544-8657-7EAD05035DED}"/>
+                <a16:creationId xmlns:a16="http://schemas.microsoft.com/office/drawing/2014/main" id="{D28CD088-9506-4D1E-A916-5F6E9DFB1A19}"/>
               </a:ext>
             </a:extLst>
           </p:cNvPr>
@@ -23029,7 +23029,7 @@
           <p:cNvPr id="37" name="">
             <a:extLst xmlns:a="http://schemas.openxmlformats.org/drawingml/2006/main">
               <a:ext uri="{FF2B5EF4-FFF2-40B4-BE49-F238E27FC236}">
-                <a16:creationId xmlns:a16="http://schemas.microsoft.com/office/drawing/2014/main" id="{53915C75-D89C-401A-AD72-CDF09A293CE2}"/>
+                <a16:creationId xmlns:a16="http://schemas.microsoft.com/office/drawing/2014/main" id="{79FD5A71-A95A-45BC-832B-6EBE91B461AC}"/>
               </a:ext>
             </a:extLst>
           </p:cNvPr>
@@ -23108,7 +23108,7 @@
           <p:cNvPr id="38" name="">
             <a:extLst xmlns:a="http://schemas.openxmlformats.org/drawingml/2006/main">
               <a:ext uri="{FF2B5EF4-FFF2-40B4-BE49-F238E27FC236}">
-                <a16:creationId xmlns:a16="http://schemas.microsoft.com/office/drawing/2014/main" id="{E62D62F7-F13C-4D78-AFEA-71D374B00520}"/>
+                <a16:creationId xmlns:a16="http://schemas.microsoft.com/office/drawing/2014/main" id="{C1578CBD-B3DF-4235-9348-C4978AFB8929}"/>
               </a:ext>
             </a:extLst>
           </p:cNvPr>
@@ -23139,7 +23139,7 @@
           <p:cNvPr id="39" name="">
             <a:extLst xmlns:a="http://schemas.openxmlformats.org/drawingml/2006/main">
               <a:ext uri="{FF2B5EF4-FFF2-40B4-BE49-F238E27FC236}">
-                <a16:creationId xmlns:a16="http://schemas.microsoft.com/office/drawing/2014/main" id="{DFD18502-7D6C-4CE9-8077-280C5AB45734}"/>
+                <a16:creationId xmlns:a16="http://schemas.microsoft.com/office/drawing/2014/main" id="{63A3AE67-E43B-4473-A342-DFE109BA345B}"/>
               </a:ext>
             </a:extLst>
           </p:cNvPr>
@@ -23174,7 +23174,7 @@
           <p:cNvPr id="40" name="">
             <a:extLst xmlns:a="http://schemas.openxmlformats.org/drawingml/2006/main">
               <a:ext uri="{FF2B5EF4-FFF2-40B4-BE49-F238E27FC236}">
-                <a16:creationId xmlns:a16="http://schemas.microsoft.com/office/drawing/2014/main" id="{C9493FB7-E326-447F-A649-3499A3408CFC}"/>
+                <a16:creationId xmlns:a16="http://schemas.microsoft.com/office/drawing/2014/main" id="{FBA0423F-E62F-4784-A651-31AD4CBEC3CB}"/>
               </a:ext>
             </a:extLst>
           </p:cNvPr>
@@ -23230,7 +23230,7 @@
           <p:cNvPr id="41" name="">
             <a:extLst xmlns:a="http://schemas.openxmlformats.org/drawingml/2006/main">
               <a:ext uri="{FF2B5EF4-FFF2-40B4-BE49-F238E27FC236}">
-                <a16:creationId xmlns:a16="http://schemas.microsoft.com/office/drawing/2014/main" id="{A8E91675-A408-4023-9A55-F3E33BEFA7A0}"/>
+                <a16:creationId xmlns:a16="http://schemas.microsoft.com/office/drawing/2014/main" id="{463EA561-BC08-4FB4-8B0C-A0F0AE047FE5}"/>
               </a:ext>
             </a:extLst>
           </p:cNvPr>
@@ -23309,7 +23309,7 @@
           <p:cNvPr id="42" name="">
             <a:extLst xmlns:a="http://schemas.openxmlformats.org/drawingml/2006/main">
               <a:ext uri="{FF2B5EF4-FFF2-40B4-BE49-F238E27FC236}">
-                <a16:creationId xmlns:a16="http://schemas.microsoft.com/office/drawing/2014/main" id="{40004D48-D9E7-4129-B944-EFD6022964FF}"/>
+                <a16:creationId xmlns:a16="http://schemas.microsoft.com/office/drawing/2014/main" id="{1EED45D1-B3B2-4FFF-99B8-FF9E66097187}"/>
               </a:ext>
             </a:extLst>
           </p:cNvPr>
@@ -23340,7 +23340,7 @@
           <p:cNvPr id="43" name="">
             <a:extLst xmlns:a="http://schemas.openxmlformats.org/drawingml/2006/main">
               <a:ext uri="{FF2B5EF4-FFF2-40B4-BE49-F238E27FC236}">
-                <a16:creationId xmlns:a16="http://schemas.microsoft.com/office/drawing/2014/main" id="{D9EFEB50-DA22-4F95-BD55-40FFDA28ECBB}"/>
+                <a16:creationId xmlns:a16="http://schemas.microsoft.com/office/drawing/2014/main" id="{3E709795-9E8D-4819-9C48-1ADCD61115FF}"/>
               </a:ext>
             </a:extLst>
           </p:cNvPr>
@@ -23375,7 +23375,7 @@
           <p:cNvPr id="44" name="">
             <a:extLst xmlns:a="http://schemas.openxmlformats.org/drawingml/2006/main">
               <a:ext uri="{FF2B5EF4-FFF2-40B4-BE49-F238E27FC236}">
-                <a16:creationId xmlns:a16="http://schemas.microsoft.com/office/drawing/2014/main" id="{BCE5C454-F25D-4500-BC45-C16F4DCDD824}"/>
+                <a16:creationId xmlns:a16="http://schemas.microsoft.com/office/drawing/2014/main" id="{6542A32E-E183-47B8-8822-BC7EE19038D8}"/>
               </a:ext>
             </a:extLst>
           </p:cNvPr>
@@ -23431,7 +23431,7 @@
           <p:cNvPr id="45" name="">
             <a:extLst xmlns:a="http://schemas.openxmlformats.org/drawingml/2006/main">
               <a:ext uri="{FF2B5EF4-FFF2-40B4-BE49-F238E27FC236}">
-                <a16:creationId xmlns:a16="http://schemas.microsoft.com/office/drawing/2014/main" id="{430D8539-0ECE-451C-8808-E74853D54795}"/>
+                <a16:creationId xmlns:a16="http://schemas.microsoft.com/office/drawing/2014/main" id="{D9BA3AD5-5F35-4F54-82DE-3D941ACDA9E4}"/>
               </a:ext>
             </a:extLst>
           </p:cNvPr>
@@ -23487,7 +23487,7 @@
           <p:cNvPr id="46" name="">
             <a:extLst xmlns:a="http://schemas.openxmlformats.org/drawingml/2006/main">
               <a:ext uri="{FF2B5EF4-FFF2-40B4-BE49-F238E27FC236}">
-                <a16:creationId xmlns:a16="http://schemas.microsoft.com/office/drawing/2014/main" id="{18FFCFD7-55DB-4D8E-87EB-CE8B6998561E}"/>
+                <a16:creationId xmlns:a16="http://schemas.microsoft.com/office/drawing/2014/main" id="{0A958450-F4A0-4D19-84BD-E9B50BF6BB8D}"/>
               </a:ext>
             </a:extLst>
           </p:cNvPr>
@@ -23518,7 +23518,7 @@
           <p:cNvPr id="47" name="">
             <a:extLst xmlns:a="http://schemas.openxmlformats.org/drawingml/2006/main">
               <a:ext uri="{FF2B5EF4-FFF2-40B4-BE49-F238E27FC236}">
-                <a16:creationId xmlns:a16="http://schemas.microsoft.com/office/drawing/2014/main" id="{328321A2-5E1E-4B79-A1BE-C4E3D4BB71AD}"/>
+                <a16:creationId xmlns:a16="http://schemas.microsoft.com/office/drawing/2014/main" id="{599835D6-706B-481D-A849-1554BAAECADB}"/>
               </a:ext>
             </a:extLst>
           </p:cNvPr>
@@ -23553,7 +23553,7 @@
           <p:cNvPr id="48" name="">
             <a:extLst xmlns:a="http://schemas.openxmlformats.org/drawingml/2006/main">
               <a:ext uri="{FF2B5EF4-FFF2-40B4-BE49-F238E27FC236}">
-                <a16:creationId xmlns:a16="http://schemas.microsoft.com/office/drawing/2014/main" id="{7FB989CD-2852-4610-89BB-D41463199C72}"/>
+                <a16:creationId xmlns:a16="http://schemas.microsoft.com/office/drawing/2014/main" id="{38A5E0EF-CB53-49D7-BE2C-E7635594D88E}"/>
               </a:ext>
             </a:extLst>
           </p:cNvPr>
@@ -23609,7 +23609,7 @@
           <p:cNvPr id="49" name="">
             <a:extLst xmlns:a="http://schemas.openxmlformats.org/drawingml/2006/main">
               <a:ext uri="{FF2B5EF4-FFF2-40B4-BE49-F238E27FC236}">
-                <a16:creationId xmlns:a16="http://schemas.microsoft.com/office/drawing/2014/main" id="{E1455A63-8867-47DC-8772-441B63D043A1}"/>
+                <a16:creationId xmlns:a16="http://schemas.microsoft.com/office/drawing/2014/main" id="{CCB40C61-62C8-4850-B5F0-3620502CDC98}"/>
               </a:ext>
             </a:extLst>
           </p:cNvPr>
@@ -23688,7 +23688,7 @@
           <p:cNvPr id="50" name="">
             <a:extLst xmlns:a="http://schemas.openxmlformats.org/drawingml/2006/main">
               <a:ext uri="{FF2B5EF4-FFF2-40B4-BE49-F238E27FC236}">
-                <a16:creationId xmlns:a16="http://schemas.microsoft.com/office/drawing/2014/main" id="{7AA40187-570D-4853-8EEF-A79BEA68BD51}"/>
+                <a16:creationId xmlns:a16="http://schemas.microsoft.com/office/drawing/2014/main" id="{E54D99F7-59B2-4C1B-AD92-C61695C3051C}"/>
               </a:ext>
             </a:extLst>
           </p:cNvPr>
@@ -23719,7 +23719,7 @@
           <p:cNvPr id="51" name="">
             <a:extLst xmlns:a="http://schemas.openxmlformats.org/drawingml/2006/main">
               <a:ext uri="{FF2B5EF4-FFF2-40B4-BE49-F238E27FC236}">
-                <a16:creationId xmlns:a16="http://schemas.microsoft.com/office/drawing/2014/main" id="{3919AD4F-CB63-49A9-AE3A-2BFE5B3AA729}"/>
+                <a16:creationId xmlns:a16="http://schemas.microsoft.com/office/drawing/2014/main" id="{09940A95-18D2-482F-BF4B-2D8A24468541}"/>
               </a:ext>
             </a:extLst>
           </p:cNvPr>
@@ -23754,7 +23754,7 @@
           <p:cNvPr id="52" name="">
             <a:extLst xmlns:a="http://schemas.openxmlformats.org/drawingml/2006/main">
               <a:ext uri="{FF2B5EF4-FFF2-40B4-BE49-F238E27FC236}">
-                <a16:creationId xmlns:a16="http://schemas.microsoft.com/office/drawing/2014/main" id="{BC8E812B-09E2-4355-AB47-AB7B506A5EF5}"/>
+                <a16:creationId xmlns:a16="http://schemas.microsoft.com/office/drawing/2014/main" id="{A7866BE2-B9D4-4E12-ADFC-08C4D1DAF1BA}"/>
               </a:ext>
             </a:extLst>
           </p:cNvPr>
@@ -23810,7 +23810,7 @@
           <p:cNvPr id="53" name="">
             <a:extLst xmlns:a="http://schemas.openxmlformats.org/drawingml/2006/main">
               <a:ext uri="{FF2B5EF4-FFF2-40B4-BE49-F238E27FC236}">
-                <a16:creationId xmlns:a16="http://schemas.microsoft.com/office/drawing/2014/main" id="{8AD5C282-B967-477D-AFA4-92A0674A0CB4}"/>
+                <a16:creationId xmlns:a16="http://schemas.microsoft.com/office/drawing/2014/main" id="{53FA38BF-E686-4C4A-9C31-D506850FDAD4}"/>
               </a:ext>
             </a:extLst>
           </p:cNvPr>
@@ -23889,7 +23889,7 @@
           <p:cNvPr id="54" name="">
             <a:extLst xmlns:a="http://schemas.openxmlformats.org/drawingml/2006/main">
               <a:ext uri="{FF2B5EF4-FFF2-40B4-BE49-F238E27FC236}">
-                <a16:creationId xmlns:a16="http://schemas.microsoft.com/office/drawing/2014/main" id="{695515C7-BE4B-43FA-8507-E8771E6FF5D9}"/>
+                <a16:creationId xmlns:a16="http://schemas.microsoft.com/office/drawing/2014/main" id="{E8171624-B14B-46DB-BCB6-B4F4F4D9657D}"/>
               </a:ext>
             </a:extLst>
           </p:cNvPr>
@@ -23920,7 +23920,7 @@
           <p:cNvPr id="55" name="">
             <a:extLst xmlns:a="http://schemas.openxmlformats.org/drawingml/2006/main">
               <a:ext uri="{FF2B5EF4-FFF2-40B4-BE49-F238E27FC236}">
-                <a16:creationId xmlns:a16="http://schemas.microsoft.com/office/drawing/2014/main" id="{72CA6EFF-A236-4099-85D4-3C6C20DFFA2A}"/>
+                <a16:creationId xmlns:a16="http://schemas.microsoft.com/office/drawing/2014/main" id="{09E4495D-223E-4C31-BD83-A4AF7BA00B2C}"/>
               </a:ext>
             </a:extLst>
           </p:cNvPr>
@@ -23955,7 +23955,7 @@
           <p:cNvPr id="56" name="">
             <a:extLst xmlns:a="http://schemas.openxmlformats.org/drawingml/2006/main">
               <a:ext uri="{FF2B5EF4-FFF2-40B4-BE49-F238E27FC236}">
-                <a16:creationId xmlns:a16="http://schemas.microsoft.com/office/drawing/2014/main" id="{4159AA32-3281-449E-A474-278C32E9C68A}"/>
+                <a16:creationId xmlns:a16="http://schemas.microsoft.com/office/drawing/2014/main" id="{896F2951-E40B-4DB3-8C57-B5A175D36FDC}"/>
               </a:ext>
             </a:extLst>
           </p:cNvPr>
@@ -24011,7 +24011,7 @@
           <p:cNvPr id="57" name="">
             <a:extLst xmlns:a="http://schemas.openxmlformats.org/drawingml/2006/main">
               <a:ext uri="{FF2B5EF4-FFF2-40B4-BE49-F238E27FC236}">
-                <a16:creationId xmlns:a16="http://schemas.microsoft.com/office/drawing/2014/main" id="{85B59143-0821-4DAC-B305-144E54A1A69A}"/>
+                <a16:creationId xmlns:a16="http://schemas.microsoft.com/office/drawing/2014/main" id="{A9911733-60DB-402E-824E-EB3E010A9070}"/>
               </a:ext>
             </a:extLst>
           </p:cNvPr>
@@ -24090,7 +24090,7 @@
           <p:cNvPr id="58" name="">
             <a:extLst xmlns:a="http://schemas.openxmlformats.org/drawingml/2006/main">
               <a:ext uri="{FF2B5EF4-FFF2-40B4-BE49-F238E27FC236}">
-                <a16:creationId xmlns:a16="http://schemas.microsoft.com/office/drawing/2014/main" id="{8E89EAE7-78F1-4FE0-B88A-C4DF34D0CBDB}"/>
+                <a16:creationId xmlns:a16="http://schemas.microsoft.com/office/drawing/2014/main" id="{1BA47A2A-E588-4092-9BFA-ED308EC4F73C}"/>
               </a:ext>
             </a:extLst>
           </p:cNvPr>
@@ -24121,7 +24121,7 @@
           <p:cNvPr id="59" name="">
             <a:extLst xmlns:a="http://schemas.openxmlformats.org/drawingml/2006/main">
               <a:ext uri="{FF2B5EF4-FFF2-40B4-BE49-F238E27FC236}">
-                <a16:creationId xmlns:a16="http://schemas.microsoft.com/office/drawing/2014/main" id="{9266AB43-71E7-4C3F-B2A3-87E9BDB1DBEA}"/>
+                <a16:creationId xmlns:a16="http://schemas.microsoft.com/office/drawing/2014/main" id="{16565D8B-B6DF-4630-8BED-4B393019FA86}"/>
               </a:ext>
             </a:extLst>
           </p:cNvPr>
@@ -24156,7 +24156,7 @@
           <p:cNvPr id="60" name="">
             <a:extLst xmlns:a="http://schemas.openxmlformats.org/drawingml/2006/main">
               <a:ext uri="{FF2B5EF4-FFF2-40B4-BE49-F238E27FC236}">
-                <a16:creationId xmlns:a16="http://schemas.microsoft.com/office/drawing/2014/main" id="{70DD58C0-F0B3-4B29-91F5-A9581D1FC56A}"/>
+                <a16:creationId xmlns:a16="http://schemas.microsoft.com/office/drawing/2014/main" id="{C6A4A8F0-5E25-4C5A-A569-3748277AF533}"/>
               </a:ext>
             </a:extLst>
           </p:cNvPr>
@@ -24212,7 +24212,7 @@
           <p:cNvPr id="61" name="">
             <a:extLst xmlns:a="http://schemas.openxmlformats.org/drawingml/2006/main">
               <a:ext uri="{FF2B5EF4-FFF2-40B4-BE49-F238E27FC236}">
-                <a16:creationId xmlns:a16="http://schemas.microsoft.com/office/drawing/2014/main" id="{570E90D1-86C6-4E2F-9FA4-6476C9AC5F21}"/>
+                <a16:creationId xmlns:a16="http://schemas.microsoft.com/office/drawing/2014/main" id="{97AAA1F3-E264-444B-8A69-D97DF7DF58A1}"/>
               </a:ext>
             </a:extLst>
           </p:cNvPr>
@@ -24268,7 +24268,7 @@
           <p:cNvPr id="62" name="">
             <a:extLst xmlns:a="http://schemas.openxmlformats.org/drawingml/2006/main">
               <a:ext uri="{FF2B5EF4-FFF2-40B4-BE49-F238E27FC236}">
-                <a16:creationId xmlns:a16="http://schemas.microsoft.com/office/drawing/2014/main" id="{19E23878-8B87-4DA6-B229-920D4957BF7B}"/>
+                <a16:creationId xmlns:a16="http://schemas.microsoft.com/office/drawing/2014/main" id="{1A9FB8F2-7696-4057-BC91-18F0A44217E2}"/>
               </a:ext>
             </a:extLst>
           </p:cNvPr>
@@ -24303,7 +24303,7 @@
           <p:cNvPr id="63" name="">
             <a:extLst xmlns:a="http://schemas.openxmlformats.org/drawingml/2006/main">
               <a:ext uri="{FF2B5EF4-FFF2-40B4-BE49-F238E27FC236}">
-                <a16:creationId xmlns:a16="http://schemas.microsoft.com/office/drawing/2014/main" id="{897CE0F9-EE2A-4276-B96A-8A3E8367D14F}"/>
+                <a16:creationId xmlns:a16="http://schemas.microsoft.com/office/drawing/2014/main" id="{1592C5BA-F786-4572-992B-E4E19FAEF1AE}"/>
               </a:ext>
             </a:extLst>
           </p:cNvPr>
@@ -24359,7 +24359,7 @@
           <p:cNvPr id="64" name="">
             <a:extLst xmlns:a="http://schemas.openxmlformats.org/drawingml/2006/main">
               <a:ext uri="{FF2B5EF4-FFF2-40B4-BE49-F238E27FC236}">
-                <a16:creationId xmlns:a16="http://schemas.microsoft.com/office/drawing/2014/main" id="{267342B7-BBE9-488C-AD19-C9DBDF14B7AF}"/>
+                <a16:creationId xmlns:a16="http://schemas.microsoft.com/office/drawing/2014/main" id="{DF0ED0C0-0955-4796-ACC4-4FB8485007D9}"/>
               </a:ext>
             </a:extLst>
           </p:cNvPr>
@@ -24415,7 +24415,7 @@
           <p:cNvPr id="65" name="">
             <a:extLst xmlns:a="http://schemas.openxmlformats.org/drawingml/2006/main">
               <a:ext uri="{FF2B5EF4-FFF2-40B4-BE49-F238E27FC236}">
-                <a16:creationId xmlns:a16="http://schemas.microsoft.com/office/drawing/2014/main" id="{ED39F787-D02F-4C35-A2A8-61E21C8A3984}"/>
+                <a16:creationId xmlns:a16="http://schemas.microsoft.com/office/drawing/2014/main" id="{443C5E15-BA37-4BA7-B8AB-BCEA37FBE6D0}"/>
               </a:ext>
             </a:extLst>
           </p:cNvPr>
@@ -24450,7 +24450,7 @@
           <p:cNvPr id="66" name="">
             <a:extLst xmlns:a="http://schemas.openxmlformats.org/drawingml/2006/main">
               <a:ext uri="{FF2B5EF4-FFF2-40B4-BE49-F238E27FC236}">
-                <a16:creationId xmlns:a16="http://schemas.microsoft.com/office/drawing/2014/main" id="{DB3D27C0-93BF-48DD-9751-A082EDF8E371}"/>
+                <a16:creationId xmlns:a16="http://schemas.microsoft.com/office/drawing/2014/main" id="{4A333E49-4A2F-4E58-BC91-DA7634DDCE5C}"/>
               </a:ext>
             </a:extLst>
           </p:cNvPr>
@@ -24506,7 +24506,7 @@
           <p:cNvPr id="67" name="">
             <a:extLst xmlns:a="http://schemas.openxmlformats.org/drawingml/2006/main">
               <a:ext uri="{FF2B5EF4-FFF2-40B4-BE49-F238E27FC236}">
-                <a16:creationId xmlns:a16="http://schemas.microsoft.com/office/drawing/2014/main" id="{1C103CC0-4D08-4233-95EE-BBA81821EBD0}"/>
+                <a16:creationId xmlns:a16="http://schemas.microsoft.com/office/drawing/2014/main" id="{997A0623-FAEC-41DA-B8CB-FC2E6BFCAEA4}"/>
               </a:ext>
             </a:extLst>
           </p:cNvPr>
@@ -24562,7 +24562,7 @@
           <p:cNvPr id="68" name="">
             <a:extLst xmlns:a="http://schemas.openxmlformats.org/drawingml/2006/main">
               <a:ext uri="{FF2B5EF4-FFF2-40B4-BE49-F238E27FC236}">
-                <a16:creationId xmlns:a16="http://schemas.microsoft.com/office/drawing/2014/main" id="{FBD6A104-ADF5-4C99-A876-F6799D24C707}"/>
+                <a16:creationId xmlns:a16="http://schemas.microsoft.com/office/drawing/2014/main" id="{C89169FE-EB0D-43C2-A6C6-79EB69F00094}"/>
               </a:ext>
             </a:extLst>
           </p:cNvPr>
@@ -24618,7 +24618,7 @@
           <p:cNvPr id="69" name="">
             <a:extLst xmlns:a="http://schemas.openxmlformats.org/drawingml/2006/main">
               <a:ext uri="{FF2B5EF4-FFF2-40B4-BE49-F238E27FC236}">
-                <a16:creationId xmlns:a16="http://schemas.microsoft.com/office/drawing/2014/main" id="{3AA7855E-A546-4038-994A-89DBD751D480}"/>
+                <a16:creationId xmlns:a16="http://schemas.microsoft.com/office/drawing/2014/main" id="{6A32744D-CBAE-43CD-BF72-727FF5455F33}"/>
               </a:ext>
             </a:extLst>
           </p:cNvPr>
@@ -24672,7 +24672,7 @@
     </p:spTree>
     <p:extLst>
       <p:ext uri="{BB962C8B-B14F-4D97-AF65-F5344CB8AC3E}">
-        <p14:creationId xmlns:p14="http://schemas.microsoft.com/office/powerpoint/2010/main" val="1909809642"/>
+        <p14:creationId xmlns:p14="http://schemas.microsoft.com/office/powerpoint/2010/main" val="462198172"/>
       </p:ext>
     </p:extLst>
   </p:cSld>
@@ -24703,7 +24703,7 @@
           <p:cNvPr id="1" name="">
             <a:extLst xmlns:a="http://schemas.openxmlformats.org/drawingml/2006/main">
               <a:ext uri="{FF2B5EF4-FFF2-40B4-BE49-F238E27FC236}">
-                <a16:creationId xmlns:a16="http://schemas.microsoft.com/office/drawing/2014/main" id="{E0F7F2EE-04BE-4C34-8CA1-63EA03C8019B}"/>
+                <a16:creationId xmlns:a16="http://schemas.microsoft.com/office/drawing/2014/main" id="{BB403932-920B-4B64-904A-0FD5868F790C}"/>
               </a:ext>
             </a:extLst>
           </p:cNvPr>
@@ -24734,7 +24734,7 @@
           <p:cNvPr id="2" name="">
             <a:extLst xmlns:a="http://schemas.openxmlformats.org/drawingml/2006/main">
               <a:ext uri="{FF2B5EF4-FFF2-40B4-BE49-F238E27FC236}">
-                <a16:creationId xmlns:a16="http://schemas.microsoft.com/office/drawing/2014/main" id="{65DD3893-9D30-40CB-98E5-E77D0DE79D57}"/>
+                <a16:creationId xmlns:a16="http://schemas.microsoft.com/office/drawing/2014/main" id="{53F4E615-C429-4384-BA7C-F2987CC169F2}"/>
               </a:ext>
             </a:extLst>
           </p:cNvPr>
@@ -24790,7 +24790,7 @@
           <p:cNvPr id="3" name="">
             <a:extLst xmlns:a="http://schemas.openxmlformats.org/drawingml/2006/main">
               <a:ext uri="{FF2B5EF4-FFF2-40B4-BE49-F238E27FC236}">
-                <a16:creationId xmlns:a16="http://schemas.microsoft.com/office/drawing/2014/main" id="{FD5F128B-B96C-4D26-8846-DE2C671278C0}"/>
+                <a16:creationId xmlns:a16="http://schemas.microsoft.com/office/drawing/2014/main" id="{E3369F2C-EDBD-4C18-B840-9750A38121F3}"/>
               </a:ext>
             </a:extLst>
           </p:cNvPr>
@@ -24846,7 +24846,7 @@
           <p:cNvPr id="4" name="">
             <a:extLst xmlns:a="http://schemas.openxmlformats.org/drawingml/2006/main">
               <a:ext uri="{FF2B5EF4-FFF2-40B4-BE49-F238E27FC236}">
-                <a16:creationId xmlns:a16="http://schemas.microsoft.com/office/drawing/2014/main" id="{98BA7160-A1A1-4389-91B5-8307E72D96E4}"/>
+                <a16:creationId xmlns:a16="http://schemas.microsoft.com/office/drawing/2014/main" id="{F2B14334-1A93-41B8-8ADE-DDA089068944}"/>
               </a:ext>
             </a:extLst>
           </p:cNvPr>
@@ -24881,7 +24881,7 @@
           <p:cNvPr id="5" name="">
             <a:extLst xmlns:a="http://schemas.openxmlformats.org/drawingml/2006/main">
               <a:ext uri="{FF2B5EF4-FFF2-40B4-BE49-F238E27FC236}">
-                <a16:creationId xmlns:a16="http://schemas.microsoft.com/office/drawing/2014/main" id="{D24A2CED-32DE-496C-A0DB-A2CE36E8E608}"/>
+                <a16:creationId xmlns:a16="http://schemas.microsoft.com/office/drawing/2014/main" id="{9ADB82F3-42DE-4153-8E42-6B3C318C74CA}"/>
               </a:ext>
             </a:extLst>
           </p:cNvPr>
@@ -24937,7 +24937,7 @@
           <p:cNvPr id="6" name="">
             <a:extLst xmlns:a="http://schemas.openxmlformats.org/drawingml/2006/main">
               <a:ext uri="{FF2B5EF4-FFF2-40B4-BE49-F238E27FC236}">
-                <a16:creationId xmlns:a16="http://schemas.microsoft.com/office/drawing/2014/main" id="{CC4F6126-8CAC-4DB8-85C4-14C004261A74}"/>
+                <a16:creationId xmlns:a16="http://schemas.microsoft.com/office/drawing/2014/main" id="{178E5505-55D6-4386-B0E2-E9AF4857A343}"/>
               </a:ext>
             </a:extLst>
           </p:cNvPr>
@@ -24993,7 +24993,7 @@
           <p:cNvPr id="7" name="">
             <a:extLst xmlns:a="http://schemas.openxmlformats.org/drawingml/2006/main">
               <a:ext uri="{FF2B5EF4-FFF2-40B4-BE49-F238E27FC236}">
-                <a16:creationId xmlns:a16="http://schemas.microsoft.com/office/drawing/2014/main" id="{851F7818-5851-49B6-B5C9-7F6AAEC521E2}"/>
+                <a16:creationId xmlns:a16="http://schemas.microsoft.com/office/drawing/2014/main" id="{FA22F291-DC3A-4031-8776-8442155F3567}"/>
               </a:ext>
             </a:extLst>
           </p:cNvPr>
@@ -25049,7 +25049,7 @@
           <p:cNvPr id="8" name="">
             <a:extLst xmlns:a="http://schemas.openxmlformats.org/drawingml/2006/main">
               <a:ext uri="{FF2B5EF4-FFF2-40B4-BE49-F238E27FC236}">
-                <a16:creationId xmlns:a16="http://schemas.microsoft.com/office/drawing/2014/main" id="{D5739D00-23DB-4378-909B-A09DCD662002}"/>
+                <a16:creationId xmlns:a16="http://schemas.microsoft.com/office/drawing/2014/main" id="{772E5977-03E7-47B1-9A9B-2C45630C9A1C}"/>
               </a:ext>
             </a:extLst>
           </p:cNvPr>
@@ -25080,7 +25080,7 @@
           <p:cNvPr id="9" name="">
             <a:extLst xmlns:a="http://schemas.openxmlformats.org/drawingml/2006/main">
               <a:ext uri="{FF2B5EF4-FFF2-40B4-BE49-F238E27FC236}">
-                <a16:creationId xmlns:a16="http://schemas.microsoft.com/office/drawing/2014/main" id="{C0633663-19F7-4296-B58A-F8D7D44CB669}"/>
+                <a16:creationId xmlns:a16="http://schemas.microsoft.com/office/drawing/2014/main" id="{D4106B39-AC1E-416D-AAB3-3B88D4F4C2FC}"/>
               </a:ext>
             </a:extLst>
           </p:cNvPr>
@@ -25111,7 +25111,7 @@
           <p:cNvPr id="10" name="">
             <a:extLst xmlns:a="http://schemas.openxmlformats.org/drawingml/2006/main">
               <a:ext uri="{FF2B5EF4-FFF2-40B4-BE49-F238E27FC236}">
-                <a16:creationId xmlns:a16="http://schemas.microsoft.com/office/drawing/2014/main" id="{F9B594AF-8813-440A-856C-CF80E595D6AC}"/>
+                <a16:creationId xmlns:a16="http://schemas.microsoft.com/office/drawing/2014/main" id="{D5384532-78F1-4AD1-9699-2B1E6F1B5232}"/>
               </a:ext>
             </a:extLst>
           </p:cNvPr>
@@ -25146,7 +25146,7 @@
           <p:cNvPr id="11" name="">
             <a:extLst xmlns:a="http://schemas.openxmlformats.org/drawingml/2006/main">
               <a:ext uri="{FF2B5EF4-FFF2-40B4-BE49-F238E27FC236}">
-                <a16:creationId xmlns:a16="http://schemas.microsoft.com/office/drawing/2014/main" id="{5ECAE6B0-7F72-4208-B826-AE3E024D22C0}"/>
+                <a16:creationId xmlns:a16="http://schemas.microsoft.com/office/drawing/2014/main" id="{43A64774-EC77-49BC-8DA2-260B1314AF6B}"/>
               </a:ext>
             </a:extLst>
           </p:cNvPr>
@@ -25202,7 +25202,7 @@
           <p:cNvPr id="12" name="">
             <a:extLst xmlns:a="http://schemas.openxmlformats.org/drawingml/2006/main">
               <a:ext uri="{FF2B5EF4-FFF2-40B4-BE49-F238E27FC236}">
-                <a16:creationId xmlns:a16="http://schemas.microsoft.com/office/drawing/2014/main" id="{AA449577-F239-4B2B-A888-2DC3A01ED963}"/>
+                <a16:creationId xmlns:a16="http://schemas.microsoft.com/office/drawing/2014/main" id="{E1AD8C0D-138E-4533-8DC3-2A88C2AE36D4}"/>
               </a:ext>
             </a:extLst>
           </p:cNvPr>
@@ -25258,7 +25258,7 @@
           <p:cNvPr id="13" name="">
             <a:extLst xmlns:a="http://schemas.openxmlformats.org/drawingml/2006/main">
               <a:ext uri="{FF2B5EF4-FFF2-40B4-BE49-F238E27FC236}">
-                <a16:creationId xmlns:a16="http://schemas.microsoft.com/office/drawing/2014/main" id="{91D9CFC2-D014-4BDB-861C-1E08D4A76C64}"/>
+                <a16:creationId xmlns:a16="http://schemas.microsoft.com/office/drawing/2014/main" id="{4EAB816C-E776-43B5-B1ED-89E14B67C22D}"/>
               </a:ext>
             </a:extLst>
           </p:cNvPr>
@@ -25314,7 +25314,7 @@
           <p:cNvPr id="14" name="">
             <a:extLst xmlns:a="http://schemas.openxmlformats.org/drawingml/2006/main">
               <a:ext uri="{FF2B5EF4-FFF2-40B4-BE49-F238E27FC236}">
-                <a16:creationId xmlns:a16="http://schemas.microsoft.com/office/drawing/2014/main" id="{58AF058E-9819-40B5-87B8-94C91DD3D708}"/>
+                <a16:creationId xmlns:a16="http://schemas.microsoft.com/office/drawing/2014/main" id="{1EDBFCF5-5A78-44D4-8012-B75EAEE48DE3}"/>
               </a:ext>
             </a:extLst>
           </p:cNvPr>
@@ -25345,7 +25345,7 @@
           <p:cNvPr id="15" name="">
             <a:extLst xmlns:a="http://schemas.openxmlformats.org/drawingml/2006/main">
               <a:ext uri="{FF2B5EF4-FFF2-40B4-BE49-F238E27FC236}">
-                <a16:creationId xmlns:a16="http://schemas.microsoft.com/office/drawing/2014/main" id="{9181E673-9AC7-45DF-9241-E165EA594B60}"/>
+                <a16:creationId xmlns:a16="http://schemas.microsoft.com/office/drawing/2014/main" id="{AA28A193-7A53-44AB-9397-49D27E6CE129}"/>
               </a:ext>
             </a:extLst>
           </p:cNvPr>
@@ -25376,7 +25376,7 @@
           <p:cNvPr id="16" name="">
             <a:extLst xmlns:a="http://schemas.openxmlformats.org/drawingml/2006/main">
               <a:ext uri="{FF2B5EF4-FFF2-40B4-BE49-F238E27FC236}">
-                <a16:creationId xmlns:a16="http://schemas.microsoft.com/office/drawing/2014/main" id="{CE258BA9-1DE8-4729-86B0-85F38F317E9F}"/>
+                <a16:creationId xmlns:a16="http://schemas.microsoft.com/office/drawing/2014/main" id="{E3258A69-D42A-428B-AB00-7A46B7B314E1}"/>
               </a:ext>
             </a:extLst>
           </p:cNvPr>
@@ -25411,7 +25411,7 @@
           <p:cNvPr id="17" name="">
             <a:extLst xmlns:a="http://schemas.openxmlformats.org/drawingml/2006/main">
               <a:ext uri="{FF2B5EF4-FFF2-40B4-BE49-F238E27FC236}">
-                <a16:creationId xmlns:a16="http://schemas.microsoft.com/office/drawing/2014/main" id="{18551E6D-9289-4C98-BC99-0E3C0A54BE35}"/>
+                <a16:creationId xmlns:a16="http://schemas.microsoft.com/office/drawing/2014/main" id="{B7B851DA-B2F8-4B4C-87D5-E814F318DCE8}"/>
               </a:ext>
             </a:extLst>
           </p:cNvPr>
@@ -25467,7 +25467,7 @@
           <p:cNvPr id="18" name="">
             <a:extLst xmlns:a="http://schemas.openxmlformats.org/drawingml/2006/main">
               <a:ext uri="{FF2B5EF4-FFF2-40B4-BE49-F238E27FC236}">
-                <a16:creationId xmlns:a16="http://schemas.microsoft.com/office/drawing/2014/main" id="{B3836C96-9168-4A02-BDE7-42C6BD070CE6}"/>
+                <a16:creationId xmlns:a16="http://schemas.microsoft.com/office/drawing/2014/main" id="{E29D7AE5-E71C-4E67-AD3B-FD5AAFDCF324}"/>
               </a:ext>
             </a:extLst>
           </p:cNvPr>
@@ -25523,7 +25523,7 @@
           <p:cNvPr id="19" name="">
             <a:extLst xmlns:a="http://schemas.openxmlformats.org/drawingml/2006/main">
               <a:ext uri="{FF2B5EF4-FFF2-40B4-BE49-F238E27FC236}">
-                <a16:creationId xmlns:a16="http://schemas.microsoft.com/office/drawing/2014/main" id="{2C0ACFC7-ADEA-46B6-AAB3-1033E2BA7701}"/>
+                <a16:creationId xmlns:a16="http://schemas.microsoft.com/office/drawing/2014/main" id="{90F55147-AD3F-4580-A5B5-E77F48CBBC87}"/>
               </a:ext>
             </a:extLst>
           </p:cNvPr>
@@ -25579,7 +25579,7 @@
           <p:cNvPr id="20" name="">
             <a:extLst xmlns:a="http://schemas.openxmlformats.org/drawingml/2006/main">
               <a:ext uri="{FF2B5EF4-FFF2-40B4-BE49-F238E27FC236}">
-                <a16:creationId xmlns:a16="http://schemas.microsoft.com/office/drawing/2014/main" id="{F876BC4D-BE6D-45EB-A5A9-0AE3E9DF8AC2}"/>
+                <a16:creationId xmlns:a16="http://schemas.microsoft.com/office/drawing/2014/main" id="{3FB9446C-A670-456A-9505-C6618051B98C}"/>
               </a:ext>
             </a:extLst>
           </p:cNvPr>
@@ -25610,7 +25610,7 @@
           <p:cNvPr id="21" name="">
             <a:extLst xmlns:a="http://schemas.openxmlformats.org/drawingml/2006/main">
               <a:ext uri="{FF2B5EF4-FFF2-40B4-BE49-F238E27FC236}">
-                <a16:creationId xmlns:a16="http://schemas.microsoft.com/office/drawing/2014/main" id="{A17B7286-8652-438F-ABE8-76F6ABD792CC}"/>
+                <a16:creationId xmlns:a16="http://schemas.microsoft.com/office/drawing/2014/main" id="{F9F4B3F3-523B-43F2-8EB0-DFC3B101D6FF}"/>
               </a:ext>
             </a:extLst>
           </p:cNvPr>
@@ -25645,7 +25645,7 @@
           <p:cNvPr id="22" name="">
             <a:extLst xmlns:a="http://schemas.openxmlformats.org/drawingml/2006/main">
               <a:ext uri="{FF2B5EF4-FFF2-40B4-BE49-F238E27FC236}">
-                <a16:creationId xmlns:a16="http://schemas.microsoft.com/office/drawing/2014/main" id="{81B5DFE9-1BEF-473B-93FF-651109A0CA3A}"/>
+                <a16:creationId xmlns:a16="http://schemas.microsoft.com/office/drawing/2014/main" id="{EA8AA20A-BD15-4FC9-86B6-C84C9B759355}"/>
               </a:ext>
             </a:extLst>
           </p:cNvPr>
@@ -25701,7 +25701,7 @@
           <p:cNvPr id="23" name="">
             <a:extLst xmlns:a="http://schemas.openxmlformats.org/drawingml/2006/main">
               <a:ext uri="{FF2B5EF4-FFF2-40B4-BE49-F238E27FC236}">
-                <a16:creationId xmlns:a16="http://schemas.microsoft.com/office/drawing/2014/main" id="{98AC9ABB-0AB6-4851-89CB-8FE89E520EBE}"/>
+                <a16:creationId xmlns:a16="http://schemas.microsoft.com/office/drawing/2014/main" id="{B674FADD-65C1-4B21-B26E-79F9C511137B}"/>
               </a:ext>
             </a:extLst>
           </p:cNvPr>
@@ -25757,7 +25757,7 @@
           <p:cNvPr id="24" name="">
             <a:extLst xmlns:a="http://schemas.openxmlformats.org/drawingml/2006/main">
               <a:ext uri="{FF2B5EF4-FFF2-40B4-BE49-F238E27FC236}">
-                <a16:creationId xmlns:a16="http://schemas.microsoft.com/office/drawing/2014/main" id="{846DA620-727B-49E4-A395-DE1C1FBD2D3A}"/>
+                <a16:creationId xmlns:a16="http://schemas.microsoft.com/office/drawing/2014/main" id="{81FE1F4A-D271-4A50-A08B-FADD2CBCDDB2}"/>
               </a:ext>
             </a:extLst>
           </p:cNvPr>
@@ -25813,7 +25813,7 @@
           <p:cNvPr id="25" name="">
             <a:extLst xmlns:a="http://schemas.openxmlformats.org/drawingml/2006/main">
               <a:ext uri="{FF2B5EF4-FFF2-40B4-BE49-F238E27FC236}">
-                <a16:creationId xmlns:a16="http://schemas.microsoft.com/office/drawing/2014/main" id="{CF9689F4-39A6-4D5E-8F20-61D65A6FF152}"/>
+                <a16:creationId xmlns:a16="http://schemas.microsoft.com/office/drawing/2014/main" id="{FFE05A7E-DB97-4FB1-973C-EB59835F1C06}"/>
               </a:ext>
             </a:extLst>
           </p:cNvPr>
@@ -25844,7 +25844,7 @@
           <p:cNvPr id="26" name="">
             <a:extLst xmlns:a="http://schemas.openxmlformats.org/drawingml/2006/main">
               <a:ext uri="{FF2B5EF4-FFF2-40B4-BE49-F238E27FC236}">
-                <a16:creationId xmlns:a16="http://schemas.microsoft.com/office/drawing/2014/main" id="{1AB62203-11C2-41D0-BD41-486BEBAACE61}"/>
+                <a16:creationId xmlns:a16="http://schemas.microsoft.com/office/drawing/2014/main" id="{3DBD6580-2F8E-4ACA-903B-6E6B65EC8BF0}"/>
               </a:ext>
             </a:extLst>
           </p:cNvPr>
@@ -25875,7 +25875,7 @@
           <p:cNvPr id="27" name="">
             <a:extLst xmlns:a="http://schemas.openxmlformats.org/drawingml/2006/main">
               <a:ext uri="{FF2B5EF4-FFF2-40B4-BE49-F238E27FC236}">
-                <a16:creationId xmlns:a16="http://schemas.microsoft.com/office/drawing/2014/main" id="{740527D7-997E-44AE-BF71-6C542F1E2200}"/>
+                <a16:creationId xmlns:a16="http://schemas.microsoft.com/office/drawing/2014/main" id="{1311009D-6260-4676-8551-4D165FE87295}"/>
               </a:ext>
             </a:extLst>
           </p:cNvPr>
@@ -25910,7 +25910,7 @@
           <p:cNvPr id="28" name="">
             <a:extLst xmlns:a="http://schemas.openxmlformats.org/drawingml/2006/main">
               <a:ext uri="{FF2B5EF4-FFF2-40B4-BE49-F238E27FC236}">
-                <a16:creationId xmlns:a16="http://schemas.microsoft.com/office/drawing/2014/main" id="{1DEEF148-D802-423A-84FE-3C97E29A9E2D}"/>
+                <a16:creationId xmlns:a16="http://schemas.microsoft.com/office/drawing/2014/main" id="{51A82ED4-FC16-4EE7-B274-C4F947C2EA05}"/>
               </a:ext>
             </a:extLst>
           </p:cNvPr>
@@ -25966,7 +25966,7 @@
           <p:cNvPr id="29" name="">
             <a:extLst xmlns:a="http://schemas.openxmlformats.org/drawingml/2006/main">
               <a:ext uri="{FF2B5EF4-FFF2-40B4-BE49-F238E27FC236}">
-                <a16:creationId xmlns:a16="http://schemas.microsoft.com/office/drawing/2014/main" id="{4249D039-9223-4EF9-AD71-ED08EF3B6BF9}"/>
+                <a16:creationId xmlns:a16="http://schemas.microsoft.com/office/drawing/2014/main" id="{C4A3D39A-C3AD-4D4F-9588-E61AECFAD99A}"/>
               </a:ext>
             </a:extLst>
           </p:cNvPr>
@@ -26022,7 +26022,7 @@
           <p:cNvPr id="30" name="">
             <a:extLst xmlns:a="http://schemas.openxmlformats.org/drawingml/2006/main">
               <a:ext uri="{FF2B5EF4-FFF2-40B4-BE49-F238E27FC236}">
-                <a16:creationId xmlns:a16="http://schemas.microsoft.com/office/drawing/2014/main" id="{FB4F8363-E092-419A-8608-D17FD2FDA2A3}"/>
+                <a16:creationId xmlns:a16="http://schemas.microsoft.com/office/drawing/2014/main" id="{BB8121E1-9333-4B99-8E9F-798A1845E04A}"/>
               </a:ext>
             </a:extLst>
           </p:cNvPr>
@@ -26078,7 +26078,7 @@
           <p:cNvPr id="31" name="">
             <a:extLst xmlns:a="http://schemas.openxmlformats.org/drawingml/2006/main">
               <a:ext uri="{FF2B5EF4-FFF2-40B4-BE49-F238E27FC236}">
-                <a16:creationId xmlns:a16="http://schemas.microsoft.com/office/drawing/2014/main" id="{FB973F87-47CE-4A67-9688-57BAB178C414}"/>
+                <a16:creationId xmlns:a16="http://schemas.microsoft.com/office/drawing/2014/main" id="{67C909FB-B253-4CC9-A322-DD1779D747DD}"/>
               </a:ext>
             </a:extLst>
           </p:cNvPr>
@@ -26109,7 +26109,7 @@
           <p:cNvPr id="32" name="">
             <a:extLst xmlns:a="http://schemas.openxmlformats.org/drawingml/2006/main">
               <a:ext uri="{FF2B5EF4-FFF2-40B4-BE49-F238E27FC236}">
-                <a16:creationId xmlns:a16="http://schemas.microsoft.com/office/drawing/2014/main" id="{9BABDAE2-88B8-4E62-BB5D-2252978F9970}"/>
+                <a16:creationId xmlns:a16="http://schemas.microsoft.com/office/drawing/2014/main" id="{40578C96-8D50-4E50-A316-A30B8D22FC02}"/>
               </a:ext>
             </a:extLst>
           </p:cNvPr>
@@ -26140,7 +26140,7 @@
           <p:cNvPr id="33" name="">
             <a:extLst xmlns:a="http://schemas.openxmlformats.org/drawingml/2006/main">
               <a:ext uri="{FF2B5EF4-FFF2-40B4-BE49-F238E27FC236}">
-                <a16:creationId xmlns:a16="http://schemas.microsoft.com/office/drawing/2014/main" id="{213E92FE-F740-4377-9FD4-60D0E68205B5}"/>
+                <a16:creationId xmlns:a16="http://schemas.microsoft.com/office/drawing/2014/main" id="{CF3BEFDE-7509-4F7B-9084-1652CF1129BD}"/>
               </a:ext>
             </a:extLst>
           </p:cNvPr>
@@ -26175,7 +26175,7 @@
           <p:cNvPr id="34" name="">
             <a:extLst xmlns:a="http://schemas.openxmlformats.org/drawingml/2006/main">
               <a:ext uri="{FF2B5EF4-FFF2-40B4-BE49-F238E27FC236}">
-                <a16:creationId xmlns:a16="http://schemas.microsoft.com/office/drawing/2014/main" id="{E8DAC80D-03A4-40A3-94F0-244ADC37E886}"/>
+                <a16:creationId xmlns:a16="http://schemas.microsoft.com/office/drawing/2014/main" id="{DED6079A-5E19-44F3-9854-8F6F708015EC}"/>
               </a:ext>
             </a:extLst>
           </p:cNvPr>
@@ -26231,7 +26231,7 @@
           <p:cNvPr id="35" name="">
             <a:extLst xmlns:a="http://schemas.openxmlformats.org/drawingml/2006/main">
               <a:ext uri="{FF2B5EF4-FFF2-40B4-BE49-F238E27FC236}">
-                <a16:creationId xmlns:a16="http://schemas.microsoft.com/office/drawing/2014/main" id="{F70487E4-6163-4EA0-9FEE-2761517D0355}"/>
+                <a16:creationId xmlns:a16="http://schemas.microsoft.com/office/drawing/2014/main" id="{3A14E337-CF25-4575-A16C-0DE9A41AB9B6}"/>
               </a:ext>
             </a:extLst>
           </p:cNvPr>
@@ -26287,7 +26287,7 @@
           <p:cNvPr id="36" name="">
             <a:extLst xmlns:a="http://schemas.openxmlformats.org/drawingml/2006/main">
               <a:ext uri="{FF2B5EF4-FFF2-40B4-BE49-F238E27FC236}">
-                <a16:creationId xmlns:a16="http://schemas.microsoft.com/office/drawing/2014/main" id="{8DE69600-2933-4003-9B75-D1FF7A6944B7}"/>
+                <a16:creationId xmlns:a16="http://schemas.microsoft.com/office/drawing/2014/main" id="{07BC572A-79DC-4E56-B3F0-DCE96D8925BC}"/>
               </a:ext>
             </a:extLst>
           </p:cNvPr>
@@ -26343,7 +26343,7 @@
           <p:cNvPr id="37" name="">
             <a:extLst xmlns:a="http://schemas.openxmlformats.org/drawingml/2006/main">
               <a:ext uri="{FF2B5EF4-FFF2-40B4-BE49-F238E27FC236}">
-                <a16:creationId xmlns:a16="http://schemas.microsoft.com/office/drawing/2014/main" id="{FEB09DF1-6D58-4E6F-94B9-8812EEEDED4D}"/>
+                <a16:creationId xmlns:a16="http://schemas.microsoft.com/office/drawing/2014/main" id="{DE2E3F8B-3800-4A44-905D-7D162B42ECFC}"/>
               </a:ext>
             </a:extLst>
           </p:cNvPr>
@@ -26374,7 +26374,7 @@
           <p:cNvPr id="38" name="">
             <a:extLst xmlns:a="http://schemas.openxmlformats.org/drawingml/2006/main">
               <a:ext uri="{FF2B5EF4-FFF2-40B4-BE49-F238E27FC236}">
-                <a16:creationId xmlns:a16="http://schemas.microsoft.com/office/drawing/2014/main" id="{CAD3CBAE-6530-48F6-B3E7-D3056C9B8404}"/>
+                <a16:creationId xmlns:a16="http://schemas.microsoft.com/office/drawing/2014/main" id="{674D1336-CA53-4B9C-9AEA-B27C83D2447E}"/>
               </a:ext>
             </a:extLst>
           </p:cNvPr>
@@ -26428,7 +26428,7 @@
     </p:spTree>
     <p:extLst>
       <p:ext uri="{BB962C8B-B14F-4D97-AF65-F5344CB8AC3E}">
-        <p14:creationId xmlns:p14="http://schemas.microsoft.com/office/powerpoint/2010/main" val="573311289"/>
+        <p14:creationId xmlns:p14="http://schemas.microsoft.com/office/powerpoint/2010/main" val="1125279885"/>
       </p:ext>
     </p:extLst>
   </p:cSld>
@@ -26459,7 +26459,7 @@
           <p:cNvPr id="1" name="">
             <a:extLst xmlns:a="http://schemas.openxmlformats.org/drawingml/2006/main">
               <a:ext uri="{FF2B5EF4-FFF2-40B4-BE49-F238E27FC236}">
-                <a16:creationId xmlns:a16="http://schemas.microsoft.com/office/drawing/2014/main" id="{BAD8E3D0-3276-438A-BB66-8AC864402AAE}"/>
+                <a16:creationId xmlns:a16="http://schemas.microsoft.com/office/drawing/2014/main" id="{F8D69142-34C2-43E1-BB3B-C1D96145C2B6}"/>
               </a:ext>
             </a:extLst>
           </p:cNvPr>
@@ -26490,7 +26490,7 @@
           <p:cNvPr id="2" name="">
             <a:extLst xmlns:a="http://schemas.openxmlformats.org/drawingml/2006/main">
               <a:ext uri="{FF2B5EF4-FFF2-40B4-BE49-F238E27FC236}">
-                <a16:creationId xmlns:a16="http://schemas.microsoft.com/office/drawing/2014/main" id="{202C37E7-CE4A-4135-8FD6-3AFD768399C7}"/>
+                <a16:creationId xmlns:a16="http://schemas.microsoft.com/office/drawing/2014/main" id="{D85208A7-6E32-4B00-A06A-7AC20C394E04}"/>
               </a:ext>
             </a:extLst>
           </p:cNvPr>
@@ -26521,7 +26521,7 @@
           <p:cNvPr id="3" name="">
             <a:extLst xmlns:a="http://schemas.openxmlformats.org/drawingml/2006/main">
               <a:ext uri="{FF2B5EF4-FFF2-40B4-BE49-F238E27FC236}">
-                <a16:creationId xmlns:a16="http://schemas.microsoft.com/office/drawing/2014/main" id="{E4208433-98AA-4052-BE27-B0FB1D4C50DF}"/>
+                <a16:creationId xmlns:a16="http://schemas.microsoft.com/office/drawing/2014/main" id="{01371421-D43C-4693-9CDF-F72EED784FDE}"/>
               </a:ext>
             </a:extLst>
           </p:cNvPr>
@@ -26552,7 +26552,7 @@
           <p:cNvPr id="4" name="">
             <a:extLst xmlns:a="http://schemas.openxmlformats.org/drawingml/2006/main">
               <a:ext uri="{FF2B5EF4-FFF2-40B4-BE49-F238E27FC236}">
-                <a16:creationId xmlns:a16="http://schemas.microsoft.com/office/drawing/2014/main" id="{EF11B8FB-6688-4FD9-8C39-77702EE042B3}"/>
+                <a16:creationId xmlns:a16="http://schemas.microsoft.com/office/drawing/2014/main" id="{2B335BED-9D29-44FF-BC1F-4C4448E4EEC9}"/>
               </a:ext>
             </a:extLst>
           </p:cNvPr>
@@ -26583,7 +26583,7 @@
           <p:cNvPr id="5" name="">
             <a:extLst xmlns:a="http://schemas.openxmlformats.org/drawingml/2006/main">
               <a:ext uri="{FF2B5EF4-FFF2-40B4-BE49-F238E27FC236}">
-                <a16:creationId xmlns:a16="http://schemas.microsoft.com/office/drawing/2014/main" id="{CF85661D-2E42-4088-A821-EA4AC889F1A0}"/>
+                <a16:creationId xmlns:a16="http://schemas.microsoft.com/office/drawing/2014/main" id="{9D71BF61-1947-4C70-85F0-7909230B634F}"/>
               </a:ext>
             </a:extLst>
           </p:cNvPr>
@@ -26614,7 +26614,7 @@
           <p:cNvPr id="6" name="">
             <a:extLst xmlns:a="http://schemas.openxmlformats.org/drawingml/2006/main">
               <a:ext uri="{FF2B5EF4-FFF2-40B4-BE49-F238E27FC236}">
-                <a16:creationId xmlns:a16="http://schemas.microsoft.com/office/drawing/2014/main" id="{BD71A30C-0C96-4196-A04A-547BE42D36C5}"/>
+                <a16:creationId xmlns:a16="http://schemas.microsoft.com/office/drawing/2014/main" id="{CDD670EE-FD6F-4759-ACE4-1F1A64A60212}"/>
               </a:ext>
             </a:extLst>
           </p:cNvPr>
@@ -26645,7 +26645,7 @@
           <p:cNvPr id="7" name="">
             <a:extLst xmlns:a="http://schemas.openxmlformats.org/drawingml/2006/main">
               <a:ext uri="{FF2B5EF4-FFF2-40B4-BE49-F238E27FC236}">
-                <a16:creationId xmlns:a16="http://schemas.microsoft.com/office/drawing/2014/main" id="{74913E99-8179-4340-83BF-BCA0FC3E722F}"/>
+                <a16:creationId xmlns:a16="http://schemas.microsoft.com/office/drawing/2014/main" id="{EA0A6065-8133-4212-A06D-330B4DEC6627}"/>
               </a:ext>
             </a:extLst>
           </p:cNvPr>
@@ -26676,7 +26676,7 @@
           <p:cNvPr id="8" name="">
             <a:extLst xmlns:a="http://schemas.openxmlformats.org/drawingml/2006/main">
               <a:ext uri="{FF2B5EF4-FFF2-40B4-BE49-F238E27FC236}">
-                <a16:creationId xmlns:a16="http://schemas.microsoft.com/office/drawing/2014/main" id="{71A35180-B95D-46A6-89A5-DD6A26D32A91}"/>
+                <a16:creationId xmlns:a16="http://schemas.microsoft.com/office/drawing/2014/main" id="{DFE022EE-3826-44F6-A5D4-CC8E5C78DE7A}"/>
               </a:ext>
             </a:extLst>
           </p:cNvPr>
@@ -26707,7 +26707,7 @@
           <p:cNvPr id="9" name="">
             <a:extLst xmlns:a="http://schemas.openxmlformats.org/drawingml/2006/main">
               <a:ext uri="{FF2B5EF4-FFF2-40B4-BE49-F238E27FC236}">
-                <a16:creationId xmlns:a16="http://schemas.microsoft.com/office/drawing/2014/main" id="{68538013-C58C-4C8E-85D8-D08E8BCABA48}"/>
+                <a16:creationId xmlns:a16="http://schemas.microsoft.com/office/drawing/2014/main" id="{43AC280B-3553-44C9-A250-FDBBB44E8543}"/>
               </a:ext>
             </a:extLst>
           </p:cNvPr>
@@ -26738,7 +26738,7 @@
           <p:cNvPr id="10" name="">
             <a:extLst xmlns:a="http://schemas.openxmlformats.org/drawingml/2006/main">
               <a:ext uri="{FF2B5EF4-FFF2-40B4-BE49-F238E27FC236}">
-                <a16:creationId xmlns:a16="http://schemas.microsoft.com/office/drawing/2014/main" id="{2EC01BC8-01A9-40FA-8384-2BAE4C533E6B}"/>
+                <a16:creationId xmlns:a16="http://schemas.microsoft.com/office/drawing/2014/main" id="{2A029399-3459-45AB-A43B-E643D5ABBE40}"/>
               </a:ext>
             </a:extLst>
           </p:cNvPr>
@@ -26769,7 +26769,7 @@
           <p:cNvPr id="11" name="">
             <a:extLst xmlns:a="http://schemas.openxmlformats.org/drawingml/2006/main">
               <a:ext uri="{FF2B5EF4-FFF2-40B4-BE49-F238E27FC236}">
-                <a16:creationId xmlns:a16="http://schemas.microsoft.com/office/drawing/2014/main" id="{BCE89D84-9B76-4786-8F2D-A430B4BBCF08}"/>
+                <a16:creationId xmlns:a16="http://schemas.microsoft.com/office/drawing/2014/main" id="{BC3890D6-7D12-4AB6-AF87-43BD2B36EB2D}"/>
               </a:ext>
             </a:extLst>
           </p:cNvPr>
@@ -26800,7 +26800,7 @@
           <p:cNvPr id="12" name="">
             <a:extLst xmlns:a="http://schemas.openxmlformats.org/drawingml/2006/main">
               <a:ext uri="{FF2B5EF4-FFF2-40B4-BE49-F238E27FC236}">
-                <a16:creationId xmlns:a16="http://schemas.microsoft.com/office/drawing/2014/main" id="{9FA2A703-3D53-42DD-BDB0-78A8ED3CA772}"/>
+                <a16:creationId xmlns:a16="http://schemas.microsoft.com/office/drawing/2014/main" id="{58975223-CBFD-4D17-8670-A5B3A4A08603}"/>
               </a:ext>
             </a:extLst>
           </p:cNvPr>
@@ -26831,7 +26831,7 @@
           <p:cNvPr id="13" name="">
             <a:extLst xmlns:a="http://schemas.openxmlformats.org/drawingml/2006/main">
               <a:ext uri="{FF2B5EF4-FFF2-40B4-BE49-F238E27FC236}">
-                <a16:creationId xmlns:a16="http://schemas.microsoft.com/office/drawing/2014/main" id="{CFE5EBBA-639A-4C04-9311-70E47F03802B}"/>
+                <a16:creationId xmlns:a16="http://schemas.microsoft.com/office/drawing/2014/main" id="{32757EE5-18C5-4010-9D16-415C45ECF199}"/>
               </a:ext>
             </a:extLst>
           </p:cNvPr>
@@ -26862,7 +26862,7 @@
           <p:cNvPr id="14" name="">
             <a:extLst xmlns:a="http://schemas.openxmlformats.org/drawingml/2006/main">
               <a:ext uri="{FF2B5EF4-FFF2-40B4-BE49-F238E27FC236}">
-                <a16:creationId xmlns:a16="http://schemas.microsoft.com/office/drawing/2014/main" id="{416B6D31-3A34-4DAA-B962-F38459231D63}"/>
+                <a16:creationId xmlns:a16="http://schemas.microsoft.com/office/drawing/2014/main" id="{0A4230DC-14AE-4889-AE3A-E9538A0850A5}"/>
               </a:ext>
             </a:extLst>
           </p:cNvPr>
@@ -26893,7 +26893,7 @@
           <p:cNvPr id="15" name="">
             <a:extLst xmlns:a="http://schemas.openxmlformats.org/drawingml/2006/main">
               <a:ext uri="{FF2B5EF4-FFF2-40B4-BE49-F238E27FC236}">
-                <a16:creationId xmlns:a16="http://schemas.microsoft.com/office/drawing/2014/main" id="{9EFBD735-6B6E-4E7B-A5D1-ABDEDF14C9A3}"/>
+                <a16:creationId xmlns:a16="http://schemas.microsoft.com/office/drawing/2014/main" id="{06BA92D3-6AD4-4E2C-88C8-02C15EE0FF6F}"/>
               </a:ext>
             </a:extLst>
           </p:cNvPr>
@@ -26924,7 +26924,7 @@
           <p:cNvPr id="16" name="">
             <a:extLst xmlns:a="http://schemas.openxmlformats.org/drawingml/2006/main">
               <a:ext uri="{FF2B5EF4-FFF2-40B4-BE49-F238E27FC236}">
-                <a16:creationId xmlns:a16="http://schemas.microsoft.com/office/drawing/2014/main" id="{4F7BCF49-BBF2-4027-B944-E9E87B91C7AC}"/>
+                <a16:creationId xmlns:a16="http://schemas.microsoft.com/office/drawing/2014/main" id="{67C5DD50-2BE3-4981-B708-96E807282DEC}"/>
               </a:ext>
             </a:extLst>
           </p:cNvPr>
@@ -26955,7 +26955,7 @@
           <p:cNvPr id="17" name="">
             <a:extLst xmlns:a="http://schemas.openxmlformats.org/drawingml/2006/main">
               <a:ext uri="{FF2B5EF4-FFF2-40B4-BE49-F238E27FC236}">
-                <a16:creationId xmlns:a16="http://schemas.microsoft.com/office/drawing/2014/main" id="{124D3810-3AC1-499C-8305-A7F7317E72C6}"/>
+                <a16:creationId xmlns:a16="http://schemas.microsoft.com/office/drawing/2014/main" id="{A188C78F-076C-4665-A994-014112437063}"/>
               </a:ext>
             </a:extLst>
           </p:cNvPr>
@@ -26986,7 +26986,7 @@
           <p:cNvPr id="18" name="">
             <a:extLst xmlns:a="http://schemas.openxmlformats.org/drawingml/2006/main">
               <a:ext uri="{FF2B5EF4-FFF2-40B4-BE49-F238E27FC236}">
-                <a16:creationId xmlns:a16="http://schemas.microsoft.com/office/drawing/2014/main" id="{9F65271C-A7EB-4B0D-8161-D0774BF7596C}"/>
+                <a16:creationId xmlns:a16="http://schemas.microsoft.com/office/drawing/2014/main" id="{F4B630D6-D93A-455A-B32A-0E24B3692D79}"/>
               </a:ext>
             </a:extLst>
           </p:cNvPr>
@@ -27017,7 +27017,7 @@
           <p:cNvPr id="19" name="">
             <a:extLst xmlns:a="http://schemas.openxmlformats.org/drawingml/2006/main">
               <a:ext uri="{FF2B5EF4-FFF2-40B4-BE49-F238E27FC236}">
-                <a16:creationId xmlns:a16="http://schemas.microsoft.com/office/drawing/2014/main" id="{F6181E0A-4095-484C-BF2A-CCA0317BBA02}"/>
+                <a16:creationId xmlns:a16="http://schemas.microsoft.com/office/drawing/2014/main" id="{9ED9E558-5087-4ED8-88ED-18B063E257AD}"/>
               </a:ext>
             </a:extLst>
           </p:cNvPr>
@@ -27048,7 +27048,7 @@
           <p:cNvPr id="20" name="">
             <a:extLst xmlns:a="http://schemas.openxmlformats.org/drawingml/2006/main">
               <a:ext uri="{FF2B5EF4-FFF2-40B4-BE49-F238E27FC236}">
-                <a16:creationId xmlns:a16="http://schemas.microsoft.com/office/drawing/2014/main" id="{A894F73D-AB5D-474B-B776-D123FA55A580}"/>
+                <a16:creationId xmlns:a16="http://schemas.microsoft.com/office/drawing/2014/main" id="{1ABD9ED4-793E-4F1E-9ECA-9D79F38D7DE2}"/>
               </a:ext>
             </a:extLst>
           </p:cNvPr>
@@ -27079,7 +27079,7 @@
           <p:cNvPr id="21" name="">
             <a:extLst xmlns:a="http://schemas.openxmlformats.org/drawingml/2006/main">
               <a:ext uri="{FF2B5EF4-FFF2-40B4-BE49-F238E27FC236}">
-                <a16:creationId xmlns:a16="http://schemas.microsoft.com/office/drawing/2014/main" id="{3026D037-E5A7-4454-9339-F0796CF23E67}"/>
+                <a16:creationId xmlns:a16="http://schemas.microsoft.com/office/drawing/2014/main" id="{DB2AC600-8BEB-4546-9CB3-880E0F1348B4}"/>
               </a:ext>
             </a:extLst>
           </p:cNvPr>
@@ -27110,7 +27110,7 @@
           <p:cNvPr id="22" name="">
             <a:extLst xmlns:a="http://schemas.openxmlformats.org/drawingml/2006/main">
               <a:ext uri="{FF2B5EF4-FFF2-40B4-BE49-F238E27FC236}">
-                <a16:creationId xmlns:a16="http://schemas.microsoft.com/office/drawing/2014/main" id="{3C97675C-4DEE-4EA7-B095-6865BB929668}"/>
+                <a16:creationId xmlns:a16="http://schemas.microsoft.com/office/drawing/2014/main" id="{F2F801A5-0E43-416A-95B3-3B5F3DCA4C85}"/>
               </a:ext>
             </a:extLst>
           </p:cNvPr>
@@ -27141,7 +27141,7 @@
           <p:cNvPr id="23" name="">
             <a:extLst xmlns:a="http://schemas.openxmlformats.org/drawingml/2006/main">
               <a:ext uri="{FF2B5EF4-FFF2-40B4-BE49-F238E27FC236}">
-                <a16:creationId xmlns:a16="http://schemas.microsoft.com/office/drawing/2014/main" id="{40210C55-908D-4A20-8AC6-EC0CC6548488}"/>
+                <a16:creationId xmlns:a16="http://schemas.microsoft.com/office/drawing/2014/main" id="{DB22B136-B600-4B9E-981B-7C4559ED5280}"/>
               </a:ext>
             </a:extLst>
           </p:cNvPr>
@@ -27172,7 +27172,7 @@
           <p:cNvPr id="24" name="">
             <a:extLst xmlns:a="http://schemas.openxmlformats.org/drawingml/2006/main">
               <a:ext uri="{FF2B5EF4-FFF2-40B4-BE49-F238E27FC236}">
-                <a16:creationId xmlns:a16="http://schemas.microsoft.com/office/drawing/2014/main" id="{D8E2396D-88F8-4DC6-A238-422ABF37CD2F}"/>
+                <a16:creationId xmlns:a16="http://schemas.microsoft.com/office/drawing/2014/main" id="{3C18F40A-8CF1-4644-94FF-DE8F7C230AFC}"/>
               </a:ext>
             </a:extLst>
           </p:cNvPr>
@@ -27203,7 +27203,7 @@
           <p:cNvPr id="25" name="">
             <a:extLst xmlns:a="http://schemas.openxmlformats.org/drawingml/2006/main">
               <a:ext uri="{FF2B5EF4-FFF2-40B4-BE49-F238E27FC236}">
-                <a16:creationId xmlns:a16="http://schemas.microsoft.com/office/drawing/2014/main" id="{4A2214BE-BA5F-47CC-8F82-1518446D043F}"/>
+                <a16:creationId xmlns:a16="http://schemas.microsoft.com/office/drawing/2014/main" id="{6564FB38-4306-4F70-955C-538A7A982BED}"/>
               </a:ext>
             </a:extLst>
           </p:cNvPr>
@@ -27234,7 +27234,7 @@
           <p:cNvPr id="26" name="">
             <a:extLst xmlns:a="http://schemas.openxmlformats.org/drawingml/2006/main">
               <a:ext uri="{FF2B5EF4-FFF2-40B4-BE49-F238E27FC236}">
-                <a16:creationId xmlns:a16="http://schemas.microsoft.com/office/drawing/2014/main" id="{ADCD83CF-E7EE-4918-92D6-B316940B4A55}"/>
+                <a16:creationId xmlns:a16="http://schemas.microsoft.com/office/drawing/2014/main" id="{B157857B-6A5F-4D19-8DA5-75F133F954E9}"/>
               </a:ext>
             </a:extLst>
           </p:cNvPr>
@@ -27265,7 +27265,7 @@
           <p:cNvPr id="27" name="">
             <a:extLst xmlns:a="http://schemas.openxmlformats.org/drawingml/2006/main">
               <a:ext uri="{FF2B5EF4-FFF2-40B4-BE49-F238E27FC236}">
-                <a16:creationId xmlns:a16="http://schemas.microsoft.com/office/drawing/2014/main" id="{4B813656-5EC4-46C2-B030-74588CB0F933}"/>
+                <a16:creationId xmlns:a16="http://schemas.microsoft.com/office/drawing/2014/main" id="{A2860986-9AB8-4DC8-BA42-532A9013BF28}"/>
               </a:ext>
             </a:extLst>
           </p:cNvPr>
@@ -27296,7 +27296,7 @@
           <p:cNvPr id="28" name="">
             <a:extLst xmlns:a="http://schemas.openxmlformats.org/drawingml/2006/main">
               <a:ext uri="{FF2B5EF4-FFF2-40B4-BE49-F238E27FC236}">
-                <a16:creationId xmlns:a16="http://schemas.microsoft.com/office/drawing/2014/main" id="{D89987B8-A7F0-48B3-8992-F2123D9FBAD2}"/>
+                <a16:creationId xmlns:a16="http://schemas.microsoft.com/office/drawing/2014/main" id="{E5CCE80C-81D1-4673-A338-0A8BEF3ACD22}"/>
               </a:ext>
             </a:extLst>
           </p:cNvPr>
@@ -27327,7 +27327,7 @@
           <p:cNvPr id="29" name="">
             <a:extLst xmlns:a="http://schemas.openxmlformats.org/drawingml/2006/main">
               <a:ext uri="{FF2B5EF4-FFF2-40B4-BE49-F238E27FC236}">
-                <a16:creationId xmlns:a16="http://schemas.microsoft.com/office/drawing/2014/main" id="{469525AD-0A75-4016-9C13-CABB259A0820}"/>
+                <a16:creationId xmlns:a16="http://schemas.microsoft.com/office/drawing/2014/main" id="{5165AFA0-CEDA-4254-9112-E468E737CDCA}"/>
               </a:ext>
             </a:extLst>
           </p:cNvPr>
@@ -27358,7 +27358,7 @@
           <p:cNvPr id="30" name="">
             <a:extLst xmlns:a="http://schemas.openxmlformats.org/drawingml/2006/main">
               <a:ext uri="{FF2B5EF4-FFF2-40B4-BE49-F238E27FC236}">
-                <a16:creationId xmlns:a16="http://schemas.microsoft.com/office/drawing/2014/main" id="{27EC1F18-57E8-43B9-9253-AB555FAB557B}"/>
+                <a16:creationId xmlns:a16="http://schemas.microsoft.com/office/drawing/2014/main" id="{40DDD690-5DCA-43B4-BBEA-F59998684C26}"/>
               </a:ext>
             </a:extLst>
           </p:cNvPr>
@@ -27389,7 +27389,7 @@
           <p:cNvPr id="31" name="">
             <a:extLst xmlns:a="http://schemas.openxmlformats.org/drawingml/2006/main">
               <a:ext uri="{FF2B5EF4-FFF2-40B4-BE49-F238E27FC236}">
-                <a16:creationId xmlns:a16="http://schemas.microsoft.com/office/drawing/2014/main" id="{8B6CDAF8-16F1-443E-816F-8339E5972AD3}"/>
+                <a16:creationId xmlns:a16="http://schemas.microsoft.com/office/drawing/2014/main" id="{79077166-E472-4FAD-9F02-38ECF1E6FF7C}"/>
               </a:ext>
             </a:extLst>
           </p:cNvPr>
@@ -27420,7 +27420,7 @@
           <p:cNvPr id="32" name="">
             <a:extLst xmlns:a="http://schemas.openxmlformats.org/drawingml/2006/main">
               <a:ext uri="{FF2B5EF4-FFF2-40B4-BE49-F238E27FC236}">
-                <a16:creationId xmlns:a16="http://schemas.microsoft.com/office/drawing/2014/main" id="{AA1660B6-CAB9-4D75-B9A5-40586A50A26A}"/>
+                <a16:creationId xmlns:a16="http://schemas.microsoft.com/office/drawing/2014/main" id="{1A34ABD0-1D5D-4EC9-BD72-9723A995C871}"/>
               </a:ext>
             </a:extLst>
           </p:cNvPr>
@@ -27476,7 +27476,7 @@
           <p:cNvPr id="33" name="">
             <a:extLst xmlns:a="http://schemas.openxmlformats.org/drawingml/2006/main">
               <a:ext uri="{FF2B5EF4-FFF2-40B4-BE49-F238E27FC236}">
-                <a16:creationId xmlns:a16="http://schemas.microsoft.com/office/drawing/2014/main" id="{C58572C8-4E0D-4376-A0DD-6E4111F78088}"/>
+                <a16:creationId xmlns:a16="http://schemas.microsoft.com/office/drawing/2014/main" id="{B06F63DD-CF59-49D9-AC85-03324F97A6B7}"/>
               </a:ext>
             </a:extLst>
           </p:cNvPr>
@@ -27532,7 +27532,7 @@
           <p:cNvPr id="34" name="">
             <a:extLst xmlns:a="http://schemas.openxmlformats.org/drawingml/2006/main">
               <a:ext uri="{FF2B5EF4-FFF2-40B4-BE49-F238E27FC236}">
-                <a16:creationId xmlns:a16="http://schemas.microsoft.com/office/drawing/2014/main" id="{19DC2248-94EB-402F-A0F0-BA573DAC8E24}"/>
+                <a16:creationId xmlns:a16="http://schemas.microsoft.com/office/drawing/2014/main" id="{C0115053-CCD1-4A4A-9BF7-25CDD6FB59D1}"/>
               </a:ext>
             </a:extLst>
           </p:cNvPr>
@@ -27567,7 +27567,7 @@
           <p:cNvPr id="35" name="">
             <a:extLst xmlns:a="http://schemas.openxmlformats.org/drawingml/2006/main">
               <a:ext uri="{FF2B5EF4-FFF2-40B4-BE49-F238E27FC236}">
-                <a16:creationId xmlns:a16="http://schemas.microsoft.com/office/drawing/2014/main" id="{96BCC887-D8E3-446D-8AD8-38E0247AA153}"/>
+                <a16:creationId xmlns:a16="http://schemas.microsoft.com/office/drawing/2014/main" id="{B3A7F3B3-71C1-495F-AC72-84234AC93BC7}"/>
               </a:ext>
             </a:extLst>
           </p:cNvPr>
@@ -27623,7 +27623,7 @@
           <p:cNvPr id="36" name="">
             <a:extLst xmlns:a="http://schemas.openxmlformats.org/drawingml/2006/main">
               <a:ext uri="{FF2B5EF4-FFF2-40B4-BE49-F238E27FC236}">
-                <a16:creationId xmlns:a16="http://schemas.microsoft.com/office/drawing/2014/main" id="{574D6EAA-3A7C-4586-AF25-5A25989FE5D3}"/>
+                <a16:creationId xmlns:a16="http://schemas.microsoft.com/office/drawing/2014/main" id="{EF3DCBA6-483A-48BC-AF5E-08047A81724F}"/>
               </a:ext>
             </a:extLst>
           </p:cNvPr>
@@ -27679,7 +27679,7 @@
           <p:cNvPr id="37" name="">
             <a:extLst xmlns:a="http://schemas.openxmlformats.org/drawingml/2006/main">
               <a:ext uri="{FF2B5EF4-FFF2-40B4-BE49-F238E27FC236}">
-                <a16:creationId xmlns:a16="http://schemas.microsoft.com/office/drawing/2014/main" id="{E8D31693-6951-434E-9E4A-E438E702F62F}"/>
+                <a16:creationId xmlns:a16="http://schemas.microsoft.com/office/drawing/2014/main" id="{15963D81-196D-443D-9A41-ECCBD0228ED5}"/>
               </a:ext>
             </a:extLst>
           </p:cNvPr>
@@ -27735,7 +27735,7 @@
           <p:cNvPr id="38" name="">
             <a:extLst xmlns:a="http://schemas.openxmlformats.org/drawingml/2006/main">
               <a:ext uri="{FF2B5EF4-FFF2-40B4-BE49-F238E27FC236}">
-                <a16:creationId xmlns:a16="http://schemas.microsoft.com/office/drawing/2014/main" id="{2F4A5860-7F1C-4FF4-9BDF-B9C51A49C2D6}"/>
+                <a16:creationId xmlns:a16="http://schemas.microsoft.com/office/drawing/2014/main" id="{A56ADFC0-EA86-474E-837B-3CDAFDF67142}"/>
               </a:ext>
             </a:extLst>
           </p:cNvPr>
@@ -27791,7 +27791,7 @@
           <p:cNvPr id="39" name="">
             <a:extLst xmlns:a="http://schemas.openxmlformats.org/drawingml/2006/main">
               <a:ext uri="{FF2B5EF4-FFF2-40B4-BE49-F238E27FC236}">
-                <a16:creationId xmlns:a16="http://schemas.microsoft.com/office/drawing/2014/main" id="{2F336DD7-ACA6-4D84-864A-E41EA87EBF2C}"/>
+                <a16:creationId xmlns:a16="http://schemas.microsoft.com/office/drawing/2014/main" id="{68320EB4-9D8C-4DA8-96FE-011DDEEF7CC9}"/>
               </a:ext>
             </a:extLst>
           </p:cNvPr>
@@ -27826,7 +27826,7 @@
           <p:cNvPr id="40" name="">
             <a:extLst xmlns:a="http://schemas.openxmlformats.org/drawingml/2006/main">
               <a:ext uri="{FF2B5EF4-FFF2-40B4-BE49-F238E27FC236}">
-                <a16:creationId xmlns:a16="http://schemas.microsoft.com/office/drawing/2014/main" id="{EF988A92-0C2B-45E6-95C7-E5752697CB7F}"/>
+                <a16:creationId xmlns:a16="http://schemas.microsoft.com/office/drawing/2014/main" id="{198E838A-C958-4374-8048-B6B2E35BD1FF}"/>
               </a:ext>
             </a:extLst>
           </p:cNvPr>
@@ -27882,7 +27882,7 @@
           <p:cNvPr id="41" name="">
             <a:extLst xmlns:a="http://schemas.openxmlformats.org/drawingml/2006/main">
               <a:ext uri="{FF2B5EF4-FFF2-40B4-BE49-F238E27FC236}">
-                <a16:creationId xmlns:a16="http://schemas.microsoft.com/office/drawing/2014/main" id="{2AFA0BF8-23FA-4FBD-95FF-FFFA3BFC7858}"/>
+                <a16:creationId xmlns:a16="http://schemas.microsoft.com/office/drawing/2014/main" id="{DF58C3EF-914E-40B8-B5D4-113B6254E7D7}"/>
               </a:ext>
             </a:extLst>
           </p:cNvPr>
@@ -27938,7 +27938,7 @@
           <p:cNvPr id="42" name="">
             <a:extLst xmlns:a="http://schemas.openxmlformats.org/drawingml/2006/main">
               <a:ext uri="{FF2B5EF4-FFF2-40B4-BE49-F238E27FC236}">
-                <a16:creationId xmlns:a16="http://schemas.microsoft.com/office/drawing/2014/main" id="{C13BF15B-F714-45D5-8BDD-C1217993E497}"/>
+                <a16:creationId xmlns:a16="http://schemas.microsoft.com/office/drawing/2014/main" id="{4718D2D2-C949-4D0D-ACFD-C6A73217632B}"/>
               </a:ext>
             </a:extLst>
           </p:cNvPr>
@@ -27994,7 +27994,7 @@
           <p:cNvPr id="43" name="">
             <a:extLst xmlns:a="http://schemas.openxmlformats.org/drawingml/2006/main">
               <a:ext uri="{FF2B5EF4-FFF2-40B4-BE49-F238E27FC236}">
-                <a16:creationId xmlns:a16="http://schemas.microsoft.com/office/drawing/2014/main" id="{DC1FEE96-3646-40E8-BCCA-17EB048289C6}"/>
+                <a16:creationId xmlns:a16="http://schemas.microsoft.com/office/drawing/2014/main" id="{2DCB0D76-2A5D-45F5-A2A3-12821B7B95FC}"/>
               </a:ext>
             </a:extLst>
           </p:cNvPr>
@@ -28050,7 +28050,7 @@
           <p:cNvPr id="44" name="">
             <a:extLst xmlns:a="http://schemas.openxmlformats.org/drawingml/2006/main">
               <a:ext uri="{FF2B5EF4-FFF2-40B4-BE49-F238E27FC236}">
-                <a16:creationId xmlns:a16="http://schemas.microsoft.com/office/drawing/2014/main" id="{E304B3F9-24CF-493B-8FDF-200181E993D9}"/>
+                <a16:creationId xmlns:a16="http://schemas.microsoft.com/office/drawing/2014/main" id="{3B8907ED-2F38-4FE8-B2DA-58995B87A530}"/>
               </a:ext>
             </a:extLst>
           </p:cNvPr>
@@ -28085,7 +28085,7 @@
           <p:cNvPr id="45" name="">
             <a:extLst xmlns:a="http://schemas.openxmlformats.org/drawingml/2006/main">
               <a:ext uri="{FF2B5EF4-FFF2-40B4-BE49-F238E27FC236}">
-                <a16:creationId xmlns:a16="http://schemas.microsoft.com/office/drawing/2014/main" id="{5B424EE1-A16D-423D-A039-5BBFE13FCBC7}"/>
+                <a16:creationId xmlns:a16="http://schemas.microsoft.com/office/drawing/2014/main" id="{FAC1EA80-3B1B-466F-A5C4-39036CFEF13F}"/>
               </a:ext>
             </a:extLst>
           </p:cNvPr>
@@ -28141,7 +28141,7 @@
           <p:cNvPr id="46" name="">
             <a:extLst xmlns:a="http://schemas.openxmlformats.org/drawingml/2006/main">
               <a:ext uri="{FF2B5EF4-FFF2-40B4-BE49-F238E27FC236}">
-                <a16:creationId xmlns:a16="http://schemas.microsoft.com/office/drawing/2014/main" id="{5A4B3E77-964F-4ECC-93FB-6EF5D16670C6}"/>
+                <a16:creationId xmlns:a16="http://schemas.microsoft.com/office/drawing/2014/main" id="{9C9E8482-ED4D-457B-9797-F7FF772D7DBB}"/>
               </a:ext>
             </a:extLst>
           </p:cNvPr>
@@ -28197,7 +28197,7 @@
           <p:cNvPr id="47" name="">
             <a:extLst xmlns:a="http://schemas.openxmlformats.org/drawingml/2006/main">
               <a:ext uri="{FF2B5EF4-FFF2-40B4-BE49-F238E27FC236}">
-                <a16:creationId xmlns:a16="http://schemas.microsoft.com/office/drawing/2014/main" id="{0A7E1A5D-F0AC-4788-A40B-5F9C06BE3B57}"/>
+                <a16:creationId xmlns:a16="http://schemas.microsoft.com/office/drawing/2014/main" id="{DD0377F8-F848-466F-9A0D-A78D58875640}"/>
               </a:ext>
             </a:extLst>
           </p:cNvPr>
@@ -28253,7 +28253,7 @@
           <p:cNvPr id="48" name="">
             <a:extLst xmlns:a="http://schemas.openxmlformats.org/drawingml/2006/main">
               <a:ext uri="{FF2B5EF4-FFF2-40B4-BE49-F238E27FC236}">
-                <a16:creationId xmlns:a16="http://schemas.microsoft.com/office/drawing/2014/main" id="{EE05C3FA-FED0-42BC-9FBD-748EBE17C626}"/>
+                <a16:creationId xmlns:a16="http://schemas.microsoft.com/office/drawing/2014/main" id="{CF3D5F48-634D-43AB-8994-F56CAB770052}"/>
               </a:ext>
             </a:extLst>
           </p:cNvPr>
@@ -28309,7 +28309,7 @@
           <p:cNvPr id="49" name="">
             <a:extLst xmlns:a="http://schemas.openxmlformats.org/drawingml/2006/main">
               <a:ext uri="{FF2B5EF4-FFF2-40B4-BE49-F238E27FC236}">
-                <a16:creationId xmlns:a16="http://schemas.microsoft.com/office/drawing/2014/main" id="{22B661B8-90B0-4794-9D54-DD2E40B4CE78}"/>
+                <a16:creationId xmlns:a16="http://schemas.microsoft.com/office/drawing/2014/main" id="{785DCE38-5410-4E58-BF46-8ED2007311E6}"/>
               </a:ext>
             </a:extLst>
           </p:cNvPr>
@@ -28344,7 +28344,7 @@
           <p:cNvPr id="50" name="">
             <a:extLst xmlns:a="http://schemas.openxmlformats.org/drawingml/2006/main">
               <a:ext uri="{FF2B5EF4-FFF2-40B4-BE49-F238E27FC236}">
-                <a16:creationId xmlns:a16="http://schemas.microsoft.com/office/drawing/2014/main" id="{06DD2DC5-4BA4-4236-80CF-8FC24833F8E3}"/>
+                <a16:creationId xmlns:a16="http://schemas.microsoft.com/office/drawing/2014/main" id="{B134AD1A-0C1E-48DD-BEEA-787CB8FEF907}"/>
               </a:ext>
             </a:extLst>
           </p:cNvPr>
@@ -28400,7 +28400,7 @@
           <p:cNvPr id="51" name="">
             <a:extLst xmlns:a="http://schemas.openxmlformats.org/drawingml/2006/main">
               <a:ext uri="{FF2B5EF4-FFF2-40B4-BE49-F238E27FC236}">
-                <a16:creationId xmlns:a16="http://schemas.microsoft.com/office/drawing/2014/main" id="{F26E6F0C-0935-47BB-B7EC-EF9E42E7FF19}"/>
+                <a16:creationId xmlns:a16="http://schemas.microsoft.com/office/drawing/2014/main" id="{BE029B49-0F2C-40D8-88CE-C77E8763D3B1}"/>
               </a:ext>
             </a:extLst>
           </p:cNvPr>
@@ -28456,7 +28456,7 @@
           <p:cNvPr id="52" name="">
             <a:extLst xmlns:a="http://schemas.openxmlformats.org/drawingml/2006/main">
               <a:ext uri="{FF2B5EF4-FFF2-40B4-BE49-F238E27FC236}">
-                <a16:creationId xmlns:a16="http://schemas.microsoft.com/office/drawing/2014/main" id="{32BB1A64-93A8-4788-B4B3-0BF05A04BB73}"/>
+                <a16:creationId xmlns:a16="http://schemas.microsoft.com/office/drawing/2014/main" id="{8FEEAAD1-A3F2-45B5-B631-64181C7398AA}"/>
               </a:ext>
             </a:extLst>
           </p:cNvPr>
@@ -28512,7 +28512,7 @@
           <p:cNvPr id="53" name="">
             <a:extLst xmlns:a="http://schemas.openxmlformats.org/drawingml/2006/main">
               <a:ext uri="{FF2B5EF4-FFF2-40B4-BE49-F238E27FC236}">
-                <a16:creationId xmlns:a16="http://schemas.microsoft.com/office/drawing/2014/main" id="{E729676E-66B0-4ECD-BA3B-F5D66AF93555}"/>
+                <a16:creationId xmlns:a16="http://schemas.microsoft.com/office/drawing/2014/main" id="{81FE1412-14B8-494D-8E9A-4EE4A2DFE9EA}"/>
               </a:ext>
             </a:extLst>
           </p:cNvPr>
@@ -28568,7 +28568,7 @@
           <p:cNvPr id="54" name="">
             <a:extLst xmlns:a="http://schemas.openxmlformats.org/drawingml/2006/main">
               <a:ext uri="{FF2B5EF4-FFF2-40B4-BE49-F238E27FC236}">
-                <a16:creationId xmlns:a16="http://schemas.microsoft.com/office/drawing/2014/main" id="{28D071B5-CFEA-4F60-B944-F3F6859EFE5C}"/>
+                <a16:creationId xmlns:a16="http://schemas.microsoft.com/office/drawing/2014/main" id="{74BE215E-9C08-42FF-A2CF-A3DAA7BD4BFC}"/>
               </a:ext>
             </a:extLst>
           </p:cNvPr>
@@ -28624,7 +28624,7 @@
           <p:cNvPr id="55" name="">
             <a:extLst xmlns:a="http://schemas.openxmlformats.org/drawingml/2006/main">
               <a:ext uri="{FF2B5EF4-FFF2-40B4-BE49-F238E27FC236}">
-                <a16:creationId xmlns:a16="http://schemas.microsoft.com/office/drawing/2014/main" id="{7B568E45-AB0A-43F3-A117-7AFBA07F1273}"/>
+                <a16:creationId xmlns:a16="http://schemas.microsoft.com/office/drawing/2014/main" id="{A858C935-D29C-4B88-8551-1B26581477D9}"/>
               </a:ext>
             </a:extLst>
           </p:cNvPr>
@@ -28659,7 +28659,7 @@
           <p:cNvPr id="56" name="">
             <a:extLst xmlns:a="http://schemas.openxmlformats.org/drawingml/2006/main">
               <a:ext uri="{FF2B5EF4-FFF2-40B4-BE49-F238E27FC236}">
-                <a16:creationId xmlns:a16="http://schemas.microsoft.com/office/drawing/2014/main" id="{3596F262-B983-497A-B3C4-D835A56F396C}"/>
+                <a16:creationId xmlns:a16="http://schemas.microsoft.com/office/drawing/2014/main" id="{5BE74151-2464-4897-B9FC-F17D55F4F39B}"/>
               </a:ext>
             </a:extLst>
           </p:cNvPr>
@@ -28715,7 +28715,7 @@
           <p:cNvPr id="57" name="">
             <a:extLst xmlns:a="http://schemas.openxmlformats.org/drawingml/2006/main">
               <a:ext uri="{FF2B5EF4-FFF2-40B4-BE49-F238E27FC236}">
-                <a16:creationId xmlns:a16="http://schemas.microsoft.com/office/drawing/2014/main" id="{3EF9B7C4-CBCE-41B3-9BFF-AA4304E00200}"/>
+                <a16:creationId xmlns:a16="http://schemas.microsoft.com/office/drawing/2014/main" id="{3C1E97CF-C9A6-4149-A131-A64695F26057}"/>
               </a:ext>
             </a:extLst>
           </p:cNvPr>
@@ -28750,7 +28750,7 @@
           <p:cNvPr id="58" name="">
             <a:extLst xmlns:a="http://schemas.openxmlformats.org/drawingml/2006/main">
               <a:ext uri="{FF2B5EF4-FFF2-40B4-BE49-F238E27FC236}">
-                <a16:creationId xmlns:a16="http://schemas.microsoft.com/office/drawing/2014/main" id="{DB00B0DE-526C-4670-A187-B471DB117C2A}"/>
+                <a16:creationId xmlns:a16="http://schemas.microsoft.com/office/drawing/2014/main" id="{D58FC29A-C07C-4C7E-BAB4-13E48F1434C3}"/>
               </a:ext>
             </a:extLst>
           </p:cNvPr>
@@ -28806,7 +28806,7 @@
           <p:cNvPr id="59" name="">
             <a:extLst xmlns:a="http://schemas.openxmlformats.org/drawingml/2006/main">
               <a:ext uri="{FF2B5EF4-FFF2-40B4-BE49-F238E27FC236}">
-                <a16:creationId xmlns:a16="http://schemas.microsoft.com/office/drawing/2014/main" id="{E4BAE5B9-A3C7-4F15-BD08-0C9BDB8CCBE5}"/>
+                <a16:creationId xmlns:a16="http://schemas.microsoft.com/office/drawing/2014/main" id="{7630F918-5AF2-47D3-B3F3-7DE467E9DC6B}"/>
               </a:ext>
             </a:extLst>
           </p:cNvPr>
@@ -28841,7 +28841,7 @@
           <p:cNvPr id="60" name="">
             <a:extLst xmlns:a="http://schemas.openxmlformats.org/drawingml/2006/main">
               <a:ext uri="{FF2B5EF4-FFF2-40B4-BE49-F238E27FC236}">
-                <a16:creationId xmlns:a16="http://schemas.microsoft.com/office/drawing/2014/main" id="{14727FDE-9E45-4D57-A1C3-E80DFBBE058D}"/>
+                <a16:creationId xmlns:a16="http://schemas.microsoft.com/office/drawing/2014/main" id="{D74D4E04-4EED-4217-BB84-BF0647BBC212}"/>
               </a:ext>
             </a:extLst>
           </p:cNvPr>
@@ -28897,7 +28897,7 @@
           <p:cNvPr id="61" name="">
             <a:extLst xmlns:a="http://schemas.openxmlformats.org/drawingml/2006/main">
               <a:ext uri="{FF2B5EF4-FFF2-40B4-BE49-F238E27FC236}">
-                <a16:creationId xmlns:a16="http://schemas.microsoft.com/office/drawing/2014/main" id="{85DB0BAA-B842-48BE-A023-F53B401D5DDD}"/>
+                <a16:creationId xmlns:a16="http://schemas.microsoft.com/office/drawing/2014/main" id="{8D5B2062-02C1-4237-AAB0-B83810F517E2}"/>
               </a:ext>
             </a:extLst>
           </p:cNvPr>
@@ -28932,7 +28932,7 @@
           <p:cNvPr id="62" name="">
             <a:extLst xmlns:a="http://schemas.openxmlformats.org/drawingml/2006/main">
               <a:ext uri="{FF2B5EF4-FFF2-40B4-BE49-F238E27FC236}">
-                <a16:creationId xmlns:a16="http://schemas.microsoft.com/office/drawing/2014/main" id="{66C898F5-648D-4A80-BCEB-43C870C30E33}"/>
+                <a16:creationId xmlns:a16="http://schemas.microsoft.com/office/drawing/2014/main" id="{057187BD-FD40-4AD5-907A-5B7167E72AD7}"/>
               </a:ext>
             </a:extLst>
           </p:cNvPr>
@@ -28988,7 +28988,7 @@
           <p:cNvPr id="63" name="">
             <a:extLst xmlns:a="http://schemas.openxmlformats.org/drawingml/2006/main">
               <a:ext uri="{FF2B5EF4-FFF2-40B4-BE49-F238E27FC236}">
-                <a16:creationId xmlns:a16="http://schemas.microsoft.com/office/drawing/2014/main" id="{671CECE0-AD90-43A9-9B78-8272939BB2F0}"/>
+                <a16:creationId xmlns:a16="http://schemas.microsoft.com/office/drawing/2014/main" id="{C7B2D5D6-678D-46DF-B7F1-C078C0ED23D7}"/>
               </a:ext>
             </a:extLst>
           </p:cNvPr>
@@ -29023,7 +29023,7 @@
           <p:cNvPr id="64" name="">
             <a:extLst xmlns:a="http://schemas.openxmlformats.org/drawingml/2006/main">
               <a:ext uri="{FF2B5EF4-FFF2-40B4-BE49-F238E27FC236}">
-                <a16:creationId xmlns:a16="http://schemas.microsoft.com/office/drawing/2014/main" id="{DC0050A7-E7EF-4748-9D5D-EC4476978D71}"/>
+                <a16:creationId xmlns:a16="http://schemas.microsoft.com/office/drawing/2014/main" id="{493411E1-5C72-4058-9141-33A9CB3ED745}"/>
               </a:ext>
             </a:extLst>
           </p:cNvPr>
@@ -29079,7 +29079,7 @@
           <p:cNvPr id="65" name="">
             <a:extLst xmlns:a="http://schemas.openxmlformats.org/drawingml/2006/main">
               <a:ext uri="{FF2B5EF4-FFF2-40B4-BE49-F238E27FC236}">
-                <a16:creationId xmlns:a16="http://schemas.microsoft.com/office/drawing/2014/main" id="{1B5D78DD-C216-4C1F-A8C0-6E5AD81F3209}"/>
+                <a16:creationId xmlns:a16="http://schemas.microsoft.com/office/drawing/2014/main" id="{329B20F1-5DB4-41A4-9FE9-8B369D91D41F}"/>
               </a:ext>
             </a:extLst>
           </p:cNvPr>
@@ -29114,7 +29114,7 @@
           <p:cNvPr id="66" name="">
             <a:extLst xmlns:a="http://schemas.openxmlformats.org/drawingml/2006/main">
               <a:ext uri="{FF2B5EF4-FFF2-40B4-BE49-F238E27FC236}">
-                <a16:creationId xmlns:a16="http://schemas.microsoft.com/office/drawing/2014/main" id="{29958A81-CD34-4249-98D2-21E78B24F2BE}"/>
+                <a16:creationId xmlns:a16="http://schemas.microsoft.com/office/drawing/2014/main" id="{3889CF3C-E4AF-496A-AD91-CE63730D55AE}"/>
               </a:ext>
             </a:extLst>
           </p:cNvPr>
@@ -29170,7 +29170,7 @@
           <p:cNvPr id="67" name="">
             <a:extLst xmlns:a="http://schemas.openxmlformats.org/drawingml/2006/main">
               <a:ext uri="{FF2B5EF4-FFF2-40B4-BE49-F238E27FC236}">
-                <a16:creationId xmlns:a16="http://schemas.microsoft.com/office/drawing/2014/main" id="{F8CADC27-37AA-47DD-8613-A0DAD818B06B}"/>
+                <a16:creationId xmlns:a16="http://schemas.microsoft.com/office/drawing/2014/main" id="{FA3E8E33-625D-4268-A599-73D2C0C86858}"/>
               </a:ext>
             </a:extLst>
           </p:cNvPr>
@@ -29224,7 +29224,7 @@
     </p:spTree>
     <p:extLst>
       <p:ext uri="{BB962C8B-B14F-4D97-AF65-F5344CB8AC3E}">
-        <p14:creationId xmlns:p14="http://schemas.microsoft.com/office/powerpoint/2010/main" val="830657732"/>
+        <p14:creationId xmlns:p14="http://schemas.microsoft.com/office/powerpoint/2010/main" val="1747051872"/>
       </p:ext>
     </p:extLst>
   </p:cSld>
@@ -29259,7 +29259,7 @@
           <p:nvPr/>
         </p:nvPicPr>
         <p:blipFill>
-          <a:blip xmlns:r="http://schemas.openxmlformats.org/officeDocument/2006/relationships" xmlns:a="http://schemas.openxmlformats.org/drawingml/2006/main" r:embed="R94b9276825084ed0"/>
+          <a:blip xmlns:r="http://schemas.openxmlformats.org/officeDocument/2006/relationships" xmlns:a="http://schemas.openxmlformats.org/drawingml/2006/main" r:embed="R08f84f0625504d0d"/>
           <a:srcRect xmlns:a="http://schemas.openxmlformats.org/drawingml/2006/main" l="0" t="0" r="0" b="0"/>
           <a:stretch xmlns:a="http://schemas.openxmlformats.org/drawingml/2006/main">
             <a:fillRect l="0" t="0" r="0" b="0"/>
@@ -29280,7 +29280,7 @@
           <p:cNvPr id="2" name="">
             <a:extLst xmlns:a="http://schemas.openxmlformats.org/drawingml/2006/main">
               <a:ext uri="{FF2B5EF4-FFF2-40B4-BE49-F238E27FC236}">
-                <a16:creationId xmlns:a16="http://schemas.microsoft.com/office/drawing/2014/main" id="{669EA1F7-CFCC-48A0-A1B6-70466F76C4C6}"/>
+                <a16:creationId xmlns:a16="http://schemas.microsoft.com/office/drawing/2014/main" id="{5DEA0ADE-A275-4CAA-9CF8-311A0E5A5A86}"/>
               </a:ext>
             </a:extLst>
           </p:cNvPr>
@@ -29334,7 +29334,7 @@
     </p:spTree>
     <p:extLst>
       <p:ext uri="{BB962C8B-B14F-4D97-AF65-F5344CB8AC3E}">
-        <p14:creationId xmlns:p14="http://schemas.microsoft.com/office/powerpoint/2010/main" val="1165433005"/>
+        <p14:creationId xmlns:p14="http://schemas.microsoft.com/office/powerpoint/2010/main" val="2103473323"/>
       </p:ext>
     </p:extLst>
   </p:cSld>
@@ -29365,7 +29365,7 @@
           <p:cNvPr id="1" name="">
             <a:extLst xmlns:a="http://schemas.openxmlformats.org/drawingml/2006/main">
               <a:ext uri="{FF2B5EF4-FFF2-40B4-BE49-F238E27FC236}">
-                <a16:creationId xmlns:a16="http://schemas.microsoft.com/office/drawing/2014/main" id="{BCE59857-5B5E-4C54-BA5E-4696A77744A8}"/>
+                <a16:creationId xmlns:a16="http://schemas.microsoft.com/office/drawing/2014/main" id="{7E601162-521F-4598-838D-06EE050018E3}"/>
               </a:ext>
             </a:extLst>
           </p:cNvPr>
@@ -29396,7 +29396,7 @@
           <p:cNvPr id="2" name="">
             <a:extLst xmlns:a="http://schemas.openxmlformats.org/drawingml/2006/main">
               <a:ext uri="{FF2B5EF4-FFF2-40B4-BE49-F238E27FC236}">
-                <a16:creationId xmlns:a16="http://schemas.microsoft.com/office/drawing/2014/main" id="{06C16E28-D887-4DB6-BDCF-A4D84F2F8C22}"/>
+                <a16:creationId xmlns:a16="http://schemas.microsoft.com/office/drawing/2014/main" id="{1DB7996F-3FF3-46EB-848F-B7CA17F40237}"/>
               </a:ext>
             </a:extLst>
           </p:cNvPr>
@@ -29427,7 +29427,7 @@
           <p:cNvPr id="3" name="">
             <a:extLst xmlns:a="http://schemas.openxmlformats.org/drawingml/2006/main">
               <a:ext uri="{FF2B5EF4-FFF2-40B4-BE49-F238E27FC236}">
-                <a16:creationId xmlns:a16="http://schemas.microsoft.com/office/drawing/2014/main" id="{7DE0E820-B222-45A8-AA93-A563AAA7E627}"/>
+                <a16:creationId xmlns:a16="http://schemas.microsoft.com/office/drawing/2014/main" id="{1B4443E9-F765-430B-BFC9-F718F7F4B9E4}"/>
               </a:ext>
             </a:extLst>
           </p:cNvPr>
@@ -29458,7 +29458,7 @@
           <p:cNvPr id="4" name="">
             <a:extLst xmlns:a="http://schemas.openxmlformats.org/drawingml/2006/main">
               <a:ext uri="{FF2B5EF4-FFF2-40B4-BE49-F238E27FC236}">
-                <a16:creationId xmlns:a16="http://schemas.microsoft.com/office/drawing/2014/main" id="{B6E2440E-8819-4081-8B1A-FB111E647862}"/>
+                <a16:creationId xmlns:a16="http://schemas.microsoft.com/office/drawing/2014/main" id="{7A434934-039C-4FCC-8070-32423BD00E31}"/>
               </a:ext>
             </a:extLst>
           </p:cNvPr>
@@ -29489,7 +29489,7 @@
           <p:cNvPr id="5" name="">
             <a:extLst xmlns:a="http://schemas.openxmlformats.org/drawingml/2006/main">
               <a:ext uri="{FF2B5EF4-FFF2-40B4-BE49-F238E27FC236}">
-                <a16:creationId xmlns:a16="http://schemas.microsoft.com/office/drawing/2014/main" id="{2243B9F9-45D2-42E9-8A5D-60F6FFC30EBF}"/>
+                <a16:creationId xmlns:a16="http://schemas.microsoft.com/office/drawing/2014/main" id="{8791A454-F7CD-4606-ABFD-9ACC2FBC4D9F}"/>
               </a:ext>
             </a:extLst>
           </p:cNvPr>
@@ -29520,7 +29520,7 @@
           <p:cNvPr id="6" name="">
             <a:extLst xmlns:a="http://schemas.openxmlformats.org/drawingml/2006/main">
               <a:ext uri="{FF2B5EF4-FFF2-40B4-BE49-F238E27FC236}">
-                <a16:creationId xmlns:a16="http://schemas.microsoft.com/office/drawing/2014/main" id="{5CB4A92D-2346-479F-8B5E-568F8950F2F5}"/>
+                <a16:creationId xmlns:a16="http://schemas.microsoft.com/office/drawing/2014/main" id="{C756391B-39F3-4760-B961-895BA1FC3E67}"/>
               </a:ext>
             </a:extLst>
           </p:cNvPr>
@@ -29551,7 +29551,7 @@
           <p:cNvPr id="7" name="">
             <a:extLst xmlns:a="http://schemas.openxmlformats.org/drawingml/2006/main">
               <a:ext uri="{FF2B5EF4-FFF2-40B4-BE49-F238E27FC236}">
-                <a16:creationId xmlns:a16="http://schemas.microsoft.com/office/drawing/2014/main" id="{A20B29C4-FD70-4A6E-AACB-ED6055960DB8}"/>
+                <a16:creationId xmlns:a16="http://schemas.microsoft.com/office/drawing/2014/main" id="{3150F248-F7E8-4F14-84FE-5DCD968E00C5}"/>
               </a:ext>
             </a:extLst>
           </p:cNvPr>
@@ -29582,7 +29582,7 @@
           <p:cNvPr id="8" name="">
             <a:extLst xmlns:a="http://schemas.openxmlformats.org/drawingml/2006/main">
               <a:ext uri="{FF2B5EF4-FFF2-40B4-BE49-F238E27FC236}">
-                <a16:creationId xmlns:a16="http://schemas.microsoft.com/office/drawing/2014/main" id="{4FFCAD46-C670-4B3C-997A-E7E81651C761}"/>
+                <a16:creationId xmlns:a16="http://schemas.microsoft.com/office/drawing/2014/main" id="{EA96F01C-B6A9-450F-BC34-D9FDD6E5B062}"/>
               </a:ext>
             </a:extLst>
           </p:cNvPr>
@@ -29613,7 +29613,7 @@
           <p:cNvPr id="9" name="">
             <a:extLst xmlns:a="http://schemas.openxmlformats.org/drawingml/2006/main">
               <a:ext uri="{FF2B5EF4-FFF2-40B4-BE49-F238E27FC236}">
-                <a16:creationId xmlns:a16="http://schemas.microsoft.com/office/drawing/2014/main" id="{085AC75A-3508-478C-8CD1-4C5EA5432CD4}"/>
+                <a16:creationId xmlns:a16="http://schemas.microsoft.com/office/drawing/2014/main" id="{962371CA-C756-42EA-938E-A07167EF41EA}"/>
               </a:ext>
             </a:extLst>
           </p:cNvPr>
@@ -29644,7 +29644,7 @@
           <p:cNvPr id="10" name="">
             <a:extLst xmlns:a="http://schemas.openxmlformats.org/drawingml/2006/main">
               <a:ext uri="{FF2B5EF4-FFF2-40B4-BE49-F238E27FC236}">
-                <a16:creationId xmlns:a16="http://schemas.microsoft.com/office/drawing/2014/main" id="{CF926077-430D-46A4-AAEF-AFB6642557AB}"/>
+                <a16:creationId xmlns:a16="http://schemas.microsoft.com/office/drawing/2014/main" id="{718B9DD8-6636-46C9-9AE1-50B1A903EDE4}"/>
               </a:ext>
             </a:extLst>
           </p:cNvPr>
@@ -29675,7 +29675,7 @@
           <p:cNvPr id="11" name="">
             <a:extLst xmlns:a="http://schemas.openxmlformats.org/drawingml/2006/main">
               <a:ext uri="{FF2B5EF4-FFF2-40B4-BE49-F238E27FC236}">
-                <a16:creationId xmlns:a16="http://schemas.microsoft.com/office/drawing/2014/main" id="{A3995372-1F5F-465F-A317-B87604C4CDEC}"/>
+                <a16:creationId xmlns:a16="http://schemas.microsoft.com/office/drawing/2014/main" id="{6CF38B8D-8EEF-4E1E-BBB7-5868FECDAF10}"/>
               </a:ext>
             </a:extLst>
           </p:cNvPr>
@@ -29706,7 +29706,7 @@
           <p:cNvPr id="12" name="">
             <a:extLst xmlns:a="http://schemas.openxmlformats.org/drawingml/2006/main">
               <a:ext uri="{FF2B5EF4-FFF2-40B4-BE49-F238E27FC236}">
-                <a16:creationId xmlns:a16="http://schemas.microsoft.com/office/drawing/2014/main" id="{D5F6AFCE-B5D5-4B41-8B6E-FE1055C5BB57}"/>
+                <a16:creationId xmlns:a16="http://schemas.microsoft.com/office/drawing/2014/main" id="{7E12CCC0-004E-4CA5-AEAF-E550D01727FD}"/>
               </a:ext>
             </a:extLst>
           </p:cNvPr>
@@ -29737,7 +29737,7 @@
           <p:cNvPr id="13" name="">
             <a:extLst xmlns:a="http://schemas.openxmlformats.org/drawingml/2006/main">
               <a:ext uri="{FF2B5EF4-FFF2-40B4-BE49-F238E27FC236}">
-                <a16:creationId xmlns:a16="http://schemas.microsoft.com/office/drawing/2014/main" id="{84003B77-CB86-4D6A-AA87-A55693343B79}"/>
+                <a16:creationId xmlns:a16="http://schemas.microsoft.com/office/drawing/2014/main" id="{2A4C0F06-4764-4A05-9342-E626C7A0945B}"/>
               </a:ext>
             </a:extLst>
           </p:cNvPr>
@@ -29768,7 +29768,7 @@
           <p:cNvPr id="14" name="">
             <a:extLst xmlns:a="http://schemas.openxmlformats.org/drawingml/2006/main">
               <a:ext uri="{FF2B5EF4-FFF2-40B4-BE49-F238E27FC236}">
-                <a16:creationId xmlns:a16="http://schemas.microsoft.com/office/drawing/2014/main" id="{AEA0397C-F452-4A2C-80D5-B14ECF3BC29C}"/>
+                <a16:creationId xmlns:a16="http://schemas.microsoft.com/office/drawing/2014/main" id="{AA5EEBC5-0AAF-4313-A715-ED5D9D06D18C}"/>
               </a:ext>
             </a:extLst>
           </p:cNvPr>
@@ -29799,7 +29799,7 @@
           <p:cNvPr id="15" name="">
             <a:extLst xmlns:a="http://schemas.openxmlformats.org/drawingml/2006/main">
               <a:ext uri="{FF2B5EF4-FFF2-40B4-BE49-F238E27FC236}">
-                <a16:creationId xmlns:a16="http://schemas.microsoft.com/office/drawing/2014/main" id="{75E69FE1-744F-46FC-8D9B-EFCE5C56549F}"/>
+                <a16:creationId xmlns:a16="http://schemas.microsoft.com/office/drawing/2014/main" id="{C9C514E6-A7BB-4780-96E1-F3147BCC93F2}"/>
               </a:ext>
             </a:extLst>
           </p:cNvPr>
@@ -29830,7 +29830,7 @@
           <p:cNvPr id="16" name="">
             <a:extLst xmlns:a="http://schemas.openxmlformats.org/drawingml/2006/main">
               <a:ext uri="{FF2B5EF4-FFF2-40B4-BE49-F238E27FC236}">
-                <a16:creationId xmlns:a16="http://schemas.microsoft.com/office/drawing/2014/main" id="{5778FA79-A3A3-4D0D-8556-01CCED6FA300}"/>
+                <a16:creationId xmlns:a16="http://schemas.microsoft.com/office/drawing/2014/main" id="{1542C1B2-88AA-49EF-9BA9-04C10AA1BD7C}"/>
               </a:ext>
             </a:extLst>
           </p:cNvPr>
@@ -29861,7 +29861,7 @@
           <p:cNvPr id="17" name="">
             <a:extLst xmlns:a="http://schemas.openxmlformats.org/drawingml/2006/main">
               <a:ext uri="{FF2B5EF4-FFF2-40B4-BE49-F238E27FC236}">
-                <a16:creationId xmlns:a16="http://schemas.microsoft.com/office/drawing/2014/main" id="{15495D3A-A551-4464-A4DE-9652B648F18A}"/>
+                <a16:creationId xmlns:a16="http://schemas.microsoft.com/office/drawing/2014/main" id="{72B3F9AD-2D11-408E-AFE3-D12F35A5299B}"/>
               </a:ext>
             </a:extLst>
           </p:cNvPr>
@@ -29892,7 +29892,7 @@
           <p:cNvPr id="18" name="">
             <a:extLst xmlns:a="http://schemas.openxmlformats.org/drawingml/2006/main">
               <a:ext uri="{FF2B5EF4-FFF2-40B4-BE49-F238E27FC236}">
-                <a16:creationId xmlns:a16="http://schemas.microsoft.com/office/drawing/2014/main" id="{3CD9CDB5-477D-4A14-9715-290E717E7C87}"/>
+                <a16:creationId xmlns:a16="http://schemas.microsoft.com/office/drawing/2014/main" id="{466100E0-6AAC-4D42-8E73-15C34D2E1F11}"/>
               </a:ext>
             </a:extLst>
           </p:cNvPr>
@@ -29923,7 +29923,7 @@
           <p:cNvPr id="19" name="">
             <a:extLst xmlns:a="http://schemas.openxmlformats.org/drawingml/2006/main">
               <a:ext uri="{FF2B5EF4-FFF2-40B4-BE49-F238E27FC236}">
-                <a16:creationId xmlns:a16="http://schemas.microsoft.com/office/drawing/2014/main" id="{F610EA14-A7DB-4D6A-AC2E-4E87FD941B57}"/>
+                <a16:creationId xmlns:a16="http://schemas.microsoft.com/office/drawing/2014/main" id="{8C9F3D9B-95AB-41CB-96E8-011389984033}"/>
               </a:ext>
             </a:extLst>
           </p:cNvPr>
@@ -29954,7 +29954,7 @@
           <p:cNvPr id="20" name="">
             <a:extLst xmlns:a="http://schemas.openxmlformats.org/drawingml/2006/main">
               <a:ext uri="{FF2B5EF4-FFF2-40B4-BE49-F238E27FC236}">
-                <a16:creationId xmlns:a16="http://schemas.microsoft.com/office/drawing/2014/main" id="{DE6FC740-1D4F-481B-9912-F217A045FFFA}"/>
+                <a16:creationId xmlns:a16="http://schemas.microsoft.com/office/drawing/2014/main" id="{AADBDD86-B8AA-42A9-8211-BC3E76FA2493}"/>
               </a:ext>
             </a:extLst>
           </p:cNvPr>
@@ -29985,7 +29985,7 @@
           <p:cNvPr id="21" name="">
             <a:extLst xmlns:a="http://schemas.openxmlformats.org/drawingml/2006/main">
               <a:ext uri="{FF2B5EF4-FFF2-40B4-BE49-F238E27FC236}">
-                <a16:creationId xmlns:a16="http://schemas.microsoft.com/office/drawing/2014/main" id="{FFA20363-407B-4C1A-9363-1EFC70F96385}"/>
+                <a16:creationId xmlns:a16="http://schemas.microsoft.com/office/drawing/2014/main" id="{57FC9A58-862E-407E-831D-0C8472C16FAB}"/>
               </a:ext>
             </a:extLst>
           </p:cNvPr>
@@ -30016,7 +30016,7 @@
           <p:cNvPr id="22" name="">
             <a:extLst xmlns:a="http://schemas.openxmlformats.org/drawingml/2006/main">
               <a:ext uri="{FF2B5EF4-FFF2-40B4-BE49-F238E27FC236}">
-                <a16:creationId xmlns:a16="http://schemas.microsoft.com/office/drawing/2014/main" id="{2408D5E7-BEAF-45D3-B2E7-C178FEAC148D}"/>
+                <a16:creationId xmlns:a16="http://schemas.microsoft.com/office/drawing/2014/main" id="{E0EA4796-483C-4340-930D-31270BE8106F}"/>
               </a:ext>
             </a:extLst>
           </p:cNvPr>
@@ -30047,7 +30047,7 @@
           <p:cNvPr id="23" name="">
             <a:extLst xmlns:a="http://schemas.openxmlformats.org/drawingml/2006/main">
               <a:ext uri="{FF2B5EF4-FFF2-40B4-BE49-F238E27FC236}">
-                <a16:creationId xmlns:a16="http://schemas.microsoft.com/office/drawing/2014/main" id="{E4AD9B22-4F1E-455A-9E1F-4EFE1B92A621}"/>
+                <a16:creationId xmlns:a16="http://schemas.microsoft.com/office/drawing/2014/main" id="{43198E15-B02A-4D93-959D-4323F44A1526}"/>
               </a:ext>
             </a:extLst>
           </p:cNvPr>
@@ -30078,7 +30078,7 @@
           <p:cNvPr id="24" name="">
             <a:extLst xmlns:a="http://schemas.openxmlformats.org/drawingml/2006/main">
               <a:ext uri="{FF2B5EF4-FFF2-40B4-BE49-F238E27FC236}">
-                <a16:creationId xmlns:a16="http://schemas.microsoft.com/office/drawing/2014/main" id="{C7EF52D2-3465-4190-9739-E1A5859EC33C}"/>
+                <a16:creationId xmlns:a16="http://schemas.microsoft.com/office/drawing/2014/main" id="{51B7902A-8C15-4D19-8CF3-43DC5077EC13}"/>
               </a:ext>
             </a:extLst>
           </p:cNvPr>
@@ -30109,7 +30109,7 @@
           <p:cNvPr id="25" name="">
             <a:extLst xmlns:a="http://schemas.openxmlformats.org/drawingml/2006/main">
               <a:ext uri="{FF2B5EF4-FFF2-40B4-BE49-F238E27FC236}">
-                <a16:creationId xmlns:a16="http://schemas.microsoft.com/office/drawing/2014/main" id="{5E970814-2C25-4930-A41E-C73BC9B39851}"/>
+                <a16:creationId xmlns:a16="http://schemas.microsoft.com/office/drawing/2014/main" id="{2C886F27-6B5D-46CD-A334-74D53EEB4857}"/>
               </a:ext>
             </a:extLst>
           </p:cNvPr>
@@ -30140,7 +30140,7 @@
           <p:cNvPr id="26" name="">
             <a:extLst xmlns:a="http://schemas.openxmlformats.org/drawingml/2006/main">
               <a:ext uri="{FF2B5EF4-FFF2-40B4-BE49-F238E27FC236}">
-                <a16:creationId xmlns:a16="http://schemas.microsoft.com/office/drawing/2014/main" id="{07555571-085E-4AB6-8D67-A68FF02120F4}"/>
+                <a16:creationId xmlns:a16="http://schemas.microsoft.com/office/drawing/2014/main" id="{52D8953D-9A5A-425C-BEBA-FD33B72ED4D3}"/>
               </a:ext>
             </a:extLst>
           </p:cNvPr>
@@ -30171,7 +30171,7 @@
           <p:cNvPr id="27" name="">
             <a:extLst xmlns:a="http://schemas.openxmlformats.org/drawingml/2006/main">
               <a:ext uri="{FF2B5EF4-FFF2-40B4-BE49-F238E27FC236}">
-                <a16:creationId xmlns:a16="http://schemas.microsoft.com/office/drawing/2014/main" id="{FAAEB978-ADC6-490A-81A4-1EBD83EE6392}"/>
+                <a16:creationId xmlns:a16="http://schemas.microsoft.com/office/drawing/2014/main" id="{BA879302-48B3-4246-A698-03C3859149E5}"/>
               </a:ext>
             </a:extLst>
           </p:cNvPr>
@@ -30202,7 +30202,7 @@
           <p:cNvPr id="28" name="">
             <a:extLst xmlns:a="http://schemas.openxmlformats.org/drawingml/2006/main">
               <a:ext uri="{FF2B5EF4-FFF2-40B4-BE49-F238E27FC236}">
-                <a16:creationId xmlns:a16="http://schemas.microsoft.com/office/drawing/2014/main" id="{1E0A4F15-D42E-46D4-970E-CCE76DC9F3BA}"/>
+                <a16:creationId xmlns:a16="http://schemas.microsoft.com/office/drawing/2014/main" id="{418FA05E-8AF0-4C11-ACEE-2FF3D3E967D7}"/>
               </a:ext>
             </a:extLst>
           </p:cNvPr>
@@ -30233,7 +30233,7 @@
           <p:cNvPr id="29" name="">
             <a:extLst xmlns:a="http://schemas.openxmlformats.org/drawingml/2006/main">
               <a:ext uri="{FF2B5EF4-FFF2-40B4-BE49-F238E27FC236}">
-                <a16:creationId xmlns:a16="http://schemas.microsoft.com/office/drawing/2014/main" id="{2DD1CDC6-B2C8-45BF-A0DB-03094F03843B}"/>
+                <a16:creationId xmlns:a16="http://schemas.microsoft.com/office/drawing/2014/main" id="{F75A849F-0E55-41CA-9E6E-9A5D8F4E8ED9}"/>
               </a:ext>
             </a:extLst>
           </p:cNvPr>
@@ -30264,7 +30264,7 @@
           <p:cNvPr id="30" name="">
             <a:extLst xmlns:a="http://schemas.openxmlformats.org/drawingml/2006/main">
               <a:ext uri="{FF2B5EF4-FFF2-40B4-BE49-F238E27FC236}">
-                <a16:creationId xmlns:a16="http://schemas.microsoft.com/office/drawing/2014/main" id="{D64C4CF5-96BE-4BEC-8B83-391356AFF8B1}"/>
+                <a16:creationId xmlns:a16="http://schemas.microsoft.com/office/drawing/2014/main" id="{0BDA1B90-8B0D-457A-BD01-42C428A958B9}"/>
               </a:ext>
             </a:extLst>
           </p:cNvPr>
@@ -30295,7 +30295,7 @@
           <p:cNvPr id="31" name="">
             <a:extLst xmlns:a="http://schemas.openxmlformats.org/drawingml/2006/main">
               <a:ext uri="{FF2B5EF4-FFF2-40B4-BE49-F238E27FC236}">
-                <a16:creationId xmlns:a16="http://schemas.microsoft.com/office/drawing/2014/main" id="{FCB0135B-F5F7-4AF0-85AD-26C9E52E5634}"/>
+                <a16:creationId xmlns:a16="http://schemas.microsoft.com/office/drawing/2014/main" id="{C5ED22AE-D1D8-4ED6-9473-8F8EADF0577C}"/>
               </a:ext>
             </a:extLst>
           </p:cNvPr>
@@ -30326,7 +30326,7 @@
           <p:cNvPr id="32" name="">
             <a:extLst xmlns:a="http://schemas.openxmlformats.org/drawingml/2006/main">
               <a:ext uri="{FF2B5EF4-FFF2-40B4-BE49-F238E27FC236}">
-                <a16:creationId xmlns:a16="http://schemas.microsoft.com/office/drawing/2014/main" id="{592C9EF5-D29B-4984-9336-4AA921361E06}"/>
+                <a16:creationId xmlns:a16="http://schemas.microsoft.com/office/drawing/2014/main" id="{B70F4922-A1B3-4149-B444-00BBE2CA7331}"/>
               </a:ext>
             </a:extLst>
           </p:cNvPr>
@@ -30382,7 +30382,7 @@
           <p:cNvPr id="33" name="">
             <a:extLst xmlns:a="http://schemas.openxmlformats.org/drawingml/2006/main">
               <a:ext uri="{FF2B5EF4-FFF2-40B4-BE49-F238E27FC236}">
-                <a16:creationId xmlns:a16="http://schemas.microsoft.com/office/drawing/2014/main" id="{848BF447-16F3-4AFE-BD31-E7DE059D9007}"/>
+                <a16:creationId xmlns:a16="http://schemas.microsoft.com/office/drawing/2014/main" id="{4F7A4F8D-88D0-42C1-AA25-513C067B7168}"/>
               </a:ext>
             </a:extLst>
           </p:cNvPr>
@@ -30438,7 +30438,7 @@
           <p:cNvPr id="34" name="">
             <a:extLst xmlns:a="http://schemas.openxmlformats.org/drawingml/2006/main">
               <a:ext uri="{FF2B5EF4-FFF2-40B4-BE49-F238E27FC236}">
-                <a16:creationId xmlns:a16="http://schemas.microsoft.com/office/drawing/2014/main" id="{A05EDAA0-88C7-4F17-A323-F5E57C7A56E0}"/>
+                <a16:creationId xmlns:a16="http://schemas.microsoft.com/office/drawing/2014/main" id="{B29C3BF5-C84A-4159-83FB-C2FDFABEB701}"/>
               </a:ext>
             </a:extLst>
           </p:cNvPr>
@@ -30494,7 +30494,7 @@
           <p:cNvPr id="35" name="">
             <a:extLst xmlns:a="http://schemas.openxmlformats.org/drawingml/2006/main">
               <a:ext uri="{FF2B5EF4-FFF2-40B4-BE49-F238E27FC236}">
-                <a16:creationId xmlns:a16="http://schemas.microsoft.com/office/drawing/2014/main" id="{3A9FDA3A-0E7E-4BE2-85E2-42D88B80B223}"/>
+                <a16:creationId xmlns:a16="http://schemas.microsoft.com/office/drawing/2014/main" id="{E741A989-B4CD-4973-8E8F-5D96AD5945D8}"/>
               </a:ext>
             </a:extLst>
           </p:cNvPr>
@@ -30529,7 +30529,7 @@
           <p:cNvPr id="36" name="">
             <a:extLst xmlns:a="http://schemas.openxmlformats.org/drawingml/2006/main">
               <a:ext uri="{FF2B5EF4-FFF2-40B4-BE49-F238E27FC236}">
-                <a16:creationId xmlns:a16="http://schemas.microsoft.com/office/drawing/2014/main" id="{21021736-DB0A-4D61-A7F0-94879590CE91}"/>
+                <a16:creationId xmlns:a16="http://schemas.microsoft.com/office/drawing/2014/main" id="{7DA94998-3833-40CB-862F-E8961381B299}"/>
               </a:ext>
             </a:extLst>
           </p:cNvPr>
@@ -30562,7 +30562,7 @@
           <p:cNvPr id="37" name="">
             <a:extLst xmlns:a="http://schemas.openxmlformats.org/drawingml/2006/main">
               <a:ext uri="{FF2B5EF4-FFF2-40B4-BE49-F238E27FC236}">
-                <a16:creationId xmlns:a16="http://schemas.microsoft.com/office/drawing/2014/main" id="{087C09AD-BE20-45A6-8AE2-363BDC16C8BF}"/>
+                <a16:creationId xmlns:a16="http://schemas.microsoft.com/office/drawing/2014/main" id="{84C1D88D-FE19-4DD8-A67B-1EA5BC24469A}"/>
               </a:ext>
             </a:extLst>
           </p:cNvPr>
@@ -30618,7 +30618,7 @@
           <p:cNvPr id="38" name="">
             <a:extLst xmlns:a="http://schemas.openxmlformats.org/drawingml/2006/main">
               <a:ext uri="{FF2B5EF4-FFF2-40B4-BE49-F238E27FC236}">
-                <a16:creationId xmlns:a16="http://schemas.microsoft.com/office/drawing/2014/main" id="{4AABF954-720B-4026-A6DC-B9789D61BEB0}"/>
+                <a16:creationId xmlns:a16="http://schemas.microsoft.com/office/drawing/2014/main" id="{5D920A00-D311-4A66-96FB-5ECA8F24B10D}"/>
               </a:ext>
             </a:extLst>
           </p:cNvPr>
@@ -30674,7 +30674,7 @@
           <p:cNvPr id="39" name="">
             <a:extLst xmlns:a="http://schemas.openxmlformats.org/drawingml/2006/main">
               <a:ext uri="{FF2B5EF4-FFF2-40B4-BE49-F238E27FC236}">
-                <a16:creationId xmlns:a16="http://schemas.microsoft.com/office/drawing/2014/main" id="{0DD8F46C-80B7-4B37-A21F-F176D4F1BEF8}"/>
+                <a16:creationId xmlns:a16="http://schemas.microsoft.com/office/drawing/2014/main" id="{A750B903-174E-4023-A373-A75D25A63B92}"/>
               </a:ext>
             </a:extLst>
           </p:cNvPr>
@@ -30730,7 +30730,7 @@
           <p:cNvPr id="40" name="">
             <a:extLst xmlns:a="http://schemas.openxmlformats.org/drawingml/2006/main">
               <a:ext uri="{FF2B5EF4-FFF2-40B4-BE49-F238E27FC236}">
-                <a16:creationId xmlns:a16="http://schemas.microsoft.com/office/drawing/2014/main" id="{AABD71F8-3F50-48EF-B664-B4AEEC9735B3}"/>
+                <a16:creationId xmlns:a16="http://schemas.microsoft.com/office/drawing/2014/main" id="{2EAAE9A8-4CF4-4FD7-9008-954F832F55C7}"/>
               </a:ext>
             </a:extLst>
           </p:cNvPr>
@@ -30765,7 +30765,7 @@
           <p:cNvPr id="41" name="">
             <a:extLst xmlns:a="http://schemas.openxmlformats.org/drawingml/2006/main">
               <a:ext uri="{FF2B5EF4-FFF2-40B4-BE49-F238E27FC236}">
-                <a16:creationId xmlns:a16="http://schemas.microsoft.com/office/drawing/2014/main" id="{31407F53-0AE4-4001-AC7C-FE2F19C548D8}"/>
+                <a16:creationId xmlns:a16="http://schemas.microsoft.com/office/drawing/2014/main" id="{4E6EA7E6-D932-498A-96CA-01C4FB24075A}"/>
               </a:ext>
             </a:extLst>
           </p:cNvPr>
@@ -30798,7 +30798,7 @@
           <p:cNvPr id="42" name="">
             <a:extLst xmlns:a="http://schemas.openxmlformats.org/drawingml/2006/main">
               <a:ext uri="{FF2B5EF4-FFF2-40B4-BE49-F238E27FC236}">
-                <a16:creationId xmlns:a16="http://schemas.microsoft.com/office/drawing/2014/main" id="{32439514-68E9-4D68-8F6D-513223C6B72E}"/>
+                <a16:creationId xmlns:a16="http://schemas.microsoft.com/office/drawing/2014/main" id="{A4BF0146-327C-4E20-95FB-684AB50D2040}"/>
               </a:ext>
             </a:extLst>
           </p:cNvPr>
@@ -30854,7 +30854,7 @@
           <p:cNvPr id="43" name="">
             <a:extLst xmlns:a="http://schemas.openxmlformats.org/drawingml/2006/main">
               <a:ext uri="{FF2B5EF4-FFF2-40B4-BE49-F238E27FC236}">
-                <a16:creationId xmlns:a16="http://schemas.microsoft.com/office/drawing/2014/main" id="{8604C14C-6BB2-4D3A-A67E-8D2468B377B0}"/>
+                <a16:creationId xmlns:a16="http://schemas.microsoft.com/office/drawing/2014/main" id="{8254ACCB-1155-4877-8A80-13EB277D989F}"/>
               </a:ext>
             </a:extLst>
           </p:cNvPr>
@@ -30910,7 +30910,7 @@
           <p:cNvPr id="44" name="">
             <a:extLst xmlns:a="http://schemas.openxmlformats.org/drawingml/2006/main">
               <a:ext uri="{FF2B5EF4-FFF2-40B4-BE49-F238E27FC236}">
-                <a16:creationId xmlns:a16="http://schemas.microsoft.com/office/drawing/2014/main" id="{9CA77FDA-37A5-4496-A920-1EA08F8D1ECE}"/>
+                <a16:creationId xmlns:a16="http://schemas.microsoft.com/office/drawing/2014/main" id="{0FA6B8E2-0485-4856-BCB4-0C794CC41C7F}"/>
               </a:ext>
             </a:extLst>
           </p:cNvPr>
@@ -30966,7 +30966,7 @@
           <p:cNvPr id="45" name="">
             <a:extLst xmlns:a="http://schemas.openxmlformats.org/drawingml/2006/main">
               <a:ext uri="{FF2B5EF4-FFF2-40B4-BE49-F238E27FC236}">
-                <a16:creationId xmlns:a16="http://schemas.microsoft.com/office/drawing/2014/main" id="{80BB854B-614A-4580-8279-440F3CFCC551}"/>
+                <a16:creationId xmlns:a16="http://schemas.microsoft.com/office/drawing/2014/main" id="{C62C5929-E3B5-4E52-A190-DE5B8450B668}"/>
               </a:ext>
             </a:extLst>
           </p:cNvPr>
@@ -31001,7 +31001,7 @@
           <p:cNvPr id="46" name="">
             <a:extLst xmlns:a="http://schemas.openxmlformats.org/drawingml/2006/main">
               <a:ext uri="{FF2B5EF4-FFF2-40B4-BE49-F238E27FC236}">
-                <a16:creationId xmlns:a16="http://schemas.microsoft.com/office/drawing/2014/main" id="{170C2E9C-E235-418E-9AED-DB923CB78C4E}"/>
+                <a16:creationId xmlns:a16="http://schemas.microsoft.com/office/drawing/2014/main" id="{D5D93D35-566F-4EB7-8051-B94DFDDF6D42}"/>
               </a:ext>
             </a:extLst>
           </p:cNvPr>
@@ -31034,7 +31034,7 @@
           <p:cNvPr id="47" name="">
             <a:extLst xmlns:a="http://schemas.openxmlformats.org/drawingml/2006/main">
               <a:ext uri="{FF2B5EF4-FFF2-40B4-BE49-F238E27FC236}">
-                <a16:creationId xmlns:a16="http://schemas.microsoft.com/office/drawing/2014/main" id="{9AA629E8-79A0-4E90-8312-A2F45C53B00C}"/>
+                <a16:creationId xmlns:a16="http://schemas.microsoft.com/office/drawing/2014/main" id="{C826E2AB-33E1-455E-B088-C5D2AA7477DD}"/>
               </a:ext>
             </a:extLst>
           </p:cNvPr>
@@ -31090,7 +31090,7 @@
           <p:cNvPr id="48" name="">
             <a:extLst xmlns:a="http://schemas.openxmlformats.org/drawingml/2006/main">
               <a:ext uri="{FF2B5EF4-FFF2-40B4-BE49-F238E27FC236}">
-                <a16:creationId xmlns:a16="http://schemas.microsoft.com/office/drawing/2014/main" id="{D735098C-8F35-4E8B-BB2B-2FA5E87B9584}"/>
+                <a16:creationId xmlns:a16="http://schemas.microsoft.com/office/drawing/2014/main" id="{F4FF3143-9E92-400A-83C6-124AAFC6B785}"/>
               </a:ext>
             </a:extLst>
           </p:cNvPr>
@@ -31146,7 +31146,7 @@
           <p:cNvPr id="49" name="">
             <a:extLst xmlns:a="http://schemas.openxmlformats.org/drawingml/2006/main">
               <a:ext uri="{FF2B5EF4-FFF2-40B4-BE49-F238E27FC236}">
-                <a16:creationId xmlns:a16="http://schemas.microsoft.com/office/drawing/2014/main" id="{57F4B282-DC93-48C9-A32D-F9CA7A7D175C}"/>
+                <a16:creationId xmlns:a16="http://schemas.microsoft.com/office/drawing/2014/main" id="{D495F8FF-9F15-4738-A0C0-D606B053A52D}"/>
               </a:ext>
             </a:extLst>
           </p:cNvPr>
@@ -31202,7 +31202,7 @@
           <p:cNvPr id="50" name="">
             <a:extLst xmlns:a="http://schemas.openxmlformats.org/drawingml/2006/main">
               <a:ext uri="{FF2B5EF4-FFF2-40B4-BE49-F238E27FC236}">
-                <a16:creationId xmlns:a16="http://schemas.microsoft.com/office/drawing/2014/main" id="{09D1442D-0E6A-4F7F-ADBC-9426A9D00BC1}"/>
+                <a16:creationId xmlns:a16="http://schemas.microsoft.com/office/drawing/2014/main" id="{8DF16514-DEBE-43ED-9EB0-4E7A733E0AF7}"/>
               </a:ext>
             </a:extLst>
           </p:cNvPr>
@@ -31237,7 +31237,7 @@
           <p:cNvPr id="51" name="">
             <a:extLst xmlns:a="http://schemas.openxmlformats.org/drawingml/2006/main">
               <a:ext uri="{FF2B5EF4-FFF2-40B4-BE49-F238E27FC236}">
-                <a16:creationId xmlns:a16="http://schemas.microsoft.com/office/drawing/2014/main" id="{7502D31F-3F68-4B31-BFF0-BEC7D7329072}"/>
+                <a16:creationId xmlns:a16="http://schemas.microsoft.com/office/drawing/2014/main" id="{53DC40AD-AA1E-4A3A-8168-06D4399D635F}"/>
               </a:ext>
             </a:extLst>
           </p:cNvPr>
@@ -31270,7 +31270,7 @@
           <p:cNvPr id="52" name="">
             <a:extLst xmlns:a="http://schemas.openxmlformats.org/drawingml/2006/main">
               <a:ext uri="{FF2B5EF4-FFF2-40B4-BE49-F238E27FC236}">
-                <a16:creationId xmlns:a16="http://schemas.microsoft.com/office/drawing/2014/main" id="{0239CAA9-7EE3-47BE-BB10-B3A292052F09}"/>
+                <a16:creationId xmlns:a16="http://schemas.microsoft.com/office/drawing/2014/main" id="{5A32915F-3FE5-4B56-9815-1502D1F43AAB}"/>
               </a:ext>
             </a:extLst>
           </p:cNvPr>
@@ -31326,7 +31326,7 @@
           <p:cNvPr id="53" name="">
             <a:extLst xmlns:a="http://schemas.openxmlformats.org/drawingml/2006/main">
               <a:ext uri="{FF2B5EF4-FFF2-40B4-BE49-F238E27FC236}">
-                <a16:creationId xmlns:a16="http://schemas.microsoft.com/office/drawing/2014/main" id="{FDEB9A9A-51AA-40C4-894E-70B45CDE058F}"/>
+                <a16:creationId xmlns:a16="http://schemas.microsoft.com/office/drawing/2014/main" id="{ACA2E197-7F98-461A-B3AA-B59FBAF35406}"/>
               </a:ext>
             </a:extLst>
           </p:cNvPr>
@@ -31382,7 +31382,7 @@
           <p:cNvPr id="54" name="">
             <a:extLst xmlns:a="http://schemas.openxmlformats.org/drawingml/2006/main">
               <a:ext uri="{FF2B5EF4-FFF2-40B4-BE49-F238E27FC236}">
-                <a16:creationId xmlns:a16="http://schemas.microsoft.com/office/drawing/2014/main" id="{06E48328-86CE-4ACA-BFF2-83B5BB13D1EE}"/>
+                <a16:creationId xmlns:a16="http://schemas.microsoft.com/office/drawing/2014/main" id="{FDDDC26D-8E89-4B75-9A6C-42A4906BFD8A}"/>
               </a:ext>
             </a:extLst>
           </p:cNvPr>
@@ -31438,7 +31438,7 @@
           <p:cNvPr id="55" name="">
             <a:extLst xmlns:a="http://schemas.openxmlformats.org/drawingml/2006/main">
               <a:ext uri="{FF2B5EF4-FFF2-40B4-BE49-F238E27FC236}">
-                <a16:creationId xmlns:a16="http://schemas.microsoft.com/office/drawing/2014/main" id="{D453C257-1C57-4203-91C0-087F80B970B1}"/>
+                <a16:creationId xmlns:a16="http://schemas.microsoft.com/office/drawing/2014/main" id="{D878836C-9FA6-4540-8946-5692DF759840}"/>
               </a:ext>
             </a:extLst>
           </p:cNvPr>
@@ -31473,7 +31473,7 @@
           <p:cNvPr id="56" name="">
             <a:extLst xmlns:a="http://schemas.openxmlformats.org/drawingml/2006/main">
               <a:ext uri="{FF2B5EF4-FFF2-40B4-BE49-F238E27FC236}">
-                <a16:creationId xmlns:a16="http://schemas.microsoft.com/office/drawing/2014/main" id="{89EC2FD5-89D2-43A4-9DE6-CEFC8C307FC8}"/>
+                <a16:creationId xmlns:a16="http://schemas.microsoft.com/office/drawing/2014/main" id="{251BB736-F997-4850-8CB2-EE4CF0FC8134}"/>
               </a:ext>
             </a:extLst>
           </p:cNvPr>
@@ -31529,7 +31529,7 @@
           <p:cNvPr id="57" name="">
             <a:extLst xmlns:a="http://schemas.openxmlformats.org/drawingml/2006/main">
               <a:ext uri="{FF2B5EF4-FFF2-40B4-BE49-F238E27FC236}">
-                <a16:creationId xmlns:a16="http://schemas.microsoft.com/office/drawing/2014/main" id="{C2EF480C-E32A-47D1-96EC-101263595AAE}"/>
+                <a16:creationId xmlns:a16="http://schemas.microsoft.com/office/drawing/2014/main" id="{91AAB944-2868-427B-86ED-CF1430DA6899}"/>
               </a:ext>
             </a:extLst>
           </p:cNvPr>
@@ -31585,7 +31585,7 @@
           <p:cNvPr id="58" name="">
             <a:extLst xmlns:a="http://schemas.openxmlformats.org/drawingml/2006/main">
               <a:ext uri="{FF2B5EF4-FFF2-40B4-BE49-F238E27FC236}">
-                <a16:creationId xmlns:a16="http://schemas.microsoft.com/office/drawing/2014/main" id="{4A9424D3-372C-44BA-AAF7-5814879F9BE4}"/>
+                <a16:creationId xmlns:a16="http://schemas.microsoft.com/office/drawing/2014/main" id="{46FCF36B-5B16-402B-88F6-D38F4553A9B3}"/>
               </a:ext>
             </a:extLst>
           </p:cNvPr>
@@ -31639,7 +31639,7 @@
     </p:spTree>
     <p:extLst>
       <p:ext uri="{BB962C8B-B14F-4D97-AF65-F5344CB8AC3E}">
-        <p14:creationId xmlns:p14="http://schemas.microsoft.com/office/powerpoint/2010/main" val="396348614"/>
+        <p14:creationId xmlns:p14="http://schemas.microsoft.com/office/powerpoint/2010/main" val="1499763095"/>
       </p:ext>
     </p:extLst>
   </p:cSld>

--- a/outputs/AI-Transforming-Hospital-Operations-SRS-2026.pptx
+++ b/outputs/AI-Transforming-Hospital-Operations-SRS-2026.pptx
@@ -2,28 +2,28 @@
 <file path=ppt/presentation.xml><?xml version="1.0" encoding="utf-8"?>
 <p:presentation xmlns:p="http://schemas.openxmlformats.org/presentationml/2006/main">
   <p:sldMasterIdLst>
-    <p:sldMasterId xmlns:r="http://schemas.openxmlformats.org/officeDocument/2006/relationships" id="2147483648" r:id="Ra756ebda8e544ff1"/>
+    <p:sldMasterId xmlns:r="http://schemas.openxmlformats.org/officeDocument/2006/relationships" id="2147483648" r:id="R044b2fc02b404d16"/>
   </p:sldMasterIdLst>
   <p:notesMasterIdLst>
-    <p:notesMasterId xmlns:r="http://schemas.openxmlformats.org/officeDocument/2006/relationships" r:id="R6abd22e0fa314727"/>
+    <p:notesMasterId xmlns:r="http://schemas.openxmlformats.org/officeDocument/2006/relationships" r:id="R72e23c200ce9409e"/>
   </p:notesMasterIdLst>
   <p:sldIdLst>
-    <p:sldId xmlns:r="http://schemas.openxmlformats.org/officeDocument/2006/relationships" id="256" r:id="R138f23958a274a4f"/>
-    <p:sldId xmlns:r="http://schemas.openxmlformats.org/officeDocument/2006/relationships" id="257" r:id="R8a9b99c8c6374fbf"/>
-    <p:sldId xmlns:r="http://schemas.openxmlformats.org/officeDocument/2006/relationships" id="258" r:id="Rf6177f5291fd4c1c"/>
-    <p:sldId xmlns:r="http://schemas.openxmlformats.org/officeDocument/2006/relationships" id="259" r:id="Rb6f2329dc2d34cfa"/>
-    <p:sldId xmlns:r="http://schemas.openxmlformats.org/officeDocument/2006/relationships" id="260" r:id="R1348f3f0f0cd4540"/>
-    <p:sldId xmlns:r="http://schemas.openxmlformats.org/officeDocument/2006/relationships" id="261" r:id="R673fbf304ff04640"/>
-    <p:sldId xmlns:r="http://schemas.openxmlformats.org/officeDocument/2006/relationships" id="262" r:id="Raf25bf298a9d4264"/>
-    <p:sldId xmlns:r="http://schemas.openxmlformats.org/officeDocument/2006/relationships" id="263" r:id="R22a40250c7324013"/>
-    <p:sldId xmlns:r="http://schemas.openxmlformats.org/officeDocument/2006/relationships" id="264" r:id="R045ee8b3cdec4d13"/>
-    <p:sldId xmlns:r="http://schemas.openxmlformats.org/officeDocument/2006/relationships" id="265" r:id="R451da572a90e47e3"/>
-    <p:sldId xmlns:r="http://schemas.openxmlformats.org/officeDocument/2006/relationships" id="266" r:id="R92e73b1202bd4991"/>
-    <p:sldId xmlns:r="http://schemas.openxmlformats.org/officeDocument/2006/relationships" id="267" r:id="Rec473b6c5648495e"/>
-    <p:sldId xmlns:r="http://schemas.openxmlformats.org/officeDocument/2006/relationships" id="268" r:id="R2df208edeae247c6"/>
-    <p:sldId xmlns:r="http://schemas.openxmlformats.org/officeDocument/2006/relationships" id="269" r:id="R745bbaa9cf69471c"/>
-    <p:sldId xmlns:r="http://schemas.openxmlformats.org/officeDocument/2006/relationships" id="270" r:id="R76f6643c64d14e0a"/>
-    <p:sldId xmlns:r="http://schemas.openxmlformats.org/officeDocument/2006/relationships" id="271" r:id="R7b8efbe29ac2445a"/>
+    <p:sldId xmlns:r="http://schemas.openxmlformats.org/officeDocument/2006/relationships" id="256" r:id="Reaf301f62ffb43b7"/>
+    <p:sldId xmlns:r="http://schemas.openxmlformats.org/officeDocument/2006/relationships" id="257" r:id="R6058cfe560be4f9b"/>
+    <p:sldId xmlns:r="http://schemas.openxmlformats.org/officeDocument/2006/relationships" id="258" r:id="R84ed21b8761e454a"/>
+    <p:sldId xmlns:r="http://schemas.openxmlformats.org/officeDocument/2006/relationships" id="259" r:id="R4b3768bd17ed4c39"/>
+    <p:sldId xmlns:r="http://schemas.openxmlformats.org/officeDocument/2006/relationships" id="260" r:id="R3e2fb4f1ff674af1"/>
+    <p:sldId xmlns:r="http://schemas.openxmlformats.org/officeDocument/2006/relationships" id="261" r:id="R11f1219991a64212"/>
+    <p:sldId xmlns:r="http://schemas.openxmlformats.org/officeDocument/2006/relationships" id="262" r:id="R0c1b024d6d9a4be4"/>
+    <p:sldId xmlns:r="http://schemas.openxmlformats.org/officeDocument/2006/relationships" id="263" r:id="R339f2819780f4e1d"/>
+    <p:sldId xmlns:r="http://schemas.openxmlformats.org/officeDocument/2006/relationships" id="264" r:id="R8943bf8c0a2b4699"/>
+    <p:sldId xmlns:r="http://schemas.openxmlformats.org/officeDocument/2006/relationships" id="265" r:id="Re7804ae970a3442e"/>
+    <p:sldId xmlns:r="http://schemas.openxmlformats.org/officeDocument/2006/relationships" id="266" r:id="Ra7ec408c736b462b"/>
+    <p:sldId xmlns:r="http://schemas.openxmlformats.org/officeDocument/2006/relationships" id="267" r:id="Ra02cbdae90b0476d"/>
+    <p:sldId xmlns:r="http://schemas.openxmlformats.org/officeDocument/2006/relationships" id="268" r:id="R28c96d457aca4b48"/>
+    <p:sldId xmlns:r="http://schemas.openxmlformats.org/officeDocument/2006/relationships" id="269" r:id="Rcf26e1dd06404285"/>
+    <p:sldId xmlns:r="http://schemas.openxmlformats.org/officeDocument/2006/relationships" id="270" r:id="Rb3a883befd294b54"/>
+    <p:sldId xmlns:r="http://schemas.openxmlformats.org/officeDocument/2006/relationships" id="271" r:id="R69730f542fa34a9f"/>
   </p:sldIdLst>
   <p:sldSz cx="12192000" cy="6858000"/>
   <p:notesSz cx="6858000" cy="9144000"/>
@@ -1700,7 +1700,7 @@
   </p:cSld>
   <p:clrMap bg1="lt1" tx1="dk1" bg2="lt2" tx2="dk2" accent1="accent1" accent2="accent2" accent3="accent3" accent4="accent4" accent5="accent5" accent6="accent6" hlink="hlink" folHlink="folHlink"/>
   <p:sldLayoutIdLst>
-    <p:sldLayoutId xmlns:r="http://schemas.openxmlformats.org/officeDocument/2006/relationships" id="2147483649" r:id="R37792025d10d421b"/>
+    <p:sldLayoutId xmlns:r="http://schemas.openxmlformats.org/officeDocument/2006/relationships" id="2147483649" r:id="Rc53f13a6b7c04913"/>
   </p:sldLayoutIdLst>
   <p:txStyles>
     <p:titleStyle>
@@ -3240,6 +3240,7 @@
           <a:lstStyle xmlns:a="http://schemas.openxmlformats.org/drawingml/2006/main"/>
           <a:p xmlns:a="http://schemas.openxmlformats.org/drawingml/2006/main">
             <a:pPr algn="l">
+              <a:buNone/>
               <a:defRPr sz="900" b="1">
                 <a:solidFill>
                   <a:srgbClr val="83F3C9"/>
@@ -3296,6 +3297,7 @@
           <a:lstStyle xmlns:a="http://schemas.openxmlformats.org/drawingml/2006/main"/>
           <a:p xmlns:a="http://schemas.openxmlformats.org/drawingml/2006/main">
             <a:pPr algn="l">
+              <a:buNone/>
               <a:defRPr sz="4500" b="1">
                 <a:solidFill>
                   <a:srgbClr val="F7F8F5"/>
@@ -3319,6 +3321,7 @@
           </a:p>
           <a:p xmlns:a="http://schemas.openxmlformats.org/drawingml/2006/main">
             <a:pPr algn="l">
+              <a:buNone/>
               <a:defRPr sz="4500" b="1">
                 <a:solidFill>
                   <a:srgbClr val="F7F8F5"/>
@@ -3375,6 +3378,7 @@
           <a:lstStyle xmlns:a="http://schemas.openxmlformats.org/drawingml/2006/main"/>
           <a:p xmlns:a="http://schemas.openxmlformats.org/drawingml/2006/main">
             <a:pPr algn="l">
+              <a:buNone/>
               <a:defRPr sz="1800" b="0">
                 <a:solidFill>
                   <a:srgbClr val="C2CDD1"/>
@@ -3398,6 +3402,7 @@
           </a:p>
           <a:p xmlns:a="http://schemas.openxmlformats.org/drawingml/2006/main">
             <a:pPr algn="l">
+              <a:buNone/>
               <a:defRPr sz="1800" b="0">
                 <a:solidFill>
                   <a:srgbClr val="C2CDD1"/>
@@ -3489,6 +3494,7 @@
           <a:lstStyle xmlns:a="http://schemas.openxmlformats.org/drawingml/2006/main"/>
           <a:p xmlns:a="http://schemas.openxmlformats.org/drawingml/2006/main">
             <a:pPr algn="l">
+              <a:buNone/>
               <a:defRPr sz="825" b="1">
                 <a:solidFill>
                   <a:srgbClr val="9AA8AE"/>
@@ -3545,6 +3551,7 @@
           <a:lstStyle xmlns:a="http://schemas.openxmlformats.org/drawingml/2006/main"/>
           <a:p xmlns:a="http://schemas.openxmlformats.org/drawingml/2006/main">
             <a:pPr algn="l">
+              <a:buNone/>
               <a:defRPr sz="5400" b="0">
                 <a:solidFill>
                   <a:srgbClr val="F7F8F5"/>
@@ -3601,6 +3608,7 @@
           <a:lstStyle xmlns:a="http://schemas.openxmlformats.org/drawingml/2006/main"/>
           <a:p xmlns:a="http://schemas.openxmlformats.org/drawingml/2006/main">
             <a:pPr algn="l">
+              <a:buNone/>
               <a:defRPr sz="1125" b="0">
                 <a:solidFill>
                   <a:srgbClr val="9AA8AE"/>
@@ -3688,6 +3696,7 @@
           <a:lstStyle xmlns:a="http://schemas.openxmlformats.org/drawingml/2006/main"/>
           <a:p xmlns:a="http://schemas.openxmlformats.org/drawingml/2006/main">
             <a:pPr algn="l">
+              <a:buNone/>
               <a:defRPr sz="1125" b="0">
                 <a:solidFill>
                   <a:srgbClr val="C6D0D3"/>
@@ -3744,6 +3753,7 @@
           <a:lstStyle xmlns:a="http://schemas.openxmlformats.org/drawingml/2006/main"/>
           <a:p xmlns:a="http://schemas.openxmlformats.org/drawingml/2006/main">
             <a:pPr algn="r">
+              <a:buNone/>
               <a:defRPr sz="975" b="1">
                 <a:solidFill>
                   <a:srgbClr val="F7F8F5"/>
@@ -3831,6 +3841,7 @@
           <a:lstStyle xmlns:a="http://schemas.openxmlformats.org/drawingml/2006/main"/>
           <a:p xmlns:a="http://schemas.openxmlformats.org/drawingml/2006/main">
             <a:pPr algn="l">
+              <a:buNone/>
               <a:defRPr sz="1125" b="0">
                 <a:solidFill>
                   <a:srgbClr val="C6D0D3"/>
@@ -3887,6 +3898,7 @@
           <a:lstStyle xmlns:a="http://schemas.openxmlformats.org/drawingml/2006/main"/>
           <a:p xmlns:a="http://schemas.openxmlformats.org/drawingml/2006/main">
             <a:pPr algn="r">
+              <a:buNone/>
               <a:defRPr sz="975" b="1">
                 <a:solidFill>
                   <a:srgbClr val="F7F8F5"/>
@@ -3974,6 +3986,7 @@
           <a:lstStyle xmlns:a="http://schemas.openxmlformats.org/drawingml/2006/main"/>
           <a:p xmlns:a="http://schemas.openxmlformats.org/drawingml/2006/main">
             <a:pPr algn="l">
+              <a:buNone/>
               <a:defRPr sz="1125" b="0">
                 <a:solidFill>
                   <a:srgbClr val="C6D0D3"/>
@@ -4030,6 +4043,7 @@
           <a:lstStyle xmlns:a="http://schemas.openxmlformats.org/drawingml/2006/main"/>
           <a:p xmlns:a="http://schemas.openxmlformats.org/drawingml/2006/main">
             <a:pPr algn="r">
+              <a:buNone/>
               <a:defRPr sz="975" b="1">
                 <a:solidFill>
                   <a:srgbClr val="F7F8F5"/>
@@ -4117,6 +4131,7 @@
           <a:lstStyle xmlns:a="http://schemas.openxmlformats.org/drawingml/2006/main"/>
           <a:p xmlns:a="http://schemas.openxmlformats.org/drawingml/2006/main">
             <a:pPr algn="l">
+              <a:buNone/>
               <a:defRPr sz="1125" b="0">
                 <a:solidFill>
                   <a:srgbClr val="C6D0D3"/>
@@ -4173,6 +4188,7 @@
           <a:lstStyle xmlns:a="http://schemas.openxmlformats.org/drawingml/2006/main"/>
           <a:p xmlns:a="http://schemas.openxmlformats.org/drawingml/2006/main">
             <a:pPr algn="r">
+              <a:buNone/>
               <a:defRPr sz="975" b="1">
                 <a:solidFill>
                   <a:srgbClr val="F7F8F5"/>
@@ -4229,6 +4245,7 @@
           <a:lstStyle xmlns:a="http://schemas.openxmlformats.org/drawingml/2006/main"/>
           <a:p xmlns:a="http://schemas.openxmlformats.org/drawingml/2006/main">
             <a:pPr algn="l">
+              <a:buNone/>
               <a:defRPr sz="825" b="1">
                 <a:solidFill>
                   <a:srgbClr val="83F3C9"/>
@@ -4285,6 +4302,7 @@
           <a:lstStyle xmlns:a="http://schemas.openxmlformats.org/drawingml/2006/main"/>
           <a:p xmlns:a="http://schemas.openxmlformats.org/drawingml/2006/main">
             <a:pPr algn="l">
+              <a:buNone/>
               <a:defRPr sz="1800" b="1">
                 <a:solidFill>
                   <a:srgbClr val="F7F8F5"/>
@@ -4341,6 +4359,7 @@
           <a:lstStyle xmlns:a="http://schemas.openxmlformats.org/drawingml/2006/main"/>
           <a:p xmlns:a="http://schemas.openxmlformats.org/drawingml/2006/main">
             <a:pPr algn="r">
+              <a:buNone/>
               <a:defRPr sz="825" b="1">
                 <a:solidFill>
                   <a:srgbClr val="5F7078"/>
@@ -4457,6 +4476,7 @@
           <a:lstStyle xmlns:a="http://schemas.openxmlformats.org/drawingml/2006/main"/>
           <a:p xmlns:a="http://schemas.openxmlformats.org/drawingml/2006/main">
             <a:pPr algn="l">
+              <a:buNone/>
               <a:defRPr sz="900" b="1">
                 <a:solidFill>
                   <a:srgbClr val="247B63"/>
@@ -4513,6 +4533,7 @@
           <a:lstStyle xmlns:a="http://schemas.openxmlformats.org/drawingml/2006/main"/>
           <a:p xmlns:a="http://schemas.openxmlformats.org/drawingml/2006/main">
             <a:pPr algn="l">
+              <a:buNone/>
               <a:defRPr sz="3300" b="1">
                 <a:solidFill>
                   <a:srgbClr val="0B1720"/>
@@ -4569,6 +4590,7 @@
           <a:lstStyle xmlns:a="http://schemas.openxmlformats.org/drawingml/2006/main"/>
           <a:p xmlns:a="http://schemas.openxmlformats.org/drawingml/2006/main">
             <a:pPr algn="l">
+              <a:buNone/>
               <a:defRPr sz="1350" b="1">
                 <a:solidFill>
                   <a:srgbClr val="247B63"/>
@@ -4660,6 +4682,7 @@
           <a:lstStyle xmlns:a="http://schemas.openxmlformats.org/drawingml/2006/main"/>
           <a:p xmlns:a="http://schemas.openxmlformats.org/drawingml/2006/main">
             <a:pPr algn="ctr">
+              <a:buNone/>
               <a:defRPr sz="975" b="1">
                 <a:solidFill>
                   <a:srgbClr val="51DFE3"/>
@@ -4716,6 +4739,7 @@
           <a:lstStyle xmlns:a="http://schemas.openxmlformats.org/drawingml/2006/main"/>
           <a:p xmlns:a="http://schemas.openxmlformats.org/drawingml/2006/main">
             <a:pPr algn="l">
+              <a:buNone/>
               <a:defRPr sz="825" b="1">
                 <a:solidFill>
                   <a:srgbClr val="51DFE3"/>
@@ -4772,6 +4796,7 @@
           <a:lstStyle xmlns:a="http://schemas.openxmlformats.org/drawingml/2006/main"/>
           <a:p xmlns:a="http://schemas.openxmlformats.org/drawingml/2006/main">
             <a:pPr algn="l">
+              <a:buNone/>
               <a:defRPr sz="1350" b="1">
                 <a:solidFill>
                   <a:srgbClr val="0B1720"/>
@@ -4863,6 +4888,7 @@
           <a:lstStyle xmlns:a="http://schemas.openxmlformats.org/drawingml/2006/main"/>
           <a:p xmlns:a="http://schemas.openxmlformats.org/drawingml/2006/main">
             <a:pPr algn="ctr">
+              <a:buNone/>
               <a:defRPr sz="975" b="1">
                 <a:solidFill>
                   <a:srgbClr val="60D799"/>
@@ -4919,6 +4945,7 @@
           <a:lstStyle xmlns:a="http://schemas.openxmlformats.org/drawingml/2006/main"/>
           <a:p xmlns:a="http://schemas.openxmlformats.org/drawingml/2006/main">
             <a:pPr algn="l">
+              <a:buNone/>
               <a:defRPr sz="825" b="1">
                 <a:solidFill>
                   <a:srgbClr val="60D799"/>
@@ -4975,6 +5002,7 @@
           <a:lstStyle xmlns:a="http://schemas.openxmlformats.org/drawingml/2006/main"/>
           <a:p xmlns:a="http://schemas.openxmlformats.org/drawingml/2006/main">
             <a:pPr algn="l">
+              <a:buNone/>
               <a:defRPr sz="1350" b="1">
                 <a:solidFill>
                   <a:srgbClr val="0B1720"/>
@@ -5066,6 +5094,7 @@
           <a:lstStyle xmlns:a="http://schemas.openxmlformats.org/drawingml/2006/main"/>
           <a:p xmlns:a="http://schemas.openxmlformats.org/drawingml/2006/main">
             <a:pPr algn="ctr">
+              <a:buNone/>
               <a:defRPr sz="975" b="1">
                 <a:solidFill>
                   <a:srgbClr val="F3C668"/>
@@ -5122,6 +5151,7 @@
           <a:lstStyle xmlns:a="http://schemas.openxmlformats.org/drawingml/2006/main"/>
           <a:p xmlns:a="http://schemas.openxmlformats.org/drawingml/2006/main">
             <a:pPr algn="l">
+              <a:buNone/>
               <a:defRPr sz="825" b="1">
                 <a:solidFill>
                   <a:srgbClr val="F3C668"/>
@@ -5178,6 +5208,7 @@
           <a:lstStyle xmlns:a="http://schemas.openxmlformats.org/drawingml/2006/main"/>
           <a:p xmlns:a="http://schemas.openxmlformats.org/drawingml/2006/main">
             <a:pPr algn="l">
+              <a:buNone/>
               <a:defRPr sz="1350" b="1">
                 <a:solidFill>
                   <a:srgbClr val="0B1720"/>
@@ -5269,6 +5300,7 @@
           <a:lstStyle xmlns:a="http://schemas.openxmlformats.org/drawingml/2006/main"/>
           <a:p xmlns:a="http://schemas.openxmlformats.org/drawingml/2006/main">
             <a:pPr algn="ctr">
+              <a:buNone/>
               <a:defRPr sz="975" b="1">
                 <a:solidFill>
                   <a:srgbClr val="AA91FF"/>
@@ -5325,6 +5357,7 @@
           <a:lstStyle xmlns:a="http://schemas.openxmlformats.org/drawingml/2006/main"/>
           <a:p xmlns:a="http://schemas.openxmlformats.org/drawingml/2006/main">
             <a:pPr algn="l">
+              <a:buNone/>
               <a:defRPr sz="825" b="1">
                 <a:solidFill>
                   <a:srgbClr val="AA91FF"/>
@@ -5381,6 +5414,7 @@
           <a:lstStyle xmlns:a="http://schemas.openxmlformats.org/drawingml/2006/main"/>
           <a:p xmlns:a="http://schemas.openxmlformats.org/drawingml/2006/main">
             <a:pPr algn="l">
+              <a:buNone/>
               <a:defRPr sz="1350" b="1">
                 <a:solidFill>
                   <a:srgbClr val="0B1720"/>
@@ -5437,6 +5471,7 @@
           <a:lstStyle xmlns:a="http://schemas.openxmlformats.org/drawingml/2006/main"/>
           <a:p xmlns:a="http://schemas.openxmlformats.org/drawingml/2006/main">
             <a:pPr algn="ctr">
+              <a:buNone/>
               <a:defRPr sz="3150" b="0">
                 <a:solidFill>
                   <a:srgbClr val="5F7078"/>
@@ -5528,6 +5563,7 @@
           <a:lstStyle xmlns:a="http://schemas.openxmlformats.org/drawingml/2006/main"/>
           <a:p xmlns:a="http://schemas.openxmlformats.org/drawingml/2006/main">
             <a:pPr algn="ctr">
+              <a:buNone/>
               <a:defRPr sz="825" b="1">
                 <a:solidFill>
                   <a:srgbClr val="83F3C9"/>
@@ -5584,6 +5620,7 @@
           <a:lstStyle xmlns:a="http://schemas.openxmlformats.org/drawingml/2006/main"/>
           <a:p xmlns:a="http://schemas.openxmlformats.org/drawingml/2006/main">
             <a:pPr algn="ctr">
+              <a:buNone/>
               <a:defRPr sz="2400" b="1">
                 <a:solidFill>
                   <a:srgbClr val="F7F8F5"/>
@@ -5607,6 +5644,7 @@
           </a:p>
           <a:p xmlns:a="http://schemas.openxmlformats.org/drawingml/2006/main">
             <a:pPr algn="ctr">
+              <a:buNone/>
               <a:defRPr sz="2400" b="1">
                 <a:solidFill>
                   <a:srgbClr val="F7F8F5"/>
@@ -5663,6 +5701,7 @@
           <a:lstStyle xmlns:a="http://schemas.openxmlformats.org/drawingml/2006/main"/>
           <a:p xmlns:a="http://schemas.openxmlformats.org/drawingml/2006/main">
             <a:pPr algn="ctr">
+              <a:buNone/>
               <a:defRPr sz="1050" b="0">
                 <a:solidFill>
                   <a:srgbClr val="9AA8AE"/>
@@ -5719,6 +5758,7 @@
           <a:lstStyle xmlns:a="http://schemas.openxmlformats.org/drawingml/2006/main"/>
           <a:p xmlns:a="http://schemas.openxmlformats.org/drawingml/2006/main">
             <a:pPr algn="ctr">
+              <a:buNone/>
               <a:defRPr sz="3150" b="0">
                 <a:solidFill>
                   <a:srgbClr val="5F7078"/>
@@ -5806,6 +5846,7 @@
           <a:lstStyle xmlns:a="http://schemas.openxmlformats.org/drawingml/2006/main"/>
           <a:p xmlns:a="http://schemas.openxmlformats.org/drawingml/2006/main">
             <a:pPr algn="l">
+              <a:buNone/>
               <a:defRPr sz="825" b="1">
                 <a:solidFill>
                   <a:srgbClr val="60D799"/>
@@ -5862,6 +5903,7 @@
           <a:lstStyle xmlns:a="http://schemas.openxmlformats.org/drawingml/2006/main"/>
           <a:p xmlns:a="http://schemas.openxmlformats.org/drawingml/2006/main">
             <a:pPr algn="l">
+              <a:buNone/>
               <a:defRPr sz="1275" b="1">
                 <a:solidFill>
                   <a:srgbClr val="0B1720"/>
@@ -5949,6 +5991,7 @@
           <a:lstStyle xmlns:a="http://schemas.openxmlformats.org/drawingml/2006/main"/>
           <a:p xmlns:a="http://schemas.openxmlformats.org/drawingml/2006/main">
             <a:pPr algn="l">
+              <a:buNone/>
               <a:defRPr sz="825" b="1">
                 <a:solidFill>
                   <a:srgbClr val="60D799"/>
@@ -6005,6 +6048,7 @@
           <a:lstStyle xmlns:a="http://schemas.openxmlformats.org/drawingml/2006/main"/>
           <a:p xmlns:a="http://schemas.openxmlformats.org/drawingml/2006/main">
             <a:pPr algn="l">
+              <a:buNone/>
               <a:defRPr sz="1275" b="1">
                 <a:solidFill>
                   <a:srgbClr val="0B1720"/>
@@ -6092,6 +6136,7 @@
           <a:lstStyle xmlns:a="http://schemas.openxmlformats.org/drawingml/2006/main"/>
           <a:p xmlns:a="http://schemas.openxmlformats.org/drawingml/2006/main">
             <a:pPr algn="l">
+              <a:buNone/>
               <a:defRPr sz="825" b="1">
                 <a:solidFill>
                   <a:srgbClr val="F3C668"/>
@@ -6148,6 +6193,7 @@
           <a:lstStyle xmlns:a="http://schemas.openxmlformats.org/drawingml/2006/main"/>
           <a:p xmlns:a="http://schemas.openxmlformats.org/drawingml/2006/main">
             <a:pPr algn="l">
+              <a:buNone/>
               <a:defRPr sz="1275" b="1">
                 <a:solidFill>
                   <a:srgbClr val="0B1720"/>
@@ -6235,6 +6281,7 @@
           <a:lstStyle xmlns:a="http://schemas.openxmlformats.org/drawingml/2006/main"/>
           <a:p xmlns:a="http://schemas.openxmlformats.org/drawingml/2006/main">
             <a:pPr algn="l">
+              <a:buNone/>
               <a:defRPr sz="825" b="1">
                 <a:solidFill>
                   <a:srgbClr val="F3C668"/>
@@ -6291,6 +6338,7 @@
           <a:lstStyle xmlns:a="http://schemas.openxmlformats.org/drawingml/2006/main"/>
           <a:p xmlns:a="http://schemas.openxmlformats.org/drawingml/2006/main">
             <a:pPr algn="l">
+              <a:buNone/>
               <a:defRPr sz="1275" b="1">
                 <a:solidFill>
                   <a:srgbClr val="0B1720"/>
@@ -6382,6 +6430,7 @@
           <a:lstStyle xmlns:a="http://schemas.openxmlformats.org/drawingml/2006/main"/>
           <a:p xmlns:a="http://schemas.openxmlformats.org/drawingml/2006/main">
             <a:pPr algn="ctr">
+              <a:buNone/>
               <a:defRPr sz="1425" b="1">
                 <a:solidFill>
                   <a:srgbClr val="0B1720"/>
@@ -6438,6 +6487,7 @@
           <a:lstStyle xmlns:a="http://schemas.openxmlformats.org/drawingml/2006/main"/>
           <a:p xmlns:a="http://schemas.openxmlformats.org/drawingml/2006/main">
             <a:pPr algn="r">
+              <a:buNone/>
               <a:defRPr sz="825" b="1">
                 <a:solidFill>
                   <a:srgbClr val="5F7078"/>
@@ -6554,6 +6604,7 @@
           <a:lstStyle xmlns:a="http://schemas.openxmlformats.org/drawingml/2006/main"/>
           <a:p xmlns:a="http://schemas.openxmlformats.org/drawingml/2006/main">
             <a:pPr algn="l">
+              <a:buNone/>
               <a:defRPr sz="900" b="1">
                 <a:solidFill>
                   <a:srgbClr val="83F3C9"/>
@@ -6610,6 +6661,7 @@
           <a:lstStyle xmlns:a="http://schemas.openxmlformats.org/drawingml/2006/main"/>
           <a:p xmlns:a="http://schemas.openxmlformats.org/drawingml/2006/main">
             <a:pPr algn="l">
+              <a:buNone/>
               <a:defRPr sz="3900" b="1">
                 <a:solidFill>
                   <a:srgbClr val="F7F8F5"/>
@@ -6666,6 +6718,7 @@
           <a:lstStyle xmlns:a="http://schemas.openxmlformats.org/drawingml/2006/main"/>
           <a:p xmlns:a="http://schemas.openxmlformats.org/drawingml/2006/main">
             <a:pPr algn="l">
+              <a:buNone/>
               <a:defRPr sz="1425" b="0">
                 <a:solidFill>
                   <a:srgbClr val="9AA8AE"/>
@@ -6722,6 +6775,7 @@
           <a:lstStyle xmlns:a="http://schemas.openxmlformats.org/drawingml/2006/main"/>
           <a:p xmlns:a="http://schemas.openxmlformats.org/drawingml/2006/main">
             <a:pPr algn="l">
+              <a:buNone/>
               <a:defRPr sz="2400" b="1">
                 <a:solidFill>
                   <a:srgbClr val="83F3C9"/>
@@ -6778,6 +6832,7 @@
           <a:lstStyle xmlns:a="http://schemas.openxmlformats.org/drawingml/2006/main"/>
           <a:p xmlns:a="http://schemas.openxmlformats.org/drawingml/2006/main">
             <a:pPr algn="l">
+              <a:buNone/>
               <a:defRPr sz="1125" b="0">
                 <a:solidFill>
                   <a:srgbClr val="9AA8AE"/>
@@ -6834,6 +6889,7 @@
           <a:lstStyle xmlns:a="http://schemas.openxmlformats.org/drawingml/2006/main"/>
           <a:p xmlns:a="http://schemas.openxmlformats.org/drawingml/2006/main">
             <a:pPr algn="l">
+              <a:buNone/>
               <a:defRPr sz="2400" b="1">
                 <a:solidFill>
                   <a:srgbClr val="83F3C9"/>
@@ -6890,6 +6946,7 @@
           <a:lstStyle xmlns:a="http://schemas.openxmlformats.org/drawingml/2006/main"/>
           <a:p xmlns:a="http://schemas.openxmlformats.org/drawingml/2006/main">
             <a:pPr algn="l">
+              <a:buNone/>
               <a:defRPr sz="1125" b="0">
                 <a:solidFill>
                   <a:srgbClr val="9AA8AE"/>
@@ -6946,6 +7003,7 @@
           <a:lstStyle xmlns:a="http://schemas.openxmlformats.org/drawingml/2006/main"/>
           <a:p xmlns:a="http://schemas.openxmlformats.org/drawingml/2006/main">
             <a:pPr algn="l">
+              <a:buNone/>
               <a:defRPr sz="2400" b="1">
                 <a:solidFill>
                   <a:srgbClr val="83F3C9"/>
@@ -7002,6 +7060,7 @@
           <a:lstStyle xmlns:a="http://schemas.openxmlformats.org/drawingml/2006/main"/>
           <a:p xmlns:a="http://schemas.openxmlformats.org/drawingml/2006/main">
             <a:pPr algn="l">
+              <a:buNone/>
               <a:defRPr sz="1125" b="0">
                 <a:solidFill>
                   <a:srgbClr val="9AA8AE"/>
@@ -7058,6 +7117,7 @@
           <a:lstStyle xmlns:a="http://schemas.openxmlformats.org/drawingml/2006/main"/>
           <a:p xmlns:a="http://schemas.openxmlformats.org/drawingml/2006/main">
             <a:pPr algn="l">
+              <a:buNone/>
               <a:defRPr sz="2400" b="1">
                 <a:solidFill>
                   <a:srgbClr val="83F3C9"/>
@@ -7114,6 +7174,7 @@
           <a:lstStyle xmlns:a="http://schemas.openxmlformats.org/drawingml/2006/main"/>
           <a:p xmlns:a="http://schemas.openxmlformats.org/drawingml/2006/main">
             <a:pPr algn="l">
+              <a:buNone/>
               <a:defRPr sz="1125" b="0">
                 <a:solidFill>
                   <a:srgbClr val="9AA8AE"/>
@@ -7205,6 +7266,7 @@
           <a:lstStyle xmlns:a="http://schemas.openxmlformats.org/drawingml/2006/main"/>
           <a:p xmlns:a="http://schemas.openxmlformats.org/drawingml/2006/main">
             <a:pPr algn="ctr">
+              <a:buNone/>
               <a:defRPr sz="750" b="1">
                 <a:solidFill>
                   <a:srgbClr val="F3C668"/>
@@ -7261,6 +7323,7 @@
           <a:lstStyle xmlns:a="http://schemas.openxmlformats.org/drawingml/2006/main"/>
           <a:p xmlns:a="http://schemas.openxmlformats.org/drawingml/2006/main">
             <a:pPr algn="l">
+              <a:buNone/>
               <a:defRPr sz="675" b="0">
                 <a:solidFill>
                   <a:srgbClr val="5F7078"/>
@@ -7317,6 +7380,7 @@
           <a:lstStyle xmlns:a="http://schemas.openxmlformats.org/drawingml/2006/main"/>
           <a:p xmlns:a="http://schemas.openxmlformats.org/drawingml/2006/main">
             <a:pPr algn="r">
+              <a:buNone/>
               <a:defRPr sz="825" b="1">
                 <a:solidFill>
                   <a:srgbClr val="5F7078"/>
@@ -7349,7 +7413,7 @@
           <p:nvPr/>
         </p:nvPicPr>
         <p:blipFill>
-          <a:blip xmlns:r="http://schemas.openxmlformats.org/officeDocument/2006/relationships" xmlns:a="http://schemas.openxmlformats.org/drawingml/2006/main" r:embed="Rff50221032b24282"/>
+          <a:blip xmlns:r="http://schemas.openxmlformats.org/officeDocument/2006/relationships" xmlns:a="http://schemas.openxmlformats.org/drawingml/2006/main" r:embed="Ra0acc80a9f2d49da"/>
           <a:srcRect xmlns:a="http://schemas.openxmlformats.org/drawingml/2006/main" l="19" t="0" r="19" b="0"/>
           <a:stretch xmlns:a="http://schemas.openxmlformats.org/drawingml/2006/main">
             <a:fillRect l="0" t="0" r="0" b="0"/>
@@ -7460,6 +7524,7 @@
           <a:lstStyle xmlns:a="http://schemas.openxmlformats.org/drawingml/2006/main"/>
           <a:p xmlns:a="http://schemas.openxmlformats.org/drawingml/2006/main">
             <a:pPr algn="l">
+              <a:buNone/>
               <a:defRPr sz="900" b="1">
                 <a:solidFill>
                   <a:srgbClr val="247B63"/>
@@ -7516,6 +7581,7 @@
           <a:lstStyle xmlns:a="http://schemas.openxmlformats.org/drawingml/2006/main"/>
           <a:p xmlns:a="http://schemas.openxmlformats.org/drawingml/2006/main">
             <a:pPr algn="l">
+              <a:buNone/>
               <a:defRPr sz="3150" b="1">
                 <a:solidFill>
                   <a:srgbClr val="0B1720"/>
@@ -7572,6 +7638,7 @@
           <a:lstStyle xmlns:a="http://schemas.openxmlformats.org/drawingml/2006/main"/>
           <a:p xmlns:a="http://schemas.openxmlformats.org/drawingml/2006/main">
             <a:pPr algn="l">
+              <a:buNone/>
               <a:defRPr sz="1425" b="0">
                 <a:solidFill>
                   <a:srgbClr val="5F7078"/>
@@ -7659,6 +7726,7 @@
           <a:lstStyle xmlns:a="http://schemas.openxmlformats.org/drawingml/2006/main"/>
           <a:p xmlns:a="http://schemas.openxmlformats.org/drawingml/2006/main">
             <a:pPr algn="l">
+              <a:buNone/>
               <a:defRPr sz="825" b="1">
                 <a:solidFill>
                   <a:srgbClr val="247B63"/>
@@ -7715,6 +7783,7 @@
           <a:lstStyle xmlns:a="http://schemas.openxmlformats.org/drawingml/2006/main"/>
           <a:p xmlns:a="http://schemas.openxmlformats.org/drawingml/2006/main">
             <a:pPr algn="l">
+              <a:buNone/>
               <a:defRPr sz="5100" b="1">
                 <a:solidFill>
                   <a:srgbClr val="0B1720"/>
@@ -7771,6 +7840,7 @@
           <a:lstStyle xmlns:a="http://schemas.openxmlformats.org/drawingml/2006/main"/>
           <a:p xmlns:a="http://schemas.openxmlformats.org/drawingml/2006/main">
             <a:pPr algn="l">
+              <a:buNone/>
               <a:defRPr sz="1650" b="0">
                 <a:solidFill>
                   <a:srgbClr val="5F7078"/>
@@ -7827,6 +7897,7 @@
           <a:lstStyle xmlns:a="http://schemas.openxmlformats.org/drawingml/2006/main"/>
           <a:p xmlns:a="http://schemas.openxmlformats.org/drawingml/2006/main">
             <a:pPr algn="l">
+              <a:buNone/>
               <a:defRPr sz="1500" b="1">
                 <a:solidFill>
                   <a:srgbClr val="0B1720"/>
@@ -7918,6 +7989,7 @@
           <a:lstStyle xmlns:a="http://schemas.openxmlformats.org/drawingml/2006/main"/>
           <a:p xmlns:a="http://schemas.openxmlformats.org/drawingml/2006/main">
             <a:pPr algn="ctr">
+              <a:buNone/>
               <a:defRPr sz="750" b="1">
                 <a:solidFill>
                   <a:srgbClr val="5F7078"/>
@@ -7974,6 +8046,7 @@
           <a:lstStyle xmlns:a="http://schemas.openxmlformats.org/drawingml/2006/main"/>
           <a:p xmlns:a="http://schemas.openxmlformats.org/drawingml/2006/main">
             <a:pPr algn="l">
+              <a:buNone/>
               <a:defRPr sz="825" b="1">
                 <a:solidFill>
                   <a:srgbClr val="247B63"/>
@@ -8030,6 +8103,7 @@
           <a:lstStyle xmlns:a="http://schemas.openxmlformats.org/drawingml/2006/main"/>
           <a:p xmlns:a="http://schemas.openxmlformats.org/drawingml/2006/main">
             <a:pPr algn="l">
+              <a:buNone/>
               <a:defRPr sz="5100" b="1">
                 <a:solidFill>
                   <a:srgbClr val="0B1720"/>
@@ -8086,6 +8160,7 @@
           <a:lstStyle xmlns:a="http://schemas.openxmlformats.org/drawingml/2006/main"/>
           <a:p xmlns:a="http://schemas.openxmlformats.org/drawingml/2006/main">
             <a:pPr algn="l">
+              <a:buNone/>
               <a:defRPr sz="1650" b="0">
                 <a:solidFill>
                   <a:srgbClr val="5F7078"/>
@@ -8142,6 +8217,7 @@
           <a:lstStyle xmlns:a="http://schemas.openxmlformats.org/drawingml/2006/main"/>
           <a:p xmlns:a="http://schemas.openxmlformats.org/drawingml/2006/main">
             <a:pPr algn="l">
+              <a:buNone/>
               <a:defRPr sz="1500" b="1">
                 <a:solidFill>
                   <a:srgbClr val="0B1720"/>
@@ -8233,6 +8309,7 @@
           <a:lstStyle xmlns:a="http://schemas.openxmlformats.org/drawingml/2006/main"/>
           <a:p xmlns:a="http://schemas.openxmlformats.org/drawingml/2006/main">
             <a:pPr algn="ctr">
+              <a:buNone/>
               <a:defRPr sz="750" b="1">
                 <a:solidFill>
                   <a:srgbClr val="5F7078"/>
@@ -8324,6 +8401,7 @@
           <a:lstStyle xmlns:a="http://schemas.openxmlformats.org/drawingml/2006/main"/>
           <a:p xmlns:a="http://schemas.openxmlformats.org/drawingml/2006/main">
             <a:pPr algn="ctr">
+              <a:buNone/>
               <a:defRPr sz="1125" b="1">
                 <a:solidFill>
                   <a:srgbClr val="F7F8F5"/>
@@ -8380,6 +8458,7 @@
           <a:lstStyle xmlns:a="http://schemas.openxmlformats.org/drawingml/2006/main"/>
           <a:p xmlns:a="http://schemas.openxmlformats.org/drawingml/2006/main">
             <a:pPr algn="l">
+              <a:buNone/>
               <a:defRPr sz="675" b="0">
                 <a:solidFill>
                   <a:srgbClr val="5F7078"/>
@@ -8436,6 +8515,7 @@
           <a:lstStyle xmlns:a="http://schemas.openxmlformats.org/drawingml/2006/main"/>
           <a:p xmlns:a="http://schemas.openxmlformats.org/drawingml/2006/main">
             <a:pPr algn="r">
+              <a:buNone/>
               <a:defRPr sz="825" b="1">
                 <a:solidFill>
                   <a:srgbClr val="5F7078"/>
@@ -9482,6 +9562,7 @@
           <a:lstStyle xmlns:a="http://schemas.openxmlformats.org/drawingml/2006/main"/>
           <a:p xmlns:a="http://schemas.openxmlformats.org/drawingml/2006/main">
             <a:pPr algn="l">
+              <a:buNone/>
               <a:defRPr sz="900" b="1">
                 <a:solidFill>
                   <a:srgbClr val="83F3C9"/>
@@ -9538,6 +9619,7 @@
           <a:lstStyle xmlns:a="http://schemas.openxmlformats.org/drawingml/2006/main"/>
           <a:p xmlns:a="http://schemas.openxmlformats.org/drawingml/2006/main">
             <a:pPr algn="l">
+              <a:buNone/>
               <a:defRPr sz="3300" b="1">
                 <a:solidFill>
                   <a:srgbClr val="F7F8F5"/>
@@ -9594,6 +9676,7 @@
           <a:lstStyle xmlns:a="http://schemas.openxmlformats.org/drawingml/2006/main"/>
           <a:p xmlns:a="http://schemas.openxmlformats.org/drawingml/2006/main">
             <a:pPr algn="l">
+              <a:buNone/>
               <a:defRPr sz="1500" b="0">
                 <a:solidFill>
                   <a:srgbClr val="9AA8AE"/>
@@ -10244,6 +10327,7 @@
           <a:lstStyle xmlns:a="http://schemas.openxmlformats.org/drawingml/2006/main"/>
           <a:p xmlns:a="http://schemas.openxmlformats.org/drawingml/2006/main">
             <a:pPr algn="ctr">
+              <a:buNone/>
               <a:defRPr sz="825" b="1">
                 <a:solidFill>
                   <a:srgbClr val="9AA8AE"/>
@@ -10300,6 +10384,7 @@
           <a:lstStyle xmlns:a="http://schemas.openxmlformats.org/drawingml/2006/main"/>
           <a:p xmlns:a="http://schemas.openxmlformats.org/drawingml/2006/main">
             <a:pPr algn="ctr">
+              <a:buNone/>
               <a:defRPr sz="3150" b="0">
                 <a:solidFill>
                   <a:srgbClr val="9AA8AE"/>
@@ -10391,6 +10476,7 @@
           <a:lstStyle xmlns:a="http://schemas.openxmlformats.org/drawingml/2006/main"/>
           <a:p xmlns:a="http://schemas.openxmlformats.org/drawingml/2006/main">
             <a:pPr algn="l">
+              <a:buNone/>
               <a:defRPr sz="825" b="1">
                 <a:solidFill>
                   <a:srgbClr val="9AA8AE"/>
@@ -10478,6 +10564,7 @@
           <a:lstStyle xmlns:a="http://schemas.openxmlformats.org/drawingml/2006/main"/>
           <a:p xmlns:a="http://schemas.openxmlformats.org/drawingml/2006/main">
             <a:pPr algn="ctr">
+              <a:buNone/>
               <a:defRPr sz="975" b="1">
                 <a:solidFill>
                   <a:srgbClr val="FF7487"/>
@@ -10534,6 +10621,7 @@
           <a:lstStyle xmlns:a="http://schemas.openxmlformats.org/drawingml/2006/main"/>
           <a:p xmlns:a="http://schemas.openxmlformats.org/drawingml/2006/main">
             <a:pPr algn="ctr">
+              <a:buNone/>
               <a:defRPr sz="1650" b="1">
                 <a:solidFill>
                   <a:srgbClr val="83F3C9"/>
@@ -10590,6 +10678,7 @@
           <a:lstStyle xmlns:a="http://schemas.openxmlformats.org/drawingml/2006/main"/>
           <a:p xmlns:a="http://schemas.openxmlformats.org/drawingml/2006/main">
             <a:pPr algn="l">
+              <a:buNone/>
               <a:defRPr sz="675" b="0">
                 <a:solidFill>
                   <a:srgbClr val="5F7078"/>
@@ -10646,6 +10735,7 @@
           <a:lstStyle xmlns:a="http://schemas.openxmlformats.org/drawingml/2006/main"/>
           <a:p xmlns:a="http://schemas.openxmlformats.org/drawingml/2006/main">
             <a:pPr algn="r">
+              <a:buNone/>
               <a:defRPr sz="825" b="1">
                 <a:solidFill>
                   <a:srgbClr val="5F7078"/>
@@ -10762,6 +10852,7 @@
           <a:lstStyle xmlns:a="http://schemas.openxmlformats.org/drawingml/2006/main"/>
           <a:p xmlns:a="http://schemas.openxmlformats.org/drawingml/2006/main">
             <a:pPr algn="l">
+              <a:buNone/>
               <a:defRPr sz="900" b="1">
                 <a:solidFill>
                   <a:srgbClr val="247B63"/>
@@ -10818,6 +10909,7 @@
           <a:lstStyle xmlns:a="http://schemas.openxmlformats.org/drawingml/2006/main"/>
           <a:p xmlns:a="http://schemas.openxmlformats.org/drawingml/2006/main">
             <a:pPr algn="l">
+              <a:buNone/>
               <a:defRPr sz="3300" b="1">
                 <a:solidFill>
                   <a:srgbClr val="0B1720"/>
@@ -10874,6 +10966,7 @@
           <a:lstStyle xmlns:a="http://schemas.openxmlformats.org/drawingml/2006/main"/>
           <a:p xmlns:a="http://schemas.openxmlformats.org/drawingml/2006/main">
             <a:pPr algn="l">
+              <a:buNone/>
               <a:defRPr sz="1575" b="0">
                 <a:solidFill>
                   <a:srgbClr val="5F7078"/>
@@ -10930,6 +11023,7 @@
           <a:lstStyle xmlns:a="http://schemas.openxmlformats.org/drawingml/2006/main"/>
           <a:p xmlns:a="http://schemas.openxmlformats.org/drawingml/2006/main">
             <a:pPr algn="r">
+              <a:buNone/>
               <a:defRPr sz="825" b="1">
                 <a:solidFill>
                   <a:srgbClr val="FF7487"/>
@@ -11021,6 +11115,7 @@
           <a:lstStyle xmlns:a="http://schemas.openxmlformats.org/drawingml/2006/main"/>
           <a:p xmlns:a="http://schemas.openxmlformats.org/drawingml/2006/main">
             <a:pPr algn="l">
+              <a:buNone/>
               <a:defRPr sz="825" b="1">
                 <a:solidFill>
                   <a:srgbClr val="7AA7FF"/>
@@ -11077,6 +11172,7 @@
           <a:lstStyle xmlns:a="http://schemas.openxmlformats.org/drawingml/2006/main"/>
           <a:p xmlns:a="http://schemas.openxmlformats.org/drawingml/2006/main">
             <a:pPr algn="l">
+              <a:buNone/>
               <a:defRPr sz="1350" b="1">
                 <a:solidFill>
                   <a:srgbClr val="0B1720"/>
@@ -11133,6 +11229,7 @@
           <a:lstStyle xmlns:a="http://schemas.openxmlformats.org/drawingml/2006/main"/>
           <a:p xmlns:a="http://schemas.openxmlformats.org/drawingml/2006/main">
             <a:pPr algn="l">
+              <a:buNone/>
               <a:defRPr sz="900" b="0">
                 <a:solidFill>
                   <a:srgbClr val="5F7078"/>
@@ -11224,6 +11321,7 @@
           <a:lstStyle xmlns:a="http://schemas.openxmlformats.org/drawingml/2006/main"/>
           <a:p xmlns:a="http://schemas.openxmlformats.org/drawingml/2006/main">
             <a:pPr algn="l">
+              <a:buNone/>
               <a:defRPr sz="825" b="1">
                 <a:solidFill>
                   <a:srgbClr val="51DFE3"/>
@@ -11280,6 +11378,7 @@
           <a:lstStyle xmlns:a="http://schemas.openxmlformats.org/drawingml/2006/main"/>
           <a:p xmlns:a="http://schemas.openxmlformats.org/drawingml/2006/main">
             <a:pPr algn="l">
+              <a:buNone/>
               <a:defRPr sz="1350" b="1">
                 <a:solidFill>
                   <a:srgbClr val="0B1720"/>
@@ -11336,6 +11435,7 @@
           <a:lstStyle xmlns:a="http://schemas.openxmlformats.org/drawingml/2006/main"/>
           <a:p xmlns:a="http://schemas.openxmlformats.org/drawingml/2006/main">
             <a:pPr algn="l">
+              <a:buNone/>
               <a:defRPr sz="900" b="0">
                 <a:solidFill>
                   <a:srgbClr val="5F7078"/>
@@ -11427,6 +11527,7 @@
           <a:lstStyle xmlns:a="http://schemas.openxmlformats.org/drawingml/2006/main"/>
           <a:p xmlns:a="http://schemas.openxmlformats.org/drawingml/2006/main">
             <a:pPr algn="l">
+              <a:buNone/>
               <a:defRPr sz="825" b="1">
                 <a:solidFill>
                   <a:srgbClr val="60D799"/>
@@ -11483,6 +11584,7 @@
           <a:lstStyle xmlns:a="http://schemas.openxmlformats.org/drawingml/2006/main"/>
           <a:p xmlns:a="http://schemas.openxmlformats.org/drawingml/2006/main">
             <a:pPr algn="l">
+              <a:buNone/>
               <a:defRPr sz="1350" b="1">
                 <a:solidFill>
                   <a:srgbClr val="0B1720"/>
@@ -11539,6 +11641,7 @@
           <a:lstStyle xmlns:a="http://schemas.openxmlformats.org/drawingml/2006/main"/>
           <a:p xmlns:a="http://schemas.openxmlformats.org/drawingml/2006/main">
             <a:pPr algn="l">
+              <a:buNone/>
               <a:defRPr sz="900" b="0">
                 <a:solidFill>
                   <a:srgbClr val="5F7078"/>
@@ -11630,6 +11733,7 @@
           <a:lstStyle xmlns:a="http://schemas.openxmlformats.org/drawingml/2006/main"/>
           <a:p xmlns:a="http://schemas.openxmlformats.org/drawingml/2006/main">
             <a:pPr algn="l">
+              <a:buNone/>
               <a:defRPr sz="825" b="1">
                 <a:solidFill>
                   <a:srgbClr val="F3C668"/>
@@ -11686,6 +11790,7 @@
           <a:lstStyle xmlns:a="http://schemas.openxmlformats.org/drawingml/2006/main"/>
           <a:p xmlns:a="http://schemas.openxmlformats.org/drawingml/2006/main">
             <a:pPr algn="l">
+              <a:buNone/>
               <a:defRPr sz="1350" b="1">
                 <a:solidFill>
                   <a:srgbClr val="0B1720"/>
@@ -11742,6 +11847,7 @@
           <a:lstStyle xmlns:a="http://schemas.openxmlformats.org/drawingml/2006/main"/>
           <a:p xmlns:a="http://schemas.openxmlformats.org/drawingml/2006/main">
             <a:pPr algn="l">
+              <a:buNone/>
               <a:defRPr sz="900" b="0">
                 <a:solidFill>
                   <a:srgbClr val="5F7078"/>
@@ -11833,6 +11939,7 @@
           <a:lstStyle xmlns:a="http://schemas.openxmlformats.org/drawingml/2006/main"/>
           <a:p xmlns:a="http://schemas.openxmlformats.org/drawingml/2006/main">
             <a:pPr algn="l">
+              <a:buNone/>
               <a:defRPr sz="825" b="1">
                 <a:solidFill>
                   <a:srgbClr val="FF7487"/>
@@ -11889,6 +11996,7 @@
           <a:lstStyle xmlns:a="http://schemas.openxmlformats.org/drawingml/2006/main"/>
           <a:p xmlns:a="http://schemas.openxmlformats.org/drawingml/2006/main">
             <a:pPr algn="l">
+              <a:buNone/>
               <a:defRPr sz="1200" b="1">
                 <a:solidFill>
                   <a:srgbClr val="0B1720"/>
@@ -11945,6 +12053,7 @@
           <a:lstStyle xmlns:a="http://schemas.openxmlformats.org/drawingml/2006/main"/>
           <a:p xmlns:a="http://schemas.openxmlformats.org/drawingml/2006/main">
             <a:pPr algn="l">
+              <a:buNone/>
               <a:defRPr sz="900" b="0">
                 <a:solidFill>
                   <a:srgbClr val="5F7078"/>
@@ -12032,6 +12141,7 @@
           <a:lstStyle xmlns:a="http://schemas.openxmlformats.org/drawingml/2006/main"/>
           <a:p xmlns:a="http://schemas.openxmlformats.org/drawingml/2006/main">
             <a:pPr algn="ctr">
+              <a:buNone/>
               <a:defRPr sz="900" b="1">
                 <a:solidFill>
                   <a:srgbClr val="247B63"/>
@@ -12123,6 +12233,7 @@
           <a:lstStyle xmlns:a="http://schemas.openxmlformats.org/drawingml/2006/main"/>
           <a:p xmlns:a="http://schemas.openxmlformats.org/drawingml/2006/main">
             <a:pPr algn="ctr">
+              <a:buNone/>
               <a:defRPr sz="900" b="1">
                 <a:solidFill>
                   <a:srgbClr val="83F3C9"/>
@@ -12179,6 +12290,7 @@
           <a:lstStyle xmlns:a="http://schemas.openxmlformats.org/drawingml/2006/main"/>
           <a:p xmlns:a="http://schemas.openxmlformats.org/drawingml/2006/main">
             <a:pPr algn="r">
+              <a:buNone/>
               <a:defRPr sz="825" b="1">
                 <a:solidFill>
                   <a:srgbClr val="5F7078"/>
@@ -13225,6 +13337,7 @@
           <a:lstStyle xmlns:a="http://schemas.openxmlformats.org/drawingml/2006/main"/>
           <a:p xmlns:a="http://schemas.openxmlformats.org/drawingml/2006/main">
             <a:pPr algn="l">
+              <a:buNone/>
               <a:defRPr sz="900" b="1">
                 <a:solidFill>
                   <a:srgbClr val="83F3C9"/>
@@ -13281,6 +13394,7 @@
           <a:lstStyle xmlns:a="http://schemas.openxmlformats.org/drawingml/2006/main"/>
           <a:p xmlns:a="http://schemas.openxmlformats.org/drawingml/2006/main">
             <a:pPr algn="l">
+              <a:buNone/>
               <a:defRPr sz="3750" b="1">
                 <a:solidFill>
                   <a:srgbClr val="F7F8F5"/>
@@ -13337,6 +13451,7 @@
           <a:lstStyle xmlns:a="http://schemas.openxmlformats.org/drawingml/2006/main"/>
           <a:p xmlns:a="http://schemas.openxmlformats.org/drawingml/2006/main">
             <a:pPr algn="l">
+              <a:buNone/>
               <a:defRPr sz="1575" b="0">
                 <a:solidFill>
                   <a:srgbClr val="83F3C9"/>
@@ -13393,6 +13508,7 @@
           <a:lstStyle xmlns:a="http://schemas.openxmlformats.org/drawingml/2006/main"/>
           <a:p xmlns:a="http://schemas.openxmlformats.org/drawingml/2006/main">
             <a:pPr algn="l">
+              <a:buNone/>
               <a:defRPr sz="825" b="1">
                 <a:solidFill>
                   <a:srgbClr val="7AA7FF"/>
@@ -13449,6 +13565,7 @@
           <a:lstStyle xmlns:a="http://schemas.openxmlformats.org/drawingml/2006/main"/>
           <a:p xmlns:a="http://schemas.openxmlformats.org/drawingml/2006/main">
             <a:pPr algn="l">
+              <a:buNone/>
               <a:defRPr sz="2550" b="1">
                 <a:solidFill>
                   <a:srgbClr val="F7F8F5"/>
@@ -13536,6 +13653,7 @@
           <a:lstStyle xmlns:a="http://schemas.openxmlformats.org/drawingml/2006/main"/>
           <a:p xmlns:a="http://schemas.openxmlformats.org/drawingml/2006/main">
             <a:pPr algn="l">
+              <a:buNone/>
               <a:defRPr sz="1500" b="0">
                 <a:solidFill>
                   <a:srgbClr val="C4D0D3"/>
@@ -13559,6 +13677,7 @@
           </a:p>
           <a:p xmlns:a="http://schemas.openxmlformats.org/drawingml/2006/main">
             <a:pPr algn="l">
+              <a:buNone/>
               <a:defRPr sz="1500" b="0">
                 <a:solidFill>
                   <a:srgbClr val="C4D0D3"/>
@@ -13582,6 +13701,7 @@
           </a:p>
           <a:p xmlns:a="http://schemas.openxmlformats.org/drawingml/2006/main">
             <a:pPr algn="l">
+              <a:buNone/>
               <a:defRPr sz="1500" b="0">
                 <a:solidFill>
                   <a:srgbClr val="C4D0D3"/>
@@ -13638,6 +13758,7 @@
           <a:lstStyle xmlns:a="http://schemas.openxmlformats.org/drawingml/2006/main"/>
           <a:p xmlns:a="http://schemas.openxmlformats.org/drawingml/2006/main">
             <a:pPr algn="ctr">
+              <a:buNone/>
               <a:defRPr sz="2100" b="0">
                 <a:solidFill>
                   <a:srgbClr val="9AA8AE"/>
@@ -13694,6 +13815,7 @@
           <a:lstStyle xmlns:a="http://schemas.openxmlformats.org/drawingml/2006/main"/>
           <a:p xmlns:a="http://schemas.openxmlformats.org/drawingml/2006/main">
             <a:pPr algn="l">
+              <a:buNone/>
               <a:defRPr sz="825" b="1">
                 <a:solidFill>
                   <a:srgbClr val="51DFE3"/>
@@ -13750,6 +13872,7 @@
           <a:lstStyle xmlns:a="http://schemas.openxmlformats.org/drawingml/2006/main"/>
           <a:p xmlns:a="http://schemas.openxmlformats.org/drawingml/2006/main">
             <a:pPr algn="l">
+              <a:buNone/>
               <a:defRPr sz="2550" b="1">
                 <a:solidFill>
                   <a:srgbClr val="F7F8F5"/>
@@ -13837,6 +13960,7 @@
           <a:lstStyle xmlns:a="http://schemas.openxmlformats.org/drawingml/2006/main"/>
           <a:p xmlns:a="http://schemas.openxmlformats.org/drawingml/2006/main">
             <a:pPr algn="l">
+              <a:buNone/>
               <a:defRPr sz="1500" b="0">
                 <a:solidFill>
                   <a:srgbClr val="C4D0D3"/>
@@ -13860,6 +13984,7 @@
           </a:p>
           <a:p xmlns:a="http://schemas.openxmlformats.org/drawingml/2006/main">
             <a:pPr algn="l">
+              <a:buNone/>
               <a:defRPr sz="1500" b="0">
                 <a:solidFill>
                   <a:srgbClr val="C4D0D3"/>
@@ -13883,6 +14008,7 @@
           </a:p>
           <a:p xmlns:a="http://schemas.openxmlformats.org/drawingml/2006/main">
             <a:pPr algn="l">
+              <a:buNone/>
               <a:defRPr sz="1500" b="0">
                 <a:solidFill>
                   <a:srgbClr val="C4D0D3"/>
@@ -13939,6 +14065,7 @@
           <a:lstStyle xmlns:a="http://schemas.openxmlformats.org/drawingml/2006/main"/>
           <a:p xmlns:a="http://schemas.openxmlformats.org/drawingml/2006/main">
             <a:pPr algn="ctr">
+              <a:buNone/>
               <a:defRPr sz="2100" b="0">
                 <a:solidFill>
                   <a:srgbClr val="9AA8AE"/>
@@ -13995,6 +14122,7 @@
           <a:lstStyle xmlns:a="http://schemas.openxmlformats.org/drawingml/2006/main"/>
           <a:p xmlns:a="http://schemas.openxmlformats.org/drawingml/2006/main">
             <a:pPr algn="l">
+              <a:buNone/>
               <a:defRPr sz="825" b="1">
                 <a:solidFill>
                   <a:srgbClr val="83F3C9"/>
@@ -14051,6 +14179,7 @@
           <a:lstStyle xmlns:a="http://schemas.openxmlformats.org/drawingml/2006/main"/>
           <a:p xmlns:a="http://schemas.openxmlformats.org/drawingml/2006/main">
             <a:pPr algn="l">
+              <a:buNone/>
               <a:defRPr sz="2550" b="1">
                 <a:solidFill>
                   <a:srgbClr val="F7F8F5"/>
@@ -14138,6 +14267,7 @@
           <a:lstStyle xmlns:a="http://schemas.openxmlformats.org/drawingml/2006/main"/>
           <a:p xmlns:a="http://schemas.openxmlformats.org/drawingml/2006/main">
             <a:pPr algn="l">
+              <a:buNone/>
               <a:defRPr sz="1500" b="0">
                 <a:solidFill>
                   <a:srgbClr val="C4D0D3"/>
@@ -14161,6 +14291,7 @@
           </a:p>
           <a:p xmlns:a="http://schemas.openxmlformats.org/drawingml/2006/main">
             <a:pPr algn="l">
+              <a:buNone/>
               <a:defRPr sz="1500" b="0">
                 <a:solidFill>
                   <a:srgbClr val="C4D0D3"/>
@@ -14184,6 +14315,7 @@
           </a:p>
           <a:p xmlns:a="http://schemas.openxmlformats.org/drawingml/2006/main">
             <a:pPr algn="l">
+              <a:buNone/>
               <a:defRPr sz="1500" b="0">
                 <a:solidFill>
                   <a:srgbClr val="C4D0D3"/>
@@ -14240,6 +14372,7 @@
           <a:lstStyle xmlns:a="http://schemas.openxmlformats.org/drawingml/2006/main"/>
           <a:p xmlns:a="http://schemas.openxmlformats.org/drawingml/2006/main">
             <a:pPr algn="l">
+              <a:buNone/>
               <a:defRPr sz="825" b="1">
                 <a:solidFill>
                   <a:srgbClr val="83F3C9"/>
@@ -14331,6 +14464,7 @@
           <a:lstStyle xmlns:a="http://schemas.openxmlformats.org/drawingml/2006/main"/>
           <a:p xmlns:a="http://schemas.openxmlformats.org/drawingml/2006/main">
             <a:pPr algn="ctr">
+              <a:buNone/>
               <a:defRPr sz="825" b="1">
                 <a:solidFill>
                   <a:srgbClr val="F7F8F5"/>
@@ -14422,6 +14556,7 @@
           <a:lstStyle xmlns:a="http://schemas.openxmlformats.org/drawingml/2006/main"/>
           <a:p xmlns:a="http://schemas.openxmlformats.org/drawingml/2006/main">
             <a:pPr algn="ctr">
+              <a:buNone/>
               <a:defRPr sz="825" b="1">
                 <a:solidFill>
                   <a:srgbClr val="F7F8F5"/>
@@ -14513,6 +14648,7 @@
           <a:lstStyle xmlns:a="http://schemas.openxmlformats.org/drawingml/2006/main"/>
           <a:p xmlns:a="http://schemas.openxmlformats.org/drawingml/2006/main">
             <a:pPr algn="ctr">
+              <a:buNone/>
               <a:defRPr sz="825" b="1">
                 <a:solidFill>
                   <a:srgbClr val="F7F8F5"/>
@@ -14604,6 +14740,7 @@
           <a:lstStyle xmlns:a="http://schemas.openxmlformats.org/drawingml/2006/main"/>
           <a:p xmlns:a="http://schemas.openxmlformats.org/drawingml/2006/main">
             <a:pPr algn="ctr">
+              <a:buNone/>
               <a:defRPr sz="825" b="1">
                 <a:solidFill>
                   <a:srgbClr val="F7F8F5"/>
@@ -14695,6 +14832,7 @@
           <a:lstStyle xmlns:a="http://schemas.openxmlformats.org/drawingml/2006/main"/>
           <a:p xmlns:a="http://schemas.openxmlformats.org/drawingml/2006/main">
             <a:pPr algn="ctr">
+              <a:buNone/>
               <a:defRPr sz="825" b="1">
                 <a:solidFill>
                   <a:srgbClr val="F7F8F5"/>
@@ -14786,6 +14924,7 @@
           <a:lstStyle xmlns:a="http://schemas.openxmlformats.org/drawingml/2006/main"/>
           <a:p xmlns:a="http://schemas.openxmlformats.org/drawingml/2006/main">
             <a:pPr algn="ctr">
+              <a:buNone/>
               <a:defRPr sz="975" b="1">
                 <a:solidFill>
                   <a:srgbClr val="0B1720"/>
@@ -14842,6 +14981,7 @@
           <a:lstStyle xmlns:a="http://schemas.openxmlformats.org/drawingml/2006/main"/>
           <a:p xmlns:a="http://schemas.openxmlformats.org/drawingml/2006/main">
             <a:pPr algn="r">
+              <a:buNone/>
               <a:defRPr sz="825" b="1">
                 <a:solidFill>
                   <a:srgbClr val="5F7078"/>
@@ -15888,6 +16028,7 @@
           <a:lstStyle xmlns:a="http://schemas.openxmlformats.org/drawingml/2006/main"/>
           <a:p xmlns:a="http://schemas.openxmlformats.org/drawingml/2006/main">
             <a:pPr algn="l">
+              <a:buNone/>
               <a:defRPr sz="900" b="1">
                 <a:solidFill>
                   <a:srgbClr val="83F3C9"/>
@@ -15944,6 +16085,7 @@
           <a:lstStyle xmlns:a="http://schemas.openxmlformats.org/drawingml/2006/main"/>
           <a:p xmlns:a="http://schemas.openxmlformats.org/drawingml/2006/main">
             <a:pPr algn="l">
+              <a:buNone/>
               <a:defRPr sz="4125" b="1">
                 <a:solidFill>
                   <a:srgbClr val="F7F8F5"/>
@@ -15967,6 +16109,7 @@
           </a:p>
           <a:p xmlns:a="http://schemas.openxmlformats.org/drawingml/2006/main">
             <a:pPr algn="l">
+              <a:buNone/>
               <a:defRPr sz="4125" b="1">
                 <a:solidFill>
                   <a:srgbClr val="F7F8F5"/>
@@ -16023,6 +16166,7 @@
           <a:lstStyle xmlns:a="http://schemas.openxmlformats.org/drawingml/2006/main"/>
           <a:p xmlns:a="http://schemas.openxmlformats.org/drawingml/2006/main">
             <a:pPr algn="l">
+              <a:buNone/>
               <a:defRPr sz="1725" b="0">
                 <a:solidFill>
                   <a:srgbClr val="9AA8AE"/>
@@ -16046,6 +16190,7 @@
           </a:p>
           <a:p xmlns:a="http://schemas.openxmlformats.org/drawingml/2006/main">
             <a:pPr algn="l">
+              <a:buNone/>
               <a:defRPr sz="1725" b="0">
                 <a:solidFill>
                   <a:srgbClr val="9AA8AE"/>
@@ -16133,6 +16278,7 @@
           <a:lstStyle xmlns:a="http://schemas.openxmlformats.org/drawingml/2006/main"/>
           <a:p xmlns:a="http://schemas.openxmlformats.org/drawingml/2006/main">
             <a:pPr algn="l">
+              <a:buNone/>
               <a:defRPr sz="825" b="1">
                 <a:solidFill>
                   <a:srgbClr val="83F3C9"/>
@@ -16189,6 +16335,7 @@
           <a:lstStyle xmlns:a="http://schemas.openxmlformats.org/drawingml/2006/main"/>
           <a:p xmlns:a="http://schemas.openxmlformats.org/drawingml/2006/main">
             <a:pPr algn="l">
+              <a:buNone/>
               <a:defRPr sz="1950" b="1">
                 <a:solidFill>
                   <a:srgbClr val="F7F8F5"/>
@@ -16245,6 +16392,7 @@
           <a:lstStyle xmlns:a="http://schemas.openxmlformats.org/drawingml/2006/main"/>
           <a:p xmlns:a="http://schemas.openxmlformats.org/drawingml/2006/main">
             <a:pPr algn="ctr">
+              <a:buNone/>
               <a:defRPr sz="1800" b="0">
                 <a:solidFill>
                   <a:srgbClr val="9AA8AE"/>
@@ -16301,6 +16449,7 @@
           <a:lstStyle xmlns:a="http://schemas.openxmlformats.org/drawingml/2006/main"/>
           <a:p xmlns:a="http://schemas.openxmlformats.org/drawingml/2006/main">
             <a:pPr algn="l">
+              <a:buNone/>
               <a:defRPr sz="825" b="1">
                 <a:solidFill>
                   <a:srgbClr val="83F3C9"/>
@@ -16357,6 +16506,7 @@
           <a:lstStyle xmlns:a="http://schemas.openxmlformats.org/drawingml/2006/main"/>
           <a:p xmlns:a="http://schemas.openxmlformats.org/drawingml/2006/main">
             <a:pPr algn="l">
+              <a:buNone/>
               <a:defRPr sz="1950" b="1">
                 <a:solidFill>
                   <a:srgbClr val="F7F8F5"/>
@@ -16413,6 +16563,7 @@
           <a:lstStyle xmlns:a="http://schemas.openxmlformats.org/drawingml/2006/main"/>
           <a:p xmlns:a="http://schemas.openxmlformats.org/drawingml/2006/main">
             <a:pPr algn="ctr">
+              <a:buNone/>
               <a:defRPr sz="1800" b="0">
                 <a:solidFill>
                   <a:srgbClr val="9AA8AE"/>
@@ -16469,6 +16620,7 @@
           <a:lstStyle xmlns:a="http://schemas.openxmlformats.org/drawingml/2006/main"/>
           <a:p xmlns:a="http://schemas.openxmlformats.org/drawingml/2006/main">
             <a:pPr algn="l">
+              <a:buNone/>
               <a:defRPr sz="825" b="1">
                 <a:solidFill>
                   <a:srgbClr val="83F3C9"/>
@@ -16525,6 +16677,7 @@
           <a:lstStyle xmlns:a="http://schemas.openxmlformats.org/drawingml/2006/main"/>
           <a:p xmlns:a="http://schemas.openxmlformats.org/drawingml/2006/main">
             <a:pPr algn="l">
+              <a:buNone/>
               <a:defRPr sz="1950" b="1">
                 <a:solidFill>
                   <a:srgbClr val="F7F8F5"/>
@@ -16616,6 +16769,7 @@
           <a:lstStyle xmlns:a="http://schemas.openxmlformats.org/drawingml/2006/main"/>
           <a:p xmlns:a="http://schemas.openxmlformats.org/drawingml/2006/main">
             <a:pPr algn="ctr">
+              <a:buNone/>
               <a:defRPr sz="975" b="1">
                 <a:solidFill>
                   <a:srgbClr val="0B1720"/>
@@ -16672,6 +16826,7 @@
           <a:lstStyle xmlns:a="http://schemas.openxmlformats.org/drawingml/2006/main"/>
           <a:p xmlns:a="http://schemas.openxmlformats.org/drawingml/2006/main">
             <a:pPr algn="r">
+              <a:buNone/>
               <a:defRPr sz="825" b="1">
                 <a:solidFill>
                   <a:srgbClr val="5F7078"/>
@@ -16788,6 +16943,7 @@
           <a:lstStyle xmlns:a="http://schemas.openxmlformats.org/drawingml/2006/main"/>
           <a:p xmlns:a="http://schemas.openxmlformats.org/drawingml/2006/main">
             <a:pPr algn="l">
+              <a:buNone/>
               <a:defRPr sz="900" b="1">
                 <a:solidFill>
                   <a:srgbClr val="247B63"/>
@@ -16844,6 +17000,7 @@
           <a:lstStyle xmlns:a="http://schemas.openxmlformats.org/drawingml/2006/main"/>
           <a:p xmlns:a="http://schemas.openxmlformats.org/drawingml/2006/main">
             <a:pPr algn="l">
+              <a:buNone/>
               <a:defRPr sz="3450" b="1">
                 <a:solidFill>
                   <a:srgbClr val="0B1720"/>
@@ -16900,6 +17057,7 @@
           <a:lstStyle xmlns:a="http://schemas.openxmlformats.org/drawingml/2006/main"/>
           <a:p xmlns:a="http://schemas.openxmlformats.org/drawingml/2006/main">
             <a:pPr algn="l">
+              <a:buNone/>
               <a:defRPr sz="825" b="1">
                 <a:solidFill>
                   <a:srgbClr val="247B63"/>
@@ -16956,6 +17114,7 @@
           <a:lstStyle xmlns:a="http://schemas.openxmlformats.org/drawingml/2006/main"/>
           <a:p xmlns:a="http://schemas.openxmlformats.org/drawingml/2006/main">
             <a:pPr algn="l">
+              <a:buNone/>
               <a:defRPr sz="4950" b="1">
                 <a:solidFill>
                   <a:srgbClr val="0B1720"/>
@@ -17012,6 +17171,7 @@
           <a:lstStyle xmlns:a="http://schemas.openxmlformats.org/drawingml/2006/main"/>
           <a:p xmlns:a="http://schemas.openxmlformats.org/drawingml/2006/main">
             <a:pPr algn="l">
+              <a:buNone/>
               <a:defRPr sz="1500" b="0">
                 <a:solidFill>
                   <a:srgbClr val="5F7078"/>
@@ -17099,6 +17259,7 @@
           <a:lstStyle xmlns:a="http://schemas.openxmlformats.org/drawingml/2006/main"/>
           <a:p xmlns:a="http://schemas.openxmlformats.org/drawingml/2006/main">
             <a:pPr algn="l">
+              <a:buNone/>
               <a:defRPr sz="825" b="1">
                 <a:solidFill>
                   <a:srgbClr val="247B63"/>
@@ -17155,6 +17316,7 @@
           <a:lstStyle xmlns:a="http://schemas.openxmlformats.org/drawingml/2006/main"/>
           <a:p xmlns:a="http://schemas.openxmlformats.org/drawingml/2006/main">
             <a:pPr algn="l">
+              <a:buNone/>
               <a:defRPr sz="4950" b="1">
                 <a:solidFill>
                   <a:srgbClr val="0B1720"/>
@@ -17211,6 +17373,7 @@
           <a:lstStyle xmlns:a="http://schemas.openxmlformats.org/drawingml/2006/main"/>
           <a:p xmlns:a="http://schemas.openxmlformats.org/drawingml/2006/main">
             <a:pPr algn="l">
+              <a:buNone/>
               <a:defRPr sz="1500" b="0">
                 <a:solidFill>
                   <a:srgbClr val="5F7078"/>
@@ -17298,6 +17461,7 @@
           <a:lstStyle xmlns:a="http://schemas.openxmlformats.org/drawingml/2006/main"/>
           <a:p xmlns:a="http://schemas.openxmlformats.org/drawingml/2006/main">
             <a:pPr algn="l">
+              <a:buNone/>
               <a:defRPr sz="825" b="1">
                 <a:solidFill>
                   <a:srgbClr val="247B63"/>
@@ -17354,6 +17518,7 @@
           <a:lstStyle xmlns:a="http://schemas.openxmlformats.org/drawingml/2006/main"/>
           <a:p xmlns:a="http://schemas.openxmlformats.org/drawingml/2006/main">
             <a:pPr algn="l">
+              <a:buNone/>
               <a:defRPr sz="4950" b="1">
                 <a:solidFill>
                   <a:srgbClr val="0B1720"/>
@@ -17410,6 +17575,7 @@
           <a:lstStyle xmlns:a="http://schemas.openxmlformats.org/drawingml/2006/main"/>
           <a:p xmlns:a="http://schemas.openxmlformats.org/drawingml/2006/main">
             <a:pPr algn="l">
+              <a:buNone/>
               <a:defRPr sz="1500" b="0">
                 <a:solidFill>
                   <a:srgbClr val="5F7078"/>
@@ -17501,6 +17667,7 @@
           <a:lstStyle xmlns:a="http://schemas.openxmlformats.org/drawingml/2006/main"/>
           <a:p xmlns:a="http://schemas.openxmlformats.org/drawingml/2006/main">
             <a:pPr algn="ctr">
+              <a:buNone/>
               <a:defRPr sz="1725" b="1">
                 <a:solidFill>
                   <a:srgbClr val="F7F8F5"/>
@@ -17557,6 +17724,7 @@
           <a:lstStyle xmlns:a="http://schemas.openxmlformats.org/drawingml/2006/main"/>
           <a:p xmlns:a="http://schemas.openxmlformats.org/drawingml/2006/main">
             <a:pPr algn="l">
+              <a:buNone/>
               <a:defRPr sz="675" b="0">
                 <a:solidFill>
                   <a:srgbClr val="5F7078"/>
@@ -17613,6 +17781,7 @@
           <a:lstStyle xmlns:a="http://schemas.openxmlformats.org/drawingml/2006/main"/>
           <a:p xmlns:a="http://schemas.openxmlformats.org/drawingml/2006/main">
             <a:pPr algn="r">
+              <a:buNone/>
               <a:defRPr sz="825" b="1">
                 <a:solidFill>
                   <a:srgbClr val="5F7078"/>
@@ -18659,6 +18828,7 @@
           <a:lstStyle xmlns:a="http://schemas.openxmlformats.org/drawingml/2006/main"/>
           <a:p xmlns:a="http://schemas.openxmlformats.org/drawingml/2006/main">
             <a:pPr algn="l">
+              <a:buNone/>
               <a:defRPr sz="900" b="1">
                 <a:solidFill>
                   <a:srgbClr val="83F3C9"/>
@@ -18715,6 +18885,7 @@
           <a:lstStyle xmlns:a="http://schemas.openxmlformats.org/drawingml/2006/main"/>
           <a:p xmlns:a="http://schemas.openxmlformats.org/drawingml/2006/main">
             <a:pPr algn="l">
+              <a:buNone/>
               <a:defRPr sz="3300" b="1">
                 <a:solidFill>
                   <a:srgbClr val="F7F8F5"/>
@@ -18771,6 +18942,7 @@
           <a:lstStyle xmlns:a="http://schemas.openxmlformats.org/drawingml/2006/main"/>
           <a:p xmlns:a="http://schemas.openxmlformats.org/drawingml/2006/main">
             <a:pPr algn="l">
+              <a:buNone/>
               <a:defRPr sz="1575" b="0">
                 <a:solidFill>
                   <a:srgbClr val="9AA8AE"/>
@@ -18862,6 +19034,7 @@
           <a:lstStyle xmlns:a="http://schemas.openxmlformats.org/drawingml/2006/main"/>
           <a:p xmlns:a="http://schemas.openxmlformats.org/drawingml/2006/main">
             <a:pPr algn="l">
+              <a:buNone/>
               <a:defRPr sz="900" b="1">
                 <a:solidFill>
                   <a:srgbClr val="83F3C9"/>
@@ -18918,6 +19091,7 @@
           <a:lstStyle xmlns:a="http://schemas.openxmlformats.org/drawingml/2006/main"/>
           <a:p xmlns:a="http://schemas.openxmlformats.org/drawingml/2006/main">
             <a:pPr algn="l">
+              <a:buNone/>
               <a:defRPr sz="1125" b="1">
                 <a:solidFill>
                   <a:srgbClr val="F7F8F5"/>
@@ -18974,6 +19148,7 @@
           <a:lstStyle xmlns:a="http://schemas.openxmlformats.org/drawingml/2006/main"/>
           <a:p xmlns:a="http://schemas.openxmlformats.org/drawingml/2006/main">
             <a:pPr algn="l">
+              <a:buNone/>
               <a:defRPr sz="825" b="0">
                 <a:solidFill>
                   <a:srgbClr val="9AA8AE"/>
@@ -19129,6 +19304,7 @@
           <a:lstStyle xmlns:a="http://schemas.openxmlformats.org/drawingml/2006/main"/>
           <a:p xmlns:a="http://schemas.openxmlformats.org/drawingml/2006/main">
             <a:pPr algn="l">
+              <a:buNone/>
               <a:defRPr sz="900" b="1">
                 <a:solidFill>
                   <a:srgbClr val="83F3C9"/>
@@ -19185,6 +19361,7 @@
           <a:lstStyle xmlns:a="http://schemas.openxmlformats.org/drawingml/2006/main"/>
           <a:p xmlns:a="http://schemas.openxmlformats.org/drawingml/2006/main">
             <a:pPr algn="l">
+              <a:buNone/>
               <a:defRPr sz="1125" b="1">
                 <a:solidFill>
                   <a:srgbClr val="F7F8F5"/>
@@ -19241,6 +19418,7 @@
           <a:lstStyle xmlns:a="http://schemas.openxmlformats.org/drawingml/2006/main"/>
           <a:p xmlns:a="http://schemas.openxmlformats.org/drawingml/2006/main">
             <a:pPr algn="l">
+              <a:buNone/>
               <a:defRPr sz="825" b="0">
                 <a:solidFill>
                   <a:srgbClr val="9AA8AE"/>
@@ -19396,6 +19574,7 @@
           <a:lstStyle xmlns:a="http://schemas.openxmlformats.org/drawingml/2006/main"/>
           <a:p xmlns:a="http://schemas.openxmlformats.org/drawingml/2006/main">
             <a:pPr algn="l">
+              <a:buNone/>
               <a:defRPr sz="900" b="1">
                 <a:solidFill>
                   <a:srgbClr val="83F3C9"/>
@@ -19452,6 +19631,7 @@
           <a:lstStyle xmlns:a="http://schemas.openxmlformats.org/drawingml/2006/main"/>
           <a:p xmlns:a="http://schemas.openxmlformats.org/drawingml/2006/main">
             <a:pPr algn="l">
+              <a:buNone/>
               <a:defRPr sz="1125" b="1">
                 <a:solidFill>
                   <a:srgbClr val="F7F8F5"/>
@@ -19475,6 +19655,7 @@
           </a:p>
           <a:p xmlns:a="http://schemas.openxmlformats.org/drawingml/2006/main">
             <a:pPr algn="l">
+              <a:buNone/>
               <a:defRPr sz="1125" b="1">
                 <a:solidFill>
                   <a:srgbClr val="F7F8F5"/>
@@ -19531,6 +19712,7 @@
           <a:lstStyle xmlns:a="http://schemas.openxmlformats.org/drawingml/2006/main"/>
           <a:p xmlns:a="http://schemas.openxmlformats.org/drawingml/2006/main">
             <a:pPr algn="l">
+              <a:buNone/>
               <a:defRPr sz="825" b="0">
                 <a:solidFill>
                   <a:srgbClr val="9AA8AE"/>
@@ -19686,6 +19868,7 @@
           <a:lstStyle xmlns:a="http://schemas.openxmlformats.org/drawingml/2006/main"/>
           <a:p xmlns:a="http://schemas.openxmlformats.org/drawingml/2006/main">
             <a:pPr algn="l">
+              <a:buNone/>
               <a:defRPr sz="900" b="1">
                 <a:solidFill>
                   <a:srgbClr val="83F3C9"/>
@@ -19742,6 +19925,7 @@
           <a:lstStyle xmlns:a="http://schemas.openxmlformats.org/drawingml/2006/main"/>
           <a:p xmlns:a="http://schemas.openxmlformats.org/drawingml/2006/main">
             <a:pPr algn="l">
+              <a:buNone/>
               <a:defRPr sz="1125" b="1">
                 <a:solidFill>
                   <a:srgbClr val="F7F8F5"/>
@@ -19798,6 +19982,7 @@
           <a:lstStyle xmlns:a="http://schemas.openxmlformats.org/drawingml/2006/main"/>
           <a:p xmlns:a="http://schemas.openxmlformats.org/drawingml/2006/main">
             <a:pPr algn="l">
+              <a:buNone/>
               <a:defRPr sz="825" b="0">
                 <a:solidFill>
                   <a:srgbClr val="9AA8AE"/>
@@ -19953,6 +20138,7 @@
           <a:lstStyle xmlns:a="http://schemas.openxmlformats.org/drawingml/2006/main"/>
           <a:p xmlns:a="http://schemas.openxmlformats.org/drawingml/2006/main">
             <a:pPr algn="l">
+              <a:buNone/>
               <a:defRPr sz="900" b="1">
                 <a:solidFill>
                   <a:srgbClr val="0B1720"/>
@@ -20009,6 +20195,7 @@
           <a:lstStyle xmlns:a="http://schemas.openxmlformats.org/drawingml/2006/main"/>
           <a:p xmlns:a="http://schemas.openxmlformats.org/drawingml/2006/main">
             <a:pPr algn="l">
+              <a:buNone/>
               <a:defRPr sz="1125" b="1">
                 <a:solidFill>
                   <a:srgbClr val="0B1720"/>
@@ -20065,6 +20252,7 @@
           <a:lstStyle xmlns:a="http://schemas.openxmlformats.org/drawingml/2006/main"/>
           <a:p xmlns:a="http://schemas.openxmlformats.org/drawingml/2006/main">
             <a:pPr algn="l">
+              <a:buNone/>
               <a:defRPr sz="825" b="0">
                 <a:solidFill>
                   <a:srgbClr val="247B63"/>
@@ -20121,6 +20309,7 @@
           <a:lstStyle xmlns:a="http://schemas.openxmlformats.org/drawingml/2006/main"/>
           <a:p xmlns:a="http://schemas.openxmlformats.org/drawingml/2006/main">
             <a:pPr algn="l">
+              <a:buNone/>
               <a:defRPr sz="1650" b="0">
                 <a:solidFill>
                   <a:srgbClr val="F7F8F5"/>
@@ -20177,6 +20366,7 @@
           <a:lstStyle xmlns:a="http://schemas.openxmlformats.org/drawingml/2006/main"/>
           <a:p xmlns:a="http://schemas.openxmlformats.org/drawingml/2006/main">
             <a:pPr algn="l">
+              <a:buNone/>
               <a:defRPr sz="2550" b="1">
                 <a:solidFill>
                   <a:srgbClr val="83F3C9"/>
@@ -20233,6 +20423,7 @@
           <a:lstStyle xmlns:a="http://schemas.openxmlformats.org/drawingml/2006/main"/>
           <a:p xmlns:a="http://schemas.openxmlformats.org/drawingml/2006/main">
             <a:pPr algn="r">
+              <a:buNone/>
               <a:defRPr sz="825" b="1">
                 <a:solidFill>
                   <a:srgbClr val="5F7078"/>
@@ -20349,6 +20540,7 @@
           <a:lstStyle xmlns:a="http://schemas.openxmlformats.org/drawingml/2006/main"/>
           <a:p xmlns:a="http://schemas.openxmlformats.org/drawingml/2006/main">
             <a:pPr algn="l">
+              <a:buNone/>
               <a:defRPr sz="900" b="1">
                 <a:solidFill>
                   <a:srgbClr val="247B63"/>
@@ -20405,6 +20597,7 @@
           <a:lstStyle xmlns:a="http://schemas.openxmlformats.org/drawingml/2006/main"/>
           <a:p xmlns:a="http://schemas.openxmlformats.org/drawingml/2006/main">
             <a:pPr algn="l">
+              <a:buNone/>
               <a:defRPr sz="3300" b="1">
                 <a:solidFill>
                   <a:srgbClr val="0B1720"/>
@@ -20461,6 +20654,7 @@
           <a:lstStyle xmlns:a="http://schemas.openxmlformats.org/drawingml/2006/main"/>
           <a:p xmlns:a="http://schemas.openxmlformats.org/drawingml/2006/main">
             <a:pPr algn="l">
+              <a:buNone/>
               <a:defRPr sz="1575" b="0">
                 <a:solidFill>
                   <a:srgbClr val="5F7078"/>
@@ -20552,6 +20746,7 @@
           <a:lstStyle xmlns:a="http://schemas.openxmlformats.org/drawingml/2006/main"/>
           <a:p xmlns:a="http://schemas.openxmlformats.org/drawingml/2006/main">
             <a:pPr algn="l">
+              <a:buNone/>
               <a:defRPr sz="900" b="1">
                 <a:solidFill>
                   <a:srgbClr val="247B63"/>
@@ -20608,6 +20803,7 @@
           <a:lstStyle xmlns:a="http://schemas.openxmlformats.org/drawingml/2006/main"/>
           <a:p xmlns:a="http://schemas.openxmlformats.org/drawingml/2006/main">
             <a:pPr algn="l">
+              <a:buNone/>
               <a:defRPr sz="1650" b="1">
                 <a:solidFill>
                   <a:srgbClr val="5F7078"/>
@@ -20664,6 +20860,7 @@
           <a:lstStyle xmlns:a="http://schemas.openxmlformats.org/drawingml/2006/main"/>
           <a:p xmlns:a="http://schemas.openxmlformats.org/drawingml/2006/main">
             <a:pPr algn="l">
+              <a:buNone/>
               <a:defRPr sz="1350" b="0">
                 <a:solidFill>
                   <a:srgbClr val="5F7078"/>
@@ -20720,6 +20917,7 @@
           <a:lstStyle xmlns:a="http://schemas.openxmlformats.org/drawingml/2006/main"/>
           <a:p xmlns:a="http://schemas.openxmlformats.org/drawingml/2006/main">
             <a:pPr algn="ctr">
+              <a:buNone/>
               <a:defRPr sz="1800" b="1">
                 <a:solidFill>
                   <a:srgbClr val="5F7078"/>
@@ -20811,6 +21009,7 @@
           <a:lstStyle xmlns:a="http://schemas.openxmlformats.org/drawingml/2006/main"/>
           <a:p xmlns:a="http://schemas.openxmlformats.org/drawingml/2006/main">
             <a:pPr algn="l">
+              <a:buNone/>
               <a:defRPr sz="900" b="1">
                 <a:solidFill>
                   <a:srgbClr val="247B63"/>
@@ -20867,6 +21066,7 @@
           <a:lstStyle xmlns:a="http://schemas.openxmlformats.org/drawingml/2006/main"/>
           <a:p xmlns:a="http://schemas.openxmlformats.org/drawingml/2006/main">
             <a:pPr algn="l">
+              <a:buNone/>
               <a:defRPr sz="1650" b="1">
                 <a:solidFill>
                   <a:srgbClr val="5F7078"/>
@@ -20923,6 +21123,7 @@
           <a:lstStyle xmlns:a="http://schemas.openxmlformats.org/drawingml/2006/main"/>
           <a:p xmlns:a="http://schemas.openxmlformats.org/drawingml/2006/main">
             <a:pPr algn="l">
+              <a:buNone/>
               <a:defRPr sz="1350" b="0">
                 <a:solidFill>
                   <a:srgbClr val="5F7078"/>
@@ -20979,6 +21180,7 @@
           <a:lstStyle xmlns:a="http://schemas.openxmlformats.org/drawingml/2006/main"/>
           <a:p xmlns:a="http://schemas.openxmlformats.org/drawingml/2006/main">
             <a:pPr algn="ctr">
+              <a:buNone/>
               <a:defRPr sz="1800" b="1">
                 <a:solidFill>
                   <a:srgbClr val="5F7078"/>
@@ -21070,6 +21272,7 @@
           <a:lstStyle xmlns:a="http://schemas.openxmlformats.org/drawingml/2006/main"/>
           <a:p xmlns:a="http://schemas.openxmlformats.org/drawingml/2006/main">
             <a:pPr algn="l">
+              <a:buNone/>
               <a:defRPr sz="900" b="1">
                 <a:solidFill>
                   <a:srgbClr val="247B63"/>
@@ -21126,6 +21329,7 @@
           <a:lstStyle xmlns:a="http://schemas.openxmlformats.org/drawingml/2006/main"/>
           <a:p xmlns:a="http://schemas.openxmlformats.org/drawingml/2006/main">
             <a:pPr algn="l">
+              <a:buNone/>
               <a:defRPr sz="1650" b="1">
                 <a:solidFill>
                   <a:srgbClr val="0B1720"/>
@@ -21182,6 +21386,7 @@
           <a:lstStyle xmlns:a="http://schemas.openxmlformats.org/drawingml/2006/main"/>
           <a:p xmlns:a="http://schemas.openxmlformats.org/drawingml/2006/main">
             <a:pPr algn="l">
+              <a:buNone/>
               <a:defRPr sz="1350" b="0">
                 <a:solidFill>
                   <a:srgbClr val="5F7078"/>
@@ -21238,6 +21443,7 @@
           <a:lstStyle xmlns:a="http://schemas.openxmlformats.org/drawingml/2006/main"/>
           <a:p xmlns:a="http://schemas.openxmlformats.org/drawingml/2006/main">
             <a:pPr algn="ctr">
+              <a:buNone/>
               <a:defRPr sz="1800" b="1">
                 <a:solidFill>
                   <a:srgbClr val="5F7078"/>
@@ -21329,6 +21535,7 @@
           <a:lstStyle xmlns:a="http://schemas.openxmlformats.org/drawingml/2006/main"/>
           <a:p xmlns:a="http://schemas.openxmlformats.org/drawingml/2006/main">
             <a:pPr algn="l">
+              <a:buNone/>
               <a:defRPr sz="900" b="1">
                 <a:solidFill>
                   <a:srgbClr val="83F3C9"/>
@@ -21385,6 +21592,7 @@
           <a:lstStyle xmlns:a="http://schemas.openxmlformats.org/drawingml/2006/main"/>
           <a:p xmlns:a="http://schemas.openxmlformats.org/drawingml/2006/main">
             <a:pPr algn="l">
+              <a:buNone/>
               <a:defRPr sz="1650" b="1">
                 <a:solidFill>
                   <a:srgbClr val="F7F8F5"/>
@@ -21441,6 +21649,7 @@
           <a:lstStyle xmlns:a="http://schemas.openxmlformats.org/drawingml/2006/main"/>
           <a:p xmlns:a="http://schemas.openxmlformats.org/drawingml/2006/main">
             <a:pPr algn="l">
+              <a:buNone/>
               <a:defRPr sz="1350" b="0">
                 <a:solidFill>
                   <a:srgbClr val="C4D2D5"/>
@@ -21497,6 +21706,7 @@
           <a:lstStyle xmlns:a="http://schemas.openxmlformats.org/drawingml/2006/main"/>
           <a:p xmlns:a="http://schemas.openxmlformats.org/drawingml/2006/main">
             <a:pPr algn="ctr">
+              <a:buNone/>
               <a:defRPr sz="900" b="1">
                 <a:solidFill>
                   <a:srgbClr val="5F7078"/>
@@ -21553,6 +21763,7 @@
           <a:lstStyle xmlns:a="http://schemas.openxmlformats.org/drawingml/2006/main"/>
           <a:p xmlns:a="http://schemas.openxmlformats.org/drawingml/2006/main">
             <a:pPr algn="ctr">
+              <a:buNone/>
               <a:defRPr sz="900" b="1">
                 <a:solidFill>
                   <a:srgbClr val="5F7078"/>
@@ -21609,6 +21820,7 @@
           <a:lstStyle xmlns:a="http://schemas.openxmlformats.org/drawingml/2006/main"/>
           <a:p xmlns:a="http://schemas.openxmlformats.org/drawingml/2006/main">
             <a:pPr algn="ctr">
+              <a:buNone/>
               <a:defRPr sz="900" b="1">
                 <a:solidFill>
                   <a:srgbClr val="5F7078"/>
@@ -21665,6 +21877,7 @@
           <a:lstStyle xmlns:a="http://schemas.openxmlformats.org/drawingml/2006/main"/>
           <a:p xmlns:a="http://schemas.openxmlformats.org/drawingml/2006/main">
             <a:pPr algn="ctr">
+              <a:buNone/>
               <a:defRPr sz="900" b="1">
                 <a:solidFill>
                   <a:srgbClr val="247B63"/>
@@ -21752,6 +21965,7 @@
           <a:lstStyle xmlns:a="http://schemas.openxmlformats.org/drawingml/2006/main"/>
           <a:p xmlns:a="http://schemas.openxmlformats.org/drawingml/2006/main">
             <a:pPr algn="r">
+              <a:buNone/>
               <a:defRPr sz="825" b="1">
                 <a:solidFill>
                   <a:srgbClr val="5F7078"/>
@@ -22798,6 +23012,7 @@
           <a:lstStyle xmlns:a="http://schemas.openxmlformats.org/drawingml/2006/main"/>
           <a:p xmlns:a="http://schemas.openxmlformats.org/drawingml/2006/main">
             <a:pPr algn="l">
+              <a:buNone/>
               <a:defRPr sz="900" b="1">
                 <a:solidFill>
                   <a:srgbClr val="83F3C9"/>
@@ -22854,6 +23069,7 @@
           <a:lstStyle xmlns:a="http://schemas.openxmlformats.org/drawingml/2006/main"/>
           <a:p xmlns:a="http://schemas.openxmlformats.org/drawingml/2006/main">
             <a:pPr algn="l">
+              <a:buNone/>
               <a:defRPr sz="3300" b="1">
                 <a:solidFill>
                   <a:srgbClr val="F7F8F5"/>
@@ -22910,6 +23126,7 @@
           <a:lstStyle xmlns:a="http://schemas.openxmlformats.org/drawingml/2006/main"/>
           <a:p xmlns:a="http://schemas.openxmlformats.org/drawingml/2006/main">
             <a:pPr algn="l">
+              <a:buNone/>
               <a:defRPr sz="1425" b="0">
                 <a:solidFill>
                   <a:srgbClr val="83F3C9"/>
@@ -23001,6 +23218,7 @@
           <a:lstStyle xmlns:a="http://schemas.openxmlformats.org/drawingml/2006/main"/>
           <a:p xmlns:a="http://schemas.openxmlformats.org/drawingml/2006/main">
             <a:pPr algn="ctr">
+              <a:buNone/>
               <a:defRPr sz="975" b="1">
                 <a:solidFill>
                   <a:srgbClr val="7AA7FF"/>
@@ -23057,6 +23275,7 @@
           <a:lstStyle xmlns:a="http://schemas.openxmlformats.org/drawingml/2006/main"/>
           <a:p xmlns:a="http://schemas.openxmlformats.org/drawingml/2006/main">
             <a:pPr algn="l">
+              <a:buNone/>
               <a:defRPr sz="1350" b="1">
                 <a:solidFill>
                   <a:srgbClr val="F7F8F5"/>
@@ -23080,6 +23299,7 @@
           </a:p>
           <a:p xmlns:a="http://schemas.openxmlformats.org/drawingml/2006/main">
             <a:pPr algn="l">
+              <a:buNone/>
               <a:defRPr sz="1350" b="1">
                 <a:solidFill>
                   <a:srgbClr val="F7F8F5"/>
@@ -23202,6 +23422,7 @@
           <a:lstStyle xmlns:a="http://schemas.openxmlformats.org/drawingml/2006/main"/>
           <a:p xmlns:a="http://schemas.openxmlformats.org/drawingml/2006/main">
             <a:pPr algn="ctr">
+              <a:buNone/>
               <a:defRPr sz="975" b="1">
                 <a:solidFill>
                   <a:srgbClr val="51DFE3"/>
@@ -23258,6 +23479,7 @@
           <a:lstStyle xmlns:a="http://schemas.openxmlformats.org/drawingml/2006/main"/>
           <a:p xmlns:a="http://schemas.openxmlformats.org/drawingml/2006/main">
             <a:pPr algn="l">
+              <a:buNone/>
               <a:defRPr sz="1350" b="1">
                 <a:solidFill>
                   <a:srgbClr val="F7F8F5"/>
@@ -23281,6 +23503,7 @@
           </a:p>
           <a:p xmlns:a="http://schemas.openxmlformats.org/drawingml/2006/main">
             <a:pPr algn="l">
+              <a:buNone/>
               <a:defRPr sz="1350" b="1">
                 <a:solidFill>
                   <a:srgbClr val="F7F8F5"/>
@@ -23403,6 +23626,7 @@
           <a:lstStyle xmlns:a="http://schemas.openxmlformats.org/drawingml/2006/main"/>
           <a:p xmlns:a="http://schemas.openxmlformats.org/drawingml/2006/main">
             <a:pPr algn="ctr">
+              <a:buNone/>
               <a:defRPr sz="975" b="1">
                 <a:solidFill>
                   <a:srgbClr val="F3C668"/>
@@ -23459,6 +23683,7 @@
           <a:lstStyle xmlns:a="http://schemas.openxmlformats.org/drawingml/2006/main"/>
           <a:p xmlns:a="http://schemas.openxmlformats.org/drawingml/2006/main">
             <a:pPr algn="l">
+              <a:buNone/>
               <a:defRPr sz="1350" b="1">
                 <a:solidFill>
                   <a:srgbClr val="F7F8F5"/>
@@ -23581,6 +23806,7 @@
           <a:lstStyle xmlns:a="http://schemas.openxmlformats.org/drawingml/2006/main"/>
           <a:p xmlns:a="http://schemas.openxmlformats.org/drawingml/2006/main">
             <a:pPr algn="ctr">
+              <a:buNone/>
               <a:defRPr sz="975" b="1">
                 <a:solidFill>
                   <a:srgbClr val="60D799"/>
@@ -23637,6 +23863,7 @@
           <a:lstStyle xmlns:a="http://schemas.openxmlformats.org/drawingml/2006/main"/>
           <a:p xmlns:a="http://schemas.openxmlformats.org/drawingml/2006/main">
             <a:pPr algn="l">
+              <a:buNone/>
               <a:defRPr sz="1350" b="1">
                 <a:solidFill>
                   <a:srgbClr val="F7F8F5"/>
@@ -23660,6 +23887,7 @@
           </a:p>
           <a:p xmlns:a="http://schemas.openxmlformats.org/drawingml/2006/main">
             <a:pPr algn="l">
+              <a:buNone/>
               <a:defRPr sz="1350" b="1">
                 <a:solidFill>
                   <a:srgbClr val="F7F8F5"/>
@@ -23782,6 +24010,7 @@
           <a:lstStyle xmlns:a="http://schemas.openxmlformats.org/drawingml/2006/main"/>
           <a:p xmlns:a="http://schemas.openxmlformats.org/drawingml/2006/main">
             <a:pPr algn="ctr">
+              <a:buNone/>
               <a:defRPr sz="975" b="1">
                 <a:solidFill>
                   <a:srgbClr val="AA91FF"/>
@@ -23838,6 +24067,7 @@
           <a:lstStyle xmlns:a="http://schemas.openxmlformats.org/drawingml/2006/main"/>
           <a:p xmlns:a="http://schemas.openxmlformats.org/drawingml/2006/main">
             <a:pPr algn="l">
+              <a:buNone/>
               <a:defRPr sz="1350" b="1">
                 <a:solidFill>
                   <a:srgbClr val="F7F8F5"/>
@@ -23861,6 +24091,7 @@
           </a:p>
           <a:p xmlns:a="http://schemas.openxmlformats.org/drawingml/2006/main">
             <a:pPr algn="l">
+              <a:buNone/>
               <a:defRPr sz="1350" b="1">
                 <a:solidFill>
                   <a:srgbClr val="F7F8F5"/>
@@ -23983,6 +24214,7 @@
           <a:lstStyle xmlns:a="http://schemas.openxmlformats.org/drawingml/2006/main"/>
           <a:p xmlns:a="http://schemas.openxmlformats.org/drawingml/2006/main">
             <a:pPr algn="ctr">
+              <a:buNone/>
               <a:defRPr sz="975" b="1">
                 <a:solidFill>
                   <a:srgbClr val="FF7487"/>
@@ -24039,6 +24271,7 @@
           <a:lstStyle xmlns:a="http://schemas.openxmlformats.org/drawingml/2006/main"/>
           <a:p xmlns:a="http://schemas.openxmlformats.org/drawingml/2006/main">
             <a:pPr algn="l">
+              <a:buNone/>
               <a:defRPr sz="1350" b="1">
                 <a:solidFill>
                   <a:srgbClr val="F7F8F5"/>
@@ -24062,6 +24295,7 @@
           </a:p>
           <a:p xmlns:a="http://schemas.openxmlformats.org/drawingml/2006/main">
             <a:pPr algn="l">
+              <a:buNone/>
               <a:defRPr sz="1350" b="1">
                 <a:solidFill>
                   <a:srgbClr val="F7F8F5"/>
@@ -24184,6 +24418,7 @@
           <a:lstStyle xmlns:a="http://schemas.openxmlformats.org/drawingml/2006/main"/>
           <a:p xmlns:a="http://schemas.openxmlformats.org/drawingml/2006/main">
             <a:pPr algn="l">
+              <a:buNone/>
               <a:defRPr sz="825" b="1">
                 <a:solidFill>
                   <a:srgbClr val="83F3C9"/>
@@ -24240,6 +24475,7 @@
           <a:lstStyle xmlns:a="http://schemas.openxmlformats.org/drawingml/2006/main"/>
           <a:p xmlns:a="http://schemas.openxmlformats.org/drawingml/2006/main">
             <a:pPr algn="l">
+              <a:buNone/>
               <a:defRPr sz="1200" b="0">
                 <a:solidFill>
                   <a:srgbClr val="C3D0D3"/>
@@ -24331,6 +24567,7 @@
           <a:lstStyle xmlns:a="http://schemas.openxmlformats.org/drawingml/2006/main"/>
           <a:p xmlns:a="http://schemas.openxmlformats.org/drawingml/2006/main">
             <a:pPr algn="l">
+              <a:buNone/>
               <a:defRPr sz="825" b="1">
                 <a:solidFill>
                   <a:srgbClr val="83F3C9"/>
@@ -24387,6 +24624,7 @@
           <a:lstStyle xmlns:a="http://schemas.openxmlformats.org/drawingml/2006/main"/>
           <a:p xmlns:a="http://schemas.openxmlformats.org/drawingml/2006/main">
             <a:pPr algn="l">
+              <a:buNone/>
               <a:defRPr sz="1200" b="0">
                 <a:solidFill>
                   <a:srgbClr val="C3D0D3"/>
@@ -24478,6 +24716,7 @@
           <a:lstStyle xmlns:a="http://schemas.openxmlformats.org/drawingml/2006/main"/>
           <a:p xmlns:a="http://schemas.openxmlformats.org/drawingml/2006/main">
             <a:pPr algn="l">
+              <a:buNone/>
               <a:defRPr sz="825" b="1">
                 <a:solidFill>
                   <a:srgbClr val="83F3C9"/>
@@ -24534,6 +24773,7 @@
           <a:lstStyle xmlns:a="http://schemas.openxmlformats.org/drawingml/2006/main"/>
           <a:p xmlns:a="http://schemas.openxmlformats.org/drawingml/2006/main">
             <a:pPr algn="l">
+              <a:buNone/>
               <a:defRPr sz="1200" b="0">
                 <a:solidFill>
                   <a:srgbClr val="C3D0D3"/>
@@ -24590,6 +24830,7 @@
           <a:lstStyle xmlns:a="http://schemas.openxmlformats.org/drawingml/2006/main"/>
           <a:p xmlns:a="http://schemas.openxmlformats.org/drawingml/2006/main">
             <a:pPr algn="l">
+              <a:buNone/>
               <a:defRPr sz="675" b="0">
                 <a:solidFill>
                   <a:srgbClr val="5F7078"/>
@@ -24646,6 +24887,7 @@
           <a:lstStyle xmlns:a="http://schemas.openxmlformats.org/drawingml/2006/main"/>
           <a:p xmlns:a="http://schemas.openxmlformats.org/drawingml/2006/main">
             <a:pPr algn="r">
+              <a:buNone/>
               <a:defRPr sz="825" b="1">
                 <a:solidFill>
                   <a:srgbClr val="5F7078"/>
@@ -24762,6 +25004,7 @@
           <a:lstStyle xmlns:a="http://schemas.openxmlformats.org/drawingml/2006/main"/>
           <a:p xmlns:a="http://schemas.openxmlformats.org/drawingml/2006/main">
             <a:pPr algn="l">
+              <a:buNone/>
               <a:defRPr sz="900" b="1">
                 <a:solidFill>
                   <a:srgbClr val="247B63"/>
@@ -24818,6 +25061,7 @@
           <a:lstStyle xmlns:a="http://schemas.openxmlformats.org/drawingml/2006/main"/>
           <a:p xmlns:a="http://schemas.openxmlformats.org/drawingml/2006/main">
             <a:pPr algn="l">
+              <a:buNone/>
               <a:defRPr sz="3300" b="1">
                 <a:solidFill>
                   <a:srgbClr val="0B1720"/>
@@ -24909,6 +25153,7 @@
           <a:lstStyle xmlns:a="http://schemas.openxmlformats.org/drawingml/2006/main"/>
           <a:p xmlns:a="http://schemas.openxmlformats.org/drawingml/2006/main">
             <a:pPr algn="ctr">
+              <a:buNone/>
               <a:defRPr sz="975" b="1">
                 <a:solidFill>
                   <a:srgbClr val="7AA7FF"/>
@@ -24965,6 +25210,7 @@
           <a:lstStyle xmlns:a="http://schemas.openxmlformats.org/drawingml/2006/main"/>
           <a:p xmlns:a="http://schemas.openxmlformats.org/drawingml/2006/main">
             <a:pPr algn="l">
+              <a:buNone/>
               <a:defRPr sz="1425" b="1">
                 <a:solidFill>
                   <a:srgbClr val="0B1720"/>
@@ -25021,6 +25267,7 @@
           <a:lstStyle xmlns:a="http://schemas.openxmlformats.org/drawingml/2006/main"/>
           <a:p xmlns:a="http://schemas.openxmlformats.org/drawingml/2006/main">
             <a:pPr algn="l">
+              <a:buNone/>
               <a:defRPr sz="1650" b="1">
                 <a:solidFill>
                   <a:srgbClr val="0B1720"/>
@@ -25174,6 +25421,7 @@
           <a:lstStyle xmlns:a="http://schemas.openxmlformats.org/drawingml/2006/main"/>
           <a:p xmlns:a="http://schemas.openxmlformats.org/drawingml/2006/main">
             <a:pPr algn="ctr">
+              <a:buNone/>
               <a:defRPr sz="975" b="1">
                 <a:solidFill>
                   <a:srgbClr val="51DFE3"/>
@@ -25230,6 +25478,7 @@
           <a:lstStyle xmlns:a="http://schemas.openxmlformats.org/drawingml/2006/main"/>
           <a:p xmlns:a="http://schemas.openxmlformats.org/drawingml/2006/main">
             <a:pPr algn="l">
+              <a:buNone/>
               <a:defRPr sz="1425" b="1">
                 <a:solidFill>
                   <a:srgbClr val="0B1720"/>
@@ -25286,6 +25535,7 @@
           <a:lstStyle xmlns:a="http://schemas.openxmlformats.org/drawingml/2006/main"/>
           <a:p xmlns:a="http://schemas.openxmlformats.org/drawingml/2006/main">
             <a:pPr algn="l">
+              <a:buNone/>
               <a:defRPr sz="1650" b="1">
                 <a:solidFill>
                   <a:srgbClr val="0B1720"/>
@@ -25439,6 +25689,7 @@
           <a:lstStyle xmlns:a="http://schemas.openxmlformats.org/drawingml/2006/main"/>
           <a:p xmlns:a="http://schemas.openxmlformats.org/drawingml/2006/main">
             <a:pPr algn="ctr">
+              <a:buNone/>
               <a:defRPr sz="975" b="1">
                 <a:solidFill>
                   <a:srgbClr val="F3C668"/>
@@ -25495,6 +25746,7 @@
           <a:lstStyle xmlns:a="http://schemas.openxmlformats.org/drawingml/2006/main"/>
           <a:p xmlns:a="http://schemas.openxmlformats.org/drawingml/2006/main">
             <a:pPr algn="l">
+              <a:buNone/>
               <a:defRPr sz="1425" b="1">
                 <a:solidFill>
                   <a:srgbClr val="0B1720"/>
@@ -25551,6 +25803,7 @@
           <a:lstStyle xmlns:a="http://schemas.openxmlformats.org/drawingml/2006/main"/>
           <a:p xmlns:a="http://schemas.openxmlformats.org/drawingml/2006/main">
             <a:pPr algn="l">
+              <a:buNone/>
               <a:defRPr sz="1650" b="1">
                 <a:solidFill>
                   <a:srgbClr val="0B1720"/>
@@ -25673,6 +25926,7 @@
           <a:lstStyle xmlns:a="http://schemas.openxmlformats.org/drawingml/2006/main"/>
           <a:p xmlns:a="http://schemas.openxmlformats.org/drawingml/2006/main">
             <a:pPr algn="ctr">
+              <a:buNone/>
               <a:defRPr sz="975" b="1">
                 <a:solidFill>
                   <a:srgbClr val="60D799"/>
@@ -25729,6 +25983,7 @@
           <a:lstStyle xmlns:a="http://schemas.openxmlformats.org/drawingml/2006/main"/>
           <a:p xmlns:a="http://schemas.openxmlformats.org/drawingml/2006/main">
             <a:pPr algn="l">
+              <a:buNone/>
               <a:defRPr sz="1425" b="1">
                 <a:solidFill>
                   <a:srgbClr val="0B1720"/>
@@ -25785,6 +26040,7 @@
           <a:lstStyle xmlns:a="http://schemas.openxmlformats.org/drawingml/2006/main"/>
           <a:p xmlns:a="http://schemas.openxmlformats.org/drawingml/2006/main">
             <a:pPr algn="l">
+              <a:buNone/>
               <a:defRPr sz="1650" b="1">
                 <a:solidFill>
                   <a:srgbClr val="0B1720"/>
@@ -25938,6 +26194,7 @@
           <a:lstStyle xmlns:a="http://schemas.openxmlformats.org/drawingml/2006/main"/>
           <a:p xmlns:a="http://schemas.openxmlformats.org/drawingml/2006/main">
             <a:pPr algn="ctr">
+              <a:buNone/>
               <a:defRPr sz="975" b="1">
                 <a:solidFill>
                   <a:srgbClr val="AA91FF"/>
@@ -25994,6 +26251,7 @@
           <a:lstStyle xmlns:a="http://schemas.openxmlformats.org/drawingml/2006/main"/>
           <a:p xmlns:a="http://schemas.openxmlformats.org/drawingml/2006/main">
             <a:pPr algn="l">
+              <a:buNone/>
               <a:defRPr sz="1425" b="1">
                 <a:solidFill>
                   <a:srgbClr val="0B1720"/>
@@ -26050,6 +26308,7 @@
           <a:lstStyle xmlns:a="http://schemas.openxmlformats.org/drawingml/2006/main"/>
           <a:p xmlns:a="http://schemas.openxmlformats.org/drawingml/2006/main">
             <a:pPr algn="l">
+              <a:buNone/>
               <a:defRPr sz="1650" b="1">
                 <a:solidFill>
                   <a:srgbClr val="0B1720"/>
@@ -26203,6 +26462,7 @@
           <a:lstStyle xmlns:a="http://schemas.openxmlformats.org/drawingml/2006/main"/>
           <a:p xmlns:a="http://schemas.openxmlformats.org/drawingml/2006/main">
             <a:pPr algn="ctr">
+              <a:buNone/>
               <a:defRPr sz="975" b="1">
                 <a:solidFill>
                   <a:srgbClr val="FF7487"/>
@@ -26259,6 +26519,7 @@
           <a:lstStyle xmlns:a="http://schemas.openxmlformats.org/drawingml/2006/main"/>
           <a:p xmlns:a="http://schemas.openxmlformats.org/drawingml/2006/main">
             <a:pPr algn="l">
+              <a:buNone/>
               <a:defRPr sz="1425" b="1">
                 <a:solidFill>
                   <a:srgbClr val="0B1720"/>
@@ -26315,6 +26576,7 @@
           <a:lstStyle xmlns:a="http://schemas.openxmlformats.org/drawingml/2006/main"/>
           <a:p xmlns:a="http://schemas.openxmlformats.org/drawingml/2006/main">
             <a:pPr algn="l">
+              <a:buNone/>
               <a:defRPr sz="1650" b="1">
                 <a:solidFill>
                   <a:srgbClr val="0B1720"/>
@@ -26402,6 +26664,7 @@
           <a:lstStyle xmlns:a="http://schemas.openxmlformats.org/drawingml/2006/main"/>
           <a:p xmlns:a="http://schemas.openxmlformats.org/drawingml/2006/main">
             <a:pPr algn="r">
+              <a:buNone/>
               <a:defRPr sz="825" b="1">
                 <a:solidFill>
                   <a:srgbClr val="5F7078"/>
@@ -27448,6 +27711,7 @@
           <a:lstStyle xmlns:a="http://schemas.openxmlformats.org/drawingml/2006/main"/>
           <a:p xmlns:a="http://schemas.openxmlformats.org/drawingml/2006/main">
             <a:pPr algn="l">
+              <a:buNone/>
               <a:defRPr sz="900" b="1">
                 <a:solidFill>
                   <a:srgbClr val="83F3C9"/>
@@ -27504,6 +27768,7 @@
           <a:lstStyle xmlns:a="http://schemas.openxmlformats.org/drawingml/2006/main"/>
           <a:p xmlns:a="http://schemas.openxmlformats.org/drawingml/2006/main">
             <a:pPr algn="l">
+              <a:buNone/>
               <a:defRPr sz="3300" b="1">
                 <a:solidFill>
                   <a:srgbClr val="F7F8F5"/>
@@ -27595,6 +27860,7 @@
           <a:lstStyle xmlns:a="http://schemas.openxmlformats.org/drawingml/2006/main"/>
           <a:p xmlns:a="http://schemas.openxmlformats.org/drawingml/2006/main">
             <a:pPr algn="ctr">
+              <a:buNone/>
               <a:defRPr sz="825" b="1">
                 <a:solidFill>
                   <a:srgbClr val="7AA7FF"/>
@@ -27651,6 +27917,7 @@
           <a:lstStyle xmlns:a="http://schemas.openxmlformats.org/drawingml/2006/main"/>
           <a:p xmlns:a="http://schemas.openxmlformats.org/drawingml/2006/main">
             <a:pPr algn="ctr">
+              <a:buNone/>
               <a:defRPr sz="1650" b="1">
                 <a:solidFill>
                   <a:srgbClr val="F7F8F5"/>
@@ -27707,6 +27974,7 @@
           <a:lstStyle xmlns:a="http://schemas.openxmlformats.org/drawingml/2006/main"/>
           <a:p xmlns:a="http://schemas.openxmlformats.org/drawingml/2006/main">
             <a:pPr algn="ctr">
+              <a:buNone/>
               <a:defRPr sz="975" b="0">
                 <a:solidFill>
                   <a:srgbClr val="9AA8AE"/>
@@ -27763,6 +28031,7 @@
           <a:lstStyle xmlns:a="http://schemas.openxmlformats.org/drawingml/2006/main"/>
           <a:p xmlns:a="http://schemas.openxmlformats.org/drawingml/2006/main">
             <a:pPr algn="ctr">
+              <a:buNone/>
               <a:defRPr sz="2250" b="0">
                 <a:solidFill>
                   <a:srgbClr val="9AA8AE"/>
@@ -27854,6 +28123,7 @@
           <a:lstStyle xmlns:a="http://schemas.openxmlformats.org/drawingml/2006/main"/>
           <a:p xmlns:a="http://schemas.openxmlformats.org/drawingml/2006/main">
             <a:pPr algn="ctr">
+              <a:buNone/>
               <a:defRPr sz="825" b="1">
                 <a:solidFill>
                   <a:srgbClr val="51DFE3"/>
@@ -27910,6 +28180,7 @@
           <a:lstStyle xmlns:a="http://schemas.openxmlformats.org/drawingml/2006/main"/>
           <a:p xmlns:a="http://schemas.openxmlformats.org/drawingml/2006/main">
             <a:pPr algn="ctr">
+              <a:buNone/>
               <a:defRPr sz="1650" b="1">
                 <a:solidFill>
                   <a:srgbClr val="F7F8F5"/>
@@ -27966,6 +28237,7 @@
           <a:lstStyle xmlns:a="http://schemas.openxmlformats.org/drawingml/2006/main"/>
           <a:p xmlns:a="http://schemas.openxmlformats.org/drawingml/2006/main">
             <a:pPr algn="ctr">
+              <a:buNone/>
               <a:defRPr sz="975" b="0">
                 <a:solidFill>
                   <a:srgbClr val="9AA8AE"/>
@@ -28022,6 +28294,7 @@
           <a:lstStyle xmlns:a="http://schemas.openxmlformats.org/drawingml/2006/main"/>
           <a:p xmlns:a="http://schemas.openxmlformats.org/drawingml/2006/main">
             <a:pPr algn="ctr">
+              <a:buNone/>
               <a:defRPr sz="2250" b="0">
                 <a:solidFill>
                   <a:srgbClr val="9AA8AE"/>
@@ -28113,6 +28386,7 @@
           <a:lstStyle xmlns:a="http://schemas.openxmlformats.org/drawingml/2006/main"/>
           <a:p xmlns:a="http://schemas.openxmlformats.org/drawingml/2006/main">
             <a:pPr algn="ctr">
+              <a:buNone/>
               <a:defRPr sz="825" b="1">
                 <a:solidFill>
                   <a:srgbClr val="F3C668"/>
@@ -28169,6 +28443,7 @@
           <a:lstStyle xmlns:a="http://schemas.openxmlformats.org/drawingml/2006/main"/>
           <a:p xmlns:a="http://schemas.openxmlformats.org/drawingml/2006/main">
             <a:pPr algn="ctr">
+              <a:buNone/>
               <a:defRPr sz="1650" b="1">
                 <a:solidFill>
                   <a:srgbClr val="F7F8F5"/>
@@ -28225,6 +28500,7 @@
           <a:lstStyle xmlns:a="http://schemas.openxmlformats.org/drawingml/2006/main"/>
           <a:p xmlns:a="http://schemas.openxmlformats.org/drawingml/2006/main">
             <a:pPr algn="ctr">
+              <a:buNone/>
               <a:defRPr sz="975" b="0">
                 <a:solidFill>
                   <a:srgbClr val="9AA8AE"/>
@@ -28281,6 +28557,7 @@
           <a:lstStyle xmlns:a="http://schemas.openxmlformats.org/drawingml/2006/main"/>
           <a:p xmlns:a="http://schemas.openxmlformats.org/drawingml/2006/main">
             <a:pPr algn="ctr">
+              <a:buNone/>
               <a:defRPr sz="2250" b="0">
                 <a:solidFill>
                   <a:srgbClr val="9AA8AE"/>
@@ -28372,6 +28649,7 @@
           <a:lstStyle xmlns:a="http://schemas.openxmlformats.org/drawingml/2006/main"/>
           <a:p xmlns:a="http://schemas.openxmlformats.org/drawingml/2006/main">
             <a:pPr algn="ctr">
+              <a:buNone/>
               <a:defRPr sz="825" b="1">
                 <a:solidFill>
                   <a:srgbClr val="247B63"/>
@@ -28428,6 +28706,7 @@
           <a:lstStyle xmlns:a="http://schemas.openxmlformats.org/drawingml/2006/main"/>
           <a:p xmlns:a="http://schemas.openxmlformats.org/drawingml/2006/main">
             <a:pPr algn="ctr">
+              <a:buNone/>
               <a:defRPr sz="1650" b="1">
                 <a:solidFill>
                   <a:srgbClr val="0B1720"/>
@@ -28484,6 +28763,7 @@
           <a:lstStyle xmlns:a="http://schemas.openxmlformats.org/drawingml/2006/main"/>
           <a:p xmlns:a="http://schemas.openxmlformats.org/drawingml/2006/main">
             <a:pPr algn="ctr">
+              <a:buNone/>
               <a:defRPr sz="975" b="0">
                 <a:solidFill>
                   <a:srgbClr val="247B63"/>
@@ -28540,6 +28820,7 @@
           <a:lstStyle xmlns:a="http://schemas.openxmlformats.org/drawingml/2006/main"/>
           <a:p xmlns:a="http://schemas.openxmlformats.org/drawingml/2006/main">
             <a:pPr algn="ctr">
+              <a:buNone/>
               <a:defRPr sz="2850" b="0">
                 <a:solidFill>
                   <a:srgbClr val="83F3C9"/>
@@ -28596,6 +28877,7 @@
           <a:lstStyle xmlns:a="http://schemas.openxmlformats.org/drawingml/2006/main"/>
           <a:p xmlns:a="http://schemas.openxmlformats.org/drawingml/2006/main">
             <a:pPr algn="ctr">
+              <a:buNone/>
               <a:defRPr sz="975" b="1">
                 <a:solidFill>
                   <a:srgbClr val="83F3C9"/>
@@ -28687,6 +28969,7 @@
           <a:lstStyle xmlns:a="http://schemas.openxmlformats.org/drawingml/2006/main"/>
           <a:p xmlns:a="http://schemas.openxmlformats.org/drawingml/2006/main">
             <a:pPr algn="ctr">
+              <a:buNone/>
               <a:defRPr sz="750" b="1">
                 <a:solidFill>
                   <a:srgbClr val="7AA7FF"/>
@@ -28778,6 +29061,7 @@
           <a:lstStyle xmlns:a="http://schemas.openxmlformats.org/drawingml/2006/main"/>
           <a:p xmlns:a="http://schemas.openxmlformats.org/drawingml/2006/main">
             <a:pPr algn="ctr">
+              <a:buNone/>
               <a:defRPr sz="750" b="1">
                 <a:solidFill>
                   <a:srgbClr val="51DFE3"/>
@@ -28869,6 +29153,7 @@
           <a:lstStyle xmlns:a="http://schemas.openxmlformats.org/drawingml/2006/main"/>
           <a:p xmlns:a="http://schemas.openxmlformats.org/drawingml/2006/main">
             <a:pPr algn="ctr">
+              <a:buNone/>
               <a:defRPr sz="750" b="1">
                 <a:solidFill>
                   <a:srgbClr val="F3C668"/>
@@ -28960,6 +29245,7 @@
           <a:lstStyle xmlns:a="http://schemas.openxmlformats.org/drawingml/2006/main"/>
           <a:p xmlns:a="http://schemas.openxmlformats.org/drawingml/2006/main">
             <a:pPr algn="ctr">
+              <a:buNone/>
               <a:defRPr sz="750" b="1">
                 <a:solidFill>
                   <a:srgbClr val="60D799"/>
@@ -29051,6 +29337,7 @@
           <a:lstStyle xmlns:a="http://schemas.openxmlformats.org/drawingml/2006/main"/>
           <a:p xmlns:a="http://schemas.openxmlformats.org/drawingml/2006/main">
             <a:pPr algn="ctr">
+              <a:buNone/>
               <a:defRPr sz="750" b="1">
                 <a:solidFill>
                   <a:srgbClr val="AA91FF"/>
@@ -29142,6 +29429,7 @@
           <a:lstStyle xmlns:a="http://schemas.openxmlformats.org/drawingml/2006/main"/>
           <a:p xmlns:a="http://schemas.openxmlformats.org/drawingml/2006/main">
             <a:pPr algn="ctr">
+              <a:buNone/>
               <a:defRPr sz="750" b="1">
                 <a:solidFill>
                   <a:srgbClr val="FF7487"/>
@@ -29198,6 +29486,7 @@
           <a:lstStyle xmlns:a="http://schemas.openxmlformats.org/drawingml/2006/main"/>
           <a:p xmlns:a="http://schemas.openxmlformats.org/drawingml/2006/main">
             <a:pPr algn="r">
+              <a:buNone/>
               <a:defRPr sz="825" b="1">
                 <a:solidFill>
                   <a:srgbClr val="5F7078"/>
@@ -29252,21 +29541,21 @@
       </p:grpSpPr>
       <p:pic>
         <p:nvPicPr>
-          <p:cNvPr id="3" name=""/>
+          <p:cNvPr id="4" name=""/>
           <p:cNvPicPr>
             <a:picLocks xmlns:a="http://schemas.openxmlformats.org/drawingml/2006/main" noChangeAspect="1"/>
           </p:cNvPicPr>
           <p:nvPr/>
         </p:nvPicPr>
         <p:blipFill>
-          <a:blip xmlns:r="http://schemas.openxmlformats.org/officeDocument/2006/relationships" xmlns:a="http://schemas.openxmlformats.org/drawingml/2006/main" r:embed="R08f84f0625504d0d"/>
+          <a:blip xmlns:r="http://schemas.openxmlformats.org/officeDocument/2006/relationships" xmlns:a="http://schemas.openxmlformats.org/drawingml/2006/main" r:embed="Rcc0a76105ab54836"/>
           <a:srcRect xmlns:a="http://schemas.openxmlformats.org/drawingml/2006/main" l="0" t="0" r="0" b="0"/>
           <a:stretch xmlns:a="http://schemas.openxmlformats.org/drawingml/2006/main">
             <a:fillRect l="0" t="0" r="0" b="0"/>
           </a:stretch>
         </p:blipFill>
         <p:spPr>
-          <a:xfrm xmlns:a="http://schemas.openxmlformats.org/drawingml/2006/main">
+          <a:xfrm xmlns:a="http://schemas.openxmlformats.org/drawingml/2006/main" flipH="0" flipV="0">
             <a:off x="0" y="0"/>
             <a:ext cx="12192000" cy="6858000"/>
           </a:xfrm>
@@ -29308,6 +29597,7 @@
           <a:lstStyle xmlns:a="http://schemas.openxmlformats.org/drawingml/2006/main"/>
           <a:p xmlns:a="http://schemas.openxmlformats.org/drawingml/2006/main">
             <a:pPr algn="r">
+              <a:buNone/>
               <a:defRPr sz="750" b="1">
                 <a:solidFill>
                   <a:srgbClr val="6F858D"/>
@@ -30354,6 +30644,7 @@
           <a:lstStyle xmlns:a="http://schemas.openxmlformats.org/drawingml/2006/main"/>
           <a:p xmlns:a="http://schemas.openxmlformats.org/drawingml/2006/main">
             <a:pPr algn="l">
+              <a:buNone/>
               <a:defRPr sz="900" b="1">
                 <a:solidFill>
                   <a:srgbClr val="83F3C9"/>
@@ -30410,6 +30701,7 @@
           <a:lstStyle xmlns:a="http://schemas.openxmlformats.org/drawingml/2006/main"/>
           <a:p xmlns:a="http://schemas.openxmlformats.org/drawingml/2006/main">
             <a:pPr algn="l">
+              <a:buNone/>
               <a:defRPr sz="3300" b="1">
                 <a:solidFill>
                   <a:srgbClr val="F7F8F5"/>
@@ -30466,6 +30758,7 @@
           <a:lstStyle xmlns:a="http://schemas.openxmlformats.org/drawingml/2006/main"/>
           <a:p xmlns:a="http://schemas.openxmlformats.org/drawingml/2006/main">
             <a:pPr algn="l">
+              <a:buNone/>
               <a:defRPr sz="1500" b="0">
                 <a:solidFill>
                   <a:srgbClr val="9AA8AE"/>
@@ -30590,6 +30883,7 @@
           <a:lstStyle xmlns:a="http://schemas.openxmlformats.org/drawingml/2006/main"/>
           <a:p xmlns:a="http://schemas.openxmlformats.org/drawingml/2006/main">
             <a:pPr algn="l">
+              <a:buNone/>
               <a:defRPr sz="825" b="1">
                 <a:solidFill>
                   <a:srgbClr val="FF7487"/>
@@ -30646,6 +30940,7 @@
           <a:lstStyle xmlns:a="http://schemas.openxmlformats.org/drawingml/2006/main"/>
           <a:p xmlns:a="http://schemas.openxmlformats.org/drawingml/2006/main">
             <a:pPr algn="l">
+              <a:buNone/>
               <a:defRPr sz="1500" b="1">
                 <a:solidFill>
                   <a:srgbClr val="F7F8F5"/>
@@ -30702,6 +30997,7 @@
           <a:lstStyle xmlns:a="http://schemas.openxmlformats.org/drawingml/2006/main"/>
           <a:p xmlns:a="http://schemas.openxmlformats.org/drawingml/2006/main">
             <a:pPr algn="r">
+              <a:buNone/>
               <a:defRPr sz="900" b="0">
                 <a:solidFill>
                   <a:srgbClr val="9AA8AE"/>
@@ -30826,6 +31122,7 @@
           <a:lstStyle xmlns:a="http://schemas.openxmlformats.org/drawingml/2006/main"/>
           <a:p xmlns:a="http://schemas.openxmlformats.org/drawingml/2006/main">
             <a:pPr algn="l">
+              <a:buNone/>
               <a:defRPr sz="825" b="1">
                 <a:solidFill>
                   <a:srgbClr val="F3C668"/>
@@ -30882,6 +31179,7 @@
           <a:lstStyle xmlns:a="http://schemas.openxmlformats.org/drawingml/2006/main"/>
           <a:p xmlns:a="http://schemas.openxmlformats.org/drawingml/2006/main">
             <a:pPr algn="l">
+              <a:buNone/>
               <a:defRPr sz="1500" b="1">
                 <a:solidFill>
                   <a:srgbClr val="F7F8F5"/>
@@ -30938,6 +31236,7 @@
           <a:lstStyle xmlns:a="http://schemas.openxmlformats.org/drawingml/2006/main"/>
           <a:p xmlns:a="http://schemas.openxmlformats.org/drawingml/2006/main">
             <a:pPr algn="r">
+              <a:buNone/>
               <a:defRPr sz="900" b="0">
                 <a:solidFill>
                   <a:srgbClr val="9AA8AE"/>
@@ -31062,6 +31361,7 @@
           <a:lstStyle xmlns:a="http://schemas.openxmlformats.org/drawingml/2006/main"/>
           <a:p xmlns:a="http://schemas.openxmlformats.org/drawingml/2006/main">
             <a:pPr algn="l">
+              <a:buNone/>
               <a:defRPr sz="825" b="1">
                 <a:solidFill>
                   <a:srgbClr val="FF7487"/>
@@ -31118,6 +31418,7 @@
           <a:lstStyle xmlns:a="http://schemas.openxmlformats.org/drawingml/2006/main"/>
           <a:p xmlns:a="http://schemas.openxmlformats.org/drawingml/2006/main">
             <a:pPr algn="l">
+              <a:buNone/>
               <a:defRPr sz="1500" b="1">
                 <a:solidFill>
                   <a:srgbClr val="F7F8F5"/>
@@ -31174,6 +31475,7 @@
           <a:lstStyle xmlns:a="http://schemas.openxmlformats.org/drawingml/2006/main"/>
           <a:p xmlns:a="http://schemas.openxmlformats.org/drawingml/2006/main">
             <a:pPr algn="r">
+              <a:buNone/>
               <a:defRPr sz="900" b="0">
                 <a:solidFill>
                   <a:srgbClr val="9AA8AE"/>
@@ -31298,6 +31600,7 @@
           <a:lstStyle xmlns:a="http://schemas.openxmlformats.org/drawingml/2006/main"/>
           <a:p xmlns:a="http://schemas.openxmlformats.org/drawingml/2006/main">
             <a:pPr algn="l">
+              <a:buNone/>
               <a:defRPr sz="825" b="1">
                 <a:solidFill>
                   <a:srgbClr val="F3C668"/>
@@ -31354,6 +31657,7 @@
           <a:lstStyle xmlns:a="http://schemas.openxmlformats.org/drawingml/2006/main"/>
           <a:p xmlns:a="http://schemas.openxmlformats.org/drawingml/2006/main">
             <a:pPr algn="l">
+              <a:buNone/>
               <a:defRPr sz="1500" b="1">
                 <a:solidFill>
                   <a:srgbClr val="F7F8F5"/>
@@ -31410,6 +31714,7 @@
           <a:lstStyle xmlns:a="http://schemas.openxmlformats.org/drawingml/2006/main"/>
           <a:p xmlns:a="http://schemas.openxmlformats.org/drawingml/2006/main">
             <a:pPr algn="r">
+              <a:buNone/>
               <a:defRPr sz="900" b="0">
                 <a:solidFill>
                   <a:srgbClr val="9AA8AE"/>
@@ -31501,6 +31806,7 @@
           <a:lstStyle xmlns:a="http://schemas.openxmlformats.org/drawingml/2006/main"/>
           <a:p xmlns:a="http://schemas.openxmlformats.org/drawingml/2006/main">
             <a:pPr algn="ctr">
+              <a:buNone/>
               <a:defRPr sz="750" b="1">
                 <a:solidFill>
                   <a:srgbClr val="83F3C9"/>
@@ -31557,6 +31863,7 @@
           <a:lstStyle xmlns:a="http://schemas.openxmlformats.org/drawingml/2006/main"/>
           <a:p xmlns:a="http://schemas.openxmlformats.org/drawingml/2006/main">
             <a:pPr algn="r">
+              <a:buNone/>
               <a:defRPr sz="825" b="0">
                 <a:solidFill>
                   <a:srgbClr val="9AA8AE"/>
@@ -31613,6 +31920,7 @@
           <a:lstStyle xmlns:a="http://schemas.openxmlformats.org/drawingml/2006/main"/>
           <a:p xmlns:a="http://schemas.openxmlformats.org/drawingml/2006/main">
             <a:pPr algn="r">
+              <a:buNone/>
               <a:defRPr sz="825" b="1">
                 <a:solidFill>
                   <a:srgbClr val="5F7078"/>
